--- a/Slide_OWASP_Top3_Nhom_WNC_G01.pptx
+++ b/Slide_OWASP_Top3_Nhom_WNC_G01.pptx
@@ -10,6 +10,17 @@
     <p:sldId id="258" r:id="rId9"/>
     <p:sldId id="259" r:id="rId10"/>
     <p:sldId id="260" r:id="rId11"/>
+    <p:sldId id="261" r:id="rId12"/>
+    <p:sldId id="262" r:id="rId13"/>
+    <p:sldId id="263" r:id="rId14"/>
+    <p:sldId id="264" r:id="rId15"/>
+    <p:sldId id="265" r:id="rId16"/>
+    <p:sldId id="266" r:id="rId17"/>
+    <p:sldId id="267" r:id="rId18"/>
+    <p:sldId id="268" r:id="rId19"/>
+    <p:sldId id="269" r:id="rId20"/>
+    <p:sldId id="270" r:id="rId21"/>
+    <p:sldId id="271" r:id="rId22"/>
   </p:sldIdLst>
   <p:sldSz cx="12191695" cy="6858000" type="screen4x3"/>
   <p:notesSz cx="6858000" cy="9144000"/>
@@ -3143,7 +3154,7 @@
         </p:nvSpPr>
         <p:spPr>
           <a:xfrm>
-            <a:off x="914400" y="685800"/>
+            <a:off x="914400" y="640080"/>
             <a:ext cx="5303520" cy="384048"/>
           </a:xfrm>
           <a:prstGeom prst="roundRect">
@@ -3197,7 +3208,7 @@
         </p:nvSpPr>
         <p:spPr>
           <a:xfrm>
-            <a:off x="914400" y="1188720"/>
+            <a:off x="914400" y="1143000"/>
             <a:ext cx="10362895" cy="2926080"/>
           </a:xfrm>
           <a:prstGeom prst="rect">
@@ -3244,7 +3255,7 @@
           <a:p>
             <a:pPr>
               <a:spcBef>
-                <a:spcPts val="1000"/>
+                <a:spcPts val="800"/>
               </a:spcBef>
               <a:defRPr sz="1400">
                 <a:solidFill>
@@ -3485,6 +3496,2735 @@
             <a:br/>
             <a:r>
               <a:t>Thành viên • Demo Form ẩn giả mạo</a:t>
+            </a:r>
+          </a:p>
+        </p:txBody>
+      </p:sp>
+    </p:spTree>
+  </p:cSld>
+  <p:clrMapOvr>
+    <a:masterClrMapping/>
+  </p:clrMapOvr>
+</p:sld>
+</file>
+
+<file path=ppt/slides/slide10.xml><?xml version="1.0" encoding="utf-8"?>
+<p:sld xmlns:a="http://schemas.openxmlformats.org/drawingml/2006/main" xmlns:p="http://schemas.openxmlformats.org/presentationml/2006/main" xmlns:r="http://schemas.openxmlformats.org/officeDocument/2006/relationships">
+  <p:cSld>
+    <p:spTree>
+      <p:nvGrpSpPr>
+        <p:cNvPr id="1" name=""/>
+        <p:cNvGrpSpPr/>
+        <p:nvPr/>
+      </p:nvGrpSpPr>
+      <p:grpSpPr/>
+      <p:sp>
+        <p:nvSpPr>
+          <p:cNvPr id="2" name="Rectangle 1"/>
+          <p:cNvSpPr/>
+          <p:nvPr/>
+        </p:nvSpPr>
+        <p:spPr>
+          <a:xfrm>
+            <a:off x="0" y="0"/>
+            <a:ext cx="12191695" cy="73152"/>
+          </a:xfrm>
+          <a:prstGeom prst="rect">
+            <a:avLst/>
+          </a:prstGeom>
+          <a:solidFill>
+            <a:srgbClr val="1D4ED8"/>
+          </a:solidFill>
+          <a:ln>
+            <a:noFill/>
+          </a:ln>
+        </p:spPr>
+        <p:style>
+          <a:lnRef idx="1">
+            <a:schemeClr val="accent1"/>
+          </a:lnRef>
+          <a:fillRef idx="3">
+            <a:schemeClr val="accent1"/>
+          </a:fillRef>
+          <a:effectRef idx="2">
+            <a:schemeClr val="accent1"/>
+          </a:effectRef>
+          <a:fontRef idx="minor">
+            <a:schemeClr val="lt1"/>
+          </a:fontRef>
+        </p:style>
+        <p:txBody>
+          <a:bodyPr rtlCol="0" anchor="ctr"/>
+          <a:lstStyle/>
+          <a:p>
+            <a:pPr algn="ctr"/>
+          </a:p>
+        </p:txBody>
+      </p:sp>
+      <p:sp>
+        <p:nvSpPr>
+          <p:cNvPr id="3" name="Rounded Rectangle 2"/>
+          <p:cNvSpPr/>
+          <p:nvPr/>
+        </p:nvSpPr>
+        <p:spPr>
+          <a:xfrm>
+            <a:off x="731520" y="292608"/>
+            <a:ext cx="4389120" cy="347472"/>
+          </a:xfrm>
+          <a:prstGeom prst="roundRect">
+            <a:avLst/>
+          </a:prstGeom>
+          <a:solidFill>
+            <a:srgbClr val="EFF6FF"/>
+          </a:solidFill>
+          <a:ln>
+            <a:solidFill>
+              <a:srgbClr val="BFDBFE"/>
+            </a:solidFill>
+          </a:ln>
+        </p:spPr>
+        <p:style>
+          <a:lnRef idx="1">
+            <a:schemeClr val="accent1"/>
+          </a:lnRef>
+          <a:fillRef idx="3">
+            <a:schemeClr val="accent1"/>
+          </a:fillRef>
+          <a:effectRef idx="2">
+            <a:schemeClr val="accent1"/>
+          </a:effectRef>
+          <a:fontRef idx="minor">
+            <a:schemeClr val="lt1"/>
+          </a:fontRef>
+        </p:style>
+        <p:txBody>
+          <a:bodyPr rtlCol="0" anchor="ctr" wrap="none"/>
+          <a:lstStyle/>
+          <a:p>
+            <a:pPr algn="ctr">
+              <a:defRPr sz="1000" b="1">
+                <a:solidFill>
+                  <a:srgbClr val="1D4ED8"/>
+                </a:solidFill>
+              </a:defRPr>
+            </a:pPr>
+            <a:r>
+              <a:t>CHỦ ĐỀ 2 • NGUYỄN THANH BÌNH (23A1001D0041)</a:t>
+            </a:r>
+          </a:p>
+        </p:txBody>
+      </p:sp>
+      <p:sp>
+        <p:nvSpPr>
+          <p:cNvPr id="4" name="TextBox 3"/>
+          <p:cNvSpPr txBox="1"/>
+          <p:nvPr/>
+        </p:nvSpPr>
+        <p:spPr>
+          <a:xfrm>
+            <a:off x="731520" y="658368"/>
+            <a:ext cx="10698480" cy="548640"/>
+          </a:xfrm>
+          <a:prstGeom prst="rect">
+            <a:avLst/>
+          </a:prstGeom>
+          <a:noFill/>
+        </p:spPr>
+        <p:txBody>
+          <a:bodyPr wrap="square">
+            <a:spAutoFit/>
+          </a:bodyPr>
+          <a:lstStyle/>
+          <a:p>
+            <a:pPr>
+              <a:defRPr sz="2000" b="1">
+                <a:solidFill>
+                  <a:srgbClr val="0F172A"/>
+                </a:solidFill>
+              </a:defRPr>
+            </a:pPr>
+            <a:r>
+              <a:t>2.4. Stored XSS: Cơ Chế Phòng Thủ Chuẩn Trong ASP.NET Core</a:t>
+            </a:r>
+          </a:p>
+        </p:txBody>
+      </p:sp>
+      <p:sp>
+        <p:nvSpPr>
+          <p:cNvPr id="5" name="TextBox 4"/>
+          <p:cNvSpPr txBox="1"/>
+          <p:nvPr/>
+        </p:nvSpPr>
+        <p:spPr>
+          <a:xfrm>
+            <a:off x="731520" y="6492240"/>
+            <a:ext cx="10698480" cy="274320"/>
+          </a:xfrm>
+          <a:prstGeom prst="rect">
+            <a:avLst/>
+          </a:prstGeom>
+          <a:noFill/>
+        </p:spPr>
+        <p:txBody>
+          <a:bodyPr wrap="none">
+            <a:spAutoFit/>
+          </a:bodyPr>
+          <a:lstStyle/>
+          <a:p>
+            <a:pPr>
+              <a:defRPr sz="950">
+                <a:solidFill>
+                  <a:srgbClr val="64748B"/>
+                </a:solidFill>
+              </a:defRPr>
+            </a:pPr>
+            <a:r>
+              <a:t>Nhóm WNC.G01 (Học - Bình - Cường) • Khoa CNTT - Đại học Mở Hà Nội • GVHD: ThS. Lê Hữu Dũng</a:t>
+            </a:r>
+          </a:p>
+        </p:txBody>
+      </p:sp>
+      <p:sp>
+        <p:nvSpPr>
+          <p:cNvPr id="6" name="Rounded Rectangle 5"/>
+          <p:cNvSpPr/>
+          <p:nvPr/>
+        </p:nvSpPr>
+        <p:spPr>
+          <a:xfrm>
+            <a:off x="731520" y="1280160"/>
+            <a:ext cx="5166360" cy="4846320"/>
+          </a:xfrm>
+          <a:prstGeom prst="roundRect">
+            <a:avLst/>
+          </a:prstGeom>
+          <a:solidFill>
+            <a:srgbClr val="ECFDF5"/>
+          </a:solidFill>
+          <a:ln>
+            <a:solidFill>
+              <a:srgbClr val="A7F3D0"/>
+            </a:solidFill>
+          </a:ln>
+        </p:spPr>
+        <p:style>
+          <a:lnRef idx="1">
+            <a:schemeClr val="accent1"/>
+          </a:lnRef>
+          <a:fillRef idx="3">
+            <a:schemeClr val="accent1"/>
+          </a:fillRef>
+          <a:effectRef idx="2">
+            <a:schemeClr val="accent1"/>
+          </a:effectRef>
+          <a:fontRef idx="minor">
+            <a:schemeClr val="lt1"/>
+          </a:fontRef>
+        </p:style>
+        <p:txBody>
+          <a:bodyPr rtlCol="0" anchor="ctr" wrap="square"/>
+          <a:lstStyle/>
+          <a:p>
+            <a:pPr algn="ctr">
+              <a:defRPr sz="1500" b="1">
+                <a:solidFill>
+                  <a:srgbClr val="047857"/>
+                </a:solidFill>
+              </a:defRPr>
+            </a:pPr>
+            <a:r>
+              <a:t>Cơ Chế HTML Encoding Tự Động Của Razor View</a:t>
+            </a:r>
+          </a:p>
+          <a:p>
+            <a:pPr>
+              <a:spcBef>
+                <a:spcPts val="800"/>
+              </a:spcBef>
+              <a:defRPr sz="1050">
+                <a:solidFill>
+                  <a:srgbClr val="065F46"/>
+                </a:solidFill>
+                <a:latin typeface="Courier New"/>
+              </a:defRPr>
+            </a:pPr>
+            <a:r>
+              <a:t>// PHÒNG THỦ MẶC ĐỊNH (KHÔNG DÙNG HTML.RAW):</a:t>
+            </a:r>
+            <a:br/>
+            <a:r>
+              <a:t>&lt;p&gt;@comment.Content&lt;/p&gt;</a:t>
+            </a:r>
+            <a:br/>
+            <a:br/>
+            <a:r>
+              <a:t>// HOẶC MÃ HÓA TẠI CONTROLLER TRƯỚC KHI LƯU:</a:t>
+            </a:r>
+            <a:br/>
+            <a:r>
+              <a:t>string encoded = HtmlEncoder.Default.Encode(content);</a:t>
+            </a:r>
+            <a:br/>
+            <a:r>
+              <a:t>comment.Content = encoded;</a:t>
+            </a:r>
+          </a:p>
+          <a:p>
+            <a:pPr>
+              <a:spcBef>
+                <a:spcPts val="1200"/>
+              </a:spcBef>
+              <a:defRPr sz="1200">
+                <a:solidFill>
+                  <a:srgbClr val="0F172A"/>
+                </a:solidFill>
+              </a:defRPr>
+            </a:pPr>
+            <a:r>
+              <a:t>Cơ chế biến đổi ký tự nguy hiểm:</a:t>
+            </a:r>
+            <a:br/>
+            <a:r>
+              <a:t>• Ký tự '&lt;' biến thành &amp;lt;</a:t>
+            </a:r>
+            <a:br/>
+            <a:r>
+              <a:t>• Ký tự '&gt;' biến thành &amp;gt;</a:t>
+            </a:r>
+            <a:br/>
+            <a:r>
+              <a:t>• Dấu ngoặc kép '"' biến thành &amp;quot;</a:t>
+            </a:r>
+            <a:br/>
+            <a:r>
+              <a:t>Trình duyệt thông dịch đây là ký tự văn bản thuần túy để hiển thị, tuyệt đối không coi là thẻ thực thi mã JavaScript.</a:t>
+            </a:r>
+          </a:p>
+        </p:txBody>
+      </p:sp>
+      <p:sp>
+        <p:nvSpPr>
+          <p:cNvPr id="7" name="Rounded Rectangle 6"/>
+          <p:cNvSpPr/>
+          <p:nvPr/>
+        </p:nvSpPr>
+        <p:spPr>
+          <a:xfrm>
+            <a:off x="6263640" y="1280160"/>
+            <a:ext cx="5166360" cy="4846320"/>
+          </a:xfrm>
+          <a:prstGeom prst="roundRect">
+            <a:avLst/>
+          </a:prstGeom>
+          <a:solidFill>
+            <a:srgbClr val="F8FAFC"/>
+          </a:solidFill>
+          <a:ln>
+            <a:solidFill>
+              <a:srgbClr val="E2E8F0"/>
+            </a:solidFill>
+          </a:ln>
+        </p:spPr>
+        <p:style>
+          <a:lnRef idx="1">
+            <a:schemeClr val="accent1"/>
+          </a:lnRef>
+          <a:fillRef idx="3">
+            <a:schemeClr val="accent1"/>
+          </a:fillRef>
+          <a:effectRef idx="2">
+            <a:schemeClr val="accent1"/>
+          </a:effectRef>
+          <a:fontRef idx="minor">
+            <a:schemeClr val="lt1"/>
+          </a:fontRef>
+        </p:style>
+        <p:txBody>
+          <a:bodyPr rtlCol="0" anchor="ctr" wrap="square"/>
+          <a:lstStyle/>
+          <a:p>
+            <a:pPr algn="ctr">
+              <a:defRPr sz="1500" b="1">
+                <a:solidFill>
+                  <a:srgbClr val="1D4ED8"/>
+                </a:solidFill>
+              </a:defRPr>
+            </a:pPr>
+            <a:r>
+              <a:t>Bộ Giải Pháp Phòng Vệ Chiều Sâu (Defense-in-Depth)</a:t>
+            </a:r>
+          </a:p>
+          <a:p>
+            <a:pPr>
+              <a:spcBef>
+                <a:spcPts val="1000"/>
+              </a:spcBef>
+              <a:defRPr sz="1200">
+                <a:solidFill>
+                  <a:srgbClr val="334155"/>
+                </a:solidFill>
+              </a:defRPr>
+            </a:pPr>
+            <a:r>
+              <a:t>1. Bật cờ HttpOnly = true cho Cookie phiên:</a:t>
+            </a:r>
+            <a:br/>
+            <a:r>
+              <a:t>Ngăn chặn tuyệt đối mọi đoạn mã JavaScript (kể cả khi đã inject thành công) truy cập vào document.cookie.</a:t>
+            </a:r>
+            <a:br/>
+            <a:br/>
+            <a:r>
+              <a:t>2. Cấu hình Content Security Policy (CSP Header):</a:t>
+            </a:r>
+            <a:br/>
+            <a:r>
+              <a:t>Thiết lập HTTP Header chỉ cho phép thực thi script từ nguồn đáng tin cậy, chặn đứng inline script (&lt;script&gt;...&lt;/script&gt;).</a:t>
+            </a:r>
+            <a:br/>
+            <a:br/>
+            <a:r>
+              <a:t>3. Làm sạch dữ liệu đầu vào (Input Sanitization):</a:t>
+            </a:r>
+            <a:br/>
+            <a:r>
+              <a:t>Sử dụng thư viện HtmlSanitizer để loại bỏ triệt để các thẻ nguy hiểm (&lt;script&gt;, &lt;iframe&gt;, &lt;object&gt;, thuộc tính onerror/onload).</a:t>
+            </a:r>
+          </a:p>
+        </p:txBody>
+      </p:sp>
+    </p:spTree>
+  </p:cSld>
+  <p:clrMapOvr>
+    <a:masterClrMapping/>
+  </p:clrMapOvr>
+</p:sld>
+</file>
+
+<file path=ppt/slides/slide11.xml><?xml version="1.0" encoding="utf-8"?>
+<p:sld xmlns:a="http://schemas.openxmlformats.org/drawingml/2006/main" xmlns:p="http://schemas.openxmlformats.org/presentationml/2006/main" xmlns:r="http://schemas.openxmlformats.org/officeDocument/2006/relationships">
+  <p:cSld>
+    <p:spTree>
+      <p:nvGrpSpPr>
+        <p:cNvPr id="1" name=""/>
+        <p:cNvGrpSpPr/>
+        <p:nvPr/>
+      </p:nvGrpSpPr>
+      <p:grpSpPr/>
+      <p:sp>
+        <p:nvSpPr>
+          <p:cNvPr id="2" name="Rectangle 1"/>
+          <p:cNvSpPr/>
+          <p:nvPr/>
+        </p:nvSpPr>
+        <p:spPr>
+          <a:xfrm>
+            <a:off x="0" y="0"/>
+            <a:ext cx="12191695" cy="73152"/>
+          </a:xfrm>
+          <a:prstGeom prst="rect">
+            <a:avLst/>
+          </a:prstGeom>
+          <a:solidFill>
+            <a:srgbClr val="1D4ED8"/>
+          </a:solidFill>
+          <a:ln>
+            <a:noFill/>
+          </a:ln>
+        </p:spPr>
+        <p:style>
+          <a:lnRef idx="1">
+            <a:schemeClr val="accent1"/>
+          </a:lnRef>
+          <a:fillRef idx="3">
+            <a:schemeClr val="accent1"/>
+          </a:fillRef>
+          <a:effectRef idx="2">
+            <a:schemeClr val="accent1"/>
+          </a:effectRef>
+          <a:fontRef idx="minor">
+            <a:schemeClr val="lt1"/>
+          </a:fontRef>
+        </p:style>
+        <p:txBody>
+          <a:bodyPr rtlCol="0" anchor="ctr"/>
+          <a:lstStyle/>
+          <a:p>
+            <a:pPr algn="ctr"/>
+          </a:p>
+        </p:txBody>
+      </p:sp>
+      <p:sp>
+        <p:nvSpPr>
+          <p:cNvPr id="3" name="Rounded Rectangle 2"/>
+          <p:cNvSpPr/>
+          <p:nvPr/>
+        </p:nvSpPr>
+        <p:spPr>
+          <a:xfrm>
+            <a:off x="731520" y="292608"/>
+            <a:ext cx="4389120" cy="347472"/>
+          </a:xfrm>
+          <a:prstGeom prst="roundRect">
+            <a:avLst/>
+          </a:prstGeom>
+          <a:solidFill>
+            <a:srgbClr val="EFF6FF"/>
+          </a:solidFill>
+          <a:ln>
+            <a:solidFill>
+              <a:srgbClr val="BFDBFE"/>
+            </a:solidFill>
+          </a:ln>
+        </p:spPr>
+        <p:style>
+          <a:lnRef idx="1">
+            <a:schemeClr val="accent1"/>
+          </a:lnRef>
+          <a:fillRef idx="3">
+            <a:schemeClr val="accent1"/>
+          </a:fillRef>
+          <a:effectRef idx="2">
+            <a:schemeClr val="accent1"/>
+          </a:effectRef>
+          <a:fontRef idx="minor">
+            <a:schemeClr val="lt1"/>
+          </a:fontRef>
+        </p:style>
+        <p:txBody>
+          <a:bodyPr rtlCol="0" anchor="ctr" wrap="none"/>
+          <a:lstStyle/>
+          <a:p>
+            <a:pPr algn="ctr">
+              <a:defRPr sz="1000" b="1">
+                <a:solidFill>
+                  <a:srgbClr val="1D4ED8"/>
+                </a:solidFill>
+              </a:defRPr>
+            </a:pPr>
+            <a:r>
+              <a:t>CHỦ ĐỀ 3 • NGUYỄN MINH CƯỜNG (23A1001D0058)</a:t>
+            </a:r>
+          </a:p>
+        </p:txBody>
+      </p:sp>
+      <p:sp>
+        <p:nvSpPr>
+          <p:cNvPr id="4" name="TextBox 3"/>
+          <p:cNvSpPr txBox="1"/>
+          <p:nvPr/>
+        </p:nvSpPr>
+        <p:spPr>
+          <a:xfrm>
+            <a:off x="731520" y="658368"/>
+            <a:ext cx="10698480" cy="548640"/>
+          </a:xfrm>
+          <a:prstGeom prst="rect">
+            <a:avLst/>
+          </a:prstGeom>
+          <a:noFill/>
+        </p:spPr>
+        <p:txBody>
+          <a:bodyPr wrap="square">
+            <a:spAutoFit/>
+          </a:bodyPr>
+          <a:lstStyle/>
+          <a:p>
+            <a:pPr>
+              <a:defRPr sz="2000" b="1">
+                <a:solidFill>
+                  <a:srgbClr val="0F172A"/>
+                </a:solidFill>
+              </a:defRPr>
+            </a:pPr>
+            <a:r>
+              <a:t>3.1. CSRF Attack: Bản Chất Kỹ Thuật &amp; Cơ Chế Giả Mạo</a:t>
+            </a:r>
+          </a:p>
+        </p:txBody>
+      </p:sp>
+      <p:sp>
+        <p:nvSpPr>
+          <p:cNvPr id="5" name="TextBox 4"/>
+          <p:cNvSpPr txBox="1"/>
+          <p:nvPr/>
+        </p:nvSpPr>
+        <p:spPr>
+          <a:xfrm>
+            <a:off x="731520" y="6492240"/>
+            <a:ext cx="10698480" cy="274320"/>
+          </a:xfrm>
+          <a:prstGeom prst="rect">
+            <a:avLst/>
+          </a:prstGeom>
+          <a:noFill/>
+        </p:spPr>
+        <p:txBody>
+          <a:bodyPr wrap="none">
+            <a:spAutoFit/>
+          </a:bodyPr>
+          <a:lstStyle/>
+          <a:p>
+            <a:pPr>
+              <a:defRPr sz="950">
+                <a:solidFill>
+                  <a:srgbClr val="64748B"/>
+                </a:solidFill>
+              </a:defRPr>
+            </a:pPr>
+            <a:r>
+              <a:t>Nhóm WNC.G01 (Học - Bình - Cường) • Khoa CNTT - Đại học Mở Hà Nội • GVHD: ThS. Lê Hữu Dũng</a:t>
+            </a:r>
+          </a:p>
+        </p:txBody>
+      </p:sp>
+      <p:sp>
+        <p:nvSpPr>
+          <p:cNvPr id="6" name="Rounded Rectangle 5"/>
+          <p:cNvSpPr/>
+          <p:nvPr/>
+        </p:nvSpPr>
+        <p:spPr>
+          <a:xfrm>
+            <a:off x="731520" y="1280160"/>
+            <a:ext cx="5166360" cy="4846320"/>
+          </a:xfrm>
+          <a:prstGeom prst="roundRect">
+            <a:avLst/>
+          </a:prstGeom>
+          <a:solidFill>
+            <a:srgbClr val="F8FAFC"/>
+          </a:solidFill>
+          <a:ln>
+            <a:solidFill>
+              <a:srgbClr val="E2E8F0"/>
+            </a:solidFill>
+          </a:ln>
+        </p:spPr>
+        <p:style>
+          <a:lnRef idx="1">
+            <a:schemeClr val="accent1"/>
+          </a:lnRef>
+          <a:fillRef idx="3">
+            <a:schemeClr val="accent1"/>
+          </a:fillRef>
+          <a:effectRef idx="2">
+            <a:schemeClr val="accent1"/>
+          </a:effectRef>
+          <a:fontRef idx="minor">
+            <a:schemeClr val="lt1"/>
+          </a:fontRef>
+        </p:style>
+        <p:txBody>
+          <a:bodyPr rtlCol="0" anchor="ctr" wrap="square"/>
+          <a:lstStyle/>
+          <a:p>
+            <a:pPr algn="ctr">
+              <a:defRPr sz="1500" b="1">
+                <a:solidFill>
+                  <a:srgbClr val="BE123C"/>
+                </a:solidFill>
+              </a:defRPr>
+            </a:pPr>
+            <a:r>
+              <a:t>Bản Chất Của Lỗ Hổng Cross-Site Request Forgery</a:t>
+            </a:r>
+          </a:p>
+          <a:p>
+            <a:pPr>
+              <a:spcBef>
+                <a:spcPts val="800"/>
+              </a:spcBef>
+              <a:defRPr sz="1250">
+                <a:solidFill>
+                  <a:srgbClr val="334155"/>
+                </a:solidFill>
+              </a:defRPr>
+            </a:pPr>
+            <a:r>
+              <a:t>• CSRF (A01:2021 - Broken Access Control) là kỹ thuật tấn công mượn quyền của người dùng hợp lệ.</a:t>
+            </a:r>
+            <a:br/>
+            <a:r>
+              <a:t>• Điều kiện xảy ra:</a:t>
+            </a:r>
+            <a:br/>
+            <a:r>
+              <a:t>  1. Nạn nhân đã đăng nhập vào hệ thống tư vấn trực tuyến (phiên làm việc Session/Cookie vẫn đang hợp lệ).</a:t>
+            </a:r>
+            <a:br/>
+            <a:r>
+              <a:t>  2. Trình duyệt tự động đính kèm Cookie xác thực vào mọi HTTP Request gửi tới hệ thống đó.</a:t>
+            </a:r>
+            <a:br/>
+            <a:r>
+              <a:t>  3. Kẻ tấn công lừa nạn nhân truy cập một trang web độc hại ở một tab khác (Attacker Site).</a:t>
+            </a:r>
+            <a:br/>
+            <a:r>
+              <a:t>• Điểm mù: Máy chủ chỉ kiểm tra Cookie mà không kiểm tra xem Request đó bắt nguồn từ đâu!</a:t>
+            </a:r>
+          </a:p>
+        </p:txBody>
+      </p:sp>
+      <p:sp>
+        <p:nvSpPr>
+          <p:cNvPr id="7" name="Rounded Rectangle 6"/>
+          <p:cNvSpPr/>
+          <p:nvPr/>
+        </p:nvSpPr>
+        <p:spPr>
+          <a:xfrm>
+            <a:off x="6263640" y="1280160"/>
+            <a:ext cx="5166360" cy="4846320"/>
+          </a:xfrm>
+          <a:prstGeom prst="roundRect">
+            <a:avLst/>
+          </a:prstGeom>
+          <a:solidFill>
+            <a:srgbClr val="FFF1F2"/>
+          </a:solidFill>
+          <a:ln>
+            <a:solidFill>
+              <a:srgbClr val="FECDD3"/>
+            </a:solidFill>
+          </a:ln>
+        </p:spPr>
+        <p:style>
+          <a:lnRef idx="1">
+            <a:schemeClr val="accent1"/>
+          </a:lnRef>
+          <a:fillRef idx="3">
+            <a:schemeClr val="accent1"/>
+          </a:fillRef>
+          <a:effectRef idx="2">
+            <a:schemeClr val="accent1"/>
+          </a:effectRef>
+          <a:fontRef idx="minor">
+            <a:schemeClr val="lt1"/>
+          </a:fontRef>
+        </p:style>
+        <p:txBody>
+          <a:bodyPr rtlCol="0" anchor="ctr" wrap="square"/>
+          <a:lstStyle/>
+          <a:p>
+            <a:pPr algn="ctr">
+              <a:defRPr sz="1500" b="1">
+                <a:solidFill>
+                  <a:srgbClr val="BE123C"/>
+                </a:solidFill>
+              </a:defRPr>
+            </a:pPr>
+            <a:r>
+              <a:t>Action Bị Lỗi: Thiếu Thuộc Tính Phòng Vệ</a:t>
+            </a:r>
+          </a:p>
+          <a:p>
+            <a:pPr>
+              <a:spcBef>
+                <a:spcPts val="800"/>
+              </a:spcBef>
+              <a:defRPr sz="1000">
+                <a:solidFill>
+                  <a:srgbClr val="9F1239"/>
+                </a:solidFill>
+                <a:latin typeface="Courier New"/>
+              </a:defRPr>
+            </a:pPr>
+            <a:r>
+              <a:t>// ACTION NHẬN TIỀN KHÔNG CÓ BẢO VỆ TOKEN:</a:t>
+            </a:r>
+            <a:br/>
+            <a:r>
+              <a:t>[HttpPost]</a:t>
+            </a:r>
+            <a:br/>
+            <a:r>
+              <a:t>public IActionResult TransferVulnerable(decimal amount)</a:t>
+            </a:r>
+            <a:br/>
+            <a:r>
+              <a:t>{</a:t>
+            </a:r>
+            <a:br/>
+            <a:r>
+              <a:t>    var victim = _context.Wallets.Find(1);</a:t>
+            </a:r>
+            <a:br/>
+            <a:r>
+              <a:t>    var hacker = _context.Wallets.Find(2);</a:t>
+            </a:r>
+            <a:br/>
+            <a:r>
+              <a:t>    </a:t>
+            </a:r>
+            <a:br/>
+            <a:r>
+              <a:t>    // Trừ tiền nạn nhân, cộng tiền hacker:</a:t>
+            </a:r>
+            <a:br/>
+            <a:r>
+              <a:t>    victim.Balance -= amount;</a:t>
+            </a:r>
+            <a:br/>
+            <a:r>
+              <a:t>    hacker.Balance += amount;</a:t>
+            </a:r>
+            <a:br/>
+            <a:r>
+              <a:t>    _context.SaveChanges();</a:t>
+            </a:r>
+            <a:br/>
+            <a:r>
+              <a:t>    return RedirectToAction("Index");</a:t>
+            </a:r>
+            <a:br/>
+            <a:r>
+              <a:t>}</a:t>
+            </a:r>
+          </a:p>
+          <a:p>
+            <a:pPr>
+              <a:spcBef>
+                <a:spcPts val="1000"/>
+              </a:spcBef>
+              <a:defRPr sz="1200">
+                <a:solidFill>
+                  <a:srgbClr val="0F172A"/>
+                </a:solidFill>
+              </a:defRPr>
+            </a:pPr>
+            <a:r>
+              <a:t>⚠️ Nguy hiểm:</a:t>
+            </a:r>
+            <a:br/>
+            <a:r>
+              <a:t>Bất kỳ trang web nào trên Internet cũng có thể gửi form POST tới URL này. Máy chủ thấy Cookie hợp lệ sẽ trừ tiền ngay lập tức!</a:t>
+            </a:r>
+          </a:p>
+        </p:txBody>
+      </p:sp>
+    </p:spTree>
+  </p:cSld>
+  <p:clrMapOvr>
+    <a:masterClrMapping/>
+  </p:clrMapOvr>
+</p:sld>
+</file>
+
+<file path=ppt/slides/slide12.xml><?xml version="1.0" encoding="utf-8"?>
+<p:sld xmlns:a="http://schemas.openxmlformats.org/drawingml/2006/main" xmlns:p="http://schemas.openxmlformats.org/presentationml/2006/main" xmlns:r="http://schemas.openxmlformats.org/officeDocument/2006/relationships">
+  <p:cSld>
+    <p:spTree>
+      <p:nvGrpSpPr>
+        <p:cNvPr id="1" name=""/>
+        <p:cNvGrpSpPr/>
+        <p:nvPr/>
+      </p:nvGrpSpPr>
+      <p:grpSpPr/>
+      <p:sp>
+        <p:nvSpPr>
+          <p:cNvPr id="2" name="Rectangle 1"/>
+          <p:cNvSpPr/>
+          <p:nvPr/>
+        </p:nvSpPr>
+        <p:spPr>
+          <a:xfrm>
+            <a:off x="0" y="0"/>
+            <a:ext cx="12191695" cy="73152"/>
+          </a:xfrm>
+          <a:prstGeom prst="rect">
+            <a:avLst/>
+          </a:prstGeom>
+          <a:solidFill>
+            <a:srgbClr val="1D4ED8"/>
+          </a:solidFill>
+          <a:ln>
+            <a:noFill/>
+          </a:ln>
+        </p:spPr>
+        <p:style>
+          <a:lnRef idx="1">
+            <a:schemeClr val="accent1"/>
+          </a:lnRef>
+          <a:fillRef idx="3">
+            <a:schemeClr val="accent1"/>
+          </a:fillRef>
+          <a:effectRef idx="2">
+            <a:schemeClr val="accent1"/>
+          </a:effectRef>
+          <a:fontRef idx="minor">
+            <a:schemeClr val="lt1"/>
+          </a:fontRef>
+        </p:style>
+        <p:txBody>
+          <a:bodyPr rtlCol="0" anchor="ctr"/>
+          <a:lstStyle/>
+          <a:p>
+            <a:pPr algn="ctr"/>
+          </a:p>
+        </p:txBody>
+      </p:sp>
+      <p:sp>
+        <p:nvSpPr>
+          <p:cNvPr id="3" name="Rounded Rectangle 2"/>
+          <p:cNvSpPr/>
+          <p:nvPr/>
+        </p:nvSpPr>
+        <p:spPr>
+          <a:xfrm>
+            <a:off x="731520" y="292608"/>
+            <a:ext cx="4389120" cy="347472"/>
+          </a:xfrm>
+          <a:prstGeom prst="roundRect">
+            <a:avLst/>
+          </a:prstGeom>
+          <a:solidFill>
+            <a:srgbClr val="EFF6FF"/>
+          </a:solidFill>
+          <a:ln>
+            <a:solidFill>
+              <a:srgbClr val="BFDBFE"/>
+            </a:solidFill>
+          </a:ln>
+        </p:spPr>
+        <p:style>
+          <a:lnRef idx="1">
+            <a:schemeClr val="accent1"/>
+          </a:lnRef>
+          <a:fillRef idx="3">
+            <a:schemeClr val="accent1"/>
+          </a:fillRef>
+          <a:effectRef idx="2">
+            <a:schemeClr val="accent1"/>
+          </a:effectRef>
+          <a:fontRef idx="minor">
+            <a:schemeClr val="lt1"/>
+          </a:fontRef>
+        </p:style>
+        <p:txBody>
+          <a:bodyPr rtlCol="0" anchor="ctr" wrap="none"/>
+          <a:lstStyle/>
+          <a:p>
+            <a:pPr algn="ctr">
+              <a:defRPr sz="1000" b="1">
+                <a:solidFill>
+                  <a:srgbClr val="1D4ED8"/>
+                </a:solidFill>
+              </a:defRPr>
+            </a:pPr>
+            <a:r>
+              <a:t>CHỦ ĐỀ 3 • NGUYỄN MINH CƯỜNG (23A1001D0058)</a:t>
+            </a:r>
+          </a:p>
+        </p:txBody>
+      </p:sp>
+      <p:sp>
+        <p:nvSpPr>
+          <p:cNvPr id="4" name="TextBox 3"/>
+          <p:cNvSpPr txBox="1"/>
+          <p:nvPr/>
+        </p:nvSpPr>
+        <p:spPr>
+          <a:xfrm>
+            <a:off x="731520" y="658368"/>
+            <a:ext cx="10698480" cy="548640"/>
+          </a:xfrm>
+          <a:prstGeom prst="rect">
+            <a:avLst/>
+          </a:prstGeom>
+          <a:noFill/>
+        </p:spPr>
+        <p:txBody>
+          <a:bodyPr wrap="square">
+            <a:spAutoFit/>
+          </a:bodyPr>
+          <a:lstStyle/>
+          <a:p>
+            <a:pPr>
+              <a:defRPr sz="2000" b="1">
+                <a:solidFill>
+                  <a:srgbClr val="0F172A"/>
+                </a:solidFill>
+              </a:defRPr>
+            </a:pPr>
+            <a:r>
+              <a:t>3.2. CSRF Attack: Kịch Bản Lừa Đảo Chuyển Tiền Ví Ngầm</a:t>
+            </a:r>
+          </a:p>
+        </p:txBody>
+      </p:sp>
+      <p:sp>
+        <p:nvSpPr>
+          <p:cNvPr id="5" name="TextBox 4"/>
+          <p:cNvSpPr txBox="1"/>
+          <p:nvPr/>
+        </p:nvSpPr>
+        <p:spPr>
+          <a:xfrm>
+            <a:off x="731520" y="6492240"/>
+            <a:ext cx="10698480" cy="274320"/>
+          </a:xfrm>
+          <a:prstGeom prst="rect">
+            <a:avLst/>
+          </a:prstGeom>
+          <a:noFill/>
+        </p:spPr>
+        <p:txBody>
+          <a:bodyPr wrap="none">
+            <a:spAutoFit/>
+          </a:bodyPr>
+          <a:lstStyle/>
+          <a:p>
+            <a:pPr>
+              <a:defRPr sz="950">
+                <a:solidFill>
+                  <a:srgbClr val="64748B"/>
+                </a:solidFill>
+              </a:defRPr>
+            </a:pPr>
+            <a:r>
+              <a:t>Nhóm WNC.G01 (Học - Bình - Cường) • Khoa CNTT - Đại học Mở Hà Nội • GVHD: ThS. Lê Hữu Dũng</a:t>
+            </a:r>
+          </a:p>
+        </p:txBody>
+      </p:sp>
+      <p:sp>
+        <p:nvSpPr>
+          <p:cNvPr id="6" name="Rounded Rectangle 5"/>
+          <p:cNvSpPr/>
+          <p:nvPr/>
+        </p:nvSpPr>
+        <p:spPr>
+          <a:xfrm>
+            <a:off x="731520" y="1280160"/>
+            <a:ext cx="10728655" cy="4846320"/>
+          </a:xfrm>
+          <a:prstGeom prst="roundRect">
+            <a:avLst/>
+          </a:prstGeom>
+          <a:solidFill>
+            <a:srgbClr val="FFF1F2"/>
+          </a:solidFill>
+          <a:ln>
+            <a:solidFill>
+              <a:srgbClr val="FECDD3"/>
+            </a:solidFill>
+          </a:ln>
+        </p:spPr>
+        <p:style>
+          <a:lnRef idx="1">
+            <a:schemeClr val="accent1"/>
+          </a:lnRef>
+          <a:fillRef idx="3">
+            <a:schemeClr val="accent1"/>
+          </a:fillRef>
+          <a:effectRef idx="2">
+            <a:schemeClr val="accent1"/>
+          </a:effectRef>
+          <a:fontRef idx="minor">
+            <a:schemeClr val="lt1"/>
+          </a:fontRef>
+        </p:style>
+        <p:txBody>
+          <a:bodyPr rtlCol="0" anchor="ctr" wrap="square"/>
+          <a:lstStyle/>
+          <a:p>
+            <a:pPr algn="ctr">
+              <a:defRPr sz="1600" b="1">
+                <a:solidFill>
+                  <a:srgbClr val="BE123C"/>
+                </a:solidFill>
+              </a:defRPr>
+            </a:pPr>
+            <a:r>
+              <a:t>Kịch bản: Trang Web Giả Mạo Trúng Thưởng (Attacker Site)</a:t>
+            </a:r>
+          </a:p>
+          <a:p>
+            <a:pPr>
+              <a:spcBef>
+                <a:spcPts val="800"/>
+              </a:spcBef>
+              <a:defRPr sz="1300">
+                <a:solidFill>
+                  <a:srgbClr val="334155"/>
+                </a:solidFill>
+              </a:defRPr>
+            </a:pPr>
+            <a:r>
+              <a:t>1. Nạn nhân có 50.000.000 VNĐ trong ví đang mở tab làm việc tại nền tảng tư vấn trực tuyến.</a:t>
+            </a:r>
+            <a:br/>
+            <a:r>
+              <a:t>2. Kẻ tấn công gửi link: 'Chúc mừng bạn trúng thưởng iPhone 16 Pro Max! Click để nhận quà!'.</a:t>
+            </a:r>
+            <a:br/>
+            <a:r>
+              <a:t>3. Khi nạn nhân click vào link, một trang web bẫy (AttackerSite.cshtml) được mở ra, bên trong chứa mã HTML ẩn:</a:t>
+            </a:r>
+          </a:p>
+          <a:p>
+            <a:pPr>
+              <a:spcBef>
+                <a:spcPts val="600"/>
+              </a:spcBef>
+              <a:defRPr sz="1100" b="1">
+                <a:solidFill>
+                  <a:srgbClr val="9F1239"/>
+                </a:solidFill>
+                <a:latin typeface="Courier New"/>
+              </a:defRPr>
+            </a:pPr>
+            <a:r>
+              <a:t>&lt;!-- FORM ẨN TỰ ĐỘNG GỬI SANG HỆ THỐNG MỤC TIÊU --&gt;</a:t>
+            </a:r>
+            <a:br/>
+            <a:r>
+              <a:t>&lt;form id="exploit" action="http://localhost:5076/Csrf/TransferVulnerable" method="POST"&gt;</a:t>
+            </a:r>
+            <a:br/>
+            <a:r>
+              <a:t>    &lt;input type="hidden" name="amount" value="20000000" /&gt;</a:t>
+            </a:r>
+            <a:br/>
+            <a:r>
+              <a:t>&lt;/form&gt;</a:t>
+            </a:r>
+            <a:br/>
+            <a:r>
+              <a:t>&lt;script&gt;document.getElementById('exploit').submit();&lt;/script&gt;</a:t>
+            </a:r>
+          </a:p>
+          <a:p>
+            <a:pPr>
+              <a:spcBef>
+                <a:spcPts val="800"/>
+              </a:spcBef>
+              <a:defRPr sz="1300" b="1">
+                <a:solidFill>
+                  <a:srgbClr val="BE123C"/>
+                </a:solidFill>
+              </a:defRPr>
+            </a:pPr>
+            <a:r>
+              <a:t>Hậu quả thực tế: Nạn nhân không hề bấm chuyển tiền, nhưng ví tiền bị trừ ngay 20.000.000 VNĐ sang ví hacker!</a:t>
+            </a:r>
+          </a:p>
+        </p:txBody>
+      </p:sp>
+    </p:spTree>
+  </p:cSld>
+  <p:clrMapOvr>
+    <a:masterClrMapping/>
+  </p:clrMapOvr>
+</p:sld>
+</file>
+
+<file path=ppt/slides/slide13.xml><?xml version="1.0" encoding="utf-8"?>
+<p:sld xmlns:a="http://schemas.openxmlformats.org/drawingml/2006/main" xmlns:p="http://schemas.openxmlformats.org/presentationml/2006/main" xmlns:r="http://schemas.openxmlformats.org/officeDocument/2006/relationships">
+  <p:cSld>
+    <p:spTree>
+      <p:nvGrpSpPr>
+        <p:cNvPr id="1" name=""/>
+        <p:cNvGrpSpPr/>
+        <p:nvPr/>
+      </p:nvGrpSpPr>
+      <p:grpSpPr/>
+      <p:sp>
+        <p:nvSpPr>
+          <p:cNvPr id="2" name="Rectangle 1"/>
+          <p:cNvSpPr/>
+          <p:nvPr/>
+        </p:nvSpPr>
+        <p:spPr>
+          <a:xfrm>
+            <a:off x="0" y="0"/>
+            <a:ext cx="12191695" cy="73152"/>
+          </a:xfrm>
+          <a:prstGeom prst="rect">
+            <a:avLst/>
+          </a:prstGeom>
+          <a:solidFill>
+            <a:srgbClr val="1D4ED8"/>
+          </a:solidFill>
+          <a:ln>
+            <a:noFill/>
+          </a:ln>
+        </p:spPr>
+        <p:style>
+          <a:lnRef idx="1">
+            <a:schemeClr val="accent1"/>
+          </a:lnRef>
+          <a:fillRef idx="3">
+            <a:schemeClr val="accent1"/>
+          </a:fillRef>
+          <a:effectRef idx="2">
+            <a:schemeClr val="accent1"/>
+          </a:effectRef>
+          <a:fontRef idx="minor">
+            <a:schemeClr val="lt1"/>
+          </a:fontRef>
+        </p:style>
+        <p:txBody>
+          <a:bodyPr rtlCol="0" anchor="ctr"/>
+          <a:lstStyle/>
+          <a:p>
+            <a:pPr algn="ctr"/>
+          </a:p>
+        </p:txBody>
+      </p:sp>
+      <p:sp>
+        <p:nvSpPr>
+          <p:cNvPr id="3" name="Rounded Rectangle 2"/>
+          <p:cNvSpPr/>
+          <p:nvPr/>
+        </p:nvSpPr>
+        <p:spPr>
+          <a:xfrm>
+            <a:off x="731520" y="292608"/>
+            <a:ext cx="4389120" cy="347472"/>
+          </a:xfrm>
+          <a:prstGeom prst="roundRect">
+            <a:avLst/>
+          </a:prstGeom>
+          <a:solidFill>
+            <a:srgbClr val="EFF6FF"/>
+          </a:solidFill>
+          <a:ln>
+            <a:solidFill>
+              <a:srgbClr val="BFDBFE"/>
+            </a:solidFill>
+          </a:ln>
+        </p:spPr>
+        <p:style>
+          <a:lnRef idx="1">
+            <a:schemeClr val="accent1"/>
+          </a:lnRef>
+          <a:fillRef idx="3">
+            <a:schemeClr val="accent1"/>
+          </a:fillRef>
+          <a:effectRef idx="2">
+            <a:schemeClr val="accent1"/>
+          </a:effectRef>
+          <a:fontRef idx="minor">
+            <a:schemeClr val="lt1"/>
+          </a:fontRef>
+        </p:style>
+        <p:txBody>
+          <a:bodyPr rtlCol="0" anchor="ctr" wrap="none"/>
+          <a:lstStyle/>
+          <a:p>
+            <a:pPr algn="ctr">
+              <a:defRPr sz="1000" b="1">
+                <a:solidFill>
+                  <a:srgbClr val="1D4ED8"/>
+                </a:solidFill>
+              </a:defRPr>
+            </a:pPr>
+            <a:r>
+              <a:t>CHỦ ĐỀ 3 • NGUYỄN MINH CƯỜNG (23A1001D0058)</a:t>
+            </a:r>
+          </a:p>
+        </p:txBody>
+      </p:sp>
+      <p:sp>
+        <p:nvSpPr>
+          <p:cNvPr id="4" name="TextBox 3"/>
+          <p:cNvSpPr txBox="1"/>
+          <p:nvPr/>
+        </p:nvSpPr>
+        <p:spPr>
+          <a:xfrm>
+            <a:off x="731520" y="658368"/>
+            <a:ext cx="10698480" cy="548640"/>
+          </a:xfrm>
+          <a:prstGeom prst="rect">
+            <a:avLst/>
+          </a:prstGeom>
+          <a:noFill/>
+        </p:spPr>
+        <p:txBody>
+          <a:bodyPr wrap="square">
+            <a:spAutoFit/>
+          </a:bodyPr>
+          <a:lstStyle/>
+          <a:p>
+            <a:pPr>
+              <a:defRPr sz="2000" b="1">
+                <a:solidFill>
+                  <a:srgbClr val="0F172A"/>
+                </a:solidFill>
+              </a:defRPr>
+            </a:pPr>
+            <a:r>
+              <a:t>3.3. CSRF Attack: Thực Nghiệm Trực Tiếp &amp; Kiểm Thử Rút Tiền</a:t>
+            </a:r>
+          </a:p>
+        </p:txBody>
+      </p:sp>
+      <p:sp>
+        <p:nvSpPr>
+          <p:cNvPr id="5" name="TextBox 4"/>
+          <p:cNvSpPr txBox="1"/>
+          <p:nvPr/>
+        </p:nvSpPr>
+        <p:spPr>
+          <a:xfrm>
+            <a:off x="731520" y="6492240"/>
+            <a:ext cx="10698480" cy="274320"/>
+          </a:xfrm>
+          <a:prstGeom prst="rect">
+            <a:avLst/>
+          </a:prstGeom>
+          <a:noFill/>
+        </p:spPr>
+        <p:txBody>
+          <a:bodyPr wrap="none">
+            <a:spAutoFit/>
+          </a:bodyPr>
+          <a:lstStyle/>
+          <a:p>
+            <a:pPr>
+              <a:defRPr sz="950">
+                <a:solidFill>
+                  <a:srgbClr val="64748B"/>
+                </a:solidFill>
+              </a:defRPr>
+            </a:pPr>
+            <a:r>
+              <a:t>Nhóm WNC.G01 (Học - Bình - Cường) • Khoa CNTT - Đại học Mở Hà Nội • GVHD: ThS. Lê Hữu Dũng</a:t>
+            </a:r>
+          </a:p>
+        </p:txBody>
+      </p:sp>
+      <p:sp>
+        <p:nvSpPr>
+          <p:cNvPr id="6" name="Rounded Rectangle 5"/>
+          <p:cNvSpPr/>
+          <p:nvPr/>
+        </p:nvSpPr>
+        <p:spPr>
+          <a:xfrm>
+            <a:off x="731520" y="1280160"/>
+            <a:ext cx="10728655" cy="3840480"/>
+          </a:xfrm>
+          <a:prstGeom prst="roundRect">
+            <a:avLst/>
+          </a:prstGeom>
+          <a:solidFill>
+            <a:srgbClr val="F8FAFC"/>
+          </a:solidFill>
+          <a:ln>
+            <a:solidFill>
+              <a:srgbClr val="E2E8F0"/>
+            </a:solidFill>
+          </a:ln>
+        </p:spPr>
+        <p:style>
+          <a:lnRef idx="1">
+            <a:schemeClr val="accent1"/>
+          </a:lnRef>
+          <a:fillRef idx="3">
+            <a:schemeClr val="accent1"/>
+          </a:fillRef>
+          <a:effectRef idx="2">
+            <a:schemeClr val="accent1"/>
+          </a:effectRef>
+          <a:fontRef idx="minor">
+            <a:schemeClr val="lt1"/>
+          </a:fontRef>
+        </p:style>
+        <p:txBody>
+          <a:bodyPr rtlCol="0" anchor="ctr" wrap="square"/>
+          <a:lstStyle/>
+          <a:p>
+            <a:pPr algn="ctr">
+              <a:defRPr sz="1500" b="1">
+                <a:solidFill>
+                  <a:srgbClr val="047857"/>
+                </a:solidFill>
+              </a:defRPr>
+            </a:pPr>
+            <a:r>
+              <a:t>Quy Trình 3 Bước Thực Nghiệm Trên Giao Diện Web</a:t>
+            </a:r>
+          </a:p>
+          <a:p>
+            <a:pPr>
+              <a:spcBef>
+                <a:spcPts val="800"/>
+              </a:spcBef>
+              <a:defRPr sz="1300">
+                <a:solidFill>
+                  <a:srgbClr val="334155"/>
+                </a:solidFill>
+              </a:defRPr>
+            </a:pPr>
+            <a:r>
+              <a:t>• Bước 1: Kiểm tra số dư ví ban đầu tại Tab 3:</a:t>
+            </a:r>
+            <a:br/>
+            <a:r>
+              <a:t>  - Ví Nạn nhân: 50.000.000 VNĐ | Ví Hacker: 0 VNĐ.</a:t>
+            </a:r>
+            <a:br/>
+            <a:r>
+              <a:t>• Bước 2: Bấm nút đỏ 'Mở trang web bẫy của Hacker (Attacker Site)' ở tab mới -&gt; Bấm nút 'Nhận thưởng ngay':</a:t>
+            </a:r>
+            <a:br/>
+            <a:r>
+              <a:t>  - Ngay lập tức, số dư của nạn nhân bị trừ 20.000.000 VNĐ và chuyển sang ví hacker!</a:t>
+            </a:r>
+            <a:br/>
+            <a:r>
+              <a:t>• Bước 3: Thử nghiệm chuyển tiền tại Form bên phải (Đã phòng thủ):</a:t>
+            </a:r>
+            <a:br/>
+            <a:r>
+              <a:t>  - Giao dịch chỉ hợp lệ khi được gửi từ chính form trên hệ thống với Anti-Forgery Token hợp lệ.</a:t>
+            </a:r>
+          </a:p>
+        </p:txBody>
+      </p:sp>
+      <p:sp>
+        <p:nvSpPr>
+          <p:cNvPr id="7" name="Rounded Rectangle 6"/>
+          <p:cNvSpPr/>
+          <p:nvPr/>
+        </p:nvSpPr>
+        <p:spPr>
+          <a:xfrm>
+            <a:off x="731520" y="5303520"/>
+            <a:ext cx="10728655" cy="868680"/>
+          </a:xfrm>
+          <a:prstGeom prst="roundRect">
+            <a:avLst/>
+          </a:prstGeom>
+          <a:solidFill>
+            <a:srgbClr val="ECFDF5"/>
+          </a:solidFill>
+          <a:ln>
+            <a:solidFill>
+              <a:srgbClr val="A7F3D0"/>
+            </a:solidFill>
+          </a:ln>
+        </p:spPr>
+        <p:style>
+          <a:lnRef idx="1">
+            <a:schemeClr val="accent1"/>
+          </a:lnRef>
+          <a:fillRef idx="3">
+            <a:schemeClr val="accent1"/>
+          </a:fillRef>
+          <a:effectRef idx="2">
+            <a:schemeClr val="accent1"/>
+          </a:effectRef>
+          <a:fontRef idx="minor">
+            <a:schemeClr val="lt1"/>
+          </a:fontRef>
+        </p:style>
+        <p:txBody>
+          <a:bodyPr rtlCol="0" anchor="ctr"/>
+          <a:lstStyle/>
+          <a:p>
+            <a:pPr algn="ctr">
+              <a:defRPr sz="1250" b="1">
+                <a:solidFill>
+                  <a:srgbClr val="047857"/>
+                </a:solidFill>
+              </a:defRPr>
+            </a:pPr>
+            <a:r>
+              <a:t>💳 [CƯỜNG LIVE DEMO]: Chuyển sang Web UI Tab 3 (CSRF)</a:t>
+            </a:r>
+          </a:p>
+          <a:p>
+            <a:pPr>
+              <a:spcBef>
+                <a:spcPts val="200"/>
+              </a:spcBef>
+              <a:defRPr sz="1100">
+                <a:solidFill>
+                  <a:srgbClr val="334155"/>
+                </a:solidFill>
+              </a:defRPr>
+            </a:pPr>
+            <a:r>
+              <a:t>Thao tác: Mở Attacker Site -&gt; Bấm nhận thưởng -&gt; Quay lại thấy số dư ví nạn nhân bị trừ 20 triệu -&gt; Thử lại form có Token.</a:t>
+            </a:r>
+          </a:p>
+        </p:txBody>
+      </p:sp>
+    </p:spTree>
+  </p:cSld>
+  <p:clrMapOvr>
+    <a:masterClrMapping/>
+  </p:clrMapOvr>
+</p:sld>
+</file>
+
+<file path=ppt/slides/slide14.xml><?xml version="1.0" encoding="utf-8"?>
+<p:sld xmlns:a="http://schemas.openxmlformats.org/drawingml/2006/main" xmlns:p="http://schemas.openxmlformats.org/presentationml/2006/main" xmlns:r="http://schemas.openxmlformats.org/officeDocument/2006/relationships">
+  <p:cSld>
+    <p:spTree>
+      <p:nvGrpSpPr>
+        <p:cNvPr id="1" name=""/>
+        <p:cNvGrpSpPr/>
+        <p:nvPr/>
+      </p:nvGrpSpPr>
+      <p:grpSpPr/>
+      <p:sp>
+        <p:nvSpPr>
+          <p:cNvPr id="2" name="Rectangle 1"/>
+          <p:cNvSpPr/>
+          <p:nvPr/>
+        </p:nvSpPr>
+        <p:spPr>
+          <a:xfrm>
+            <a:off x="0" y="0"/>
+            <a:ext cx="12191695" cy="73152"/>
+          </a:xfrm>
+          <a:prstGeom prst="rect">
+            <a:avLst/>
+          </a:prstGeom>
+          <a:solidFill>
+            <a:srgbClr val="1D4ED8"/>
+          </a:solidFill>
+          <a:ln>
+            <a:noFill/>
+          </a:ln>
+        </p:spPr>
+        <p:style>
+          <a:lnRef idx="1">
+            <a:schemeClr val="accent1"/>
+          </a:lnRef>
+          <a:fillRef idx="3">
+            <a:schemeClr val="accent1"/>
+          </a:fillRef>
+          <a:effectRef idx="2">
+            <a:schemeClr val="accent1"/>
+          </a:effectRef>
+          <a:fontRef idx="minor">
+            <a:schemeClr val="lt1"/>
+          </a:fontRef>
+        </p:style>
+        <p:txBody>
+          <a:bodyPr rtlCol="0" anchor="ctr"/>
+          <a:lstStyle/>
+          <a:p>
+            <a:pPr algn="ctr"/>
+          </a:p>
+        </p:txBody>
+      </p:sp>
+      <p:sp>
+        <p:nvSpPr>
+          <p:cNvPr id="3" name="Rounded Rectangle 2"/>
+          <p:cNvSpPr/>
+          <p:nvPr/>
+        </p:nvSpPr>
+        <p:spPr>
+          <a:xfrm>
+            <a:off x="731520" y="292608"/>
+            <a:ext cx="4389120" cy="347472"/>
+          </a:xfrm>
+          <a:prstGeom prst="roundRect">
+            <a:avLst/>
+          </a:prstGeom>
+          <a:solidFill>
+            <a:srgbClr val="EFF6FF"/>
+          </a:solidFill>
+          <a:ln>
+            <a:solidFill>
+              <a:srgbClr val="BFDBFE"/>
+            </a:solidFill>
+          </a:ln>
+        </p:spPr>
+        <p:style>
+          <a:lnRef idx="1">
+            <a:schemeClr val="accent1"/>
+          </a:lnRef>
+          <a:fillRef idx="3">
+            <a:schemeClr val="accent1"/>
+          </a:fillRef>
+          <a:effectRef idx="2">
+            <a:schemeClr val="accent1"/>
+          </a:effectRef>
+          <a:fontRef idx="minor">
+            <a:schemeClr val="lt1"/>
+          </a:fontRef>
+        </p:style>
+        <p:txBody>
+          <a:bodyPr rtlCol="0" anchor="ctr" wrap="none"/>
+          <a:lstStyle/>
+          <a:p>
+            <a:pPr algn="ctr">
+              <a:defRPr sz="1000" b="1">
+                <a:solidFill>
+                  <a:srgbClr val="1D4ED8"/>
+                </a:solidFill>
+              </a:defRPr>
+            </a:pPr>
+            <a:r>
+              <a:t>CHỦ ĐỀ 3 • NGUYỄN MINH CƯỜNG (23A1001D0058)</a:t>
+            </a:r>
+          </a:p>
+        </p:txBody>
+      </p:sp>
+      <p:sp>
+        <p:nvSpPr>
+          <p:cNvPr id="4" name="TextBox 3"/>
+          <p:cNvSpPr txBox="1"/>
+          <p:nvPr/>
+        </p:nvSpPr>
+        <p:spPr>
+          <a:xfrm>
+            <a:off x="731520" y="658368"/>
+            <a:ext cx="10698480" cy="548640"/>
+          </a:xfrm>
+          <a:prstGeom prst="rect">
+            <a:avLst/>
+          </a:prstGeom>
+          <a:noFill/>
+        </p:spPr>
+        <p:txBody>
+          <a:bodyPr wrap="square">
+            <a:spAutoFit/>
+          </a:bodyPr>
+          <a:lstStyle/>
+          <a:p>
+            <a:pPr>
+              <a:defRPr sz="2000" b="1">
+                <a:solidFill>
+                  <a:srgbClr val="0F172A"/>
+                </a:solidFill>
+              </a:defRPr>
+            </a:pPr>
+            <a:r>
+              <a:t>3.4. CSRF Attack: Cơ Chế Phòng Thủ Bằng Anti-Forgery Token</a:t>
+            </a:r>
+          </a:p>
+        </p:txBody>
+      </p:sp>
+      <p:sp>
+        <p:nvSpPr>
+          <p:cNvPr id="5" name="TextBox 4"/>
+          <p:cNvSpPr txBox="1"/>
+          <p:nvPr/>
+        </p:nvSpPr>
+        <p:spPr>
+          <a:xfrm>
+            <a:off x="731520" y="6492240"/>
+            <a:ext cx="10698480" cy="274320"/>
+          </a:xfrm>
+          <a:prstGeom prst="rect">
+            <a:avLst/>
+          </a:prstGeom>
+          <a:noFill/>
+        </p:spPr>
+        <p:txBody>
+          <a:bodyPr wrap="none">
+            <a:spAutoFit/>
+          </a:bodyPr>
+          <a:lstStyle/>
+          <a:p>
+            <a:pPr>
+              <a:defRPr sz="950">
+                <a:solidFill>
+                  <a:srgbClr val="64748B"/>
+                </a:solidFill>
+              </a:defRPr>
+            </a:pPr>
+            <a:r>
+              <a:t>Nhóm WNC.G01 (Học - Bình - Cường) • Khoa CNTT - Đại học Mở Hà Nội • GVHD: ThS. Lê Hữu Dũng</a:t>
+            </a:r>
+          </a:p>
+        </p:txBody>
+      </p:sp>
+      <p:sp>
+        <p:nvSpPr>
+          <p:cNvPr id="6" name="Rounded Rectangle 5"/>
+          <p:cNvSpPr/>
+          <p:nvPr/>
+        </p:nvSpPr>
+        <p:spPr>
+          <a:xfrm>
+            <a:off x="731520" y="1280160"/>
+            <a:ext cx="5166360" cy="4846320"/>
+          </a:xfrm>
+          <a:prstGeom prst="roundRect">
+            <a:avLst/>
+          </a:prstGeom>
+          <a:solidFill>
+            <a:srgbClr val="ECFDF5"/>
+          </a:solidFill>
+          <a:ln>
+            <a:solidFill>
+              <a:srgbClr val="A7F3D0"/>
+            </a:solidFill>
+          </a:ln>
+        </p:spPr>
+        <p:style>
+          <a:lnRef idx="1">
+            <a:schemeClr val="accent1"/>
+          </a:lnRef>
+          <a:fillRef idx="3">
+            <a:schemeClr val="accent1"/>
+          </a:fillRef>
+          <a:effectRef idx="2">
+            <a:schemeClr val="accent1"/>
+          </a:effectRef>
+          <a:fontRef idx="minor">
+            <a:schemeClr val="lt1"/>
+          </a:fontRef>
+        </p:style>
+        <p:txBody>
+          <a:bodyPr rtlCol="0" anchor="ctr" wrap="square"/>
+          <a:lstStyle/>
+          <a:p>
+            <a:pPr algn="ctr">
+              <a:defRPr sz="1500" b="1">
+                <a:solidFill>
+                  <a:srgbClr val="047857"/>
+                </a:solidFill>
+              </a:defRPr>
+            </a:pPr>
+            <a:r>
+              <a:t>Cơ Chế Synchronizer Token Pattern Trong ASP.NET Core</a:t>
+            </a:r>
+          </a:p>
+          <a:p>
+            <a:pPr>
+              <a:spcBef>
+                <a:spcPts val="800"/>
+              </a:spcBef>
+              <a:defRPr sz="950">
+                <a:solidFill>
+                  <a:srgbClr val="065F46"/>
+                </a:solidFill>
+                <a:latin typeface="Courier New"/>
+              </a:defRPr>
+            </a:pPr>
+            <a:r>
+              <a:t>// 1. TRONG RAZOR VIEW: NHÚNG TOKEN VÀO FORM</a:t>
+            </a:r>
+            <a:br/>
+            <a:r>
+              <a:t>&lt;form asp-action="TransferSecure" method="post"&gt;</a:t>
+            </a:r>
+            <a:br/>
+            <a:r>
+              <a:t>    @Html.AntiForgeryToken()</a:t>
+            </a:r>
+            <a:br/>
+            <a:r>
+              <a:t>    &lt;input type="number" name="amount" /&gt;</a:t>
+            </a:r>
+            <a:br/>
+            <a:r>
+              <a:t>    &lt;button type="submit"&gt;Chuyển tiền&lt;/button&gt;</a:t>
+            </a:r>
+            <a:br/>
+            <a:r>
+              <a:t>&lt;/form&gt;</a:t>
+            </a:r>
+            <a:br/>
+            <a:br/>
+            <a:r>
+              <a:t>// 2. TRONG CONTROLLER: BẮT BUỘC KIỂM TRA TOKEN</a:t>
+            </a:r>
+            <a:br/>
+            <a:r>
+              <a:t>[HttpPost]</a:t>
+            </a:r>
+            <a:br/>
+            <a:r>
+              <a:t>[ValidateAntiForgeryToken]</a:t>
+            </a:r>
+            <a:br/>
+            <a:r>
+              <a:t>public IActionResult TransferSecure(decimal amount)</a:t>
+            </a:r>
+            <a:br/>
+            <a:r>
+              <a:t>{</a:t>
+            </a:r>
+            <a:br/>
+            <a:r>
+              <a:t>    // Chỉ thực thi khi Token từ Form khớp với Token trong Cookie</a:t>
+            </a:r>
+            <a:br/>
+            <a:r>
+              <a:t>}</a:t>
+            </a:r>
+          </a:p>
+        </p:txBody>
+      </p:sp>
+      <p:sp>
+        <p:nvSpPr>
+          <p:cNvPr id="7" name="Rounded Rectangle 6"/>
+          <p:cNvSpPr/>
+          <p:nvPr/>
+        </p:nvSpPr>
+        <p:spPr>
+          <a:xfrm>
+            <a:off x="6263640" y="1280160"/>
+            <a:ext cx="5166360" cy="4846320"/>
+          </a:xfrm>
+          <a:prstGeom prst="roundRect">
+            <a:avLst/>
+          </a:prstGeom>
+          <a:solidFill>
+            <a:srgbClr val="F8FAFC"/>
+          </a:solidFill>
+          <a:ln>
+            <a:solidFill>
+              <a:srgbClr val="E2E8F0"/>
+            </a:solidFill>
+          </a:ln>
+        </p:spPr>
+        <p:style>
+          <a:lnRef idx="1">
+            <a:schemeClr val="accent1"/>
+          </a:lnRef>
+          <a:fillRef idx="3">
+            <a:schemeClr val="accent1"/>
+          </a:fillRef>
+          <a:effectRef idx="2">
+            <a:schemeClr val="accent1"/>
+          </a:effectRef>
+          <a:fontRef idx="minor">
+            <a:schemeClr val="lt1"/>
+          </a:fontRef>
+        </p:style>
+        <p:txBody>
+          <a:bodyPr rtlCol="0" anchor="ctr" wrap="square"/>
+          <a:lstStyle/>
+          <a:p>
+            <a:pPr algn="ctr">
+              <a:defRPr sz="1500" b="1">
+                <a:solidFill>
+                  <a:srgbClr val="1D4ED8"/>
+                </a:solidFill>
+              </a:defRPr>
+            </a:pPr>
+            <a:r>
+              <a:t>Tại Sao Kẻ Tấn Công Không Thể Vượt Qua?</a:t>
+            </a:r>
+          </a:p>
+          <a:p>
+            <a:pPr>
+              <a:spcBef>
+                <a:spcPts val="1000"/>
+              </a:spcBef>
+              <a:defRPr sz="1200">
+                <a:solidFill>
+                  <a:srgbClr val="334155"/>
+                </a:solidFill>
+              </a:defRPr>
+            </a:pPr>
+            <a:r>
+              <a:t>1. Nguyên tắc cặp Token:</a:t>
+            </a:r>
+            <a:br/>
+            <a:r>
+              <a:t>Máy chủ phát hành 1 token mã hóa trong Cookie và 1 token bí mật nhúng vào trường input ẩn của Form.</a:t>
+            </a:r>
+            <a:br/>
+            <a:br/>
+            <a:r>
+              <a:t>2. Bảo vệ bằng Same-Origin Policy (SOP):</a:t>
+            </a:r>
+            <a:br/>
+            <a:r>
+              <a:t>Trang web độc hại của hacker ở tên miền khác (Cross-Origin) TUYỆT ĐỐI KHÔNG THỂ đọc trộm token bí mật trong form của nạn nhân.</a:t>
+            </a:r>
+            <a:br/>
+            <a:br/>
+            <a:r>
+              <a:t>3. Cấu hình Cookie SameSite = Strict:</a:t>
+            </a:r>
+            <a:br/>
+            <a:r>
+              <a:t>Ngăn chặn trình duyệt tự động gửi cookie trong các cross-site request, triệt tiêu tận gốc tiền đề tấn công của CSRF.</a:t>
+            </a:r>
+          </a:p>
+        </p:txBody>
+      </p:sp>
+    </p:spTree>
+  </p:cSld>
+  <p:clrMapOvr>
+    <a:masterClrMapping/>
+  </p:clrMapOvr>
+</p:sld>
+</file>
+
+<file path=ppt/slides/slide15.xml><?xml version="1.0" encoding="utf-8"?>
+<p:sld xmlns:a="http://schemas.openxmlformats.org/drawingml/2006/main" xmlns:p="http://schemas.openxmlformats.org/presentationml/2006/main" xmlns:r="http://schemas.openxmlformats.org/officeDocument/2006/relationships">
+  <p:cSld>
+    <p:spTree>
+      <p:nvGrpSpPr>
+        <p:cNvPr id="1" name=""/>
+        <p:cNvGrpSpPr/>
+        <p:nvPr/>
+      </p:nvGrpSpPr>
+      <p:grpSpPr/>
+      <p:sp>
+        <p:nvSpPr>
+          <p:cNvPr id="2" name="Rectangle 1"/>
+          <p:cNvSpPr/>
+          <p:nvPr/>
+        </p:nvSpPr>
+        <p:spPr>
+          <a:xfrm>
+            <a:off x="0" y="0"/>
+            <a:ext cx="12191695" cy="73152"/>
+          </a:xfrm>
+          <a:prstGeom prst="rect">
+            <a:avLst/>
+          </a:prstGeom>
+          <a:solidFill>
+            <a:srgbClr val="1D4ED8"/>
+          </a:solidFill>
+          <a:ln>
+            <a:noFill/>
+          </a:ln>
+        </p:spPr>
+        <p:style>
+          <a:lnRef idx="1">
+            <a:schemeClr val="accent1"/>
+          </a:lnRef>
+          <a:fillRef idx="3">
+            <a:schemeClr val="accent1"/>
+          </a:fillRef>
+          <a:effectRef idx="2">
+            <a:schemeClr val="accent1"/>
+          </a:effectRef>
+          <a:fontRef idx="minor">
+            <a:schemeClr val="lt1"/>
+          </a:fontRef>
+        </p:style>
+        <p:txBody>
+          <a:bodyPr rtlCol="0" anchor="ctr"/>
+          <a:lstStyle/>
+          <a:p>
+            <a:pPr algn="ctr"/>
+          </a:p>
+        </p:txBody>
+      </p:sp>
+      <p:sp>
+        <p:nvSpPr>
+          <p:cNvPr id="3" name="Rounded Rectangle 2"/>
+          <p:cNvSpPr/>
+          <p:nvPr/>
+        </p:nvSpPr>
+        <p:spPr>
+          <a:xfrm>
+            <a:off x="731520" y="292608"/>
+            <a:ext cx="4389120" cy="347472"/>
+          </a:xfrm>
+          <a:prstGeom prst="roundRect">
+            <a:avLst/>
+          </a:prstGeom>
+          <a:solidFill>
+            <a:srgbClr val="EFF6FF"/>
+          </a:solidFill>
+          <a:ln>
+            <a:solidFill>
+              <a:srgbClr val="BFDBFE"/>
+            </a:solidFill>
+          </a:ln>
+        </p:spPr>
+        <p:style>
+          <a:lnRef idx="1">
+            <a:schemeClr val="accent1"/>
+          </a:lnRef>
+          <a:fillRef idx="3">
+            <a:schemeClr val="accent1"/>
+          </a:fillRef>
+          <a:effectRef idx="2">
+            <a:schemeClr val="accent1"/>
+          </a:effectRef>
+          <a:fontRef idx="minor">
+            <a:schemeClr val="lt1"/>
+          </a:fontRef>
+        </p:style>
+        <p:txBody>
+          <a:bodyPr rtlCol="0" anchor="ctr" wrap="none"/>
+          <a:lstStyle/>
+          <a:p>
+            <a:pPr algn="ctr">
+              <a:defRPr sz="1000" b="1">
+                <a:solidFill>
+                  <a:srgbClr val="1D4ED8"/>
+                </a:solidFill>
+              </a:defRPr>
+            </a:pPr>
+            <a:r>
+              <a:t>OWASP TOP 10 • THỰC NGHIỆM AN TOÀN WEB</a:t>
+            </a:r>
+          </a:p>
+        </p:txBody>
+      </p:sp>
+      <p:sp>
+        <p:nvSpPr>
+          <p:cNvPr id="4" name="TextBox 3"/>
+          <p:cNvSpPr txBox="1"/>
+          <p:nvPr/>
+        </p:nvSpPr>
+        <p:spPr>
+          <a:xfrm>
+            <a:off x="731520" y="658368"/>
+            <a:ext cx="10698480" cy="548640"/>
+          </a:xfrm>
+          <a:prstGeom prst="rect">
+            <a:avLst/>
+          </a:prstGeom>
+          <a:noFill/>
+        </p:spPr>
+        <p:txBody>
+          <a:bodyPr wrap="square">
+            <a:spAutoFit/>
+          </a:bodyPr>
+          <a:lstStyle/>
+          <a:p>
+            <a:pPr>
+              <a:defRPr sz="2000" b="1">
+                <a:solidFill>
+                  <a:srgbClr val="0F172A"/>
+                </a:solidFill>
+              </a:defRPr>
+            </a:pPr>
+            <a:r>
+              <a:t>Tổng Kết: So Sánh Đối Chứng 3 Lỗ Hổng Web Kinh Điển</a:t>
+            </a:r>
+          </a:p>
+        </p:txBody>
+      </p:sp>
+      <p:sp>
+        <p:nvSpPr>
+          <p:cNvPr id="5" name="TextBox 4"/>
+          <p:cNvSpPr txBox="1"/>
+          <p:nvPr/>
+        </p:nvSpPr>
+        <p:spPr>
+          <a:xfrm>
+            <a:off x="731520" y="6492240"/>
+            <a:ext cx="10698480" cy="274320"/>
+          </a:xfrm>
+          <a:prstGeom prst="rect">
+            <a:avLst/>
+          </a:prstGeom>
+          <a:noFill/>
+        </p:spPr>
+        <p:txBody>
+          <a:bodyPr wrap="none">
+            <a:spAutoFit/>
+          </a:bodyPr>
+          <a:lstStyle/>
+          <a:p>
+            <a:pPr>
+              <a:defRPr sz="950">
+                <a:solidFill>
+                  <a:srgbClr val="64748B"/>
+                </a:solidFill>
+              </a:defRPr>
+            </a:pPr>
+            <a:r>
+              <a:t>Nhóm WNC.G01 (Học - Bình - Cường) • Khoa CNTT - Đại học Mở Hà Nội • GVHD: ThS. Lê Hữu Dũng</a:t>
+            </a:r>
+          </a:p>
+        </p:txBody>
+      </p:sp>
+      <p:graphicFrame>
+        <p:nvGraphicFramePr>
+          <p:cNvPr id="6" name="Table 5"/>
+          <p:cNvGraphicFramePr>
+            <a:graphicFrameLocks noGrp="1"/>
+          </p:cNvGraphicFramePr>
+          <p:nvPr/>
+        </p:nvGraphicFramePr>
+        <p:xfrm>
+          <a:off x="731520" y="1371600"/>
+          <a:ext cx="10728655" cy="4754880"/>
+        </p:xfrm>
+        <a:graphic>
+          <a:graphicData uri="http://schemas.openxmlformats.org/drawingml/2006/table">
+            <a:tbl>
+              <a:tblPr firstRow="1" bandRow="1">
+                <a:tableStyleId>{5C22544A-7EE6-4342-B048-85BDC9FD1C3A}</a:tableStyleId>
+              </a:tblPr>
+              <a:tblGrid>
+                <a:gridCol w="2682163"/>
+                <a:gridCol w="2682163"/>
+                <a:gridCol w="2682163"/>
+                <a:gridCol w="2682166"/>
+              </a:tblGrid>
+              <a:tr h="1188720">
+                <a:tc>
+                  <a:txBody>
+                    <a:bodyPr/>
+                    <a:lstStyle/>
+                    <a:p>
+                      <a:pPr>
+                        <a:defRPr b="1" sz="1200">
+                          <a:solidFill>
+                            <a:srgbClr val="FFFFFF"/>
+                          </a:solidFill>
+                        </a:defRPr>
+                      </a:pPr>
+                      <a:r>
+                        <a:t>Tiêu chí so sánh</a:t>
+                      </a:r>
+                    </a:p>
+                  </a:txBody>
+                  <a:tcPr>
+                    <a:solidFill>
+                      <a:srgbClr val="1D4ED8"/>
+                    </a:solidFill>
+                  </a:tcPr>
+                </a:tc>
+                <a:tc>
+                  <a:txBody>
+                    <a:bodyPr/>
+                    <a:lstStyle/>
+                    <a:p>
+                      <a:pPr>
+                        <a:defRPr b="1" sz="1200">
+                          <a:solidFill>
+                            <a:srgbClr val="FFFFFF"/>
+                          </a:solidFill>
+                        </a:defRPr>
+                      </a:pPr>
+                      <a:r>
+                        <a:t>SQL Injection (Học)</a:t>
+                      </a:r>
+                    </a:p>
+                  </a:txBody>
+                  <a:tcPr>
+                    <a:solidFill>
+                      <a:srgbClr val="1D4ED8"/>
+                    </a:solidFill>
+                  </a:tcPr>
+                </a:tc>
+                <a:tc>
+                  <a:txBody>
+                    <a:bodyPr/>
+                    <a:lstStyle/>
+                    <a:p>
+                      <a:pPr>
+                        <a:defRPr b="1" sz="1200">
+                          <a:solidFill>
+                            <a:srgbClr val="FFFFFF"/>
+                          </a:solidFill>
+                        </a:defRPr>
+                      </a:pPr>
+                      <a:r>
+                        <a:t>Stored XSS (Bình)</a:t>
+                      </a:r>
+                    </a:p>
+                  </a:txBody>
+                  <a:tcPr>
+                    <a:solidFill>
+                      <a:srgbClr val="1D4ED8"/>
+                    </a:solidFill>
+                  </a:tcPr>
+                </a:tc>
+                <a:tc>
+                  <a:txBody>
+                    <a:bodyPr/>
+                    <a:lstStyle/>
+                    <a:p>
+                      <a:pPr>
+                        <a:defRPr b="1" sz="1200">
+                          <a:solidFill>
+                            <a:srgbClr val="FFFFFF"/>
+                          </a:solidFill>
+                        </a:defRPr>
+                      </a:pPr>
+                      <a:r>
+                        <a:t>CSRF Attack (Cường)</a:t>
+                      </a:r>
+                    </a:p>
+                  </a:txBody>
+                  <a:tcPr>
+                    <a:solidFill>
+                      <a:srgbClr val="1D4ED8"/>
+                    </a:solidFill>
+                  </a:tcPr>
+                </a:tc>
+              </a:tr>
+              <a:tr h="1188720">
+                <a:tc>
+                  <a:txBody>
+                    <a:bodyPr/>
+                    <a:lstStyle/>
+                    <a:p>
+                      <a:pPr>
+                        <a:defRPr sz="1100">
+                          <a:solidFill>
+                            <a:srgbClr val="0F172A"/>
+                          </a:solidFill>
+                        </a:defRPr>
+                      </a:pPr>
+                      <a:r>
+                        <a:t>Mục tiêu tấn công</a:t>
+                      </a:r>
+                    </a:p>
+                  </a:txBody>
+                  <a:tcPr>
+                    <a:solidFill>
+                      <a:srgbClr val="F8FAFC"/>
+                    </a:solidFill>
+                  </a:tcPr>
+                </a:tc>
+                <a:tc>
+                  <a:txBody>
+                    <a:bodyPr/>
+                    <a:lstStyle/>
+                    <a:p>
+                      <a:pPr>
+                        <a:defRPr sz="1100">
+                          <a:solidFill>
+                            <a:srgbClr val="334155"/>
+                          </a:solidFill>
+                        </a:defRPr>
+                      </a:pPr>
+                      <a:r>
+                        <a:t>Tầng Cơ sở dữ liệu (SQL Server Engine)</a:t>
+                      </a:r>
+                    </a:p>
+                  </a:txBody>
+                  <a:tcPr>
+                    <a:solidFill>
+                      <a:srgbClr val="F8FAFC"/>
+                    </a:solidFill>
+                  </a:tcPr>
+                </a:tc>
+                <a:tc>
+                  <a:txBody>
+                    <a:bodyPr/>
+                    <a:lstStyle/>
+                    <a:p>
+                      <a:pPr>
+                        <a:defRPr sz="1100">
+                          <a:solidFill>
+                            <a:srgbClr val="334155"/>
+                          </a:solidFill>
+                        </a:defRPr>
+                      </a:pPr>
+                      <a:r>
+                        <a:t>Tầng Trình duyệt người dùng (Client DOM)</a:t>
+                      </a:r>
+                    </a:p>
+                  </a:txBody>
+                  <a:tcPr>
+                    <a:solidFill>
+                      <a:srgbClr val="F8FAFC"/>
+                    </a:solidFill>
+                  </a:tcPr>
+                </a:tc>
+                <a:tc>
+                  <a:txBody>
+                    <a:bodyPr/>
+                    <a:lstStyle/>
+                    <a:p>
+                      <a:pPr>
+                        <a:defRPr sz="1100">
+                          <a:solidFill>
+                            <a:srgbClr val="334155"/>
+                          </a:solidFill>
+                        </a:defRPr>
+                      </a:pPr>
+                      <a:r>
+                        <a:t>Quyền hạn của phiên làm việc (Session/Cookie)</a:t>
+                      </a:r>
+                    </a:p>
+                  </a:txBody>
+                  <a:tcPr>
+                    <a:solidFill>
+                      <a:srgbClr val="F8FAFC"/>
+                    </a:solidFill>
+                  </a:tcPr>
+                </a:tc>
+              </a:tr>
+              <a:tr h="1188720">
+                <a:tc>
+                  <a:txBody>
+                    <a:bodyPr/>
+                    <a:lstStyle/>
+                    <a:p>
+                      <a:pPr>
+                        <a:defRPr sz="1100">
+                          <a:solidFill>
+                            <a:srgbClr val="0F172A"/>
+                          </a:solidFill>
+                        </a:defRPr>
+                      </a:pPr>
+                      <a:r>
+                        <a:t>Mức độ nghiêm trọng</a:t>
+                      </a:r>
+                    </a:p>
+                  </a:txBody>
+                  <a:tcPr>
+                    <a:solidFill>
+                      <a:srgbClr val="FFFFFF"/>
+                    </a:solidFill>
+                  </a:tcPr>
+                </a:tc>
+                <a:tc>
+                  <a:txBody>
+                    <a:bodyPr/>
+                    <a:lstStyle/>
+                    <a:p>
+                      <a:pPr>
+                        <a:defRPr sz="1100" b="1">
+                          <a:solidFill>
+                            <a:srgbClr val="BE123C"/>
+                          </a:solidFill>
+                        </a:defRPr>
+                      </a:pPr>
+                      <a:r>
+                        <a:t>CRITICAL (9.8 / 10.0)</a:t>
+                      </a:r>
+                    </a:p>
+                  </a:txBody>
+                  <a:tcPr>
+                    <a:solidFill>
+                      <a:srgbClr val="FFFFFF"/>
+                    </a:solidFill>
+                  </a:tcPr>
+                </a:tc>
+                <a:tc>
+                  <a:txBody>
+                    <a:bodyPr/>
+                    <a:lstStyle/>
+                    <a:p>
+                      <a:pPr>
+                        <a:defRPr sz="1100">
+                          <a:solidFill>
+                            <a:srgbClr val="334155"/>
+                          </a:solidFill>
+                        </a:defRPr>
+                      </a:pPr>
+                      <a:r>
+                        <a:t>HIGH (7.5 - 8.5 / 10.0)</a:t>
+                      </a:r>
+                    </a:p>
+                  </a:txBody>
+                  <a:tcPr>
+                    <a:solidFill>
+                      <a:srgbClr val="FFFFFF"/>
+                    </a:solidFill>
+                  </a:tcPr>
+                </a:tc>
+                <a:tc>
+                  <a:txBody>
+                    <a:bodyPr/>
+                    <a:lstStyle/>
+                    <a:p>
+                      <a:pPr>
+                        <a:defRPr sz="1100">
+                          <a:solidFill>
+                            <a:srgbClr val="334155"/>
+                          </a:solidFill>
+                        </a:defRPr>
+                      </a:pPr>
+                      <a:r>
+                        <a:t>MEDIUM / HIGH (6.5 - 8.0 / 10.0)</a:t>
+                      </a:r>
+                    </a:p>
+                  </a:txBody>
+                  <a:tcPr>
+                    <a:solidFill>
+                      <a:srgbClr val="FFFFFF"/>
+                    </a:solidFill>
+                  </a:tcPr>
+                </a:tc>
+              </a:tr>
+              <a:tr h="1188720">
+                <a:tc>
+                  <a:txBody>
+                    <a:bodyPr/>
+                    <a:lstStyle/>
+                    <a:p>
+                      <a:pPr>
+                        <a:defRPr sz="1100">
+                          <a:solidFill>
+                            <a:srgbClr val="0F172A"/>
+                          </a:solidFill>
+                        </a:defRPr>
+                      </a:pPr>
+                      <a:r>
+                        <a:t>Giải pháp cốt lõi</a:t>
+                      </a:r>
+                    </a:p>
+                  </a:txBody>
+                  <a:tcPr>
+                    <a:solidFill>
+                      <a:srgbClr val="F8FAFC"/>
+                    </a:solidFill>
+                  </a:tcPr>
+                </a:tc>
+                <a:tc>
+                  <a:txBody>
+                    <a:bodyPr/>
+                    <a:lstStyle/>
+                    <a:p>
+                      <a:pPr>
+                        <a:defRPr sz="1100">
+                          <a:solidFill>
+                            <a:srgbClr val="334155"/>
+                          </a:solidFill>
+                        </a:defRPr>
+                      </a:pPr>
+                      <a:r>
+                        <a:t>Parameterized Query / EF Core LINQ</a:t>
+                      </a:r>
+                    </a:p>
+                  </a:txBody>
+                  <a:tcPr>
+                    <a:solidFill>
+                      <a:srgbClr val="F8FAFC"/>
+                    </a:solidFill>
+                  </a:tcPr>
+                </a:tc>
+                <a:tc>
+                  <a:txBody>
+                    <a:bodyPr/>
+                    <a:lstStyle/>
+                    <a:p>
+                      <a:pPr>
+                        <a:defRPr sz="1100">
+                          <a:solidFill>
+                            <a:srgbClr val="334155"/>
+                          </a:solidFill>
+                        </a:defRPr>
+                      </a:pPr>
+                      <a:r>
+                        <a:t>Razor HTML Encoding + HttpOnly Cookie</a:t>
+                      </a:r>
+                    </a:p>
+                  </a:txBody>
+                  <a:tcPr>
+                    <a:solidFill>
+                      <a:srgbClr val="F8FAFC"/>
+                    </a:solidFill>
+                  </a:tcPr>
+                </a:tc>
+                <a:tc>
+                  <a:txBody>
+                    <a:bodyPr/>
+                    <a:lstStyle/>
+                    <a:p>
+                      <a:pPr>
+                        <a:defRPr sz="1100">
+                          <a:solidFill>
+                            <a:srgbClr val="334155"/>
+                          </a:solidFill>
+                        </a:defRPr>
+                      </a:pPr>
+                      <a:r>
+                        <a:t>Anti-Forgery Token + SameSite Cookie</a:t>
+                      </a:r>
+                    </a:p>
+                  </a:txBody>
+                  <a:tcPr>
+                    <a:solidFill>
+                      <a:srgbClr val="F8FAFC"/>
+                    </a:solidFill>
+                  </a:tcPr>
+                </a:tc>
+              </a:tr>
+            </a:tbl>
+          </a:graphicData>
+        </a:graphic>
+      </p:graphicFrame>
+    </p:spTree>
+  </p:cSld>
+  <p:clrMapOvr>
+    <a:masterClrMapping/>
+  </p:clrMapOvr>
+</p:sld>
+</file>
+
+<file path=ppt/slides/slide16.xml><?xml version="1.0" encoding="utf-8"?>
+<p:sld xmlns:a="http://schemas.openxmlformats.org/drawingml/2006/main" xmlns:p="http://schemas.openxmlformats.org/presentationml/2006/main" xmlns:r="http://schemas.openxmlformats.org/officeDocument/2006/relationships">
+  <p:cSld>
+    <p:spTree>
+      <p:nvGrpSpPr>
+        <p:cNvPr id="1" name=""/>
+        <p:cNvGrpSpPr/>
+        <p:nvPr/>
+      </p:nvGrpSpPr>
+      <p:grpSpPr/>
+      <p:sp>
+        <p:nvSpPr>
+          <p:cNvPr id="2" name="Rectangle 1"/>
+          <p:cNvSpPr/>
+          <p:nvPr/>
+        </p:nvSpPr>
+        <p:spPr>
+          <a:xfrm>
+            <a:off x="0" y="0"/>
+            <a:ext cx="12191695" cy="73152"/>
+          </a:xfrm>
+          <a:prstGeom prst="rect">
+            <a:avLst/>
+          </a:prstGeom>
+          <a:solidFill>
+            <a:srgbClr val="1D4ED8"/>
+          </a:solidFill>
+          <a:ln>
+            <a:noFill/>
+          </a:ln>
+        </p:spPr>
+        <p:style>
+          <a:lnRef idx="1">
+            <a:schemeClr val="accent1"/>
+          </a:lnRef>
+          <a:fillRef idx="3">
+            <a:schemeClr val="accent1"/>
+          </a:fillRef>
+          <a:effectRef idx="2">
+            <a:schemeClr val="accent1"/>
+          </a:effectRef>
+          <a:fontRef idx="minor">
+            <a:schemeClr val="lt1"/>
+          </a:fontRef>
+        </p:style>
+        <p:txBody>
+          <a:bodyPr rtlCol="0" anchor="ctr"/>
+          <a:lstStyle/>
+          <a:p>
+            <a:pPr algn="ctr"/>
+          </a:p>
+        </p:txBody>
+      </p:sp>
+      <p:sp>
+        <p:nvSpPr>
+          <p:cNvPr id="3" name="Rounded Rectangle 2"/>
+          <p:cNvSpPr/>
+          <p:nvPr/>
+        </p:nvSpPr>
+        <p:spPr>
+          <a:xfrm>
+            <a:off x="731520" y="292608"/>
+            <a:ext cx="4389120" cy="347472"/>
+          </a:xfrm>
+          <a:prstGeom prst="roundRect">
+            <a:avLst/>
+          </a:prstGeom>
+          <a:solidFill>
+            <a:srgbClr val="EFF6FF"/>
+          </a:solidFill>
+          <a:ln>
+            <a:solidFill>
+              <a:srgbClr val="BFDBFE"/>
+            </a:solidFill>
+          </a:ln>
+        </p:spPr>
+        <p:style>
+          <a:lnRef idx="1">
+            <a:schemeClr val="accent1"/>
+          </a:lnRef>
+          <a:fillRef idx="3">
+            <a:schemeClr val="accent1"/>
+          </a:fillRef>
+          <a:effectRef idx="2">
+            <a:schemeClr val="accent1"/>
+          </a:effectRef>
+          <a:fontRef idx="minor">
+            <a:schemeClr val="lt1"/>
+          </a:fontRef>
+        </p:style>
+        <p:txBody>
+          <a:bodyPr rtlCol="0" anchor="ctr" wrap="none"/>
+          <a:lstStyle/>
+          <a:p>
+            <a:pPr algn="ctr">
+              <a:defRPr sz="1000" b="1">
+                <a:solidFill>
+                  <a:srgbClr val="1D4ED8"/>
+                </a:solidFill>
+              </a:defRPr>
+            </a:pPr>
+            <a:r>
+              <a:t>OWASP TOP 10 • THỰC NGHIỆM AN TOÀN WEB</a:t>
+            </a:r>
+          </a:p>
+        </p:txBody>
+      </p:sp>
+      <p:sp>
+        <p:nvSpPr>
+          <p:cNvPr id="4" name="TextBox 3"/>
+          <p:cNvSpPr txBox="1"/>
+          <p:nvPr/>
+        </p:nvSpPr>
+        <p:spPr>
+          <a:xfrm>
+            <a:off x="731520" y="658368"/>
+            <a:ext cx="10698480" cy="548640"/>
+          </a:xfrm>
+          <a:prstGeom prst="rect">
+            <a:avLst/>
+          </a:prstGeom>
+          <a:noFill/>
+        </p:spPr>
+        <p:txBody>
+          <a:bodyPr wrap="square">
+            <a:spAutoFit/>
+          </a:bodyPr>
+          <a:lstStyle/>
+          <a:p>
+            <a:pPr>
+              <a:defRPr sz="2000" b="1">
+                <a:solidFill>
+                  <a:srgbClr val="0F172A"/>
+                </a:solidFill>
+              </a:defRPr>
+            </a:pPr>
+            <a:r>
+              <a:t>Áp Dụng Kiến Trúc An Toàn Vào Đồ Án Website Tư Vấn Trực Tuyến</a:t>
+            </a:r>
+          </a:p>
+        </p:txBody>
+      </p:sp>
+      <p:sp>
+        <p:nvSpPr>
+          <p:cNvPr id="5" name="TextBox 4"/>
+          <p:cNvSpPr txBox="1"/>
+          <p:nvPr/>
+        </p:nvSpPr>
+        <p:spPr>
+          <a:xfrm>
+            <a:off x="731520" y="6492240"/>
+            <a:ext cx="10698480" cy="274320"/>
+          </a:xfrm>
+          <a:prstGeom prst="rect">
+            <a:avLst/>
+          </a:prstGeom>
+          <a:noFill/>
+        </p:spPr>
+        <p:txBody>
+          <a:bodyPr wrap="none">
+            <a:spAutoFit/>
+          </a:bodyPr>
+          <a:lstStyle/>
+          <a:p>
+            <a:pPr>
+              <a:defRPr sz="950">
+                <a:solidFill>
+                  <a:srgbClr val="64748B"/>
+                </a:solidFill>
+              </a:defRPr>
+            </a:pPr>
+            <a:r>
+              <a:t>Nhóm WNC.G01 (Học - Bình - Cường) • Khoa CNTT - Đại học Mở Hà Nội • GVHD: ThS. Lê Hữu Dũng</a:t>
+            </a:r>
+          </a:p>
+        </p:txBody>
+      </p:sp>
+      <p:sp>
+        <p:nvSpPr>
+          <p:cNvPr id="6" name="Rounded Rectangle 5"/>
+          <p:cNvSpPr/>
+          <p:nvPr/>
+        </p:nvSpPr>
+        <p:spPr>
+          <a:xfrm>
+            <a:off x="731520" y="1280160"/>
+            <a:ext cx="10728655" cy="4846320"/>
+          </a:xfrm>
+          <a:prstGeom prst="roundRect">
+            <a:avLst/>
+          </a:prstGeom>
+          <a:solidFill>
+            <a:srgbClr val="F8FAFC"/>
+          </a:solidFill>
+          <a:ln>
+            <a:solidFill>
+              <a:srgbClr val="E2E8F0"/>
+            </a:solidFill>
+          </a:ln>
+        </p:spPr>
+        <p:style>
+          <a:lnRef idx="1">
+            <a:schemeClr val="accent1"/>
+          </a:lnRef>
+          <a:fillRef idx="3">
+            <a:schemeClr val="accent1"/>
+          </a:fillRef>
+          <a:effectRef idx="2">
+            <a:schemeClr val="accent1"/>
+          </a:effectRef>
+          <a:fontRef idx="minor">
+            <a:schemeClr val="lt1"/>
+          </a:fontRef>
+        </p:style>
+        <p:txBody>
+          <a:bodyPr rtlCol="0" anchor="ctr" wrap="square"/>
+          <a:lstStyle/>
+          <a:p>
+            <a:pPr algn="ctr">
+              <a:defRPr sz="1600" b="1">
+                <a:solidFill>
+                  <a:srgbClr val="1D4ED8"/>
+                </a:solidFill>
+              </a:defRPr>
+            </a:pPr>
+            <a:r>
+              <a:t>CAM KẾT CHUẨN AN TOÀN ĐA TẦNG CHO BTL (NHÓM WNC.G01):</a:t>
+            </a:r>
+          </a:p>
+          <a:p>
+            <a:pPr>
+              <a:spcBef>
+                <a:spcPts val="1000"/>
+              </a:spcBef>
+              <a:defRPr sz="1250">
+                <a:solidFill>
+                  <a:srgbClr val="334155"/>
+                </a:solidFill>
+              </a:defRPr>
+            </a:pPr>
+            <a:r>
+              <a:t>1. Kiến trúc bảo mật (Security View - Buổi 8): Toàn bộ hệ thống được xây dựng theo nguyên tắc 'Security by Design'. Không xem an ninh là tính năng chắp vá mà tích hợp sâu vào kiến trúc 3 tầng.</a:t>
+            </a:r>
+            <a:br/>
+            <a:br/>
+            <a:r>
+              <a:t>2. Bảo vệ CSDL tuyệt đối (Nguyễn Danh Học): 100% các câu truy vấn đặt lịch, hồ sơ chuyên gia và đánh giá chất lượng được quản lý bằng Entity Framework Core Code-First với LINQ Parameterized.</a:t>
+            </a:r>
+            <a:br/>
+            <a:br/>
+            <a:r>
+              <a:t>3. Bảo vệ dữ liệu người dùng (Nguyễn Thanh Bình): 100% nội dung phản hồi tư vấn và bình luận được Razor View mã hóa tự động, Cookie cấu hình HttpOnly = true và Secure = true.</a:t>
+            </a:r>
+            <a:br/>
+            <a:br/>
+            <a:r>
+              <a:t>4. Bảo vệ giao dịch (Nguyễn Minh Cường): Bắt buộc kiểm tra Anti-Forgery Token trên toàn bộ các form đặt lịch hẹn, nạp tiền ví và đổi mật khẩu.</a:t>
+            </a:r>
+          </a:p>
+          <a:p>
+            <a:pPr>
+              <a:spcBef>
+                <a:spcPts val="1600"/>
+              </a:spcBef>
+              <a:defRPr sz="1500" b="1">
+                <a:solidFill>
+                  <a:srgbClr val="BE123C"/>
+                </a:solidFill>
+              </a:defRPr>
+            </a:pPr>
+            <a:r>
+              <a:t>XIN TRÂN TRỌNG CẢM ƠN THẦY VÀ CÁC BẠN ĐÃ THEO DÕI!</a:t>
+            </a:r>
+            <a:br/>
+            <a:r>
+              <a:t>Nhóm WNC.G01 sẵn sàng lắng nghe câu hỏi và nhận xét từ giảng viên.</a:t>
             </a:r>
           </a:p>
         </p:txBody>
@@ -3558,8 +6298,8 @@
         </p:nvSpPr>
         <p:spPr>
           <a:xfrm>
-            <a:off x="731520" y="320040"/>
-            <a:ext cx="4114800" cy="347472"/>
+            <a:off x="731520" y="292608"/>
+            <a:ext cx="4389120" cy="347472"/>
           </a:xfrm>
           <a:prstGeom prst="roundRect">
             <a:avLst/>
@@ -3599,7 +6339,7 @@
               </a:defRPr>
             </a:pPr>
             <a:r>
-              <a:t>CHỦ ĐỀ 1 • NGUYỄN DANH HỌC (23A1001D0158)</a:t>
+              <a:t>OWASP TOP 10 • THỰC NGHIỆM AN TOÀN WEB</a:t>
             </a:r>
           </a:p>
         </p:txBody>
@@ -3612,7 +6352,7 @@
         </p:nvSpPr>
         <p:spPr>
           <a:xfrm>
-            <a:off x="731520" y="685800"/>
+            <a:off x="731520" y="658368"/>
             <a:ext cx="10698480" cy="548640"/>
           </a:xfrm>
           <a:prstGeom prst="rect">
@@ -3627,14 +6367,14 @@
           <a:lstStyle/>
           <a:p>
             <a:pPr>
-              <a:defRPr sz="2100" b="1">
+              <a:defRPr sz="2000" b="1">
                 <a:solidFill>
                   <a:srgbClr val="0F172A"/>
                 </a:solidFill>
               </a:defRPr>
             </a:pPr>
             <a:r>
-              <a:t>Phần 1: SQL Injection (OWASP A03:2021) — Nguyễn Danh Học</a:t>
+              <a:t>Mục Tiêu &amp; Phương Châm Báo Cáo Thực Nghiệm OWASP</a:t>
             </a:r>
           </a:p>
         </p:txBody>
@@ -3682,18 +6422,18 @@
         </p:nvSpPr>
         <p:spPr>
           <a:xfrm>
-            <a:off x="731520" y="1325880"/>
-            <a:ext cx="5166360" cy="3840480"/>
+            <a:off x="731520" y="1280160"/>
+            <a:ext cx="5166360" cy="4846320"/>
           </a:xfrm>
           <a:prstGeom prst="roundRect">
             <a:avLst/>
           </a:prstGeom>
           <a:solidFill>
-            <a:srgbClr val="FFF1F2"/>
+            <a:srgbClr val="F8FAFC"/>
           </a:solidFill>
           <a:ln>
             <a:solidFill>
-              <a:srgbClr val="FECDD3"/>
+              <a:srgbClr val="E2E8F0"/>
             </a:solidFill>
           </a:ln>
         </p:spPr>
@@ -3716,57 +6456,41 @@
           <a:lstStyle/>
           <a:p>
             <a:pPr algn="ctr">
-              <a:defRPr sz="1400" b="1">
+              <a:defRPr sz="1600" b="1">
                 <a:solidFill>
                   <a:srgbClr val="BE123C"/>
                 </a:solidFill>
               </a:defRPr>
             </a:pPr>
             <a:r>
-              <a:t>❌ BẢN CHẤT LỖ HỔNG &amp; KHAI THÁC</a:t>
+              <a:t>🎯 Yêu Cầu Của Giảng Viên (ThS. Lê Hữu Dũng)</a:t>
             </a:r>
           </a:p>
           <a:p>
             <a:pPr>
               <a:spcBef>
-                <a:spcPts val="800"/>
+                <a:spcPts val="1000"/>
               </a:spcBef>
-              <a:defRPr sz="1200">
+              <a:defRPr sz="1300">
                 <a:solidFill>
                   <a:srgbClr val="334155"/>
                 </a:solidFill>
               </a:defRPr>
             </a:pPr>
             <a:r>
-              <a:t>• Nguyên nhân: Ghép chuỗi đầu vào trực tiếp vào câu lệnh SQL.</a:t>
-            </a:r>
-            <a:br/>
-            <a:r>
-              <a:t>  query = $"SELECT * FROM Accounts WHERE User='{u}' AND Pass='{p}'"</a:t>
-            </a:r>
-            <a:br/>
-            <a:r>
-              <a:t>• Payload tấn công: ' OR '1'='1' --</a:t>
-            </a:r>
-            <a:br/>
-            <a:r>
-              <a:t>• Cơ chế bẻ gãy:</a:t>
-            </a:r>
-            <a:br/>
-            <a:r>
-              <a:t>  - Dấu nháy đơn (') đóng chuỗi sớm.</a:t>
-            </a:r>
-            <a:br/>
-            <a:r>
-              <a:t>  - Mệnh đề OR '1'='1' biến điều kiện WHERE thành luôn TRUE.</a:t>
-            </a:r>
-            <a:br/>
-            <a:r>
-              <a:t>  - Ký tự '--' triệt tiêu toàn bộ bước kiểm tra mật khẩu phía sau.</a:t>
-            </a:r>
-            <a:br/>
-            <a:r>
-              <a:t>• Hậu quả: Bypass đăng nhập Admin không cần mật khẩu, rò rỉ CSDL.</a:t>
+              <a:t>• Không dịch lý thuyết tiếng Anh sách vở.</a:t>
+            </a:r>
+            <a:br/>
+            <a:r>
+              <a:t>• Thấy được lỗ hổng thực sự nguy hiểm đến mức nào trong môi trường thực tế.</a:t>
+            </a:r>
+            <a:br/>
+            <a:r>
+              <a:t>• Bắt buộc phải thực nghiệm demo: Muốn phòng thủ an toàn, phải hiểu hacker tấn công hệ thống theo cách nào.</a:t>
+            </a:r>
+            <a:br/>
+            <a:r>
+              <a:t>• Báo cáo đối chứng: Minh chứng rõ ràng giữa code dính lỗi và code đã vá chuẩn.</a:t>
             </a:r>
           </a:p>
         </p:txBody>
@@ -3779,101 +6503,8 @@
         </p:nvSpPr>
         <p:spPr>
           <a:xfrm>
-            <a:off x="6263640" y="1325880"/>
-            <a:ext cx="5166360" cy="3840480"/>
-          </a:xfrm>
-          <a:prstGeom prst="roundRect">
-            <a:avLst/>
-          </a:prstGeom>
-          <a:solidFill>
-            <a:srgbClr val="ECFDF5"/>
-          </a:solidFill>
-          <a:ln>
-            <a:solidFill>
-              <a:srgbClr val="A7F3D0"/>
-            </a:solidFill>
-          </a:ln>
-        </p:spPr>
-        <p:style>
-          <a:lnRef idx="1">
-            <a:schemeClr val="accent1"/>
-          </a:lnRef>
-          <a:fillRef idx="3">
-            <a:schemeClr val="accent1"/>
-          </a:fillRef>
-          <a:effectRef idx="2">
-            <a:schemeClr val="accent1"/>
-          </a:effectRef>
-          <a:fontRef idx="minor">
-            <a:schemeClr val="lt1"/>
-          </a:fontRef>
-        </p:style>
-        <p:txBody>
-          <a:bodyPr rtlCol="0" anchor="ctr" wrap="square"/>
-          <a:lstStyle/>
-          <a:p>
-            <a:pPr algn="ctr">
-              <a:defRPr sz="1400" b="1">
-                <a:solidFill>
-                  <a:srgbClr val="047857"/>
-                </a:solidFill>
-              </a:defRPr>
-            </a:pPr>
-            <a:r>
-              <a:t>✅ CƠ CHẾ PHÒNG THỦ CHUẨN EF CORE</a:t>
-            </a:r>
-          </a:p>
-          <a:p>
-            <a:pPr>
-              <a:spcBef>
-                <a:spcPts val="800"/>
-              </a:spcBef>
-              <a:defRPr sz="1200">
-                <a:solidFill>
-                  <a:srgbClr val="334155"/>
-                </a:solidFill>
-              </a:defRPr>
-            </a:pPr>
-            <a:r>
-              <a:t>• Giải pháp: Sử dụng Parameterized Query / LINQ trong EF Core.</a:t>
-            </a:r>
-            <a:br/>
-            <a:r>
-              <a:t>  _context.Accounts.Where(a =&gt; a.Username == u &amp;&amp; a.Password == p)</a:t>
-            </a:r>
-            <a:br/>
-            <a:r>
-              <a:t>• Cơ chế an toàn tuyệt đối:</a:t>
-            </a:r>
-            <a:br/>
-            <a:r>
-              <a:t>  - CSDL SQL Server biên dịch cấu trúc lệnh (Execution Plan) TRƯỚC.</a:t>
-            </a:r>
-            <a:br/>
-            <a:r>
-              <a:t>  - Giá trị payload được đưa vào qua tham số @p0, @p1 riêng biệt.</a:t>
-            </a:r>
-            <a:br/>
-            <a:r>
-              <a:t>  - Toàn bộ chuỗi payload bị cô lập thành String Literal thuần túy.</a:t>
-            </a:r>
-            <a:br/>
-            <a:r>
-              <a:t>• Kết quả: Trả về 0 dòng, chặn đứng tấn công 100%.</a:t>
-            </a:r>
-          </a:p>
-        </p:txBody>
-      </p:sp>
-      <p:sp>
-        <p:nvSpPr>
-          <p:cNvPr id="8" name="Rounded Rectangle 7"/>
-          <p:cNvSpPr/>
-          <p:nvPr/>
-        </p:nvSpPr>
-        <p:spPr>
-          <a:xfrm>
-            <a:off x="731520" y="5303520"/>
-            <a:ext cx="10728655" cy="868680"/>
+            <a:off x="6263640" y="1280160"/>
+            <a:ext cx="5166360" cy="4846320"/>
           </a:xfrm>
           <a:prstGeom prst="roundRect">
             <a:avLst/>
@@ -3902,33 +6533,45 @@
           </a:fontRef>
         </p:style>
         <p:txBody>
-          <a:bodyPr rtlCol="0" anchor="ctr"/>
+          <a:bodyPr rtlCol="0" anchor="ctr" wrap="square"/>
           <a:lstStyle/>
           <a:p>
             <a:pPr algn="ctr">
-              <a:defRPr sz="1250" b="1">
+              <a:defRPr sz="1600" b="1">
                 <a:solidFill>
                   <a:srgbClr val="1D4ED8"/>
                 </a:solidFill>
               </a:defRPr>
             </a:pPr>
             <a:r>
-              <a:t>💻 [HỌC DEMO TRỰC TIẾP]: Chuyển sang Web UI Tab 1 &amp; VS Code SQL Server 2025</a:t>
+              <a:t>🚀 Phương Pháp Thực Hiện Của Nhóm WNC.G01</a:t>
             </a:r>
           </a:p>
           <a:p>
             <a:pPr>
               <a:spcBef>
-                <a:spcPts val="200"/>
+                <a:spcPts val="1000"/>
               </a:spcBef>
-              <a:defRPr sz="1100">
+              <a:defRPr sz="1300">
                 <a:solidFill>
                   <a:srgbClr val="334155"/>
                 </a:solidFill>
               </a:defRPr>
             </a:pPr>
             <a:r>
-              <a:t>Thao tác: Bấm nạp payload ' OR '1'='1' -- trên Web -&gt; Show bảng dữ liệu rò rỉ -&gt; Chuyển VS Code đối chiếu SQL.</a:t>
+              <a:t>• Xây dựng ứng dụng thực nghiệm độc lập (OWASP_Demo) trên ASP.NET Core MVC .NET 10.</a:t>
+            </a:r>
+            <a:br/>
+            <a:r>
+              <a:t>• Kết nối trực tiếp máy chủ CSDL Microsoft SQL Server 2025 Developer trên Localhost.</a:t>
+            </a:r>
+            <a:br/>
+            <a:r>
+              <a:t>• Tạo sẵn 3 phân hệ tương tác riêng biệt cho 3 thành viên: Bấm 1 click nạp payload và quan sát kết quả tức thì.</a:t>
+            </a:r>
+            <a:br/>
+            <a:r>
+              <a:t>• Áp dụng kết quả thực nghiệm vào thiết kế kiến trúc bảo mật (Security View) của Đồ án BTL.</a:t>
             </a:r>
           </a:p>
         </p:txBody>
@@ -4002,8 +6645,8 @@
         </p:nvSpPr>
         <p:spPr>
           <a:xfrm>
-            <a:off x="731520" y="320040"/>
-            <a:ext cx="4114800" cy="347472"/>
+            <a:off x="731520" y="292608"/>
+            <a:ext cx="4389120" cy="347472"/>
           </a:xfrm>
           <a:prstGeom prst="roundRect">
             <a:avLst/>
@@ -4043,7 +6686,7 @@
               </a:defRPr>
             </a:pPr>
             <a:r>
-              <a:t>CHỦ ĐỀ 2 • NGUYỄN THANH BÌNH (23A1001D0041)</a:t>
+              <a:t>CHỦ ĐỀ 1 • NGUYỄN DANH HỌC (23A1001D0158)</a:t>
             </a:r>
           </a:p>
         </p:txBody>
@@ -4056,7 +6699,7 @@
         </p:nvSpPr>
         <p:spPr>
           <a:xfrm>
-            <a:off x="731520" y="685800"/>
+            <a:off x="731520" y="658368"/>
             <a:ext cx="10698480" cy="548640"/>
           </a:xfrm>
           <a:prstGeom prst="rect">
@@ -4071,14 +6714,14 @@
           <a:lstStyle/>
           <a:p>
             <a:pPr>
-              <a:defRPr sz="2100" b="1">
+              <a:defRPr sz="2000" b="1">
                 <a:solidFill>
                   <a:srgbClr val="0F172A"/>
                 </a:solidFill>
               </a:defRPr>
             </a:pPr>
             <a:r>
-              <a:t>Phần 2: Stored Cross-Site Scripting (XSS) — Nguyễn Thanh Bình</a:t>
+              <a:t>1.1. SQL Injection: Bản Chất Kỹ Thuật &amp; Nguyên Nhân Gốc Rễ</a:t>
             </a:r>
           </a:p>
         </p:txBody>
@@ -4126,8 +6769,89 @@
         </p:nvSpPr>
         <p:spPr>
           <a:xfrm>
-            <a:off x="731520" y="1325880"/>
-            <a:ext cx="5166360" cy="3840480"/>
+            <a:off x="731520" y="1280160"/>
+            <a:ext cx="5166360" cy="4846320"/>
+          </a:xfrm>
+          <a:prstGeom prst="roundRect">
+            <a:avLst/>
+          </a:prstGeom>
+          <a:solidFill>
+            <a:srgbClr val="F8FAFC"/>
+          </a:solidFill>
+          <a:ln>
+            <a:solidFill>
+              <a:srgbClr val="E2E8F0"/>
+            </a:solidFill>
+          </a:ln>
+        </p:spPr>
+        <p:style>
+          <a:lnRef idx="1">
+            <a:schemeClr val="accent1"/>
+          </a:lnRef>
+          <a:fillRef idx="3">
+            <a:schemeClr val="accent1"/>
+          </a:fillRef>
+          <a:effectRef idx="2">
+            <a:schemeClr val="accent1"/>
+          </a:effectRef>
+          <a:fontRef idx="minor">
+            <a:schemeClr val="lt1"/>
+          </a:fontRef>
+        </p:style>
+        <p:txBody>
+          <a:bodyPr rtlCol="0" anchor="ctr" wrap="square"/>
+          <a:lstStyle/>
+          <a:p>
+            <a:pPr algn="ctr">
+              <a:defRPr sz="1500" b="1">
+                <a:solidFill>
+                  <a:srgbClr val="BE123C"/>
+                </a:solidFill>
+              </a:defRPr>
+            </a:pPr>
+            <a:r>
+              <a:t>Nguyên Nhân Cốt Lõi: Nhầm Lẫn Giữa Code &amp; Data</a:t>
+            </a:r>
+          </a:p>
+          <a:p>
+            <a:pPr>
+              <a:spcBef>
+                <a:spcPts val="800"/>
+              </a:spcBef>
+              <a:defRPr sz="1250">
+                <a:solidFill>
+                  <a:srgbClr val="334155"/>
+                </a:solidFill>
+              </a:defRPr>
+            </a:pPr>
+            <a:r>
+              <a:t>• Không phân tách giữa DỮ LIỆU (Data) và CÂU LỆNH (Code).</a:t>
+            </a:r>
+            <a:br/>
+            <a:r>
+              <a:t>• Lập trình viên sử dụng kỹ thuật ghép chuỗi trực tiếp (String Concatenation hoặc Interpolation) để tạo câu SQL từ input của người dùng.</a:t>
+            </a:r>
+            <a:br/>
+            <a:r>
+              <a:t>• Hệ quản trị CSDL khi phân tích cú pháp (Parsing) không thể biết đâu là dữ liệu của user và đâu là cấu trúc lệnh do lập trình viên định nghĩa.</a:t>
+            </a:r>
+            <a:br/>
+            <a:r>
+              <a:t>• Ký tự điều khiển (', --, ;) giúp hacker 'thoát' khỏi phạm vi dữ liệu và ép SQL Server thực thi logic của hacker.</a:t>
+            </a:r>
+          </a:p>
+        </p:txBody>
+      </p:sp>
+      <p:sp>
+        <p:nvSpPr>
+          <p:cNvPr id="7" name="Rounded Rectangle 6"/>
+          <p:cNvSpPr/>
+          <p:nvPr/>
+        </p:nvSpPr>
+        <p:spPr>
+          <a:xfrm>
+            <a:off x="6263640" y="1280160"/>
+            <a:ext cx="5166360" cy="4846320"/>
           </a:xfrm>
           <a:prstGeom prst="roundRect">
             <a:avLst/>
@@ -4160,14 +6884,14 @@
           <a:lstStyle/>
           <a:p>
             <a:pPr algn="ctr">
-              <a:defRPr sz="1400" b="1">
+              <a:defRPr sz="1500" b="1">
                 <a:solidFill>
                   <a:srgbClr val="BE123C"/>
                 </a:solidFill>
               </a:defRPr>
             </a:pPr>
             <a:r>
-              <a:t>❌ BẢN CHẤT LỖ HỔNG &amp; KHAI THÁC</a:t>
+              <a:t>Đoạn Code Gây Lỗi Thực Tế Trong Controller</a:t>
             </a:r>
           </a:p>
           <a:p>
@@ -4175,196 +6899,59 @@
               <a:spcBef>
                 <a:spcPts val="800"/>
               </a:spcBef>
-              <a:defRPr sz="1200">
-                <a:solidFill>
-                  <a:srgbClr val="334155"/>
-                </a:solidFill>
-              </a:defRPr>
-            </a:pPr>
-            <a:r>
-              <a:t>• Ngữ cảnh: Chức năng nhận xét / đánh giá chất lượng chuyên gia.</a:t>
-            </a:r>
-            <a:br/>
-            <a:r>
-              <a:t>• Cơ chế lỗi: Máy chủ lưu nguyên văn chuỗi HTML chứa script của hacker vào CSDL, sau đó View dùng @Html.Raw() để render ra màn hình.</a:t>
-            </a:r>
-            <a:br/>
-            <a:r>
-              <a:t>• Payload tấn công:</a:t>
-            </a:r>
-            <a:br/>
-            <a:r>
-              <a:t>  &lt;script&gt;alert('Lộ Cookie: ' + document.cookie);&lt;/script&gt;</a:t>
-            </a:r>
-            <a:br/>
-            <a:r>
-              <a:t>  &lt;img src=x onerror=alert('XSS!')&gt;</a:t>
-            </a:r>
-            <a:br/>
-            <a:r>
-              <a:t>• Hậu quả: Bất kỳ ai vào xem đánh giá đều bị trình duyệt tự động kích hoạt mã script, bị đánh cắp Cookie, Session Token và thông tin cá nhân.</a:t>
-            </a:r>
-          </a:p>
-        </p:txBody>
-      </p:sp>
-      <p:sp>
-        <p:nvSpPr>
-          <p:cNvPr id="7" name="Rounded Rectangle 6"/>
-          <p:cNvSpPr/>
-          <p:nvPr/>
-        </p:nvSpPr>
-        <p:spPr>
-          <a:xfrm>
-            <a:off x="6263640" y="1325880"/>
-            <a:ext cx="5166360" cy="3840480"/>
-          </a:xfrm>
-          <a:prstGeom prst="roundRect">
-            <a:avLst/>
-          </a:prstGeom>
-          <a:solidFill>
-            <a:srgbClr val="ECFDF5"/>
-          </a:solidFill>
-          <a:ln>
-            <a:solidFill>
-              <a:srgbClr val="A7F3D0"/>
-            </a:solidFill>
-          </a:ln>
-        </p:spPr>
-        <p:style>
-          <a:lnRef idx="1">
-            <a:schemeClr val="accent1"/>
-          </a:lnRef>
-          <a:fillRef idx="3">
-            <a:schemeClr val="accent1"/>
-          </a:fillRef>
-          <a:effectRef idx="2">
-            <a:schemeClr val="accent1"/>
-          </a:effectRef>
-          <a:fontRef idx="minor">
-            <a:schemeClr val="lt1"/>
-          </a:fontRef>
-        </p:style>
-        <p:txBody>
-          <a:bodyPr rtlCol="0" anchor="ctr" wrap="square"/>
-          <a:lstStyle/>
-          <a:p>
-            <a:pPr algn="ctr">
-              <a:defRPr sz="1400" b="1">
-                <a:solidFill>
-                  <a:srgbClr val="047857"/>
-                </a:solidFill>
-              </a:defRPr>
-            </a:pPr>
-            <a:r>
-              <a:t>✅ CƠ CHẾ PHÒNG THỦ TRONG ASP.NET CORE</a:t>
+              <a:defRPr sz="1100">
+                <a:solidFill>
+                  <a:srgbClr val="9F1239"/>
+                </a:solidFill>
+                <a:latin typeface="Courier New"/>
+              </a:defRPr>
+            </a:pPr>
+            <a:r>
+              <a:t>// LỖI NỐI CHUỖI TRỰC TIẾP:</a:t>
+            </a:r>
+            <a:br/>
+            <a:r>
+              <a:t>string rawSql = $"SELECT * FROM Accounts " +</a:t>
+            </a:r>
+            <a:br/>
+            <a:r>
+              <a:t>                $"WHERE Username = '{username}' " +</a:t>
+            </a:r>
+            <a:br/>
+            <a:r>
+              <a:t>                $"AND Password = '{password}'";</a:t>
+            </a:r>
+            <a:br/>
+            <a:br/>
+            <a:r>
+              <a:t>var accounts = _context.Accounts</a:t>
+            </a:r>
+            <a:br/>
+            <a:r>
+              <a:t>                       .FromSqlRaw(rawSql)</a:t>
+            </a:r>
+            <a:br/>
+            <a:r>
+              <a:t>                       .ToList();</a:t>
             </a:r>
           </a:p>
           <a:p>
             <a:pPr>
               <a:spcBef>
-                <a:spcPts val="800"/>
+                <a:spcPts val="1400"/>
               </a:spcBef>
               <a:defRPr sz="1200">
                 <a:solidFill>
-                  <a:srgbClr val="334155"/>
-                </a:solidFill>
-              </a:defRPr>
-            </a:pPr>
-            <a:r>
-              <a:t>• Cơ chế phòng thủ 1 (Mặc định của Razor View):</a:t>
-            </a:r>
-            <a:br/>
-            <a:r>
-              <a:t>  Sử dụng @comment.Content (tự động HTML Encode).</a:t>
-            </a:r>
-            <a:br/>
-            <a:r>
-              <a:t>  Các ký tự nguy hiểm &lt;, &gt;, ", ' tự động biến thành &amp;lt;, &amp;gt;, &amp;quot;.</a:t>
-            </a:r>
-            <a:br/>
-            <a:r>
-              <a:t>• Cơ chế phòng thủ 2 (Mã hóa ở tầng Controller):</a:t>
-            </a:r>
-            <a:br/>
-            <a:r>
-              <a:t>  Sử dụng HtmlEncoder.Default.Encode(content) trước khi lưu.</a:t>
-            </a:r>
-            <a:br/>
-            <a:r>
-              <a:t>• Cơ chế phòng thủ 3 (Bảo vệ Cookie):</a:t>
-            </a:r>
-            <a:br/>
-            <a:r>
-              <a:t>  Bật cờ HttpOnly = true cho toàn bộ Cookie nhạy cảm, ngăn cấm hoàn toàn JavaScript truy cập document.cookie.</a:t>
-            </a:r>
-          </a:p>
-        </p:txBody>
-      </p:sp>
-      <p:sp>
-        <p:nvSpPr>
-          <p:cNvPr id="8" name="Rounded Rectangle 7"/>
-          <p:cNvSpPr/>
-          <p:nvPr/>
-        </p:nvSpPr>
-        <p:spPr>
-          <a:xfrm>
-            <a:off x="731520" y="5303520"/>
-            <a:ext cx="10728655" cy="868680"/>
-          </a:xfrm>
-          <a:prstGeom prst="roundRect">
-            <a:avLst/>
-          </a:prstGeom>
-          <a:solidFill>
-            <a:srgbClr val="FFF1F2"/>
-          </a:solidFill>
-          <a:ln>
-            <a:solidFill>
-              <a:srgbClr val="FECDD3"/>
-            </a:solidFill>
-          </a:ln>
-        </p:spPr>
-        <p:style>
-          <a:lnRef idx="1">
-            <a:schemeClr val="accent1"/>
-          </a:lnRef>
-          <a:fillRef idx="3">
-            <a:schemeClr val="accent1"/>
-          </a:fillRef>
-          <a:effectRef idx="2">
-            <a:schemeClr val="accent1"/>
-          </a:effectRef>
-          <a:fontRef idx="minor">
-            <a:schemeClr val="lt1"/>
-          </a:fontRef>
-        </p:style>
-        <p:txBody>
-          <a:bodyPr rtlCol="0" anchor="ctr"/>
-          <a:lstStyle/>
-          <a:p>
-            <a:pPr algn="ctr">
-              <a:defRPr sz="1250" b="1">
-                <a:solidFill>
-                  <a:srgbClr val="BE123C"/>
-                </a:solidFill>
-              </a:defRPr>
-            </a:pPr>
-            <a:r>
-              <a:t>💬 [BÌNH DEMO TRỰC TIẾP]: Chuyển sang Web UI Tab 2 (Stored XSS)</a:t>
-            </a:r>
-          </a:p>
-          <a:p>
-            <a:pPr>
-              <a:spcBef>
-                <a:spcPts val="200"/>
-              </a:spcBef>
-              <a:defRPr sz="1100">
-                <a:solidFill>
-                  <a:srgbClr val="334155"/>
-                </a:solidFill>
-              </a:defRPr>
-            </a:pPr>
-            <a:r>
-              <a:t>Thao tác: Bấm nạp payload đánh cắp Cookie -&gt; Đăng bình luận bên Lỗi (bật popup alert lộ Session) -&gt; Đăng bên An toàn (chữ hiển thị an toàn).</a:t>
+                  <a:srgbClr val="0F172A"/>
+                </a:solidFill>
+              </a:defRPr>
+            </a:pPr>
+            <a:r>
+              <a:t>⚠️ Điểm mù chết người:</a:t>
+            </a:r>
+            <a:br/>
+            <a:r>
+              <a:t>Lập trình viên mặc định tin rằng input chỉ chứa chữ cái. Khi hacker truyền vào dấu nháy đơn ('), toàn bộ cây cú pháp của câu truy vấn bị bẻ gãy hoàn toàn.</a:t>
             </a:r>
           </a:p>
         </p:txBody>
@@ -4438,8 +7025,8 @@
         </p:nvSpPr>
         <p:spPr>
           <a:xfrm>
-            <a:off x="731520" y="320040"/>
-            <a:ext cx="4114800" cy="347472"/>
+            <a:off x="731520" y="292608"/>
+            <a:ext cx="4389120" cy="347472"/>
           </a:xfrm>
           <a:prstGeom prst="roundRect">
             <a:avLst/>
@@ -4479,7 +7066,7 @@
               </a:defRPr>
             </a:pPr>
             <a:r>
-              <a:t>CHỦ ĐỀ 3 • NGUYỄN MINH CƯỜNG (23A1001D0058)</a:t>
+              <a:t>CHỦ ĐỀ 1 • NGUYỄN DANH HỌC (23A1001D0158)</a:t>
             </a:r>
           </a:p>
         </p:txBody>
@@ -4492,7 +7079,7 @@
         </p:nvSpPr>
         <p:spPr>
           <a:xfrm>
-            <a:off x="731520" y="685800"/>
+            <a:off x="731520" y="658368"/>
             <a:ext cx="10698480" cy="548640"/>
           </a:xfrm>
           <a:prstGeom prst="rect">
@@ -4507,14 +7094,14 @@
           <a:lstStyle/>
           <a:p>
             <a:pPr>
-              <a:defRPr sz="2100" b="1">
+              <a:defRPr sz="2000" b="1">
                 <a:solidFill>
                   <a:srgbClr val="0F172A"/>
                 </a:solidFill>
               </a:defRPr>
             </a:pPr>
             <a:r>
-              <a:t>Phần 3: Cross-Site Request Forgery (CSRF) — Nguyễn Minh Cường</a:t>
+              <a:t>1.2. SQL Injection: Thang Đo Nguy Hiểm &amp; Hậu Quả Thực Tế</a:t>
             </a:r>
           </a:p>
         </p:txBody>
@@ -4562,8 +7149,8 @@
         </p:nvSpPr>
         <p:spPr>
           <a:xfrm>
-            <a:off x="731520" y="1325880"/>
-            <a:ext cx="5166360" cy="3840480"/>
+            <a:off x="731520" y="1280160"/>
+            <a:ext cx="3328416" cy="4846320"/>
           </a:xfrm>
           <a:prstGeom prst="roundRect">
             <a:avLst/>
@@ -4603,13 +7190,17 @@
               </a:defRPr>
             </a:pPr>
             <a:r>
-              <a:t>❌ BẢN CHẤT LỖ HỔNG &amp; KHAI THÁC</a:t>
+              <a:t>🚨 CHIẾM QUYỀN HỆ THỐNG</a:t>
+            </a:r>
+            <a:br/>
+            <a:r>
+              <a:t>(Authentication Bypass)</a:t>
             </a:r>
           </a:p>
           <a:p>
             <a:pPr>
               <a:spcBef>
-                <a:spcPts val="800"/>
+                <a:spcPts val="1000"/>
               </a:spcBef>
               <a:defRPr sz="1200">
                 <a:solidFill>
@@ -4618,31 +7209,15 @@
               </a:defRPr>
             </a:pPr>
             <a:r>
-              <a:t>• Ngữ cảnh: Chức năng chuyển tiền ví hoặc đổi mật khẩu tài khoản.</a:t>
-            </a:r>
-            <a:br/>
-            <a:r>
-              <a:t>• Bản chất: Lừa nạn nhân (đang đăng nhập) gửi một HTTP POST ngầm mà nạn nhân không hề hay biết.</a:t>
-            </a:r>
-            <a:br/>
-            <a:r>
-              <a:t>• Kịch bản tấn công:</a:t>
-            </a:r>
-            <a:br/>
-            <a:r>
-              <a:t>  1. Nạn nhân đăng nhập vào web tư vấn trực tuyến (phiên hợp lệ).</a:t>
-            </a:r>
-            <a:br/>
-            <a:r>
-              <a:t>  2. Nạn nhân mở một trang web bẫy trúng thưởng do hacker dựng.</a:t>
-            </a:r>
-            <a:br/>
-            <a:r>
-              <a:t>  3. Trang web bẫy tự động kích hoạt form POST chuyển 20.000.000đ từ ví nạn nhân sang ví hacker.</a:t>
-            </a:r>
-            <a:br/>
-            <a:r>
-              <a:t>• Hậu quả: Mất tiền, mất tài khoản trong khi máy chủ vẫn tưởng là do nạn nhân tự gửi.</a:t>
+              <a:t>• Không cần biết mật khẩu của bất kỳ ai.</a:t>
+            </a:r>
+            <a:br/>
+            <a:r>
+              <a:t>• Chỉ với 1 chuỗi payload ngắn, kẻ tấn công đăng nhập thẳng vào tài khoản Quản trị viên (Admin).</a:t>
+            </a:r>
+            <a:br/>
+            <a:r>
+              <a:t>• Chiếm đoạt phiên làm việc, đổi quyền hạn và kiểm soát toàn bộ hệ thống.</a:t>
             </a:r>
           </a:p>
         </p:txBody>
@@ -4655,18 +7230,18 @@
         </p:nvSpPr>
         <p:spPr>
           <a:xfrm>
-            <a:off x="6263640" y="1325880"/>
-            <a:ext cx="5166360" cy="3840480"/>
+            <a:off x="4416552" y="1280160"/>
+            <a:ext cx="3328416" cy="4846320"/>
           </a:xfrm>
           <a:prstGeom prst="roundRect">
             <a:avLst/>
           </a:prstGeom>
           <a:solidFill>
-            <a:srgbClr val="ECFDF5"/>
+            <a:srgbClr val="FFFBEB"/>
           </a:solidFill>
           <a:ln>
             <a:solidFill>
-              <a:srgbClr val="A7F3D0"/>
+              <a:srgbClr val="FEF08A"/>
             </a:solidFill>
           </a:ln>
         </p:spPr>
@@ -4691,18 +7266,22 @@
             <a:pPr algn="ctr">
               <a:defRPr sz="1400" b="1">
                 <a:solidFill>
-                  <a:srgbClr val="047857"/>
-                </a:solidFill>
-              </a:defRPr>
-            </a:pPr>
-            <a:r>
-              <a:t>✅ CƠ CHẾ PHÒNG THỦ ANTI-FORGERY TOKEN</a:t>
+                  <a:srgbClr val="B45309"/>
+                </a:solidFill>
+              </a:defRPr>
+            </a:pPr>
+            <a:r>
+              <a:t>📂 ĐÁNH CẮP TOÀN BỘ CSDL</a:t>
+            </a:r>
+            <a:br/>
+            <a:r>
+              <a:t>(Data Exfiltration)</a:t>
             </a:r>
           </a:p>
           <a:p>
             <a:pPr>
               <a:spcBef>
-                <a:spcPts val="800"/>
+                <a:spcPts val="1000"/>
               </a:spcBef>
               <a:defRPr sz="1200">
                 <a:solidFill>
@@ -4711,31 +7290,15 @@
               </a:defRPr>
             </a:pPr>
             <a:r>
-              <a:t>• Giải pháp bắt buộc trong ASP.NET Core:</a:t>
-            </a:r>
-            <a:br/>
-            <a:r>
-              <a:t>  1. Trong View: Nhúng @Html.AntiForgeryToken() sinh token bí mật.</a:t>
-            </a:r>
-            <a:br/>
-            <a:r>
-              <a:t>  2. Trong Controller: Đặt thuộc tính [ValidateAntiForgeryToken].</a:t>
-            </a:r>
-            <a:br/>
-            <a:r>
-              <a:t>• Cơ chế hoạt động của Token:</a:t>
-            </a:r>
-            <a:br/>
-            <a:r>
-              <a:t>  - Server phát hành một cặp token: 1 lưu trong Cookie, 1 nhúng vào Form ẩn.</a:t>
-            </a:r>
-            <a:br/>
-            <a:r>
-              <a:t>  - Trang web của hacker ở tên miền khác KHÔNG THỂ đọc trộm token trong form này (do chính sách Same-Origin Policy).</a:t>
-            </a:r>
-            <a:br/>
-            <a:r>
-              <a:t>  - Request giả mạo thiếu token bị máy chủ từ chối ngay (Lỗi 400 Bad Request).</a:t>
+              <a:t>• Trích xuất thông tin khách hàng, hồ sơ chuyên gia, số dư tài khoản ngân hàng.</a:t>
+            </a:r>
+            <a:br/>
+            <a:r>
+              <a:t>• Rò rỉ mật khẩu và bệnh án cá nhân (Secret Notes).</a:t>
+            </a:r>
+            <a:br/>
+            <a:r>
+              <a:t>• Vi phạm nghiêm trọng an ninh dữ liệu, phá vỡ uy tín của nền tảng tư vấn trực tuyến.</a:t>
             </a:r>
           </a:p>
         </p:txBody>
@@ -4748,18 +7311,18 @@
         </p:nvSpPr>
         <p:spPr>
           <a:xfrm>
-            <a:off x="731520" y="5303520"/>
-            <a:ext cx="10728655" cy="868680"/>
+            <a:off x="8101584" y="1280160"/>
+            <a:ext cx="3328416" cy="4846320"/>
           </a:xfrm>
           <a:prstGeom prst="roundRect">
             <a:avLst/>
           </a:prstGeom>
           <a:solidFill>
-            <a:srgbClr val="ECFDF5"/>
+            <a:srgbClr val="EFF6FF"/>
           </a:solidFill>
           <a:ln>
             <a:solidFill>
-              <a:srgbClr val="A7F3D0"/>
+              <a:srgbClr val="BFDBFE"/>
             </a:solidFill>
           </a:ln>
         </p:spPr>
@@ -4778,33 +7341,45 @@
           </a:fontRef>
         </p:style>
         <p:txBody>
-          <a:bodyPr rtlCol="0" anchor="ctr"/>
+          <a:bodyPr rtlCol="0" anchor="ctr" wrap="square"/>
           <a:lstStyle/>
           <a:p>
             <a:pPr algn="ctr">
-              <a:defRPr sz="1250" b="1">
-                <a:solidFill>
-                  <a:srgbClr val="047857"/>
-                </a:solidFill>
-              </a:defRPr>
-            </a:pPr>
-            <a:r>
-              <a:t>💳 [CƯỜNG DEMO TRỰC TIẾP]: Chuyển sang Web UI Tab 3 (CSRF)</a:t>
+              <a:defRPr sz="1400" b="1">
+                <a:solidFill>
+                  <a:srgbClr val="1D4ED8"/>
+                </a:solidFill>
+              </a:defRPr>
+            </a:pPr>
+            <a:r>
+              <a:t>💣 PHÁ HỦY / THỰC THI LỆNH</a:t>
+            </a:r>
+            <a:br/>
+            <a:r>
+              <a:t>(System Takeover)</a:t>
             </a:r>
           </a:p>
           <a:p>
             <a:pPr>
               <a:spcBef>
-                <a:spcPts val="200"/>
+                <a:spcPts val="1000"/>
               </a:spcBef>
-              <a:defRPr sz="1100">
+              <a:defRPr sz="1200">
                 <a:solidFill>
                   <a:srgbClr val="334155"/>
                 </a:solidFill>
               </a:defRPr>
             </a:pPr>
             <a:r>
-              <a:t>Thao tác: Mở trang web trúng thưởng của hacker -&gt; Kích hoạt form ẩn -&gt; Số dư ví nạn nhân bị trừ 20 triệu -&gt; Thử lại với form có Token (chặn đứng).</a:t>
+              <a:t>• Xóa sạch CSDL với lệnh DROP TABLE hoặc TRUNCATE.</a:t>
+            </a:r>
+            <a:br/>
+            <a:r>
+              <a:t>• Giả mạo số dư tiền trong tài khoản.</a:t>
+            </a:r>
+            <a:br/>
+            <a:r>
+              <a:t>• Trong các CSDL cấu hình lỏng lẻo, hacker có thể bật xp_cmdshell để chiếm quyền điều khiển cả máy chủ hệ điều hành.</a:t>
             </a:r>
           </a:p>
         </p:txBody>
@@ -4878,8 +7453,8 @@
         </p:nvSpPr>
         <p:spPr>
           <a:xfrm>
-            <a:off x="731520" y="320040"/>
-            <a:ext cx="4114800" cy="347472"/>
+            <a:off x="731520" y="292608"/>
+            <a:ext cx="4389120" cy="347472"/>
           </a:xfrm>
           <a:prstGeom prst="roundRect">
             <a:avLst/>
@@ -4919,7 +7494,7 @@
               </a:defRPr>
             </a:pPr>
             <a:r>
-              <a:t>OWASP TOP 10 • BÁO CÁO THỰC NGHIỆM</a:t>
+              <a:t>CHỦ ĐỀ 1 • NGUYỄN DANH HỌC (23A1001D0158)</a:t>
             </a:r>
           </a:p>
         </p:txBody>
@@ -4932,7 +7507,7 @@
         </p:nvSpPr>
         <p:spPr>
           <a:xfrm>
-            <a:off x="731520" y="685800"/>
+            <a:off x="731520" y="658368"/>
             <a:ext cx="10698480" cy="548640"/>
           </a:xfrm>
           <a:prstGeom prst="rect">
@@ -4947,14 +7522,14 @@
           <a:lstStyle/>
           <a:p>
             <a:pPr>
-              <a:defRPr sz="2100" b="1">
+              <a:defRPr sz="2000" b="1">
                 <a:solidFill>
                   <a:srgbClr val="0F172A"/>
                 </a:solidFill>
               </a:defRPr>
             </a:pPr>
             <a:r>
-              <a:t>Tổng Kết: Áp Dụng Chuẩn An Toàn Vào Đồ Án Website Tư Vấn Trực Tuyến</a:t>
+              <a:t>1.3. SQL Injection: Phân Tích Cú Pháp Khai Thác &amp; Live Demo</a:t>
             </a:r>
           </a:p>
         </p:txBody>
@@ -5002,8 +7577,8 @@
         </p:nvSpPr>
         <p:spPr>
           <a:xfrm>
-            <a:off x="731520" y="1325880"/>
-            <a:ext cx="10728655" cy="4846320"/>
+            <a:off x="731520" y="1280160"/>
+            <a:ext cx="10728655" cy="3840480"/>
           </a:xfrm>
           <a:prstGeom prst="roundRect">
             <a:avLst/>
@@ -5036,14 +7611,38 @@
           <a:lstStyle/>
           <a:p>
             <a:pPr algn="ctr">
-              <a:defRPr sz="1600" b="1">
+              <a:defRPr sz="1500" b="1">
+                <a:solidFill>
+                  <a:srgbClr val="BE123C"/>
+                </a:solidFill>
+              </a:defRPr>
+            </a:pPr>
+            <a:r>
+              <a:t>Kịch bản: Bắn Payload Bypass Xác Thực Đăng Nhập Admin</a:t>
+            </a:r>
+          </a:p>
+          <a:p>
+            <a:pPr>
+              <a:spcBef>
+                <a:spcPts val="600"/>
+              </a:spcBef>
+              <a:defRPr sz="1200" b="1">
                 <a:solidFill>
                   <a:srgbClr val="1D4ED8"/>
                 </a:solidFill>
-              </a:defRPr>
-            </a:pPr>
-            <a:r>
-              <a:t>BẢNG TỔNG HỢP GIẢI PHÁP PHÒNG THỦ TRONG ĐỒ ÁN BTL (WNC.G01):</a:t>
+                <a:latin typeface="Courier New"/>
+              </a:defRPr>
+            </a:pPr>
+            <a:r>
+              <a:t>Payload đưa vào ô Username: ' OR '1'='1' --  | Mật khẩu: (nhập bất kỳ hoặc bỏ trống)</a:t>
+            </a:r>
+            <a:br/>
+            <a:r>
+              <a:t>Câu truy vấn thực tế được SQL Server thông dịch:</a:t>
+            </a:r>
+            <a:br/>
+            <a:r>
+              <a:t>SELECT * FROM Accounts WHERE Username = '' OR '1'='1' --' AND Password = 'xyz'</a:t>
             </a:r>
           </a:p>
           <a:p>
@@ -5051,18 +7650,460 @@
               <a:spcBef>
                 <a:spcPts val="1000"/>
               </a:spcBef>
-              <a:defRPr sz="1300">
+              <a:defRPr sz="1200">
                 <a:solidFill>
                   <a:srgbClr val="334155"/>
                 </a:solidFill>
               </a:defRPr>
             </a:pPr>
             <a:r>
-              <a:t>1. Phòng thủ SQL Injection (Nguyễn Danh Học):</a:t>
-            </a:r>
-            <a:br/>
-            <a:r>
-              <a:t>   Áp dụng 100% Entity Framework Core Code-First với Parameterized LINQ cho toàn bộ các thao tác đặt lịch, quản lý chuyên gia và đánh giá chất lượng.</a:t>
+              <a:t>Giải phẫu 3 thành phần payload:</a:t>
+            </a:r>
+            <a:br/>
+            <a:r>
+              <a:t>1. Dấu nháy đơn (') : Đóng sớm chuỗi Username, đưa ngữ cảnh trở lại câu lệnh SQL.</a:t>
+            </a:r>
+            <a:br/>
+            <a:r>
+              <a:t>2. Mệnh đề OR '1'='1' : Biểu thức logic chân lý (luôn TRUE cho mọi bản ghi trong bảng Accounts).</a:t>
+            </a:r>
+            <a:br/>
+            <a:r>
+              <a:t>3. Ký tự chú thích (--) : Vô hiệu hóa hoàn toàn bước kiểm tra mật khẩu phía sau (AND Password = '...').</a:t>
+            </a:r>
+          </a:p>
+        </p:txBody>
+      </p:sp>
+      <p:sp>
+        <p:nvSpPr>
+          <p:cNvPr id="7" name="Rounded Rectangle 6"/>
+          <p:cNvSpPr/>
+          <p:nvPr/>
+        </p:nvSpPr>
+        <p:spPr>
+          <a:xfrm>
+            <a:off x="731520" y="5303520"/>
+            <a:ext cx="10728655" cy="868680"/>
+          </a:xfrm>
+          <a:prstGeom prst="roundRect">
+            <a:avLst/>
+          </a:prstGeom>
+          <a:solidFill>
+            <a:srgbClr val="EFF6FF"/>
+          </a:solidFill>
+          <a:ln>
+            <a:solidFill>
+              <a:srgbClr val="BFDBFE"/>
+            </a:solidFill>
+          </a:ln>
+        </p:spPr>
+        <p:style>
+          <a:lnRef idx="1">
+            <a:schemeClr val="accent1"/>
+          </a:lnRef>
+          <a:fillRef idx="3">
+            <a:schemeClr val="accent1"/>
+          </a:fillRef>
+          <a:effectRef idx="2">
+            <a:schemeClr val="accent1"/>
+          </a:effectRef>
+          <a:fontRef idx="minor">
+            <a:schemeClr val="lt1"/>
+          </a:fontRef>
+        </p:style>
+        <p:txBody>
+          <a:bodyPr rtlCol="0" anchor="ctr"/>
+          <a:lstStyle/>
+          <a:p>
+            <a:pPr algn="ctr">
+              <a:defRPr sz="1250" b="1">
+                <a:solidFill>
+                  <a:srgbClr val="1D4ED8"/>
+                </a:solidFill>
+              </a:defRPr>
+            </a:pPr>
+            <a:r>
+              <a:t>💻 [HỌC LIVE DEMO]: Chuyển sang Web UI Tab 1 &amp; VS Code SQL Server</a:t>
+            </a:r>
+          </a:p>
+          <a:p>
+            <a:pPr>
+              <a:spcBef>
+                <a:spcPts val="200"/>
+              </a:spcBef>
+              <a:defRPr sz="1100">
+                <a:solidFill>
+                  <a:srgbClr val="334155"/>
+                </a:solidFill>
+              </a:defRPr>
+            </a:pPr>
+            <a:r>
+              <a:t>Thao tác trực tiếp: Nạp payload ' OR '1'='1' -- -&gt; Bấm submit bên Đỏ (rò rỉ 4 tài khoản) -&gt; Chuyển VS Code đối chiếu query.</a:t>
+            </a:r>
+          </a:p>
+        </p:txBody>
+      </p:sp>
+    </p:spTree>
+  </p:cSld>
+  <p:clrMapOvr>
+    <a:masterClrMapping/>
+  </p:clrMapOvr>
+</p:sld>
+</file>
+
+<file path=ppt/slides/slide6.xml><?xml version="1.0" encoding="utf-8"?>
+<p:sld xmlns:a="http://schemas.openxmlformats.org/drawingml/2006/main" xmlns:p="http://schemas.openxmlformats.org/presentationml/2006/main" xmlns:r="http://schemas.openxmlformats.org/officeDocument/2006/relationships">
+  <p:cSld>
+    <p:spTree>
+      <p:nvGrpSpPr>
+        <p:cNvPr id="1" name=""/>
+        <p:cNvGrpSpPr/>
+        <p:nvPr/>
+      </p:nvGrpSpPr>
+      <p:grpSpPr/>
+      <p:sp>
+        <p:nvSpPr>
+          <p:cNvPr id="2" name="Rectangle 1"/>
+          <p:cNvSpPr/>
+          <p:nvPr/>
+        </p:nvSpPr>
+        <p:spPr>
+          <a:xfrm>
+            <a:off x="0" y="0"/>
+            <a:ext cx="12191695" cy="73152"/>
+          </a:xfrm>
+          <a:prstGeom prst="rect">
+            <a:avLst/>
+          </a:prstGeom>
+          <a:solidFill>
+            <a:srgbClr val="1D4ED8"/>
+          </a:solidFill>
+          <a:ln>
+            <a:noFill/>
+          </a:ln>
+        </p:spPr>
+        <p:style>
+          <a:lnRef idx="1">
+            <a:schemeClr val="accent1"/>
+          </a:lnRef>
+          <a:fillRef idx="3">
+            <a:schemeClr val="accent1"/>
+          </a:fillRef>
+          <a:effectRef idx="2">
+            <a:schemeClr val="accent1"/>
+          </a:effectRef>
+          <a:fontRef idx="minor">
+            <a:schemeClr val="lt1"/>
+          </a:fontRef>
+        </p:style>
+        <p:txBody>
+          <a:bodyPr rtlCol="0" anchor="ctr"/>
+          <a:lstStyle/>
+          <a:p>
+            <a:pPr algn="ctr"/>
+          </a:p>
+        </p:txBody>
+      </p:sp>
+      <p:sp>
+        <p:nvSpPr>
+          <p:cNvPr id="3" name="Rounded Rectangle 2"/>
+          <p:cNvSpPr/>
+          <p:nvPr/>
+        </p:nvSpPr>
+        <p:spPr>
+          <a:xfrm>
+            <a:off x="731520" y="292608"/>
+            <a:ext cx="4389120" cy="347472"/>
+          </a:xfrm>
+          <a:prstGeom prst="roundRect">
+            <a:avLst/>
+          </a:prstGeom>
+          <a:solidFill>
+            <a:srgbClr val="EFF6FF"/>
+          </a:solidFill>
+          <a:ln>
+            <a:solidFill>
+              <a:srgbClr val="BFDBFE"/>
+            </a:solidFill>
+          </a:ln>
+        </p:spPr>
+        <p:style>
+          <a:lnRef idx="1">
+            <a:schemeClr val="accent1"/>
+          </a:lnRef>
+          <a:fillRef idx="3">
+            <a:schemeClr val="accent1"/>
+          </a:fillRef>
+          <a:effectRef idx="2">
+            <a:schemeClr val="accent1"/>
+          </a:effectRef>
+          <a:fontRef idx="minor">
+            <a:schemeClr val="lt1"/>
+          </a:fontRef>
+        </p:style>
+        <p:txBody>
+          <a:bodyPr rtlCol="0" anchor="ctr" wrap="none"/>
+          <a:lstStyle/>
+          <a:p>
+            <a:pPr algn="ctr">
+              <a:defRPr sz="1000" b="1">
+                <a:solidFill>
+                  <a:srgbClr val="1D4ED8"/>
+                </a:solidFill>
+              </a:defRPr>
+            </a:pPr>
+            <a:r>
+              <a:t>CHỦ ĐỀ 1 • NGUYỄN DANH HỌC (23A1001D0158)</a:t>
+            </a:r>
+          </a:p>
+        </p:txBody>
+      </p:sp>
+      <p:sp>
+        <p:nvSpPr>
+          <p:cNvPr id="4" name="TextBox 3"/>
+          <p:cNvSpPr txBox="1"/>
+          <p:nvPr/>
+        </p:nvSpPr>
+        <p:spPr>
+          <a:xfrm>
+            <a:off x="731520" y="658368"/>
+            <a:ext cx="10698480" cy="548640"/>
+          </a:xfrm>
+          <a:prstGeom prst="rect">
+            <a:avLst/>
+          </a:prstGeom>
+          <a:noFill/>
+        </p:spPr>
+        <p:txBody>
+          <a:bodyPr wrap="square">
+            <a:spAutoFit/>
+          </a:bodyPr>
+          <a:lstStyle/>
+          <a:p>
+            <a:pPr>
+              <a:defRPr sz="2000" b="1">
+                <a:solidFill>
+                  <a:srgbClr val="0F172A"/>
+                </a:solidFill>
+              </a:defRPr>
+            </a:pPr>
+            <a:r>
+              <a:t>1.4. SQL Injection: Cơ Chế Phòng Thủ Chuẩn EF Core LINQ</a:t>
+            </a:r>
+          </a:p>
+        </p:txBody>
+      </p:sp>
+      <p:sp>
+        <p:nvSpPr>
+          <p:cNvPr id="5" name="TextBox 4"/>
+          <p:cNvSpPr txBox="1"/>
+          <p:nvPr/>
+        </p:nvSpPr>
+        <p:spPr>
+          <a:xfrm>
+            <a:off x="731520" y="6492240"/>
+            <a:ext cx="10698480" cy="274320"/>
+          </a:xfrm>
+          <a:prstGeom prst="rect">
+            <a:avLst/>
+          </a:prstGeom>
+          <a:noFill/>
+        </p:spPr>
+        <p:txBody>
+          <a:bodyPr wrap="none">
+            <a:spAutoFit/>
+          </a:bodyPr>
+          <a:lstStyle/>
+          <a:p>
+            <a:pPr>
+              <a:defRPr sz="950">
+                <a:solidFill>
+                  <a:srgbClr val="64748B"/>
+                </a:solidFill>
+              </a:defRPr>
+            </a:pPr>
+            <a:r>
+              <a:t>Nhóm WNC.G01 (Học - Bình - Cường) • Khoa CNTT - Đại học Mở Hà Nội • GVHD: ThS. Lê Hữu Dũng</a:t>
+            </a:r>
+          </a:p>
+        </p:txBody>
+      </p:sp>
+      <p:sp>
+        <p:nvSpPr>
+          <p:cNvPr id="6" name="Rounded Rectangle 5"/>
+          <p:cNvSpPr/>
+          <p:nvPr/>
+        </p:nvSpPr>
+        <p:spPr>
+          <a:xfrm>
+            <a:off x="731520" y="1280160"/>
+            <a:ext cx="5166360" cy="4846320"/>
+          </a:xfrm>
+          <a:prstGeom prst="roundRect">
+            <a:avLst/>
+          </a:prstGeom>
+          <a:solidFill>
+            <a:srgbClr val="ECFDF5"/>
+          </a:solidFill>
+          <a:ln>
+            <a:solidFill>
+              <a:srgbClr val="A7F3D0"/>
+            </a:solidFill>
+          </a:ln>
+        </p:spPr>
+        <p:style>
+          <a:lnRef idx="1">
+            <a:schemeClr val="accent1"/>
+          </a:lnRef>
+          <a:fillRef idx="3">
+            <a:schemeClr val="accent1"/>
+          </a:fillRef>
+          <a:effectRef idx="2">
+            <a:schemeClr val="accent1"/>
+          </a:effectRef>
+          <a:fontRef idx="minor">
+            <a:schemeClr val="lt1"/>
+          </a:fontRef>
+        </p:style>
+        <p:txBody>
+          <a:bodyPr rtlCol="0" anchor="ctr" wrap="square"/>
+          <a:lstStyle/>
+          <a:p>
+            <a:pPr algn="ctr">
+              <a:defRPr sz="1500" b="1">
+                <a:solidFill>
+                  <a:srgbClr val="047857"/>
+                </a:solidFill>
+              </a:defRPr>
+            </a:pPr>
+            <a:r>
+              <a:t>Cách Viết Code Chuẩn Hóa Với EF Core</a:t>
+            </a:r>
+          </a:p>
+          <a:p>
+            <a:pPr>
+              <a:spcBef>
+                <a:spcPts val="800"/>
+              </a:spcBef>
+              <a:defRPr sz="1000">
+                <a:solidFill>
+                  <a:srgbClr val="065F46"/>
+                </a:solidFill>
+                <a:latin typeface="Courier New"/>
+              </a:defRPr>
+            </a:pPr>
+            <a:r>
+              <a:t>// DÙNG LINQ PARAMETERIZED (KHUYÊN DÙNG):</a:t>
+            </a:r>
+            <a:br/>
+            <a:r>
+              <a:t>var account = _context.Accounts</a:t>
+            </a:r>
+            <a:br/>
+            <a:r>
+              <a:t>    .FirstOrDefault(a =&gt; a.Username == user </a:t>
+            </a:r>
+            <a:br/>
+            <a:r>
+              <a:t>                      &amp;&amp; a.Password == pass);</a:t>
+            </a:r>
+            <a:br/>
+            <a:br/>
+            <a:r>
+              <a:t>// HOẶC DÙNG FROMSQLINTERPOLATED (NẾU DÙNG SQL THUẦN):</a:t>
+            </a:r>
+            <a:br/>
+            <a:r>
+              <a:t>var account = _context.Accounts</a:t>
+            </a:r>
+            <a:br/>
+            <a:r>
+              <a:t>    .FromSqlInterpolated($"SELECT * FROM Accounts " +</a:t>
+            </a:r>
+            <a:br/>
+            <a:r>
+              <a:t>                         $"WHERE Username={user} " +</a:t>
+            </a:r>
+            <a:br/>
+            <a:r>
+              <a:t>                         $"AND Password={pass}")</a:t>
+            </a:r>
+            <a:br/>
+            <a:r>
+              <a:t>    .FirstOrDefault();</a:t>
+            </a:r>
+          </a:p>
+          <a:p>
+            <a:pPr>
+              <a:spcBef>
+                <a:spcPts val="1200"/>
+              </a:spcBef>
+              <a:defRPr sz="1200">
+                <a:solidFill>
+                  <a:srgbClr val="0F172A"/>
+                </a:solidFill>
+              </a:defRPr>
+            </a:pPr>
+            <a:r>
+              <a:t>Tại sao cách này an toàn tuyệt đối?</a:t>
+            </a:r>
+            <a:br/>
+            <a:r>
+              <a:t>SQL Server biên dịch cây thực thi (Execution Plan) TRƯỚC khi gán dữ liệu. Biến @p0 nhận toàn bộ payload như một chuỗi chữ bình thường, vô hiệu hóa hoàn toàn ý đồ chèn lệnh.</a:t>
+            </a:r>
+          </a:p>
+        </p:txBody>
+      </p:sp>
+      <p:sp>
+        <p:nvSpPr>
+          <p:cNvPr id="7" name="Rounded Rectangle 6"/>
+          <p:cNvSpPr/>
+          <p:nvPr/>
+        </p:nvSpPr>
+        <p:spPr>
+          <a:xfrm>
+            <a:off x="6263640" y="1280160"/>
+            <a:ext cx="5166360" cy="4846320"/>
+          </a:xfrm>
+          <a:prstGeom prst="roundRect">
+            <a:avLst/>
+          </a:prstGeom>
+          <a:solidFill>
+            <a:srgbClr val="F8FAFC"/>
+          </a:solidFill>
+          <a:ln>
+            <a:solidFill>
+              <a:srgbClr val="E2E8F0"/>
+            </a:solidFill>
+          </a:ln>
+        </p:spPr>
+        <p:style>
+          <a:lnRef idx="1">
+            <a:schemeClr val="accent1"/>
+          </a:lnRef>
+          <a:fillRef idx="3">
+            <a:schemeClr val="accent1"/>
+          </a:fillRef>
+          <a:effectRef idx="2">
+            <a:schemeClr val="accent1"/>
+          </a:effectRef>
+          <a:fontRef idx="minor">
+            <a:schemeClr val="lt1"/>
+          </a:fontRef>
+        </p:style>
+        <p:txBody>
+          <a:bodyPr rtlCol="0" anchor="ctr" wrap="square"/>
+          <a:lstStyle/>
+          <a:p>
+            <a:pPr algn="ctr">
+              <a:defRPr sz="1500" b="1">
+                <a:solidFill>
+                  <a:srgbClr val="1D4ED8"/>
+                </a:solidFill>
+              </a:defRPr>
+            </a:pPr>
+            <a:r>
+              <a:t>Bộ Quy Tắc Phòng Thủ Toàn Diện (Defense-in-Depth)</a:t>
             </a:r>
           </a:p>
           <a:p>
@@ -5070,18 +8111,680 @@
               <a:spcBef>
                 <a:spcPts val="1000"/>
               </a:spcBef>
-              <a:defRPr sz="1300">
+              <a:defRPr sz="1200">
                 <a:solidFill>
                   <a:srgbClr val="334155"/>
                 </a:solidFill>
               </a:defRPr>
             </a:pPr>
             <a:r>
-              <a:t>2. Phòng thủ Stored XSS (Nguyễn Thanh Bình):</a:t>
-            </a:r>
-            <a:br/>
-            <a:r>
-              <a:t>   Toàn bộ phản hồi tư vấn và đánh giá của khách hàng được Razor View tự động HTML Encode, kết hợp cấu hình Cookie an toàn (HttpOnly = true, SameSite = Strict).</a:t>
+              <a:t>1. Luôn sử dụng Parameterized Query / ORM:</a:t>
+            </a:r>
+            <a:br/>
+            <a:r>
+              <a:t>Tuyệt đối không ghép chuỗi SQL thủ công dưới bất kỳ hình thức nào.</a:t>
+            </a:r>
+            <a:br/>
+            <a:br/>
+            <a:r>
+              <a:t>2. Nguyên tắc đặc quyền tối thiểu (Least Privilege):</a:t>
+            </a:r>
+            <a:br/>
+            <a:r>
+              <a:t>Tài khoản kết nối CSDL của ứng dụng chỉ có quyền SELECT/INSERT/UPDATE trên các bảng cần thiết, không bao giờ dùng tài khoản 'sa' hay quyền DDL (DROP, ALTER).</a:t>
+            </a:r>
+            <a:br/>
+            <a:br/>
+            <a:r>
+              <a:t>3. Xác thực dữ liệu đầu vào (Input Validation):</a:t>
+            </a:r>
+            <a:br/>
+            <a:r>
+              <a:t>Sử dụng Data Annotations ([RegularExpression], [StringLength]) kiểm tra chặt chẽ khuôn dạng dữ liệu.</a:t>
+            </a:r>
+            <a:br/>
+            <a:br/>
+            <a:r>
+              <a:t>4. Mã hóa mật khẩu một chiều (Password Hashing):</a:t>
+            </a:r>
+            <a:br/>
+            <a:r>
+              <a:t>Sử dụng ASP.NET Core Identity (PBKDF2/BCrypt) để nếu CSDL có bị lộ, mật khẩu vẫn được bảo vệ an toàn.</a:t>
+            </a:r>
+          </a:p>
+        </p:txBody>
+      </p:sp>
+    </p:spTree>
+  </p:cSld>
+  <p:clrMapOvr>
+    <a:masterClrMapping/>
+  </p:clrMapOvr>
+</p:sld>
+</file>
+
+<file path=ppt/slides/slide7.xml><?xml version="1.0" encoding="utf-8"?>
+<p:sld xmlns:a="http://schemas.openxmlformats.org/drawingml/2006/main" xmlns:p="http://schemas.openxmlformats.org/presentationml/2006/main" xmlns:r="http://schemas.openxmlformats.org/officeDocument/2006/relationships">
+  <p:cSld>
+    <p:spTree>
+      <p:nvGrpSpPr>
+        <p:cNvPr id="1" name=""/>
+        <p:cNvGrpSpPr/>
+        <p:nvPr/>
+      </p:nvGrpSpPr>
+      <p:grpSpPr/>
+      <p:sp>
+        <p:nvSpPr>
+          <p:cNvPr id="2" name="Rectangle 1"/>
+          <p:cNvSpPr/>
+          <p:nvPr/>
+        </p:nvSpPr>
+        <p:spPr>
+          <a:xfrm>
+            <a:off x="0" y="0"/>
+            <a:ext cx="12191695" cy="73152"/>
+          </a:xfrm>
+          <a:prstGeom prst="rect">
+            <a:avLst/>
+          </a:prstGeom>
+          <a:solidFill>
+            <a:srgbClr val="1D4ED8"/>
+          </a:solidFill>
+          <a:ln>
+            <a:noFill/>
+          </a:ln>
+        </p:spPr>
+        <p:style>
+          <a:lnRef idx="1">
+            <a:schemeClr val="accent1"/>
+          </a:lnRef>
+          <a:fillRef idx="3">
+            <a:schemeClr val="accent1"/>
+          </a:fillRef>
+          <a:effectRef idx="2">
+            <a:schemeClr val="accent1"/>
+          </a:effectRef>
+          <a:fontRef idx="minor">
+            <a:schemeClr val="lt1"/>
+          </a:fontRef>
+        </p:style>
+        <p:txBody>
+          <a:bodyPr rtlCol="0" anchor="ctr"/>
+          <a:lstStyle/>
+          <a:p>
+            <a:pPr algn="ctr"/>
+          </a:p>
+        </p:txBody>
+      </p:sp>
+      <p:sp>
+        <p:nvSpPr>
+          <p:cNvPr id="3" name="Rounded Rectangle 2"/>
+          <p:cNvSpPr/>
+          <p:nvPr/>
+        </p:nvSpPr>
+        <p:spPr>
+          <a:xfrm>
+            <a:off x="731520" y="292608"/>
+            <a:ext cx="4389120" cy="347472"/>
+          </a:xfrm>
+          <a:prstGeom prst="roundRect">
+            <a:avLst/>
+          </a:prstGeom>
+          <a:solidFill>
+            <a:srgbClr val="EFF6FF"/>
+          </a:solidFill>
+          <a:ln>
+            <a:solidFill>
+              <a:srgbClr val="BFDBFE"/>
+            </a:solidFill>
+          </a:ln>
+        </p:spPr>
+        <p:style>
+          <a:lnRef idx="1">
+            <a:schemeClr val="accent1"/>
+          </a:lnRef>
+          <a:fillRef idx="3">
+            <a:schemeClr val="accent1"/>
+          </a:fillRef>
+          <a:effectRef idx="2">
+            <a:schemeClr val="accent1"/>
+          </a:effectRef>
+          <a:fontRef idx="minor">
+            <a:schemeClr val="lt1"/>
+          </a:fontRef>
+        </p:style>
+        <p:txBody>
+          <a:bodyPr rtlCol="0" anchor="ctr" wrap="none"/>
+          <a:lstStyle/>
+          <a:p>
+            <a:pPr algn="ctr">
+              <a:defRPr sz="1000" b="1">
+                <a:solidFill>
+                  <a:srgbClr val="1D4ED8"/>
+                </a:solidFill>
+              </a:defRPr>
+            </a:pPr>
+            <a:r>
+              <a:t>CHỦ ĐỀ 2 • NGUYỄN THANH BÌNH (23A1001D0041)</a:t>
+            </a:r>
+          </a:p>
+        </p:txBody>
+      </p:sp>
+      <p:sp>
+        <p:nvSpPr>
+          <p:cNvPr id="4" name="TextBox 3"/>
+          <p:cNvSpPr txBox="1"/>
+          <p:nvPr/>
+        </p:nvSpPr>
+        <p:spPr>
+          <a:xfrm>
+            <a:off x="731520" y="658368"/>
+            <a:ext cx="10698480" cy="548640"/>
+          </a:xfrm>
+          <a:prstGeom prst="rect">
+            <a:avLst/>
+          </a:prstGeom>
+          <a:noFill/>
+        </p:spPr>
+        <p:txBody>
+          <a:bodyPr wrap="square">
+            <a:spAutoFit/>
+          </a:bodyPr>
+          <a:lstStyle/>
+          <a:p>
+            <a:pPr>
+              <a:defRPr sz="2000" b="1">
+                <a:solidFill>
+                  <a:srgbClr val="0F172A"/>
+                </a:solidFill>
+              </a:defRPr>
+            </a:pPr>
+            <a:r>
+              <a:t>2.1. Stored XSS: Bản Chất Kỹ Thuật &amp; Ngữ Cảnh Bài Toán</a:t>
+            </a:r>
+          </a:p>
+        </p:txBody>
+      </p:sp>
+      <p:sp>
+        <p:nvSpPr>
+          <p:cNvPr id="5" name="TextBox 4"/>
+          <p:cNvSpPr txBox="1"/>
+          <p:nvPr/>
+        </p:nvSpPr>
+        <p:spPr>
+          <a:xfrm>
+            <a:off x="731520" y="6492240"/>
+            <a:ext cx="10698480" cy="274320"/>
+          </a:xfrm>
+          <a:prstGeom prst="rect">
+            <a:avLst/>
+          </a:prstGeom>
+          <a:noFill/>
+        </p:spPr>
+        <p:txBody>
+          <a:bodyPr wrap="none">
+            <a:spAutoFit/>
+          </a:bodyPr>
+          <a:lstStyle/>
+          <a:p>
+            <a:pPr>
+              <a:defRPr sz="950">
+                <a:solidFill>
+                  <a:srgbClr val="64748B"/>
+                </a:solidFill>
+              </a:defRPr>
+            </a:pPr>
+            <a:r>
+              <a:t>Nhóm WNC.G01 (Học - Bình - Cường) • Khoa CNTT - Đại học Mở Hà Nội • GVHD: ThS. Lê Hữu Dũng</a:t>
+            </a:r>
+          </a:p>
+        </p:txBody>
+      </p:sp>
+      <p:sp>
+        <p:nvSpPr>
+          <p:cNvPr id="6" name="Rounded Rectangle 5"/>
+          <p:cNvSpPr/>
+          <p:nvPr/>
+        </p:nvSpPr>
+        <p:spPr>
+          <a:xfrm>
+            <a:off x="731520" y="1280160"/>
+            <a:ext cx="5166360" cy="4846320"/>
+          </a:xfrm>
+          <a:prstGeom prst="roundRect">
+            <a:avLst/>
+          </a:prstGeom>
+          <a:solidFill>
+            <a:srgbClr val="F8FAFC"/>
+          </a:solidFill>
+          <a:ln>
+            <a:solidFill>
+              <a:srgbClr val="E2E8F0"/>
+            </a:solidFill>
+          </a:ln>
+        </p:spPr>
+        <p:style>
+          <a:lnRef idx="1">
+            <a:schemeClr val="accent1"/>
+          </a:lnRef>
+          <a:fillRef idx="3">
+            <a:schemeClr val="accent1"/>
+          </a:fillRef>
+          <a:effectRef idx="2">
+            <a:schemeClr val="accent1"/>
+          </a:effectRef>
+          <a:fontRef idx="minor">
+            <a:schemeClr val="lt1"/>
+          </a:fontRef>
+        </p:style>
+        <p:txBody>
+          <a:bodyPr rtlCol="0" anchor="ctr" wrap="square"/>
+          <a:lstStyle/>
+          <a:p>
+            <a:pPr algn="ctr">
+              <a:defRPr sz="1500" b="1">
+                <a:solidFill>
+                  <a:srgbClr val="BE123C"/>
+                </a:solidFill>
+              </a:defRPr>
+            </a:pPr>
+            <a:r>
+              <a:t>Ngữ Cảnh Nghiệp Vụ Trong Website Tư Vấn</a:t>
+            </a:r>
+          </a:p>
+          <a:p>
+            <a:pPr>
+              <a:spcBef>
+                <a:spcPts val="800"/>
+              </a:spcBef>
+              <a:defRPr sz="1250">
+                <a:solidFill>
+                  <a:srgbClr val="334155"/>
+                </a:solidFill>
+              </a:defRPr>
+            </a:pPr>
+            <a:r>
+              <a:t>• Trong website tư vấn trực tuyến, khách hàng có chức năng đăng đánh giá, nhận xét và gửi câu hỏi tư vấn.</a:t>
+            </a:r>
+            <a:br/>
+            <a:r>
+              <a:t>• Bản chất Stored XSS (Persistent XSS): Kẻ tấn công nhúng mã JavaScript độc hại vào nội dung nhận xét.</a:t>
+            </a:r>
+            <a:br/>
+            <a:r>
+              <a:t>• Máy chủ không lọc mà lưu thẳng mã độc vào CSDL (bảng dbo.Comments).</a:t>
+            </a:r>
+            <a:br/>
+            <a:r>
+              <a:t>• Nguy hiểm: Mỗi khi bất kỳ người dùng khác, chuyên gia hoặc quản trị viên mở trang đánh giá, trình duyệt của họ sẽ tự động biên dịch và thực thi đoạn script độc hại đó.</a:t>
+            </a:r>
+          </a:p>
+        </p:txBody>
+      </p:sp>
+      <p:sp>
+        <p:nvSpPr>
+          <p:cNvPr id="7" name="Rounded Rectangle 6"/>
+          <p:cNvSpPr/>
+          <p:nvPr/>
+        </p:nvSpPr>
+        <p:spPr>
+          <a:xfrm>
+            <a:off x="6263640" y="1280160"/>
+            <a:ext cx="5166360" cy="4846320"/>
+          </a:xfrm>
+          <a:prstGeom prst="roundRect">
+            <a:avLst/>
+          </a:prstGeom>
+          <a:solidFill>
+            <a:srgbClr val="FFF1F2"/>
+          </a:solidFill>
+          <a:ln>
+            <a:solidFill>
+              <a:srgbClr val="FECDD3"/>
+            </a:solidFill>
+          </a:ln>
+        </p:spPr>
+        <p:style>
+          <a:lnRef idx="1">
+            <a:schemeClr val="accent1"/>
+          </a:lnRef>
+          <a:fillRef idx="3">
+            <a:schemeClr val="accent1"/>
+          </a:fillRef>
+          <a:effectRef idx="2">
+            <a:schemeClr val="accent1"/>
+          </a:effectRef>
+          <a:fontRef idx="minor">
+            <a:schemeClr val="lt1"/>
+          </a:fontRef>
+        </p:style>
+        <p:txBody>
+          <a:bodyPr rtlCol="0" anchor="ctr" wrap="square"/>
+          <a:lstStyle/>
+          <a:p>
+            <a:pPr algn="ctr">
+              <a:defRPr sz="1500" b="1">
+                <a:solidFill>
+                  <a:srgbClr val="BE123C"/>
+                </a:solidFill>
+              </a:defRPr>
+            </a:pPr>
+            <a:r>
+              <a:t>Mã Nguồn C# Gây Lỗi &amp; Sự Lạm Dụng @@Html.Raw</a:t>
+            </a:r>
+          </a:p>
+          <a:p>
+            <a:pPr>
+              <a:spcBef>
+                <a:spcPts val="800"/>
+              </a:spcBef>
+              <a:defRPr sz="1050">
+                <a:solidFill>
+                  <a:srgbClr val="9F1239"/>
+                </a:solidFill>
+                <a:latin typeface="Courier New"/>
+              </a:defRPr>
+            </a:pPr>
+            <a:r>
+              <a:t>// 1. CONTROLLER LƯU NGUYÊN VĂN KHÔNG LÀM SẠCH:</a:t>
+            </a:r>
+            <a:br/>
+            <a:r>
+              <a:t>var comment = new Comment {</a:t>
+            </a:r>
+            <a:br/>
+            <a:r>
+              <a:t>    Author = author,</a:t>
+            </a:r>
+            <a:br/>
+            <a:r>
+              <a:t>    Content = content // Chứa thẻ &lt;script&gt; độc hại</a:t>
+            </a:r>
+            <a:br/>
+            <a:r>
+              <a:t>};</a:t>
+            </a:r>
+            <a:br/>
+            <a:r>
+              <a:t>_context.Comments.Add(comment);</a:t>
+            </a:r>
+            <a:br/>
+            <a:br/>
+            <a:r>
+              <a:t>// 2. RAZOR VIEW LẠM DỤNG HTML.RAW:</a:t>
+            </a:r>
+            <a:br/>
+            <a:r>
+              <a:t>&lt;div class="comment-body"&gt;</a:t>
+            </a:r>
+            <a:br/>
+            <a:r>
+              <a:t>    @Html.Raw(comment.Content) </a:t>
+            </a:r>
+            <a:br/>
+            <a:r>
+              <a:t>&lt;/div&gt;</a:t>
+            </a:r>
+          </a:p>
+          <a:p>
+            <a:pPr>
+              <a:spcBef>
+                <a:spcPts val="1200"/>
+              </a:spcBef>
+              <a:defRPr sz="1200">
+                <a:solidFill>
+                  <a:srgbClr val="0F172A"/>
+                </a:solidFill>
+              </a:defRPr>
+            </a:pPr>
+            <a:r>
+              <a:t>⚠️ Điểm mù lập trình viên:</a:t>
+            </a:r>
+            <a:br/>
+            <a:r>
+              <a:t>Sử dụng @Html.Raw() với mục đích cho phép hiển thị format HTML nhưng vô tình mở toang cánh cửa cho hacker thực thi JavaScript trên máy nạn nhân.</a:t>
+            </a:r>
+          </a:p>
+        </p:txBody>
+      </p:sp>
+    </p:spTree>
+  </p:cSld>
+  <p:clrMapOvr>
+    <a:masterClrMapping/>
+  </p:clrMapOvr>
+</p:sld>
+</file>
+
+<file path=ppt/slides/slide8.xml><?xml version="1.0" encoding="utf-8"?>
+<p:sld xmlns:a="http://schemas.openxmlformats.org/drawingml/2006/main" xmlns:p="http://schemas.openxmlformats.org/presentationml/2006/main" xmlns:r="http://schemas.openxmlformats.org/officeDocument/2006/relationships">
+  <p:cSld>
+    <p:spTree>
+      <p:nvGrpSpPr>
+        <p:cNvPr id="1" name=""/>
+        <p:cNvGrpSpPr/>
+        <p:nvPr/>
+      </p:nvGrpSpPr>
+      <p:grpSpPr/>
+      <p:sp>
+        <p:nvSpPr>
+          <p:cNvPr id="2" name="Rectangle 1"/>
+          <p:cNvSpPr/>
+          <p:nvPr/>
+        </p:nvSpPr>
+        <p:spPr>
+          <a:xfrm>
+            <a:off x="0" y="0"/>
+            <a:ext cx="12191695" cy="73152"/>
+          </a:xfrm>
+          <a:prstGeom prst="rect">
+            <a:avLst/>
+          </a:prstGeom>
+          <a:solidFill>
+            <a:srgbClr val="1D4ED8"/>
+          </a:solidFill>
+          <a:ln>
+            <a:noFill/>
+          </a:ln>
+        </p:spPr>
+        <p:style>
+          <a:lnRef idx="1">
+            <a:schemeClr val="accent1"/>
+          </a:lnRef>
+          <a:fillRef idx="3">
+            <a:schemeClr val="accent1"/>
+          </a:fillRef>
+          <a:effectRef idx="2">
+            <a:schemeClr val="accent1"/>
+          </a:effectRef>
+          <a:fontRef idx="minor">
+            <a:schemeClr val="lt1"/>
+          </a:fontRef>
+        </p:style>
+        <p:txBody>
+          <a:bodyPr rtlCol="0" anchor="ctr"/>
+          <a:lstStyle/>
+          <a:p>
+            <a:pPr algn="ctr"/>
+          </a:p>
+        </p:txBody>
+      </p:sp>
+      <p:sp>
+        <p:nvSpPr>
+          <p:cNvPr id="3" name="Rounded Rectangle 2"/>
+          <p:cNvSpPr/>
+          <p:nvPr/>
+        </p:nvSpPr>
+        <p:spPr>
+          <a:xfrm>
+            <a:off x="731520" y="292608"/>
+            <a:ext cx="4389120" cy="347472"/>
+          </a:xfrm>
+          <a:prstGeom prst="roundRect">
+            <a:avLst/>
+          </a:prstGeom>
+          <a:solidFill>
+            <a:srgbClr val="EFF6FF"/>
+          </a:solidFill>
+          <a:ln>
+            <a:solidFill>
+              <a:srgbClr val="BFDBFE"/>
+            </a:solidFill>
+          </a:ln>
+        </p:spPr>
+        <p:style>
+          <a:lnRef idx="1">
+            <a:schemeClr val="accent1"/>
+          </a:lnRef>
+          <a:fillRef idx="3">
+            <a:schemeClr val="accent1"/>
+          </a:fillRef>
+          <a:effectRef idx="2">
+            <a:schemeClr val="accent1"/>
+          </a:effectRef>
+          <a:fontRef idx="minor">
+            <a:schemeClr val="lt1"/>
+          </a:fontRef>
+        </p:style>
+        <p:txBody>
+          <a:bodyPr rtlCol="0" anchor="ctr" wrap="none"/>
+          <a:lstStyle/>
+          <a:p>
+            <a:pPr algn="ctr">
+              <a:defRPr sz="1000" b="1">
+                <a:solidFill>
+                  <a:srgbClr val="1D4ED8"/>
+                </a:solidFill>
+              </a:defRPr>
+            </a:pPr>
+            <a:r>
+              <a:t>CHỦ ĐỀ 2 • NGUYỄN THANH BÌNH (23A1001D0041)</a:t>
+            </a:r>
+          </a:p>
+        </p:txBody>
+      </p:sp>
+      <p:sp>
+        <p:nvSpPr>
+          <p:cNvPr id="4" name="TextBox 3"/>
+          <p:cNvSpPr txBox="1"/>
+          <p:nvPr/>
+        </p:nvSpPr>
+        <p:spPr>
+          <a:xfrm>
+            <a:off x="731520" y="658368"/>
+            <a:ext cx="10698480" cy="548640"/>
+          </a:xfrm>
+          <a:prstGeom prst="rect">
+            <a:avLst/>
+          </a:prstGeom>
+          <a:noFill/>
+        </p:spPr>
+        <p:txBody>
+          <a:bodyPr wrap="square">
+            <a:spAutoFit/>
+          </a:bodyPr>
+          <a:lstStyle/>
+          <a:p>
+            <a:pPr>
+              <a:defRPr sz="2000" b="1">
+                <a:solidFill>
+                  <a:srgbClr val="0F172A"/>
+                </a:solidFill>
+              </a:defRPr>
+            </a:pPr>
+            <a:r>
+              <a:t>2.2. Stored XSS: Mối Đe Dọa Đánh Cắp Cookie &amp; Session</a:t>
+            </a:r>
+          </a:p>
+        </p:txBody>
+      </p:sp>
+      <p:sp>
+        <p:nvSpPr>
+          <p:cNvPr id="5" name="TextBox 4"/>
+          <p:cNvSpPr txBox="1"/>
+          <p:nvPr/>
+        </p:nvSpPr>
+        <p:spPr>
+          <a:xfrm>
+            <a:off x="731520" y="6492240"/>
+            <a:ext cx="10698480" cy="274320"/>
+          </a:xfrm>
+          <a:prstGeom prst="rect">
+            <a:avLst/>
+          </a:prstGeom>
+          <a:noFill/>
+        </p:spPr>
+        <p:txBody>
+          <a:bodyPr wrap="none">
+            <a:spAutoFit/>
+          </a:bodyPr>
+          <a:lstStyle/>
+          <a:p>
+            <a:pPr>
+              <a:defRPr sz="950">
+                <a:solidFill>
+                  <a:srgbClr val="64748B"/>
+                </a:solidFill>
+              </a:defRPr>
+            </a:pPr>
+            <a:r>
+              <a:t>Nhóm WNC.G01 (Học - Bình - Cường) • Khoa CNTT - Đại học Mở Hà Nội • GVHD: ThS. Lê Hữu Dũng</a:t>
+            </a:r>
+          </a:p>
+        </p:txBody>
+      </p:sp>
+      <p:sp>
+        <p:nvSpPr>
+          <p:cNvPr id="6" name="Rounded Rectangle 5"/>
+          <p:cNvSpPr/>
+          <p:nvPr/>
+        </p:nvSpPr>
+        <p:spPr>
+          <a:xfrm>
+            <a:off x="731520" y="1280160"/>
+            <a:ext cx="3328416" cy="4846320"/>
+          </a:xfrm>
+          <a:prstGeom prst="roundRect">
+            <a:avLst/>
+          </a:prstGeom>
+          <a:solidFill>
+            <a:srgbClr val="FFF1F2"/>
+          </a:solidFill>
+          <a:ln>
+            <a:solidFill>
+              <a:srgbClr val="FECDD3"/>
+            </a:solidFill>
+          </a:ln>
+        </p:spPr>
+        <p:style>
+          <a:lnRef idx="1">
+            <a:schemeClr val="accent1"/>
+          </a:lnRef>
+          <a:fillRef idx="3">
+            <a:schemeClr val="accent1"/>
+          </a:fillRef>
+          <a:effectRef idx="2">
+            <a:schemeClr val="accent1"/>
+          </a:effectRef>
+          <a:fontRef idx="minor">
+            <a:schemeClr val="lt1"/>
+          </a:fontRef>
+        </p:style>
+        <p:txBody>
+          <a:bodyPr rtlCol="0" anchor="ctr" wrap="square"/>
+          <a:lstStyle/>
+          <a:p>
+            <a:pPr algn="ctr">
+              <a:defRPr sz="1400" b="1">
+                <a:solidFill>
+                  <a:srgbClr val="BE123C"/>
+                </a:solidFill>
+              </a:defRPr>
+            </a:pPr>
+            <a:r>
+              <a:t>🍪 ĐÁNH CẮP SESSION COOKIE</a:t>
+            </a:r>
+            <a:br/>
+            <a:r>
+              <a:t>(Cookie Stealing)</a:t>
             </a:r>
           </a:p>
           <a:p>
@@ -5089,25 +8792,415 @@
               <a:spcBef>
                 <a:spcPts val="1000"/>
               </a:spcBef>
-              <a:defRPr sz="1300">
+              <a:defRPr sz="1200">
                 <a:solidFill>
                   <a:srgbClr val="334155"/>
                 </a:solidFill>
               </a:defRPr>
             </a:pPr>
             <a:r>
-              <a:t>3. Phòng thủ CSRF (Nguyễn Minh Cường):</a:t>
-            </a:r>
-            <a:br/>
-            <a:r>
-              <a:t>   Bắt buộc nhúng AntiForgeryToken và kiểm tra [ValidateAntiForgeryToken] trên 100% các form POST giao dịch (đặt lịch tư vấn, nạp tiền ví, đổi mật khẩu).</a:t>
+              <a:t>• Mã độc truy cập document.cookie để trích xuất Session Token của nạn nhân.</a:t>
+            </a:r>
+            <a:br/>
+            <a:r>
+              <a:t>• Tự động gửi token về máy chủ của hacker.</a:t>
+            </a:r>
+            <a:br/>
+            <a:r>
+              <a:t>• Hacker giả mạo danh tính nạn nhân (Session Hijacking) đăng nhập vào tài khoản mà không cần mật khẩu.</a:t>
+            </a:r>
+          </a:p>
+        </p:txBody>
+      </p:sp>
+      <p:sp>
+        <p:nvSpPr>
+          <p:cNvPr id="7" name="Rounded Rectangle 6"/>
+          <p:cNvSpPr/>
+          <p:nvPr/>
+        </p:nvSpPr>
+        <p:spPr>
+          <a:xfrm>
+            <a:off x="4416552" y="1280160"/>
+            <a:ext cx="3328416" cy="4846320"/>
+          </a:xfrm>
+          <a:prstGeom prst="roundRect">
+            <a:avLst/>
+          </a:prstGeom>
+          <a:solidFill>
+            <a:srgbClr val="FFFBEB"/>
+          </a:solidFill>
+          <a:ln>
+            <a:solidFill>
+              <a:srgbClr val="FEF08A"/>
+            </a:solidFill>
+          </a:ln>
+        </p:spPr>
+        <p:style>
+          <a:lnRef idx="1">
+            <a:schemeClr val="accent1"/>
+          </a:lnRef>
+          <a:fillRef idx="3">
+            <a:schemeClr val="accent1"/>
+          </a:fillRef>
+          <a:effectRef idx="2">
+            <a:schemeClr val="accent1"/>
+          </a:effectRef>
+          <a:fontRef idx="minor">
+            <a:schemeClr val="lt1"/>
+          </a:fontRef>
+        </p:style>
+        <p:txBody>
+          <a:bodyPr rtlCol="0" anchor="ctr" wrap="square"/>
+          <a:lstStyle/>
+          <a:p>
+            <a:pPr algn="ctr">
+              <a:defRPr sz="1400" b="1">
+                <a:solidFill>
+                  <a:srgbClr val="B45309"/>
+                </a:solidFill>
+              </a:defRPr>
+            </a:pPr>
+            <a:r>
+              <a:t>🎣 THAY ĐỔI NỘI DUNG GIAO DIỆN</a:t>
+            </a:r>
+            <a:br/>
+            <a:r>
+              <a:t>(DOM Defacement &amp; Phishing)</a:t>
             </a:r>
           </a:p>
           <a:p>
             <a:pPr>
               <a:spcBef>
-                <a:spcPts val="1800"/>
+                <a:spcPts val="1000"/>
               </a:spcBef>
+              <a:defRPr sz="1200">
+                <a:solidFill>
+                  <a:srgbClr val="334155"/>
+                </a:solidFill>
+              </a:defRPr>
+            </a:pPr>
+            <a:r>
+              <a:t>• Hacker dùng JavaScript chèn form đăng nhập giả mạo đè lên giao diện website thật.</a:t>
+            </a:r>
+            <a:br/>
+            <a:r>
+              <a:t>• Lừa người dùng nhập lại tài khoản ngân hàng hoặc mật khẩu.</a:t>
+            </a:r>
+            <a:br/>
+            <a:r>
+              <a:t>• Chuyển hướng người dùng sang trang web lừa đảo (Open Redirect).</a:t>
+            </a:r>
+          </a:p>
+        </p:txBody>
+      </p:sp>
+      <p:sp>
+        <p:nvSpPr>
+          <p:cNvPr id="8" name="Rounded Rectangle 7"/>
+          <p:cNvSpPr/>
+          <p:nvPr/>
+        </p:nvSpPr>
+        <p:spPr>
+          <a:xfrm>
+            <a:off x="8101584" y="1280160"/>
+            <a:ext cx="3328416" cy="4846320"/>
+          </a:xfrm>
+          <a:prstGeom prst="roundRect">
+            <a:avLst/>
+          </a:prstGeom>
+          <a:solidFill>
+            <a:srgbClr val="EFF6FF"/>
+          </a:solidFill>
+          <a:ln>
+            <a:solidFill>
+              <a:srgbClr val="BFDBFE"/>
+            </a:solidFill>
+          </a:ln>
+        </p:spPr>
+        <p:style>
+          <a:lnRef idx="1">
+            <a:schemeClr val="accent1"/>
+          </a:lnRef>
+          <a:fillRef idx="3">
+            <a:schemeClr val="accent1"/>
+          </a:fillRef>
+          <a:effectRef idx="2">
+            <a:schemeClr val="accent1"/>
+          </a:effectRef>
+          <a:fontRef idx="minor">
+            <a:schemeClr val="lt1"/>
+          </a:fontRef>
+        </p:style>
+        <p:txBody>
+          <a:bodyPr rtlCol="0" anchor="ctr" wrap="square"/>
+          <a:lstStyle/>
+          <a:p>
+            <a:pPr algn="ctr">
+              <a:defRPr sz="1400" b="1">
+                <a:solidFill>
+                  <a:srgbClr val="1D4ED8"/>
+                </a:solidFill>
+              </a:defRPr>
+            </a:pPr>
+            <a:r>
+              <a:t>🤖 THỰC HIỆN THAO TÁC NGẦM</a:t>
+            </a:r>
+            <a:br/>
+            <a:r>
+              <a:t>(XSS-Keylogger)</a:t>
+            </a:r>
+          </a:p>
+          <a:p>
+            <a:pPr>
+              <a:spcBef>
+                <a:spcPts val="1000"/>
+              </a:spcBef>
+              <a:defRPr sz="1200">
+                <a:solidFill>
+                  <a:srgbClr val="334155"/>
+                </a:solidFill>
+              </a:defRPr>
+            </a:pPr>
+            <a:r>
+              <a:t>• Lắng nghe sự kiện bàn phím của nạn nhân (Keylogging) khi họ chat với chuyên gia.</a:t>
+            </a:r>
+            <a:br/>
+            <a:r>
+              <a:t>• Tự động gửi tin nhắn hoặc đánh giá 5 sao giả mạo danh nghĩa của người dùng.</a:t>
+            </a:r>
+            <a:br/>
+            <a:r>
+              <a:t>• Biến trình duyệt nạn nhân thành botnet tấn công từ chối dịch vụ.</a:t>
+            </a:r>
+          </a:p>
+        </p:txBody>
+      </p:sp>
+    </p:spTree>
+  </p:cSld>
+  <p:clrMapOvr>
+    <a:masterClrMapping/>
+  </p:clrMapOvr>
+</p:sld>
+</file>
+
+<file path=ppt/slides/slide9.xml><?xml version="1.0" encoding="utf-8"?>
+<p:sld xmlns:a="http://schemas.openxmlformats.org/drawingml/2006/main" xmlns:p="http://schemas.openxmlformats.org/presentationml/2006/main" xmlns:r="http://schemas.openxmlformats.org/officeDocument/2006/relationships">
+  <p:cSld>
+    <p:spTree>
+      <p:nvGrpSpPr>
+        <p:cNvPr id="1" name=""/>
+        <p:cNvGrpSpPr/>
+        <p:nvPr/>
+      </p:nvGrpSpPr>
+      <p:grpSpPr/>
+      <p:sp>
+        <p:nvSpPr>
+          <p:cNvPr id="2" name="Rectangle 1"/>
+          <p:cNvSpPr/>
+          <p:nvPr/>
+        </p:nvSpPr>
+        <p:spPr>
+          <a:xfrm>
+            <a:off x="0" y="0"/>
+            <a:ext cx="12191695" cy="73152"/>
+          </a:xfrm>
+          <a:prstGeom prst="rect">
+            <a:avLst/>
+          </a:prstGeom>
+          <a:solidFill>
+            <a:srgbClr val="1D4ED8"/>
+          </a:solidFill>
+          <a:ln>
+            <a:noFill/>
+          </a:ln>
+        </p:spPr>
+        <p:style>
+          <a:lnRef idx="1">
+            <a:schemeClr val="accent1"/>
+          </a:lnRef>
+          <a:fillRef idx="3">
+            <a:schemeClr val="accent1"/>
+          </a:fillRef>
+          <a:effectRef idx="2">
+            <a:schemeClr val="accent1"/>
+          </a:effectRef>
+          <a:fontRef idx="minor">
+            <a:schemeClr val="lt1"/>
+          </a:fontRef>
+        </p:style>
+        <p:txBody>
+          <a:bodyPr rtlCol="0" anchor="ctr"/>
+          <a:lstStyle/>
+          <a:p>
+            <a:pPr algn="ctr"/>
+          </a:p>
+        </p:txBody>
+      </p:sp>
+      <p:sp>
+        <p:nvSpPr>
+          <p:cNvPr id="3" name="Rounded Rectangle 2"/>
+          <p:cNvSpPr/>
+          <p:nvPr/>
+        </p:nvSpPr>
+        <p:spPr>
+          <a:xfrm>
+            <a:off x="731520" y="292608"/>
+            <a:ext cx="4389120" cy="347472"/>
+          </a:xfrm>
+          <a:prstGeom prst="roundRect">
+            <a:avLst/>
+          </a:prstGeom>
+          <a:solidFill>
+            <a:srgbClr val="EFF6FF"/>
+          </a:solidFill>
+          <a:ln>
+            <a:solidFill>
+              <a:srgbClr val="BFDBFE"/>
+            </a:solidFill>
+          </a:ln>
+        </p:spPr>
+        <p:style>
+          <a:lnRef idx="1">
+            <a:schemeClr val="accent1"/>
+          </a:lnRef>
+          <a:fillRef idx="3">
+            <a:schemeClr val="accent1"/>
+          </a:fillRef>
+          <a:effectRef idx="2">
+            <a:schemeClr val="accent1"/>
+          </a:effectRef>
+          <a:fontRef idx="minor">
+            <a:schemeClr val="lt1"/>
+          </a:fontRef>
+        </p:style>
+        <p:txBody>
+          <a:bodyPr rtlCol="0" anchor="ctr" wrap="none"/>
+          <a:lstStyle/>
+          <a:p>
+            <a:pPr algn="ctr">
+              <a:defRPr sz="1000" b="1">
+                <a:solidFill>
+                  <a:srgbClr val="1D4ED8"/>
+                </a:solidFill>
+              </a:defRPr>
+            </a:pPr>
+            <a:r>
+              <a:t>CHỦ ĐỀ 2 • NGUYỄN THANH BÌNH (23A1001D0041)</a:t>
+            </a:r>
+          </a:p>
+        </p:txBody>
+      </p:sp>
+      <p:sp>
+        <p:nvSpPr>
+          <p:cNvPr id="4" name="TextBox 3"/>
+          <p:cNvSpPr txBox="1"/>
+          <p:nvPr/>
+        </p:nvSpPr>
+        <p:spPr>
+          <a:xfrm>
+            <a:off x="731520" y="658368"/>
+            <a:ext cx="10698480" cy="548640"/>
+          </a:xfrm>
+          <a:prstGeom prst="rect">
+            <a:avLst/>
+          </a:prstGeom>
+          <a:noFill/>
+        </p:spPr>
+        <p:txBody>
+          <a:bodyPr wrap="square">
+            <a:spAutoFit/>
+          </a:bodyPr>
+          <a:lstStyle/>
+          <a:p>
+            <a:pPr>
+              <a:defRPr sz="2000" b="1">
+                <a:solidFill>
+                  <a:srgbClr val="0F172A"/>
+                </a:solidFill>
+              </a:defRPr>
+            </a:pPr>
+            <a:r>
+              <a:t>2.3. Stored XSS: Kịch Bản Khai Thác &amp; Live Demo Tương Tác</a:t>
+            </a:r>
+          </a:p>
+        </p:txBody>
+      </p:sp>
+      <p:sp>
+        <p:nvSpPr>
+          <p:cNvPr id="5" name="TextBox 4"/>
+          <p:cNvSpPr txBox="1"/>
+          <p:nvPr/>
+        </p:nvSpPr>
+        <p:spPr>
+          <a:xfrm>
+            <a:off x="731520" y="6492240"/>
+            <a:ext cx="10698480" cy="274320"/>
+          </a:xfrm>
+          <a:prstGeom prst="rect">
+            <a:avLst/>
+          </a:prstGeom>
+          <a:noFill/>
+        </p:spPr>
+        <p:txBody>
+          <a:bodyPr wrap="none">
+            <a:spAutoFit/>
+          </a:bodyPr>
+          <a:lstStyle/>
+          <a:p>
+            <a:pPr>
+              <a:defRPr sz="950">
+                <a:solidFill>
+                  <a:srgbClr val="64748B"/>
+                </a:solidFill>
+              </a:defRPr>
+            </a:pPr>
+            <a:r>
+              <a:t>Nhóm WNC.G01 (Học - Bình - Cường) • Khoa CNTT - Đại học Mở Hà Nội • GVHD: ThS. Lê Hữu Dũng</a:t>
+            </a:r>
+          </a:p>
+        </p:txBody>
+      </p:sp>
+      <p:sp>
+        <p:nvSpPr>
+          <p:cNvPr id="6" name="Rounded Rectangle 5"/>
+          <p:cNvSpPr/>
+          <p:nvPr/>
+        </p:nvSpPr>
+        <p:spPr>
+          <a:xfrm>
+            <a:off x="731520" y="1280160"/>
+            <a:ext cx="10728655" cy="3840480"/>
+          </a:xfrm>
+          <a:prstGeom prst="roundRect">
+            <a:avLst/>
+          </a:prstGeom>
+          <a:solidFill>
+            <a:srgbClr val="F8FAFC"/>
+          </a:solidFill>
+          <a:ln>
+            <a:solidFill>
+              <a:srgbClr val="E2E8F0"/>
+            </a:solidFill>
+          </a:ln>
+        </p:spPr>
+        <p:style>
+          <a:lnRef idx="1">
+            <a:schemeClr val="accent1"/>
+          </a:lnRef>
+          <a:fillRef idx="3">
+            <a:schemeClr val="accent1"/>
+          </a:fillRef>
+          <a:effectRef idx="2">
+            <a:schemeClr val="accent1"/>
+          </a:effectRef>
+          <a:fontRef idx="minor">
+            <a:schemeClr val="lt1"/>
+          </a:fontRef>
+        </p:style>
+        <p:txBody>
+          <a:bodyPr rtlCol="0" anchor="ctr" wrap="square"/>
+          <a:lstStyle/>
+          <a:p>
+            <a:pPr algn="ctr">
               <a:defRPr sz="1500" b="1">
                 <a:solidFill>
                   <a:srgbClr val="BE123C"/>
@@ -5115,11 +9208,127 @@
               </a:defRPr>
             </a:pPr>
             <a:r>
-              <a:t>XIN TRÂN TRỌNG CẢM ƠN THẦY VÀ CÁC BẠN ĐÃ THEO DÕI!</a:t>
-            </a:r>
-            <a:br/>
-            <a:r>
-              <a:t>Nhóm WNC.G01 sẵn sàng nhận câu hỏi phản biện từ giảng viên.</a:t>
+              <a:t>Kịch bản: Chèn Script Đánh Cắp Cookie Vào Chức Năng Đánh Giá</a:t>
+            </a:r>
+          </a:p>
+          <a:p>
+            <a:pPr>
+              <a:spcBef>
+                <a:spcPts val="600"/>
+              </a:spcBef>
+              <a:defRPr sz="1150" b="1">
+                <a:solidFill>
+                  <a:srgbClr val="1D4ED8"/>
+                </a:solidFill>
+                <a:latin typeface="Courier New"/>
+              </a:defRPr>
+            </a:pPr>
+            <a:r>
+              <a:t>Payload 1 (Thẻ Script): &lt;script&gt;alert('Lộ Cookie: ' + document.cookie);&lt;/script&gt;</a:t>
+            </a:r>
+            <a:br/>
+            <a:r>
+              <a:t>Payload 2 (Bypass qua thẻ ảnh): &lt;img src=x onerror=alert('XSS kích hoạt qua onerror!')&gt;</a:t>
+            </a:r>
+            <a:br/>
+            <a:r>
+              <a:t>Payload 3 (Defacement): &lt;script&gt;document.body.innerHTML='&lt;h1&gt;WEB ĐÃ BỊ HACK&lt;/h1&gt;';&lt;/script&gt;</a:t>
+            </a:r>
+          </a:p>
+          <a:p>
+            <a:pPr>
+              <a:spcBef>
+                <a:spcPts val="1000"/>
+              </a:spcBef>
+              <a:defRPr sz="1200">
+                <a:solidFill>
+                  <a:srgbClr val="334155"/>
+                </a:solidFill>
+              </a:defRPr>
+            </a:pPr>
+            <a:r>
+              <a:t>Cơ chế kích hoạt thực nghiệm:</a:t>
+            </a:r>
+            <a:br/>
+            <a:r>
+              <a:t>1. Hacker gửi bình luận chứa payload lên máy chủ qua form dính lỗi.</a:t>
+            </a:r>
+            <a:br/>
+            <a:r>
+              <a:t>2. Máy chủ lưu trực tiếp đoạn mã vào bảng dbo.Comments.</a:t>
+            </a:r>
+            <a:br/>
+            <a:r>
+              <a:t>3. Khi tải lại trang, trình duyệt đọc thấy thẻ &lt;script&gt; và lập tức thực thi: Popup Alert bật lên hiển thị giá trị AuthSessionToken giả lập được lưu trong cookie!</a:t>
+            </a:r>
+          </a:p>
+        </p:txBody>
+      </p:sp>
+      <p:sp>
+        <p:nvSpPr>
+          <p:cNvPr id="7" name="Rounded Rectangle 6"/>
+          <p:cNvSpPr/>
+          <p:nvPr/>
+        </p:nvSpPr>
+        <p:spPr>
+          <a:xfrm>
+            <a:off x="731520" y="5303520"/>
+            <a:ext cx="10728655" cy="868680"/>
+          </a:xfrm>
+          <a:prstGeom prst="roundRect">
+            <a:avLst/>
+          </a:prstGeom>
+          <a:solidFill>
+            <a:srgbClr val="FFF1F2"/>
+          </a:solidFill>
+          <a:ln>
+            <a:solidFill>
+              <a:srgbClr val="FECDD3"/>
+            </a:solidFill>
+          </a:ln>
+        </p:spPr>
+        <p:style>
+          <a:lnRef idx="1">
+            <a:schemeClr val="accent1"/>
+          </a:lnRef>
+          <a:fillRef idx="3">
+            <a:schemeClr val="accent1"/>
+          </a:fillRef>
+          <a:effectRef idx="2">
+            <a:schemeClr val="accent1"/>
+          </a:effectRef>
+          <a:fontRef idx="minor">
+            <a:schemeClr val="lt1"/>
+          </a:fontRef>
+        </p:style>
+        <p:txBody>
+          <a:bodyPr rtlCol="0" anchor="ctr"/>
+          <a:lstStyle/>
+          <a:p>
+            <a:pPr algn="ctr">
+              <a:defRPr sz="1250" b="1">
+                <a:solidFill>
+                  <a:srgbClr val="BE123C"/>
+                </a:solidFill>
+              </a:defRPr>
+            </a:pPr>
+            <a:r>
+              <a:t>💬 [BÌNH LIVE DEMO]: Chuyển sang Web UI Tab 2 (Stored XSS)</a:t>
+            </a:r>
+          </a:p>
+          <a:p>
+            <a:pPr>
+              <a:spcBef>
+                <a:spcPts val="200"/>
+              </a:spcBef>
+              <a:defRPr sz="1100">
+                <a:solidFill>
+                  <a:srgbClr val="334155"/>
+                </a:solidFill>
+              </a:defRPr>
+            </a:pPr>
+            <a:r>
+              <a:t>Thao tác: Bấm nạp payload đánh cắp Cookie -&gt; Đăng bên Lỗi (bật popup alert lộ Session) -&gt; Đăng bên An toàn (chữ hiển thị an toàn).</a:t>
             </a:r>
           </a:p>
         </p:txBody>

--- a/Slide_OWASP_Top3_Nhom_WNC_G01.pptx
+++ b/Slide_OWASP_Top3_Nhom_WNC_G01.pptx
@@ -21,6 +21,12 @@
     <p:sldId id="269" r:id="rId20"/>
     <p:sldId id="270" r:id="rId21"/>
     <p:sldId id="271" r:id="rId22"/>
+    <p:sldId id="272" r:id="rId23"/>
+    <p:sldId id="273" r:id="rId24"/>
+    <p:sldId id="274" r:id="rId25"/>
+    <p:sldId id="275" r:id="rId26"/>
+    <p:sldId id="276" r:id="rId27"/>
+    <p:sldId id="277" r:id="rId28"/>
   </p:sldIdLst>
   <p:sldSz cx="12191695" cy="6858000" type="screen4x3"/>
   <p:notesSz cx="6858000" cy="9144000"/>
@@ -3645,7 +3651,7 @@
               </a:defRPr>
             </a:pPr>
             <a:r>
-              <a:t>2.4. Stored XSS: Cơ Chế Phòng Thủ Chuẩn Trong ASP.NET Core</a:t>
+              <a:t>2.2. Stored XSS: Phân Loại Chuẩn &amp; Mối Đe Dọa Nghiêm Trọng</a:t>
             </a:r>
           </a:p>
         </p:txBody>
@@ -3694,17 +3700,17 @@
         <p:spPr>
           <a:xfrm>
             <a:off x="731520" y="1280160"/>
-            <a:ext cx="5166360" cy="4846320"/>
+            <a:ext cx="3328416" cy="4846320"/>
           </a:xfrm>
           <a:prstGeom prst="roundRect">
             <a:avLst/>
           </a:prstGeom>
           <a:solidFill>
-            <a:srgbClr val="ECFDF5"/>
+            <a:srgbClr val="FFF1F2"/>
           </a:solidFill>
           <a:ln>
             <a:solidFill>
-              <a:srgbClr val="A7F3D0"/>
+              <a:srgbClr val="FECDD3"/>
             </a:solidFill>
           </a:ln>
         </p:spPr>
@@ -3727,78 +3733,41 @@
           <a:lstStyle/>
           <a:p>
             <a:pPr algn="ctr">
-              <a:defRPr sz="1500" b="1">
-                <a:solidFill>
-                  <a:srgbClr val="047857"/>
-                </a:solidFill>
-              </a:defRPr>
-            </a:pPr>
-            <a:r>
-              <a:t>Cơ Chế HTML Encoding Tự Động Của Razor View</a:t>
+              <a:defRPr sz="1400" b="1">
+                <a:solidFill>
+                  <a:srgbClr val="BE123C"/>
+                </a:solidFill>
+              </a:defRPr>
+            </a:pPr>
+            <a:r>
+              <a:t>🍪 ĐÁNH CẮP SESSION COOKIE</a:t>
+            </a:r>
+            <a:br/>
+            <a:r>
+              <a:t>(Cookie Stealing)</a:t>
             </a:r>
           </a:p>
           <a:p>
             <a:pPr>
               <a:spcBef>
-                <a:spcPts val="800"/>
-              </a:spcBef>
-              <a:defRPr sz="1050">
-                <a:solidFill>
-                  <a:srgbClr val="065F46"/>
-                </a:solidFill>
-                <a:latin typeface="Courier New"/>
-              </a:defRPr>
-            </a:pPr>
-            <a:r>
-              <a:t>// PHÒNG THỦ MẶC ĐỊNH (KHÔNG DÙNG HTML.RAW):</a:t>
-            </a:r>
-            <a:br/>
-            <a:r>
-              <a:t>&lt;p&gt;@comment.Content&lt;/p&gt;</a:t>
-            </a:r>
-            <a:br/>
-            <a:br/>
-            <a:r>
-              <a:t>// HOẶC MÃ HÓA TẠI CONTROLLER TRƯỚC KHI LƯU:</a:t>
-            </a:r>
-            <a:br/>
-            <a:r>
-              <a:t>string encoded = HtmlEncoder.Default.Encode(content);</a:t>
-            </a:r>
-            <a:br/>
-            <a:r>
-              <a:t>comment.Content = encoded;</a:t>
-            </a:r>
-          </a:p>
-          <a:p>
-            <a:pPr>
-              <a:spcBef>
-                <a:spcPts val="1200"/>
+                <a:spcPts val="1000"/>
               </a:spcBef>
               <a:defRPr sz="1200">
                 <a:solidFill>
-                  <a:srgbClr val="0F172A"/>
-                </a:solidFill>
-              </a:defRPr>
-            </a:pPr>
-            <a:r>
-              <a:t>Cơ chế biến đổi ký tự nguy hiểm:</a:t>
-            </a:r>
-            <a:br/>
-            <a:r>
-              <a:t>• Ký tự '&lt;' biến thành &amp;lt;</a:t>
-            </a:r>
-            <a:br/>
-            <a:r>
-              <a:t>• Ký tự '&gt;' biến thành &amp;gt;</a:t>
-            </a:r>
-            <a:br/>
-            <a:r>
-              <a:t>• Dấu ngoặc kép '"' biến thành &amp;quot;</a:t>
-            </a:r>
-            <a:br/>
-            <a:r>
-              <a:t>Trình duyệt thông dịch đây là ký tự văn bản thuần túy để hiển thị, tuyệt đối không coi là thẻ thực thi mã JavaScript.</a:t>
+                  <a:srgbClr val="334155"/>
+                </a:solidFill>
+              </a:defRPr>
+            </a:pPr>
+            <a:r>
+              <a:t>• Mã độc truy cập document.cookie để trích xuất Session Token của nạn nhân.</a:t>
+            </a:r>
+            <a:br/>
+            <a:r>
+              <a:t>• Tự động gửi token về máy chủ của hacker.</a:t>
+            </a:r>
+            <a:br/>
+            <a:r>
+              <a:t>• Hacker giả mạo danh tính nạn nhân (Session Hijacking) đăng nhập vào tài khoản mà không cần mật khẩu.</a:t>
             </a:r>
           </a:p>
         </p:txBody>
@@ -3811,18 +3780,18 @@
         </p:nvSpPr>
         <p:spPr>
           <a:xfrm>
-            <a:off x="6263640" y="1280160"/>
-            <a:ext cx="5166360" cy="4846320"/>
+            <a:off x="4416552" y="1280160"/>
+            <a:ext cx="3328416" cy="4846320"/>
           </a:xfrm>
           <a:prstGeom prst="roundRect">
             <a:avLst/>
           </a:prstGeom>
           <a:solidFill>
-            <a:srgbClr val="F8FAFC"/>
+            <a:srgbClr val="FFFBEB"/>
           </a:solidFill>
           <a:ln>
             <a:solidFill>
-              <a:srgbClr val="E2E8F0"/>
+              <a:srgbClr val="FEF08A"/>
             </a:solidFill>
           </a:ln>
         </p:spPr>
@@ -3845,14 +3814,18 @@
           <a:lstStyle/>
           <a:p>
             <a:pPr algn="ctr">
-              <a:defRPr sz="1500" b="1">
-                <a:solidFill>
-                  <a:srgbClr val="1D4ED8"/>
-                </a:solidFill>
-              </a:defRPr>
-            </a:pPr>
-            <a:r>
-              <a:t>Bộ Giải Pháp Phòng Vệ Chiều Sâu (Defense-in-Depth)</a:t>
+              <a:defRPr sz="1400" b="1">
+                <a:solidFill>
+                  <a:srgbClr val="B45309"/>
+                </a:solidFill>
+              </a:defRPr>
+            </a:pPr>
+            <a:r>
+              <a:t>🎣 THAY ĐỔI GIAO DIỆN / LỪA ĐẢO</a:t>
+            </a:r>
+            <a:br/>
+            <a:r>
+              <a:t>(DOM Defacement &amp; Phishing)</a:t>
             </a:r>
           </a:p>
           <a:p>
@@ -3867,29 +3840,96 @@
               </a:defRPr>
             </a:pPr>
             <a:r>
-              <a:t>1. Bật cờ HttpOnly = true cho Cookie phiên:</a:t>
-            </a:r>
-            <a:br/>
-            <a:r>
-              <a:t>Ngăn chặn tuyệt đối mọi đoạn mã JavaScript (kể cả khi đã inject thành công) truy cập vào document.cookie.</a:t>
-            </a:r>
-            <a:br/>
-            <a:br/>
-            <a:r>
-              <a:t>2. Cấu hình Content Security Policy (CSP Header):</a:t>
-            </a:r>
-            <a:br/>
-            <a:r>
-              <a:t>Thiết lập HTTP Header chỉ cho phép thực thi script từ nguồn đáng tin cậy, chặn đứng inline script (&lt;script&gt;...&lt;/script&gt;).</a:t>
-            </a:r>
-            <a:br/>
-            <a:br/>
-            <a:r>
-              <a:t>3. Làm sạch dữ liệu đầu vào (Input Sanitization):</a:t>
-            </a:r>
-            <a:br/>
-            <a:r>
-              <a:t>Sử dụng thư viện HtmlSanitizer để loại bỏ triệt để các thẻ nguy hiểm (&lt;script&gt;, &lt;iframe&gt;, &lt;object&gt;, thuộc tính onerror/onload).</a:t>
+              <a:t>• Hacker dùng JavaScript chèn form đăng nhập giả mạo đè lên giao diện website thật.</a:t>
+            </a:r>
+            <a:br/>
+            <a:r>
+              <a:t>• Lừa người dùng nhập lại tài khoản ngân hàng hoặc mật khẩu.</a:t>
+            </a:r>
+            <a:br/>
+            <a:r>
+              <a:t>• Chuyển hướng người dùng sang trang web lừa đảo (Open Redirect).</a:t>
+            </a:r>
+          </a:p>
+        </p:txBody>
+      </p:sp>
+      <p:sp>
+        <p:nvSpPr>
+          <p:cNvPr id="8" name="Rounded Rectangle 7"/>
+          <p:cNvSpPr/>
+          <p:nvPr/>
+        </p:nvSpPr>
+        <p:spPr>
+          <a:xfrm>
+            <a:off x="8101584" y="1280160"/>
+            <a:ext cx="3328416" cy="4846320"/>
+          </a:xfrm>
+          <a:prstGeom prst="roundRect">
+            <a:avLst/>
+          </a:prstGeom>
+          <a:solidFill>
+            <a:srgbClr val="EFF6FF"/>
+          </a:solidFill>
+          <a:ln>
+            <a:solidFill>
+              <a:srgbClr val="BFDBFE"/>
+            </a:solidFill>
+          </a:ln>
+        </p:spPr>
+        <p:style>
+          <a:lnRef idx="1">
+            <a:schemeClr val="accent1"/>
+          </a:lnRef>
+          <a:fillRef idx="3">
+            <a:schemeClr val="accent1"/>
+          </a:fillRef>
+          <a:effectRef idx="2">
+            <a:schemeClr val="accent1"/>
+          </a:effectRef>
+          <a:fontRef idx="minor">
+            <a:schemeClr val="lt1"/>
+          </a:fontRef>
+        </p:style>
+        <p:txBody>
+          <a:bodyPr rtlCol="0" anchor="ctr" wrap="square"/>
+          <a:lstStyle/>
+          <a:p>
+            <a:pPr algn="ctr">
+              <a:defRPr sz="1400" b="1">
+                <a:solidFill>
+                  <a:srgbClr val="1D4ED8"/>
+                </a:solidFill>
+              </a:defRPr>
+            </a:pPr>
+            <a:r>
+              <a:t>🤖 THAO TÁC NGẦM &amp; KEYLOGGER</a:t>
+            </a:r>
+            <a:br/>
+            <a:r>
+              <a:t>(Client-Side Hijacking)</a:t>
+            </a:r>
+          </a:p>
+          <a:p>
+            <a:pPr>
+              <a:spcBef>
+                <a:spcPts val="1000"/>
+              </a:spcBef>
+              <a:defRPr sz="1200">
+                <a:solidFill>
+                  <a:srgbClr val="334155"/>
+                </a:solidFill>
+              </a:defRPr>
+            </a:pPr>
+            <a:r>
+              <a:t>• Lắng nghe sự kiện bàn phím của nạn nhân (Keylogging) khi họ chat với chuyên gia.</a:t>
+            </a:r>
+            <a:br/>
+            <a:r>
+              <a:t>• Tự động gửi tin nhắn hoặc đánh giá 5 sao giả mạo danh nghĩa của người dùng.</a:t>
+            </a:r>
+            <a:br/>
+            <a:r>
+              <a:t>• Biến trình duyệt nạn nhân thành botnet tấn công từ chối dịch vụ.</a:t>
             </a:r>
           </a:p>
         </p:txBody>
@@ -4004,7 +4044,7 @@
               </a:defRPr>
             </a:pPr>
             <a:r>
-              <a:t>CHỦ ĐỀ 3 • NGUYỄN MINH CƯỜNG (23A1001D0058)</a:t>
+              <a:t>CHỦ ĐỀ 2 • NGUYỄN THANH BÌNH (23A1001D0041)</a:t>
             </a:r>
           </a:p>
         </p:txBody>
@@ -4039,7 +4079,7 @@
               </a:defRPr>
             </a:pPr>
             <a:r>
-              <a:t>3.1. CSRF Attack: Bản Chất Kỹ Thuật &amp; Cơ Chế Giả Mạo</a:t>
+              <a:t>2.3. Stored XSS: Phân Tích Các Kỹ Thuật Đưa Payload Vào CSDL</a:t>
             </a:r>
           </a:p>
         </p:txBody>
@@ -4088,7 +4128,7 @@
         <p:spPr>
           <a:xfrm>
             <a:off x="731520" y="1280160"/>
-            <a:ext cx="5166360" cy="4846320"/>
+            <a:ext cx="10728655" cy="4846320"/>
           </a:xfrm>
           <a:prstGeom prst="roundRect">
             <a:avLst/>
@@ -4128,7 +4168,7 @@
               </a:defRPr>
             </a:pPr>
             <a:r>
-              <a:t>Bản Chất Của Lỗ Hổng Cross-Site Request Forgery</a:t>
+              <a:t>3 Biến Thể Payload XSS Thực Nghiệm Trong Ứng Dụng</a:t>
             </a:r>
           </a:p>
           <a:p>
@@ -4143,81 +4183,15 @@
               </a:defRPr>
             </a:pPr>
             <a:r>
-              <a:t>• CSRF (A01:2021 - Broken Access Control) là kỹ thuật tấn công mượn quyền của người dùng hợp lệ.</a:t>
-            </a:r>
-            <a:br/>
-            <a:r>
-              <a:t>• Điều kiện xảy ra:</a:t>
-            </a:r>
-            <a:br/>
-            <a:r>
-              <a:t>  1. Nạn nhân đã đăng nhập vào hệ thống tư vấn trực tuyến (phiên làm việc Session/Cookie vẫn đang hợp lệ).</a:t>
-            </a:r>
-            <a:br/>
-            <a:r>
-              <a:t>  2. Trình duyệt tự động đính kèm Cookie xác thực vào mọi HTTP Request gửi tới hệ thống đó.</a:t>
-            </a:r>
-            <a:br/>
-            <a:r>
-              <a:t>  3. Kẻ tấn công lừa nạn nhân truy cập một trang web độc hại ở một tab khác (Attacker Site).</a:t>
-            </a:r>
-            <a:br/>
-            <a:r>
-              <a:t>• Điểm mù: Máy chủ chỉ kiểm tra Cookie mà không kiểm tra xem Request đó bắt nguồn từ đâu!</a:t>
-            </a:r>
-          </a:p>
-        </p:txBody>
-      </p:sp>
-      <p:sp>
-        <p:nvSpPr>
-          <p:cNvPr id="7" name="Rounded Rectangle 6"/>
-          <p:cNvSpPr/>
-          <p:nvPr/>
-        </p:nvSpPr>
-        <p:spPr>
-          <a:xfrm>
-            <a:off x="6263640" y="1280160"/>
-            <a:ext cx="5166360" cy="4846320"/>
-          </a:xfrm>
-          <a:prstGeom prst="roundRect">
-            <a:avLst/>
-          </a:prstGeom>
-          <a:solidFill>
-            <a:srgbClr val="FFF1F2"/>
-          </a:solidFill>
-          <a:ln>
-            <a:solidFill>
-              <a:srgbClr val="FECDD3"/>
-            </a:solidFill>
-          </a:ln>
-        </p:spPr>
-        <p:style>
-          <a:lnRef idx="1">
-            <a:schemeClr val="accent1"/>
-          </a:lnRef>
-          <a:fillRef idx="3">
-            <a:schemeClr val="accent1"/>
-          </a:fillRef>
-          <a:effectRef idx="2">
-            <a:schemeClr val="accent1"/>
-          </a:effectRef>
-          <a:fontRef idx="minor">
-            <a:schemeClr val="lt1"/>
-          </a:fontRef>
-        </p:style>
-        <p:txBody>
-          <a:bodyPr rtlCol="0" anchor="ctr" wrap="square"/>
-          <a:lstStyle/>
-          <a:p>
-            <a:pPr algn="ctr">
-              <a:defRPr sz="1500" b="1">
-                <a:solidFill>
-                  <a:srgbClr val="BE123C"/>
-                </a:solidFill>
-              </a:defRPr>
-            </a:pPr>
-            <a:r>
-              <a:t>Action Bị Lỗi: Thiếu Thuộc Tính Phòng Vệ</a:t>
+              <a:t>1. Payload 1 (Thẻ Script Truyền Thống):</a:t>
+            </a:r>
+            <a:br/>
+            <a:r>
+              <a:t>   &lt;script&gt;alert('🚨 BỊ HACK XSS! Lộ Session Cookie: ' + document.cookie);&lt;/script&gt;</a:t>
+            </a:r>
+            <a:br/>
+            <a:r>
+              <a:t>   Cơ chế: Trình duyệt gặp thẻ &lt;script&gt; sẽ tạm dừng render HTML và thực thi mã JavaScript ngay lập tức.</a:t>
             </a:r>
           </a:p>
           <a:p>
@@ -4225,82 +4199,45 @@
               <a:spcBef>
                 <a:spcPts val="800"/>
               </a:spcBef>
-              <a:defRPr sz="1000">
-                <a:solidFill>
-                  <a:srgbClr val="9F1239"/>
-                </a:solidFill>
-                <a:latin typeface="Courier New"/>
-              </a:defRPr>
-            </a:pPr>
-            <a:r>
-              <a:t>// ACTION NHẬN TIỀN KHÔNG CÓ BẢO VỆ TOKEN:</a:t>
-            </a:r>
-            <a:br/>
-            <a:r>
-              <a:t>[HttpPost]</a:t>
-            </a:r>
-            <a:br/>
-            <a:r>
-              <a:t>public IActionResult TransferVulnerable(decimal amount)</a:t>
-            </a:r>
-            <a:br/>
-            <a:r>
-              <a:t>{</a:t>
-            </a:r>
-            <a:br/>
-            <a:r>
-              <a:t>    var victim = _context.Wallets.Find(1);</a:t>
-            </a:r>
-            <a:br/>
-            <a:r>
-              <a:t>    var hacker = _context.Wallets.Find(2);</a:t>
-            </a:r>
-            <a:br/>
-            <a:r>
-              <a:t>    </a:t>
-            </a:r>
-            <a:br/>
-            <a:r>
-              <a:t>    // Trừ tiền nạn nhân, cộng tiền hacker:</a:t>
-            </a:r>
-            <a:br/>
-            <a:r>
-              <a:t>    victim.Balance -= amount;</a:t>
-            </a:r>
-            <a:br/>
-            <a:r>
-              <a:t>    hacker.Balance += amount;</a:t>
-            </a:r>
-            <a:br/>
-            <a:r>
-              <a:t>    _context.SaveChanges();</a:t>
-            </a:r>
-            <a:br/>
-            <a:r>
-              <a:t>    return RedirectToAction("Index");</a:t>
-            </a:r>
-            <a:br/>
-            <a:r>
-              <a:t>}</a:t>
+              <a:defRPr sz="1250">
+                <a:solidFill>
+                  <a:srgbClr val="334155"/>
+                </a:solidFill>
+              </a:defRPr>
+            </a:pPr>
+            <a:r>
+              <a:t>2. Payload 2 (Bypass Bộ Lọc Qua Thẻ Ảnh - Event Handler):</a:t>
+            </a:r>
+            <a:br/>
+            <a:r>
+              <a:t>   &lt;img src=x onerror=alert('🚨 XSS kích hoạt qua thẻ IMG onerror!')&gt;</a:t>
+            </a:r>
+            <a:br/>
+            <a:r>
+              <a:t>   Cơ chế: Hacker qua mặt các bộ lọc từ khóa '&lt;script&gt;' bằng cách dùng thuộc tính sự kiện 'onerror' của thẻ &lt;img&gt; khi đường dẫn ảnh bị lỗi (src=x).</a:t>
             </a:r>
           </a:p>
           <a:p>
             <a:pPr>
               <a:spcBef>
-                <a:spcPts val="1000"/>
+                <a:spcPts val="800"/>
               </a:spcBef>
-              <a:defRPr sz="1200">
-                <a:solidFill>
-                  <a:srgbClr val="0F172A"/>
-                </a:solidFill>
-              </a:defRPr>
-            </a:pPr>
-            <a:r>
-              <a:t>⚠️ Nguy hiểm:</a:t>
-            </a:r>
-            <a:br/>
-            <a:r>
-              <a:t>Bất kỳ trang web nào trên Internet cũng có thể gửi form POST tới URL này. Máy chủ thấy Cookie hợp lệ sẽ trừ tiền ngay lập tức!</a:t>
+              <a:defRPr sz="1250">
+                <a:solidFill>
+                  <a:srgbClr val="334155"/>
+                </a:solidFill>
+              </a:defRPr>
+            </a:pPr>
+            <a:r>
+              <a:t>3. Payload 3 (Thay Đổi Toàn Bộ Cây DOM - Web Defacement):</a:t>
+            </a:r>
+            <a:br/>
+            <a:r>
+              <a:t>   &lt;script&gt;document.body.innerHTML='&lt;h1 style=color:red;text-align:center&gt;WEB ĐÃ BỊ CHIẾM QUYỀN&lt;/h1&gt;';&lt;/script&gt;</a:t>
+            </a:r>
+            <a:br/>
+            <a:r>
+              <a:t>   Cơ chế: Xóa sạch toàn bộ nội dung trang web chính thống và hiển thị thông điệp của hacker!</a:t>
             </a:r>
           </a:p>
         </p:txBody>
@@ -4415,7 +4352,7 @@
               </a:defRPr>
             </a:pPr>
             <a:r>
-              <a:t>CHỦ ĐỀ 3 • NGUYỄN MINH CƯỜNG (23A1001D0058)</a:t>
+              <a:t>CHỦ ĐỀ 2 • NGUYỄN THANH BÌNH (23A1001D0041)</a:t>
             </a:r>
           </a:p>
         </p:txBody>
@@ -4450,7 +4387,7 @@
               </a:defRPr>
             </a:pPr>
             <a:r>
-              <a:t>3.2. CSRF Attack: Kịch Bản Lừa Đảo Chuyển Tiền Ví Ngầm</a:t>
+              <a:t>2.4. Stored XSS: Đối Chứng Thực Nghiệm &amp; Live Demo Trực Tiếp</a:t>
             </a:r>
           </a:p>
         </p:txBody>
@@ -4499,7 +4436,7 @@
         <p:spPr>
           <a:xfrm>
             <a:off x="731520" y="1280160"/>
-            <a:ext cx="10728655" cy="4846320"/>
+            <a:ext cx="5166360" cy="3840480"/>
           </a:xfrm>
           <a:prstGeom prst="roundRect">
             <a:avLst/>
@@ -4532,14 +4469,14 @@
           <a:lstStyle/>
           <a:p>
             <a:pPr algn="ctr">
-              <a:defRPr sz="1600" b="1">
+              <a:defRPr sz="1400" b="1">
                 <a:solidFill>
                   <a:srgbClr val="BE123C"/>
                 </a:solidFill>
               </a:defRPr>
             </a:pPr>
             <a:r>
-              <a:t>Kịch bản: Trang Web Giả Mạo Trúng Thưởng (Attacker Site)</a:t>
+              <a:t>❌ 1. NHÁNH BỊ LỖI (Dùng @@Html.Raw)</a:t>
             </a:r>
           </a:p>
           <a:p>
@@ -4547,54 +4484,96 @@
               <a:spcBef>
                 <a:spcPts val="800"/>
               </a:spcBef>
-              <a:defRPr sz="1300">
+              <a:defRPr sz="1200">
                 <a:solidFill>
                   <a:srgbClr val="334155"/>
                 </a:solidFill>
               </a:defRPr>
             </a:pPr>
             <a:r>
-              <a:t>1. Nạn nhân có 50.000.000 VNĐ trong ví đang mở tab làm việc tại nền tảng tư vấn trực tuyến.</a:t>
-            </a:r>
-            <a:br/>
-            <a:r>
-              <a:t>2. Kẻ tấn công gửi link: 'Chúc mừng bạn trúng thưởng iPhone 16 Pro Max! Click để nhận quà!'.</a:t>
-            </a:r>
-            <a:br/>
-            <a:r>
-              <a:t>3. Khi nạn nhân click vào link, một trang web bẫy (AttackerSite.cshtml) được mở ra, bên trong chứa mã HTML ẩn:</a:t>
-            </a:r>
-          </a:p>
-          <a:p>
-            <a:pPr>
-              <a:spcBef>
-                <a:spcPts val="600"/>
-              </a:spcBef>
-              <a:defRPr sz="1100" b="1">
-                <a:solidFill>
-                  <a:srgbClr val="9F1239"/>
-                </a:solidFill>
-                <a:latin typeface="Courier New"/>
-              </a:defRPr>
-            </a:pPr>
-            <a:r>
-              <a:t>&lt;!-- FORM ẨN TỰ ĐỘNG GỬI SANG HỆ THỐNG MỤC TIÊU --&gt;</a:t>
-            </a:r>
-            <a:br/>
-            <a:r>
-              <a:t>&lt;form id="exploit" action="http://localhost:5076/Csrf/TransferVulnerable" method="POST"&gt;</a:t>
-            </a:r>
-            <a:br/>
-            <a:r>
-              <a:t>    &lt;input type="hidden" name="amount" value="20000000" /&gt;</a:t>
-            </a:r>
-            <a:br/>
-            <a:r>
-              <a:t>&lt;/form&gt;</a:t>
-            </a:r>
-            <a:br/>
-            <a:r>
-              <a:t>&lt;script&gt;document.getElementById('exploit').submit();&lt;/script&gt;</a:t>
+              <a:t>• Input khai thác: &lt;script&gt;alert(document.cookie);&lt;/script&gt;</a:t>
+            </a:r>
+            <a:br/>
+            <a:r>
+              <a:t>• Cách render:</a:t>
+            </a:r>
+            <a:br/>
+            <a:r>
+              <a:t>  @Html.Raw(comment.Content)</a:t>
+            </a:r>
+            <a:br/>
+            <a:r>
+              <a:t>• Cơ chế:</a:t>
+            </a:r>
+            <a:br/>
+            <a:r>
+              <a:t>  - Trình duyệt coi đoạn chuỗi là mã lệnh JavaScript thực thi được.</a:t>
+            </a:r>
+            <a:br/>
+            <a:r>
+              <a:t>• Hậu quả thực tế:</a:t>
+            </a:r>
+            <a:br/>
+            <a:r>
+              <a:t>  - Bật popup alert hiển thị Cookie nhạy cảm AuthSessionToken.</a:t>
+            </a:r>
+            <a:br/>
+            <a:r>
+              <a:t>  - Bất kỳ ai vào xem đánh giá chuyên gia đều bị mã độc tấn công.</a:t>
+            </a:r>
+          </a:p>
+        </p:txBody>
+      </p:sp>
+      <p:sp>
+        <p:nvSpPr>
+          <p:cNvPr id="7" name="Rounded Rectangle 6"/>
+          <p:cNvSpPr/>
+          <p:nvPr/>
+        </p:nvSpPr>
+        <p:spPr>
+          <a:xfrm>
+            <a:off x="6263640" y="1280160"/>
+            <a:ext cx="5166360" cy="3840480"/>
+          </a:xfrm>
+          <a:prstGeom prst="roundRect">
+            <a:avLst/>
+          </a:prstGeom>
+          <a:solidFill>
+            <a:srgbClr val="ECFDF5"/>
+          </a:solidFill>
+          <a:ln>
+            <a:solidFill>
+              <a:srgbClr val="A7F3D0"/>
+            </a:solidFill>
+          </a:ln>
+        </p:spPr>
+        <p:style>
+          <a:lnRef idx="1">
+            <a:schemeClr val="accent1"/>
+          </a:lnRef>
+          <a:fillRef idx="3">
+            <a:schemeClr val="accent1"/>
+          </a:fillRef>
+          <a:effectRef idx="2">
+            <a:schemeClr val="accent1"/>
+          </a:effectRef>
+          <a:fontRef idx="minor">
+            <a:schemeClr val="lt1"/>
+          </a:fontRef>
+        </p:style>
+        <p:txBody>
+          <a:bodyPr rtlCol="0" anchor="ctr" wrap="square"/>
+          <a:lstStyle/>
+          <a:p>
+            <a:pPr algn="ctr">
+              <a:defRPr sz="1400" b="1">
+                <a:solidFill>
+                  <a:srgbClr val="047857"/>
+                </a:solidFill>
+              </a:defRPr>
+            </a:pPr>
+            <a:r>
+              <a:t>✅ 2. NHÁNH AN TOÀN (Tự Động HTML Encoding)</a:t>
             </a:r>
           </a:p>
           <a:p>
@@ -4602,14 +4581,111 @@
               <a:spcBef>
                 <a:spcPts val="800"/>
               </a:spcBef>
-              <a:defRPr sz="1300" b="1">
+              <a:defRPr sz="1200">
+                <a:solidFill>
+                  <a:srgbClr val="334155"/>
+                </a:solidFill>
+              </a:defRPr>
+            </a:pPr>
+            <a:r>
+              <a:t>• Cùng Input khai thác: &lt;script&gt;alert(document.cookie);&lt;/script&gt;</a:t>
+            </a:r>
+            <a:br/>
+            <a:r>
+              <a:t>• Cách render chuẩn:</a:t>
+            </a:r>
+            <a:br/>
+            <a:r>
+              <a:t>  @comment.Content (hoặc HtmlEncoder.Default.Encode)</a:t>
+            </a:r>
+            <a:br/>
+            <a:r>
+              <a:t>• Cơ chế:</a:t>
+            </a:r>
+            <a:br/>
+            <a:r>
+              <a:t>  - Các ký tự &lt;, &gt; được chuyển đổi thành &amp;lt;, &amp;gt;.</a:t>
+            </a:r>
+            <a:br/>
+            <a:r>
+              <a:t>• Kết quả phòng thủ:</a:t>
+            </a:r>
+            <a:br/>
+            <a:r>
+              <a:t>  - Trình duyệt chỉ in chuỗi text ra màn hình như chữ bình thường.</a:t>
+            </a:r>
+            <a:br/>
+            <a:r>
+              <a:t>  - Tuyệt đối không có bất kỳ popup hay script nào được kích hoạt.</a:t>
+            </a:r>
+          </a:p>
+        </p:txBody>
+      </p:sp>
+      <p:sp>
+        <p:nvSpPr>
+          <p:cNvPr id="8" name="Rounded Rectangle 7"/>
+          <p:cNvSpPr/>
+          <p:nvPr/>
+        </p:nvSpPr>
+        <p:spPr>
+          <a:xfrm>
+            <a:off x="731520" y="5303520"/>
+            <a:ext cx="10728655" cy="868680"/>
+          </a:xfrm>
+          <a:prstGeom prst="roundRect">
+            <a:avLst/>
+          </a:prstGeom>
+          <a:solidFill>
+            <a:srgbClr val="FFF1F2"/>
+          </a:solidFill>
+          <a:ln>
+            <a:solidFill>
+              <a:srgbClr val="FECDD3"/>
+            </a:solidFill>
+          </a:ln>
+        </p:spPr>
+        <p:style>
+          <a:lnRef idx="1">
+            <a:schemeClr val="accent1"/>
+          </a:lnRef>
+          <a:fillRef idx="3">
+            <a:schemeClr val="accent1"/>
+          </a:fillRef>
+          <a:effectRef idx="2">
+            <a:schemeClr val="accent1"/>
+          </a:effectRef>
+          <a:fontRef idx="minor">
+            <a:schemeClr val="lt1"/>
+          </a:fontRef>
+        </p:style>
+        <p:txBody>
+          <a:bodyPr rtlCol="0" anchor="ctr"/>
+          <a:lstStyle/>
+          <a:p>
+            <a:pPr algn="ctr">
+              <a:defRPr sz="1250" b="1">
                 <a:solidFill>
                   <a:srgbClr val="BE123C"/>
                 </a:solidFill>
               </a:defRPr>
             </a:pPr>
             <a:r>
-              <a:t>Hậu quả thực tế: Nạn nhân không hề bấm chuyển tiền, nhưng ví tiền bị trừ ngay 20.000.000 VNĐ sang ví hacker!</a:t>
+              <a:t>💬 [BÌNH LIVE DEMO]: Chuyển sang Web UI Tab 2 (Stored XSS - /Xss)</a:t>
+            </a:r>
+          </a:p>
+          <a:p>
+            <a:pPr>
+              <a:spcBef>
+                <a:spcPts val="200"/>
+              </a:spcBef>
+              <a:defRPr sz="1100">
+                <a:solidFill>
+                  <a:srgbClr val="334155"/>
+                </a:solidFill>
+              </a:defRPr>
+            </a:pPr>
+            <a:r>
+              <a:t>Thao tác: Bấm nạp payload đánh cắp Cookie -&gt; Đăng bên Lỗi (bật popup alert lộ Session) -&gt; Đăng bên An toàn (chữ hiển thị an toàn).</a:t>
             </a:r>
           </a:p>
         </p:txBody>
@@ -4724,7 +4800,7 @@
               </a:defRPr>
             </a:pPr>
             <a:r>
-              <a:t>CHỦ ĐỀ 3 • NGUYỄN MINH CƯỜNG (23A1001D0058)</a:t>
+              <a:t>CHỦ ĐỀ 2 • NGUYỄN THANH BÌNH (23A1001D0041)</a:t>
             </a:r>
           </a:p>
         </p:txBody>
@@ -4759,7 +4835,7 @@
               </a:defRPr>
             </a:pPr>
             <a:r>
-              <a:t>3.3. CSRF Attack: Thực Nghiệm Trực Tiếp &amp; Kiểm Thử Rút Tiền</a:t>
+              <a:t>2.5. Stored XSS: Minh Chứng CSDL dbo.Comments &amp; Cờ Bảo Vệ Cookie</a:t>
             </a:r>
           </a:p>
         </p:txBody>
@@ -4808,7 +4884,7 @@
         <p:spPr>
           <a:xfrm>
             <a:off x="731520" y="1280160"/>
-            <a:ext cx="10728655" cy="3840480"/>
+            <a:ext cx="5166360" cy="4846320"/>
           </a:xfrm>
           <a:prstGeom prst="roundRect">
             <a:avLst/>
@@ -4841,14 +4917,47 @@
           <a:lstStyle/>
           <a:p>
             <a:pPr algn="ctr">
-              <a:defRPr sz="1500" b="1">
-                <a:solidFill>
-                  <a:srgbClr val="047857"/>
-                </a:solidFill>
-              </a:defRPr>
-            </a:pPr>
-            <a:r>
-              <a:t>Quy Trình 3 Bước Thực Nghiệm Trên Giao Diện Web</a:t>
+              <a:defRPr sz="1400" b="1">
+                <a:solidFill>
+                  <a:srgbClr val="1D4ED8"/>
+                </a:solidFill>
+              </a:defRPr>
+            </a:pPr>
+            <a:r>
+              <a:t>Dữ Liệu Thật Lưu Trong Bảng dbo.Comments</a:t>
+            </a:r>
+          </a:p>
+          <a:p>
+            <a:pPr>
+              <a:spcBef>
+                <a:spcPts val="600"/>
+              </a:spcBef>
+              <a:defRPr sz="950">
+                <a:solidFill>
+                  <a:srgbClr val="0F172A"/>
+                </a:solidFill>
+                <a:latin typeface="Courier New"/>
+              </a:defRPr>
+            </a:pPr>
+            <a:r>
+              <a:t>SELECT Id, Author, Content, IsSecureStored FROM dbo.Comments;</a:t>
+            </a:r>
+            <a:br/>
+            <a:br/>
+            <a:r>
+              <a:t>Id | Author        | Content                           | IsSecure</a:t>
+            </a:r>
+            <a:br/>
+            <a:r>
+              <a:t>---+---------------+-----------------------------------+---------</a:t>
+            </a:r>
+            <a:br/>
+            <a:r>
+              <a:t> 1 | Le Thanh Binh | Dich vu tu van rat chuyen nghiep! | 1</a:t>
+            </a:r>
+            <a:br/>
+            <a:r>
+              <a:t> 2 | Hacker_XSS    | &lt;script&gt;alert(document.cookie);.. | 0</a:t>
             </a:r>
           </a:p>
           <a:p>
@@ -4856,34 +4965,18 @@
               <a:spcBef>
                 <a:spcPts val="800"/>
               </a:spcBef>
-              <a:defRPr sz="1300">
+              <a:defRPr sz="1150">
                 <a:solidFill>
                   <a:srgbClr val="334155"/>
                 </a:solidFill>
               </a:defRPr>
             </a:pPr>
             <a:r>
-              <a:t>• Bước 1: Kiểm tra số dư ví ban đầu tại Tab 3:</a:t>
-            </a:r>
-            <a:br/>
-            <a:r>
-              <a:t>  - Ví Nạn nhân: 50.000.000 VNĐ | Ví Hacker: 0 VNĐ.</a:t>
-            </a:r>
-            <a:br/>
-            <a:r>
-              <a:t>• Bước 2: Bấm nút đỏ 'Mở trang web bẫy của Hacker (Attacker Site)' ở tab mới -&gt; Bấm nút 'Nhận thưởng ngay':</a:t>
-            </a:r>
-            <a:br/>
-            <a:r>
-              <a:t>  - Ngay lập tức, số dư của nạn nhân bị trừ 20.000.000 VNĐ và chuyển sang ví hacker!</a:t>
-            </a:r>
-            <a:br/>
-            <a:r>
-              <a:t>• Bước 3: Thử nghiệm chuyển tiền tại Form bên phải (Đã phòng thủ):</a:t>
-            </a:r>
-            <a:br/>
-            <a:r>
-              <a:t>  - Giao dịch chỉ hợp lệ khi được gửi từ chính form trên hệ thống với Anti-Forgery Token hợp lệ.</a:t>
+              <a:t>📌 Bản chất lưu trữ:</a:t>
+            </a:r>
+            <a:br/>
+            <a:r>
+              <a:t>Đoạn script độc hại được lưu vĩnh viễn trong CSDL. Do đó gọi là 'Stored XSS' - nguy hiểm hơn rất nhiều so với 'Reflected XSS' vì nó nằm sẵn trong hệ thống và gây hại cho mọi lượt truy cập sau đó.</a:t>
             </a:r>
           </a:p>
         </p:txBody>
@@ -4896,18 +4989,18 @@
         </p:nvSpPr>
         <p:spPr>
           <a:xfrm>
-            <a:off x="731520" y="5303520"/>
-            <a:ext cx="10728655" cy="868680"/>
+            <a:off x="6263640" y="1280160"/>
+            <a:ext cx="5166360" cy="4846320"/>
           </a:xfrm>
           <a:prstGeom prst="roundRect">
             <a:avLst/>
           </a:prstGeom>
           <a:solidFill>
-            <a:srgbClr val="ECFDF5"/>
+            <a:srgbClr val="F8FAFC"/>
           </a:solidFill>
           <a:ln>
             <a:solidFill>
-              <a:srgbClr val="A7F3D0"/>
+              <a:srgbClr val="E2E8F0"/>
             </a:solidFill>
           </a:ln>
         </p:spPr>
@@ -4926,33 +5019,77 @@
           </a:fontRef>
         </p:style>
         <p:txBody>
-          <a:bodyPr rtlCol="0" anchor="ctr"/>
+          <a:bodyPr rtlCol="0" anchor="ctr" wrap="square"/>
           <a:lstStyle/>
           <a:p>
             <a:pPr algn="ctr">
-              <a:defRPr sz="1250" b="1">
+              <a:defRPr sz="1400" b="1">
                 <a:solidFill>
                   <a:srgbClr val="047857"/>
                 </a:solidFill>
               </a:defRPr>
             </a:pPr>
             <a:r>
-              <a:t>💳 [CƯỜNG LIVE DEMO]: Chuyển sang Web UI Tab 3 (CSRF)</a:t>
+              <a:t>Phòng Vệ Chiều Sâu: Cấu Hình HttpOnly Cookie</a:t>
             </a:r>
           </a:p>
           <a:p>
             <a:pPr>
               <a:spcBef>
-                <a:spcPts val="200"/>
+                <a:spcPts val="600"/>
               </a:spcBef>
-              <a:defRPr sz="1100">
+              <a:defRPr sz="950">
+                <a:solidFill>
+                  <a:srgbClr val="065F46"/>
+                </a:solidFill>
+                <a:latin typeface="Courier New"/>
+              </a:defRPr>
+            </a:pPr>
+            <a:r>
+              <a:t>// CẤU HÌNH COOKIE AN TOÀN TRONG ASP.NET CORE:</a:t>
+            </a:r>
+            <a:br/>
+            <a:r>
+              <a:t>Response.Cookies.Append("AuthSessionToken", token, new CookieOptions</a:t>
+            </a:r>
+            <a:br/>
+            <a:r>
+              <a:t>{</a:t>
+            </a:r>
+            <a:br/>
+            <a:r>
+              <a:t>    HttpOnly = true, // CẤM JAVASCRIPT TRUY CẬP</a:t>
+            </a:r>
+            <a:br/>
+            <a:r>
+              <a:t>    Secure = true,   // CHỈ TRUYỀN QUA HTTPS</a:t>
+            </a:r>
+            <a:br/>
+            <a:r>
+              <a:t>    SameSite = SameSiteMode.Strict</a:t>
+            </a:r>
+            <a:br/>
+            <a:r>
+              <a:t>});</a:t>
+            </a:r>
+          </a:p>
+          <a:p>
+            <a:pPr>
+              <a:spcBef>
+                <a:spcPts val="800"/>
+              </a:spcBef>
+              <a:defRPr sz="1150">
                 <a:solidFill>
                   <a:srgbClr val="334155"/>
                 </a:solidFill>
               </a:defRPr>
             </a:pPr>
             <a:r>
-              <a:t>Thao tác: Mở Attacker Site -&gt; Bấm nhận thưởng -&gt; Quay lại thấy số dư ví nạn nhân bị trừ 20 triệu -&gt; Thử lại form có Token.</a:t>
+              <a:t>📌 Tác dụng của HttpOnly:</a:t>
+            </a:r>
+            <a:br/>
+            <a:r>
+              <a:t>Dù ứng dụng có vô tình dính lỗi XSS thì lệnh 'document.cookie' của hacker vẫn trả về rỗng! Hacker không thể nào đánh cắp được token phiên làm việc.</a:t>
             </a:r>
           </a:p>
         </p:txBody>
@@ -5067,7 +5204,7 @@
               </a:defRPr>
             </a:pPr>
             <a:r>
-              <a:t>CHỦ ĐỀ 3 • NGUYỄN MINH CƯỜNG (23A1001D0058)</a:t>
+              <a:t>CHỦ ĐỀ 2 • NGUYỄN THANH BÌNH (23A1001D0041)</a:t>
             </a:r>
           </a:p>
         </p:txBody>
@@ -5102,7 +5239,7 @@
               </a:defRPr>
             </a:pPr>
             <a:r>
-              <a:t>3.4. CSRF Attack: Cơ Chế Phòng Thủ Bằng Anti-Forgery Token</a:t>
+              <a:t>2.6. Stored XSS: Bộ 4 Nguyên Tắc Phòng Thủ Toàn Diện</a:t>
             </a:r>
           </a:p>
         </p:txBody>
@@ -5151,7 +5288,7 @@
         <p:spPr>
           <a:xfrm>
             <a:off x="731520" y="1280160"/>
-            <a:ext cx="5166360" cy="4846320"/>
+            <a:ext cx="10728655" cy="4846320"/>
           </a:xfrm>
           <a:prstGeom prst="roundRect">
             <a:avLst/>
@@ -5191,7 +5328,7 @@
               </a:defRPr>
             </a:pPr>
             <a:r>
-              <a:t>Cơ Chế Synchronizer Token Pattern Trong ASP.NET Core</a:t>
+              <a:t>BỘ NGUYÊN TẮC PHÒNG THỦ XSS CHUẨN OWASP TRONG ASP.NET CORE:</a:t>
             </a:r>
           </a:p>
           <a:p>
@@ -5199,155 +5336,75 @@
               <a:spcBef>
                 <a:spcPts val="800"/>
               </a:spcBef>
-              <a:defRPr sz="950">
-                <a:solidFill>
-                  <a:srgbClr val="065F46"/>
-                </a:solidFill>
-                <a:latin typeface="Courier New"/>
-              </a:defRPr>
-            </a:pPr>
-            <a:r>
-              <a:t>// 1. TRONG RAZOR VIEW: NHÚNG TOKEN VÀO FORM</a:t>
-            </a:r>
-            <a:br/>
-            <a:r>
-              <a:t>&lt;form asp-action="TransferSecure" method="post"&gt;</a:t>
-            </a:r>
-            <a:br/>
-            <a:r>
-              <a:t>    @Html.AntiForgeryToken()</a:t>
-            </a:r>
-            <a:br/>
-            <a:r>
-              <a:t>    &lt;input type="number" name="amount" /&gt;</a:t>
-            </a:r>
-            <a:br/>
-            <a:r>
-              <a:t>    &lt;button type="submit"&gt;Chuyển tiền&lt;/button&gt;</a:t>
-            </a:r>
-            <a:br/>
-            <a:r>
-              <a:t>&lt;/form&gt;</a:t>
-            </a:r>
-            <a:br/>
-            <a:br/>
-            <a:r>
-              <a:t>// 2. TRONG CONTROLLER: BẮT BUỘC KIỂM TRA TOKEN</a:t>
-            </a:r>
-            <a:br/>
-            <a:r>
-              <a:t>[HttpPost]</a:t>
-            </a:r>
-            <a:br/>
-            <a:r>
-              <a:t>[ValidateAntiForgeryToken]</a:t>
-            </a:r>
-            <a:br/>
-            <a:r>
-              <a:t>public IActionResult TransferSecure(decimal amount)</a:t>
-            </a:r>
-            <a:br/>
-            <a:r>
-              <a:t>{</a:t>
-            </a:r>
-            <a:br/>
-            <a:r>
-              <a:t>    // Chỉ thực thi khi Token từ Form khớp với Token trong Cookie</a:t>
-            </a:r>
-            <a:br/>
-            <a:r>
-              <a:t>}</a:t>
-            </a:r>
-          </a:p>
-        </p:txBody>
-      </p:sp>
-      <p:sp>
-        <p:nvSpPr>
-          <p:cNvPr id="7" name="Rounded Rectangle 6"/>
-          <p:cNvSpPr/>
-          <p:nvPr/>
-        </p:nvSpPr>
-        <p:spPr>
-          <a:xfrm>
-            <a:off x="6263640" y="1280160"/>
-            <a:ext cx="5166360" cy="4846320"/>
-          </a:xfrm>
-          <a:prstGeom prst="roundRect">
-            <a:avLst/>
-          </a:prstGeom>
-          <a:solidFill>
-            <a:srgbClr val="F8FAFC"/>
-          </a:solidFill>
-          <a:ln>
-            <a:solidFill>
-              <a:srgbClr val="E2E8F0"/>
-            </a:solidFill>
-          </a:ln>
-        </p:spPr>
-        <p:style>
-          <a:lnRef idx="1">
-            <a:schemeClr val="accent1"/>
-          </a:lnRef>
-          <a:fillRef idx="3">
-            <a:schemeClr val="accent1"/>
-          </a:fillRef>
-          <a:effectRef idx="2">
-            <a:schemeClr val="accent1"/>
-          </a:effectRef>
-          <a:fontRef idx="minor">
-            <a:schemeClr val="lt1"/>
-          </a:fontRef>
-        </p:style>
-        <p:txBody>
-          <a:bodyPr rtlCol="0" anchor="ctr" wrap="square"/>
-          <a:lstStyle/>
-          <a:p>
-            <a:pPr algn="ctr">
-              <a:defRPr sz="1500" b="1">
-                <a:solidFill>
-                  <a:srgbClr val="1D4ED8"/>
-                </a:solidFill>
-              </a:defRPr>
-            </a:pPr>
-            <a:r>
-              <a:t>Tại Sao Kẻ Tấn Công Không Thể Vượt Qua?</a:t>
+              <a:defRPr sz="1300">
+                <a:solidFill>
+                  <a:srgbClr val="334155"/>
+                </a:solidFill>
+              </a:defRPr>
+            </a:pPr>
+            <a:r>
+              <a:t>1. Luôn tận dụng Context-Aware HTML Encoding của Razor View:</a:t>
+            </a:r>
+            <a:br/>
+            <a:r>
+              <a:t>   Tuyệt đối không dùng @Html.Raw() cho dữ liệu nhập từ người dùng. Sử dụng cú pháp mặc định @model.Property để framework tự động mã hóa ký tự nhạy cảm.</a:t>
             </a:r>
           </a:p>
           <a:p>
             <a:pPr>
               <a:spcBef>
-                <a:spcPts val="1000"/>
+                <a:spcPts val="800"/>
               </a:spcBef>
-              <a:defRPr sz="1200">
+              <a:defRPr sz="1300">
                 <a:solidFill>
                   <a:srgbClr val="334155"/>
                 </a:solidFill>
               </a:defRPr>
             </a:pPr>
             <a:r>
-              <a:t>1. Nguyên tắc cặp Token:</a:t>
-            </a:r>
-            <a:br/>
-            <a:r>
-              <a:t>Máy chủ phát hành 1 token mã hóa trong Cookie và 1 token bí mật nhúng vào trường input ẩn của Form.</a:t>
-            </a:r>
-            <a:br/>
-            <a:br/>
-            <a:r>
-              <a:t>2. Bảo vệ bằng Same-Origin Policy (SOP):</a:t>
-            </a:r>
-            <a:br/>
-            <a:r>
-              <a:t>Trang web độc hại của hacker ở tên miền khác (Cross-Origin) TUYỆT ĐỐI KHÔNG THỂ đọc trộm token bí mật trong form của nạn nhân.</a:t>
-            </a:r>
-            <a:br/>
-            <a:br/>
-            <a:r>
-              <a:t>3. Cấu hình Cookie SameSite = Strict:</a:t>
-            </a:r>
-            <a:br/>
-            <a:r>
-              <a:t>Ngăn chặn trình duyệt tự động gửi cookie trong các cross-site request, triệt tiêu tận gốc tiền đề tấn công của CSRF.</a:t>
+              <a:t>2. Mã hóa tại Controller với System.Text.Encodings.Web:</a:t>
+            </a:r>
+            <a:br/>
+            <a:r>
+              <a:t>   Dùng HtmlEncoder.Default.Encode() hoặc JavaScriptEncoder.Default.Encode() để làm sạch chuỗi trước khi lưu vào CSDL.</a:t>
+            </a:r>
+          </a:p>
+          <a:p>
+            <a:pPr>
+              <a:spcBef>
+                <a:spcPts val="800"/>
+              </a:spcBef>
+              <a:defRPr sz="1300">
+                <a:solidFill>
+                  <a:srgbClr val="334155"/>
+                </a:solidFill>
+              </a:defRPr>
+            </a:pPr>
+            <a:r>
+              <a:t>3. Thiết lập cờ HttpOnly = true và Secure = true cho toàn bộ Cookie nhạy cảm:</a:t>
+            </a:r>
+            <a:br/>
+            <a:r>
+              <a:t>   Bảo vệ token phiên làm việc (Session) không bao giờ bị lộ qua thuộc tính document.cookie.</a:t>
+            </a:r>
+          </a:p>
+          <a:p>
+            <a:pPr>
+              <a:spcBef>
+                <a:spcPts val="800"/>
+              </a:spcBef>
+              <a:defRPr sz="1300">
+                <a:solidFill>
+                  <a:srgbClr val="334155"/>
+                </a:solidFill>
+              </a:defRPr>
+            </a:pPr>
+            <a:r>
+              <a:t>4. Triển khai Content Security Policy (CSP Header):</a:t>
+            </a:r>
+            <a:br/>
+            <a:r>
+              <a:t>   Thiết lập HTTP Response Header (script-src 'self') để trình duyệt chặn đứng hoàn toàn việc chạy inline script và tải mã độc từ các tên miền lạ.</a:t>
             </a:r>
           </a:p>
         </p:txBody>
@@ -5361,6 +5418,2527 @@
 </file>
 
 <file path=ppt/slides/slide15.xml><?xml version="1.0" encoding="utf-8"?>
+<p:sld xmlns:a="http://schemas.openxmlformats.org/drawingml/2006/main" xmlns:p="http://schemas.openxmlformats.org/presentationml/2006/main" xmlns:r="http://schemas.openxmlformats.org/officeDocument/2006/relationships">
+  <p:cSld>
+    <p:spTree>
+      <p:nvGrpSpPr>
+        <p:cNvPr id="1" name=""/>
+        <p:cNvGrpSpPr/>
+        <p:nvPr/>
+      </p:nvGrpSpPr>
+      <p:grpSpPr/>
+      <p:sp>
+        <p:nvSpPr>
+          <p:cNvPr id="2" name="Rectangle 1"/>
+          <p:cNvSpPr/>
+          <p:nvPr/>
+        </p:nvSpPr>
+        <p:spPr>
+          <a:xfrm>
+            <a:off x="0" y="0"/>
+            <a:ext cx="12191695" cy="73152"/>
+          </a:xfrm>
+          <a:prstGeom prst="rect">
+            <a:avLst/>
+          </a:prstGeom>
+          <a:solidFill>
+            <a:srgbClr val="1D4ED8"/>
+          </a:solidFill>
+          <a:ln>
+            <a:noFill/>
+          </a:ln>
+        </p:spPr>
+        <p:style>
+          <a:lnRef idx="1">
+            <a:schemeClr val="accent1"/>
+          </a:lnRef>
+          <a:fillRef idx="3">
+            <a:schemeClr val="accent1"/>
+          </a:fillRef>
+          <a:effectRef idx="2">
+            <a:schemeClr val="accent1"/>
+          </a:effectRef>
+          <a:fontRef idx="minor">
+            <a:schemeClr val="lt1"/>
+          </a:fontRef>
+        </p:style>
+        <p:txBody>
+          <a:bodyPr rtlCol="0" anchor="ctr"/>
+          <a:lstStyle/>
+          <a:p>
+            <a:pPr algn="ctr"/>
+          </a:p>
+        </p:txBody>
+      </p:sp>
+      <p:sp>
+        <p:nvSpPr>
+          <p:cNvPr id="3" name="Rounded Rectangle 2"/>
+          <p:cNvSpPr/>
+          <p:nvPr/>
+        </p:nvSpPr>
+        <p:spPr>
+          <a:xfrm>
+            <a:off x="731520" y="292608"/>
+            <a:ext cx="4389120" cy="347472"/>
+          </a:xfrm>
+          <a:prstGeom prst="roundRect">
+            <a:avLst/>
+          </a:prstGeom>
+          <a:solidFill>
+            <a:srgbClr val="EFF6FF"/>
+          </a:solidFill>
+          <a:ln>
+            <a:solidFill>
+              <a:srgbClr val="BFDBFE"/>
+            </a:solidFill>
+          </a:ln>
+        </p:spPr>
+        <p:style>
+          <a:lnRef idx="1">
+            <a:schemeClr val="accent1"/>
+          </a:lnRef>
+          <a:fillRef idx="3">
+            <a:schemeClr val="accent1"/>
+          </a:fillRef>
+          <a:effectRef idx="2">
+            <a:schemeClr val="accent1"/>
+          </a:effectRef>
+          <a:fontRef idx="minor">
+            <a:schemeClr val="lt1"/>
+          </a:fontRef>
+        </p:style>
+        <p:txBody>
+          <a:bodyPr rtlCol="0" anchor="ctr" wrap="none"/>
+          <a:lstStyle/>
+          <a:p>
+            <a:pPr algn="ctr">
+              <a:defRPr sz="1000" b="1">
+                <a:solidFill>
+                  <a:srgbClr val="1D4ED8"/>
+                </a:solidFill>
+              </a:defRPr>
+            </a:pPr>
+            <a:r>
+              <a:t>CHỦ ĐỀ 3 • NGUYỄN MINH CƯỜNG (23A1001D0058)</a:t>
+            </a:r>
+          </a:p>
+        </p:txBody>
+      </p:sp>
+      <p:sp>
+        <p:nvSpPr>
+          <p:cNvPr id="4" name="TextBox 3"/>
+          <p:cNvSpPr txBox="1"/>
+          <p:nvPr/>
+        </p:nvSpPr>
+        <p:spPr>
+          <a:xfrm>
+            <a:off x="731520" y="658368"/>
+            <a:ext cx="10698480" cy="548640"/>
+          </a:xfrm>
+          <a:prstGeom prst="rect">
+            <a:avLst/>
+          </a:prstGeom>
+          <a:noFill/>
+        </p:spPr>
+        <p:txBody>
+          <a:bodyPr wrap="square">
+            <a:spAutoFit/>
+          </a:bodyPr>
+          <a:lstStyle/>
+          <a:p>
+            <a:pPr>
+              <a:defRPr sz="2000" b="1">
+                <a:solidFill>
+                  <a:srgbClr val="0F172A"/>
+                </a:solidFill>
+              </a:defRPr>
+            </a:pPr>
+            <a:r>
+              <a:t>3.1. CSRF Attack: Bản Chất Kỹ Thuật &amp; Cơ Chế Giả Mạo Request</a:t>
+            </a:r>
+          </a:p>
+        </p:txBody>
+      </p:sp>
+      <p:sp>
+        <p:nvSpPr>
+          <p:cNvPr id="5" name="TextBox 4"/>
+          <p:cNvSpPr txBox="1"/>
+          <p:nvPr/>
+        </p:nvSpPr>
+        <p:spPr>
+          <a:xfrm>
+            <a:off x="731520" y="6492240"/>
+            <a:ext cx="10698480" cy="274320"/>
+          </a:xfrm>
+          <a:prstGeom prst="rect">
+            <a:avLst/>
+          </a:prstGeom>
+          <a:noFill/>
+        </p:spPr>
+        <p:txBody>
+          <a:bodyPr wrap="none">
+            <a:spAutoFit/>
+          </a:bodyPr>
+          <a:lstStyle/>
+          <a:p>
+            <a:pPr>
+              <a:defRPr sz="950">
+                <a:solidFill>
+                  <a:srgbClr val="64748B"/>
+                </a:solidFill>
+              </a:defRPr>
+            </a:pPr>
+            <a:r>
+              <a:t>Nhóm WNC.G01 (Học - Bình - Cường) • Khoa CNTT - Đại học Mở Hà Nội • GVHD: ThS. Lê Hữu Dũng</a:t>
+            </a:r>
+          </a:p>
+        </p:txBody>
+      </p:sp>
+      <p:sp>
+        <p:nvSpPr>
+          <p:cNvPr id="6" name="Rounded Rectangle 5"/>
+          <p:cNvSpPr/>
+          <p:nvPr/>
+        </p:nvSpPr>
+        <p:spPr>
+          <a:xfrm>
+            <a:off x="731520" y="1280160"/>
+            <a:ext cx="5166360" cy="4846320"/>
+          </a:xfrm>
+          <a:prstGeom prst="roundRect">
+            <a:avLst/>
+          </a:prstGeom>
+          <a:solidFill>
+            <a:srgbClr val="F8FAFC"/>
+          </a:solidFill>
+          <a:ln>
+            <a:solidFill>
+              <a:srgbClr val="E2E8F0"/>
+            </a:solidFill>
+          </a:ln>
+        </p:spPr>
+        <p:style>
+          <a:lnRef idx="1">
+            <a:schemeClr val="accent1"/>
+          </a:lnRef>
+          <a:fillRef idx="3">
+            <a:schemeClr val="accent1"/>
+          </a:fillRef>
+          <a:effectRef idx="2">
+            <a:schemeClr val="accent1"/>
+          </a:effectRef>
+          <a:fontRef idx="minor">
+            <a:schemeClr val="lt1"/>
+          </a:fontRef>
+        </p:style>
+        <p:txBody>
+          <a:bodyPr rtlCol="0" anchor="ctr" wrap="square"/>
+          <a:lstStyle/>
+          <a:p>
+            <a:pPr algn="ctr">
+              <a:defRPr sz="1500" b="1">
+                <a:solidFill>
+                  <a:srgbClr val="BE123C"/>
+                </a:solidFill>
+              </a:defRPr>
+            </a:pPr>
+            <a:r>
+              <a:t>Bản Chất Của Lỗ Hổng Cross-Site Request Forgery</a:t>
+            </a:r>
+          </a:p>
+          <a:p>
+            <a:pPr>
+              <a:spcBef>
+                <a:spcPts val="800"/>
+              </a:spcBef>
+              <a:defRPr sz="1250">
+                <a:solidFill>
+                  <a:srgbClr val="334155"/>
+                </a:solidFill>
+              </a:defRPr>
+            </a:pPr>
+            <a:r>
+              <a:t>• CSRF (A01:2021 - Broken Access Control) là kỹ thuật tấn công mượn quyền của người dùng hợp lệ.</a:t>
+            </a:r>
+            <a:br/>
+            <a:r>
+              <a:t>• Điều kiện xảy ra:</a:t>
+            </a:r>
+            <a:br/>
+            <a:r>
+              <a:t>  1. Nạn nhân đã đăng nhập vào hệ thống tư vấn trực tuyến (phiên làm việc Session/Cookie vẫn đang hợp lệ).</a:t>
+            </a:r>
+            <a:br/>
+            <a:r>
+              <a:t>  2. Trình duyệt tự động đính kèm Cookie xác thực vào mọi HTTP Request gửi tới hệ thống đó.</a:t>
+            </a:r>
+            <a:br/>
+            <a:r>
+              <a:t>  3. Kẻ tấn công lừa nạn nhân truy cập một trang web độc hại ở một tab khác (Attacker Site).</a:t>
+            </a:r>
+            <a:br/>
+            <a:r>
+              <a:t>• Điểm mù: Máy chủ chỉ kiểm tra Cookie mà không kiểm tra xem Request đó bắt nguồn từ đâu!</a:t>
+            </a:r>
+          </a:p>
+        </p:txBody>
+      </p:sp>
+      <p:sp>
+        <p:nvSpPr>
+          <p:cNvPr id="7" name="Rounded Rectangle 6"/>
+          <p:cNvSpPr/>
+          <p:nvPr/>
+        </p:nvSpPr>
+        <p:spPr>
+          <a:xfrm>
+            <a:off x="6263640" y="1280160"/>
+            <a:ext cx="5166360" cy="4846320"/>
+          </a:xfrm>
+          <a:prstGeom prst="roundRect">
+            <a:avLst/>
+          </a:prstGeom>
+          <a:solidFill>
+            <a:srgbClr val="FFF1F2"/>
+          </a:solidFill>
+          <a:ln>
+            <a:solidFill>
+              <a:srgbClr val="FECDD3"/>
+            </a:solidFill>
+          </a:ln>
+        </p:spPr>
+        <p:style>
+          <a:lnRef idx="1">
+            <a:schemeClr val="accent1"/>
+          </a:lnRef>
+          <a:fillRef idx="3">
+            <a:schemeClr val="accent1"/>
+          </a:fillRef>
+          <a:effectRef idx="2">
+            <a:schemeClr val="accent1"/>
+          </a:effectRef>
+          <a:fontRef idx="minor">
+            <a:schemeClr val="lt1"/>
+          </a:fontRef>
+        </p:style>
+        <p:txBody>
+          <a:bodyPr rtlCol="0" anchor="ctr" wrap="square"/>
+          <a:lstStyle/>
+          <a:p>
+            <a:pPr algn="ctr">
+              <a:defRPr sz="1500" b="1">
+                <a:solidFill>
+                  <a:srgbClr val="BE123C"/>
+                </a:solidFill>
+              </a:defRPr>
+            </a:pPr>
+            <a:r>
+              <a:t>Action Bị Lỗi: Thiếu Thuộc Tính Phòng Vệ</a:t>
+            </a:r>
+          </a:p>
+          <a:p>
+            <a:pPr>
+              <a:spcBef>
+                <a:spcPts val="800"/>
+              </a:spcBef>
+              <a:defRPr sz="1000">
+                <a:solidFill>
+                  <a:srgbClr val="9F1239"/>
+                </a:solidFill>
+                <a:latin typeface="Courier New"/>
+              </a:defRPr>
+            </a:pPr>
+            <a:r>
+              <a:t>// ACTION NHẬN TIỀN KHÔNG CÓ BẢO VỆ TOKEN:</a:t>
+            </a:r>
+            <a:br/>
+            <a:r>
+              <a:t>[HttpPost]</a:t>
+            </a:r>
+            <a:br/>
+            <a:r>
+              <a:t>public IActionResult TransferVulnerable(decimal amount)</a:t>
+            </a:r>
+            <a:br/>
+            <a:r>
+              <a:t>{</a:t>
+            </a:r>
+            <a:br/>
+            <a:r>
+              <a:t>    var victim = _context.Wallets.Find(1);</a:t>
+            </a:r>
+            <a:br/>
+            <a:r>
+              <a:t>    var hacker = _context.Wallets.Find(2);</a:t>
+            </a:r>
+            <a:br/>
+            <a:r>
+              <a:t>    </a:t>
+            </a:r>
+            <a:br/>
+            <a:r>
+              <a:t>    // Trừ tiền nạn nhân, cộng tiền hacker:</a:t>
+            </a:r>
+            <a:br/>
+            <a:r>
+              <a:t>    victim.Balance -= amount;</a:t>
+            </a:r>
+            <a:br/>
+            <a:r>
+              <a:t>    hacker.Balance += amount;</a:t>
+            </a:r>
+            <a:br/>
+            <a:r>
+              <a:t>    _context.SaveChanges();</a:t>
+            </a:r>
+            <a:br/>
+            <a:r>
+              <a:t>    return RedirectToAction("Index");</a:t>
+            </a:r>
+            <a:br/>
+            <a:r>
+              <a:t>}</a:t>
+            </a:r>
+          </a:p>
+          <a:p>
+            <a:pPr>
+              <a:spcBef>
+                <a:spcPts val="1000"/>
+              </a:spcBef>
+              <a:defRPr sz="1200">
+                <a:solidFill>
+                  <a:srgbClr val="0F172A"/>
+                </a:solidFill>
+              </a:defRPr>
+            </a:pPr>
+            <a:r>
+              <a:t>⚠️ Nguy hiểm:</a:t>
+            </a:r>
+            <a:br/>
+            <a:r>
+              <a:t>Bất kỳ trang web nào trên Internet cũng có thể gửi form POST tới URL này. Máy chủ thấy Cookie hợp lệ sẽ trừ tiền ngay lập tức!</a:t>
+            </a:r>
+          </a:p>
+        </p:txBody>
+      </p:sp>
+    </p:spTree>
+  </p:cSld>
+  <p:clrMapOvr>
+    <a:masterClrMapping/>
+  </p:clrMapOvr>
+</p:sld>
+</file>
+
+<file path=ppt/slides/slide16.xml><?xml version="1.0" encoding="utf-8"?>
+<p:sld xmlns:a="http://schemas.openxmlformats.org/drawingml/2006/main" xmlns:p="http://schemas.openxmlformats.org/presentationml/2006/main" xmlns:r="http://schemas.openxmlformats.org/officeDocument/2006/relationships">
+  <p:cSld>
+    <p:spTree>
+      <p:nvGrpSpPr>
+        <p:cNvPr id="1" name=""/>
+        <p:cNvGrpSpPr/>
+        <p:nvPr/>
+      </p:nvGrpSpPr>
+      <p:grpSpPr/>
+      <p:sp>
+        <p:nvSpPr>
+          <p:cNvPr id="2" name="Rectangle 1"/>
+          <p:cNvSpPr/>
+          <p:nvPr/>
+        </p:nvSpPr>
+        <p:spPr>
+          <a:xfrm>
+            <a:off x="0" y="0"/>
+            <a:ext cx="12191695" cy="73152"/>
+          </a:xfrm>
+          <a:prstGeom prst="rect">
+            <a:avLst/>
+          </a:prstGeom>
+          <a:solidFill>
+            <a:srgbClr val="1D4ED8"/>
+          </a:solidFill>
+          <a:ln>
+            <a:noFill/>
+          </a:ln>
+        </p:spPr>
+        <p:style>
+          <a:lnRef idx="1">
+            <a:schemeClr val="accent1"/>
+          </a:lnRef>
+          <a:fillRef idx="3">
+            <a:schemeClr val="accent1"/>
+          </a:fillRef>
+          <a:effectRef idx="2">
+            <a:schemeClr val="accent1"/>
+          </a:effectRef>
+          <a:fontRef idx="minor">
+            <a:schemeClr val="lt1"/>
+          </a:fontRef>
+        </p:style>
+        <p:txBody>
+          <a:bodyPr rtlCol="0" anchor="ctr"/>
+          <a:lstStyle/>
+          <a:p>
+            <a:pPr algn="ctr"/>
+          </a:p>
+        </p:txBody>
+      </p:sp>
+      <p:sp>
+        <p:nvSpPr>
+          <p:cNvPr id="3" name="Rounded Rectangle 2"/>
+          <p:cNvSpPr/>
+          <p:nvPr/>
+        </p:nvSpPr>
+        <p:spPr>
+          <a:xfrm>
+            <a:off x="731520" y="292608"/>
+            <a:ext cx="4389120" cy="347472"/>
+          </a:xfrm>
+          <a:prstGeom prst="roundRect">
+            <a:avLst/>
+          </a:prstGeom>
+          <a:solidFill>
+            <a:srgbClr val="EFF6FF"/>
+          </a:solidFill>
+          <a:ln>
+            <a:solidFill>
+              <a:srgbClr val="BFDBFE"/>
+            </a:solidFill>
+          </a:ln>
+        </p:spPr>
+        <p:style>
+          <a:lnRef idx="1">
+            <a:schemeClr val="accent1"/>
+          </a:lnRef>
+          <a:fillRef idx="3">
+            <a:schemeClr val="accent1"/>
+          </a:fillRef>
+          <a:effectRef idx="2">
+            <a:schemeClr val="accent1"/>
+          </a:effectRef>
+          <a:fontRef idx="minor">
+            <a:schemeClr val="lt1"/>
+          </a:fontRef>
+        </p:style>
+        <p:txBody>
+          <a:bodyPr rtlCol="0" anchor="ctr" wrap="none"/>
+          <a:lstStyle/>
+          <a:p>
+            <a:pPr algn="ctr">
+              <a:defRPr sz="1000" b="1">
+                <a:solidFill>
+                  <a:srgbClr val="1D4ED8"/>
+                </a:solidFill>
+              </a:defRPr>
+            </a:pPr>
+            <a:r>
+              <a:t>CHỦ ĐỀ 3 • NGUYỄN MINH CƯỜNG (23A1001D0058)</a:t>
+            </a:r>
+          </a:p>
+        </p:txBody>
+      </p:sp>
+      <p:sp>
+        <p:nvSpPr>
+          <p:cNvPr id="4" name="TextBox 3"/>
+          <p:cNvSpPr txBox="1"/>
+          <p:nvPr/>
+        </p:nvSpPr>
+        <p:spPr>
+          <a:xfrm>
+            <a:off x="731520" y="658368"/>
+            <a:ext cx="10698480" cy="548640"/>
+          </a:xfrm>
+          <a:prstGeom prst="rect">
+            <a:avLst/>
+          </a:prstGeom>
+          <a:noFill/>
+        </p:spPr>
+        <p:txBody>
+          <a:bodyPr wrap="square">
+            <a:spAutoFit/>
+          </a:bodyPr>
+          <a:lstStyle/>
+          <a:p>
+            <a:pPr>
+              <a:defRPr sz="2000" b="1">
+                <a:solidFill>
+                  <a:srgbClr val="0F172A"/>
+                </a:solidFill>
+              </a:defRPr>
+            </a:pPr>
+            <a:r>
+              <a:t>3.2. CSRF Attack: Kịch Bản Lừa Đảo Chuyển Tiền Ví Ngầm</a:t>
+            </a:r>
+          </a:p>
+        </p:txBody>
+      </p:sp>
+      <p:sp>
+        <p:nvSpPr>
+          <p:cNvPr id="5" name="TextBox 4"/>
+          <p:cNvSpPr txBox="1"/>
+          <p:nvPr/>
+        </p:nvSpPr>
+        <p:spPr>
+          <a:xfrm>
+            <a:off x="731520" y="6492240"/>
+            <a:ext cx="10698480" cy="274320"/>
+          </a:xfrm>
+          <a:prstGeom prst="rect">
+            <a:avLst/>
+          </a:prstGeom>
+          <a:noFill/>
+        </p:spPr>
+        <p:txBody>
+          <a:bodyPr wrap="none">
+            <a:spAutoFit/>
+          </a:bodyPr>
+          <a:lstStyle/>
+          <a:p>
+            <a:pPr>
+              <a:defRPr sz="950">
+                <a:solidFill>
+                  <a:srgbClr val="64748B"/>
+                </a:solidFill>
+              </a:defRPr>
+            </a:pPr>
+            <a:r>
+              <a:t>Nhóm WNC.G01 (Học - Bình - Cường) • Khoa CNTT - Đại học Mở Hà Nội • GVHD: ThS. Lê Hữu Dũng</a:t>
+            </a:r>
+          </a:p>
+        </p:txBody>
+      </p:sp>
+      <p:sp>
+        <p:nvSpPr>
+          <p:cNvPr id="6" name="Rounded Rectangle 5"/>
+          <p:cNvSpPr/>
+          <p:nvPr/>
+        </p:nvSpPr>
+        <p:spPr>
+          <a:xfrm>
+            <a:off x="731520" y="1280160"/>
+            <a:ext cx="10728655" cy="4846320"/>
+          </a:xfrm>
+          <a:prstGeom prst="roundRect">
+            <a:avLst/>
+          </a:prstGeom>
+          <a:solidFill>
+            <a:srgbClr val="FFF1F2"/>
+          </a:solidFill>
+          <a:ln>
+            <a:solidFill>
+              <a:srgbClr val="FECDD3"/>
+            </a:solidFill>
+          </a:ln>
+        </p:spPr>
+        <p:style>
+          <a:lnRef idx="1">
+            <a:schemeClr val="accent1"/>
+          </a:lnRef>
+          <a:fillRef idx="3">
+            <a:schemeClr val="accent1"/>
+          </a:fillRef>
+          <a:effectRef idx="2">
+            <a:schemeClr val="accent1"/>
+          </a:effectRef>
+          <a:fontRef idx="minor">
+            <a:schemeClr val="lt1"/>
+          </a:fontRef>
+        </p:style>
+        <p:txBody>
+          <a:bodyPr rtlCol="0" anchor="ctr" wrap="square"/>
+          <a:lstStyle/>
+          <a:p>
+            <a:pPr algn="ctr">
+              <a:defRPr sz="1600" b="1">
+                <a:solidFill>
+                  <a:srgbClr val="BE123C"/>
+                </a:solidFill>
+              </a:defRPr>
+            </a:pPr>
+            <a:r>
+              <a:t>Kịch bản: Trang Web Giả Mạo Trúng Thưởng (Attacker Site)</a:t>
+            </a:r>
+          </a:p>
+          <a:p>
+            <a:pPr>
+              <a:spcBef>
+                <a:spcPts val="800"/>
+              </a:spcBef>
+              <a:defRPr sz="1300">
+                <a:solidFill>
+                  <a:srgbClr val="334155"/>
+                </a:solidFill>
+              </a:defRPr>
+            </a:pPr>
+            <a:r>
+              <a:t>1. Nạn nhân có 50.000.000 VNĐ trong ví đang mở tab làm việc tại nền tảng tư vấn trực tuyến.</a:t>
+            </a:r>
+            <a:br/>
+            <a:r>
+              <a:t>2. Kẻ tấn công gửi link: 'Chúc mừng bạn trúng thưởng iPhone 16 Pro Max! Click để nhận quà!'.</a:t>
+            </a:r>
+            <a:br/>
+            <a:r>
+              <a:t>3. Khi nạn nhân click vào link, một trang web bẫy (AttackerSite.cshtml) được mở ra, bên trong chứa mã HTML ẩn:</a:t>
+            </a:r>
+          </a:p>
+          <a:p>
+            <a:pPr>
+              <a:spcBef>
+                <a:spcPts val="600"/>
+              </a:spcBef>
+              <a:defRPr sz="1100" b="1">
+                <a:solidFill>
+                  <a:srgbClr val="9F1239"/>
+                </a:solidFill>
+                <a:latin typeface="Courier New"/>
+              </a:defRPr>
+            </a:pPr>
+            <a:r>
+              <a:t>&lt;!-- FORM ẨN TỰ ĐỘNG GỬI SANG HỆ THỐNG MỤC TIÊU --&gt;</a:t>
+            </a:r>
+            <a:br/>
+            <a:r>
+              <a:t>&lt;form id="exploit" action="http://localhost:5076/Csrf/TransferVulnerable" method="POST"&gt;</a:t>
+            </a:r>
+            <a:br/>
+            <a:r>
+              <a:t>    &lt;input type="hidden" name="amount" value="20000000" /&gt;</a:t>
+            </a:r>
+            <a:br/>
+            <a:r>
+              <a:t>&lt;/form&gt;</a:t>
+            </a:r>
+            <a:br/>
+            <a:r>
+              <a:t>&lt;script&gt;document.getElementById('exploit').submit();&lt;/script&gt;</a:t>
+            </a:r>
+          </a:p>
+          <a:p>
+            <a:pPr>
+              <a:spcBef>
+                <a:spcPts val="800"/>
+              </a:spcBef>
+              <a:defRPr sz="1300" b="1">
+                <a:solidFill>
+                  <a:srgbClr val="BE123C"/>
+                </a:solidFill>
+              </a:defRPr>
+            </a:pPr>
+            <a:r>
+              <a:t>Hậu quả thực tế: Nạn nhân không hề bấm chuyển tiền, nhưng ví tiền bị trừ ngay 20.000.000 VNĐ sang ví hacker!</a:t>
+            </a:r>
+          </a:p>
+        </p:txBody>
+      </p:sp>
+    </p:spTree>
+  </p:cSld>
+  <p:clrMapOvr>
+    <a:masterClrMapping/>
+  </p:clrMapOvr>
+</p:sld>
+</file>
+
+<file path=ppt/slides/slide17.xml><?xml version="1.0" encoding="utf-8"?>
+<p:sld xmlns:a="http://schemas.openxmlformats.org/drawingml/2006/main" xmlns:p="http://schemas.openxmlformats.org/presentationml/2006/main" xmlns:r="http://schemas.openxmlformats.org/officeDocument/2006/relationships">
+  <p:cSld>
+    <p:spTree>
+      <p:nvGrpSpPr>
+        <p:cNvPr id="1" name=""/>
+        <p:cNvGrpSpPr/>
+        <p:nvPr/>
+      </p:nvGrpSpPr>
+      <p:grpSpPr/>
+      <p:sp>
+        <p:nvSpPr>
+          <p:cNvPr id="2" name="Rectangle 1"/>
+          <p:cNvSpPr/>
+          <p:nvPr/>
+        </p:nvSpPr>
+        <p:spPr>
+          <a:xfrm>
+            <a:off x="0" y="0"/>
+            <a:ext cx="12191695" cy="73152"/>
+          </a:xfrm>
+          <a:prstGeom prst="rect">
+            <a:avLst/>
+          </a:prstGeom>
+          <a:solidFill>
+            <a:srgbClr val="1D4ED8"/>
+          </a:solidFill>
+          <a:ln>
+            <a:noFill/>
+          </a:ln>
+        </p:spPr>
+        <p:style>
+          <a:lnRef idx="1">
+            <a:schemeClr val="accent1"/>
+          </a:lnRef>
+          <a:fillRef idx="3">
+            <a:schemeClr val="accent1"/>
+          </a:fillRef>
+          <a:effectRef idx="2">
+            <a:schemeClr val="accent1"/>
+          </a:effectRef>
+          <a:fontRef idx="minor">
+            <a:schemeClr val="lt1"/>
+          </a:fontRef>
+        </p:style>
+        <p:txBody>
+          <a:bodyPr rtlCol="0" anchor="ctr"/>
+          <a:lstStyle/>
+          <a:p>
+            <a:pPr algn="ctr"/>
+          </a:p>
+        </p:txBody>
+      </p:sp>
+      <p:sp>
+        <p:nvSpPr>
+          <p:cNvPr id="3" name="Rounded Rectangle 2"/>
+          <p:cNvSpPr/>
+          <p:nvPr/>
+        </p:nvSpPr>
+        <p:spPr>
+          <a:xfrm>
+            <a:off x="731520" y="292608"/>
+            <a:ext cx="4389120" cy="347472"/>
+          </a:xfrm>
+          <a:prstGeom prst="roundRect">
+            <a:avLst/>
+          </a:prstGeom>
+          <a:solidFill>
+            <a:srgbClr val="EFF6FF"/>
+          </a:solidFill>
+          <a:ln>
+            <a:solidFill>
+              <a:srgbClr val="BFDBFE"/>
+            </a:solidFill>
+          </a:ln>
+        </p:spPr>
+        <p:style>
+          <a:lnRef idx="1">
+            <a:schemeClr val="accent1"/>
+          </a:lnRef>
+          <a:fillRef idx="3">
+            <a:schemeClr val="accent1"/>
+          </a:fillRef>
+          <a:effectRef idx="2">
+            <a:schemeClr val="accent1"/>
+          </a:effectRef>
+          <a:fontRef idx="minor">
+            <a:schemeClr val="lt1"/>
+          </a:fontRef>
+        </p:style>
+        <p:txBody>
+          <a:bodyPr rtlCol="0" anchor="ctr" wrap="none"/>
+          <a:lstStyle/>
+          <a:p>
+            <a:pPr algn="ctr">
+              <a:defRPr sz="1000" b="1">
+                <a:solidFill>
+                  <a:srgbClr val="1D4ED8"/>
+                </a:solidFill>
+              </a:defRPr>
+            </a:pPr>
+            <a:r>
+              <a:t>CHỦ ĐỀ 3 • NGUYỄN MINH CƯỜNG (23A1001D0058)</a:t>
+            </a:r>
+          </a:p>
+        </p:txBody>
+      </p:sp>
+      <p:sp>
+        <p:nvSpPr>
+          <p:cNvPr id="4" name="TextBox 3"/>
+          <p:cNvSpPr txBox="1"/>
+          <p:nvPr/>
+        </p:nvSpPr>
+        <p:spPr>
+          <a:xfrm>
+            <a:off x="731520" y="658368"/>
+            <a:ext cx="10698480" cy="548640"/>
+          </a:xfrm>
+          <a:prstGeom prst="rect">
+            <a:avLst/>
+          </a:prstGeom>
+          <a:noFill/>
+        </p:spPr>
+        <p:txBody>
+          <a:bodyPr wrap="square">
+            <a:spAutoFit/>
+          </a:bodyPr>
+          <a:lstStyle/>
+          <a:p>
+            <a:pPr>
+              <a:defRPr sz="2000" b="1">
+                <a:solidFill>
+                  <a:srgbClr val="0F172A"/>
+                </a:solidFill>
+              </a:defRPr>
+            </a:pPr>
+            <a:r>
+              <a:t>3.3. CSRF Attack: Thực Nghiệm Trực Tiếp &amp; Kiểm Thử Rút Tiền</a:t>
+            </a:r>
+          </a:p>
+        </p:txBody>
+      </p:sp>
+      <p:sp>
+        <p:nvSpPr>
+          <p:cNvPr id="5" name="TextBox 4"/>
+          <p:cNvSpPr txBox="1"/>
+          <p:nvPr/>
+        </p:nvSpPr>
+        <p:spPr>
+          <a:xfrm>
+            <a:off x="731520" y="6492240"/>
+            <a:ext cx="10698480" cy="274320"/>
+          </a:xfrm>
+          <a:prstGeom prst="rect">
+            <a:avLst/>
+          </a:prstGeom>
+          <a:noFill/>
+        </p:spPr>
+        <p:txBody>
+          <a:bodyPr wrap="none">
+            <a:spAutoFit/>
+          </a:bodyPr>
+          <a:lstStyle/>
+          <a:p>
+            <a:pPr>
+              <a:defRPr sz="950">
+                <a:solidFill>
+                  <a:srgbClr val="64748B"/>
+                </a:solidFill>
+              </a:defRPr>
+            </a:pPr>
+            <a:r>
+              <a:t>Nhóm WNC.G01 (Học - Bình - Cường) • Khoa CNTT - Đại học Mở Hà Nội • GVHD: ThS. Lê Hữu Dũng</a:t>
+            </a:r>
+          </a:p>
+        </p:txBody>
+      </p:sp>
+      <p:sp>
+        <p:nvSpPr>
+          <p:cNvPr id="6" name="Rounded Rectangle 5"/>
+          <p:cNvSpPr/>
+          <p:nvPr/>
+        </p:nvSpPr>
+        <p:spPr>
+          <a:xfrm>
+            <a:off x="731520" y="1280160"/>
+            <a:ext cx="10728655" cy="3840480"/>
+          </a:xfrm>
+          <a:prstGeom prst="roundRect">
+            <a:avLst/>
+          </a:prstGeom>
+          <a:solidFill>
+            <a:srgbClr val="F8FAFC"/>
+          </a:solidFill>
+          <a:ln>
+            <a:solidFill>
+              <a:srgbClr val="E2E8F0"/>
+            </a:solidFill>
+          </a:ln>
+        </p:spPr>
+        <p:style>
+          <a:lnRef idx="1">
+            <a:schemeClr val="accent1"/>
+          </a:lnRef>
+          <a:fillRef idx="3">
+            <a:schemeClr val="accent1"/>
+          </a:fillRef>
+          <a:effectRef idx="2">
+            <a:schemeClr val="accent1"/>
+          </a:effectRef>
+          <a:fontRef idx="minor">
+            <a:schemeClr val="lt1"/>
+          </a:fontRef>
+        </p:style>
+        <p:txBody>
+          <a:bodyPr rtlCol="0" anchor="ctr" wrap="square"/>
+          <a:lstStyle/>
+          <a:p>
+            <a:pPr algn="ctr">
+              <a:defRPr sz="1500" b="1">
+                <a:solidFill>
+                  <a:srgbClr val="047857"/>
+                </a:solidFill>
+              </a:defRPr>
+            </a:pPr>
+            <a:r>
+              <a:t>Quy Trình 3 Bước Thực Nghiệm Trên Giao Diện Web</a:t>
+            </a:r>
+          </a:p>
+          <a:p>
+            <a:pPr>
+              <a:spcBef>
+                <a:spcPts val="800"/>
+              </a:spcBef>
+              <a:defRPr sz="1300">
+                <a:solidFill>
+                  <a:srgbClr val="334155"/>
+                </a:solidFill>
+              </a:defRPr>
+            </a:pPr>
+            <a:r>
+              <a:t>• Bước 1: Kiểm tra số dư ví ban đầu tại Tab 3:</a:t>
+            </a:r>
+            <a:br/>
+            <a:r>
+              <a:t>  - Ví Nạn nhân: 50.000.000 VNĐ | Ví Hacker: 0 VNĐ.</a:t>
+            </a:r>
+            <a:br/>
+            <a:r>
+              <a:t>• Bước 2: Bấm nút đỏ 'Mở trang web bẫy của Hacker (Attacker Site)' ở tab mới -&gt; Bấm nút 'Nhận thưởng ngay':</a:t>
+            </a:r>
+            <a:br/>
+            <a:r>
+              <a:t>  - Ngay lập tức, số dư của nạn nhân bị trừ 20.000.000 VNĐ và chuyển sang ví hacker!</a:t>
+            </a:r>
+            <a:br/>
+            <a:r>
+              <a:t>• Bước 3: Thử nghiệm chuyển tiền tại Form bên phải (Đã phòng thủ):</a:t>
+            </a:r>
+            <a:br/>
+            <a:r>
+              <a:t>  - Giao dịch chỉ hợp lệ khi được gửi từ chính form trên hệ thống với Anti-Forgery Token hợp lệ.</a:t>
+            </a:r>
+          </a:p>
+        </p:txBody>
+      </p:sp>
+      <p:sp>
+        <p:nvSpPr>
+          <p:cNvPr id="7" name="Rounded Rectangle 6"/>
+          <p:cNvSpPr/>
+          <p:nvPr/>
+        </p:nvSpPr>
+        <p:spPr>
+          <a:xfrm>
+            <a:off x="731520" y="5303520"/>
+            <a:ext cx="10728655" cy="868680"/>
+          </a:xfrm>
+          <a:prstGeom prst="roundRect">
+            <a:avLst/>
+          </a:prstGeom>
+          <a:solidFill>
+            <a:srgbClr val="ECFDF5"/>
+          </a:solidFill>
+          <a:ln>
+            <a:solidFill>
+              <a:srgbClr val="A7F3D0"/>
+            </a:solidFill>
+          </a:ln>
+        </p:spPr>
+        <p:style>
+          <a:lnRef idx="1">
+            <a:schemeClr val="accent1"/>
+          </a:lnRef>
+          <a:fillRef idx="3">
+            <a:schemeClr val="accent1"/>
+          </a:fillRef>
+          <a:effectRef idx="2">
+            <a:schemeClr val="accent1"/>
+          </a:effectRef>
+          <a:fontRef idx="minor">
+            <a:schemeClr val="lt1"/>
+          </a:fontRef>
+        </p:style>
+        <p:txBody>
+          <a:bodyPr rtlCol="0" anchor="ctr"/>
+          <a:lstStyle/>
+          <a:p>
+            <a:pPr algn="ctr">
+              <a:defRPr sz="1250" b="1">
+                <a:solidFill>
+                  <a:srgbClr val="047857"/>
+                </a:solidFill>
+              </a:defRPr>
+            </a:pPr>
+            <a:r>
+              <a:t>💳 [CƯỜNG LIVE DEMO]: Chuyển sang Web UI Tab 3 (CSRF - /Csrf)</a:t>
+            </a:r>
+          </a:p>
+          <a:p>
+            <a:pPr>
+              <a:spcBef>
+                <a:spcPts val="200"/>
+              </a:spcBef>
+              <a:defRPr sz="1100">
+                <a:solidFill>
+                  <a:srgbClr val="334155"/>
+                </a:solidFill>
+              </a:defRPr>
+            </a:pPr>
+            <a:r>
+              <a:t>Thao tác: Mở Attacker Site -&gt; Bấm nhận thưởng -&gt; Quay lại thấy số dư ví nạn nhân bị trừ 20 triệu -&gt; Thử lại form có Token.</a:t>
+            </a:r>
+          </a:p>
+        </p:txBody>
+      </p:sp>
+    </p:spTree>
+  </p:cSld>
+  <p:clrMapOvr>
+    <a:masterClrMapping/>
+  </p:clrMapOvr>
+</p:sld>
+</file>
+
+<file path=ppt/slides/slide18.xml><?xml version="1.0" encoding="utf-8"?>
+<p:sld xmlns:a="http://schemas.openxmlformats.org/drawingml/2006/main" xmlns:p="http://schemas.openxmlformats.org/presentationml/2006/main" xmlns:r="http://schemas.openxmlformats.org/officeDocument/2006/relationships">
+  <p:cSld>
+    <p:spTree>
+      <p:nvGrpSpPr>
+        <p:cNvPr id="1" name=""/>
+        <p:cNvGrpSpPr/>
+        <p:nvPr/>
+      </p:nvGrpSpPr>
+      <p:grpSpPr/>
+      <p:sp>
+        <p:nvSpPr>
+          <p:cNvPr id="2" name="Rectangle 1"/>
+          <p:cNvSpPr/>
+          <p:nvPr/>
+        </p:nvSpPr>
+        <p:spPr>
+          <a:xfrm>
+            <a:off x="0" y="0"/>
+            <a:ext cx="12191695" cy="73152"/>
+          </a:xfrm>
+          <a:prstGeom prst="rect">
+            <a:avLst/>
+          </a:prstGeom>
+          <a:solidFill>
+            <a:srgbClr val="1D4ED8"/>
+          </a:solidFill>
+          <a:ln>
+            <a:noFill/>
+          </a:ln>
+        </p:spPr>
+        <p:style>
+          <a:lnRef idx="1">
+            <a:schemeClr val="accent1"/>
+          </a:lnRef>
+          <a:fillRef idx="3">
+            <a:schemeClr val="accent1"/>
+          </a:fillRef>
+          <a:effectRef idx="2">
+            <a:schemeClr val="accent1"/>
+          </a:effectRef>
+          <a:fontRef idx="minor">
+            <a:schemeClr val="lt1"/>
+          </a:fontRef>
+        </p:style>
+        <p:txBody>
+          <a:bodyPr rtlCol="0" anchor="ctr"/>
+          <a:lstStyle/>
+          <a:p>
+            <a:pPr algn="ctr"/>
+          </a:p>
+        </p:txBody>
+      </p:sp>
+      <p:sp>
+        <p:nvSpPr>
+          <p:cNvPr id="3" name="Rounded Rectangle 2"/>
+          <p:cNvSpPr/>
+          <p:nvPr/>
+        </p:nvSpPr>
+        <p:spPr>
+          <a:xfrm>
+            <a:off x="731520" y="292608"/>
+            <a:ext cx="4389120" cy="347472"/>
+          </a:xfrm>
+          <a:prstGeom prst="roundRect">
+            <a:avLst/>
+          </a:prstGeom>
+          <a:solidFill>
+            <a:srgbClr val="EFF6FF"/>
+          </a:solidFill>
+          <a:ln>
+            <a:solidFill>
+              <a:srgbClr val="BFDBFE"/>
+            </a:solidFill>
+          </a:ln>
+        </p:spPr>
+        <p:style>
+          <a:lnRef idx="1">
+            <a:schemeClr val="accent1"/>
+          </a:lnRef>
+          <a:fillRef idx="3">
+            <a:schemeClr val="accent1"/>
+          </a:fillRef>
+          <a:effectRef idx="2">
+            <a:schemeClr val="accent1"/>
+          </a:effectRef>
+          <a:fontRef idx="minor">
+            <a:schemeClr val="lt1"/>
+          </a:fontRef>
+        </p:style>
+        <p:txBody>
+          <a:bodyPr rtlCol="0" anchor="ctr" wrap="none"/>
+          <a:lstStyle/>
+          <a:p>
+            <a:pPr algn="ctr">
+              <a:defRPr sz="1000" b="1">
+                <a:solidFill>
+                  <a:srgbClr val="1D4ED8"/>
+                </a:solidFill>
+              </a:defRPr>
+            </a:pPr>
+            <a:r>
+              <a:t>CHỦ ĐỀ 3 • NGUYỄN MINH CƯỜNG (23A1001D0058)</a:t>
+            </a:r>
+          </a:p>
+        </p:txBody>
+      </p:sp>
+      <p:sp>
+        <p:nvSpPr>
+          <p:cNvPr id="4" name="TextBox 3"/>
+          <p:cNvSpPr txBox="1"/>
+          <p:nvPr/>
+        </p:nvSpPr>
+        <p:spPr>
+          <a:xfrm>
+            <a:off x="731520" y="658368"/>
+            <a:ext cx="10698480" cy="548640"/>
+          </a:xfrm>
+          <a:prstGeom prst="rect">
+            <a:avLst/>
+          </a:prstGeom>
+          <a:noFill/>
+        </p:spPr>
+        <p:txBody>
+          <a:bodyPr wrap="square">
+            <a:spAutoFit/>
+          </a:bodyPr>
+          <a:lstStyle/>
+          <a:p>
+            <a:pPr>
+              <a:defRPr sz="2000" b="1">
+                <a:solidFill>
+                  <a:srgbClr val="0F172A"/>
+                </a:solidFill>
+              </a:defRPr>
+            </a:pPr>
+            <a:r>
+              <a:t>3.4. CSRF Attack: Minh Chứng CSDL dbo.UserWallets Trước &amp; Sau Tấn Công</a:t>
+            </a:r>
+          </a:p>
+        </p:txBody>
+      </p:sp>
+      <p:sp>
+        <p:nvSpPr>
+          <p:cNvPr id="5" name="TextBox 4"/>
+          <p:cNvSpPr txBox="1"/>
+          <p:nvPr/>
+        </p:nvSpPr>
+        <p:spPr>
+          <a:xfrm>
+            <a:off x="731520" y="6492240"/>
+            <a:ext cx="10698480" cy="274320"/>
+          </a:xfrm>
+          <a:prstGeom prst="rect">
+            <a:avLst/>
+          </a:prstGeom>
+          <a:noFill/>
+        </p:spPr>
+        <p:txBody>
+          <a:bodyPr wrap="none">
+            <a:spAutoFit/>
+          </a:bodyPr>
+          <a:lstStyle/>
+          <a:p>
+            <a:pPr>
+              <a:defRPr sz="950">
+                <a:solidFill>
+                  <a:srgbClr val="64748B"/>
+                </a:solidFill>
+              </a:defRPr>
+            </a:pPr>
+            <a:r>
+              <a:t>Nhóm WNC.G01 (Học - Bình - Cường) • Khoa CNTT - Đại học Mở Hà Nội • GVHD: ThS. Lê Hữu Dũng</a:t>
+            </a:r>
+          </a:p>
+        </p:txBody>
+      </p:sp>
+      <p:sp>
+        <p:nvSpPr>
+          <p:cNvPr id="6" name="Rounded Rectangle 5"/>
+          <p:cNvSpPr/>
+          <p:nvPr/>
+        </p:nvSpPr>
+        <p:spPr>
+          <a:xfrm>
+            <a:off x="731520" y="1280160"/>
+            <a:ext cx="5166360" cy="4846320"/>
+          </a:xfrm>
+          <a:prstGeom prst="roundRect">
+            <a:avLst/>
+          </a:prstGeom>
+          <a:solidFill>
+            <a:srgbClr val="F8FAFC"/>
+          </a:solidFill>
+          <a:ln>
+            <a:solidFill>
+              <a:srgbClr val="E2E8F0"/>
+            </a:solidFill>
+          </a:ln>
+        </p:spPr>
+        <p:style>
+          <a:lnRef idx="1">
+            <a:schemeClr val="accent1"/>
+          </a:lnRef>
+          <a:fillRef idx="3">
+            <a:schemeClr val="accent1"/>
+          </a:fillRef>
+          <a:effectRef idx="2">
+            <a:schemeClr val="accent1"/>
+          </a:effectRef>
+          <a:fontRef idx="minor">
+            <a:schemeClr val="lt1"/>
+          </a:fontRef>
+        </p:style>
+        <p:txBody>
+          <a:bodyPr rtlCol="0" anchor="ctr" wrap="square"/>
+          <a:lstStyle/>
+          <a:p>
+            <a:pPr algn="ctr">
+              <a:defRPr sz="1400" b="1">
+                <a:solidFill>
+                  <a:srgbClr val="1D4ED8"/>
+                </a:solidFill>
+              </a:defRPr>
+            </a:pPr>
+            <a:r>
+              <a:t>1. Trạng Thái CSDL Ban Đầu (Chưa Bị Tấn Công)</a:t>
+            </a:r>
+          </a:p>
+          <a:p>
+            <a:pPr>
+              <a:spcBef>
+                <a:spcPts val="600"/>
+              </a:spcBef>
+              <a:defRPr sz="950">
+                <a:solidFill>
+                  <a:srgbClr val="0F172A"/>
+                </a:solidFill>
+                <a:latin typeface="Courier New"/>
+              </a:defRPr>
+            </a:pPr>
+            <a:r>
+              <a:t>SELECT Id, OwnerName, Balance FROM dbo.UserWallets;</a:t>
+            </a:r>
+            <a:br/>
+            <a:br/>
+            <a:r>
+              <a:t>Id | OwnerName                      | Balance (VND)</a:t>
+            </a:r>
+            <a:br/>
+            <a:r>
+              <a:t>---+--------------------------------+---------------</a:t>
+            </a:r>
+            <a:br/>
+            <a:r>
+              <a:t> 1 | Nan nhan (Nguyen Danh Hoc)     | 50,000,000.00</a:t>
+            </a:r>
+            <a:br/>
+            <a:r>
+              <a:t> 2 | Ke tan cong (Hacker BlackHat)  |          0.00</a:t>
+            </a:r>
+            <a:br/>
+            <a:r>
+              <a:t>(2 rows affected)</a:t>
+            </a:r>
+          </a:p>
+          <a:p>
+            <a:pPr>
+              <a:spcBef>
+                <a:spcPts val="800"/>
+              </a:spcBef>
+              <a:defRPr sz="1150">
+                <a:solidFill>
+                  <a:srgbClr val="334155"/>
+                </a:solidFill>
+              </a:defRPr>
+            </a:pPr>
+            <a:r>
+              <a:t>📌 Ví của nạn nhân có 50 triệu VNĐ, ví của hacker hoàn toàn không có tiền.</a:t>
+            </a:r>
+          </a:p>
+        </p:txBody>
+      </p:sp>
+      <p:sp>
+        <p:nvSpPr>
+          <p:cNvPr id="7" name="Rounded Rectangle 6"/>
+          <p:cNvSpPr/>
+          <p:nvPr/>
+        </p:nvSpPr>
+        <p:spPr>
+          <a:xfrm>
+            <a:off x="6263640" y="1280160"/>
+            <a:ext cx="5166360" cy="4846320"/>
+          </a:xfrm>
+          <a:prstGeom prst="roundRect">
+            <a:avLst/>
+          </a:prstGeom>
+          <a:solidFill>
+            <a:srgbClr val="FFF1F2"/>
+          </a:solidFill>
+          <a:ln>
+            <a:solidFill>
+              <a:srgbClr val="FECDD3"/>
+            </a:solidFill>
+          </a:ln>
+        </p:spPr>
+        <p:style>
+          <a:lnRef idx="1">
+            <a:schemeClr val="accent1"/>
+          </a:lnRef>
+          <a:fillRef idx="3">
+            <a:schemeClr val="accent1"/>
+          </a:fillRef>
+          <a:effectRef idx="2">
+            <a:schemeClr val="accent1"/>
+          </a:effectRef>
+          <a:fontRef idx="minor">
+            <a:schemeClr val="lt1"/>
+          </a:fontRef>
+        </p:style>
+        <p:txBody>
+          <a:bodyPr rtlCol="0" anchor="ctr" wrap="square"/>
+          <a:lstStyle/>
+          <a:p>
+            <a:pPr algn="ctr">
+              <a:defRPr sz="1400" b="1">
+                <a:solidFill>
+                  <a:srgbClr val="BE123C"/>
+                </a:solidFill>
+              </a:defRPr>
+            </a:pPr>
+            <a:r>
+              <a:t>2. Trạng Thái CSDL Sau Khi Bị Khai Thác CSRF</a:t>
+            </a:r>
+          </a:p>
+          <a:p>
+            <a:pPr>
+              <a:spcBef>
+                <a:spcPts val="600"/>
+              </a:spcBef>
+              <a:defRPr sz="950">
+                <a:solidFill>
+                  <a:srgbClr val="9F1239"/>
+                </a:solidFill>
+                <a:latin typeface="Courier New"/>
+              </a:defRPr>
+            </a:pPr>
+            <a:r>
+              <a:t>SELECT Id, OwnerName, Balance FROM dbo.UserWallets;</a:t>
+            </a:r>
+            <a:br/>
+            <a:br/>
+            <a:r>
+              <a:t>Id | OwnerName                      | Balance (VND)</a:t>
+            </a:r>
+            <a:br/>
+            <a:r>
+              <a:t>---+--------------------------------+---------------</a:t>
+            </a:r>
+            <a:br/>
+            <a:r>
+              <a:t> 1 | Nan nhan (Nguyen Danh Hoc)     | 30,000,000.00</a:t>
+            </a:r>
+            <a:br/>
+            <a:r>
+              <a:t> 2 | Ke tan cong (Hacker BlackHat)  | 20,000,000.00</a:t>
+            </a:r>
+            <a:br/>
+            <a:r>
+              <a:t>(2 rows affected)</a:t>
+            </a:r>
+          </a:p>
+          <a:p>
+            <a:pPr>
+              <a:spcBef>
+                <a:spcPts val="800"/>
+              </a:spcBef>
+              <a:defRPr sz="1150">
+                <a:solidFill>
+                  <a:srgbClr val="334155"/>
+                </a:solidFill>
+              </a:defRPr>
+            </a:pPr>
+            <a:r>
+              <a:t>📌 Hậu quả kiểm chứng trên CSDL thật:</a:t>
+            </a:r>
+            <a:br/>
+            <a:r>
+              <a:t>20.000.000 VNĐ đã biến mất khỏi tài khoản nạn nhân và chuyển sang số dư của kẻ tấn công mà nạn nhân không hề hay biết.</a:t>
+            </a:r>
+          </a:p>
+        </p:txBody>
+      </p:sp>
+    </p:spTree>
+  </p:cSld>
+  <p:clrMapOvr>
+    <a:masterClrMapping/>
+  </p:clrMapOvr>
+</p:sld>
+</file>
+
+<file path=ppt/slides/slide19.xml><?xml version="1.0" encoding="utf-8"?>
+<p:sld xmlns:a="http://schemas.openxmlformats.org/drawingml/2006/main" xmlns:p="http://schemas.openxmlformats.org/presentationml/2006/main" xmlns:r="http://schemas.openxmlformats.org/officeDocument/2006/relationships">
+  <p:cSld>
+    <p:spTree>
+      <p:nvGrpSpPr>
+        <p:cNvPr id="1" name=""/>
+        <p:cNvGrpSpPr/>
+        <p:nvPr/>
+      </p:nvGrpSpPr>
+      <p:grpSpPr/>
+      <p:sp>
+        <p:nvSpPr>
+          <p:cNvPr id="2" name="Rectangle 1"/>
+          <p:cNvSpPr/>
+          <p:nvPr/>
+        </p:nvSpPr>
+        <p:spPr>
+          <a:xfrm>
+            <a:off x="0" y="0"/>
+            <a:ext cx="12191695" cy="73152"/>
+          </a:xfrm>
+          <a:prstGeom prst="rect">
+            <a:avLst/>
+          </a:prstGeom>
+          <a:solidFill>
+            <a:srgbClr val="1D4ED8"/>
+          </a:solidFill>
+          <a:ln>
+            <a:noFill/>
+          </a:ln>
+        </p:spPr>
+        <p:style>
+          <a:lnRef idx="1">
+            <a:schemeClr val="accent1"/>
+          </a:lnRef>
+          <a:fillRef idx="3">
+            <a:schemeClr val="accent1"/>
+          </a:fillRef>
+          <a:effectRef idx="2">
+            <a:schemeClr val="accent1"/>
+          </a:effectRef>
+          <a:fontRef idx="minor">
+            <a:schemeClr val="lt1"/>
+          </a:fontRef>
+        </p:style>
+        <p:txBody>
+          <a:bodyPr rtlCol="0" anchor="ctr"/>
+          <a:lstStyle/>
+          <a:p>
+            <a:pPr algn="ctr"/>
+          </a:p>
+        </p:txBody>
+      </p:sp>
+      <p:sp>
+        <p:nvSpPr>
+          <p:cNvPr id="3" name="Rounded Rectangle 2"/>
+          <p:cNvSpPr/>
+          <p:nvPr/>
+        </p:nvSpPr>
+        <p:spPr>
+          <a:xfrm>
+            <a:off x="731520" y="292608"/>
+            <a:ext cx="4389120" cy="347472"/>
+          </a:xfrm>
+          <a:prstGeom prst="roundRect">
+            <a:avLst/>
+          </a:prstGeom>
+          <a:solidFill>
+            <a:srgbClr val="EFF6FF"/>
+          </a:solidFill>
+          <a:ln>
+            <a:solidFill>
+              <a:srgbClr val="BFDBFE"/>
+            </a:solidFill>
+          </a:ln>
+        </p:spPr>
+        <p:style>
+          <a:lnRef idx="1">
+            <a:schemeClr val="accent1"/>
+          </a:lnRef>
+          <a:fillRef idx="3">
+            <a:schemeClr val="accent1"/>
+          </a:fillRef>
+          <a:effectRef idx="2">
+            <a:schemeClr val="accent1"/>
+          </a:effectRef>
+          <a:fontRef idx="minor">
+            <a:schemeClr val="lt1"/>
+          </a:fontRef>
+        </p:style>
+        <p:txBody>
+          <a:bodyPr rtlCol="0" anchor="ctr" wrap="none"/>
+          <a:lstStyle/>
+          <a:p>
+            <a:pPr algn="ctr">
+              <a:defRPr sz="1000" b="1">
+                <a:solidFill>
+                  <a:srgbClr val="1D4ED8"/>
+                </a:solidFill>
+              </a:defRPr>
+            </a:pPr>
+            <a:r>
+              <a:t>CHỦ ĐỀ 3 • NGUYỄN MINH CƯỜNG (23A1001D0058)</a:t>
+            </a:r>
+          </a:p>
+        </p:txBody>
+      </p:sp>
+      <p:sp>
+        <p:nvSpPr>
+          <p:cNvPr id="4" name="TextBox 3"/>
+          <p:cNvSpPr txBox="1"/>
+          <p:nvPr/>
+        </p:nvSpPr>
+        <p:spPr>
+          <a:xfrm>
+            <a:off x="731520" y="658368"/>
+            <a:ext cx="10698480" cy="548640"/>
+          </a:xfrm>
+          <a:prstGeom prst="rect">
+            <a:avLst/>
+          </a:prstGeom>
+          <a:noFill/>
+        </p:spPr>
+        <p:txBody>
+          <a:bodyPr wrap="square">
+            <a:spAutoFit/>
+          </a:bodyPr>
+          <a:lstStyle/>
+          <a:p>
+            <a:pPr>
+              <a:defRPr sz="2000" b="1">
+                <a:solidFill>
+                  <a:srgbClr val="0F172A"/>
+                </a:solidFill>
+              </a:defRPr>
+            </a:pPr>
+            <a:r>
+              <a:t>3.5. CSRF Attack: Cơ Chế Phòng Thủ Bằng Anti-Forgery Token</a:t>
+            </a:r>
+          </a:p>
+        </p:txBody>
+      </p:sp>
+      <p:sp>
+        <p:nvSpPr>
+          <p:cNvPr id="5" name="TextBox 4"/>
+          <p:cNvSpPr txBox="1"/>
+          <p:nvPr/>
+        </p:nvSpPr>
+        <p:spPr>
+          <a:xfrm>
+            <a:off x="731520" y="6492240"/>
+            <a:ext cx="10698480" cy="274320"/>
+          </a:xfrm>
+          <a:prstGeom prst="rect">
+            <a:avLst/>
+          </a:prstGeom>
+          <a:noFill/>
+        </p:spPr>
+        <p:txBody>
+          <a:bodyPr wrap="none">
+            <a:spAutoFit/>
+          </a:bodyPr>
+          <a:lstStyle/>
+          <a:p>
+            <a:pPr>
+              <a:defRPr sz="950">
+                <a:solidFill>
+                  <a:srgbClr val="64748B"/>
+                </a:solidFill>
+              </a:defRPr>
+            </a:pPr>
+            <a:r>
+              <a:t>Nhóm WNC.G01 (Học - Bình - Cường) • Khoa CNTT - Đại học Mở Hà Nội • GVHD: ThS. Lê Hữu Dũng</a:t>
+            </a:r>
+          </a:p>
+        </p:txBody>
+      </p:sp>
+      <p:sp>
+        <p:nvSpPr>
+          <p:cNvPr id="6" name="Rounded Rectangle 5"/>
+          <p:cNvSpPr/>
+          <p:nvPr/>
+        </p:nvSpPr>
+        <p:spPr>
+          <a:xfrm>
+            <a:off x="731520" y="1280160"/>
+            <a:ext cx="5166360" cy="4846320"/>
+          </a:xfrm>
+          <a:prstGeom prst="roundRect">
+            <a:avLst/>
+          </a:prstGeom>
+          <a:solidFill>
+            <a:srgbClr val="ECFDF5"/>
+          </a:solidFill>
+          <a:ln>
+            <a:solidFill>
+              <a:srgbClr val="A7F3D0"/>
+            </a:solidFill>
+          </a:ln>
+        </p:spPr>
+        <p:style>
+          <a:lnRef idx="1">
+            <a:schemeClr val="accent1"/>
+          </a:lnRef>
+          <a:fillRef idx="3">
+            <a:schemeClr val="accent1"/>
+          </a:fillRef>
+          <a:effectRef idx="2">
+            <a:schemeClr val="accent1"/>
+          </a:effectRef>
+          <a:fontRef idx="minor">
+            <a:schemeClr val="lt1"/>
+          </a:fontRef>
+        </p:style>
+        <p:txBody>
+          <a:bodyPr rtlCol="0" anchor="ctr" wrap="square"/>
+          <a:lstStyle/>
+          <a:p>
+            <a:pPr algn="ctr">
+              <a:defRPr sz="1500" b="1">
+                <a:solidFill>
+                  <a:srgbClr val="047857"/>
+                </a:solidFill>
+              </a:defRPr>
+            </a:pPr>
+            <a:r>
+              <a:t>Cơ Chế Synchronizer Token Pattern Trong ASP.NET Core</a:t>
+            </a:r>
+          </a:p>
+          <a:p>
+            <a:pPr>
+              <a:spcBef>
+                <a:spcPts val="800"/>
+              </a:spcBef>
+              <a:defRPr sz="950">
+                <a:solidFill>
+                  <a:srgbClr val="065F46"/>
+                </a:solidFill>
+                <a:latin typeface="Courier New"/>
+              </a:defRPr>
+            </a:pPr>
+            <a:r>
+              <a:t>// 1. TRONG RAZOR VIEW: NHÚNG TOKEN VÀO FORM</a:t>
+            </a:r>
+            <a:br/>
+            <a:r>
+              <a:t>&lt;form asp-action="TransferSecure" method="post"&gt;</a:t>
+            </a:r>
+            <a:br/>
+            <a:r>
+              <a:t>    @Html.AntiForgeryToken()</a:t>
+            </a:r>
+            <a:br/>
+            <a:r>
+              <a:t>    &lt;input type="number" name="amount" /&gt;</a:t>
+            </a:r>
+            <a:br/>
+            <a:r>
+              <a:t>    &lt;button type="submit"&gt;Chuyển tiền&lt;/button&gt;</a:t>
+            </a:r>
+            <a:br/>
+            <a:r>
+              <a:t>&lt;/form&gt;</a:t>
+            </a:r>
+            <a:br/>
+            <a:br/>
+            <a:r>
+              <a:t>// 2. TRONG CONTROLLER: BẮT BUỘC KIỂM TRA TOKEN</a:t>
+            </a:r>
+            <a:br/>
+            <a:r>
+              <a:t>[HttpPost]</a:t>
+            </a:r>
+            <a:br/>
+            <a:r>
+              <a:t>[ValidateAntiForgeryToken]</a:t>
+            </a:r>
+            <a:br/>
+            <a:r>
+              <a:t>public IActionResult TransferSecure(decimal amount)</a:t>
+            </a:r>
+            <a:br/>
+            <a:r>
+              <a:t>{</a:t>
+            </a:r>
+            <a:br/>
+            <a:r>
+              <a:t>    // Chỉ thực thi khi Token từ Form khớp với Token trong Cookie</a:t>
+            </a:r>
+            <a:br/>
+            <a:r>
+              <a:t>}</a:t>
+            </a:r>
+          </a:p>
+        </p:txBody>
+      </p:sp>
+      <p:sp>
+        <p:nvSpPr>
+          <p:cNvPr id="7" name="Rounded Rectangle 6"/>
+          <p:cNvSpPr/>
+          <p:nvPr/>
+        </p:nvSpPr>
+        <p:spPr>
+          <a:xfrm>
+            <a:off x="6263640" y="1280160"/>
+            <a:ext cx="5166360" cy="4846320"/>
+          </a:xfrm>
+          <a:prstGeom prst="roundRect">
+            <a:avLst/>
+          </a:prstGeom>
+          <a:solidFill>
+            <a:srgbClr val="F8FAFC"/>
+          </a:solidFill>
+          <a:ln>
+            <a:solidFill>
+              <a:srgbClr val="E2E8F0"/>
+            </a:solidFill>
+          </a:ln>
+        </p:spPr>
+        <p:style>
+          <a:lnRef idx="1">
+            <a:schemeClr val="accent1"/>
+          </a:lnRef>
+          <a:fillRef idx="3">
+            <a:schemeClr val="accent1"/>
+          </a:fillRef>
+          <a:effectRef idx="2">
+            <a:schemeClr val="accent1"/>
+          </a:effectRef>
+          <a:fontRef idx="minor">
+            <a:schemeClr val="lt1"/>
+          </a:fontRef>
+        </p:style>
+        <p:txBody>
+          <a:bodyPr rtlCol="0" anchor="ctr" wrap="square"/>
+          <a:lstStyle/>
+          <a:p>
+            <a:pPr algn="ctr">
+              <a:defRPr sz="1500" b="1">
+                <a:solidFill>
+                  <a:srgbClr val="1D4ED8"/>
+                </a:solidFill>
+              </a:defRPr>
+            </a:pPr>
+            <a:r>
+              <a:t>Tại Sao Kẻ Tấn Công Không Thể Vượt Qua?</a:t>
+            </a:r>
+          </a:p>
+          <a:p>
+            <a:pPr>
+              <a:spcBef>
+                <a:spcPts val="1000"/>
+              </a:spcBef>
+              <a:defRPr sz="1200">
+                <a:solidFill>
+                  <a:srgbClr val="334155"/>
+                </a:solidFill>
+              </a:defRPr>
+            </a:pPr>
+            <a:r>
+              <a:t>1. Nguyên tắc cặp Token:</a:t>
+            </a:r>
+            <a:br/>
+            <a:r>
+              <a:t>Máy chủ phát hành 1 token mã hóa trong Cookie và 1 token bí mật nhúng vào trường input ẩn của Form.</a:t>
+            </a:r>
+            <a:br/>
+            <a:br/>
+            <a:r>
+              <a:t>2. Bảo vệ bằng Same-Origin Policy (SOP):</a:t>
+            </a:r>
+            <a:br/>
+            <a:r>
+              <a:t>Trang web độc hại của hacker ở tên miền khác (Cross-Origin) TUYỆT ĐỐI KHÔNG THỂ đọc trộm token bí mật trong form của nạn nhân.</a:t>
+            </a:r>
+            <a:br/>
+            <a:br/>
+            <a:r>
+              <a:t>3. Cấu hình Cookie SameSite = Strict:</a:t>
+            </a:r>
+            <a:br/>
+            <a:r>
+              <a:t>Ngăn chặn trình duyệt tự động gửi cookie trong các cross-site request, triệt tiêu tận gốc tiền đề tấn công của CSRF.</a:t>
+            </a:r>
+          </a:p>
+        </p:txBody>
+      </p:sp>
+    </p:spTree>
+  </p:cSld>
+  <p:clrMapOvr>
+    <a:masterClrMapping/>
+  </p:clrMapOvr>
+</p:sld>
+</file>
+
+<file path=ppt/slides/slide2.xml><?xml version="1.0" encoding="utf-8"?>
+<p:sld xmlns:a="http://schemas.openxmlformats.org/drawingml/2006/main" xmlns:p="http://schemas.openxmlformats.org/presentationml/2006/main" xmlns:r="http://schemas.openxmlformats.org/officeDocument/2006/relationships">
+  <p:cSld>
+    <p:spTree>
+      <p:nvGrpSpPr>
+        <p:cNvPr id="1" name=""/>
+        <p:cNvGrpSpPr/>
+        <p:nvPr/>
+      </p:nvGrpSpPr>
+      <p:grpSpPr/>
+      <p:sp>
+        <p:nvSpPr>
+          <p:cNvPr id="2" name="Rectangle 1"/>
+          <p:cNvSpPr/>
+          <p:nvPr/>
+        </p:nvSpPr>
+        <p:spPr>
+          <a:xfrm>
+            <a:off x="0" y="0"/>
+            <a:ext cx="12191695" cy="73152"/>
+          </a:xfrm>
+          <a:prstGeom prst="rect">
+            <a:avLst/>
+          </a:prstGeom>
+          <a:solidFill>
+            <a:srgbClr val="1D4ED8"/>
+          </a:solidFill>
+          <a:ln>
+            <a:noFill/>
+          </a:ln>
+        </p:spPr>
+        <p:style>
+          <a:lnRef idx="1">
+            <a:schemeClr val="accent1"/>
+          </a:lnRef>
+          <a:fillRef idx="3">
+            <a:schemeClr val="accent1"/>
+          </a:fillRef>
+          <a:effectRef idx="2">
+            <a:schemeClr val="accent1"/>
+          </a:effectRef>
+          <a:fontRef idx="minor">
+            <a:schemeClr val="lt1"/>
+          </a:fontRef>
+        </p:style>
+        <p:txBody>
+          <a:bodyPr rtlCol="0" anchor="ctr"/>
+          <a:lstStyle/>
+          <a:p>
+            <a:pPr algn="ctr"/>
+          </a:p>
+        </p:txBody>
+      </p:sp>
+      <p:sp>
+        <p:nvSpPr>
+          <p:cNvPr id="3" name="Rounded Rectangle 2"/>
+          <p:cNvSpPr/>
+          <p:nvPr/>
+        </p:nvSpPr>
+        <p:spPr>
+          <a:xfrm>
+            <a:off x="731520" y="292608"/>
+            <a:ext cx="4389120" cy="347472"/>
+          </a:xfrm>
+          <a:prstGeom prst="roundRect">
+            <a:avLst/>
+          </a:prstGeom>
+          <a:solidFill>
+            <a:srgbClr val="EFF6FF"/>
+          </a:solidFill>
+          <a:ln>
+            <a:solidFill>
+              <a:srgbClr val="BFDBFE"/>
+            </a:solidFill>
+          </a:ln>
+        </p:spPr>
+        <p:style>
+          <a:lnRef idx="1">
+            <a:schemeClr val="accent1"/>
+          </a:lnRef>
+          <a:fillRef idx="3">
+            <a:schemeClr val="accent1"/>
+          </a:fillRef>
+          <a:effectRef idx="2">
+            <a:schemeClr val="accent1"/>
+          </a:effectRef>
+          <a:fontRef idx="minor">
+            <a:schemeClr val="lt1"/>
+          </a:fontRef>
+        </p:style>
+        <p:txBody>
+          <a:bodyPr rtlCol="0" anchor="ctr" wrap="none"/>
+          <a:lstStyle/>
+          <a:p>
+            <a:pPr algn="ctr">
+              <a:defRPr sz="1000" b="1">
+                <a:solidFill>
+                  <a:srgbClr val="1D4ED8"/>
+                </a:solidFill>
+              </a:defRPr>
+            </a:pPr>
+            <a:r>
+              <a:t>OWASP TOP 10 • THỰC NGHIỆM AN TOÀN WEB</a:t>
+            </a:r>
+          </a:p>
+        </p:txBody>
+      </p:sp>
+      <p:sp>
+        <p:nvSpPr>
+          <p:cNvPr id="4" name="TextBox 3"/>
+          <p:cNvSpPr txBox="1"/>
+          <p:nvPr/>
+        </p:nvSpPr>
+        <p:spPr>
+          <a:xfrm>
+            <a:off x="731520" y="658368"/>
+            <a:ext cx="10698480" cy="548640"/>
+          </a:xfrm>
+          <a:prstGeom prst="rect">
+            <a:avLst/>
+          </a:prstGeom>
+          <a:noFill/>
+        </p:spPr>
+        <p:txBody>
+          <a:bodyPr wrap="square">
+            <a:spAutoFit/>
+          </a:bodyPr>
+          <a:lstStyle/>
+          <a:p>
+            <a:pPr>
+              <a:defRPr sz="2000" b="1">
+                <a:solidFill>
+                  <a:srgbClr val="0F172A"/>
+                </a:solidFill>
+              </a:defRPr>
+            </a:pPr>
+            <a:r>
+              <a:t>Mục Tiêu &amp; Phương Châm Báo Cáo Thực Nghiệm OWASP</a:t>
+            </a:r>
+          </a:p>
+        </p:txBody>
+      </p:sp>
+      <p:sp>
+        <p:nvSpPr>
+          <p:cNvPr id="5" name="TextBox 4"/>
+          <p:cNvSpPr txBox="1"/>
+          <p:nvPr/>
+        </p:nvSpPr>
+        <p:spPr>
+          <a:xfrm>
+            <a:off x="731520" y="6492240"/>
+            <a:ext cx="10698480" cy="274320"/>
+          </a:xfrm>
+          <a:prstGeom prst="rect">
+            <a:avLst/>
+          </a:prstGeom>
+          <a:noFill/>
+        </p:spPr>
+        <p:txBody>
+          <a:bodyPr wrap="none">
+            <a:spAutoFit/>
+          </a:bodyPr>
+          <a:lstStyle/>
+          <a:p>
+            <a:pPr>
+              <a:defRPr sz="950">
+                <a:solidFill>
+                  <a:srgbClr val="64748B"/>
+                </a:solidFill>
+              </a:defRPr>
+            </a:pPr>
+            <a:r>
+              <a:t>Nhóm WNC.G01 (Học - Bình - Cường) • Khoa CNTT - Đại học Mở Hà Nội • GVHD: ThS. Lê Hữu Dũng</a:t>
+            </a:r>
+          </a:p>
+        </p:txBody>
+      </p:sp>
+      <p:sp>
+        <p:nvSpPr>
+          <p:cNvPr id="6" name="Rounded Rectangle 5"/>
+          <p:cNvSpPr/>
+          <p:nvPr/>
+        </p:nvSpPr>
+        <p:spPr>
+          <a:xfrm>
+            <a:off x="731520" y="1280160"/>
+            <a:ext cx="5166360" cy="4846320"/>
+          </a:xfrm>
+          <a:prstGeom prst="roundRect">
+            <a:avLst/>
+          </a:prstGeom>
+          <a:solidFill>
+            <a:srgbClr val="F8FAFC"/>
+          </a:solidFill>
+          <a:ln>
+            <a:solidFill>
+              <a:srgbClr val="E2E8F0"/>
+            </a:solidFill>
+          </a:ln>
+        </p:spPr>
+        <p:style>
+          <a:lnRef idx="1">
+            <a:schemeClr val="accent1"/>
+          </a:lnRef>
+          <a:fillRef idx="3">
+            <a:schemeClr val="accent1"/>
+          </a:fillRef>
+          <a:effectRef idx="2">
+            <a:schemeClr val="accent1"/>
+          </a:effectRef>
+          <a:fontRef idx="minor">
+            <a:schemeClr val="lt1"/>
+          </a:fontRef>
+        </p:style>
+        <p:txBody>
+          <a:bodyPr rtlCol="0" anchor="ctr" wrap="square"/>
+          <a:lstStyle/>
+          <a:p>
+            <a:pPr algn="ctr">
+              <a:defRPr sz="1600" b="1">
+                <a:solidFill>
+                  <a:srgbClr val="BE123C"/>
+                </a:solidFill>
+              </a:defRPr>
+            </a:pPr>
+            <a:r>
+              <a:t>🎯 Yêu Cầu Của Giảng Viên (ThS. Lê Hữu Dũng)</a:t>
+            </a:r>
+          </a:p>
+          <a:p>
+            <a:pPr>
+              <a:spcBef>
+                <a:spcPts val="1000"/>
+              </a:spcBef>
+              <a:defRPr sz="1300">
+                <a:solidFill>
+                  <a:srgbClr val="334155"/>
+                </a:solidFill>
+              </a:defRPr>
+            </a:pPr>
+            <a:r>
+              <a:t>• Không dịch lý thuyết tiếng Anh sách vở.</a:t>
+            </a:r>
+            <a:br/>
+            <a:r>
+              <a:t>• Thấy được lỗ hổng thực sự nguy hiểm đến mức nào trong môi trường thực tế.</a:t>
+            </a:r>
+            <a:br/>
+            <a:r>
+              <a:t>• Bắt buộc phải thực nghiệm demo: Muốn phòng thủ an toàn, phải hiểu hacker tấn công hệ thống theo cách nào.</a:t>
+            </a:r>
+            <a:br/>
+            <a:r>
+              <a:t>• Báo cáo đối chứng: Minh chứng rõ ràng giữa code dính lỗi và code đã vá chuẩn.</a:t>
+            </a:r>
+          </a:p>
+        </p:txBody>
+      </p:sp>
+      <p:sp>
+        <p:nvSpPr>
+          <p:cNvPr id="7" name="Rounded Rectangle 6"/>
+          <p:cNvSpPr/>
+          <p:nvPr/>
+        </p:nvSpPr>
+        <p:spPr>
+          <a:xfrm>
+            <a:off x="6263640" y="1280160"/>
+            <a:ext cx="5166360" cy="4846320"/>
+          </a:xfrm>
+          <a:prstGeom prst="roundRect">
+            <a:avLst/>
+          </a:prstGeom>
+          <a:solidFill>
+            <a:srgbClr val="EFF6FF"/>
+          </a:solidFill>
+          <a:ln>
+            <a:solidFill>
+              <a:srgbClr val="BFDBFE"/>
+            </a:solidFill>
+          </a:ln>
+        </p:spPr>
+        <p:style>
+          <a:lnRef idx="1">
+            <a:schemeClr val="accent1"/>
+          </a:lnRef>
+          <a:fillRef idx="3">
+            <a:schemeClr val="accent1"/>
+          </a:fillRef>
+          <a:effectRef idx="2">
+            <a:schemeClr val="accent1"/>
+          </a:effectRef>
+          <a:fontRef idx="minor">
+            <a:schemeClr val="lt1"/>
+          </a:fontRef>
+        </p:style>
+        <p:txBody>
+          <a:bodyPr rtlCol="0" anchor="ctr" wrap="square"/>
+          <a:lstStyle/>
+          <a:p>
+            <a:pPr algn="ctr">
+              <a:defRPr sz="1600" b="1">
+                <a:solidFill>
+                  <a:srgbClr val="1D4ED8"/>
+                </a:solidFill>
+              </a:defRPr>
+            </a:pPr>
+            <a:r>
+              <a:t>🚀 Phương Pháp Thực Hiện Của Nhóm WNC.G01</a:t>
+            </a:r>
+          </a:p>
+          <a:p>
+            <a:pPr>
+              <a:spcBef>
+                <a:spcPts val="1000"/>
+              </a:spcBef>
+              <a:defRPr sz="1300">
+                <a:solidFill>
+                  <a:srgbClr val="334155"/>
+                </a:solidFill>
+              </a:defRPr>
+            </a:pPr>
+            <a:r>
+              <a:t>• Xây dựng ứng dụng thực nghiệm độc lập (OWASP_Demo) trên ASP.NET Core MVC .NET 10.</a:t>
+            </a:r>
+            <a:br/>
+            <a:r>
+              <a:t>• Kết nối trực tiếp máy chủ CSDL Microsoft SQL Server 2025 Developer trên Localhost.</a:t>
+            </a:r>
+            <a:br/>
+            <a:r>
+              <a:t>• Tạo sẵn 3 phân hệ tương tác riêng biệt cho 3 thành viên: Bấm 1 click nạp payload và quan sát kết quả tức thì.</a:t>
+            </a:r>
+            <a:br/>
+            <a:r>
+              <a:t>• Áp dụng kết quả thực nghiệm vào thiết kế kiến trúc bảo mật (Security View) của Đồ án BTL.</a:t>
+            </a:r>
+          </a:p>
+        </p:txBody>
+      </p:sp>
+    </p:spTree>
+  </p:cSld>
+  <p:clrMapOvr>
+    <a:masterClrMapping/>
+  </p:clrMapOvr>
+</p:sld>
+</file>
+
+<file path=ppt/slides/slide20.xml><?xml version="1.0" encoding="utf-8"?>
+<p:sld xmlns:a="http://schemas.openxmlformats.org/drawingml/2006/main" xmlns:p="http://schemas.openxmlformats.org/presentationml/2006/main" xmlns:r="http://schemas.openxmlformats.org/officeDocument/2006/relationships">
+  <p:cSld>
+    <p:spTree>
+      <p:nvGrpSpPr>
+        <p:cNvPr id="1" name=""/>
+        <p:cNvGrpSpPr/>
+        <p:nvPr/>
+      </p:nvGrpSpPr>
+      <p:grpSpPr/>
+      <p:sp>
+        <p:nvSpPr>
+          <p:cNvPr id="2" name="Rectangle 1"/>
+          <p:cNvSpPr/>
+          <p:nvPr/>
+        </p:nvSpPr>
+        <p:spPr>
+          <a:xfrm>
+            <a:off x="0" y="0"/>
+            <a:ext cx="12191695" cy="73152"/>
+          </a:xfrm>
+          <a:prstGeom prst="rect">
+            <a:avLst/>
+          </a:prstGeom>
+          <a:solidFill>
+            <a:srgbClr val="1D4ED8"/>
+          </a:solidFill>
+          <a:ln>
+            <a:noFill/>
+          </a:ln>
+        </p:spPr>
+        <p:style>
+          <a:lnRef idx="1">
+            <a:schemeClr val="accent1"/>
+          </a:lnRef>
+          <a:fillRef idx="3">
+            <a:schemeClr val="accent1"/>
+          </a:fillRef>
+          <a:effectRef idx="2">
+            <a:schemeClr val="accent1"/>
+          </a:effectRef>
+          <a:fontRef idx="minor">
+            <a:schemeClr val="lt1"/>
+          </a:fontRef>
+        </p:style>
+        <p:txBody>
+          <a:bodyPr rtlCol="0" anchor="ctr"/>
+          <a:lstStyle/>
+          <a:p>
+            <a:pPr algn="ctr"/>
+          </a:p>
+        </p:txBody>
+      </p:sp>
+      <p:sp>
+        <p:nvSpPr>
+          <p:cNvPr id="3" name="Rounded Rectangle 2"/>
+          <p:cNvSpPr/>
+          <p:nvPr/>
+        </p:nvSpPr>
+        <p:spPr>
+          <a:xfrm>
+            <a:off x="731520" y="292608"/>
+            <a:ext cx="4389120" cy="347472"/>
+          </a:xfrm>
+          <a:prstGeom prst="roundRect">
+            <a:avLst/>
+          </a:prstGeom>
+          <a:solidFill>
+            <a:srgbClr val="EFF6FF"/>
+          </a:solidFill>
+          <a:ln>
+            <a:solidFill>
+              <a:srgbClr val="BFDBFE"/>
+            </a:solidFill>
+          </a:ln>
+        </p:spPr>
+        <p:style>
+          <a:lnRef idx="1">
+            <a:schemeClr val="accent1"/>
+          </a:lnRef>
+          <a:fillRef idx="3">
+            <a:schemeClr val="accent1"/>
+          </a:fillRef>
+          <a:effectRef idx="2">
+            <a:schemeClr val="accent1"/>
+          </a:effectRef>
+          <a:fontRef idx="minor">
+            <a:schemeClr val="lt1"/>
+          </a:fontRef>
+        </p:style>
+        <p:txBody>
+          <a:bodyPr rtlCol="0" anchor="ctr" wrap="none"/>
+          <a:lstStyle/>
+          <a:p>
+            <a:pPr algn="ctr">
+              <a:defRPr sz="1000" b="1">
+                <a:solidFill>
+                  <a:srgbClr val="1D4ED8"/>
+                </a:solidFill>
+              </a:defRPr>
+            </a:pPr>
+            <a:r>
+              <a:t>CHỦ ĐỀ 3 • NGUYỄN MINH CƯỜNG (23A1001D0058)</a:t>
+            </a:r>
+          </a:p>
+        </p:txBody>
+      </p:sp>
+      <p:sp>
+        <p:nvSpPr>
+          <p:cNvPr id="4" name="TextBox 3"/>
+          <p:cNvSpPr txBox="1"/>
+          <p:nvPr/>
+        </p:nvSpPr>
+        <p:spPr>
+          <a:xfrm>
+            <a:off x="731520" y="658368"/>
+            <a:ext cx="10698480" cy="548640"/>
+          </a:xfrm>
+          <a:prstGeom prst="rect">
+            <a:avLst/>
+          </a:prstGeom>
+          <a:noFill/>
+        </p:spPr>
+        <p:txBody>
+          <a:bodyPr wrap="square">
+            <a:spAutoFit/>
+          </a:bodyPr>
+          <a:lstStyle/>
+          <a:p>
+            <a:pPr>
+              <a:defRPr sz="2000" b="1">
+                <a:solidFill>
+                  <a:srgbClr val="0F172A"/>
+                </a:solidFill>
+              </a:defRPr>
+            </a:pPr>
+            <a:r>
+              <a:t>3.6. CSRF Attack: Phòng Thủ Trong AJAX &amp; Fetch API (Buổi 9)</a:t>
+            </a:r>
+          </a:p>
+        </p:txBody>
+      </p:sp>
+      <p:sp>
+        <p:nvSpPr>
+          <p:cNvPr id="5" name="TextBox 4"/>
+          <p:cNvSpPr txBox="1"/>
+          <p:nvPr/>
+        </p:nvSpPr>
+        <p:spPr>
+          <a:xfrm>
+            <a:off x="731520" y="6492240"/>
+            <a:ext cx="10698480" cy="274320"/>
+          </a:xfrm>
+          <a:prstGeom prst="rect">
+            <a:avLst/>
+          </a:prstGeom>
+          <a:noFill/>
+        </p:spPr>
+        <p:txBody>
+          <a:bodyPr wrap="none">
+            <a:spAutoFit/>
+          </a:bodyPr>
+          <a:lstStyle/>
+          <a:p>
+            <a:pPr>
+              <a:defRPr sz="950">
+                <a:solidFill>
+                  <a:srgbClr val="64748B"/>
+                </a:solidFill>
+              </a:defRPr>
+            </a:pPr>
+            <a:r>
+              <a:t>Nhóm WNC.G01 (Học - Bình - Cường) • Khoa CNTT - Đại học Mở Hà Nội • GVHD: ThS. Lê Hữu Dũng</a:t>
+            </a:r>
+          </a:p>
+        </p:txBody>
+      </p:sp>
+      <p:sp>
+        <p:nvSpPr>
+          <p:cNvPr id="6" name="Rounded Rectangle 5"/>
+          <p:cNvSpPr/>
+          <p:nvPr/>
+        </p:nvSpPr>
+        <p:spPr>
+          <a:xfrm>
+            <a:off x="731520" y="1280160"/>
+            <a:ext cx="10728655" cy="4846320"/>
+          </a:xfrm>
+          <a:prstGeom prst="roundRect">
+            <a:avLst/>
+          </a:prstGeom>
+          <a:solidFill>
+            <a:srgbClr val="F8FAFC"/>
+          </a:solidFill>
+          <a:ln>
+            <a:solidFill>
+              <a:srgbClr val="E2E8F0"/>
+            </a:solidFill>
+          </a:ln>
+        </p:spPr>
+        <p:style>
+          <a:lnRef idx="1">
+            <a:schemeClr val="accent1"/>
+          </a:lnRef>
+          <a:fillRef idx="3">
+            <a:schemeClr val="accent1"/>
+          </a:fillRef>
+          <a:effectRef idx="2">
+            <a:schemeClr val="accent1"/>
+          </a:effectRef>
+          <a:fontRef idx="minor">
+            <a:schemeClr val="lt1"/>
+          </a:fontRef>
+        </p:style>
+        <p:txBody>
+          <a:bodyPr rtlCol="0" anchor="ctr" wrap="square"/>
+          <a:lstStyle/>
+          <a:p>
+            <a:pPr algn="ctr">
+              <a:defRPr sz="1500" b="1">
+                <a:solidFill>
+                  <a:srgbClr val="1D4ED8"/>
+                </a:solidFill>
+              </a:defRPr>
+            </a:pPr>
+            <a:r>
+              <a:t>Kỹ Thuật Truyền Token Khi Sử Dụng AJAX Fetch API (Slide Buổi 9)</a:t>
+            </a:r>
+          </a:p>
+          <a:p>
+            <a:pPr>
+              <a:spcBef>
+                <a:spcPts val="800"/>
+              </a:spcBef>
+              <a:defRPr sz="1000">
+                <a:solidFill>
+                  <a:srgbClr val="0F172A"/>
+                </a:solidFill>
+                <a:latin typeface="Courier New"/>
+              </a:defRPr>
+            </a:pPr>
+            <a:r>
+              <a:t>// TRONG JAVASCRIPT FETCH API:</a:t>
+            </a:r>
+            <a:br/>
+            <a:r>
+              <a:t>const token = document.querySelector('input[name="__RequestVerificationToken"]').value;</a:t>
+            </a:r>
+            <a:br/>
+            <a:br/>
+            <a:r>
+              <a:t>fetch('/Csrf/TransferAjax', {</a:t>
+            </a:r>
+            <a:br/>
+            <a:r>
+              <a:t>    method: 'POST',</a:t>
+            </a:r>
+            <a:br/>
+            <a:r>
+              <a:t>    headers: {</a:t>
+            </a:r>
+            <a:br/>
+            <a:r>
+              <a:t>        'Content-Type': 'application/json',</a:t>
+            </a:r>
+            <a:br/>
+            <a:r>
+              <a:t>        'RequestVerificationToken': token // TRUYỀN TOKEN QUA HEADER</a:t>
+            </a:r>
+            <a:br/>
+            <a:r>
+              <a:t>    },</a:t>
+            </a:r>
+            <a:br/>
+            <a:r>
+              <a:t>    body: JSON.stringify({ amount: 5000000 })</a:t>
+            </a:r>
+            <a:br/>
+            <a:r>
+              <a:t>})</a:t>
+            </a:r>
+            <a:br/>
+            <a:r>
+              <a:t>.then(response =&gt; response.json());</a:t>
+            </a:r>
+          </a:p>
+          <a:p>
+            <a:pPr>
+              <a:spcBef>
+                <a:spcPts val="1200"/>
+              </a:spcBef>
+              <a:defRPr sz="1250">
+                <a:solidFill>
+                  <a:srgbClr val="334155"/>
+                </a:solidFill>
+              </a:defRPr>
+            </a:pPr>
+            <a:r>
+              <a:t>📌 Tích hợp vào bài tập lớn:</a:t>
+            </a:r>
+            <a:br/>
+            <a:r>
+              <a:t>Đối với các thao tác đặt lịch không reload trang (AJAX Fetch API), nhóm đính kèm header RequestVerificationToken để đảm bảo vừa có trải nghiệm người dùng mượt mà, vừa đảm bảo an toàn tuyệt đối trước các đợt tấn công giả mạo yêu cầu.</a:t>
+            </a:r>
+          </a:p>
+        </p:txBody>
+      </p:sp>
+    </p:spTree>
+  </p:cSld>
+  <p:clrMapOvr>
+    <a:masterClrMapping/>
+  </p:clrMapOvr>
+</p:sld>
+</file>
+
+<file path=ppt/slides/slide21.xml><?xml version="1.0" encoding="utf-8"?>
 <p:sld xmlns:a="http://schemas.openxmlformats.org/drawingml/2006/main" xmlns:p="http://schemas.openxmlformats.org/presentationml/2006/main" xmlns:r="http://schemas.openxmlformats.org/officeDocument/2006/relationships">
   <p:cSld>
     <p:spTree>
@@ -5949,7 +8527,7 @@
 </p:sld>
 </file>
 
-<file path=ppt/slides/slide16.xml><?xml version="1.0" encoding="utf-8"?>
+<file path=ppt/slides/slide22.xml><?xml version="1.0" encoding="utf-8"?>
 <p:sld xmlns:a="http://schemas.openxmlformats.org/drawingml/2006/main" xmlns:p="http://schemas.openxmlformats.org/presentationml/2006/main" xmlns:r="http://schemas.openxmlformats.org/officeDocument/2006/relationships">
   <p:cSld>
     <p:spTree>
@@ -6225,353 +8803,6 @@
             <a:br/>
             <a:r>
               <a:t>Nhóm WNC.G01 sẵn sàng lắng nghe câu hỏi và nhận xét từ giảng viên.</a:t>
-            </a:r>
-          </a:p>
-        </p:txBody>
-      </p:sp>
-    </p:spTree>
-  </p:cSld>
-  <p:clrMapOvr>
-    <a:masterClrMapping/>
-  </p:clrMapOvr>
-</p:sld>
-</file>
-
-<file path=ppt/slides/slide2.xml><?xml version="1.0" encoding="utf-8"?>
-<p:sld xmlns:a="http://schemas.openxmlformats.org/drawingml/2006/main" xmlns:p="http://schemas.openxmlformats.org/presentationml/2006/main" xmlns:r="http://schemas.openxmlformats.org/officeDocument/2006/relationships">
-  <p:cSld>
-    <p:spTree>
-      <p:nvGrpSpPr>
-        <p:cNvPr id="1" name=""/>
-        <p:cNvGrpSpPr/>
-        <p:nvPr/>
-      </p:nvGrpSpPr>
-      <p:grpSpPr/>
-      <p:sp>
-        <p:nvSpPr>
-          <p:cNvPr id="2" name="Rectangle 1"/>
-          <p:cNvSpPr/>
-          <p:nvPr/>
-        </p:nvSpPr>
-        <p:spPr>
-          <a:xfrm>
-            <a:off x="0" y="0"/>
-            <a:ext cx="12191695" cy="73152"/>
-          </a:xfrm>
-          <a:prstGeom prst="rect">
-            <a:avLst/>
-          </a:prstGeom>
-          <a:solidFill>
-            <a:srgbClr val="1D4ED8"/>
-          </a:solidFill>
-          <a:ln>
-            <a:noFill/>
-          </a:ln>
-        </p:spPr>
-        <p:style>
-          <a:lnRef idx="1">
-            <a:schemeClr val="accent1"/>
-          </a:lnRef>
-          <a:fillRef idx="3">
-            <a:schemeClr val="accent1"/>
-          </a:fillRef>
-          <a:effectRef idx="2">
-            <a:schemeClr val="accent1"/>
-          </a:effectRef>
-          <a:fontRef idx="minor">
-            <a:schemeClr val="lt1"/>
-          </a:fontRef>
-        </p:style>
-        <p:txBody>
-          <a:bodyPr rtlCol="0" anchor="ctr"/>
-          <a:lstStyle/>
-          <a:p>
-            <a:pPr algn="ctr"/>
-          </a:p>
-        </p:txBody>
-      </p:sp>
-      <p:sp>
-        <p:nvSpPr>
-          <p:cNvPr id="3" name="Rounded Rectangle 2"/>
-          <p:cNvSpPr/>
-          <p:nvPr/>
-        </p:nvSpPr>
-        <p:spPr>
-          <a:xfrm>
-            <a:off x="731520" y="292608"/>
-            <a:ext cx="4389120" cy="347472"/>
-          </a:xfrm>
-          <a:prstGeom prst="roundRect">
-            <a:avLst/>
-          </a:prstGeom>
-          <a:solidFill>
-            <a:srgbClr val="EFF6FF"/>
-          </a:solidFill>
-          <a:ln>
-            <a:solidFill>
-              <a:srgbClr val="BFDBFE"/>
-            </a:solidFill>
-          </a:ln>
-        </p:spPr>
-        <p:style>
-          <a:lnRef idx="1">
-            <a:schemeClr val="accent1"/>
-          </a:lnRef>
-          <a:fillRef idx="3">
-            <a:schemeClr val="accent1"/>
-          </a:fillRef>
-          <a:effectRef idx="2">
-            <a:schemeClr val="accent1"/>
-          </a:effectRef>
-          <a:fontRef idx="minor">
-            <a:schemeClr val="lt1"/>
-          </a:fontRef>
-        </p:style>
-        <p:txBody>
-          <a:bodyPr rtlCol="0" anchor="ctr" wrap="none"/>
-          <a:lstStyle/>
-          <a:p>
-            <a:pPr algn="ctr">
-              <a:defRPr sz="1000" b="1">
-                <a:solidFill>
-                  <a:srgbClr val="1D4ED8"/>
-                </a:solidFill>
-              </a:defRPr>
-            </a:pPr>
-            <a:r>
-              <a:t>OWASP TOP 10 • THỰC NGHIỆM AN TOÀN WEB</a:t>
-            </a:r>
-          </a:p>
-        </p:txBody>
-      </p:sp>
-      <p:sp>
-        <p:nvSpPr>
-          <p:cNvPr id="4" name="TextBox 3"/>
-          <p:cNvSpPr txBox="1"/>
-          <p:nvPr/>
-        </p:nvSpPr>
-        <p:spPr>
-          <a:xfrm>
-            <a:off x="731520" y="658368"/>
-            <a:ext cx="10698480" cy="548640"/>
-          </a:xfrm>
-          <a:prstGeom prst="rect">
-            <a:avLst/>
-          </a:prstGeom>
-          <a:noFill/>
-        </p:spPr>
-        <p:txBody>
-          <a:bodyPr wrap="square">
-            <a:spAutoFit/>
-          </a:bodyPr>
-          <a:lstStyle/>
-          <a:p>
-            <a:pPr>
-              <a:defRPr sz="2000" b="1">
-                <a:solidFill>
-                  <a:srgbClr val="0F172A"/>
-                </a:solidFill>
-              </a:defRPr>
-            </a:pPr>
-            <a:r>
-              <a:t>Mục Tiêu &amp; Phương Châm Báo Cáo Thực Nghiệm OWASP</a:t>
-            </a:r>
-          </a:p>
-        </p:txBody>
-      </p:sp>
-      <p:sp>
-        <p:nvSpPr>
-          <p:cNvPr id="5" name="TextBox 4"/>
-          <p:cNvSpPr txBox="1"/>
-          <p:nvPr/>
-        </p:nvSpPr>
-        <p:spPr>
-          <a:xfrm>
-            <a:off x="731520" y="6492240"/>
-            <a:ext cx="10698480" cy="274320"/>
-          </a:xfrm>
-          <a:prstGeom prst="rect">
-            <a:avLst/>
-          </a:prstGeom>
-          <a:noFill/>
-        </p:spPr>
-        <p:txBody>
-          <a:bodyPr wrap="none">
-            <a:spAutoFit/>
-          </a:bodyPr>
-          <a:lstStyle/>
-          <a:p>
-            <a:pPr>
-              <a:defRPr sz="950">
-                <a:solidFill>
-                  <a:srgbClr val="64748B"/>
-                </a:solidFill>
-              </a:defRPr>
-            </a:pPr>
-            <a:r>
-              <a:t>Nhóm WNC.G01 (Học - Bình - Cường) • Khoa CNTT - Đại học Mở Hà Nội • GVHD: ThS. Lê Hữu Dũng</a:t>
-            </a:r>
-          </a:p>
-        </p:txBody>
-      </p:sp>
-      <p:sp>
-        <p:nvSpPr>
-          <p:cNvPr id="6" name="Rounded Rectangle 5"/>
-          <p:cNvSpPr/>
-          <p:nvPr/>
-        </p:nvSpPr>
-        <p:spPr>
-          <a:xfrm>
-            <a:off x="731520" y="1280160"/>
-            <a:ext cx="5166360" cy="4846320"/>
-          </a:xfrm>
-          <a:prstGeom prst="roundRect">
-            <a:avLst/>
-          </a:prstGeom>
-          <a:solidFill>
-            <a:srgbClr val="F8FAFC"/>
-          </a:solidFill>
-          <a:ln>
-            <a:solidFill>
-              <a:srgbClr val="E2E8F0"/>
-            </a:solidFill>
-          </a:ln>
-        </p:spPr>
-        <p:style>
-          <a:lnRef idx="1">
-            <a:schemeClr val="accent1"/>
-          </a:lnRef>
-          <a:fillRef idx="3">
-            <a:schemeClr val="accent1"/>
-          </a:fillRef>
-          <a:effectRef idx="2">
-            <a:schemeClr val="accent1"/>
-          </a:effectRef>
-          <a:fontRef idx="minor">
-            <a:schemeClr val="lt1"/>
-          </a:fontRef>
-        </p:style>
-        <p:txBody>
-          <a:bodyPr rtlCol="0" anchor="ctr" wrap="square"/>
-          <a:lstStyle/>
-          <a:p>
-            <a:pPr algn="ctr">
-              <a:defRPr sz="1600" b="1">
-                <a:solidFill>
-                  <a:srgbClr val="BE123C"/>
-                </a:solidFill>
-              </a:defRPr>
-            </a:pPr>
-            <a:r>
-              <a:t>🎯 Yêu Cầu Của Giảng Viên (ThS. Lê Hữu Dũng)</a:t>
-            </a:r>
-          </a:p>
-          <a:p>
-            <a:pPr>
-              <a:spcBef>
-                <a:spcPts val="1000"/>
-              </a:spcBef>
-              <a:defRPr sz="1300">
-                <a:solidFill>
-                  <a:srgbClr val="334155"/>
-                </a:solidFill>
-              </a:defRPr>
-            </a:pPr>
-            <a:r>
-              <a:t>• Không dịch lý thuyết tiếng Anh sách vở.</a:t>
-            </a:r>
-            <a:br/>
-            <a:r>
-              <a:t>• Thấy được lỗ hổng thực sự nguy hiểm đến mức nào trong môi trường thực tế.</a:t>
-            </a:r>
-            <a:br/>
-            <a:r>
-              <a:t>• Bắt buộc phải thực nghiệm demo: Muốn phòng thủ an toàn, phải hiểu hacker tấn công hệ thống theo cách nào.</a:t>
-            </a:r>
-            <a:br/>
-            <a:r>
-              <a:t>• Báo cáo đối chứng: Minh chứng rõ ràng giữa code dính lỗi và code đã vá chuẩn.</a:t>
-            </a:r>
-          </a:p>
-        </p:txBody>
-      </p:sp>
-      <p:sp>
-        <p:nvSpPr>
-          <p:cNvPr id="7" name="Rounded Rectangle 6"/>
-          <p:cNvSpPr/>
-          <p:nvPr/>
-        </p:nvSpPr>
-        <p:spPr>
-          <a:xfrm>
-            <a:off x="6263640" y="1280160"/>
-            <a:ext cx="5166360" cy="4846320"/>
-          </a:xfrm>
-          <a:prstGeom prst="roundRect">
-            <a:avLst/>
-          </a:prstGeom>
-          <a:solidFill>
-            <a:srgbClr val="EFF6FF"/>
-          </a:solidFill>
-          <a:ln>
-            <a:solidFill>
-              <a:srgbClr val="BFDBFE"/>
-            </a:solidFill>
-          </a:ln>
-        </p:spPr>
-        <p:style>
-          <a:lnRef idx="1">
-            <a:schemeClr val="accent1"/>
-          </a:lnRef>
-          <a:fillRef idx="3">
-            <a:schemeClr val="accent1"/>
-          </a:fillRef>
-          <a:effectRef idx="2">
-            <a:schemeClr val="accent1"/>
-          </a:effectRef>
-          <a:fontRef idx="minor">
-            <a:schemeClr val="lt1"/>
-          </a:fontRef>
-        </p:style>
-        <p:txBody>
-          <a:bodyPr rtlCol="0" anchor="ctr" wrap="square"/>
-          <a:lstStyle/>
-          <a:p>
-            <a:pPr algn="ctr">
-              <a:defRPr sz="1600" b="1">
-                <a:solidFill>
-                  <a:srgbClr val="1D4ED8"/>
-                </a:solidFill>
-              </a:defRPr>
-            </a:pPr>
-            <a:r>
-              <a:t>🚀 Phương Pháp Thực Hiện Của Nhóm WNC.G01</a:t>
-            </a:r>
-          </a:p>
-          <a:p>
-            <a:pPr>
-              <a:spcBef>
-                <a:spcPts val="1000"/>
-              </a:spcBef>
-              <a:defRPr sz="1300">
-                <a:solidFill>
-                  <a:srgbClr val="334155"/>
-                </a:solidFill>
-              </a:defRPr>
-            </a:pPr>
-            <a:r>
-              <a:t>• Xây dựng ứng dụng thực nghiệm độc lập (OWASP_Demo) trên ASP.NET Core MVC .NET 10.</a:t>
-            </a:r>
-            <a:br/>
-            <a:r>
-              <a:t>• Kết nối trực tiếp máy chủ CSDL Microsoft SQL Server 2025 Developer trên Localhost.</a:t>
-            </a:r>
-            <a:br/>
-            <a:r>
-              <a:t>• Tạo sẵn 3 phân hệ tương tác riêng biệt cho 3 thành viên: Bấm 1 click nạp payload và quan sát kết quả tức thì.</a:t>
-            </a:r>
-            <a:br/>
-            <a:r>
-              <a:t>• Áp dụng kết quả thực nghiệm vào thiết kế kiến trúc bảo mật (Security View) của Đồ án BTL.</a:t>
             </a:r>
           </a:p>
         </p:txBody>
@@ -6721,7 +8952,7 @@
               </a:defRPr>
             </a:pPr>
             <a:r>
-              <a:t>1.1. SQL Injection: Bản Chất Kỹ Thuật &amp; Nguyên Nhân Gốc Rễ</a:t>
+              <a:t>1.1. SQL Injection: Bản Chất Kỹ Thuật &amp; Điểm Mù Ghép Chuỗi</a:t>
             </a:r>
           </a:p>
         </p:txBody>
@@ -7101,7 +9332,7 @@
               </a:defRPr>
             </a:pPr>
             <a:r>
-              <a:t>1.2. SQL Injection: Thang Đo Nguy Hiểm &amp; Hậu Quả Thực Tế</a:t>
+              <a:t>1.2. SQL Injection: Thang Đo Nguy Hiểm &amp; Hậu Quả Thực Tế (CVSS 9.8)</a:t>
             </a:r>
           </a:p>
         </p:txBody>
@@ -7529,7 +9760,7 @@
               </a:defRPr>
             </a:pPr>
             <a:r>
-              <a:t>1.3. SQL Injection: Phân Tích Cú Pháp Khai Thác &amp; Live Demo</a:t>
+              <a:t>1.3. SQL Injection: Giải Phẫu Chi Tiết Cơ Chế Bẻ Gãy Cú Pháp</a:t>
             </a:r>
           </a:p>
         </p:txBody>
@@ -7578,7 +9809,7 @@
         <p:spPr>
           <a:xfrm>
             <a:off x="731520" y="1280160"/>
-            <a:ext cx="10728655" cy="3840480"/>
+            <a:ext cx="10728655" cy="4846320"/>
           </a:xfrm>
           <a:prstGeom prst="roundRect">
             <a:avLst/>
@@ -7618,7 +9849,7 @@
               </a:defRPr>
             </a:pPr>
             <a:r>
-              <a:t>Kịch bản: Bắn Payload Bypass Xác Thực Đăng Nhập Admin</a:t>
+              <a:t>Kịch bản: Bắn Payload Bypass Xác Thực Đăng Nhập Quản Trị Viên</a:t>
             </a:r>
           </a:p>
           <a:p>
@@ -7638,7 +9869,7 @@
             </a:r>
             <a:br/>
             <a:r>
-              <a:t>Câu truy vấn thực tế được SQL Server thông dịch:</a:t>
+              <a:t>Câu truy vấn thực tế được SQL Server phân tích &amp; thông dịch:</a:t>
             </a:r>
             <a:br/>
             <a:r>
@@ -7650,14 +9881,14 @@
               <a:spcBef>
                 <a:spcPts val="1000"/>
               </a:spcBef>
-              <a:defRPr sz="1200">
+              <a:defRPr sz="1250">
                 <a:solidFill>
                   <a:srgbClr val="334155"/>
                 </a:solidFill>
               </a:defRPr>
             </a:pPr>
             <a:r>
-              <a:t>Giải phẫu 3 thành phần payload:</a:t>
+              <a:t>3 Thành Phần Khai Thác Cốt Lõi:</a:t>
             </a:r>
             <a:br/>
             <a:r>
@@ -7670,75 +9901,29 @@
             <a:br/>
             <a:r>
               <a:t>3. Ký tự chú thích (--) : Vô hiệu hóa hoàn toàn bước kiểm tra mật khẩu phía sau (AND Password = '...').</a:t>
-            </a:r>
-          </a:p>
-        </p:txBody>
-      </p:sp>
-      <p:sp>
-        <p:nvSpPr>
-          <p:cNvPr id="7" name="Rounded Rectangle 6"/>
-          <p:cNvSpPr/>
-          <p:nvPr/>
-        </p:nvSpPr>
-        <p:spPr>
-          <a:xfrm>
-            <a:off x="731520" y="5303520"/>
-            <a:ext cx="10728655" cy="868680"/>
-          </a:xfrm>
-          <a:prstGeom prst="roundRect">
-            <a:avLst/>
-          </a:prstGeom>
-          <a:solidFill>
-            <a:srgbClr val="EFF6FF"/>
-          </a:solidFill>
-          <a:ln>
-            <a:solidFill>
-              <a:srgbClr val="BFDBFE"/>
-            </a:solidFill>
-          </a:ln>
-        </p:spPr>
-        <p:style>
-          <a:lnRef idx="1">
-            <a:schemeClr val="accent1"/>
-          </a:lnRef>
-          <a:fillRef idx="3">
-            <a:schemeClr val="accent1"/>
-          </a:fillRef>
-          <a:effectRef idx="2">
-            <a:schemeClr val="accent1"/>
-          </a:effectRef>
-          <a:fontRef idx="minor">
-            <a:schemeClr val="lt1"/>
-          </a:fontRef>
-        </p:style>
-        <p:txBody>
-          <a:bodyPr rtlCol="0" anchor="ctr"/>
-          <a:lstStyle/>
-          <a:p>
-            <a:pPr algn="ctr">
-              <a:defRPr sz="1250" b="1">
-                <a:solidFill>
-                  <a:srgbClr val="1D4ED8"/>
-                </a:solidFill>
-              </a:defRPr>
-            </a:pPr>
-            <a:r>
-              <a:t>💻 [HỌC LIVE DEMO]: Chuyển sang Web UI Tab 1 &amp; VS Code SQL Server</a:t>
             </a:r>
           </a:p>
           <a:p>
             <a:pPr>
               <a:spcBef>
-                <a:spcPts val="200"/>
+                <a:spcPts val="1000"/>
               </a:spcBef>
-              <a:defRPr sz="1100">
-                <a:solidFill>
-                  <a:srgbClr val="334155"/>
-                </a:solidFill>
-              </a:defRPr>
-            </a:pPr>
-            <a:r>
-              <a:t>Thao tác trực tiếp: Nạp payload ' OR '1'='1' -- -&gt; Bấm submit bên Đỏ (rò rỉ 4 tài khoản) -&gt; Chuyển VS Code đối chiếu query.</a:t>
+              <a:defRPr sz="1250" b="1">
+                <a:solidFill>
+                  <a:srgbClr val="B45309"/>
+                </a:solidFill>
+              </a:defRPr>
+            </a:pPr>
+            <a:r>
+              <a:t>📌 Cơ chế tấn công Union-Based (Rút dữ liệu từ bảng khác):</a:t>
+            </a:r>
+            <a:br/>
+            <a:r>
+              <a:t>Payload: ' UNION SELECT Id, Username, Password, SecretNote FROM Accounts --</a:t>
+            </a:r>
+            <a:br/>
+            <a:r>
+              <a:t>Cho phép kẻ tấn công ghép nối bảng nhạy cảm vào kết quả hiển thị của màn hình tìm kiếm thông thường!</a:t>
             </a:r>
           </a:p>
         </p:txBody>
@@ -7888,7 +10073,7 @@
               </a:defRPr>
             </a:pPr>
             <a:r>
-              <a:t>1.4. SQL Injection: Cơ Chế Phòng Thủ Chuẩn EF Core LINQ</a:t>
+              <a:t>1.4. SQL Injection: Đối Chứng Thực Nghiệm Trực Quan Trên Web UI</a:t>
             </a:r>
           </a:p>
         </p:txBody>
@@ -7937,7 +10122,104 @@
         <p:spPr>
           <a:xfrm>
             <a:off x="731520" y="1280160"/>
-            <a:ext cx="5166360" cy="4846320"/>
+            <a:ext cx="5166360" cy="3840480"/>
+          </a:xfrm>
+          <a:prstGeom prst="roundRect">
+            <a:avLst/>
+          </a:prstGeom>
+          <a:solidFill>
+            <a:srgbClr val="FFF1F2"/>
+          </a:solidFill>
+          <a:ln>
+            <a:solidFill>
+              <a:srgbClr val="FECDD3"/>
+            </a:solidFill>
+          </a:ln>
+        </p:spPr>
+        <p:style>
+          <a:lnRef idx="1">
+            <a:schemeClr val="accent1"/>
+          </a:lnRef>
+          <a:fillRef idx="3">
+            <a:schemeClr val="accent1"/>
+          </a:fillRef>
+          <a:effectRef idx="2">
+            <a:schemeClr val="accent1"/>
+          </a:effectRef>
+          <a:fontRef idx="minor">
+            <a:schemeClr val="lt1"/>
+          </a:fontRef>
+        </p:style>
+        <p:txBody>
+          <a:bodyPr rtlCol="0" anchor="ctr" wrap="square"/>
+          <a:lstStyle/>
+          <a:p>
+            <a:pPr algn="ctr">
+              <a:defRPr sz="1400" b="1">
+                <a:solidFill>
+                  <a:srgbClr val="BE123C"/>
+                </a:solidFill>
+              </a:defRPr>
+            </a:pPr>
+            <a:r>
+              <a:t>❌ 1. NHÁNH BỊ LỖI (Nối Chuỗi SQL Thuần)</a:t>
+            </a:r>
+          </a:p>
+          <a:p>
+            <a:pPr>
+              <a:spcBef>
+                <a:spcPts val="800"/>
+              </a:spcBef>
+              <a:defRPr sz="1200">
+                <a:solidFill>
+                  <a:srgbClr val="334155"/>
+                </a:solidFill>
+              </a:defRPr>
+            </a:pPr>
+            <a:r>
+              <a:t>• Input khai thác: ' OR '1'='1' --</a:t>
+            </a:r>
+            <a:br/>
+            <a:r>
+              <a:t>• Câu lệnh thực thi:</a:t>
+            </a:r>
+            <a:br/>
+            <a:r>
+              <a:t>  SELECT * FROM Accounts WHERE Username = '' OR '1'='1' --'</a:t>
+            </a:r>
+            <a:br/>
+            <a:r>
+              <a:t>• Cơ chế thông dịch: Mệnh đề WHERE luôn TRUE.</a:t>
+            </a:r>
+            <a:br/>
+            <a:r>
+              <a:t>• Hậu quả thực tế:</a:t>
+            </a:r>
+            <a:br/>
+            <a:r>
+              <a:t>  - Đăng nhập thành công mà KHÔNG CẦN mật khẩu.</a:t>
+            </a:r>
+            <a:br/>
+            <a:r>
+              <a:t>  - Rò rỉ toàn bộ 4 tài khoản CSDL (Admin, Chuyên gia, Khách hàng).</a:t>
+            </a:r>
+            <a:br/>
+            <a:r>
+              <a:t>  - Lộ mật khẩu gốc và số dư tài khoản ngân hàng.</a:t>
+            </a:r>
+          </a:p>
+        </p:txBody>
+      </p:sp>
+      <p:sp>
+        <p:nvSpPr>
+          <p:cNvPr id="7" name="Rounded Rectangle 6"/>
+          <p:cNvSpPr/>
+          <p:nvPr/>
+        </p:nvSpPr>
+        <p:spPr>
+          <a:xfrm>
+            <a:off x="6263640" y="1280160"/>
+            <a:ext cx="5166360" cy="3840480"/>
           </a:xfrm>
           <a:prstGeom prst="roundRect">
             <a:avLst/>
@@ -7970,14 +10252,14 @@
           <a:lstStyle/>
           <a:p>
             <a:pPr algn="ctr">
-              <a:defRPr sz="1500" b="1">
+              <a:defRPr sz="1400" b="1">
                 <a:solidFill>
                   <a:srgbClr val="047857"/>
                 </a:solidFill>
               </a:defRPr>
             </a:pPr>
             <a:r>
-              <a:t>Cách Viết Code Chuẩn Hóa Với EF Core</a:t>
+              <a:t>✅ 2. NHÁNH AN TOÀN (EF Core Parameterized)</a:t>
             </a:r>
           </a:p>
           <a:p>
@@ -7985,95 +10267,70 @@
               <a:spcBef>
                 <a:spcPts val="800"/>
               </a:spcBef>
-              <a:defRPr sz="1000">
-                <a:solidFill>
-                  <a:srgbClr val="065F46"/>
-                </a:solidFill>
-                <a:latin typeface="Courier New"/>
-              </a:defRPr>
-            </a:pPr>
-            <a:r>
-              <a:t>// DÙNG LINQ PARAMETERIZED (KHUYÊN DÙNG):</a:t>
-            </a:r>
-            <a:br/>
-            <a:r>
-              <a:t>var account = _context.Accounts</a:t>
-            </a:r>
-            <a:br/>
-            <a:r>
-              <a:t>    .FirstOrDefault(a =&gt; a.Username == user </a:t>
-            </a:r>
-            <a:br/>
-            <a:r>
-              <a:t>                      &amp;&amp; a.Password == pass);</a:t>
-            </a:r>
-            <a:br/>
-            <a:br/>
-            <a:r>
-              <a:t>// HOẶC DÙNG FROMSQLINTERPOLATED (NẾU DÙNG SQL THUẦN):</a:t>
-            </a:r>
-            <a:br/>
-            <a:r>
-              <a:t>var account = _context.Accounts</a:t>
-            </a:r>
-            <a:br/>
-            <a:r>
-              <a:t>    .FromSqlInterpolated($"SELECT * FROM Accounts " +</a:t>
-            </a:r>
-            <a:br/>
-            <a:r>
-              <a:t>                         $"WHERE Username={user} " +</a:t>
-            </a:r>
-            <a:br/>
-            <a:r>
-              <a:t>                         $"AND Password={pass}")</a:t>
-            </a:r>
-            <a:br/>
-            <a:r>
-              <a:t>    .FirstOrDefault();</a:t>
-            </a:r>
-          </a:p>
-          <a:p>
-            <a:pPr>
-              <a:spcBef>
-                <a:spcPts val="1200"/>
-              </a:spcBef>
               <a:defRPr sz="1200">
                 <a:solidFill>
-                  <a:srgbClr val="0F172A"/>
-                </a:solidFill>
-              </a:defRPr>
-            </a:pPr>
-            <a:r>
-              <a:t>Tại sao cách này an toàn tuyệt đối?</a:t>
-            </a:r>
-            <a:br/>
-            <a:r>
-              <a:t>SQL Server biên dịch cây thực thi (Execution Plan) TRƯỚC khi gán dữ liệu. Biến @p0 nhận toàn bộ payload như một chuỗi chữ bình thường, vô hiệu hóa hoàn toàn ý đồ chèn lệnh.</a:t>
-            </a:r>
-          </a:p>
-        </p:txBody>
-      </p:sp>
-      <p:sp>
-        <p:nvSpPr>
-          <p:cNvPr id="7" name="Rounded Rectangle 6"/>
+                  <a:srgbClr val="334155"/>
+                </a:solidFill>
+              </a:defRPr>
+            </a:pPr>
+            <a:r>
+              <a:t>• Cùng Input khai thác: ' OR '1'='1' --</a:t>
+            </a:r>
+            <a:br/>
+            <a:r>
+              <a:t>• Câu lệnh thực thi:</a:t>
+            </a:r>
+            <a:br/>
+            <a:r>
+              <a:t>  SELECT * FROM Accounts WHERE Username = @p0 AND Pass = @p1</a:t>
+            </a:r>
+            <a:br/>
+            <a:r>
+              <a:t>• Cơ chế thông dịch:</a:t>
+            </a:r>
+            <a:br/>
+            <a:r>
+              <a:t>  - CSDL biên dịch cây truy vấn (Execution Plan) TRƯỚC.</a:t>
+            </a:r>
+            <a:br/>
+            <a:r>
+              <a:t>  - Toàn bộ chuỗi payload được xem là văn bản (String Literal) thuần túy.</a:t>
+            </a:r>
+            <a:br/>
+            <a:r>
+              <a:t>• Kết quả phòng thủ:</a:t>
+            </a:r>
+            <a:br/>
+            <a:r>
+              <a:t>  - Hệ thống chặn đứng, trả về 0 bản ghi.</a:t>
+            </a:r>
+            <a:br/>
+            <a:r>
+              <a:t>  - Báo 'Sai tài khoản/mật khẩu', bảo vệ an toàn 100%.</a:t>
+            </a:r>
+          </a:p>
+        </p:txBody>
+      </p:sp>
+      <p:sp>
+        <p:nvSpPr>
+          <p:cNvPr id="8" name="Rounded Rectangle 7"/>
           <p:cNvSpPr/>
           <p:nvPr/>
         </p:nvSpPr>
         <p:spPr>
           <a:xfrm>
-            <a:off x="6263640" y="1280160"/>
-            <a:ext cx="5166360" cy="4846320"/>
+            <a:off x="731520" y="5303520"/>
+            <a:ext cx="10728655" cy="868680"/>
           </a:xfrm>
           <a:prstGeom prst="roundRect">
             <a:avLst/>
           </a:prstGeom>
           <a:solidFill>
-            <a:srgbClr val="F8FAFC"/>
+            <a:srgbClr val="EFF6FF"/>
           </a:solidFill>
           <a:ln>
             <a:solidFill>
-              <a:srgbClr val="E2E8F0"/>
+              <a:srgbClr val="BFDBFE"/>
             </a:solidFill>
           </a:ln>
         </p:spPr>
@@ -8092,64 +10349,33 @@
           </a:fontRef>
         </p:style>
         <p:txBody>
-          <a:bodyPr rtlCol="0" anchor="ctr" wrap="square"/>
+          <a:bodyPr rtlCol="0" anchor="ctr"/>
           <a:lstStyle/>
           <a:p>
             <a:pPr algn="ctr">
-              <a:defRPr sz="1500" b="1">
+              <a:defRPr sz="1250" b="1">
                 <a:solidFill>
                   <a:srgbClr val="1D4ED8"/>
                 </a:solidFill>
               </a:defRPr>
             </a:pPr>
             <a:r>
-              <a:t>Bộ Quy Tắc Phòng Thủ Toàn Diện (Defense-in-Depth)</a:t>
+              <a:t>💻 [HỌC LIVE DEMO]: Chuyển sang Web UI Tab 1 (http://localhost:5076/SqlInjection)</a:t>
             </a:r>
           </a:p>
           <a:p>
             <a:pPr>
               <a:spcBef>
-                <a:spcPts val="1000"/>
+                <a:spcPts val="200"/>
               </a:spcBef>
-              <a:defRPr sz="1200">
+              <a:defRPr sz="1100">
                 <a:solidFill>
                   <a:srgbClr val="334155"/>
                 </a:solidFill>
               </a:defRPr>
             </a:pPr>
             <a:r>
-              <a:t>1. Luôn sử dụng Parameterized Query / ORM:</a:t>
-            </a:r>
-            <a:br/>
-            <a:r>
-              <a:t>Tuyệt đối không ghép chuỗi SQL thủ công dưới bất kỳ hình thức nào.</a:t>
-            </a:r>
-            <a:br/>
-            <a:br/>
-            <a:r>
-              <a:t>2. Nguyên tắc đặc quyền tối thiểu (Least Privilege):</a:t>
-            </a:r>
-            <a:br/>
-            <a:r>
-              <a:t>Tài khoản kết nối CSDL của ứng dụng chỉ có quyền SELECT/INSERT/UPDATE trên các bảng cần thiết, không bao giờ dùng tài khoản 'sa' hay quyền DDL (DROP, ALTER).</a:t>
-            </a:r>
-            <a:br/>
-            <a:br/>
-            <a:r>
-              <a:t>3. Xác thực dữ liệu đầu vào (Input Validation):</a:t>
-            </a:r>
-            <a:br/>
-            <a:r>
-              <a:t>Sử dụng Data Annotations ([RegularExpression], [StringLength]) kiểm tra chặt chẽ khuôn dạng dữ liệu.</a:t>
-            </a:r>
-            <a:br/>
-            <a:br/>
-            <a:r>
-              <a:t>4. Mã hóa mật khẩu một chiều (Password Hashing):</a:t>
-            </a:r>
-            <a:br/>
-            <a:r>
-              <a:t>Sử dụng ASP.NET Core Identity (PBKDF2/BCrypt) để nếu CSDL có bị lộ, mật khẩu vẫn được bảo vệ an toàn.</a:t>
+              <a:t>Thao tác: Bấm nạp payload ' OR '1'='1' -- -&gt; Submit bên Đỏ (rò rỉ toàn bộ CSDL) -&gt; Submit bên Xanh (chặn đứng an toàn).</a:t>
             </a:r>
           </a:p>
         </p:txBody>
@@ -8264,7 +10490,7 @@
               </a:defRPr>
             </a:pPr>
             <a:r>
-              <a:t>CHỦ ĐỀ 2 • NGUYỄN THANH BÌNH (23A1001D0041)</a:t>
+              <a:t>CHỦ ĐỀ 1 • NGUYỄN DANH HỌC (23A1001D0158)</a:t>
             </a:r>
           </a:p>
         </p:txBody>
@@ -8299,7 +10525,7 @@
               </a:defRPr>
             </a:pPr>
             <a:r>
-              <a:t>2.1. Stored XSS: Bản Chất Kỹ Thuật &amp; Ngữ Cảnh Bài Toán</a:t>
+              <a:t>1.5. SQL Injection: Minh Chứng Tầng API (cURL) &amp; SQL Server 2025</a:t>
             </a:r>
           </a:p>
         </p:txBody>
@@ -8348,7 +10574,7 @@
         <p:spPr>
           <a:xfrm>
             <a:off x="731520" y="1280160"/>
-            <a:ext cx="5166360" cy="4846320"/>
+            <a:ext cx="5166360" cy="3840480"/>
           </a:xfrm>
           <a:prstGeom prst="roundRect">
             <a:avLst/>
@@ -8381,14 +10607,63 @@
           <a:lstStyle/>
           <a:p>
             <a:pPr algn="ctr">
-              <a:defRPr sz="1500" b="1">
-                <a:solidFill>
-                  <a:srgbClr val="BE123C"/>
-                </a:solidFill>
-              </a:defRPr>
-            </a:pPr>
-            <a:r>
-              <a:t>Ngữ Cảnh Nghiệp Vụ Trong Website Tư Vấn</a:t>
+              <a:defRPr sz="1400" b="1">
+                <a:solidFill>
+                  <a:srgbClr val="1D4ED8"/>
+                </a:solidFill>
+              </a:defRPr>
+            </a:pPr>
+            <a:r>
+              <a:t>Minh Chứng Tầng API / Dòng Lệnh (cURL)</a:t>
+            </a:r>
+          </a:p>
+          <a:p>
+            <a:pPr>
+              <a:spcBef>
+                <a:spcPts val="600"/>
+              </a:spcBef>
+              <a:defRPr sz="1000">
+                <a:solidFill>
+                  <a:srgbClr val="0F172A"/>
+                </a:solidFill>
+                <a:latin typeface="Courier New"/>
+              </a:defRPr>
+            </a:pPr>
+            <a:r>
+              <a:t>$ curl -X POST http://localhost:5076/SqlInjection/LoginVulnerable \</a:t>
+            </a:r>
+            <a:br/>
+            <a:r>
+              <a:t>       -F "username=' OR '1'='1' --" -F "password=any"</a:t>
+            </a:r>
+            <a:br/>
+            <a:br/>
+            <a:r>
+              <a:t>Phản hồi JSON từ Server:</a:t>
+            </a:r>
+            <a:br/>
+            <a:r>
+              <a:t>{</a:t>
+            </a:r>
+            <a:br/>
+            <a:r>
+              <a:t>  "success": true,</a:t>
+            </a:r>
+            <a:br/>
+            <a:r>
+              <a:t>  "isExploited": true,</a:t>
+            </a:r>
+            <a:br/>
+            <a:r>
+              <a:t>  "count": 4,</a:t>
+            </a:r>
+            <a:br/>
+            <a:r>
+              <a:t>  "accounts": [ ... 4 tài khoản bị rò rỉ ... ]</a:t>
+            </a:r>
+            <a:br/>
+            <a:r>
+              <a:t>}</a:t>
             </a:r>
           </a:p>
           <a:p>
@@ -8396,26 +10671,14 @@
               <a:spcBef>
                 <a:spcPts val="800"/>
               </a:spcBef>
-              <a:defRPr sz="1250">
+              <a:defRPr sz="1150">
                 <a:solidFill>
                   <a:srgbClr val="334155"/>
                 </a:solidFill>
               </a:defRPr>
             </a:pPr>
             <a:r>
-              <a:t>• Trong website tư vấn trực tuyến, khách hàng có chức năng đăng đánh giá, nhận xét và gửi câu hỏi tư vấn.</a:t>
-            </a:r>
-            <a:br/>
-            <a:r>
-              <a:t>• Bản chất Stored XSS (Persistent XSS): Kẻ tấn công nhúng mã JavaScript độc hại vào nội dung nhận xét.</a:t>
-            </a:r>
-            <a:br/>
-            <a:r>
-              <a:t>• Máy chủ không lọc mà lưu thẳng mã độc vào CSDL (bảng dbo.Comments).</a:t>
-            </a:r>
-            <a:br/>
-            <a:r>
-              <a:t>• Nguy hiểm: Mỗi khi bất kỳ người dùng khác, chuyên gia hoặc quản trị viên mở trang đánh giá, trình duyệt của họ sẽ tự động biên dịch và thực thi đoạn script độc hại đó.</a:t>
+              <a:t>📌 Ý nghĩa: Chứng minh lỗ hổng nằm ở logic C# Backend, kẻ tấn công dùng script tự động quét và khai thác mà không cần mở web.</a:t>
             </a:r>
           </a:p>
         </p:txBody>
@@ -8429,17 +10692,17 @@
         <p:spPr>
           <a:xfrm>
             <a:off x="6263640" y="1280160"/>
-            <a:ext cx="5166360" cy="4846320"/>
+            <a:ext cx="5166360" cy="3840480"/>
           </a:xfrm>
           <a:prstGeom prst="roundRect">
             <a:avLst/>
           </a:prstGeom>
           <a:solidFill>
-            <a:srgbClr val="FFF1F2"/>
+            <a:srgbClr val="F8FAFC"/>
           </a:solidFill>
           <a:ln>
             <a:solidFill>
-              <a:srgbClr val="FECDD3"/>
+              <a:srgbClr val="E2E8F0"/>
             </a:solidFill>
           </a:ln>
         </p:spPr>
@@ -8462,14 +10725,59 @@
           <a:lstStyle/>
           <a:p>
             <a:pPr algn="ctr">
-              <a:defRPr sz="1500" b="1">
-                <a:solidFill>
-                  <a:srgbClr val="BE123C"/>
-                </a:solidFill>
-              </a:defRPr>
-            </a:pPr>
-            <a:r>
-              <a:t>Mã Nguồn C# Gây Lỗi &amp; Sự Lạm Dụng @@Html.Raw</a:t>
+              <a:defRPr sz="1400" b="1">
+                <a:solidFill>
+                  <a:srgbClr val="047857"/>
+                </a:solidFill>
+              </a:defRPr>
+            </a:pPr>
+            <a:r>
+              <a:t>Minh Chứng Tầng CSDL (SQL Server 2025 Thật)</a:t>
+            </a:r>
+          </a:p>
+          <a:p>
+            <a:pPr>
+              <a:spcBef>
+                <a:spcPts val="600"/>
+              </a:spcBef>
+              <a:defRPr sz="1000">
+                <a:solidFill>
+                  <a:srgbClr val="0F172A"/>
+                </a:solidFill>
+                <a:latin typeface="Courier New"/>
+              </a:defRPr>
+            </a:pPr>
+            <a:r>
+              <a:t>-- Database: OwaspDemoDB | Bảng: dbo.Accounts</a:t>
+            </a:r>
+            <a:br/>
+            <a:r>
+              <a:t>-- 1. Câu lệnh dính lỗi:</a:t>
+            </a:r>
+            <a:br/>
+            <a:r>
+              <a:t>SELECT * FROM Accounts WHERE Username='' OR '1'='1' --'</a:t>
+            </a:r>
+            <a:br/>
+            <a:r>
+              <a:t>&gt;&gt; Kết quả: 4 rows returned (Bypass thành công)</a:t>
+            </a:r>
+            <a:br/>
+            <a:br/>
+            <a:r>
+              <a:t>-- 2. Câu lệnh tham số hóa chuẩn:</a:t>
+            </a:r>
+            <a:br/>
+            <a:r>
+              <a:t>EXEC sp_executesql N'SELECT * FROM Accounts WHERE...',</a:t>
+            </a:r>
+            <a:br/>
+            <a:r>
+              <a:t>     N'@p0 nvarchar(50)', @p0 = N''' OR ''1''=''1'' --'</a:t>
+            </a:r>
+            <a:br/>
+            <a:r>
+              <a:t>&gt;&gt; Kết quả: 0 rows returned (An toàn 100%)</a:t>
             </a:r>
           </a:p>
           <a:p>
@@ -8477,71 +10785,83 @@
               <a:spcBef>
                 <a:spcPts val="800"/>
               </a:spcBef>
-              <a:defRPr sz="1050">
-                <a:solidFill>
-                  <a:srgbClr val="9F1239"/>
-                </a:solidFill>
-                <a:latin typeface="Courier New"/>
-              </a:defRPr>
-            </a:pPr>
-            <a:r>
-              <a:t>// 1. CONTROLLER LƯU NGUYÊN VĂN KHÔNG LÀM SẠCH:</a:t>
-            </a:r>
-            <a:br/>
-            <a:r>
-              <a:t>var comment = new Comment {</a:t>
-            </a:r>
-            <a:br/>
-            <a:r>
-              <a:t>    Author = author,</a:t>
-            </a:r>
-            <a:br/>
-            <a:r>
-              <a:t>    Content = content // Chứa thẻ &lt;script&gt; độc hại</a:t>
-            </a:r>
-            <a:br/>
-            <a:r>
-              <a:t>};</a:t>
-            </a:r>
-            <a:br/>
-            <a:r>
-              <a:t>_context.Comments.Add(comment);</a:t>
-            </a:r>
-            <a:br/>
-            <a:br/>
-            <a:r>
-              <a:t>// 2. RAZOR VIEW LẠM DỤNG HTML.RAW:</a:t>
-            </a:r>
-            <a:br/>
-            <a:r>
-              <a:t>&lt;div class="comment-body"&gt;</a:t>
-            </a:r>
-            <a:br/>
-            <a:r>
-              <a:t>    @Html.Raw(comment.Content) </a:t>
-            </a:r>
-            <a:br/>
-            <a:r>
-              <a:t>&lt;/div&gt;</a:t>
+              <a:defRPr sz="1150">
+                <a:solidFill>
+                  <a:srgbClr val="334155"/>
+                </a:solidFill>
+              </a:defRPr>
+            </a:pPr>
+            <a:r>
+              <a:t>📌 Ý nghĩa: Đối chiếu trực tiếp trên máy chủ SQL Server 2025 chứng minh cơ chế phân tách rạch ròi giữa cú pháp lệnh và tham số giá trị.</a:t>
+            </a:r>
+          </a:p>
+        </p:txBody>
+      </p:sp>
+      <p:sp>
+        <p:nvSpPr>
+          <p:cNvPr id="8" name="Rounded Rectangle 7"/>
+          <p:cNvSpPr/>
+          <p:nvPr/>
+        </p:nvSpPr>
+        <p:spPr>
+          <a:xfrm>
+            <a:off x="731520" y="5303520"/>
+            <a:ext cx="10728655" cy="868680"/>
+          </a:xfrm>
+          <a:prstGeom prst="roundRect">
+            <a:avLst/>
+          </a:prstGeom>
+          <a:solidFill>
+            <a:srgbClr val="ECFDF5"/>
+          </a:solidFill>
+          <a:ln>
+            <a:solidFill>
+              <a:srgbClr val="A7F3D0"/>
+            </a:solidFill>
+          </a:ln>
+        </p:spPr>
+        <p:style>
+          <a:lnRef idx="1">
+            <a:schemeClr val="accent1"/>
+          </a:lnRef>
+          <a:fillRef idx="3">
+            <a:schemeClr val="accent1"/>
+          </a:fillRef>
+          <a:effectRef idx="2">
+            <a:schemeClr val="accent1"/>
+          </a:effectRef>
+          <a:fontRef idx="minor">
+            <a:schemeClr val="lt1"/>
+          </a:fontRef>
+        </p:style>
+        <p:txBody>
+          <a:bodyPr rtlCol="0" anchor="ctr"/>
+          <a:lstStyle/>
+          <a:p>
+            <a:pPr algn="ctr">
+              <a:defRPr sz="1250" b="1">
+                <a:solidFill>
+                  <a:srgbClr val="047857"/>
+                </a:solidFill>
+              </a:defRPr>
+            </a:pPr>
+            <a:r>
+              <a:t>🗄️ [HỌC LIVE DEMO]: Chuyển sang VS Code mở bảng dbo.Accounts &amp; file verify_sql_server.sql</a:t>
             </a:r>
           </a:p>
           <a:p>
             <a:pPr>
               <a:spcBef>
-                <a:spcPts val="1200"/>
+                <a:spcPts val="200"/>
               </a:spcBef>
-              <a:defRPr sz="1200">
-                <a:solidFill>
-                  <a:srgbClr val="0F172A"/>
-                </a:solidFill>
-              </a:defRPr>
-            </a:pPr>
-            <a:r>
-              <a:t>⚠️ Điểm mù lập trình viên:</a:t>
-            </a:r>
-            <a:br/>
-            <a:r>
-              <a:t>Sử dụng @Html.Raw() với mục đích cho phép hiển thị format HTML nhưng vô tình mở toang cánh cửa cho hacker thực thi JavaScript trên máy nạn nhân.</a:t>
+              <a:defRPr sz="1100">
+                <a:solidFill>
+                  <a:srgbClr val="334155"/>
+                </a:solidFill>
+              </a:defRPr>
+            </a:pPr>
+            <a:r>
+              <a:t>Thao tác trực tiếp: Mở extension MSSQL trên VS Code, đối chiếu bảng dữ liệu gốc và chạy câu query đối chứng.</a:t>
             </a:r>
           </a:p>
         </p:txBody>
@@ -8656,7 +10976,7 @@
               </a:defRPr>
             </a:pPr>
             <a:r>
-              <a:t>CHỦ ĐỀ 2 • NGUYỄN THANH BÌNH (23A1001D0041)</a:t>
+              <a:t>CHỦ ĐỀ 1 • NGUYỄN DANH HỌC (23A1001D0158)</a:t>
             </a:r>
           </a:p>
         </p:txBody>
@@ -8691,7 +11011,7 @@
               </a:defRPr>
             </a:pPr>
             <a:r>
-              <a:t>2.2. Stored XSS: Mối Đe Dọa Đánh Cắp Cookie &amp; Session</a:t>
+              <a:t>1.6. SQL Injection: Giải Pháp Phòng Thủ Toàn Diện (Defense-in-Depth)</a:t>
             </a:r>
           </a:p>
         </p:txBody>
@@ -8740,17 +11060,17 @@
         <p:spPr>
           <a:xfrm>
             <a:off x="731520" y="1280160"/>
-            <a:ext cx="3328416" cy="4846320"/>
+            <a:ext cx="5166360" cy="4846320"/>
           </a:xfrm>
           <a:prstGeom prst="roundRect">
             <a:avLst/>
           </a:prstGeom>
           <a:solidFill>
-            <a:srgbClr val="FFF1F2"/>
+            <a:srgbClr val="ECFDF5"/>
           </a:solidFill>
           <a:ln>
             <a:solidFill>
-              <a:srgbClr val="FECDD3"/>
+              <a:srgbClr val="A7F3D0"/>
             </a:solidFill>
           </a:ln>
         </p:spPr>
@@ -8773,18 +11093,59 @@
           <a:lstStyle/>
           <a:p>
             <a:pPr algn="ctr">
-              <a:defRPr sz="1400" b="1">
-                <a:solidFill>
-                  <a:srgbClr val="BE123C"/>
-                </a:solidFill>
-              </a:defRPr>
-            </a:pPr>
-            <a:r>
-              <a:t>🍪 ĐÁNH CẮP SESSION COOKIE</a:t>
-            </a:r>
-            <a:br/>
-            <a:r>
-              <a:t>(Cookie Stealing)</a:t>
+              <a:defRPr sz="1500" b="1">
+                <a:solidFill>
+                  <a:srgbClr val="047857"/>
+                </a:solidFill>
+              </a:defRPr>
+            </a:pPr>
+            <a:r>
+              <a:t>Cách Viết Code Chuẩn Hóa Với EF Core</a:t>
+            </a:r>
+          </a:p>
+          <a:p>
+            <a:pPr>
+              <a:spcBef>
+                <a:spcPts val="800"/>
+              </a:spcBef>
+              <a:defRPr sz="1000">
+                <a:solidFill>
+                  <a:srgbClr val="065F46"/>
+                </a:solidFill>
+                <a:latin typeface="Courier New"/>
+              </a:defRPr>
+            </a:pPr>
+            <a:r>
+              <a:t>// Dùng LINQ Parameterized (KHUYÊN DÙNG):</a:t>
+            </a:r>
+            <a:br/>
+            <a:r>
+              <a:t>var account = _context.Accounts</a:t>
+            </a:r>
+            <a:br/>
+            <a:r>
+              <a:t>    .FirstOrDefault(a =&gt; a.Username == user </a:t>
+            </a:r>
+            <a:br/>
+            <a:r>
+              <a:t>                      &amp;&amp; a.Password == pass);</a:t>
+            </a:r>
+            <a:br/>
+            <a:br/>
+            <a:r>
+              <a:t>// Hoặc dùng FromSqlInterpolated nếu viết SQL thuần:</a:t>
+            </a:r>
+            <a:br/>
+            <a:r>
+              <a:t>var account = _context.Accounts</a:t>
+            </a:r>
+            <a:br/>
+            <a:r>
+              <a:t>    .FromSqlInterpolated($"SELECT * FROM Accounts WHERE Username={user} AND Password={pass}")</a:t>
+            </a:r>
+            <a:br/>
+            <a:r>
+              <a:t>    .FirstOrDefault();</a:t>
             </a:r>
           </a:p>
           <a:p>
@@ -8799,15 +11160,11 @@
               </a:defRPr>
             </a:pPr>
             <a:r>
-              <a:t>• Mã độc truy cập document.cookie để trích xuất Session Token của nạn nhân.</a:t>
-            </a:r>
-            <a:br/>
-            <a:r>
-              <a:t>• Tự động gửi token về máy chủ của hacker.</a:t>
-            </a:r>
-            <a:br/>
-            <a:r>
-              <a:t>• Hacker giả mạo danh tính nạn nhân (Session Hijacking) đăng nhập vào tài khoản mà không cần mật khẩu.</a:t>
+              <a:t>Tại sao cách này an toàn tuyệt đối?</a:t>
+            </a:r>
+            <a:br/>
+            <a:r>
+              <a:t>SQL Server biên dịch cấu trúc lệnh TRƯỚC khi gán dữ liệu. Biến @p0 nhận toàn bộ payload như một chuỗi chữ bình thường, vô hiệu hóa hoàn toàn ý đồ chèn lệnh.</a:t>
             </a:r>
           </a:p>
         </p:txBody>
@@ -8820,18 +11177,18 @@
         </p:nvSpPr>
         <p:spPr>
           <a:xfrm>
-            <a:off x="4416552" y="1280160"/>
-            <a:ext cx="3328416" cy="4846320"/>
+            <a:off x="6263640" y="1280160"/>
+            <a:ext cx="5166360" cy="4846320"/>
           </a:xfrm>
           <a:prstGeom prst="roundRect">
             <a:avLst/>
           </a:prstGeom>
           <a:solidFill>
-            <a:srgbClr val="FFFBEB"/>
+            <a:srgbClr val="F8FAFC"/>
           </a:solidFill>
           <a:ln>
             <a:solidFill>
-              <a:srgbClr val="FEF08A"/>
+              <a:srgbClr val="E2E8F0"/>
             </a:solidFill>
           </a:ln>
         </p:spPr>
@@ -8854,24 +11211,20 @@
           <a:lstStyle/>
           <a:p>
             <a:pPr algn="ctr">
-              <a:defRPr sz="1400" b="1">
-                <a:solidFill>
-                  <a:srgbClr val="B45309"/>
-                </a:solidFill>
-              </a:defRPr>
-            </a:pPr>
-            <a:r>
-              <a:t>🎣 THAY ĐỔI NỘI DUNG GIAO DIỆN</a:t>
-            </a:r>
-            <a:br/>
-            <a:r>
-              <a:t>(DOM Defacement &amp; Phishing)</a:t>
+              <a:defRPr sz="1500" b="1">
+                <a:solidFill>
+                  <a:srgbClr val="1D4ED8"/>
+                </a:solidFill>
+              </a:defRPr>
+            </a:pPr>
+            <a:r>
+              <a:t>Bộ Quy Tắc Phòng Thủ Toàn Diện (Defense in Depth)</a:t>
             </a:r>
           </a:p>
           <a:p>
             <a:pPr>
               <a:spcBef>
-                <a:spcPts val="1000"/>
+                <a:spcPts val="800"/>
               </a:spcBef>
               <a:defRPr sz="1200">
                 <a:solidFill>
@@ -8880,96 +11233,38 @@
               </a:defRPr>
             </a:pPr>
             <a:r>
-              <a:t>• Hacker dùng JavaScript chèn form đăng nhập giả mạo đè lên giao diện website thật.</a:t>
-            </a:r>
-            <a:br/>
-            <a:r>
-              <a:t>• Lừa người dùng nhập lại tài khoản ngân hàng hoặc mật khẩu.</a:t>
-            </a:r>
-            <a:br/>
-            <a:r>
-              <a:t>• Chuyển hướng người dùng sang trang web lừa đảo (Open Redirect).</a:t>
-            </a:r>
-          </a:p>
-        </p:txBody>
-      </p:sp>
-      <p:sp>
-        <p:nvSpPr>
-          <p:cNvPr id="8" name="Rounded Rectangle 7"/>
-          <p:cNvSpPr/>
-          <p:nvPr/>
-        </p:nvSpPr>
-        <p:spPr>
-          <a:xfrm>
-            <a:off x="8101584" y="1280160"/>
-            <a:ext cx="3328416" cy="4846320"/>
-          </a:xfrm>
-          <a:prstGeom prst="roundRect">
-            <a:avLst/>
-          </a:prstGeom>
-          <a:solidFill>
-            <a:srgbClr val="EFF6FF"/>
-          </a:solidFill>
-          <a:ln>
-            <a:solidFill>
-              <a:srgbClr val="BFDBFE"/>
-            </a:solidFill>
-          </a:ln>
-        </p:spPr>
-        <p:style>
-          <a:lnRef idx="1">
-            <a:schemeClr val="accent1"/>
-          </a:lnRef>
-          <a:fillRef idx="3">
-            <a:schemeClr val="accent1"/>
-          </a:fillRef>
-          <a:effectRef idx="2">
-            <a:schemeClr val="accent1"/>
-          </a:effectRef>
-          <a:fontRef idx="minor">
-            <a:schemeClr val="lt1"/>
-          </a:fontRef>
-        </p:style>
-        <p:txBody>
-          <a:bodyPr rtlCol="0" anchor="ctr" wrap="square"/>
-          <a:lstStyle/>
-          <a:p>
-            <a:pPr algn="ctr">
-              <a:defRPr sz="1400" b="1">
-                <a:solidFill>
-                  <a:srgbClr val="1D4ED8"/>
-                </a:solidFill>
-              </a:defRPr>
-            </a:pPr>
-            <a:r>
-              <a:t>🤖 THỰC HIỆN THAO TÁC NGẦM</a:t>
-            </a:r>
-            <a:br/>
-            <a:r>
-              <a:t>(XSS-Keylogger)</a:t>
-            </a:r>
-          </a:p>
-          <a:p>
-            <a:pPr>
-              <a:spcBef>
-                <a:spcPts val="1000"/>
-              </a:spcBef>
-              <a:defRPr sz="1200">
-                <a:solidFill>
-                  <a:srgbClr val="334155"/>
-                </a:solidFill>
-              </a:defRPr>
-            </a:pPr>
-            <a:r>
-              <a:t>• Lắng nghe sự kiện bàn phím của nạn nhân (Keylogging) khi họ chat với chuyên gia.</a:t>
-            </a:r>
-            <a:br/>
-            <a:r>
-              <a:t>• Tự động gửi tin nhắn hoặc đánh giá 5 sao giả mạo danh nghĩa của người dùng.</a:t>
-            </a:r>
-            <a:br/>
-            <a:r>
-              <a:t>• Biến trình duyệt nạn nhân thành botnet tấn công từ chối dịch vụ.</a:t>
+              <a:t>1. Luôn sử dụng Parameterized Query / ORM:</a:t>
+            </a:r>
+            <a:br/>
+            <a:r>
+              <a:t>Tuyệt đối không ghép chuỗi SQL thủ công dưới bất kỳ hình thức nào.</a:t>
+            </a:r>
+            <a:br/>
+            <a:br/>
+            <a:r>
+              <a:t>2. Nguyên tắc đặc quyền tối thiểu (Least Privilege):</a:t>
+            </a:r>
+            <a:br/>
+            <a:r>
+              <a:t>Tài khoản kết nối CSDL của ứng dụng chỉ có quyền SELECT/INSERT/UPDATE trên các bảng cần thiết, không bao giờ dùng tài khoản 'sa' hay quyền DDL (DROP, ALTER).</a:t>
+            </a:r>
+            <a:br/>
+            <a:br/>
+            <a:r>
+              <a:t>3. Xác thực dữ liệu đầu vào (Input Validation):</a:t>
+            </a:r>
+            <a:br/>
+            <a:r>
+              <a:t>Sử dụng Data Annotations ([RegularExpression], [StringLength]) kiểm tra chặt chẽ khuôn dạng dữ liệu.</a:t>
+            </a:r>
+            <a:br/>
+            <a:br/>
+            <a:r>
+              <a:t>4. Mã hóa mật khẩu một chiều (Password Hashing):</a:t>
+            </a:r>
+            <a:br/>
+            <a:r>
+              <a:t>Sử dụng ASP.NET Core Identity (PBKDF2/BCrypt) để nếu CSDL có bị lộ, mật khẩu vẫn được bảo vệ an toàn.</a:t>
             </a:r>
           </a:p>
         </p:txBody>
@@ -9119,7 +11414,7 @@
               </a:defRPr>
             </a:pPr>
             <a:r>
-              <a:t>2.3. Stored XSS: Kịch Bản Khai Thác &amp; Live Demo Tương Tác</a:t>
+              <a:t>2.1. Stored XSS: Bản Chất Kỹ Thuật &amp; Ngữ Cảnh Bài Toán</a:t>
             </a:r>
           </a:p>
         </p:txBody>
@@ -9168,7 +11463,7 @@
         <p:spPr>
           <a:xfrm>
             <a:off x="731520" y="1280160"/>
-            <a:ext cx="10728655" cy="3840480"/>
+            <a:ext cx="5166360" cy="4846320"/>
           </a:xfrm>
           <a:prstGeom prst="roundRect">
             <a:avLst/>
@@ -9208,58 +11503,34 @@
               </a:defRPr>
             </a:pPr>
             <a:r>
-              <a:t>Kịch bản: Chèn Script Đánh Cắp Cookie Vào Chức Năng Đánh Giá</a:t>
+              <a:t>Ngữ Cảnh Nghiệp Vụ Trong Website Tư Vấn</a:t>
             </a:r>
           </a:p>
           <a:p>
             <a:pPr>
               <a:spcBef>
-                <a:spcPts val="600"/>
+                <a:spcPts val="800"/>
               </a:spcBef>
-              <a:defRPr sz="1150" b="1">
-                <a:solidFill>
-                  <a:srgbClr val="1D4ED8"/>
-                </a:solidFill>
-                <a:latin typeface="Courier New"/>
-              </a:defRPr>
-            </a:pPr>
-            <a:r>
-              <a:t>Payload 1 (Thẻ Script): &lt;script&gt;alert('Lộ Cookie: ' + document.cookie);&lt;/script&gt;</a:t>
-            </a:r>
-            <a:br/>
-            <a:r>
-              <a:t>Payload 2 (Bypass qua thẻ ảnh): &lt;img src=x onerror=alert('XSS kích hoạt qua onerror!')&gt;</a:t>
-            </a:r>
-            <a:br/>
-            <a:r>
-              <a:t>Payload 3 (Defacement): &lt;script&gt;document.body.innerHTML='&lt;h1&gt;WEB ĐÃ BỊ HACK&lt;/h1&gt;';&lt;/script&gt;</a:t>
-            </a:r>
-          </a:p>
-          <a:p>
-            <a:pPr>
-              <a:spcBef>
-                <a:spcPts val="1000"/>
-              </a:spcBef>
-              <a:defRPr sz="1200">
+              <a:defRPr sz="1250">
                 <a:solidFill>
                   <a:srgbClr val="334155"/>
                 </a:solidFill>
               </a:defRPr>
             </a:pPr>
             <a:r>
-              <a:t>Cơ chế kích hoạt thực nghiệm:</a:t>
-            </a:r>
-            <a:br/>
-            <a:r>
-              <a:t>1. Hacker gửi bình luận chứa payload lên máy chủ qua form dính lỗi.</a:t>
-            </a:r>
-            <a:br/>
-            <a:r>
-              <a:t>2. Máy chủ lưu trực tiếp đoạn mã vào bảng dbo.Comments.</a:t>
-            </a:r>
-            <a:br/>
-            <a:r>
-              <a:t>3. Khi tải lại trang, trình duyệt đọc thấy thẻ &lt;script&gt; và lập tức thực thi: Popup Alert bật lên hiển thị giá trị AuthSessionToken giả lập được lưu trong cookie!</a:t>
+              <a:t>• Trong website tư vấn trực tuyến, khách hàng có chức năng đăng đánh giá, nhận xét và gửi câu hỏi tư vấn.</a:t>
+            </a:r>
+            <a:br/>
+            <a:r>
+              <a:t>• Bản chất Stored XSS (Persistent XSS): Kẻ tấn công nhúng mã JavaScript độc hại vào nội dung nhận xét.</a:t>
+            </a:r>
+            <a:br/>
+            <a:r>
+              <a:t>• Máy chủ không lọc mà lưu thẳng mã độc vào CSDL (bảng dbo.Comments).</a:t>
+            </a:r>
+            <a:br/>
+            <a:r>
+              <a:t>• Nguy hiểm: Mỗi khi bất kỳ người dùng khác, chuyên gia hoặc quản trị viên mở trang đánh giá, trình duyệt của họ sẽ tự động biên dịch và thực thi đoạn script độc hại đó.</a:t>
             </a:r>
           </a:p>
         </p:txBody>
@@ -9272,8 +11543,8 @@
         </p:nvSpPr>
         <p:spPr>
           <a:xfrm>
-            <a:off x="731520" y="5303520"/>
-            <a:ext cx="10728655" cy="868680"/>
+            <a:off x="6263640" y="1280160"/>
+            <a:ext cx="5166360" cy="4846320"/>
           </a:xfrm>
           <a:prstGeom prst="roundRect">
             <a:avLst/>
@@ -9302,33 +11573,90 @@
           </a:fontRef>
         </p:style>
         <p:txBody>
-          <a:bodyPr rtlCol="0" anchor="ctr"/>
+          <a:bodyPr rtlCol="0" anchor="ctr" wrap="square"/>
           <a:lstStyle/>
           <a:p>
             <a:pPr algn="ctr">
-              <a:defRPr sz="1250" b="1">
+              <a:defRPr sz="1500" b="1">
                 <a:solidFill>
                   <a:srgbClr val="BE123C"/>
                 </a:solidFill>
               </a:defRPr>
             </a:pPr>
             <a:r>
-              <a:t>💬 [BÌNH LIVE DEMO]: Chuyển sang Web UI Tab 2 (Stored XSS)</a:t>
+              <a:t>Mã Nguồn C# Gây Lỗi &amp; Sự Lạm Dụng @@Html.Raw</a:t>
             </a:r>
           </a:p>
           <a:p>
             <a:pPr>
               <a:spcBef>
-                <a:spcPts val="200"/>
+                <a:spcPts val="800"/>
               </a:spcBef>
-              <a:defRPr sz="1100">
-                <a:solidFill>
-                  <a:srgbClr val="334155"/>
-                </a:solidFill>
-              </a:defRPr>
-            </a:pPr>
-            <a:r>
-              <a:t>Thao tác: Bấm nạp payload đánh cắp Cookie -&gt; Đăng bên Lỗi (bật popup alert lộ Session) -&gt; Đăng bên An toàn (chữ hiển thị an toàn).</a:t>
+              <a:defRPr sz="1050">
+                <a:solidFill>
+                  <a:srgbClr val="9F1239"/>
+                </a:solidFill>
+                <a:latin typeface="Courier New"/>
+              </a:defRPr>
+            </a:pPr>
+            <a:r>
+              <a:t>// 1. CONTROLLER LƯU NGUYÊN VĂN KHÔNG LÀM SẠCH:</a:t>
+            </a:r>
+            <a:br/>
+            <a:r>
+              <a:t>var comment = new Comment {</a:t>
+            </a:r>
+            <a:br/>
+            <a:r>
+              <a:t>    Author = author,</a:t>
+            </a:r>
+            <a:br/>
+            <a:r>
+              <a:t>    Content = content // Chứa thẻ &lt;script&gt; độc hại</a:t>
+            </a:r>
+            <a:br/>
+            <a:r>
+              <a:t>};</a:t>
+            </a:r>
+            <a:br/>
+            <a:r>
+              <a:t>_context.Comments.Add(comment);</a:t>
+            </a:r>
+            <a:br/>
+            <a:br/>
+            <a:r>
+              <a:t>// 2. RAZOR VIEW LẠM DỤNG HTML.RAW:</a:t>
+            </a:r>
+            <a:br/>
+            <a:r>
+              <a:t>&lt;div class="comment-body"&gt;</a:t>
+            </a:r>
+            <a:br/>
+            <a:r>
+              <a:t>    @Html.Raw(comment.Content) </a:t>
+            </a:r>
+            <a:br/>
+            <a:r>
+              <a:t>&lt;/div&gt;</a:t>
+            </a:r>
+          </a:p>
+          <a:p>
+            <a:pPr>
+              <a:spcBef>
+                <a:spcPts val="1200"/>
+              </a:spcBef>
+              <a:defRPr sz="1200">
+                <a:solidFill>
+                  <a:srgbClr val="0F172A"/>
+                </a:solidFill>
+              </a:defRPr>
+            </a:pPr>
+            <a:r>
+              <a:t>⚠️ Điểm mù lập trình viên:</a:t>
+            </a:r>
+            <a:br/>
+            <a:r>
+              <a:t>Sử dụng @Html.Raw() với mục đích cho phép hiển thị format HTML nhưng vô tình mở toang cánh cửa cho hacker thực thi JavaScript trên máy nạn nhân.</a:t>
             </a:r>
           </a:p>
         </p:txBody>

--- a/Slide_OWASP_Top3_Nhom_WNC_G01.pptx
+++ b/Slide_OWASP_Top3_Nhom_WNC_G01.pptx
@@ -4387,7 +4387,7 @@
               </a:defRPr>
             </a:pPr>
             <a:r>
-              <a:t>2.4. Stored XSS: Đối Chứng Thực Nghiệm &amp; Live Demo Trực Tiếp</a:t>
+              <a:t>2.4. Stored XSS: Minh Chứng Thực Nghiệm Trực Quan Trên Web UI</a:t>
             </a:r>
           </a:p>
         </p:txBody>
@@ -4427,16 +4427,40 @@
           </a:p>
         </p:txBody>
       </p:sp>
-      <p:sp>
-        <p:nvSpPr>
-          <p:cNvPr id="6" name="Rounded Rectangle 5"/>
+      <p:pic>
+        <p:nvPicPr>
+          <p:cNvPr id="6" name="Picture 5" descr="crop_xss_ui.png"/>
+          <p:cNvPicPr>
+            <a:picLocks noChangeAspect="1"/>
+          </p:cNvPicPr>
+          <p:nvPr/>
+        </p:nvPicPr>
+        <p:blipFill>
+          <a:blip r:embed="rId2"/>
+          <a:stretch>
+            <a:fillRect/>
+          </a:stretch>
+        </p:blipFill>
+        <p:spPr>
+          <a:xfrm>
+            <a:off x="1645920" y="1234440"/>
+            <a:ext cx="8869680" cy="3752557"/>
+          </a:xfrm>
+          <a:prstGeom prst="rect">
+            <a:avLst/>
+          </a:prstGeom>
+        </p:spPr>
+      </p:pic>
+      <p:sp>
+        <p:nvSpPr>
+          <p:cNvPr id="7" name="Rounded Rectangle 6"/>
           <p:cNvSpPr/>
           <p:nvPr/>
         </p:nvSpPr>
         <p:spPr>
           <a:xfrm>
-            <a:off x="731520" y="1280160"/>
-            <a:ext cx="5166360" cy="3840480"/>
+            <a:off x="731520" y="5440680"/>
+            <a:ext cx="10728655" cy="914400"/>
           </a:xfrm>
           <a:prstGeom prst="roundRect">
             <a:avLst/>
@@ -4465,212 +4489,18 @@
           </a:fontRef>
         </p:style>
         <p:txBody>
-          <a:bodyPr rtlCol="0" anchor="ctr" wrap="square"/>
+          <a:bodyPr rtlCol="0" anchor="ctr"/>
           <a:lstStyle/>
           <a:p>
             <a:pPr algn="ctr">
-              <a:defRPr sz="1400" b="1">
+              <a:defRPr sz="1200" b="1">
                 <a:solidFill>
                   <a:srgbClr val="BE123C"/>
                 </a:solidFill>
               </a:defRPr>
             </a:pPr>
             <a:r>
-              <a:t>❌ 1. NHÁNH BỊ LỖI (Dùng @@Html.Raw)</a:t>
-            </a:r>
-          </a:p>
-          <a:p>
-            <a:pPr>
-              <a:spcBef>
-                <a:spcPts val="800"/>
-              </a:spcBef>
-              <a:defRPr sz="1200">
-                <a:solidFill>
-                  <a:srgbClr val="334155"/>
-                </a:solidFill>
-              </a:defRPr>
-            </a:pPr>
-            <a:r>
-              <a:t>• Input khai thác: &lt;script&gt;alert(document.cookie);&lt;/script&gt;</a:t>
-            </a:r>
-            <a:br/>
-            <a:r>
-              <a:t>• Cách render:</a:t>
-            </a:r>
-            <a:br/>
-            <a:r>
-              <a:t>  @Html.Raw(comment.Content)</a:t>
-            </a:r>
-            <a:br/>
-            <a:r>
-              <a:t>• Cơ chế:</a:t>
-            </a:r>
-            <a:br/>
-            <a:r>
-              <a:t>  - Trình duyệt coi đoạn chuỗi là mã lệnh JavaScript thực thi được.</a:t>
-            </a:r>
-            <a:br/>
-            <a:r>
-              <a:t>• Hậu quả thực tế:</a:t>
-            </a:r>
-            <a:br/>
-            <a:r>
-              <a:t>  - Bật popup alert hiển thị Cookie nhạy cảm AuthSessionToken.</a:t>
-            </a:r>
-            <a:br/>
-            <a:r>
-              <a:t>  - Bất kỳ ai vào xem đánh giá chuyên gia đều bị mã độc tấn công.</a:t>
-            </a:r>
-          </a:p>
-        </p:txBody>
-      </p:sp>
-      <p:sp>
-        <p:nvSpPr>
-          <p:cNvPr id="7" name="Rounded Rectangle 6"/>
-          <p:cNvSpPr/>
-          <p:nvPr/>
-        </p:nvSpPr>
-        <p:spPr>
-          <a:xfrm>
-            <a:off x="6263640" y="1280160"/>
-            <a:ext cx="5166360" cy="3840480"/>
-          </a:xfrm>
-          <a:prstGeom prst="roundRect">
-            <a:avLst/>
-          </a:prstGeom>
-          <a:solidFill>
-            <a:srgbClr val="ECFDF5"/>
-          </a:solidFill>
-          <a:ln>
-            <a:solidFill>
-              <a:srgbClr val="A7F3D0"/>
-            </a:solidFill>
-          </a:ln>
-        </p:spPr>
-        <p:style>
-          <a:lnRef idx="1">
-            <a:schemeClr val="accent1"/>
-          </a:lnRef>
-          <a:fillRef idx="3">
-            <a:schemeClr val="accent1"/>
-          </a:fillRef>
-          <a:effectRef idx="2">
-            <a:schemeClr val="accent1"/>
-          </a:effectRef>
-          <a:fontRef idx="minor">
-            <a:schemeClr val="lt1"/>
-          </a:fontRef>
-        </p:style>
-        <p:txBody>
-          <a:bodyPr rtlCol="0" anchor="ctr" wrap="square"/>
-          <a:lstStyle/>
-          <a:p>
-            <a:pPr algn="ctr">
-              <a:defRPr sz="1400" b="1">
-                <a:solidFill>
-                  <a:srgbClr val="047857"/>
-                </a:solidFill>
-              </a:defRPr>
-            </a:pPr>
-            <a:r>
-              <a:t>✅ 2. NHÁNH AN TOÀN (Tự Động HTML Encoding)</a:t>
-            </a:r>
-          </a:p>
-          <a:p>
-            <a:pPr>
-              <a:spcBef>
-                <a:spcPts val="800"/>
-              </a:spcBef>
-              <a:defRPr sz="1200">
-                <a:solidFill>
-                  <a:srgbClr val="334155"/>
-                </a:solidFill>
-              </a:defRPr>
-            </a:pPr>
-            <a:r>
-              <a:t>• Cùng Input khai thác: &lt;script&gt;alert(document.cookie);&lt;/script&gt;</a:t>
-            </a:r>
-            <a:br/>
-            <a:r>
-              <a:t>• Cách render chuẩn:</a:t>
-            </a:r>
-            <a:br/>
-            <a:r>
-              <a:t>  @comment.Content (hoặc HtmlEncoder.Default.Encode)</a:t>
-            </a:r>
-            <a:br/>
-            <a:r>
-              <a:t>• Cơ chế:</a:t>
-            </a:r>
-            <a:br/>
-            <a:r>
-              <a:t>  - Các ký tự &lt;, &gt; được chuyển đổi thành &amp;lt;, &amp;gt;.</a:t>
-            </a:r>
-            <a:br/>
-            <a:r>
-              <a:t>• Kết quả phòng thủ:</a:t>
-            </a:r>
-            <a:br/>
-            <a:r>
-              <a:t>  - Trình duyệt chỉ in chuỗi text ra màn hình như chữ bình thường.</a:t>
-            </a:r>
-            <a:br/>
-            <a:r>
-              <a:t>  - Tuyệt đối không có bất kỳ popup hay script nào được kích hoạt.</a:t>
-            </a:r>
-          </a:p>
-        </p:txBody>
-      </p:sp>
-      <p:sp>
-        <p:nvSpPr>
-          <p:cNvPr id="8" name="Rounded Rectangle 7"/>
-          <p:cNvSpPr/>
-          <p:nvPr/>
-        </p:nvSpPr>
-        <p:spPr>
-          <a:xfrm>
-            <a:off x="731520" y="5303520"/>
-            <a:ext cx="10728655" cy="868680"/>
-          </a:xfrm>
-          <a:prstGeom prst="roundRect">
-            <a:avLst/>
-          </a:prstGeom>
-          <a:solidFill>
-            <a:srgbClr val="FFF1F2"/>
-          </a:solidFill>
-          <a:ln>
-            <a:solidFill>
-              <a:srgbClr val="FECDD3"/>
-            </a:solidFill>
-          </a:ln>
-        </p:spPr>
-        <p:style>
-          <a:lnRef idx="1">
-            <a:schemeClr val="accent1"/>
-          </a:lnRef>
-          <a:fillRef idx="3">
-            <a:schemeClr val="accent1"/>
-          </a:fillRef>
-          <a:effectRef idx="2">
-            <a:schemeClr val="accent1"/>
-          </a:effectRef>
-          <a:fontRef idx="minor">
-            <a:schemeClr val="lt1"/>
-          </a:fontRef>
-        </p:style>
-        <p:txBody>
-          <a:bodyPr rtlCol="0" anchor="ctr"/>
-          <a:lstStyle/>
-          <a:p>
-            <a:pPr algn="ctr">
-              <a:defRPr sz="1250" b="1">
-                <a:solidFill>
-                  <a:srgbClr val="BE123C"/>
-                </a:solidFill>
-              </a:defRPr>
-            </a:pPr>
-            <a:r>
-              <a:t>💬 [BÌNH LIVE DEMO]: Chuyển sang Web UI Tab 2 (Stored XSS - /Xss)</a:t>
+              <a:t>💬 [BÌNH LIVE DEMO]: Giao diện chức năng Đánh giá chuyên gia dính lỗi XSS (/Xss)</a:t>
             </a:r>
           </a:p>
           <a:p>
@@ -4685,7 +4515,11 @@
               </a:defRPr>
             </a:pPr>
             <a:r>
-              <a:t>Thao tác: Bấm nạp payload đánh cắp Cookie -&gt; Đăng bên Lỗi (bật popup alert lộ Session) -&gt; Đăng bên An toàn (chữ hiển thị an toàn).</a:t>
+              <a:t>• Bên Trái (Lỗi): Đăng nội dung chứa &lt;script&gt;alert(document.cookie)&lt;/script&gt; -&gt; Trình duyệt nạn nhân tự động thực thi script.</a:t>
+            </a:r>
+            <a:br/>
+            <a:r>
+              <a:t>• Bên Phải (Đã Vá): Dùng Razor HTML Encoding -&gt; Chuyển đổi &lt;script&gt; thành &amp;lt;script&amp;gt;, hiển thị văn bản an toàn 100%.</a:t>
             </a:r>
           </a:p>
         </p:txBody>
@@ -10073,7 +9907,7 @@
               </a:defRPr>
             </a:pPr>
             <a:r>
-              <a:t>1.4. SQL Injection: Đối Chứng Thực Nghiệm Trực Quan Trên Web UI</a:t>
+              <a:t>1.4. SQL Injection: Minh Chứng Thực Nghiệm Trực Quan Trên Web UI</a:t>
             </a:r>
           </a:p>
         </p:txBody>
@@ -10113,103 +9947,30 @@
           </a:p>
         </p:txBody>
       </p:sp>
-      <p:sp>
-        <p:nvSpPr>
-          <p:cNvPr id="6" name="Rounded Rectangle 5"/>
-          <p:cNvSpPr/>
-          <p:nvPr/>
-        </p:nvSpPr>
-        <p:spPr>
-          <a:xfrm>
-            <a:off x="731520" y="1280160"/>
-            <a:ext cx="5166360" cy="3840480"/>
-          </a:xfrm>
-          <a:prstGeom prst="roundRect">
-            <a:avLst/>
-          </a:prstGeom>
-          <a:solidFill>
-            <a:srgbClr val="FFF1F2"/>
-          </a:solidFill>
-          <a:ln>
-            <a:solidFill>
-              <a:srgbClr val="FECDD3"/>
-            </a:solidFill>
-          </a:ln>
-        </p:spPr>
-        <p:style>
-          <a:lnRef idx="1">
-            <a:schemeClr val="accent1"/>
-          </a:lnRef>
-          <a:fillRef idx="3">
-            <a:schemeClr val="accent1"/>
-          </a:fillRef>
-          <a:effectRef idx="2">
-            <a:schemeClr val="accent1"/>
-          </a:effectRef>
-          <a:fontRef idx="minor">
-            <a:schemeClr val="lt1"/>
-          </a:fontRef>
-        </p:style>
-        <p:txBody>
-          <a:bodyPr rtlCol="0" anchor="ctr" wrap="square"/>
-          <a:lstStyle/>
-          <a:p>
-            <a:pPr algn="ctr">
-              <a:defRPr sz="1400" b="1">
-                <a:solidFill>
-                  <a:srgbClr val="BE123C"/>
-                </a:solidFill>
-              </a:defRPr>
-            </a:pPr>
-            <a:r>
-              <a:t>❌ 1. NHÁNH BỊ LỖI (Nối Chuỗi SQL Thuần)</a:t>
-            </a:r>
-          </a:p>
-          <a:p>
-            <a:pPr>
-              <a:spcBef>
-                <a:spcPts val="800"/>
-              </a:spcBef>
-              <a:defRPr sz="1200">
-                <a:solidFill>
-                  <a:srgbClr val="334155"/>
-                </a:solidFill>
-              </a:defRPr>
-            </a:pPr>
-            <a:r>
-              <a:t>• Input khai thác: ' OR '1'='1' --</a:t>
-            </a:r>
-            <a:br/>
-            <a:r>
-              <a:t>• Câu lệnh thực thi:</a:t>
-            </a:r>
-            <a:br/>
-            <a:r>
-              <a:t>  SELECT * FROM Accounts WHERE Username = '' OR '1'='1' --'</a:t>
-            </a:r>
-            <a:br/>
-            <a:r>
-              <a:t>• Cơ chế thông dịch: Mệnh đề WHERE luôn TRUE.</a:t>
-            </a:r>
-            <a:br/>
-            <a:r>
-              <a:t>• Hậu quả thực tế:</a:t>
-            </a:r>
-            <a:br/>
-            <a:r>
-              <a:t>  - Đăng nhập thành công mà KHÔNG CẦN mật khẩu.</a:t>
-            </a:r>
-            <a:br/>
-            <a:r>
-              <a:t>  - Rò rỉ toàn bộ 4 tài khoản CSDL (Admin, Chuyên gia, Khách hàng).</a:t>
-            </a:r>
-            <a:br/>
-            <a:r>
-              <a:t>  - Lộ mật khẩu gốc và số dư tài khoản ngân hàng.</a:t>
-            </a:r>
-          </a:p>
-        </p:txBody>
-      </p:sp>
+      <p:pic>
+        <p:nvPicPr>
+          <p:cNvPr id="6" name="Picture 5" descr="only_cards.png"/>
+          <p:cNvPicPr>
+            <a:picLocks noChangeAspect="1"/>
+          </p:cNvPicPr>
+          <p:nvPr/>
+        </p:nvPicPr>
+        <p:blipFill>
+          <a:blip r:embed="rId2"/>
+          <a:stretch>
+            <a:fillRect/>
+          </a:stretch>
+        </p:blipFill>
+        <p:spPr>
+          <a:xfrm>
+            <a:off x="1645920" y="1234440"/>
+            <a:ext cx="8869680" cy="4739035"/>
+          </a:xfrm>
+          <a:prstGeom prst="rect">
+            <a:avLst/>
+          </a:prstGeom>
+        </p:spPr>
+      </p:pic>
       <p:sp>
         <p:nvSpPr>
           <p:cNvPr id="7" name="Rounded Rectangle 6"/>
@@ -10218,109 +9979,8 @@
         </p:nvSpPr>
         <p:spPr>
           <a:xfrm>
-            <a:off x="6263640" y="1280160"/>
-            <a:ext cx="5166360" cy="3840480"/>
-          </a:xfrm>
-          <a:prstGeom prst="roundRect">
-            <a:avLst/>
-          </a:prstGeom>
-          <a:solidFill>
-            <a:srgbClr val="ECFDF5"/>
-          </a:solidFill>
-          <a:ln>
-            <a:solidFill>
-              <a:srgbClr val="A7F3D0"/>
-            </a:solidFill>
-          </a:ln>
-        </p:spPr>
-        <p:style>
-          <a:lnRef idx="1">
-            <a:schemeClr val="accent1"/>
-          </a:lnRef>
-          <a:fillRef idx="3">
-            <a:schemeClr val="accent1"/>
-          </a:fillRef>
-          <a:effectRef idx="2">
-            <a:schemeClr val="accent1"/>
-          </a:effectRef>
-          <a:fontRef idx="minor">
-            <a:schemeClr val="lt1"/>
-          </a:fontRef>
-        </p:style>
-        <p:txBody>
-          <a:bodyPr rtlCol="0" anchor="ctr" wrap="square"/>
-          <a:lstStyle/>
-          <a:p>
-            <a:pPr algn="ctr">
-              <a:defRPr sz="1400" b="1">
-                <a:solidFill>
-                  <a:srgbClr val="047857"/>
-                </a:solidFill>
-              </a:defRPr>
-            </a:pPr>
-            <a:r>
-              <a:t>✅ 2. NHÁNH AN TOÀN (EF Core Parameterized)</a:t>
-            </a:r>
-          </a:p>
-          <a:p>
-            <a:pPr>
-              <a:spcBef>
-                <a:spcPts val="800"/>
-              </a:spcBef>
-              <a:defRPr sz="1200">
-                <a:solidFill>
-                  <a:srgbClr val="334155"/>
-                </a:solidFill>
-              </a:defRPr>
-            </a:pPr>
-            <a:r>
-              <a:t>• Cùng Input khai thác: ' OR '1'='1' --</a:t>
-            </a:r>
-            <a:br/>
-            <a:r>
-              <a:t>• Câu lệnh thực thi:</a:t>
-            </a:r>
-            <a:br/>
-            <a:r>
-              <a:t>  SELECT * FROM Accounts WHERE Username = @p0 AND Pass = @p1</a:t>
-            </a:r>
-            <a:br/>
-            <a:r>
-              <a:t>• Cơ chế thông dịch:</a:t>
-            </a:r>
-            <a:br/>
-            <a:r>
-              <a:t>  - CSDL biên dịch cây truy vấn (Execution Plan) TRƯỚC.</a:t>
-            </a:r>
-            <a:br/>
-            <a:r>
-              <a:t>  - Toàn bộ chuỗi payload được xem là văn bản (String Literal) thuần túy.</a:t>
-            </a:r>
-            <a:br/>
-            <a:r>
-              <a:t>• Kết quả phòng thủ:</a:t>
-            </a:r>
-            <a:br/>
-            <a:r>
-              <a:t>  - Hệ thống chặn đứng, trả về 0 bản ghi.</a:t>
-            </a:r>
-            <a:br/>
-            <a:r>
-              <a:t>  - Báo 'Sai tài khoản/mật khẩu', bảo vệ an toàn 100%.</a:t>
-            </a:r>
-          </a:p>
-        </p:txBody>
-      </p:sp>
-      <p:sp>
-        <p:nvSpPr>
-          <p:cNvPr id="8" name="Rounded Rectangle 7"/>
-          <p:cNvSpPr/>
-          <p:nvPr/>
-        </p:nvSpPr>
-        <p:spPr>
-          <a:xfrm>
-            <a:off x="731520" y="5303520"/>
-            <a:ext cx="10728655" cy="868680"/>
+            <a:off x="731520" y="5532120"/>
+            <a:ext cx="10728655" cy="822960"/>
           </a:xfrm>
           <a:prstGeom prst="roundRect">
             <a:avLst/>
@@ -10353,14 +10013,14 @@
           <a:lstStyle/>
           <a:p>
             <a:pPr algn="ctr">
-              <a:defRPr sz="1250" b="1">
+              <a:defRPr sz="1200" b="1">
                 <a:solidFill>
                   <a:srgbClr val="1D4ED8"/>
                 </a:solidFill>
               </a:defRPr>
             </a:pPr>
             <a:r>
-              <a:t>💻 [HỌC LIVE DEMO]: Chuyển sang Web UI Tab 1 (http://localhost:5076/SqlInjection)</a:t>
+              <a:t>💻 [HỌC LIVE DEMO]: Giao diện đối chứng thực tế trên Web UI (http://localhost:5076/SqlInjection)</a:t>
             </a:r>
           </a:p>
           <a:p>
@@ -10375,7 +10035,11 @@
               </a:defRPr>
             </a:pPr>
             <a:r>
-              <a:t>Thao tác: Bấm nạp payload ' OR '1'='1' -- -&gt; Submit bên Đỏ (rò rỉ toàn bộ CSDL) -&gt; Submit bên Xanh (chặn đứng an toàn).</a:t>
+              <a:t>• Bên Trái (Vulnerable): Bắn payload ' OR '1'='1' -- -&gt; Bypass đăng nhập, trích xuất toàn bộ mật khẩu và số dư CSDL.</a:t>
+            </a:r>
+            <a:br/>
+            <a:r>
+              <a:t>• Bên Phải (Secure): Cùng payload đưa sang EF Core LINQ -&gt; Chặn đứng hoàn toàn, bảo vệ an toàn 100%.</a:t>
             </a:r>
           </a:p>
         </p:txBody>

--- a/Slide_OWASP_Top3_Nhom_WNC_G01.pptx
+++ b/Slide_OWASP_Top3_Nhom_WNC_G01.pptx
@@ -3229,7 +3229,7 @@
           <a:lstStyle/>
           <a:p>
             <a:pPr>
-              <a:defRPr sz="1600" b="1">
+              <a:defRPr sz="1500" b="1">
                 <a:solidFill>
                   <a:srgbClr val="BE123C"/>
                 </a:solidFill>
@@ -3244,14 +3244,14 @@
               <a:spcBef>
                 <a:spcPts val="800"/>
               </a:spcBef>
-              <a:defRPr sz="3000" b="1">
+              <a:defRPr sz="2800" b="1">
                 <a:solidFill>
                   <a:srgbClr val="0F172A"/>
                 </a:solidFill>
               </a:defRPr>
             </a:pPr>
             <a:r>
-              <a:t>Bộ 3 Lỗ Hổng Kinh Điển &amp; Cơ Chế Phòng Thủ</a:t>
+              <a:t>Nghiên Cứu Thực Nghiệm Lỗ Hổng Web &amp; Cơ Chế Phòng Thủ</a:t>
             </a:r>
             <a:br/>
             <a:r>
@@ -3263,14 +3263,14 @@
               <a:spcBef>
                 <a:spcPts val="800"/>
               </a:spcBef>
-              <a:defRPr sz="1400">
+              <a:defRPr sz="1350">
                 <a:solidFill>
                   <a:srgbClr val="334155"/>
                 </a:solidFill>
               </a:defRPr>
             </a:pPr>
             <a:r>
-              <a:t>Môn học: Lập trình Web nâng cao  •  Giảng viên hướng dẫn: ThS. Lê Hữu Dũng</a:t>
+              <a:t>Học phần: Lập trình Web nâng cao  •  Giảng viên hướng dẫn: ThS. Lê Hữu Dũng</a:t>
             </a:r>
           </a:p>
         </p:txBody>
@@ -3347,7 +3347,7 @@
             </a:r>
             <a:br/>
             <a:r>
-              <a:t>Trưởng nhóm • Demo CSDL &amp; API</a:t>
+              <a:t>Trưởng nhóm • Phụ trách CSDL &amp; API</a:t>
             </a:r>
           </a:p>
         </p:txBody>
@@ -3424,7 +3424,7 @@
             </a:r>
             <a:br/>
             <a:r>
-              <a:t>Thành viên • Demo Cookie &amp; DOM</a:t>
+              <a:t>Thành viên • Phụ trách Cookie &amp; DOM</a:t>
             </a:r>
           </a:p>
         </p:txBody>
@@ -3501,7 +3501,7 @@
             </a:r>
             <a:br/>
             <a:r>
-              <a:t>Thành viên • Demo Form ẩn giả mạo</a:t>
+              <a:t>Thành viên • Phụ trách Giao dịch &amp; Token</a:t>
             </a:r>
           </a:p>
         </p:txBody>
@@ -3651,7 +3651,7 @@
               </a:defRPr>
             </a:pPr>
             <a:r>
-              <a:t>2.2. Stored XSS: Phân Loại Chuẩn &amp; Mối Đe Dọa Nghiêm Trọng</a:t>
+              <a:t>2.2. Stored XSS: Đánh Giá Rủi Ro &amp; Tác Động Phía Trình Duyệt</a:t>
             </a:r>
           </a:p>
         </p:txBody>
@@ -3686,7 +3686,7 @@
               </a:defRPr>
             </a:pPr>
             <a:r>
-              <a:t>Nhóm WNC.G01 (Học - Bình - Cường) • Khoa CNTT - Đại học Mở Hà Nội • GVHD: ThS. Lê Hữu Dũng</a:t>
+              <a:t>Nhóm WNC.G01 • Trường Đại học Mở Hà Nội (HOU) • Giảng viên: ThS. Lê Hữu Dũng</a:t>
             </a:r>
           </a:p>
         </p:txBody>
@@ -3740,11 +3740,11 @@
               </a:defRPr>
             </a:pPr>
             <a:r>
-              <a:t>🍪 ĐÁNH CẮP SESSION COOKIE</a:t>
-            </a:r>
-            <a:br/>
-            <a:r>
-              <a:t>(Cookie Stealing)</a:t>
+              <a:t>ĐÁNH CẮP COOKIE &amp; PHIÊN</a:t>
+            </a:r>
+            <a:br/>
+            <a:r>
+              <a:t>(Session Hijacking)</a:t>
             </a:r>
           </a:p>
           <a:p>
@@ -3759,15 +3759,15 @@
               </a:defRPr>
             </a:pPr>
             <a:r>
-              <a:t>• Mã độc truy cập document.cookie để trích xuất Session Token của nạn nhân.</a:t>
-            </a:r>
-            <a:br/>
-            <a:r>
-              <a:t>• Tự động gửi token về máy chủ của hacker.</a:t>
-            </a:r>
-            <a:br/>
-            <a:r>
-              <a:t>• Hacker giả mạo danh tính nạn nhân (Session Hijacking) đăng nhập vào tài khoản mà không cần mật khẩu.</a:t>
+              <a:t>• Đoạn script đọc thuộc tính document.cookie để trích xuất token phiên làm việc.</a:t>
+            </a:r>
+            <a:br/>
+            <a:r>
+              <a:t>• Dữ liệu xác thực được gửi ngầm về máy chủ điều khiển của kẻ tấn công.</a:t>
+            </a:r>
+            <a:br/>
+            <a:r>
+              <a:t>• Kẻ tấn công sử dụng token để mạo danh người dùng hợp lệ.</a:t>
             </a:r>
           </a:p>
         </p:txBody>
@@ -3821,11 +3821,11 @@
               </a:defRPr>
             </a:pPr>
             <a:r>
-              <a:t>🎣 THAY ĐỔI GIAO DIỆN / LỪA ĐẢO</a:t>
-            </a:r>
-            <a:br/>
-            <a:r>
-              <a:t>(DOM Defacement &amp; Phishing)</a:t>
+              <a:t>THAY ĐỔI CẤU TRÚC DOM</a:t>
+            </a:r>
+            <a:br/>
+            <a:r>
+              <a:t>(DOM Manipulation / Phishing)</a:t>
             </a:r>
           </a:p>
           <a:p>
@@ -3840,15 +3840,15 @@
               </a:defRPr>
             </a:pPr>
             <a:r>
-              <a:t>• Hacker dùng JavaScript chèn form đăng nhập giả mạo đè lên giao diện website thật.</a:t>
-            </a:r>
-            <a:br/>
-            <a:r>
-              <a:t>• Lừa người dùng nhập lại tài khoản ngân hàng hoặc mật khẩu.</a:t>
-            </a:r>
-            <a:br/>
-            <a:r>
-              <a:t>• Chuyển hướng người dùng sang trang web lừa đảo (Open Redirect).</a:t>
+              <a:t>• Thay đổi cấu trúc giao diện trang web, chèn các form đăng nhập giả mạo.</a:t>
+            </a:r>
+            <a:br/>
+            <a:r>
+              <a:t>• Lừa người dùng nhập thông tin nhạy cảm trên giao diện đã bị sửa đổi.</a:t>
+            </a:r>
+            <a:br/>
+            <a:r>
+              <a:t>• Tự động điều hướng người dùng sang các liên kết độc hại.</a:t>
             </a:r>
           </a:p>
         </p:txBody>
@@ -3902,11 +3902,11 @@
               </a:defRPr>
             </a:pPr>
             <a:r>
-              <a:t>🤖 THAO TÁC NGẦM &amp; KEYLOGGER</a:t>
-            </a:r>
-            <a:br/>
-            <a:r>
-              <a:t>(Client-Side Hijacking)</a:t>
+              <a:t>THỰC THI THAO TÁC TRÁI PHÉP</a:t>
+            </a:r>
+            <a:br/>
+            <a:r>
+              <a:t>(Client-Side Exploitation)</a:t>
             </a:r>
           </a:p>
           <a:p>
@@ -3921,15 +3921,15 @@
               </a:defRPr>
             </a:pPr>
             <a:r>
-              <a:t>• Lắng nghe sự kiện bàn phím của nạn nhân (Keylogging) khi họ chat với chuyên gia.</a:t>
-            </a:r>
-            <a:br/>
-            <a:r>
-              <a:t>• Tự động gửi tin nhắn hoặc đánh giá 5 sao giả mạo danh nghĩa của người dùng.</a:t>
-            </a:r>
-            <a:br/>
-            <a:r>
-              <a:t>• Biến trình duyệt nạn nhân thành botnet tấn công từ chối dịch vụ.</a:t>
+              <a:t>• Ghi nhận thao tác bàn phím (Keylogging) khi người dùng nhập liệu.</a:t>
+            </a:r>
+            <a:br/>
+            <a:r>
+              <a:t>• Tự động thực hiện các hành động gửi tin nhắn hoặc đánh giá mạo danh người dùng.</a:t>
+            </a:r>
+            <a:br/>
+            <a:r>
+              <a:t>• Tận dụng quyền truy cập trình duyệt để mở rộng phạm vi tấn công.</a:t>
             </a:r>
           </a:p>
         </p:txBody>
@@ -4079,7 +4079,7 @@
               </a:defRPr>
             </a:pPr>
             <a:r>
-              <a:t>2.3. Stored XSS: Phân Tích Các Kỹ Thuật Đưa Payload Vào CSDL</a:t>
+              <a:t>2.3. Stored XSS: Phân Tích Kỹ Thuật Đưa Payload Vào CSDL</a:t>
             </a:r>
           </a:p>
         </p:txBody>
@@ -4114,7 +4114,7 @@
               </a:defRPr>
             </a:pPr>
             <a:r>
-              <a:t>Nhóm WNC.G01 (Học - Bình - Cường) • Khoa CNTT - Đại học Mở Hà Nội • GVHD: ThS. Lê Hữu Dũng</a:t>
+              <a:t>Nhóm WNC.G01 • Trường Đại học Mở Hà Nội (HOU) • Giảng viên: ThS. Lê Hữu Dũng</a:t>
             </a:r>
           </a:p>
         </p:txBody>
@@ -4168,7 +4168,7 @@
               </a:defRPr>
             </a:pPr>
             <a:r>
-              <a:t>3 Biến Thể Payload XSS Thực Nghiệm Trong Ứng Dụng</a:t>
+              <a:t>3 Biến Thể Payload XSS Thực Nghiệm Trong Hệ Thống</a:t>
             </a:r>
           </a:p>
           <a:p>
@@ -4183,15 +4183,15 @@
               </a:defRPr>
             </a:pPr>
             <a:r>
-              <a:t>1. Payload 1 (Thẻ Script Truyền Thống):</a:t>
-            </a:r>
-            <a:br/>
-            <a:r>
-              <a:t>   &lt;script&gt;alert('🚨 BỊ HACK XSS! Lộ Session Cookie: ' + document.cookie);&lt;/script&gt;</a:t>
-            </a:r>
-            <a:br/>
-            <a:r>
-              <a:t>   Cơ chế: Trình duyệt gặp thẻ &lt;script&gt; sẽ tạm dừng render HTML và thực thi mã JavaScript ngay lập tức.</a:t>
+              <a:t>1. Payload 1 (Thẻ Script Cơ Bản):</a:t>
+            </a:r>
+            <a:br/>
+            <a:r>
+              <a:t>   &lt;script&gt;alert('Session Cookie: ' + document.cookie);&lt;/script&gt;</a:t>
+            </a:r>
+            <a:br/>
+            <a:r>
+              <a:t>   Cơ chế: Trình duyệt phân tích cú pháp HTML, nhận diện khối mã và thực thi câu lệnh JavaScript.</a:t>
             </a:r>
           </a:p>
           <a:p>
@@ -4206,15 +4206,15 @@
               </a:defRPr>
             </a:pPr>
             <a:r>
-              <a:t>2. Payload 2 (Bypass Bộ Lọc Qua Thẻ Ảnh - Event Handler):</a:t>
-            </a:r>
-            <a:br/>
-            <a:r>
-              <a:t>   &lt;img src=x onerror=alert('🚨 XSS kích hoạt qua thẻ IMG onerror!')&gt;</a:t>
-            </a:r>
-            <a:br/>
-            <a:r>
-              <a:t>   Cơ chế: Hacker qua mặt các bộ lọc từ khóa '&lt;script&gt;' bằng cách dùng thuộc tính sự kiện 'onerror' của thẻ &lt;img&gt; khi đường dẫn ảnh bị lỗi (src=x).</a:t>
+              <a:t>2. Payload 2 (Vượt Qua Bộ Lọc Bằng Trình Xử Lý Sự Kiện HTML):</a:t>
+            </a:r>
+            <a:br/>
+            <a:r>
+              <a:t>   &lt;img src=x onerror=alert('XSS triggered via image onerror')&gt;</a:t>
+            </a:r>
+            <a:br/>
+            <a:r>
+              <a:t>   Cơ chế: Khi ứng dụng chỉ lọc từ khóa '&lt;script&gt;', kẻ tấn công sử dụng thuộc tính 'onerror' của thẻ hình ảnh khi đường dẫn ảnh không tồn tại để kích hoạt JavaScript.</a:t>
             </a:r>
           </a:p>
           <a:p>
@@ -4229,15 +4229,15 @@
               </a:defRPr>
             </a:pPr>
             <a:r>
-              <a:t>3. Payload 3 (Thay Đổi Toàn Bộ Cây DOM - Web Defacement):</a:t>
-            </a:r>
-            <a:br/>
-            <a:r>
-              <a:t>   &lt;script&gt;document.body.innerHTML='&lt;h1 style=color:red;text-align:center&gt;WEB ĐÃ BỊ CHIẾM QUYỀN&lt;/h1&gt;';&lt;/script&gt;</a:t>
-            </a:r>
-            <a:br/>
-            <a:r>
-              <a:t>   Cơ chế: Xóa sạch toàn bộ nội dung trang web chính thống và hiển thị thông điệp của hacker!</a:t>
+              <a:t>3. Payload 3 (Thay Đổi Toàn Bộ Cấu Trúc Trang Web):</a:t>
+            </a:r>
+            <a:br/>
+            <a:r>
+              <a:t>   &lt;script&gt;document.body.innerHTML='&lt;h2 style=color:red;text-align:center&gt;Trang Web Đã Bị Thay Đổi&lt;/h2&gt;';&lt;/script&gt;</a:t>
+            </a:r>
+            <a:br/>
+            <a:r>
+              <a:t>   Cơ chế: Can thiệp trực tiếp vào thuộc tính body.innerHTML để thay đổi toàn bộ nội dung hiển thị của website.</a:t>
             </a:r>
           </a:p>
         </p:txBody>
@@ -4422,7 +4422,7 @@
               </a:defRPr>
             </a:pPr>
             <a:r>
-              <a:t>Nhóm WNC.G01 (Học - Bình - Cường) • Khoa CNTT - Đại học Mở Hà Nội • GVHD: ThS. Lê Hữu Dũng</a:t>
+              <a:t>Nhóm WNC.G01 • Trường Đại học Mở Hà Nội (HOU) • Giảng viên: ThS. Lê Hữu Dũng</a:t>
             </a:r>
           </a:p>
         </p:txBody>
@@ -4500,7 +4500,7 @@
               </a:defRPr>
             </a:pPr>
             <a:r>
-              <a:t>💬 [BÌNH LIVE DEMO]: Giao diện chức năng Đánh giá chuyên gia dính lỗi XSS (/Xss)</a:t>
+              <a:t>Minh chứng đối chứng chức năng Nhận xét đánh giá chuyên gia (/Xss)</a:t>
             </a:r>
           </a:p>
           <a:p>
@@ -4515,11 +4515,11 @@
               </a:defRPr>
             </a:pPr>
             <a:r>
-              <a:t>• Bên Trái (Lỗi): Đăng nội dung chứa &lt;script&gt;alert(document.cookie)&lt;/script&gt; -&gt; Trình duyệt nạn nhân tự động thực thi script.</a:t>
-            </a:r>
-            <a:br/>
-            <a:r>
-              <a:t>• Bên Phải (Đã Vá): Dùng Razor HTML Encoding -&gt; Chuyển đổi &lt;script&gt; thành &amp;lt;script&amp;gt;, hiển thị văn bản an toàn 100%.</a:t>
+              <a:t>• Nhánh dính lỗi (Trái): Chuỗi kịch bản được lưu và render thô, kích hoạt thông báo alert hiển thị Cookie.</a:t>
+            </a:r>
+            <a:br/>
+            <a:r>
+              <a:t>• Nhánh an toàn (Phải): Razor View tự động mã hóa chuỗi thành văn bản an toàn, triệt tiêu khả năng thực thi mã.</a:t>
             </a:r>
           </a:p>
         </p:txBody>
@@ -4669,7 +4669,7 @@
               </a:defRPr>
             </a:pPr>
             <a:r>
-              <a:t>2.5. Stored XSS: Minh Chứng CSDL dbo.Comments &amp; Cờ Bảo Vệ Cookie</a:t>
+              <a:t>2.5. Stored XSS: Minh Chứng Dữ Liệu CSDL &amp; Bảo Vệ Cookie</a:t>
             </a:r>
           </a:p>
         </p:txBody>
@@ -4704,7 +4704,7 @@
               </a:defRPr>
             </a:pPr>
             <a:r>
-              <a:t>Nhóm WNC.G01 (Học - Bình - Cường) • Khoa CNTT - Đại học Mở Hà Nội • GVHD: ThS. Lê Hữu Dũng</a:t>
+              <a:t>Nhóm WNC.G01 • Trường Đại học Mở Hà Nội (HOU) • Giảng viên: ThS. Lê Hữu Dũng</a:t>
             </a:r>
           </a:p>
         </p:txBody>
@@ -4758,7 +4758,7 @@
               </a:defRPr>
             </a:pPr>
             <a:r>
-              <a:t>Dữ Liệu Thật Lưu Trong Bảng dbo.Comments</a:t>
+              <a:t>Dữ Liệu Lưu Trong Bảng dbo.Comments</a:t>
             </a:r>
           </a:p>
           <a:p>
@@ -4806,11 +4806,11 @@
               </a:defRPr>
             </a:pPr>
             <a:r>
-              <a:t>📌 Bản chất lưu trữ:</a:t>
-            </a:r>
-            <a:br/>
-            <a:r>
-              <a:t>Đoạn script độc hại được lưu vĩnh viễn trong CSDL. Do đó gọi là 'Stored XSS' - nguy hiểm hơn rất nhiều so với 'Reflected XSS' vì nó nằm sẵn trong hệ thống và gây hại cho mọi lượt truy cập sau đó.</a:t>
+              <a:t>Phân tích đặc tính lưu trữ:</a:t>
+            </a:r>
+            <a:br/>
+            <a:r>
+              <a:t>Mã kịch bản độc hại được lưu trữ trực tiếp trong CSDL. Do đó, lỗ hổng Stored XSS có tính chất nguy hại kéo dài và phát tán tới mọi người dùng xem nội dung đó.</a:t>
             </a:r>
           </a:p>
         </p:txBody>
@@ -4864,7 +4864,7 @@
               </a:defRPr>
             </a:pPr>
             <a:r>
-              <a:t>Phòng Vệ Chiều Sâu: Cấu Hình HttpOnly Cookie</a:t>
+              <a:t>Cơ Chế Bảo Vệ Với Cờ HttpOnly Cookie</a:t>
             </a:r>
           </a:p>
           <a:p>
@@ -4892,11 +4892,11 @@
             </a:r>
             <a:br/>
             <a:r>
-              <a:t>    HttpOnly = true, // CẤM JAVASCRIPT TRUY CẬP</a:t>
-            </a:r>
-            <a:br/>
-            <a:r>
-              <a:t>    Secure = true,   // CHỈ TRUYỀN QUA HTTPS</a:t>
+              <a:t>    HttpOnly = true, // CẤM JAVASCRIPT ĐỌC TRỘM</a:t>
+            </a:r>
+            <a:br/>
+            <a:r>
+              <a:t>    Secure = true,   // BẮT BUỘC TRUYỀN QUA HTTPS</a:t>
             </a:r>
             <a:br/>
             <a:r>
@@ -4919,11 +4919,11 @@
               </a:defRPr>
             </a:pPr>
             <a:r>
-              <a:t>📌 Tác dụng của HttpOnly:</a:t>
-            </a:r>
-            <a:br/>
-            <a:r>
-              <a:t>Dù ứng dụng có vô tình dính lỗi XSS thì lệnh 'document.cookie' của hacker vẫn trả về rỗng! Hacker không thể nào đánh cắp được token phiên làm việc.</a:t>
+              <a:t>Vai trò của cờ HttpOnly:</a:t>
+            </a:r>
+            <a:br/>
+            <a:r>
+              <a:t>Ngăn chặn mã JavaScript đọc thuộc tính document.cookie. Kể cả khi trang web xuất hiện lỗi XSS, kẻ tấn công cũng không thể trích xuất token phiên làm việc.</a:t>
             </a:r>
           </a:p>
         </p:txBody>
@@ -5073,7 +5073,7 @@
               </a:defRPr>
             </a:pPr>
             <a:r>
-              <a:t>2.6. Stored XSS: Bộ 4 Nguyên Tắc Phòng Thủ Toàn Diện</a:t>
+              <a:t>2.6. Stored XSS: Bộ Giải Pháp Phòng Thủ Chuẩn Trong ASP.NET Core</a:t>
             </a:r>
           </a:p>
         </p:txBody>
@@ -5108,7 +5108,7 @@
               </a:defRPr>
             </a:pPr>
             <a:r>
-              <a:t>Nhóm WNC.G01 (Học - Bình - Cường) • Khoa CNTT - Đại học Mở Hà Nội • GVHD: ThS. Lê Hữu Dũng</a:t>
+              <a:t>Nhóm WNC.G01 • Trường Đại học Mở Hà Nội (HOU) • Giảng viên: ThS. Lê Hữu Dũng</a:t>
             </a:r>
           </a:p>
         </p:txBody>
@@ -5162,7 +5162,7 @@
               </a:defRPr>
             </a:pPr>
             <a:r>
-              <a:t>BỘ NGUYÊN TẮC PHÒNG THỦ XSS CHUẨN OWASP TRONG ASP.NET CORE:</a:t>
+              <a:t>CÁC NGUYÊN TẮC PHÒNG THỦ XSS THEO KHUYẾN NGHỊ OWASP:</a:t>
             </a:r>
           </a:p>
           <a:p>
@@ -5177,11 +5177,11 @@
               </a:defRPr>
             </a:pPr>
             <a:r>
-              <a:t>1. Luôn tận dụng Context-Aware HTML Encoding của Razor View:</a:t>
-            </a:r>
-            <a:br/>
-            <a:r>
-              <a:t>   Tuyệt đối không dùng @Html.Raw() cho dữ liệu nhập từ người dùng. Sử dụng cú pháp mặc định @model.Property để framework tự động mã hóa ký tự nhạy cảm.</a:t>
+              <a:t>1. Tận dụng cơ chế mã hóa tự động của Razor View:</a:t>
+            </a:r>
+            <a:br/>
+            <a:r>
+              <a:t>   Sử dụng cú pháp mặc định @model.Property thay vì @Html.Raw() đối với mọi dữ liệu bắt nguồn từ người dùng. Các ký tự nhạy cảm (&lt;, &gt;, ", ') tự động được chuyển đổi sang thực thể HTML an toàn.</a:t>
             </a:r>
           </a:p>
           <a:p>
@@ -5196,11 +5196,11 @@
               </a:defRPr>
             </a:pPr>
             <a:r>
-              <a:t>2. Mã hóa tại Controller với System.Text.Encodings.Web:</a:t>
-            </a:r>
-            <a:br/>
-            <a:r>
-              <a:t>   Dùng HtmlEncoder.Default.Encode() hoặc JavaScriptEncoder.Default.Encode() để làm sạch chuỗi trước khi lưu vào CSDL.</a:t>
+              <a:t>2. Mã hóa dữ liệu với System.Text.Encodings.Web:</a:t>
+            </a:r>
+            <a:br/>
+            <a:r>
+              <a:t>   Sử dụng HtmlEncoder.Default.Encode() để xử lý dữ liệu trước khi lưu trữ hoặc phản hồi.</a:t>
             </a:r>
           </a:p>
           <a:p>
@@ -5215,11 +5215,11 @@
               </a:defRPr>
             </a:pPr>
             <a:r>
-              <a:t>3. Thiết lập cờ HttpOnly = true và Secure = true cho toàn bộ Cookie nhạy cảm:</a:t>
-            </a:r>
-            <a:br/>
-            <a:r>
-              <a:t>   Bảo vệ token phiên làm việc (Session) không bao giờ bị lộ qua thuộc tính document.cookie.</a:t>
+              <a:t>3. Thiết lập thuộc tính an toàn cho Cookie:</a:t>
+            </a:r>
+            <a:br/>
+            <a:r>
+              <a:t>   Kích hoạt HttpOnly = true và Secure = true để bảo vệ token phiên làm việc khỏi sự can thiệp của mã kịch bản phía client.</a:t>
             </a:r>
           </a:p>
           <a:p>
@@ -5238,7 +5238,7 @@
             </a:r>
             <a:br/>
             <a:r>
-              <a:t>   Thiết lập HTTP Response Header (script-src 'self') để trình duyệt chặn đứng hoàn toàn việc chạy inline script và tải mã độc từ các tên miền lạ.</a:t>
+              <a:t>   Cấu hình chính sách bảo mật nội dung để hạn chế phạm vi thực thi kịch bản và chặn các nguồn tài nguyên không tin cậy.</a:t>
             </a:r>
           </a:p>
         </p:txBody>
@@ -5423,7 +5423,7 @@
               </a:defRPr>
             </a:pPr>
             <a:r>
-              <a:t>Nhóm WNC.G01 (Học - Bình - Cường) • Khoa CNTT - Đại học Mở Hà Nội • GVHD: ThS. Lê Hữu Dũng</a:t>
+              <a:t>Nhóm WNC.G01 • Trường Đại học Mở Hà Nội (HOU) • Giảng viên: ThS. Lê Hữu Dũng</a:t>
             </a:r>
           </a:p>
         </p:txBody>
@@ -5477,7 +5477,7 @@
               </a:defRPr>
             </a:pPr>
             <a:r>
-              <a:t>Bản Chất Của Lỗ Hổng Cross-Site Request Forgery</a:t>
+              <a:t>Bản Chất Kỹ Thuật Của Tấn Công CSRF</a:t>
             </a:r>
           </a:p>
           <a:p>
@@ -5492,27 +5492,27 @@
               </a:defRPr>
             </a:pPr>
             <a:r>
-              <a:t>• CSRF (A01:2021 - Broken Access Control) là kỹ thuật tấn công mượn quyền của người dùng hợp lệ.</a:t>
-            </a:r>
-            <a:br/>
-            <a:r>
-              <a:t>• Điều kiện xảy ra:</a:t>
-            </a:r>
-            <a:br/>
-            <a:r>
-              <a:t>  1. Nạn nhân đã đăng nhập vào hệ thống tư vấn trực tuyến (phiên làm việc Session/Cookie vẫn đang hợp lệ).</a:t>
-            </a:r>
-            <a:br/>
-            <a:r>
-              <a:t>  2. Trình duyệt tự động đính kèm Cookie xác thực vào mọi HTTP Request gửi tới hệ thống đó.</a:t>
-            </a:r>
-            <a:br/>
-            <a:r>
-              <a:t>  3. Kẻ tấn công lừa nạn nhân truy cập một trang web độc hại ở một tab khác (Attacker Site).</a:t>
-            </a:r>
-            <a:br/>
-            <a:r>
-              <a:t>• Điểm mù: Máy chủ chỉ kiểm tra Cookie mà không kiểm tra xem Request đó bắt nguồn từ đâu!</a:t>
+              <a:t>• CSRF (A01:2021 - Broken Access Control) là kỹ thuật tấn công mượn quyền người dùng hợp lệ.</a:t>
+            </a:r>
+            <a:br/>
+            <a:r>
+              <a:t>• Điều kiện tiên quyết:</a:t>
+            </a:r>
+            <a:br/>
+            <a:r>
+              <a:t>  1. Nạn nhân có phiên đăng nhập hợp lệ tại ứng dụng mục tiêu (Cookie xác thực còn hiệu lực).</a:t>
+            </a:r>
+            <a:br/>
+            <a:r>
+              <a:t>  2. Trình duyệt tự động đính kèm Cookie xác thực theo mọi HTTP Request gửi tới tên miền của ứng dụng.</a:t>
+            </a:r>
+            <a:br/>
+            <a:r>
+              <a:t>  3. Kẻ tấn công lừa nạn nhân truy cập một trang web độc hại do kẻ tấn công kiểm soát.</a:t>
+            </a:r>
+            <a:br/>
+            <a:r>
+              <a:t>• Điểm mù kiểm soát: Máy chủ chỉ xác thực Cookie của người dùng mà không kiểm tra nguồn gốc phát sinh Request.</a:t>
             </a:r>
           </a:p>
         </p:txBody>
@@ -5566,7 +5566,7 @@
               </a:defRPr>
             </a:pPr>
             <a:r>
-              <a:t>Action Bị Lỗi: Thiếu Thuộc Tính Phòng Vệ</a:t>
+              <a:t>Action Xử Lý Giao Dịch Thiếu Kiểm Soát</a:t>
             </a:r>
           </a:p>
           <a:p>
@@ -5582,7 +5582,7 @@
               </a:defRPr>
             </a:pPr>
             <a:r>
-              <a:t>// ACTION NHẬN TIỀN KHÔNG CÓ BẢO VỆ TOKEN:</a:t>
+              <a:t>// ACTION NHẬN YÊU CẦU KHÔNG CÓ BẢO VỆ TOKEN:</a:t>
             </a:r>
             <a:br/>
             <a:r>
@@ -5607,10 +5607,6 @@
             <a:br/>
             <a:r>
               <a:t>    </a:t>
-            </a:r>
-            <a:br/>
-            <a:r>
-              <a:t>    // Trừ tiền nạn nhân, cộng tiền hacker:</a:t>
             </a:r>
             <a:br/>
             <a:r>
@@ -5645,11 +5641,7 @@
               </a:defRPr>
             </a:pPr>
             <a:r>
-              <a:t>⚠️ Nguy hiểm:</a:t>
-            </a:r>
-            <a:br/>
-            <a:r>
-              <a:t>Bất kỳ trang web nào trên Internet cũng có thể gửi form POST tới URL này. Máy chủ thấy Cookie hợp lệ sẽ trừ tiền ngay lập tức!</a:t>
+              <a:t>Khi Action không yêu cầu mã xác thực chống giả mạo, các yêu cầu POST bắt nguồn từ một website khác vẫn được máy chủ thực thi bình thường do Cookie xác thực được đính kèm tự động.</a:t>
             </a:r>
           </a:p>
         </p:txBody>
@@ -5799,7 +5791,7 @@
               </a:defRPr>
             </a:pPr>
             <a:r>
-              <a:t>3.2. CSRF Attack: Kịch Bản Lừa Đảo Chuyển Tiền Ví Ngầm</a:t>
+              <a:t>3.2. CSRF Attack: Kịch Bản Khai Thác Bằng Form Ẩn</a:t>
             </a:r>
           </a:p>
         </p:txBody>
@@ -5834,7 +5826,7 @@
               </a:defRPr>
             </a:pPr>
             <a:r>
-              <a:t>Nhóm WNC.G01 (Học - Bình - Cường) • Khoa CNTT - Đại học Mở Hà Nội • GVHD: ThS. Lê Hữu Dũng</a:t>
+              <a:t>Nhóm WNC.G01 • Trường Đại học Mở Hà Nội (HOU) • Giảng viên: ThS. Lê Hữu Dũng</a:t>
             </a:r>
           </a:p>
         </p:txBody>
@@ -5888,7 +5880,7 @@
               </a:defRPr>
             </a:pPr>
             <a:r>
-              <a:t>Kịch bản: Trang Web Giả Mạo Trúng Thưởng (Attacker Site)</a:t>
+              <a:t>Kịch Bản: Trang Web Giả Mạo Điều Khiển Yêu Cầu Chuyển Tiền</a:t>
             </a:r>
           </a:p>
           <a:p>
@@ -5903,15 +5895,15 @@
               </a:defRPr>
             </a:pPr>
             <a:r>
-              <a:t>1. Nạn nhân có 50.000.000 VNĐ trong ví đang mở tab làm việc tại nền tảng tư vấn trực tuyến.</a:t>
-            </a:r>
-            <a:br/>
-            <a:r>
-              <a:t>2. Kẻ tấn công gửi link: 'Chúc mừng bạn trúng thưởng iPhone 16 Pro Max! Click để nhận quà!'.</a:t>
-            </a:r>
-            <a:br/>
-            <a:r>
-              <a:t>3. Khi nạn nhân click vào link, một trang web bẫy (AttackerSite.cshtml) được mở ra, bên trong chứa mã HTML ẩn:</a:t>
+              <a:t>1. Nạn nhân có phiên làm việc đang hoạt động trên hệ thống tư vấn trực tuyến.</a:t>
+            </a:r>
+            <a:br/>
+            <a:r>
+              <a:t>2. Nạn nhân được dẫn dụ truy cập một trang web độc hại ở một tab khác (AttackerSite.cshtml).</a:t>
+            </a:r>
+            <a:br/>
+            <a:r>
+              <a:t>3. Trang web độc hại chứa một biểu mẫu ẩn trỏ trực tiếp tới địa chỉ nhận lệnh của ứng dụng mục tiêu:</a:t>
             </a:r>
           </a:p>
           <a:p>
@@ -5927,7 +5919,7 @@
               </a:defRPr>
             </a:pPr>
             <a:r>
-              <a:t>&lt;!-- FORM ẨN TỰ ĐỘNG GỬI SANG HỆ THỐNG MỤC TIÊU --&gt;</a:t>
+              <a:t>&lt;!-- BIỂU MẪU ẨN TRÊN TRANG WEB CỦA KẺ TẤN CÔNG --&gt;</a:t>
             </a:r>
             <a:br/>
             <a:r>
@@ -5958,7 +5950,7 @@
               </a:defRPr>
             </a:pPr>
             <a:r>
-              <a:t>Hậu quả thực tế: Nạn nhân không hề bấm chuyển tiền, nhưng ví tiền bị trừ ngay 20.000.000 VNĐ sang ví hacker!</a:t>
+              <a:t>Hậu quả thực tế: Yêu cầu giao dịch được thực hiện mà không có sự đồng thuận chủ động của người dùng, dẫn đến thay đổi số dư hoặc cấu hình tài khoản.</a:t>
             </a:r>
           </a:p>
         </p:txBody>
@@ -6108,7 +6100,7 @@
               </a:defRPr>
             </a:pPr>
             <a:r>
-              <a:t>3.3. CSRF Attack: Thực Nghiệm Trực Tiếp &amp; Kiểm Thử Rút Tiền</a:t>
+              <a:t>3.3. CSRF Attack: Minh Chứng Thực Nghiệm Trực Quan Trên Web UI</a:t>
             </a:r>
           </a:p>
         </p:txBody>
@@ -6143,100 +6135,35 @@
               </a:defRPr>
             </a:pPr>
             <a:r>
-              <a:t>Nhóm WNC.G01 (Học - Bình - Cường) • Khoa CNTT - Đại học Mở Hà Nội • GVHD: ThS. Lê Hữu Dũng</a:t>
-            </a:r>
-          </a:p>
-        </p:txBody>
-      </p:sp>
-      <p:sp>
-        <p:nvSpPr>
-          <p:cNvPr id="6" name="Rounded Rectangle 5"/>
-          <p:cNvSpPr/>
-          <p:nvPr/>
-        </p:nvSpPr>
-        <p:spPr>
-          <a:xfrm>
-            <a:off x="731520" y="1280160"/>
-            <a:ext cx="10728655" cy="3840480"/>
-          </a:xfrm>
-          <a:prstGeom prst="roundRect">
-            <a:avLst/>
-          </a:prstGeom>
-          <a:solidFill>
-            <a:srgbClr val="F8FAFC"/>
-          </a:solidFill>
-          <a:ln>
-            <a:solidFill>
-              <a:srgbClr val="E2E8F0"/>
-            </a:solidFill>
-          </a:ln>
-        </p:spPr>
-        <p:style>
-          <a:lnRef idx="1">
-            <a:schemeClr val="accent1"/>
-          </a:lnRef>
-          <a:fillRef idx="3">
-            <a:schemeClr val="accent1"/>
-          </a:fillRef>
-          <a:effectRef idx="2">
-            <a:schemeClr val="accent1"/>
-          </a:effectRef>
-          <a:fontRef idx="minor">
-            <a:schemeClr val="lt1"/>
-          </a:fontRef>
-        </p:style>
-        <p:txBody>
-          <a:bodyPr rtlCol="0" anchor="ctr" wrap="square"/>
-          <a:lstStyle/>
-          <a:p>
-            <a:pPr algn="ctr">
-              <a:defRPr sz="1500" b="1">
-                <a:solidFill>
-                  <a:srgbClr val="047857"/>
-                </a:solidFill>
-              </a:defRPr>
-            </a:pPr>
-            <a:r>
-              <a:t>Quy Trình 3 Bước Thực Nghiệm Trên Giao Diện Web</a:t>
-            </a:r>
-          </a:p>
-          <a:p>
-            <a:pPr>
-              <a:spcBef>
-                <a:spcPts val="800"/>
-              </a:spcBef>
-              <a:defRPr sz="1300">
-                <a:solidFill>
-                  <a:srgbClr val="334155"/>
-                </a:solidFill>
-              </a:defRPr>
-            </a:pPr>
-            <a:r>
-              <a:t>• Bước 1: Kiểm tra số dư ví ban đầu tại Tab 3:</a:t>
-            </a:r>
-            <a:br/>
-            <a:r>
-              <a:t>  - Ví Nạn nhân: 50.000.000 VNĐ | Ví Hacker: 0 VNĐ.</a:t>
-            </a:r>
-            <a:br/>
-            <a:r>
-              <a:t>• Bước 2: Bấm nút đỏ 'Mở trang web bẫy của Hacker (Attacker Site)' ở tab mới -&gt; Bấm nút 'Nhận thưởng ngay':</a:t>
-            </a:r>
-            <a:br/>
-            <a:r>
-              <a:t>  - Ngay lập tức, số dư của nạn nhân bị trừ 20.000.000 VNĐ và chuyển sang ví hacker!</a:t>
-            </a:r>
-            <a:br/>
-            <a:r>
-              <a:t>• Bước 3: Thử nghiệm chuyển tiền tại Form bên phải (Đã phòng thủ):</a:t>
-            </a:r>
-            <a:br/>
-            <a:r>
-              <a:t>  - Giao dịch chỉ hợp lệ khi được gửi từ chính form trên hệ thống với Anti-Forgery Token hợp lệ.</a:t>
-            </a:r>
-          </a:p>
-        </p:txBody>
-      </p:sp>
+              <a:t>Nhóm WNC.G01 • Trường Đại học Mở Hà Nội (HOU) • Giảng viên: ThS. Lê Hữu Dũng</a:t>
+            </a:r>
+          </a:p>
+        </p:txBody>
+      </p:sp>
+      <p:pic>
+        <p:nvPicPr>
+          <p:cNvPr id="6" name="Picture 5" descr="crop_csrf_ui.png"/>
+          <p:cNvPicPr>
+            <a:picLocks noChangeAspect="1"/>
+          </p:cNvPicPr>
+          <p:nvPr/>
+        </p:nvPicPr>
+        <p:blipFill>
+          <a:blip r:embed="rId2"/>
+          <a:stretch>
+            <a:fillRect/>
+          </a:stretch>
+        </p:blipFill>
+        <p:spPr>
+          <a:xfrm>
+            <a:off x="1645920" y="1234440"/>
+            <a:ext cx="8869680" cy="4264269"/>
+          </a:xfrm>
+          <a:prstGeom prst="rect">
+            <a:avLst/>
+          </a:prstGeom>
+        </p:spPr>
+      </p:pic>
       <p:sp>
         <p:nvSpPr>
           <p:cNvPr id="7" name="Rounded Rectangle 6"/>
@@ -6245,8 +6172,8 @@
         </p:nvSpPr>
         <p:spPr>
           <a:xfrm>
-            <a:off x="731520" y="5303520"/>
-            <a:ext cx="10728655" cy="868680"/>
+            <a:off x="731520" y="5440680"/>
+            <a:ext cx="10728655" cy="914400"/>
           </a:xfrm>
           <a:prstGeom prst="roundRect">
             <a:avLst/>
@@ -6279,14 +6206,14 @@
           <a:lstStyle/>
           <a:p>
             <a:pPr algn="ctr">
-              <a:defRPr sz="1250" b="1">
+              <a:defRPr sz="1200" b="1">
                 <a:solidFill>
                   <a:srgbClr val="047857"/>
                 </a:solidFill>
               </a:defRPr>
             </a:pPr>
             <a:r>
-              <a:t>💳 [CƯỜNG LIVE DEMO]: Chuyển sang Web UI Tab 3 (CSRF - /Csrf)</a:t>
+              <a:t>Minh chứng đối chứng phân hệ quản lý ví tiền &amp; kịch bản CSRF (/Csrf)</a:t>
             </a:r>
           </a:p>
           <a:p>
@@ -6301,7 +6228,11 @@
               </a:defRPr>
             </a:pPr>
             <a:r>
-              <a:t>Thao tác: Mở Attacker Site -&gt; Bấm nhận thưởng -&gt; Quay lại thấy số dư ví nạn nhân bị trừ 20 triệu -&gt; Thử lại form có Token.</a:t>
+              <a:t>• Mở Attacker Site: Biểu mẫu ẩn tự động gửi POST sang Action dính lỗi -&gt; Số dư ví bị trừ 20.000.000 VNĐ.</a:t>
+            </a:r>
+            <a:br/>
+            <a:r>
+              <a:t>• Nhánh đã phòng thủ: Biểu mẫu chính chủ được tích hợp Anti-Forgery Token -&gt; Từ chối 100% yêu cầu giả mạo từ bên ngoài.</a:t>
             </a:r>
           </a:p>
         </p:txBody>
@@ -6451,7 +6382,7 @@
               </a:defRPr>
             </a:pPr>
             <a:r>
-              <a:t>3.4. CSRF Attack: Minh Chứng CSDL dbo.UserWallets Trước &amp; Sau Tấn Công</a:t>
+              <a:t>3.4. CSRF Attack: Minh Chứng Biến Động CSDL dbo.UserWallets</a:t>
             </a:r>
           </a:p>
         </p:txBody>
@@ -6486,7 +6417,7 @@
               </a:defRPr>
             </a:pPr>
             <a:r>
-              <a:t>Nhóm WNC.G01 (Học - Bình - Cường) • Khoa CNTT - Đại học Mở Hà Nội • GVHD: ThS. Lê Hữu Dũng</a:t>
+              <a:t>Nhóm WNC.G01 • Trường Đại học Mở Hà Nội (HOU) • Giảng viên: ThS. Lê Hữu Dũng</a:t>
             </a:r>
           </a:p>
         </p:txBody>
@@ -6540,7 +6471,7 @@
               </a:defRPr>
             </a:pPr>
             <a:r>
-              <a:t>1. Trạng Thái CSDL Ban Đầu (Chưa Bị Tấn Công)</a:t>
+              <a:t>1. Trạng Thái CSDL Ban Đầu</a:t>
             </a:r>
           </a:p>
           <a:p>
@@ -6569,11 +6500,11 @@
             </a:r>
             <a:br/>
             <a:r>
-              <a:t> 1 | Nan nhan (Nguyen Danh Hoc)     | 50,000,000.00</a:t>
-            </a:r>
-            <a:br/>
-            <a:r>
-              <a:t> 2 | Ke tan cong (Hacker BlackHat)  |          0.00</a:t>
+              <a:t> 1 | Nạn nhân (Nguyễn Danh Học)     | 50,000,000.00</a:t>
+            </a:r>
+            <a:br/>
+            <a:r>
+              <a:t> 2 | Kẻ tấn công (Hacker BlackHat)  |          0.00</a:t>
             </a:r>
             <a:br/>
             <a:r>
@@ -6592,7 +6523,7 @@
               </a:defRPr>
             </a:pPr>
             <a:r>
-              <a:t>📌 Ví của nạn nhân có 50 triệu VNĐ, ví của hacker hoàn toàn không có tiền.</a:t>
+              <a:t>Số dư ví tài khoản nạn nhân ở trạng thái ban đầu là 50 triệu VNĐ, tài khoản đối tượng tấn công là 0 VNĐ.</a:t>
             </a:r>
           </a:p>
         </p:txBody>
@@ -6646,7 +6577,7 @@
               </a:defRPr>
             </a:pPr>
             <a:r>
-              <a:t>2. Trạng Thái CSDL Sau Khi Bị Khai Thác CSRF</a:t>
+              <a:t>2. Trạng Thái CSDL Sau Khai Thác CSRF</a:t>
             </a:r>
           </a:p>
           <a:p>
@@ -6675,11 +6606,11 @@
             </a:r>
             <a:br/>
             <a:r>
-              <a:t> 1 | Nan nhan (Nguyen Danh Hoc)     | 30,000,000.00</a:t>
-            </a:r>
-            <a:br/>
-            <a:r>
-              <a:t> 2 | Ke tan cong (Hacker BlackHat)  | 20,000,000.00</a:t>
+              <a:t> 1 | Nạn nhân (Nguyễn Danh Học)     | 30,000,000.00</a:t>
+            </a:r>
+            <a:br/>
+            <a:r>
+              <a:t> 2 | Kẻ tấn công (Hacker BlackHat)  | 20,000,000.00</a:t>
             </a:r>
             <a:br/>
             <a:r>
@@ -6698,11 +6629,7 @@
               </a:defRPr>
             </a:pPr>
             <a:r>
-              <a:t>📌 Hậu quả kiểm chứng trên CSDL thật:</a:t>
-            </a:r>
-            <a:br/>
-            <a:r>
-              <a:t>20.000.000 VNĐ đã biến mất khỏi tài khoản nạn nhân và chuyển sang số dư của kẻ tấn công mà nạn nhân không hề hay biết.</a:t>
+              <a:t>Số dư thực tế trong CSDL bị thay đổi hoàn toàn tự động khi nạn nhân truy cập liên kết độc hại, chứng minh mức độ rủi ro nghiêm trọng của giao dịch thiếu token.</a:t>
             </a:r>
           </a:p>
         </p:txBody>
@@ -6887,7 +6814,7 @@
               </a:defRPr>
             </a:pPr>
             <a:r>
-              <a:t>Nhóm WNC.G01 (Học - Bình - Cường) • Khoa CNTT - Đại học Mở Hà Nội • GVHD: ThS. Lê Hữu Dũng</a:t>
+              <a:t>Nhóm WNC.G01 • Trường Đại học Mở Hà Nội (HOU) • Giảng viên: ThS. Lê Hữu Dũng</a:t>
             </a:r>
           </a:p>
         </p:txBody>
@@ -6941,7 +6868,7 @@
               </a:defRPr>
             </a:pPr>
             <a:r>
-              <a:t>Cơ Chế Synchronizer Token Pattern Trong ASP.NET Core</a:t>
+              <a:t>Mô Hình Synchronizer Token Pattern</a:t>
             </a:r>
           </a:p>
           <a:p>
@@ -7060,7 +6987,7 @@
               </a:defRPr>
             </a:pPr>
             <a:r>
-              <a:t>Tại Sao Kẻ Tấn Công Không Thể Vượt Qua?</a:t>
+              <a:t>Cơ Chế Ngăn Chặn Yêu Cầu Giả Mạo</a:t>
             </a:r>
           </a:p>
           <a:p>
@@ -7079,25 +7006,25 @@
             </a:r>
             <a:br/>
             <a:r>
-              <a:t>Máy chủ phát hành 1 token mã hóa trong Cookie và 1 token bí mật nhúng vào trường input ẩn của Form.</a:t>
-            </a:r>
-            <a:br/>
-            <a:br/>
-            <a:r>
-              <a:t>2. Bảo vệ bằng Same-Origin Policy (SOP):</a:t>
-            </a:r>
-            <a:br/>
-            <a:r>
-              <a:t>Trang web độc hại của hacker ở tên miền khác (Cross-Origin) TUYỆT ĐỐI KHÔNG THỂ đọc trộm token bí mật trong form của nạn nhân.</a:t>
-            </a:r>
-            <a:br/>
-            <a:br/>
-            <a:r>
-              <a:t>3. Cấu hình Cookie SameSite = Strict:</a:t>
-            </a:r>
-            <a:br/>
-            <a:r>
-              <a:t>Ngăn chặn trình duyệt tự động gửi cookie trong các cross-site request, triệt tiêu tận gốc tiền đề tấn công của CSRF.</a:t>
+              <a:t>Máy chủ phát hành một cặp token: một giá trị lưu trong Cookie phiên và một giá trị nhúng vào trường ẩn của biểu mẫu.</a:t>
+            </a:r>
+            <a:br/>
+            <a:br/>
+            <a:r>
+              <a:t>2. Bảo vệ bằng Chính sách Cùng nguồn gốc (SOP):</a:t>
+            </a:r>
+            <a:br/>
+            <a:r>
+              <a:t>Website độc hại ở tên miền khác bị trình duyệt ngăn cấm truy cập dữ liệu DOM của biểu mẫu hợp lệ, do đó không thể sao chép token.</a:t>
+            </a:r>
+            <a:br/>
+            <a:br/>
+            <a:r>
+              <a:t>3. Thuộc tính SameSite cho Cookie:</a:t>
+            </a:r>
+            <a:br/>
+            <a:r>
+              <a:t>Thiết lập SameSite = Strict hoặc Lax giúp kiểm soát việc trình duyệt tự động gửi kèm cookie trong các yêu cầu cross-site.</a:t>
             </a:r>
           </a:p>
         </p:txBody>
@@ -7247,7 +7174,7 @@
               </a:defRPr>
             </a:pPr>
             <a:r>
-              <a:t>Mục Tiêu &amp; Phương Châm Báo Cáo Thực Nghiệm OWASP</a:t>
+              <a:t>Mục Tiêu &amp; Phương Pháp Thực Nghiệm</a:t>
             </a:r>
           </a:p>
         </p:txBody>
@@ -7282,7 +7209,7 @@
               </a:defRPr>
             </a:pPr>
             <a:r>
-              <a:t>Nhóm WNC.G01 (Học - Bình - Cường) • Khoa CNTT - Đại học Mở Hà Nội • GVHD: ThS. Lê Hữu Dũng</a:t>
+              <a:t>Nhóm WNC.G01 • Trường Đại học Mở Hà Nội (HOU) • Giảng viên: ThS. Lê Hữu Dũng</a:t>
             </a:r>
           </a:p>
         </p:txBody>
@@ -7336,7 +7263,7 @@
               </a:defRPr>
             </a:pPr>
             <a:r>
-              <a:t>🎯 Yêu Cầu Của Giảng Viên (ThS. Lê Hữu Dũng)</a:t>
+              <a:t>Mục Tiêu Nghiên Cứu</a:t>
             </a:r>
           </a:p>
           <a:p>
@@ -7344,26 +7271,26 @@
               <a:spcBef>
                 <a:spcPts val="1000"/>
               </a:spcBef>
-              <a:defRPr sz="1300">
+              <a:defRPr sz="1250">
                 <a:solidFill>
                   <a:srgbClr val="334155"/>
                 </a:solidFill>
               </a:defRPr>
             </a:pPr>
             <a:r>
-              <a:t>• Không dịch lý thuyết tiếng Anh sách vở.</a:t>
-            </a:r>
-            <a:br/>
-            <a:r>
-              <a:t>• Thấy được lỗ hổng thực sự nguy hiểm đến mức nào trong môi trường thực tế.</a:t>
-            </a:r>
-            <a:br/>
-            <a:r>
-              <a:t>• Bắt buộc phải thực nghiệm demo: Muốn phòng thủ an toàn, phải hiểu hacker tấn công hệ thống theo cách nào.</a:t>
-            </a:r>
-            <a:br/>
-            <a:r>
-              <a:t>• Báo cáo đối chứng: Minh chứng rõ ràng giữa code dính lỗi và code đã vá chuẩn.</a:t>
+              <a:t>• Bám sát yêu cầu thực tiễn: Tập trung vào thực nghiệm và phân tích mã nguồn thay vì lý thuyết thuần túy.</a:t>
+            </a:r>
+            <a:br/>
+            <a:r>
+              <a:t>• Nhận thức mức độ rủi ro: Đánh giá tác động an ninh thực tế trên ứng dụng web.</a:t>
+            </a:r>
+            <a:br/>
+            <a:r>
+              <a:t>• Phương pháp tiếp cận: Để phòng thủ hiệu quả, cần phân tích chính xác vector và kỹ thuật khai thác của kẻ tấn công.</a:t>
+            </a:r>
+            <a:br/>
+            <a:r>
+              <a:t>• Đối chứng rõ ràng: So sánh trực tiếp giữa mã nguồn dính lỗ hổng và mã nguồn đã được chuẩn hóa.</a:t>
             </a:r>
           </a:p>
         </p:txBody>
@@ -7417,7 +7344,7 @@
               </a:defRPr>
             </a:pPr>
             <a:r>
-              <a:t>🚀 Phương Pháp Thực Hiện Của Nhóm WNC.G01</a:t>
+              <a:t>Môi Trường &amp; Quy Trình Thực Nghiệm</a:t>
             </a:r>
           </a:p>
           <a:p>
@@ -7425,26 +7352,26 @@
               <a:spcBef>
                 <a:spcPts val="1000"/>
               </a:spcBef>
-              <a:defRPr sz="1300">
+              <a:defRPr sz="1250">
                 <a:solidFill>
                   <a:srgbClr val="334155"/>
                 </a:solidFill>
               </a:defRPr>
             </a:pPr>
             <a:r>
-              <a:t>• Xây dựng ứng dụng thực nghiệm độc lập (OWASP_Demo) trên ASP.NET Core MVC .NET 10.</a:t>
-            </a:r>
-            <a:br/>
-            <a:r>
-              <a:t>• Kết nối trực tiếp máy chủ CSDL Microsoft SQL Server 2025 Developer trên Localhost.</a:t>
-            </a:r>
-            <a:br/>
-            <a:r>
-              <a:t>• Tạo sẵn 3 phân hệ tương tác riêng biệt cho 3 thành viên: Bấm 1 click nạp payload và quan sát kết quả tức thì.</a:t>
-            </a:r>
-            <a:br/>
-            <a:r>
-              <a:t>• Áp dụng kết quả thực nghiệm vào thiết kế kiến trúc bảo mật (Security View) của Đồ án BTL.</a:t>
+              <a:t>• Nền tảng ứng dụng: Xây dựng ứng dụng mẫu trên ASP.NET Core MVC (.NET 10).</a:t>
+            </a:r>
+            <a:br/>
+            <a:r>
+              <a:t>• Hệ quản trị CSDL: Kết nối trực tiếp máy chủ Microsoft SQL Server 2025 Developer.</a:t>
+            </a:r>
+            <a:br/>
+            <a:r>
+              <a:t>• Thiết kế đối chứng: Chia 3 phân hệ tương tác riêng biệt cho 3 thành viên, nạp payload và theo dõi phản hồi thời gian thực.</a:t>
+            </a:r>
+            <a:br/>
+            <a:r>
+              <a:t>• Ứng dụng thực tế: Đưa các giải pháp phòng thủ vào thiết kế kiến trúc (Security View) của đề tài BTL.</a:t>
             </a:r>
           </a:p>
         </p:txBody>
@@ -7594,7 +7521,7 @@
               </a:defRPr>
             </a:pPr>
             <a:r>
-              <a:t>3.6. CSRF Attack: Phòng Thủ Trong AJAX &amp; Fetch API (Buổi 9)</a:t>
+              <a:t>3.6. CSRF Attack: Tích Hợp Token Trong AJAX &amp; Fetch API (Buổi 9)</a:t>
             </a:r>
           </a:p>
         </p:txBody>
@@ -7629,7 +7556,7 @@
               </a:defRPr>
             </a:pPr>
             <a:r>
-              <a:t>Nhóm WNC.G01 (Học - Bình - Cường) • Khoa CNTT - Đại học Mở Hà Nội • GVHD: ThS. Lê Hữu Dũng</a:t>
+              <a:t>Nhóm WNC.G01 • Trường Đại học Mở Hà Nội (HOU) • Giảng viên: ThS. Lê Hữu Dũng</a:t>
             </a:r>
           </a:p>
         </p:txBody>
@@ -7683,7 +7610,7 @@
               </a:defRPr>
             </a:pPr>
             <a:r>
-              <a:t>Kỹ Thuật Truyền Token Khi Sử Dụng AJAX Fetch API (Slide Buổi 9)</a:t>
+              <a:t>Kỹ Thuật Đính Kèm Token Khi Sử Dụng Fetch API Không Tải Lại Trang</a:t>
             </a:r>
           </a:p>
           <a:p>
@@ -7699,7 +7626,7 @@
               </a:defRPr>
             </a:pPr>
             <a:r>
-              <a:t>// TRONG JAVASCRIPT FETCH API:</a:t>
+              <a:t>// TRÍCH XUẤT TOKEN TỪ DOM VÀ ĐÍNH KÈM VÀO HTTP HEADER:</a:t>
             </a:r>
             <a:br/>
             <a:r>
@@ -7755,11 +7682,11 @@
               </a:defRPr>
             </a:pPr>
             <a:r>
-              <a:t>📌 Tích hợp vào bài tập lớn:</a:t>
-            </a:r>
-            <a:br/>
-            <a:r>
-              <a:t>Đối với các thao tác đặt lịch không reload trang (AJAX Fetch API), nhóm đính kèm header RequestVerificationToken để đảm bảo vừa có trải nghiệm người dùng mượt mà, vừa đảm bảo an toàn tuyệt đối trước các đợt tấn công giả mạo yêu cầu.</a:t>
+              <a:t>Ứng dụng trong đồ án BTL:</a:t>
+            </a:r>
+            <a:br/>
+            <a:r>
+              <a:t>Đối với các tác vụ bất đồng bộ (như đặt lịch hẹn, cập nhật ca làm việc) sử dụng Fetch API, hệ thống đính kèm header RequestVerificationToken để đảm bảo an toàn giao dịch mà không làm suy giảm trải nghiệm người dùng.</a:t>
             </a:r>
           </a:p>
         </p:txBody>
@@ -7909,7 +7836,7 @@
               </a:defRPr>
             </a:pPr>
             <a:r>
-              <a:t>Tổng Kết: So Sánh Đối Chứng 3 Lỗ Hổng Web Kinh Điển</a:t>
+              <a:t>Tổng Kết: So Sánh Đối Chứng 3 Lỗ Hổng An Ninh Web</a:t>
             </a:r>
           </a:p>
         </p:txBody>
@@ -7944,7 +7871,7 @@
               </a:defRPr>
             </a:pPr>
             <a:r>
-              <a:t>Nhóm WNC.G01 (Học - Bình - Cường) • Khoa CNTT - Đại học Mở Hà Nội • GVHD: ThS. Lê Hữu Dũng</a:t>
+              <a:t>Nhóm WNC.G01 • Trường Đại học Mở Hà Nội (HOU) • Giảng viên: ThS. Lê Hữu Dũng</a:t>
             </a:r>
           </a:p>
         </p:txBody>
@@ -7987,7 +7914,7 @@
                         </a:defRPr>
                       </a:pPr>
                       <a:r>
-                        <a:t>Tiêu chí so sánh</a:t>
+                        <a:t>Tiêu chí phân tích</a:t>
                       </a:r>
                     </a:p>
                   </a:txBody>
@@ -8104,7 +8031,7 @@
                         </a:defRPr>
                       </a:pPr>
                       <a:r>
-                        <a:t>Tầng Cơ sở dữ liệu (SQL Server Engine)</a:t>
+                        <a:t>Tầng Cơ sở dữ liệu (Database Engine)</a:t>
                       </a:r>
                     </a:p>
                   </a:txBody>
@@ -8150,7 +8077,7 @@
                         </a:defRPr>
                       </a:pPr>
                       <a:r>
-                        <a:t>Quyền hạn của phiên làm việc (Session/Cookie)</a:t>
+                        <a:t>Quyền hạn phiên làm việc (Session/Cookie)</a:t>
                       </a:r>
                     </a:p>
                   </a:txBody>
@@ -8175,7 +8102,7 @@
                         </a:defRPr>
                       </a:pPr>
                       <a:r>
-                        <a:t>Mức độ nghiêm trọng</a:t>
+                        <a:t>Mức độ rủi ro</a:t>
                       </a:r>
                     </a:p>
                   </a:txBody>
@@ -8269,7 +8196,7 @@
                         </a:defRPr>
                       </a:pPr>
                       <a:r>
-                        <a:t>Giải pháp cốt lõi</a:t>
+                        <a:t>Giải pháp phòng thủ</a:t>
                       </a:r>
                     </a:p>
                   </a:txBody>
@@ -8533,7 +8460,7 @@
               </a:defRPr>
             </a:pPr>
             <a:r>
-              <a:t>Nhóm WNC.G01 (Học - Bình - Cường) • Khoa CNTT - Đại học Mở Hà Nội • GVHD: ThS. Lê Hữu Dũng</a:t>
+              <a:t>Nhóm WNC.G01 • Trường Đại học Mở Hà Nội (HOU) • Giảng viên: ThS. Lê Hữu Dũng</a:t>
             </a:r>
           </a:p>
         </p:txBody>
@@ -8587,7 +8514,7 @@
               </a:defRPr>
             </a:pPr>
             <a:r>
-              <a:t>CAM KẾT CHUẨN AN TOÀN ĐA TẦNG CHO BTL (NHÓM WNC.G01):</a:t>
+              <a:t>ÁP DỤNG KIẾN TRÚC BẢO MẬT ĐA TẦNG CHO BTL (WNC.G01):</a:t>
             </a:r>
           </a:p>
           <a:p>
@@ -8602,41 +8529,37 @@
               </a:defRPr>
             </a:pPr>
             <a:r>
-              <a:t>1. Kiến trúc bảo mật (Security View - Buổi 8): Toàn bộ hệ thống được xây dựng theo nguyên tắc 'Security by Design'. Không xem an ninh là tính năng chắp vá mà tích hợp sâu vào kiến trúc 3 tầng.</a:t>
-            </a:r>
-            <a:br/>
-            <a:br/>
-            <a:r>
-              <a:t>2. Bảo vệ CSDL tuyệt đối (Nguyễn Danh Học): 100% các câu truy vấn đặt lịch, hồ sơ chuyên gia và đánh giá chất lượng được quản lý bằng Entity Framework Core Code-First với LINQ Parameterized.</a:t>
-            </a:r>
-            <a:br/>
-            <a:br/>
-            <a:r>
-              <a:t>3. Bảo vệ dữ liệu người dùng (Nguyễn Thanh Bình): 100% nội dung phản hồi tư vấn và bình luận được Razor View mã hóa tự động, Cookie cấu hình HttpOnly = true và Secure = true.</a:t>
-            </a:r>
-            <a:br/>
-            <a:br/>
-            <a:r>
-              <a:t>4. Bảo vệ giao dịch (Nguyễn Minh Cường): Bắt buộc kiểm tra Anti-Forgery Token trên toàn bộ các form đặt lịch hẹn, nạp tiền ví và đổi mật khẩu.</a:t>
+              <a:t>1. Kiến trúc Security by Design (Buổi 8): Tích hợp đồng bộ các lớp bảo vệ ngay từ giai đoạn thiết kế hệ thống, phân quyền chặt chẽ theo 3 Role (Customer, Specialist, Admin).</a:t>
+            </a:r>
+            <a:br/>
+            <a:br/>
+            <a:r>
+              <a:t>2. Tầng CSDL (Nguyễn Danh Học): Toàn bộ thao tác nghiệp vụ khai thác CSDL qua Entity Framework Core Code-First với LINQ Parameterized, loại bỏ hoàn toàn việc ghép chuỗi truy vấn.</a:t>
+            </a:r>
+            <a:br/>
+            <a:br/>
+            <a:r>
+              <a:t>3. Tầng Giao diện (Nguyễn Thanh Bình): Dữ liệu phản hồi và đánh giá chuyên gia được Razor View mã hóa tự động, Cookie thiết lập đầy đủ thuộc tính HttpOnly và Secure.</a:t>
+            </a:r>
+            <a:br/>
+            <a:br/>
+            <a:r>
+              <a:t>4. Tầng Giao dịch (Nguyễn Minh Cường): Bắt buộc kiểm tra Anti-Forgery Token cho toàn bộ các biểu mẫu POST và yêu cầu Fetch API đặt lịch hẹn, giao dịch ví.</a:t>
             </a:r>
           </a:p>
           <a:p>
             <a:pPr>
               <a:spcBef>
-                <a:spcPts val="1600"/>
+                <a:spcPts val="1800"/>
               </a:spcBef>
-              <a:defRPr sz="1500" b="1">
+              <a:defRPr sz="1400" b="1">
                 <a:solidFill>
                   <a:srgbClr val="BE123C"/>
                 </a:solidFill>
               </a:defRPr>
             </a:pPr>
             <a:r>
-              <a:t>XIN TRÂN TRỌNG CẢM ƠN THẦY VÀ CÁC BẠN ĐÃ THEO DÕI!</a:t>
-            </a:r>
-            <a:br/>
-            <a:r>
-              <a:t>Nhóm WNC.G01 sẵn sàng lắng nghe câu hỏi và nhận xét từ giảng viên.</a:t>
+              <a:t>Kính chúc thầy sức khỏe. Nhóm WNC.G01 xin trân trọng cảm ơn!</a:t>
             </a:r>
           </a:p>
         </p:txBody>
@@ -8786,7 +8709,7 @@
               </a:defRPr>
             </a:pPr>
             <a:r>
-              <a:t>1.1. SQL Injection: Bản Chất Kỹ Thuật &amp; Điểm Mù Ghép Chuỗi</a:t>
+              <a:t>1.1. SQL Injection: Bản Chất Kỹ Thuật &amp; Lỗi Ghép Chuỗi</a:t>
             </a:r>
           </a:p>
         </p:txBody>
@@ -8821,7 +8744,7 @@
               </a:defRPr>
             </a:pPr>
             <a:r>
-              <a:t>Nhóm WNC.G01 (Học - Bình - Cường) • Khoa CNTT - Đại học Mở Hà Nội • GVHD: ThS. Lê Hữu Dũng</a:t>
+              <a:t>Nhóm WNC.G01 • Trường Đại học Mở Hà Nội (HOU) • Giảng viên: ThS. Lê Hữu Dũng</a:t>
             </a:r>
           </a:p>
         </p:txBody>
@@ -8875,7 +8798,7 @@
               </a:defRPr>
             </a:pPr>
             <a:r>
-              <a:t>Nguyên Nhân Cốt Lõi: Nhầm Lẫn Giữa Code &amp; Data</a:t>
+              <a:t>Nguyên Nhân Kỹ Thuật Cốt Lõi</a:t>
             </a:r>
           </a:p>
           <a:p>
@@ -8890,19 +8813,19 @@
               </a:defRPr>
             </a:pPr>
             <a:r>
-              <a:t>• Không phân tách giữa DỮ LIỆU (Data) và CÂU LỆNH (Code).</a:t>
-            </a:r>
-            <a:br/>
-            <a:r>
-              <a:t>• Lập trình viên sử dụng kỹ thuật ghép chuỗi trực tiếp (String Concatenation hoặc Interpolation) để tạo câu SQL từ input của người dùng.</a:t>
-            </a:r>
-            <a:br/>
-            <a:r>
-              <a:t>• Hệ quản trị CSDL khi phân tích cú pháp (Parsing) không thể biết đâu là dữ liệu của user và đâu là cấu trúc lệnh do lập trình viên định nghĩa.</a:t>
-            </a:r>
-            <a:br/>
-            <a:r>
-              <a:t>• Ký tự điều khiển (', --, ;) giúp hacker 'thoát' khỏi phạm vi dữ liệu và ép SQL Server thực thi logic của hacker.</a:t>
+              <a:t>• Thiếu sự phân tách giữa Dữ liệu (Data) và Cú pháp lệnh (Code).</a:t>
+            </a:r>
+            <a:br/>
+            <a:r>
+              <a:t>• Ghép chuỗi đầu vào trực tiếp (String Concatenation / Interpolation) vào truy vấn SQL.</a:t>
+            </a:r>
+            <a:br/>
+            <a:r>
+              <a:t>• Trình thông dịch CSDL không thể phân định ranh giới giữa dữ liệu người dùng và cấu trúc truy vấn của hệ thống.</a:t>
+            </a:r>
+            <a:br/>
+            <a:r>
+              <a:t>• Ký tự điều khiển (', --, ;) làm thay đổi luồng thực thi của câu lệnh trên máy chủ SQL Server.</a:t>
             </a:r>
           </a:p>
         </p:txBody>
@@ -8956,7 +8879,7 @@
               </a:defRPr>
             </a:pPr>
             <a:r>
-              <a:t>Đoạn Code Gây Lỗi Thực Tế Trong Controller</a:t>
+              <a:t>Minh Họa Đoạn Mã Nguồn Gây Lỗi</a:t>
             </a:r>
           </a:p>
           <a:p>
@@ -8972,7 +8895,7 @@
               </a:defRPr>
             </a:pPr>
             <a:r>
-              <a:t>// LỖI NỐI CHUỖI TRỰC TIẾP:</a:t>
+              <a:t>// Nối chuỗi trực tiếp từ tham số người dùng:</a:t>
             </a:r>
             <a:br/>
             <a:r>
@@ -9012,11 +8935,7 @@
               </a:defRPr>
             </a:pPr>
             <a:r>
-              <a:t>⚠️ Điểm mù chết người:</a:t>
-            </a:r>
-            <a:br/>
-            <a:r>
-              <a:t>Lập trình viên mặc định tin rằng input chỉ chứa chữ cái. Khi hacker truyền vào dấu nháy đơn ('), toàn bộ cây cú pháp của câu truy vấn bị bẻ gãy hoàn toàn.</a:t>
+              <a:t>Lỗ hổng phát sinh khi lập trình viên giả định đầu vào luôn là văn bản chuẩn. Ký tự nháy đơn (') sẽ đóng sớm chuỗi giá trị và chuyển phần còn lại thành cấu trúc điều khiển.</a:t>
             </a:r>
           </a:p>
         </p:txBody>
@@ -9166,7 +9085,7 @@
               </a:defRPr>
             </a:pPr>
             <a:r>
-              <a:t>1.2. SQL Injection: Thang Đo Nguy Hiểm &amp; Hậu Quả Thực Tế (CVSS 9.8)</a:t>
+              <a:t>1.2. SQL Injection: Đánh Giá Tác Động An Ninh (CVSS 9.8)</a:t>
             </a:r>
           </a:p>
         </p:txBody>
@@ -9201,7 +9120,7 @@
               </a:defRPr>
             </a:pPr>
             <a:r>
-              <a:t>Nhóm WNC.G01 (Học - Bình - Cường) • Khoa CNTT - Đại học Mở Hà Nội • GVHD: ThS. Lê Hữu Dũng</a:t>
+              <a:t>Nhóm WNC.G01 • Trường Đại học Mở Hà Nội (HOU) • Giảng viên: ThS. Lê Hữu Dũng</a:t>
             </a:r>
           </a:p>
         </p:txBody>
@@ -9255,7 +9174,7 @@
               </a:defRPr>
             </a:pPr>
             <a:r>
-              <a:t>🚨 CHIẾM QUYỀN HỆ THỐNG</a:t>
+              <a:t>VƯỢT QUA XÁC THỰC</a:t>
             </a:r>
             <a:br/>
             <a:r>
@@ -9274,15 +9193,15 @@
               </a:defRPr>
             </a:pPr>
             <a:r>
-              <a:t>• Không cần biết mật khẩu của bất kỳ ai.</a:t>
-            </a:r>
-            <a:br/>
-            <a:r>
-              <a:t>• Chỉ với 1 chuỗi payload ngắn, kẻ tấn công đăng nhập thẳng vào tài khoản Quản trị viên (Admin).</a:t>
-            </a:r>
-            <a:br/>
-            <a:r>
-              <a:t>• Chiếm đoạt phiên làm việc, đổi quyền hạn và kiểm soát toàn bộ hệ thống.</a:t>
+              <a:t>• Không cần thông tin xác thực hợp lệ.</a:t>
+            </a:r>
+            <a:br/>
+            <a:r>
+              <a:t>• Bỏ qua bước kiểm tra mật khẩu để đăng nhập tài khoản quản trị.</a:t>
+            </a:r>
+            <a:br/>
+            <a:r>
+              <a:t>• Chiếm đoạt phiên làm việc và thay đổi quyền hạn người dùng trên hệ thống.</a:t>
             </a:r>
           </a:p>
         </p:txBody>
@@ -9336,7 +9255,7 @@
               </a:defRPr>
             </a:pPr>
             <a:r>
-              <a:t>📂 ĐÁNH CẮP TOÀN BỘ CSDL</a:t>
+              <a:t>TRÍCH XUẤT CƠ SỞ DỮ LIỆU</a:t>
             </a:r>
             <a:br/>
             <a:r>
@@ -9355,15 +9274,15 @@
               </a:defRPr>
             </a:pPr>
             <a:r>
-              <a:t>• Trích xuất thông tin khách hàng, hồ sơ chuyên gia, số dư tài khoản ngân hàng.</a:t>
-            </a:r>
-            <a:br/>
-            <a:r>
-              <a:t>• Rò rỉ mật khẩu và bệnh án cá nhân (Secret Notes).</a:t>
-            </a:r>
-            <a:br/>
-            <a:r>
-              <a:t>• Vi phạm nghiêm trọng an ninh dữ liệu, phá vỡ uy tín của nền tảng tư vấn trực tuyến.</a:t>
+              <a:t>• Trích xuất thông tin người dùng, hồ sơ chuyên gia và số dư ví điện tử.</a:t>
+            </a:r>
+            <a:br/>
+            <a:r>
+              <a:t>• Làm lộ mật khẩu và các thông tin cá nhân lưu trong bảng CSDL.</a:t>
+            </a:r>
+            <a:br/>
+            <a:r>
+              <a:t>• Vi phạm quy định về bảo mật dữ liệu người dùng.</a:t>
             </a:r>
           </a:p>
         </p:txBody>
@@ -9417,11 +9336,11 @@
               </a:defRPr>
             </a:pPr>
             <a:r>
-              <a:t>💣 PHÁ HỦY / THỰC THI LỆNH</a:t>
-            </a:r>
-            <a:br/>
-            <a:r>
-              <a:t>(System Takeover)</a:t>
+              <a:t>THAY ĐỔI / PHÁ HỦY DỮ LIỆU</a:t>
+            </a:r>
+            <a:br/>
+            <a:r>
+              <a:t>(Data Manipulation)</a:t>
             </a:r>
           </a:p>
           <a:p>
@@ -9436,15 +9355,15 @@
               </a:defRPr>
             </a:pPr>
             <a:r>
-              <a:t>• Xóa sạch CSDL với lệnh DROP TABLE hoặc TRUNCATE.</a:t>
-            </a:r>
-            <a:br/>
-            <a:r>
-              <a:t>• Giả mạo số dư tiền trong tài khoản.</a:t>
-            </a:r>
-            <a:br/>
-            <a:r>
-              <a:t>• Trong các CSDL cấu hình lỏng lẻo, hacker có thể bật xp_cmdshell để chiếm quyền điều khiển cả máy chủ hệ điều hành.</a:t>
+              <a:t>• Can thiệp, sửa đổi số dư tài khoản trái phép.</a:t>
+            </a:r>
+            <a:br/>
+            <a:r>
+              <a:t>• Thực thi các câu lệnh DDL nguy hiểm như DROP TABLE hoặc TRUNCATE.</a:t>
+            </a:r>
+            <a:br/>
+            <a:r>
+              <a:t>• Nguy cơ thực thi lệnh hệ điều hành nếu máy chủ CSDL cấp quyền quá mức.</a:t>
             </a:r>
           </a:p>
         </p:txBody>
@@ -9594,7 +9513,7 @@
               </a:defRPr>
             </a:pPr>
             <a:r>
-              <a:t>1.3. SQL Injection: Giải Phẫu Chi Tiết Cơ Chế Bẻ Gãy Cú Pháp</a:t>
+              <a:t>1.3. SQL Injection: Phân Tích Cấu Trúc Khai Thác</a:t>
             </a:r>
           </a:p>
         </p:txBody>
@@ -9629,7 +9548,7 @@
               </a:defRPr>
             </a:pPr>
             <a:r>
-              <a:t>Nhóm WNC.G01 (Học - Bình - Cường) • Khoa CNTT - Đại học Mở Hà Nội • GVHD: ThS. Lê Hữu Dũng</a:t>
+              <a:t>Nhóm WNC.G01 • Trường Đại học Mở Hà Nội (HOU) • Giảng viên: ThS. Lê Hữu Dũng</a:t>
             </a:r>
           </a:p>
         </p:txBody>
@@ -9683,7 +9602,7 @@
               </a:defRPr>
             </a:pPr>
             <a:r>
-              <a:t>Kịch bản: Bắn Payload Bypass Xác Thực Đăng Nhập Quản Trị Viên</a:t>
+              <a:t>Kịch Bản: Khai Thác Vượt Qua Xác Thực Đăng Nhập</a:t>
             </a:r>
           </a:p>
           <a:p>
@@ -9699,11 +9618,11 @@
               </a:defRPr>
             </a:pPr>
             <a:r>
-              <a:t>Payload đưa vào ô Username: ' OR '1'='1' --  | Mật khẩu: (nhập bất kỳ hoặc bỏ trống)</a:t>
-            </a:r>
-            <a:br/>
-            <a:r>
-              <a:t>Câu truy vấn thực tế được SQL Server phân tích &amp; thông dịch:</a:t>
+              <a:t>Giá trị Username đưa vào: ' OR '1'='1' --  | Mật khẩu: (tùy ý hoặc để trống)</a:t>
+            </a:r>
+            <a:br/>
+            <a:r>
+              <a:t>Truy vấn được máy chủ SQL Server phân tích &amp; thông dịch:</a:t>
             </a:r>
             <a:br/>
             <a:r>
@@ -9722,19 +9641,19 @@
               </a:defRPr>
             </a:pPr>
             <a:r>
-              <a:t>3 Thành Phần Khai Thác Cốt Lõi:</a:t>
-            </a:r>
-            <a:br/>
-            <a:r>
-              <a:t>1. Dấu nháy đơn (') : Đóng sớm chuỗi Username, đưa ngữ cảnh trở lại câu lệnh SQL.</a:t>
-            </a:r>
-            <a:br/>
-            <a:r>
-              <a:t>2. Mệnh đề OR '1'='1' : Biểu thức logic chân lý (luôn TRUE cho mọi bản ghi trong bảng Accounts).</a:t>
-            </a:r>
-            <a:br/>
-            <a:r>
-              <a:t>3. Ký tự chú thích (--) : Vô hiệu hóa hoàn toàn bước kiểm tra mật khẩu phía sau (AND Password = '...').</a:t>
+              <a:t>Phân Tích Thành Phần Chuỗi Khai Thác:</a:t>
+            </a:r>
+            <a:br/>
+            <a:r>
+              <a:t>1. Dấu nháy đơn (') : Đóng sớm chuỗi ký tự của trường Username, chuyển ngữ cảnh về cú pháp SQL.</a:t>
+            </a:r>
+            <a:br/>
+            <a:r>
+              <a:t>2. Mệnh đề OR '1'='1' : Biểu thức logic chân lý (luôn TRUE với mọi bản ghi trong bảng Accounts).</a:t>
+            </a:r>
+            <a:br/>
+            <a:r>
+              <a:t>3. Ký tự chú thích (--) : Vô hiệu hóa mệnh đề kiểm tra mật khẩu phía sau (AND Password = '...').</a:t>
             </a:r>
           </a:p>
           <a:p>
@@ -9749,7 +9668,7 @@
               </a:defRPr>
             </a:pPr>
             <a:r>
-              <a:t>📌 Cơ chế tấn công Union-Based (Rút dữ liệu từ bảng khác):</a:t>
+              <a:t>Mở Rộng Kỹ Thuật Union-Based:</a:t>
             </a:r>
             <a:br/>
             <a:r>
@@ -9757,7 +9676,7 @@
             </a:r>
             <a:br/>
             <a:r>
-              <a:t>Cho phép kẻ tấn công ghép nối bảng nhạy cảm vào kết quả hiển thị của màn hình tìm kiếm thông thường!</a:t>
+              <a:t>Cho phép ghép nối kết quả từ bảng dữ liệu nhạy cảm vào màn hình tra cứu thông thường.</a:t>
             </a:r>
           </a:p>
         </p:txBody>
@@ -9942,7 +9861,7 @@
               </a:defRPr>
             </a:pPr>
             <a:r>
-              <a:t>Nhóm WNC.G01 (Học - Bình - Cường) • Khoa CNTT - Đại học Mở Hà Nội • GVHD: ThS. Lê Hữu Dũng</a:t>
+              <a:t>Nhóm WNC.G01 • Trường Đại học Mở Hà Nội (HOU) • Giảng viên: ThS. Lê Hữu Dũng</a:t>
             </a:r>
           </a:p>
         </p:txBody>
@@ -10020,7 +9939,7 @@
               </a:defRPr>
             </a:pPr>
             <a:r>
-              <a:t>💻 [HỌC LIVE DEMO]: Giao diện đối chứng thực tế trên Web UI (http://localhost:5076/SqlInjection)</a:t>
+              <a:t>Minh chứng đối chứng trực tiếp trên ứng dụng (http://localhost:5076/SqlInjection)</a:t>
             </a:r>
           </a:p>
           <a:p>
@@ -10035,11 +9954,11 @@
               </a:defRPr>
             </a:pPr>
             <a:r>
-              <a:t>• Bên Trái (Vulnerable): Bắn payload ' OR '1'='1' -- -&gt; Bypass đăng nhập, trích xuất toàn bộ mật khẩu và số dư CSDL.</a:t>
-            </a:r>
-            <a:br/>
-            <a:r>
-              <a:t>• Bên Phải (Secure): Cùng payload đưa sang EF Core LINQ -&gt; Chặn đứng hoàn toàn, bảo vệ an toàn 100%.</a:t>
+              <a:t>• Nhánh dính lỗi (Trái): Chuỗi ' OR '1'='1' -- cho phép đăng nhập thành công và trích xuất danh sách tài khoản.</a:t>
+            </a:r>
+            <a:br/>
+            <a:r>
+              <a:t>• Nhánh phòng thủ (Phải): Ứng dụng xử lý an toàn qua EF Core LINQ, từ chối truy cập và bảo vệ dữ liệu.</a:t>
             </a:r>
           </a:p>
         </p:txBody>
@@ -10224,7 +10143,7 @@
               </a:defRPr>
             </a:pPr>
             <a:r>
-              <a:t>Nhóm WNC.G01 (Học - Bình - Cường) • Khoa CNTT - Đại học Mở Hà Nội • GVHD: ThS. Lê Hữu Dũng</a:t>
+              <a:t>Nhóm WNC.G01 • Trường Đại học Mở Hà Nội (HOU) • Giảng viên: ThS. Lê Hữu Dũng</a:t>
             </a:r>
           </a:p>
         </p:txBody>
@@ -10323,7 +10242,7 @@
             </a:r>
             <a:br/>
             <a:r>
-              <a:t>  "accounts": [ ... 4 tài khoản bị rò rỉ ... ]</a:t>
+              <a:t>  "accounts": [ ... danh sách tài khoản trích xuất ... ]</a:t>
             </a:r>
             <a:br/>
             <a:r>
@@ -10342,7 +10261,7 @@
               </a:defRPr>
             </a:pPr>
             <a:r>
-              <a:t>📌 Ý nghĩa: Chứng minh lỗ hổng nằm ở logic C# Backend, kẻ tấn công dùng script tự động quét và khai thác mà không cần mở web.</a:t>
+              <a:t>Xác nhận lỗi xuất phát từ tầng xử lý C# Backend, kẻ tấn công có thể khai thác qua API mà không cần tương tác qua giao diện web.</a:t>
             </a:r>
           </a:p>
         </p:txBody>
@@ -10396,7 +10315,7 @@
               </a:defRPr>
             </a:pPr>
             <a:r>
-              <a:t>Minh Chứng Tầng CSDL (SQL Server 2025 Thật)</a:t>
+              <a:t>Minh Chứng Tầng CSDL (SQL Server 2025)</a:t>
             </a:r>
           </a:p>
           <a:p>
@@ -10416,7 +10335,7 @@
             </a:r>
             <a:br/>
             <a:r>
-              <a:t>-- 1. Câu lệnh dính lỗi:</a:t>
+              <a:t>-- 1. Truy vấn dính lỗi:</a:t>
             </a:r>
             <a:br/>
             <a:r>
@@ -10429,7 +10348,7 @@
             <a:br/>
             <a:br/>
             <a:r>
-              <a:t>-- 2. Câu lệnh tham số hóa chuẩn:</a:t>
+              <a:t>-- 2. Truy vấn tham số hóa:</a:t>
             </a:r>
             <a:br/>
             <a:r>
@@ -10441,7 +10360,7 @@
             </a:r>
             <a:br/>
             <a:r>
-              <a:t>&gt;&gt; Kết quả: 0 rows returned (An toàn 100%)</a:t>
+              <a:t>&gt;&gt; Kết quả: 0 rows returned (An toàn)</a:t>
             </a:r>
           </a:p>
           <a:p>
@@ -10456,7 +10375,7 @@
               </a:defRPr>
             </a:pPr>
             <a:r>
-              <a:t>📌 Ý nghĩa: Đối chiếu trực tiếp trên máy chủ SQL Server 2025 chứng minh cơ chế phân tách rạch ròi giữa cú pháp lệnh và tham số giá trị.</a:t>
+              <a:t>Đối chiếu trực tiếp trên máy chủ CSDL chứng minh cơ chế phân tách rạch ròi giữa cú pháp lệnh và tham số giá trị.</a:t>
             </a:r>
           </a:p>
         </p:txBody>
@@ -10503,14 +10422,14 @@
           <a:lstStyle/>
           <a:p>
             <a:pPr algn="ctr">
-              <a:defRPr sz="1250" b="1">
+              <a:defRPr sz="1200" b="1">
                 <a:solidFill>
                   <a:srgbClr val="047857"/>
                 </a:solidFill>
               </a:defRPr>
             </a:pPr>
             <a:r>
-              <a:t>🗄️ [HỌC LIVE DEMO]: Chuyển sang VS Code mở bảng dbo.Accounts &amp; file verify_sql_server.sql</a:t>
+              <a:t>Thao tác trên công cụ: VS Code MSSQL Extension &amp; File verify_sql_server.sql</a:t>
             </a:r>
           </a:p>
           <a:p>
@@ -10525,7 +10444,7 @@
               </a:defRPr>
             </a:pPr>
             <a:r>
-              <a:t>Thao tác trực tiếp: Mở extension MSSQL trên VS Code, đối chiếu bảng dữ liệu gốc và chạy câu query đối chứng.</a:t>
+              <a:t>Dữ liệu được truy vấn và kiểm thử trực tiếp trên máy chủ CSDL SQL Server 2025 (Database: OwaspDemoDB).</a:t>
             </a:r>
           </a:p>
         </p:txBody>
@@ -10675,7 +10594,7 @@
               </a:defRPr>
             </a:pPr>
             <a:r>
-              <a:t>1.6. SQL Injection: Giải Pháp Phòng Thủ Toàn Diện (Defense-in-Depth)</a:t>
+              <a:t>1.6. SQL Injection: Giải Pháp Phòng Thủ Chuẩn Hóa</a:t>
             </a:r>
           </a:p>
         </p:txBody>
@@ -10710,7 +10629,7 @@
               </a:defRPr>
             </a:pPr>
             <a:r>
-              <a:t>Nhóm WNC.G01 (Học - Bình - Cường) • Khoa CNTT - Đại học Mở Hà Nội • GVHD: ThS. Lê Hữu Dũng</a:t>
+              <a:t>Nhóm WNC.G01 • Trường Đại học Mở Hà Nội (HOU) • Giảng viên: ThS. Lê Hữu Dũng</a:t>
             </a:r>
           </a:p>
         </p:txBody>
@@ -10764,7 +10683,7 @@
               </a:defRPr>
             </a:pPr>
             <a:r>
-              <a:t>Cách Viết Code Chuẩn Hóa Với EF Core</a:t>
+              <a:t>Kỹ Thuật Parameterized Query Với EF Core</a:t>
             </a:r>
           </a:p>
           <a:p>
@@ -10780,7 +10699,7 @@
               </a:defRPr>
             </a:pPr>
             <a:r>
-              <a:t>// Dùng LINQ Parameterized (KHUYÊN DÙNG):</a:t>
+              <a:t>// SỬ DỤNG LINQ PARAMETERIZED (KHUYÊN DÙNG):</a:t>
             </a:r>
             <a:br/>
             <a:r>
@@ -10797,7 +10716,7 @@
             <a:br/>
             <a:br/>
             <a:r>
-              <a:t>// Hoặc dùng FromSqlInterpolated nếu viết SQL thuần:</a:t>
+              <a:t>// TRUY VẤN THUẦN QUA FROMSQLINTERPOLATED:</a:t>
             </a:r>
             <a:br/>
             <a:r>
@@ -10824,11 +10743,11 @@
               </a:defRPr>
             </a:pPr>
             <a:r>
-              <a:t>Tại sao cách này an toàn tuyệt đối?</a:t>
-            </a:r>
-            <a:br/>
-            <a:r>
-              <a:t>SQL Server biên dịch cấu trúc lệnh TRƯỚC khi gán dữ liệu. Biến @p0 nhận toàn bộ payload như một chuỗi chữ bình thường, vô hiệu hóa hoàn toàn ý đồ chèn lệnh.</a:t>
+              <a:t>Cơ chế bảo vệ:</a:t>
+            </a:r>
+            <a:br/>
+            <a:r>
+              <a:t>SQL Server biên dịch kế hoạch thực thi (Execution Plan) trước khi nhận tham số. Đầu vào của người dùng được gán vào biến @p0 như một chuỗi văn bản (literal), vô hiệu hóa hoàn toàn khả năng chèn lệnh.</a:t>
             </a:r>
           </a:p>
         </p:txBody>
@@ -10882,7 +10801,7 @@
               </a:defRPr>
             </a:pPr>
             <a:r>
-              <a:t>Bộ Quy Tắc Phòng Thủ Toàn Diện (Defense in Depth)</a:t>
+              <a:t>Bộ Quy Tắc Phòng Thủ Toàn Diện (Defense-in-Depth)</a:t>
             </a:r>
           </a:p>
           <a:p>
@@ -10897,38 +10816,38 @@
               </a:defRPr>
             </a:pPr>
             <a:r>
-              <a:t>1. Luôn sử dụng Parameterized Query / ORM:</a:t>
-            </a:r>
-            <a:br/>
-            <a:r>
-              <a:t>Tuyệt đối không ghép chuỗi SQL thủ công dưới bất kỳ hình thức nào.</a:t>
-            </a:r>
-            <a:br/>
-            <a:br/>
-            <a:r>
-              <a:t>2. Nguyên tắc đặc quyền tối thiểu (Least Privilege):</a:t>
-            </a:r>
-            <a:br/>
-            <a:r>
-              <a:t>Tài khoản kết nối CSDL của ứng dụng chỉ có quyền SELECT/INSERT/UPDATE trên các bảng cần thiết, không bao giờ dùng tài khoản 'sa' hay quyền DDL (DROP, ALTER).</a:t>
-            </a:r>
-            <a:br/>
-            <a:br/>
-            <a:r>
-              <a:t>3. Xác thực dữ liệu đầu vào (Input Validation):</a:t>
-            </a:r>
-            <a:br/>
-            <a:r>
-              <a:t>Sử dụng Data Annotations ([RegularExpression], [StringLength]) kiểm tra chặt chẽ khuôn dạng dữ liệu.</a:t>
-            </a:r>
-            <a:br/>
-            <a:br/>
-            <a:r>
-              <a:t>4. Mã hóa mật khẩu một chiều (Password Hashing):</a:t>
-            </a:r>
-            <a:br/>
-            <a:r>
-              <a:t>Sử dụng ASP.NET Core Identity (PBKDF2/BCrypt) để nếu CSDL có bị lộ, mật khẩu vẫn được bảo vệ an toàn.</a:t>
+              <a:t>1. Tham số hóa truy vấn:</a:t>
+            </a:r>
+            <a:br/>
+            <a:r>
+              <a:t>Tuyệt đối không ghép chuỗi SQL thủ công trong mã nguồn.</a:t>
+            </a:r>
+            <a:br/>
+            <a:br/>
+            <a:r>
+              <a:t>2. Đặc quyền tối thiểu (Least Privilege):</a:t>
+            </a:r>
+            <a:br/>
+            <a:r>
+              <a:t>Tài khoản kết nối CSDL chỉ cấp các quyền SELECT, INSERT, UPDATE cần thiết; không dùng tài khoản 'sa' hay quyền DDL trong môi trường chạy ứng dụng.</a:t>
+            </a:r>
+            <a:br/>
+            <a:br/>
+            <a:r>
+              <a:t>3. Kiểm tra dữ liệu đầu vào (Input Validation):</a:t>
+            </a:r>
+            <a:br/>
+            <a:r>
+              <a:t>Sử dụng Data Annotations để giới hạn định dạng và độ dài dữ liệu.</a:t>
+            </a:r>
+            <a:br/>
+            <a:br/>
+            <a:r>
+              <a:t>4. Băm mật khẩu (Password Hashing):</a:t>
+            </a:r>
+            <a:br/>
+            <a:r>
+              <a:t>Sử dụng ASP.NET Core Identity (PBKDF2) để bảo vệ thông tin ngay cả khi CSDL bị lộ.</a:t>
             </a:r>
           </a:p>
         </p:txBody>
@@ -11078,7 +10997,7 @@
               </a:defRPr>
             </a:pPr>
             <a:r>
-              <a:t>2.1. Stored XSS: Bản Chất Kỹ Thuật &amp; Ngữ Cảnh Bài Toán</a:t>
+              <a:t>2.1. Stored XSS: Bản Chất Kỹ Thuật &amp; Ngữ Cảnh Ứng Dụng</a:t>
             </a:r>
           </a:p>
         </p:txBody>
@@ -11113,7 +11032,7 @@
               </a:defRPr>
             </a:pPr>
             <a:r>
-              <a:t>Nhóm WNC.G01 (Học - Bình - Cường) • Khoa CNTT - Đại học Mở Hà Nội • GVHD: ThS. Lê Hữu Dũng</a:t>
+              <a:t>Nhóm WNC.G01 • Trường Đại học Mở Hà Nội (HOU) • Giảng viên: ThS. Lê Hữu Dũng</a:t>
             </a:r>
           </a:p>
         </p:txBody>
@@ -11167,7 +11086,7 @@
               </a:defRPr>
             </a:pPr>
             <a:r>
-              <a:t>Ngữ Cảnh Nghiệp Vụ Trong Website Tư Vấn</a:t>
+              <a:t>Ngữ Cảnh Nghiệp Vụ Trong Hệ Thống</a:t>
             </a:r>
           </a:p>
           <a:p>
@@ -11182,19 +11101,15 @@
               </a:defRPr>
             </a:pPr>
             <a:r>
-              <a:t>• Trong website tư vấn trực tuyến, khách hàng có chức năng đăng đánh giá, nhận xét và gửi câu hỏi tư vấn.</a:t>
-            </a:r>
-            <a:br/>
-            <a:r>
-              <a:t>• Bản chất Stored XSS (Persistent XSS): Kẻ tấn công nhúng mã JavaScript độc hại vào nội dung nhận xét.</a:t>
-            </a:r>
-            <a:br/>
-            <a:r>
-              <a:t>• Máy chủ không lọc mà lưu thẳng mã độc vào CSDL (bảng dbo.Comments).</a:t>
-            </a:r>
-            <a:br/>
-            <a:r>
-              <a:t>• Nguy hiểm: Mỗi khi bất kỳ người dùng khác, chuyên gia hoặc quản trị viên mở trang đánh giá, trình duyệt của họ sẽ tự động biên dịch và thực thi đoạn script độc hại đó.</a:t>
+              <a:t>• Hệ thống cho phép người dùng đăng tải nhận xét, đánh giá chất lượng buổi tư vấn.</a:t>
+            </a:r>
+            <a:br/>
+            <a:r>
+              <a:t>• Bản chất Stored XSS (Persistent XSS): Mã kịch bản (JavaScript) độc hại được gửi lên và lưu trữ trực tiếp trong CSDL (bảng dbo.Comments).</a:t>
+            </a:r>
+            <a:br/>
+            <a:r>
+              <a:t>• Đặc điểm phát tán: Khi người dùng khác truy cập trang web, mã kịch bản lưu trong CSDL được tải về và thực thi tự động trên trình duyệt của nạn nhân mà không cần tương tác thêm.</a:t>
             </a:r>
           </a:p>
         </p:txBody>
@@ -11248,7 +11163,7 @@
               </a:defRPr>
             </a:pPr>
             <a:r>
-              <a:t>Mã Nguồn C# Gây Lỗi &amp; Sự Lạm Dụng @@Html.Raw</a:t>
+              <a:t>Mã Nguồn Minh Họa Lỗi &amp; Sự Lạm Dụng @@Html.Raw</a:t>
             </a:r>
           </a:p>
           <a:p>
@@ -11264,7 +11179,7 @@
               </a:defRPr>
             </a:pPr>
             <a:r>
-              <a:t>// 1. CONTROLLER LƯU NGUYÊN VĂN KHÔNG LÀM SẠCH:</a:t>
+              <a:t>// 1. CONTROLLER LƯU TRỰC TIẾP KHÔNG QUA XỬ LÝ:</a:t>
             </a:r>
             <a:br/>
             <a:r>
@@ -11276,7 +11191,7 @@
             </a:r>
             <a:br/>
             <a:r>
-              <a:t>    Content = content // Chứa thẻ &lt;script&gt; độc hại</a:t>
+              <a:t>    Content = content // Chứa mã &lt;script&gt; độc hại</a:t>
             </a:r>
             <a:br/>
             <a:r>
@@ -11289,7 +11204,7 @@
             <a:br/>
             <a:br/>
             <a:r>
-              <a:t>// 2. RAZOR VIEW LẠM DỤNG HTML.RAW:</a:t>
+              <a:t>// 2. RAZOR VIEW HIỂN THỊ DỮ LIỆU THÔ:</a:t>
             </a:r>
             <a:br/>
             <a:r>
@@ -11297,7 +11212,7 @@
             </a:r>
             <a:br/>
             <a:r>
-              <a:t>    @Html.Raw(comment.Content) </a:t>
+              <a:t>    @Html.Raw(comment.Content)</a:t>
             </a:r>
             <a:br/>
             <a:r>
@@ -11316,11 +11231,7 @@
               </a:defRPr>
             </a:pPr>
             <a:r>
-              <a:t>⚠️ Điểm mù lập trình viên:</a:t>
-            </a:r>
-            <a:br/>
-            <a:r>
-              <a:t>Sử dụng @Html.Raw() với mục đích cho phép hiển thị format HTML nhưng vô tình mở toang cánh cửa cho hacker thực thi JavaScript trên máy nạn nhân.</a:t>
+              <a:t>Việc sử dụng @Html.Raw() nhằm mục đích hiển thị định dạng văn bản vô tình làm vô hiệu hóa cơ chế phòng vệ mã hóa HTML tự động của Razor View.</a:t>
             </a:r>
           </a:p>
         </p:txBody>

--- a/Slide_OWASP_Top3_Nhom_WNC_G01.pptx
+++ b/Slide_OWASP_Top3_Nhom_WNC_G01.pptx
@@ -24,9 +24,6 @@
     <p:sldId id="272" r:id="rId23"/>
     <p:sldId id="273" r:id="rId24"/>
     <p:sldId id="274" r:id="rId25"/>
-    <p:sldId id="275" r:id="rId26"/>
-    <p:sldId id="276" r:id="rId27"/>
-    <p:sldId id="277" r:id="rId28"/>
   </p:sldIdLst>
   <p:sldSz cx="12191695" cy="6858000" type="screen4x3"/>
   <p:notesSz cx="6858000" cy="9144000"/>
@@ -3198,6 +3195,7 @@
                 <a:solidFill>
                   <a:srgbClr val="1D4ED8"/>
                 </a:solidFill>
+                <a:latin typeface="Arial"/>
               </a:defRPr>
             </a:pPr>
             <a:r>
@@ -3233,6 +3231,7 @@
                 <a:solidFill>
                   <a:srgbClr val="BE123C"/>
                 </a:solidFill>
+                <a:latin typeface="Arial"/>
               </a:defRPr>
             </a:pPr>
             <a:r>
@@ -3248,6 +3247,7 @@
                 <a:solidFill>
                   <a:srgbClr val="0F172A"/>
                 </a:solidFill>
+                <a:latin typeface="Arial"/>
               </a:defRPr>
             </a:pPr>
             <a:r>
@@ -3263,10 +3263,11 @@
               <a:spcBef>
                 <a:spcPts val="800"/>
               </a:spcBef>
-              <a:defRPr sz="1350">
+              <a:defRPr sz="1350" b="0">
                 <a:solidFill>
                   <a:srgbClr val="334155"/>
                 </a:solidFill>
+                <a:latin typeface="Arial"/>
               </a:defRPr>
             </a:pPr>
             <a:r>
@@ -3313,7 +3314,7 @@
           </a:fontRef>
         </p:style>
         <p:txBody>
-          <a:bodyPr rtlCol="0" anchor="ctr" wrap="square"/>
+          <a:bodyPr rtlCol="0" anchor="ctr"/>
           <a:lstStyle/>
           <a:p>
             <a:pPr algn="ctr">
@@ -3321,6 +3322,7 @@
                 <a:solidFill>
                   <a:srgbClr val="1D4ED8"/>
                 </a:solidFill>
+                <a:latin typeface="Arial"/>
               </a:defRPr>
             </a:pPr>
             <a:r>
@@ -3332,10 +3334,11 @@
               <a:spcBef>
                 <a:spcPts val="400"/>
               </a:spcBef>
-              <a:defRPr sz="1200">
+              <a:defRPr sz="1200" b="0">
                 <a:solidFill>
                   <a:srgbClr val="0F172A"/>
                 </a:solidFill>
+                <a:latin typeface="Arial"/>
               </a:defRPr>
             </a:pPr>
             <a:r>
@@ -3390,7 +3393,7 @@
           </a:fontRef>
         </p:style>
         <p:txBody>
-          <a:bodyPr rtlCol="0" anchor="ctr" wrap="square"/>
+          <a:bodyPr rtlCol="0" anchor="ctr"/>
           <a:lstStyle/>
           <a:p>
             <a:pPr algn="ctr">
@@ -3398,6 +3401,7 @@
                 <a:solidFill>
                   <a:srgbClr val="BE123C"/>
                 </a:solidFill>
+                <a:latin typeface="Arial"/>
               </a:defRPr>
             </a:pPr>
             <a:r>
@@ -3409,10 +3413,11 @@
               <a:spcBef>
                 <a:spcPts val="400"/>
               </a:spcBef>
-              <a:defRPr sz="1200">
+              <a:defRPr sz="1200" b="0">
                 <a:solidFill>
                   <a:srgbClr val="0F172A"/>
                 </a:solidFill>
+                <a:latin typeface="Arial"/>
               </a:defRPr>
             </a:pPr>
             <a:r>
@@ -3467,7 +3472,7 @@
           </a:fontRef>
         </p:style>
         <p:txBody>
-          <a:bodyPr rtlCol="0" anchor="ctr" wrap="square"/>
+          <a:bodyPr rtlCol="0" anchor="ctr"/>
           <a:lstStyle/>
           <a:p>
             <a:pPr algn="ctr">
@@ -3475,6 +3480,7 @@
                 <a:solidFill>
                   <a:srgbClr val="047857"/>
                 </a:solidFill>
+                <a:latin typeface="Arial"/>
               </a:defRPr>
             </a:pPr>
             <a:r>
@@ -3486,10 +3492,11 @@
               <a:spcBef>
                 <a:spcPts val="400"/>
               </a:spcBef>
-              <a:defRPr sz="1200">
+              <a:defRPr sz="1200" b="0">
                 <a:solidFill>
                   <a:srgbClr val="0F172A"/>
                 </a:solidFill>
+                <a:latin typeface="Arial"/>
               </a:defRPr>
             </a:pPr>
             <a:r>
@@ -3575,8 +3582,8 @@
         </p:nvSpPr>
         <p:spPr>
           <a:xfrm>
-            <a:off x="731520" y="292608"/>
-            <a:ext cx="4389120" cy="347472"/>
+            <a:off x="731520" y="256032"/>
+            <a:ext cx="4389120" cy="329184"/>
           </a:xfrm>
           <a:prstGeom prst="roundRect">
             <a:avLst/>
@@ -3613,6 +3620,7 @@
                 <a:solidFill>
                   <a:srgbClr val="1D4ED8"/>
                 </a:solidFill>
+                <a:latin typeface="Arial"/>
               </a:defRPr>
             </a:pPr>
             <a:r>
@@ -3629,7 +3637,7 @@
         </p:nvSpPr>
         <p:spPr>
           <a:xfrm>
-            <a:off x="731520" y="658368"/>
+            <a:off x="731520" y="621792"/>
             <a:ext cx="10698480" cy="548640"/>
           </a:xfrm>
           <a:prstGeom prst="rect">
@@ -3648,10 +3656,11 @@
                 <a:solidFill>
                   <a:srgbClr val="0F172A"/>
                 </a:solidFill>
-              </a:defRPr>
-            </a:pPr>
-            <a:r>
-              <a:t>2.2. Stored XSS: Đánh Giá Rủi Ro &amp; Tác Động Phía Trình Duyệt</a:t>
+                <a:latin typeface="Arial"/>
+              </a:defRPr>
+            </a:pPr>
+            <a:r>
+              <a:t>2.3. Stored XSS: Phân Tích Các Kỹ Thuật Tiêm Payload</a:t>
             </a:r>
           </a:p>
         </p:txBody>
@@ -3664,7 +3673,7 @@
         </p:nvSpPr>
         <p:spPr>
           <a:xfrm>
-            <a:off x="731520" y="6492240"/>
+            <a:off x="731520" y="6537960"/>
             <a:ext cx="10698480" cy="274320"/>
           </a:xfrm>
           <a:prstGeom prst="rect">
@@ -3673,7 +3682,7 @@
           <a:noFill/>
         </p:spPr>
         <p:txBody>
-          <a:bodyPr wrap="none">
+          <a:bodyPr wrap="none" lIns="0" rIns="0" tIns="0" bIns="0">
             <a:spAutoFit/>
           </a:bodyPr>
           <a:lstStyle/>
@@ -3683,6 +3692,7 @@
                 <a:solidFill>
                   <a:srgbClr val="64748B"/>
                 </a:solidFill>
+                <a:latin typeface="Arial"/>
               </a:defRPr>
             </a:pPr>
             <a:r>
@@ -3699,18 +3709,18 @@
         </p:nvSpPr>
         <p:spPr>
           <a:xfrm>
-            <a:off x="731520" y="1280160"/>
-            <a:ext cx="3328416" cy="4846320"/>
+            <a:off x="731520" y="1234440"/>
+            <a:ext cx="10728655" cy="4937760"/>
           </a:xfrm>
           <a:prstGeom prst="roundRect">
             <a:avLst/>
           </a:prstGeom>
           <a:solidFill>
-            <a:srgbClr val="FFF1F2"/>
+            <a:srgbClr val="F8FAFC"/>
           </a:solidFill>
           <a:ln>
             <a:solidFill>
-              <a:srgbClr val="FECDD3"/>
+              <a:srgbClr val="E2E8F0"/>
             </a:solidFill>
           </a:ln>
         </p:spPr>
@@ -3729,207 +3739,91 @@
           </a:fontRef>
         </p:style>
         <p:txBody>
-          <a:bodyPr rtlCol="0" anchor="ctr" wrap="square"/>
+          <a:bodyPr rtlCol="0" anchor="ctr"/>
           <a:lstStyle/>
           <a:p>
             <a:pPr algn="ctr">
-              <a:defRPr sz="1400" b="1">
+              <a:defRPr sz="1500" b="1">
                 <a:solidFill>
                   <a:srgbClr val="BE123C"/>
                 </a:solidFill>
-              </a:defRPr>
-            </a:pPr>
-            <a:r>
-              <a:t>ĐÁNH CẮP COOKIE &amp; PHIÊN</a:t>
-            </a:r>
-            <a:br/>
-            <a:r>
-              <a:t>(Session Hijacking)</a:t>
+                <a:latin typeface="Arial"/>
+              </a:defRPr>
+            </a:pPr>
+            <a:r>
+              <a:t>3 Biến Thể Payload XSS Thực Nghiệm Trong Hệ Thống</a:t>
             </a:r>
           </a:p>
           <a:p>
             <a:pPr>
               <a:spcBef>
-                <a:spcPts val="1000"/>
+                <a:spcPts val="800"/>
               </a:spcBef>
-              <a:defRPr sz="1200">
+              <a:defRPr sz="1250" b="0">
                 <a:solidFill>
                   <a:srgbClr val="334155"/>
                 </a:solidFill>
-              </a:defRPr>
-            </a:pPr>
-            <a:r>
-              <a:t>• Đoạn script đọc thuộc tính document.cookie để trích xuất token phiên làm việc.</a:t>
-            </a:r>
-            <a:br/>
-            <a:r>
-              <a:t>• Dữ liệu xác thực được gửi ngầm về máy chủ điều khiển của kẻ tấn công.</a:t>
-            </a:r>
-            <a:br/>
-            <a:r>
-              <a:t>• Kẻ tấn công sử dụng token để mạo danh người dùng hợp lệ.</a:t>
-            </a:r>
-          </a:p>
-        </p:txBody>
-      </p:sp>
-      <p:sp>
-        <p:nvSpPr>
-          <p:cNvPr id="7" name="Rounded Rectangle 6"/>
-          <p:cNvSpPr/>
-          <p:nvPr/>
-        </p:nvSpPr>
-        <p:spPr>
-          <a:xfrm>
-            <a:off x="4416552" y="1280160"/>
-            <a:ext cx="3328416" cy="4846320"/>
-          </a:xfrm>
-          <a:prstGeom prst="roundRect">
-            <a:avLst/>
-          </a:prstGeom>
-          <a:solidFill>
-            <a:srgbClr val="FFFBEB"/>
-          </a:solidFill>
-          <a:ln>
-            <a:solidFill>
-              <a:srgbClr val="FEF08A"/>
-            </a:solidFill>
-          </a:ln>
-        </p:spPr>
-        <p:style>
-          <a:lnRef idx="1">
-            <a:schemeClr val="accent1"/>
-          </a:lnRef>
-          <a:fillRef idx="3">
-            <a:schemeClr val="accent1"/>
-          </a:fillRef>
-          <a:effectRef idx="2">
-            <a:schemeClr val="accent1"/>
-          </a:effectRef>
-          <a:fontRef idx="minor">
-            <a:schemeClr val="lt1"/>
-          </a:fontRef>
-        </p:style>
-        <p:txBody>
-          <a:bodyPr rtlCol="0" anchor="ctr" wrap="square"/>
-          <a:lstStyle/>
-          <a:p>
-            <a:pPr algn="ctr">
-              <a:defRPr sz="1400" b="1">
-                <a:solidFill>
-                  <a:srgbClr val="B45309"/>
-                </a:solidFill>
-              </a:defRPr>
-            </a:pPr>
-            <a:r>
-              <a:t>THAY ĐỔI CẤU TRÚC DOM</a:t>
-            </a:r>
-            <a:br/>
-            <a:r>
-              <a:t>(DOM Manipulation / Phishing)</a:t>
+                <a:latin typeface="Arial"/>
+              </a:defRPr>
+            </a:pPr>
+            <a:r>
+              <a:t>1. Payload 1 (Thẻ Script Cơ Bản):</a:t>
+            </a:r>
+            <a:br/>
+            <a:r>
+              <a:t>   &lt;script&gt;alert('Session Cookie: ' + document.cookie);&lt;/script&gt;</a:t>
+            </a:r>
+            <a:br/>
+            <a:r>
+              <a:t>   Cơ chế: Trình duyệt phân tích cú pháp HTML, nhận diện khối mã và thực thi câu lệnh JavaScript.</a:t>
             </a:r>
           </a:p>
           <a:p>
             <a:pPr>
               <a:spcBef>
-                <a:spcPts val="1000"/>
+                <a:spcPts val="800"/>
               </a:spcBef>
-              <a:defRPr sz="1200">
+              <a:defRPr sz="1250" b="0">
                 <a:solidFill>
                   <a:srgbClr val="334155"/>
                 </a:solidFill>
-              </a:defRPr>
-            </a:pPr>
-            <a:r>
-              <a:t>• Thay đổi cấu trúc giao diện trang web, chèn các form đăng nhập giả mạo.</a:t>
-            </a:r>
-            <a:br/>
-            <a:r>
-              <a:t>• Lừa người dùng nhập thông tin nhạy cảm trên giao diện đã bị sửa đổi.</a:t>
-            </a:r>
-            <a:br/>
-            <a:r>
-              <a:t>• Tự động điều hướng người dùng sang các liên kết độc hại.</a:t>
-            </a:r>
-          </a:p>
-        </p:txBody>
-      </p:sp>
-      <p:sp>
-        <p:nvSpPr>
-          <p:cNvPr id="8" name="Rounded Rectangle 7"/>
-          <p:cNvSpPr/>
-          <p:nvPr/>
-        </p:nvSpPr>
-        <p:spPr>
-          <a:xfrm>
-            <a:off x="8101584" y="1280160"/>
-            <a:ext cx="3328416" cy="4846320"/>
-          </a:xfrm>
-          <a:prstGeom prst="roundRect">
-            <a:avLst/>
-          </a:prstGeom>
-          <a:solidFill>
-            <a:srgbClr val="EFF6FF"/>
-          </a:solidFill>
-          <a:ln>
-            <a:solidFill>
-              <a:srgbClr val="BFDBFE"/>
-            </a:solidFill>
-          </a:ln>
-        </p:spPr>
-        <p:style>
-          <a:lnRef idx="1">
-            <a:schemeClr val="accent1"/>
-          </a:lnRef>
-          <a:fillRef idx="3">
-            <a:schemeClr val="accent1"/>
-          </a:fillRef>
-          <a:effectRef idx="2">
-            <a:schemeClr val="accent1"/>
-          </a:effectRef>
-          <a:fontRef idx="minor">
-            <a:schemeClr val="lt1"/>
-          </a:fontRef>
-        </p:style>
-        <p:txBody>
-          <a:bodyPr rtlCol="0" anchor="ctr" wrap="square"/>
-          <a:lstStyle/>
-          <a:p>
-            <a:pPr algn="ctr">
-              <a:defRPr sz="1400" b="1">
-                <a:solidFill>
-                  <a:srgbClr val="1D4ED8"/>
-                </a:solidFill>
-              </a:defRPr>
-            </a:pPr>
-            <a:r>
-              <a:t>THỰC THI THAO TÁC TRÁI PHÉP</a:t>
-            </a:r>
-            <a:br/>
-            <a:r>
-              <a:t>(Client-Side Exploitation)</a:t>
+                <a:latin typeface="Arial"/>
+              </a:defRPr>
+            </a:pPr>
+            <a:r>
+              <a:t>2. Payload 2 (Vượt Qua Bộ Lọc Bằng Trình Xử Lý Sự Kiện HTML):</a:t>
+            </a:r>
+            <a:br/>
+            <a:r>
+              <a:t>   &lt;img src=x onerror=alert('XSS triggered via image onerror')&gt;</a:t>
+            </a:r>
+            <a:br/>
+            <a:r>
+              <a:t>   Cơ chế: Khi ứng dụng chỉ lọc từ khóa '&lt;script&gt;', kẻ tấn công sử dụng thuộc tính 'onerror' của thẻ hình ảnh khi đường dẫn ảnh không tồn tại để kích hoạt JavaScript.</a:t>
             </a:r>
           </a:p>
           <a:p>
             <a:pPr>
               <a:spcBef>
-                <a:spcPts val="1000"/>
+                <a:spcPts val="800"/>
               </a:spcBef>
-              <a:defRPr sz="1200">
+              <a:defRPr sz="1250" b="0">
                 <a:solidFill>
                   <a:srgbClr val="334155"/>
                 </a:solidFill>
-              </a:defRPr>
-            </a:pPr>
-            <a:r>
-              <a:t>• Ghi nhận thao tác bàn phím (Keylogging) khi người dùng nhập liệu.</a:t>
-            </a:r>
-            <a:br/>
-            <a:r>
-              <a:t>• Tự động thực hiện các hành động gửi tin nhắn hoặc đánh giá mạo danh người dùng.</a:t>
-            </a:r>
-            <a:br/>
-            <a:r>
-              <a:t>• Tận dụng quyền truy cập trình duyệt để mở rộng phạm vi tấn công.</a:t>
+                <a:latin typeface="Arial"/>
+              </a:defRPr>
+            </a:pPr>
+            <a:r>
+              <a:t>3. Payload 3 (Thay Đổi Toàn Bộ Cấu Trúc Trang Web):</a:t>
+            </a:r>
+            <a:br/>
+            <a:r>
+              <a:t>   &lt;script&gt;document.body.innerHTML='&lt;h2 style=color:red;text-align:center&gt;Trang Web Đã Bị Thay Đổi&lt;/h2&gt;';&lt;/script&gt;</a:t>
+            </a:r>
+            <a:br/>
+            <a:r>
+              <a:t>   Cơ chế: Can thiệp trực tiếp vào thuộc tính body.innerHTML để thay đổi toàn bộ nội dung hiển thị của website.</a:t>
             </a:r>
           </a:p>
         </p:txBody>
@@ -4003,8 +3897,8 @@
         </p:nvSpPr>
         <p:spPr>
           <a:xfrm>
-            <a:off x="731520" y="292608"/>
-            <a:ext cx="4389120" cy="347472"/>
+            <a:off x="731520" y="256032"/>
+            <a:ext cx="4389120" cy="329184"/>
           </a:xfrm>
           <a:prstGeom prst="roundRect">
             <a:avLst/>
@@ -4041,6 +3935,7 @@
                 <a:solidFill>
                   <a:srgbClr val="1D4ED8"/>
                 </a:solidFill>
+                <a:latin typeface="Arial"/>
               </a:defRPr>
             </a:pPr>
             <a:r>
@@ -4057,7 +3952,7 @@
         </p:nvSpPr>
         <p:spPr>
           <a:xfrm>
-            <a:off x="731520" y="658368"/>
+            <a:off x="731520" y="621792"/>
             <a:ext cx="10698480" cy="548640"/>
           </a:xfrm>
           <a:prstGeom prst="rect">
@@ -4076,10 +3971,11 @@
                 <a:solidFill>
                   <a:srgbClr val="0F172A"/>
                 </a:solidFill>
-              </a:defRPr>
-            </a:pPr>
-            <a:r>
-              <a:t>2.3. Stored XSS: Phân Tích Kỹ Thuật Đưa Payload Vào CSDL</a:t>
+                <a:latin typeface="Arial"/>
+              </a:defRPr>
+            </a:pPr>
+            <a:r>
+              <a:t>2.4. Stored XSS: Minh Chứng Thực Nghiệm Trực Quan Trên Web UI</a:t>
             </a:r>
           </a:p>
         </p:txBody>
@@ -4092,7 +3988,7 @@
         </p:nvSpPr>
         <p:spPr>
           <a:xfrm>
-            <a:off x="731520" y="6492240"/>
+            <a:off x="731520" y="6537960"/>
             <a:ext cx="10698480" cy="274320"/>
           </a:xfrm>
           <a:prstGeom prst="rect">
@@ -4101,7 +3997,7 @@
           <a:noFill/>
         </p:spPr>
         <p:txBody>
-          <a:bodyPr wrap="none">
+          <a:bodyPr wrap="none" lIns="0" rIns="0" tIns="0" bIns="0">
             <a:spAutoFit/>
           </a:bodyPr>
           <a:lstStyle/>
@@ -4111,6 +4007,7 @@
                 <a:solidFill>
                   <a:srgbClr val="64748B"/>
                 </a:solidFill>
+                <a:latin typeface="Arial"/>
               </a:defRPr>
             </a:pPr>
             <a:r>
@@ -4119,125 +4016,62 @@
           </a:p>
         </p:txBody>
       </p:sp>
-      <p:sp>
-        <p:nvSpPr>
-          <p:cNvPr id="6" name="Rounded Rectangle 5"/>
-          <p:cNvSpPr/>
-          <p:nvPr/>
-        </p:nvSpPr>
-        <p:spPr>
-          <a:xfrm>
-            <a:off x="731520" y="1280160"/>
-            <a:ext cx="10728655" cy="4846320"/>
-          </a:xfrm>
-          <a:prstGeom prst="roundRect">
-            <a:avLst/>
-          </a:prstGeom>
-          <a:solidFill>
-            <a:srgbClr val="F8FAFC"/>
-          </a:solidFill>
-          <a:ln>
-            <a:solidFill>
-              <a:srgbClr val="E2E8F0"/>
-            </a:solidFill>
-          </a:ln>
-        </p:spPr>
-        <p:style>
-          <a:lnRef idx="1">
-            <a:schemeClr val="accent1"/>
-          </a:lnRef>
-          <a:fillRef idx="3">
-            <a:schemeClr val="accent1"/>
-          </a:fillRef>
-          <a:effectRef idx="2">
-            <a:schemeClr val="accent1"/>
-          </a:effectRef>
-          <a:fontRef idx="minor">
-            <a:schemeClr val="lt1"/>
-          </a:fontRef>
-        </p:style>
-        <p:txBody>
-          <a:bodyPr rtlCol="0" anchor="ctr" wrap="square"/>
+      <p:pic>
+        <p:nvPicPr>
+          <p:cNvPr id="6" name="Picture 5" descr="final_xss_proof.png"/>
+          <p:cNvPicPr>
+            <a:picLocks noChangeAspect="1"/>
+          </p:cNvPicPr>
+          <p:nvPr/>
+        </p:nvPicPr>
+        <p:blipFill>
+          <a:blip r:embed="rId2"/>
+          <a:stretch>
+            <a:fillRect/>
+          </a:stretch>
+        </p:blipFill>
+        <p:spPr>
+          <a:xfrm>
+            <a:off x="2615184" y="1234440"/>
+            <a:ext cx="6949440" cy="4584700"/>
+          </a:xfrm>
+          <a:prstGeom prst="rect">
+            <a:avLst/>
+          </a:prstGeom>
+        </p:spPr>
+      </p:pic>
+      <p:sp>
+        <p:nvSpPr>
+          <p:cNvPr id="7" name="TextBox 6"/>
+          <p:cNvSpPr txBox="1"/>
+          <p:nvPr/>
+        </p:nvSpPr>
+        <p:spPr>
+          <a:xfrm>
+            <a:off x="731520" y="6016752"/>
+            <a:ext cx="10728655" cy="365760"/>
+          </a:xfrm>
+          <a:prstGeom prst="rect">
+            <a:avLst/>
+          </a:prstGeom>
+          <a:noFill/>
+        </p:spPr>
+        <p:txBody>
+          <a:bodyPr wrap="none" tIns="0" bIns="0" lIns="0" rIns="0">
+            <a:spAutoFit/>
+          </a:bodyPr>
           <a:lstStyle/>
           <a:p>
             <a:pPr algn="ctr">
-              <a:defRPr sz="1500" b="1">
+              <a:defRPr sz="1100" b="1">
                 <a:solidFill>
                   <a:srgbClr val="BE123C"/>
                 </a:solidFill>
-              </a:defRPr>
-            </a:pPr>
-            <a:r>
-              <a:t>3 Biến Thể Payload XSS Thực Nghiệm Trong Hệ Thống</a:t>
-            </a:r>
-          </a:p>
-          <a:p>
-            <a:pPr>
-              <a:spcBef>
-                <a:spcPts val="800"/>
-              </a:spcBef>
-              <a:defRPr sz="1250">
-                <a:solidFill>
-                  <a:srgbClr val="334155"/>
-                </a:solidFill>
-              </a:defRPr>
-            </a:pPr>
-            <a:r>
-              <a:t>1. Payload 1 (Thẻ Script Cơ Bản):</a:t>
-            </a:r>
-            <a:br/>
-            <a:r>
-              <a:t>   &lt;script&gt;alert('Session Cookie: ' + document.cookie);&lt;/script&gt;</a:t>
-            </a:r>
-            <a:br/>
-            <a:r>
-              <a:t>   Cơ chế: Trình duyệt phân tích cú pháp HTML, nhận diện khối mã và thực thi câu lệnh JavaScript.</a:t>
-            </a:r>
-          </a:p>
-          <a:p>
-            <a:pPr>
-              <a:spcBef>
-                <a:spcPts val="800"/>
-              </a:spcBef>
-              <a:defRPr sz="1250">
-                <a:solidFill>
-                  <a:srgbClr val="334155"/>
-                </a:solidFill>
-              </a:defRPr>
-            </a:pPr>
-            <a:r>
-              <a:t>2. Payload 2 (Vượt Qua Bộ Lọc Bằng Trình Xử Lý Sự Kiện HTML):</a:t>
-            </a:r>
-            <a:br/>
-            <a:r>
-              <a:t>   &lt;img src=x onerror=alert('XSS triggered via image onerror')&gt;</a:t>
-            </a:r>
-            <a:br/>
-            <a:r>
-              <a:t>   Cơ chế: Khi ứng dụng chỉ lọc từ khóa '&lt;script&gt;', kẻ tấn công sử dụng thuộc tính 'onerror' của thẻ hình ảnh khi đường dẫn ảnh không tồn tại để kích hoạt JavaScript.</a:t>
-            </a:r>
-          </a:p>
-          <a:p>
-            <a:pPr>
-              <a:spcBef>
-                <a:spcPts val="800"/>
-              </a:spcBef>
-              <a:defRPr sz="1250">
-                <a:solidFill>
-                  <a:srgbClr val="334155"/>
-                </a:solidFill>
-              </a:defRPr>
-            </a:pPr>
-            <a:r>
-              <a:t>3. Payload 3 (Thay Đổi Toàn Bộ Cấu Trúc Trang Web):</a:t>
-            </a:r>
-            <a:br/>
-            <a:r>
-              <a:t>   &lt;script&gt;document.body.innerHTML='&lt;h2 style=color:red;text-align:center&gt;Trang Web Đã Bị Thay Đổi&lt;/h2&gt;';&lt;/script&gt;</a:t>
-            </a:r>
-            <a:br/>
-            <a:r>
-              <a:t>   Cơ chế: Can thiệp trực tiếp vào thuộc tính body.innerHTML để thay đổi toàn bộ nội dung hiển thị của website.</a:t>
+                <a:latin typeface="Arial"/>
+              </a:defRPr>
+            </a:pPr>
+            <a:r>
+              <a:t>Minh chứng đối chứng: Đoạn script độc hại lưu trữ trong CSDL (Trái) vs Cơ chế tự động mã hóa HTML của Razor View (Phải)</a:t>
             </a:r>
           </a:p>
         </p:txBody>
@@ -4311,8 +4145,8 @@
         </p:nvSpPr>
         <p:spPr>
           <a:xfrm>
-            <a:off x="731520" y="292608"/>
-            <a:ext cx="4389120" cy="347472"/>
+            <a:off x="731520" y="256032"/>
+            <a:ext cx="4389120" cy="329184"/>
           </a:xfrm>
           <a:prstGeom prst="roundRect">
             <a:avLst/>
@@ -4349,6 +4183,7 @@
                 <a:solidFill>
                   <a:srgbClr val="1D4ED8"/>
                 </a:solidFill>
+                <a:latin typeface="Arial"/>
               </a:defRPr>
             </a:pPr>
             <a:r>
@@ -4365,7 +4200,7 @@
         </p:nvSpPr>
         <p:spPr>
           <a:xfrm>
-            <a:off x="731520" y="658368"/>
+            <a:off x="731520" y="621792"/>
             <a:ext cx="10698480" cy="548640"/>
           </a:xfrm>
           <a:prstGeom prst="rect">
@@ -4384,10 +4219,11 @@
                 <a:solidFill>
                   <a:srgbClr val="0F172A"/>
                 </a:solidFill>
-              </a:defRPr>
-            </a:pPr>
-            <a:r>
-              <a:t>2.4. Stored XSS: Minh Chứng Thực Nghiệm Trực Quan Trên Web UI</a:t>
+                <a:latin typeface="Arial"/>
+              </a:defRPr>
+            </a:pPr>
+            <a:r>
+              <a:t>2.5. Stored XSS: Minh Chứng Dữ Liệu CSDL &amp; Bảo Vệ Cookie</a:t>
             </a:r>
           </a:p>
         </p:txBody>
@@ -4400,7 +4236,7 @@
         </p:nvSpPr>
         <p:spPr>
           <a:xfrm>
-            <a:off x="731520" y="6492240"/>
+            <a:off x="731520" y="6537960"/>
             <a:ext cx="10698480" cy="274320"/>
           </a:xfrm>
           <a:prstGeom prst="rect">
@@ -4409,7 +4245,7 @@
           <a:noFill/>
         </p:spPr>
         <p:txBody>
-          <a:bodyPr wrap="none">
+          <a:bodyPr wrap="none" lIns="0" rIns="0" tIns="0" bIns="0">
             <a:spAutoFit/>
           </a:bodyPr>
           <a:lstStyle/>
@@ -4419,6 +4255,7 @@
                 <a:solidFill>
                   <a:srgbClr val="64748B"/>
                 </a:solidFill>
+                <a:latin typeface="Arial"/>
               </a:defRPr>
             </a:pPr>
             <a:r>
@@ -4427,50 +4264,26 @@
           </a:p>
         </p:txBody>
       </p:sp>
-      <p:pic>
-        <p:nvPicPr>
-          <p:cNvPr id="6" name="Picture 5" descr="crop_xss_ui.png"/>
-          <p:cNvPicPr>
-            <a:picLocks noChangeAspect="1"/>
-          </p:cNvPicPr>
-          <p:nvPr/>
-        </p:nvPicPr>
-        <p:blipFill>
-          <a:blip r:embed="rId2"/>
-          <a:stretch>
-            <a:fillRect/>
-          </a:stretch>
-        </p:blipFill>
-        <p:spPr>
-          <a:xfrm>
-            <a:off x="1645920" y="1234440"/>
-            <a:ext cx="8869680" cy="3752557"/>
-          </a:xfrm>
-          <a:prstGeom prst="rect">
-            <a:avLst/>
-          </a:prstGeom>
-        </p:spPr>
-      </p:pic>
-      <p:sp>
-        <p:nvSpPr>
-          <p:cNvPr id="7" name="Rounded Rectangle 6"/>
+      <p:sp>
+        <p:nvSpPr>
+          <p:cNvPr id="6" name="Rounded Rectangle 5"/>
           <p:cNvSpPr/>
           <p:nvPr/>
         </p:nvSpPr>
         <p:spPr>
           <a:xfrm>
-            <a:off x="731520" y="5440680"/>
-            <a:ext cx="10728655" cy="914400"/>
+            <a:off x="731520" y="1234440"/>
+            <a:ext cx="5166360" cy="4937760"/>
           </a:xfrm>
           <a:prstGeom prst="roundRect">
             <a:avLst/>
           </a:prstGeom>
           <a:solidFill>
-            <a:srgbClr val="FFF1F2"/>
+            <a:srgbClr val="F8FAFC"/>
           </a:solidFill>
           <a:ln>
             <a:solidFill>
-              <a:srgbClr val="FECDD3"/>
+              <a:srgbClr val="E2E8F0"/>
             </a:solidFill>
           </a:ln>
         </p:spPr>
@@ -4493,33 +4306,183 @@
           <a:lstStyle/>
           <a:p>
             <a:pPr algn="ctr">
-              <a:defRPr sz="1200" b="1">
-                <a:solidFill>
-                  <a:srgbClr val="BE123C"/>
-                </a:solidFill>
-              </a:defRPr>
-            </a:pPr>
-            <a:r>
-              <a:t>Minh chứng đối chứng chức năng Nhận xét đánh giá chuyên gia (/Xss)</a:t>
+              <a:defRPr sz="1400" b="1">
+                <a:solidFill>
+                  <a:srgbClr val="1D4ED8"/>
+                </a:solidFill>
+                <a:latin typeface="Arial"/>
+              </a:defRPr>
+            </a:pPr>
+            <a:r>
+              <a:t>Dữ Liệu Lưu Trong Bảng dbo.Comments</a:t>
             </a:r>
           </a:p>
           <a:p>
             <a:pPr>
               <a:spcBef>
-                <a:spcPts val="200"/>
+                <a:spcPts val="600"/>
               </a:spcBef>
-              <a:defRPr sz="1100">
+              <a:defRPr sz="950" b="0">
+                <a:solidFill>
+                  <a:srgbClr val="0F172A"/>
+                </a:solidFill>
+                <a:latin typeface="Courier New"/>
+              </a:defRPr>
+            </a:pPr>
+            <a:r>
+              <a:t>SELECT Id, Author, Content, IsSecureStored FROM dbo.Comments;</a:t>
+            </a:r>
+            <a:br/>
+            <a:br/>
+            <a:r>
+              <a:t>Id | Author        | Content                           | IsSecure</a:t>
+            </a:r>
+            <a:br/>
+            <a:r>
+              <a:t>---+---------------+-----------------------------------+---------</a:t>
+            </a:r>
+            <a:br/>
+            <a:r>
+              <a:t> 1 | Le Thanh Binh | Dich vu tu van rat chuyen nghiep! | 1</a:t>
+            </a:r>
+            <a:br/>
+            <a:r>
+              <a:t> 2 | Hacker_XSS    | &lt;script&gt;alert(document.cookie);.. | 0</a:t>
+            </a:r>
+          </a:p>
+          <a:p>
+            <a:pPr>
+              <a:spcBef>
+                <a:spcPts val="800"/>
+              </a:spcBef>
+              <a:defRPr sz="1150" b="0">
                 <a:solidFill>
                   <a:srgbClr val="334155"/>
                 </a:solidFill>
-              </a:defRPr>
-            </a:pPr>
-            <a:r>
-              <a:t>• Nhánh dính lỗi (Trái): Chuỗi kịch bản được lưu và render thô, kích hoạt thông báo alert hiển thị Cookie.</a:t>
-            </a:r>
-            <a:br/>
-            <a:r>
-              <a:t>• Nhánh an toàn (Phải): Razor View tự động mã hóa chuỗi thành văn bản an toàn, triệt tiêu khả năng thực thi mã.</a:t>
+                <a:latin typeface="Arial"/>
+              </a:defRPr>
+            </a:pPr>
+            <a:r>
+              <a:t>Phân tích đặc tính lưu trữ:</a:t>
+            </a:r>
+            <a:br/>
+            <a:r>
+              <a:t>Mã kịch bản độc hại được lưu trữ trực tiếp trong CSDL. Do đó, lỗ hổng Stored XSS có tính chất nguy hại kéo dài và phát tán tới mọi người dùng xem nội dung đó.</a:t>
+            </a:r>
+          </a:p>
+        </p:txBody>
+      </p:sp>
+      <p:sp>
+        <p:nvSpPr>
+          <p:cNvPr id="7" name="Rounded Rectangle 6"/>
+          <p:cNvSpPr/>
+          <p:nvPr/>
+        </p:nvSpPr>
+        <p:spPr>
+          <a:xfrm>
+            <a:off x="6263640" y="1234440"/>
+            <a:ext cx="5166360" cy="4937760"/>
+          </a:xfrm>
+          <a:prstGeom prst="roundRect">
+            <a:avLst/>
+          </a:prstGeom>
+          <a:solidFill>
+            <a:srgbClr val="F8FAFC"/>
+          </a:solidFill>
+          <a:ln>
+            <a:solidFill>
+              <a:srgbClr val="E2E8F0"/>
+            </a:solidFill>
+          </a:ln>
+        </p:spPr>
+        <p:style>
+          <a:lnRef idx="1">
+            <a:schemeClr val="accent1"/>
+          </a:lnRef>
+          <a:fillRef idx="3">
+            <a:schemeClr val="accent1"/>
+          </a:fillRef>
+          <a:effectRef idx="2">
+            <a:schemeClr val="accent1"/>
+          </a:effectRef>
+          <a:fontRef idx="minor">
+            <a:schemeClr val="lt1"/>
+          </a:fontRef>
+        </p:style>
+        <p:txBody>
+          <a:bodyPr rtlCol="0" anchor="ctr"/>
+          <a:lstStyle/>
+          <a:p>
+            <a:pPr algn="ctr">
+              <a:defRPr sz="1400" b="1">
+                <a:solidFill>
+                  <a:srgbClr val="047857"/>
+                </a:solidFill>
+                <a:latin typeface="Arial"/>
+              </a:defRPr>
+            </a:pPr>
+            <a:r>
+              <a:t>Cơ Chế Bảo Vệ Với Cờ HttpOnly Cookie</a:t>
+            </a:r>
+          </a:p>
+          <a:p>
+            <a:pPr>
+              <a:spcBef>
+                <a:spcPts val="600"/>
+              </a:spcBef>
+              <a:defRPr sz="950" b="0">
+                <a:solidFill>
+                  <a:srgbClr val="065F46"/>
+                </a:solidFill>
+                <a:latin typeface="Courier New"/>
+              </a:defRPr>
+            </a:pPr>
+            <a:r>
+              <a:t>// CẤU HÌNH COOKIE AN TOÀN TRONG ASP.NET CORE:</a:t>
+            </a:r>
+            <a:br/>
+            <a:r>
+              <a:t>Response.Cookies.Append("AuthSessionToken", token, new CookieOptions</a:t>
+            </a:r>
+            <a:br/>
+            <a:r>
+              <a:t>{</a:t>
+            </a:r>
+            <a:br/>
+            <a:r>
+              <a:t>    HttpOnly = true, // CẤM JAVASCRIPT ĐỌC TRỘM</a:t>
+            </a:r>
+            <a:br/>
+            <a:r>
+              <a:t>    Secure = true,   // BẮT BUỘC TRUYỀN QUA HTTPS</a:t>
+            </a:r>
+            <a:br/>
+            <a:r>
+              <a:t>    SameSite = SameSiteMode.Strict</a:t>
+            </a:r>
+            <a:br/>
+            <a:r>
+              <a:t>});</a:t>
+            </a:r>
+          </a:p>
+          <a:p>
+            <a:pPr>
+              <a:spcBef>
+                <a:spcPts val="800"/>
+              </a:spcBef>
+              <a:defRPr sz="1150" b="0">
+                <a:solidFill>
+                  <a:srgbClr val="334155"/>
+                </a:solidFill>
+                <a:latin typeface="Arial"/>
+              </a:defRPr>
+            </a:pPr>
+            <a:r>
+              <a:t>Vai trò của cờ HttpOnly:</a:t>
+            </a:r>
+            <a:br/>
+            <a:r>
+              <a:t>Ngăn chặn mã JavaScript đọc thuộc tính document.cookie. Kể cả khi trang web xuất hiện lỗi XSS, kẻ tấn công cũng không thể trích xuất token phiên làm việc.</a:t>
             </a:r>
           </a:p>
         </p:txBody>
@@ -4593,8 +4556,8 @@
         </p:nvSpPr>
         <p:spPr>
           <a:xfrm>
-            <a:off x="731520" y="292608"/>
-            <a:ext cx="4389120" cy="347472"/>
+            <a:off x="731520" y="256032"/>
+            <a:ext cx="4389120" cy="329184"/>
           </a:xfrm>
           <a:prstGeom prst="roundRect">
             <a:avLst/>
@@ -4631,6 +4594,7 @@
                 <a:solidFill>
                   <a:srgbClr val="1D4ED8"/>
                 </a:solidFill>
+                <a:latin typeface="Arial"/>
               </a:defRPr>
             </a:pPr>
             <a:r>
@@ -4647,7 +4611,7 @@
         </p:nvSpPr>
         <p:spPr>
           <a:xfrm>
-            <a:off x="731520" y="658368"/>
+            <a:off x="731520" y="621792"/>
             <a:ext cx="10698480" cy="548640"/>
           </a:xfrm>
           <a:prstGeom prst="rect">
@@ -4666,10 +4630,11 @@
                 <a:solidFill>
                   <a:srgbClr val="0F172A"/>
                 </a:solidFill>
-              </a:defRPr>
-            </a:pPr>
-            <a:r>
-              <a:t>2.5. Stored XSS: Minh Chứng Dữ Liệu CSDL &amp; Bảo Vệ Cookie</a:t>
+                <a:latin typeface="Arial"/>
+              </a:defRPr>
+            </a:pPr>
+            <a:r>
+              <a:t>2.6. Stored XSS: Bộ Giải Pháp Phòng Thủ Chuẩn Trong ASP.NET Core</a:t>
             </a:r>
           </a:p>
         </p:txBody>
@@ -4682,7 +4647,7 @@
         </p:nvSpPr>
         <p:spPr>
           <a:xfrm>
-            <a:off x="731520" y="6492240"/>
+            <a:off x="731520" y="6537960"/>
             <a:ext cx="10698480" cy="274320"/>
           </a:xfrm>
           <a:prstGeom prst="rect">
@@ -4691,7 +4656,7 @@
           <a:noFill/>
         </p:spPr>
         <p:txBody>
-          <a:bodyPr wrap="none">
+          <a:bodyPr wrap="none" lIns="0" rIns="0" tIns="0" bIns="0">
             <a:spAutoFit/>
           </a:bodyPr>
           <a:lstStyle/>
@@ -4701,6 +4666,7 @@
                 <a:solidFill>
                   <a:srgbClr val="64748B"/>
                 </a:solidFill>
+                <a:latin typeface="Arial"/>
               </a:defRPr>
             </a:pPr>
             <a:r>
@@ -4717,18 +4683,18 @@
         </p:nvSpPr>
         <p:spPr>
           <a:xfrm>
-            <a:off x="731520" y="1280160"/>
-            <a:ext cx="5166360" cy="4846320"/>
+            <a:off x="731520" y="1234440"/>
+            <a:ext cx="10728655" cy="4937760"/>
           </a:xfrm>
           <a:prstGeom prst="roundRect">
             <a:avLst/>
           </a:prstGeom>
           <a:solidFill>
-            <a:srgbClr val="F8FAFC"/>
+            <a:srgbClr val="ECFDF5"/>
           </a:solidFill>
           <a:ln>
             <a:solidFill>
-              <a:srgbClr val="E2E8F0"/>
+              <a:srgbClr val="A7F3D0"/>
             </a:solidFill>
           </a:ln>
         </p:spPr>
@@ -4747,51 +4713,19 @@
           </a:fontRef>
         </p:style>
         <p:txBody>
-          <a:bodyPr rtlCol="0" anchor="ctr" wrap="square"/>
+          <a:bodyPr rtlCol="0" anchor="ctr"/>
           <a:lstStyle/>
           <a:p>
             <a:pPr algn="ctr">
-              <a:defRPr sz="1400" b="1">
-                <a:solidFill>
-                  <a:srgbClr val="1D4ED8"/>
-                </a:solidFill>
-              </a:defRPr>
-            </a:pPr>
-            <a:r>
-              <a:t>Dữ Liệu Lưu Trong Bảng dbo.Comments</a:t>
-            </a:r>
-          </a:p>
-          <a:p>
-            <a:pPr>
-              <a:spcBef>
-                <a:spcPts val="600"/>
-              </a:spcBef>
-              <a:defRPr sz="950">
-                <a:solidFill>
-                  <a:srgbClr val="0F172A"/>
-                </a:solidFill>
-                <a:latin typeface="Courier New"/>
-              </a:defRPr>
-            </a:pPr>
-            <a:r>
-              <a:t>SELECT Id, Author, Content, IsSecureStored FROM dbo.Comments;</a:t>
-            </a:r>
-            <a:br/>
-            <a:br/>
-            <a:r>
-              <a:t>Id | Author        | Content                           | IsSecure</a:t>
-            </a:r>
-            <a:br/>
-            <a:r>
-              <a:t>---+---------------+-----------------------------------+---------</a:t>
-            </a:r>
-            <a:br/>
-            <a:r>
-              <a:t> 1 | Le Thanh Binh | Dich vu tu van rat chuyen nghiep! | 1</a:t>
-            </a:r>
-            <a:br/>
-            <a:r>
-              <a:t> 2 | Hacker_XSS    | &lt;script&gt;alert(document.cookie);.. | 0</a:t>
+              <a:defRPr sz="1500" b="1">
+                <a:solidFill>
+                  <a:srgbClr val="047857"/>
+                </a:solidFill>
+                <a:latin typeface="Arial"/>
+              </a:defRPr>
+            </a:pPr>
+            <a:r>
+              <a:t>CÁC NGUYÊN TẮC PHÒNG THỦ XSS THEO KHUYẾN NGHỊ OWASP:</a:t>
             </a:r>
           </a:p>
           <a:p>
@@ -4799,112 +4733,19 @@
               <a:spcBef>
                 <a:spcPts val="800"/>
               </a:spcBef>
-              <a:defRPr sz="1150">
+              <a:defRPr sz="1300" b="0">
                 <a:solidFill>
                   <a:srgbClr val="334155"/>
                 </a:solidFill>
-              </a:defRPr>
-            </a:pPr>
-            <a:r>
-              <a:t>Phân tích đặc tính lưu trữ:</a:t>
-            </a:r>
-            <a:br/>
-            <a:r>
-              <a:t>Mã kịch bản độc hại được lưu trữ trực tiếp trong CSDL. Do đó, lỗ hổng Stored XSS có tính chất nguy hại kéo dài và phát tán tới mọi người dùng xem nội dung đó.</a:t>
-            </a:r>
-          </a:p>
-        </p:txBody>
-      </p:sp>
-      <p:sp>
-        <p:nvSpPr>
-          <p:cNvPr id="7" name="Rounded Rectangle 6"/>
-          <p:cNvSpPr/>
-          <p:nvPr/>
-        </p:nvSpPr>
-        <p:spPr>
-          <a:xfrm>
-            <a:off x="6263640" y="1280160"/>
-            <a:ext cx="5166360" cy="4846320"/>
-          </a:xfrm>
-          <a:prstGeom prst="roundRect">
-            <a:avLst/>
-          </a:prstGeom>
-          <a:solidFill>
-            <a:srgbClr val="F8FAFC"/>
-          </a:solidFill>
-          <a:ln>
-            <a:solidFill>
-              <a:srgbClr val="E2E8F0"/>
-            </a:solidFill>
-          </a:ln>
-        </p:spPr>
-        <p:style>
-          <a:lnRef idx="1">
-            <a:schemeClr val="accent1"/>
-          </a:lnRef>
-          <a:fillRef idx="3">
-            <a:schemeClr val="accent1"/>
-          </a:fillRef>
-          <a:effectRef idx="2">
-            <a:schemeClr val="accent1"/>
-          </a:effectRef>
-          <a:fontRef idx="minor">
-            <a:schemeClr val="lt1"/>
-          </a:fontRef>
-        </p:style>
-        <p:txBody>
-          <a:bodyPr rtlCol="0" anchor="ctr" wrap="square"/>
-          <a:lstStyle/>
-          <a:p>
-            <a:pPr algn="ctr">
-              <a:defRPr sz="1400" b="1">
-                <a:solidFill>
-                  <a:srgbClr val="047857"/>
-                </a:solidFill>
-              </a:defRPr>
-            </a:pPr>
-            <a:r>
-              <a:t>Cơ Chế Bảo Vệ Với Cờ HttpOnly Cookie</a:t>
-            </a:r>
-          </a:p>
-          <a:p>
-            <a:pPr>
-              <a:spcBef>
-                <a:spcPts val="600"/>
-              </a:spcBef>
-              <a:defRPr sz="950">
-                <a:solidFill>
-                  <a:srgbClr val="065F46"/>
-                </a:solidFill>
-                <a:latin typeface="Courier New"/>
-              </a:defRPr>
-            </a:pPr>
-            <a:r>
-              <a:t>// CẤU HÌNH COOKIE AN TOÀN TRONG ASP.NET CORE:</a:t>
-            </a:r>
-            <a:br/>
-            <a:r>
-              <a:t>Response.Cookies.Append("AuthSessionToken", token, new CookieOptions</a:t>
-            </a:r>
-            <a:br/>
-            <a:r>
-              <a:t>{</a:t>
-            </a:r>
-            <a:br/>
-            <a:r>
-              <a:t>    HttpOnly = true, // CẤM JAVASCRIPT ĐỌC TRỘM</a:t>
-            </a:r>
-            <a:br/>
-            <a:r>
-              <a:t>    Secure = true,   // BẮT BUỘC TRUYỀN QUA HTTPS</a:t>
-            </a:r>
-            <a:br/>
-            <a:r>
-              <a:t>    SameSite = SameSiteMode.Strict</a:t>
-            </a:r>
-            <a:br/>
-            <a:r>
-              <a:t>});</a:t>
+                <a:latin typeface="Arial"/>
+              </a:defRPr>
+            </a:pPr>
+            <a:r>
+              <a:t>1. Tận dụng cơ chế mã hóa tự động của Razor View:</a:t>
+            </a:r>
+            <a:br/>
+            <a:r>
+              <a:t>   Sử dụng cú pháp mặc định @model.Property thay vì @Html.Raw() đối với mọi dữ liệu bắt nguồn từ người dùng. Các ký tự nhạy cảm (&lt;, &gt;, ", ') tự động được chuyển đổi sang thực thể HTML an toàn.</a:t>
             </a:r>
           </a:p>
           <a:p>
@@ -4912,18 +4753,59 @@
               <a:spcBef>
                 <a:spcPts val="800"/>
               </a:spcBef>
-              <a:defRPr sz="1150">
+              <a:defRPr sz="1300" b="0">
                 <a:solidFill>
                   <a:srgbClr val="334155"/>
                 </a:solidFill>
-              </a:defRPr>
-            </a:pPr>
-            <a:r>
-              <a:t>Vai trò của cờ HttpOnly:</a:t>
-            </a:r>
-            <a:br/>
-            <a:r>
-              <a:t>Ngăn chặn mã JavaScript đọc thuộc tính document.cookie. Kể cả khi trang web xuất hiện lỗi XSS, kẻ tấn công cũng không thể trích xuất token phiên làm việc.</a:t>
+                <a:latin typeface="Arial"/>
+              </a:defRPr>
+            </a:pPr>
+            <a:r>
+              <a:t>2. Mã hóa dữ liệu với System.Text.Encodings.Web:</a:t>
+            </a:r>
+            <a:br/>
+            <a:r>
+              <a:t>   Sử dụng HtmlEncoder.Default.Encode() để xử lý dữ liệu trước khi lưu trữ hoặc phản hồi.</a:t>
+            </a:r>
+          </a:p>
+          <a:p>
+            <a:pPr>
+              <a:spcBef>
+                <a:spcPts val="800"/>
+              </a:spcBef>
+              <a:defRPr sz="1300" b="0">
+                <a:solidFill>
+                  <a:srgbClr val="334155"/>
+                </a:solidFill>
+                <a:latin typeface="Arial"/>
+              </a:defRPr>
+            </a:pPr>
+            <a:r>
+              <a:t>3. Thiết lập thuộc tính an toàn cho Cookie:</a:t>
+            </a:r>
+            <a:br/>
+            <a:r>
+              <a:t>   Kích hoạt HttpOnly = true và Secure = true để bảo vệ token phiên làm việc khỏi sự can thiệp của mã kịch bản phía client.</a:t>
+            </a:r>
+          </a:p>
+          <a:p>
+            <a:pPr>
+              <a:spcBef>
+                <a:spcPts val="800"/>
+              </a:spcBef>
+              <a:defRPr sz="1300" b="0">
+                <a:solidFill>
+                  <a:srgbClr val="334155"/>
+                </a:solidFill>
+                <a:latin typeface="Arial"/>
+              </a:defRPr>
+            </a:pPr>
+            <a:r>
+              <a:t>4. Triển khai Content Security Policy (CSP Header):</a:t>
+            </a:r>
+            <a:br/>
+            <a:r>
+              <a:t>   Cấu hình chính sách bảo mật nội dung để hạn chế phạm vi thực thi kịch bản và chặn các nguồn tài nguyên không tin cậy.</a:t>
             </a:r>
           </a:p>
         </p:txBody>
@@ -4997,8 +4879,8 @@
         </p:nvSpPr>
         <p:spPr>
           <a:xfrm>
-            <a:off x="731520" y="292608"/>
-            <a:ext cx="4389120" cy="347472"/>
+            <a:off x="731520" y="256032"/>
+            <a:ext cx="4389120" cy="329184"/>
           </a:xfrm>
           <a:prstGeom prst="roundRect">
             <a:avLst/>
@@ -5035,10 +4917,11 @@
                 <a:solidFill>
                   <a:srgbClr val="1D4ED8"/>
                 </a:solidFill>
-              </a:defRPr>
-            </a:pPr>
-            <a:r>
-              <a:t>CHỦ ĐỀ 2 • NGUYỄN THANH BÌNH (23A1001D0041)</a:t>
+                <a:latin typeface="Arial"/>
+              </a:defRPr>
+            </a:pPr>
+            <a:r>
+              <a:t>CHỦ ĐỀ 3 • NGUYỄN MINH CƯỜNG (23A1001D0058)</a:t>
             </a:r>
           </a:p>
         </p:txBody>
@@ -5051,7 +4934,7 @@
         </p:nvSpPr>
         <p:spPr>
           <a:xfrm>
-            <a:off x="731520" y="658368"/>
+            <a:off x="731520" y="621792"/>
             <a:ext cx="10698480" cy="548640"/>
           </a:xfrm>
           <a:prstGeom prst="rect">
@@ -5070,10 +4953,11 @@
                 <a:solidFill>
                   <a:srgbClr val="0F172A"/>
                 </a:solidFill>
-              </a:defRPr>
-            </a:pPr>
-            <a:r>
-              <a:t>2.6. Stored XSS: Bộ Giải Pháp Phòng Thủ Chuẩn Trong ASP.NET Core</a:t>
+                <a:latin typeface="Arial"/>
+              </a:defRPr>
+            </a:pPr>
+            <a:r>
+              <a:t>3.1. CSRF Attack: Bản Chất Kỹ Thuật &amp; Điều Kiện Tấn Công</a:t>
             </a:r>
           </a:p>
         </p:txBody>
@@ -5086,7 +4970,7 @@
         </p:nvSpPr>
         <p:spPr>
           <a:xfrm>
-            <a:off x="731520" y="6492240"/>
+            <a:off x="731520" y="6537960"/>
             <a:ext cx="10698480" cy="274320"/>
           </a:xfrm>
           <a:prstGeom prst="rect">
@@ -5095,7 +4979,7 @@
           <a:noFill/>
         </p:spPr>
         <p:txBody>
-          <a:bodyPr wrap="none">
+          <a:bodyPr wrap="none" lIns="0" rIns="0" tIns="0" bIns="0">
             <a:spAutoFit/>
           </a:bodyPr>
           <a:lstStyle/>
@@ -5105,6 +4989,7 @@
                 <a:solidFill>
                   <a:srgbClr val="64748B"/>
                 </a:solidFill>
+                <a:latin typeface="Arial"/>
               </a:defRPr>
             </a:pPr>
             <a:r>
@@ -5121,18 +5006,18 @@
         </p:nvSpPr>
         <p:spPr>
           <a:xfrm>
-            <a:off x="731520" y="1280160"/>
-            <a:ext cx="10728655" cy="4846320"/>
+            <a:off x="731520" y="1234440"/>
+            <a:ext cx="5166360" cy="4937760"/>
           </a:xfrm>
           <a:prstGeom prst="roundRect">
             <a:avLst/>
           </a:prstGeom>
           <a:solidFill>
-            <a:srgbClr val="ECFDF5"/>
+            <a:srgbClr val="F8FAFC"/>
           </a:solidFill>
           <a:ln>
             <a:solidFill>
-              <a:srgbClr val="A7F3D0"/>
+              <a:srgbClr val="E2E8F0"/>
             </a:solidFill>
           </a:ln>
         </p:spPr>
@@ -5151,18 +5036,19 @@
           </a:fontRef>
         </p:style>
         <p:txBody>
-          <a:bodyPr rtlCol="0" anchor="ctr" wrap="square"/>
+          <a:bodyPr rtlCol="0" anchor="ctr"/>
           <a:lstStyle/>
           <a:p>
             <a:pPr algn="ctr">
               <a:defRPr sz="1500" b="1">
                 <a:solidFill>
-                  <a:srgbClr val="047857"/>
-                </a:solidFill>
-              </a:defRPr>
-            </a:pPr>
-            <a:r>
-              <a:t>CÁC NGUYÊN TẮC PHÒNG THỦ XSS THEO KHUYẾN NGHỊ OWASP:</a:t>
+                  <a:srgbClr val="BE123C"/>
+                </a:solidFill>
+                <a:latin typeface="Arial"/>
+              </a:defRPr>
+            </a:pPr>
+            <a:r>
+              <a:t>Bản Chất Kỹ Thuật Của Tấn Công CSRF</a:t>
             </a:r>
           </a:p>
           <a:p>
@@ -5170,18 +5056,90 @@
               <a:spcBef>
                 <a:spcPts val="800"/>
               </a:spcBef>
-              <a:defRPr sz="1300">
+              <a:defRPr sz="1250" b="0">
                 <a:solidFill>
                   <a:srgbClr val="334155"/>
                 </a:solidFill>
-              </a:defRPr>
-            </a:pPr>
-            <a:r>
-              <a:t>1. Tận dụng cơ chế mã hóa tự động của Razor View:</a:t>
-            </a:r>
-            <a:br/>
-            <a:r>
-              <a:t>   Sử dụng cú pháp mặc định @model.Property thay vì @Html.Raw() đối với mọi dữ liệu bắt nguồn từ người dùng. Các ký tự nhạy cảm (&lt;, &gt;, ", ') tự động được chuyển đổi sang thực thể HTML an toàn.</a:t>
+                <a:latin typeface="Arial"/>
+              </a:defRPr>
+            </a:pPr>
+            <a:r>
+              <a:t>• CSRF (A01:2021 - Broken Access Control) là kỹ thuật tấn công mượn quyền người dùng hợp lệ.</a:t>
+            </a:r>
+            <a:br/>
+            <a:r>
+              <a:t>• Điều kiện tiên quyết:</a:t>
+            </a:r>
+            <a:br/>
+            <a:r>
+              <a:t>  1. Nạn nhân có phiên đăng nhập hợp lệ tại ứng dụng mục tiêu (Cookie xác thực còn hiệu lực).</a:t>
+            </a:r>
+            <a:br/>
+            <a:r>
+              <a:t>  2. Trình duyệt tự động đính kèm Cookie xác thực theo mọi HTTP Request gửi tới tên miền của ứng dụng.</a:t>
+            </a:r>
+            <a:br/>
+            <a:r>
+              <a:t>  3. Kẻ tấn công lừa nạn nhân truy cập một trang web độc hại do kẻ tấn công kiểm soát.</a:t>
+            </a:r>
+            <a:br/>
+            <a:r>
+              <a:t>• Điểm mù kiểm soát: Máy chủ chỉ xác thực Cookie của người dùng mà không kiểm tra nguồn gốc phát sinh Request.</a:t>
+            </a:r>
+          </a:p>
+        </p:txBody>
+      </p:sp>
+      <p:sp>
+        <p:nvSpPr>
+          <p:cNvPr id="7" name="Rounded Rectangle 6"/>
+          <p:cNvSpPr/>
+          <p:nvPr/>
+        </p:nvSpPr>
+        <p:spPr>
+          <a:xfrm>
+            <a:off x="6263640" y="1234440"/>
+            <a:ext cx="5166360" cy="4937760"/>
+          </a:xfrm>
+          <a:prstGeom prst="roundRect">
+            <a:avLst/>
+          </a:prstGeom>
+          <a:solidFill>
+            <a:srgbClr val="FFF1F2"/>
+          </a:solidFill>
+          <a:ln>
+            <a:solidFill>
+              <a:srgbClr val="FECDD3"/>
+            </a:solidFill>
+          </a:ln>
+        </p:spPr>
+        <p:style>
+          <a:lnRef idx="1">
+            <a:schemeClr val="accent1"/>
+          </a:lnRef>
+          <a:fillRef idx="3">
+            <a:schemeClr val="accent1"/>
+          </a:fillRef>
+          <a:effectRef idx="2">
+            <a:schemeClr val="accent1"/>
+          </a:effectRef>
+          <a:fontRef idx="minor">
+            <a:schemeClr val="lt1"/>
+          </a:fontRef>
+        </p:style>
+        <p:txBody>
+          <a:bodyPr rtlCol="0" anchor="ctr"/>
+          <a:lstStyle/>
+          <a:p>
+            <a:pPr algn="ctr">
+              <a:defRPr sz="1500" b="1">
+                <a:solidFill>
+                  <a:srgbClr val="BE123C"/>
+                </a:solidFill>
+                <a:latin typeface="Arial"/>
+              </a:defRPr>
+            </a:pPr>
+            <a:r>
+              <a:t>Action Xử Lý Giao Dịch Thiếu Kiểm Soát</a:t>
             </a:r>
           </a:p>
           <a:p>
@@ -5189,56 +5147,75 @@
               <a:spcBef>
                 <a:spcPts val="800"/>
               </a:spcBef>
-              <a:defRPr sz="1300">
-                <a:solidFill>
-                  <a:srgbClr val="334155"/>
-                </a:solidFill>
-              </a:defRPr>
-            </a:pPr>
-            <a:r>
-              <a:t>2. Mã hóa dữ liệu với System.Text.Encodings.Web:</a:t>
-            </a:r>
-            <a:br/>
-            <a:r>
-              <a:t>   Sử dụng HtmlEncoder.Default.Encode() để xử lý dữ liệu trước khi lưu trữ hoặc phản hồi.</a:t>
+              <a:defRPr sz="1000" b="0">
+                <a:solidFill>
+                  <a:srgbClr val="9F1239"/>
+                </a:solidFill>
+                <a:latin typeface="Courier New"/>
+              </a:defRPr>
+            </a:pPr>
+            <a:r>
+              <a:t>// ACTION NHẬN YÊU CẦU KHÔNG CÓ BẢO VỆ TOKEN:</a:t>
+            </a:r>
+            <a:br/>
+            <a:r>
+              <a:t>[HttpPost]</a:t>
+            </a:r>
+            <a:br/>
+            <a:r>
+              <a:t>public IActionResult TransferVulnerable(decimal amount)</a:t>
+            </a:r>
+            <a:br/>
+            <a:r>
+              <a:t>{</a:t>
+            </a:r>
+            <a:br/>
+            <a:r>
+              <a:t>    var victim = _context.Wallets.Find(1);</a:t>
+            </a:r>
+            <a:br/>
+            <a:r>
+              <a:t>    var hacker = _context.Wallets.Find(2);</a:t>
+            </a:r>
+            <a:br/>
+            <a:r>
+              <a:t>    </a:t>
+            </a:r>
+            <a:br/>
+            <a:r>
+              <a:t>    victim.Balance -= amount;</a:t>
+            </a:r>
+            <a:br/>
+            <a:r>
+              <a:t>    hacker.Balance += amount;</a:t>
+            </a:r>
+            <a:br/>
+            <a:r>
+              <a:t>    _context.SaveChanges();</a:t>
+            </a:r>
+            <a:br/>
+            <a:r>
+              <a:t>    return RedirectToAction("Index");</a:t>
+            </a:r>
+            <a:br/>
+            <a:r>
+              <a:t>}</a:t>
             </a:r>
           </a:p>
           <a:p>
             <a:pPr>
               <a:spcBef>
-                <a:spcPts val="800"/>
+                <a:spcPts val="1000"/>
               </a:spcBef>
-              <a:defRPr sz="1300">
-                <a:solidFill>
-                  <a:srgbClr val="334155"/>
-                </a:solidFill>
-              </a:defRPr>
-            </a:pPr>
-            <a:r>
-              <a:t>3. Thiết lập thuộc tính an toàn cho Cookie:</a:t>
-            </a:r>
-            <a:br/>
-            <a:r>
-              <a:t>   Kích hoạt HttpOnly = true và Secure = true để bảo vệ token phiên làm việc khỏi sự can thiệp của mã kịch bản phía client.</a:t>
-            </a:r>
-          </a:p>
-          <a:p>
-            <a:pPr>
-              <a:spcBef>
-                <a:spcPts val="800"/>
-              </a:spcBef>
-              <a:defRPr sz="1300">
-                <a:solidFill>
-                  <a:srgbClr val="334155"/>
-                </a:solidFill>
-              </a:defRPr>
-            </a:pPr>
-            <a:r>
-              <a:t>4. Triển khai Content Security Policy (CSP Header):</a:t>
-            </a:r>
-            <a:br/>
-            <a:r>
-              <a:t>   Cấu hình chính sách bảo mật nội dung để hạn chế phạm vi thực thi kịch bản và chặn các nguồn tài nguyên không tin cậy.</a:t>
+              <a:defRPr sz="1200" b="1">
+                <a:solidFill>
+                  <a:srgbClr val="0F172A"/>
+                </a:solidFill>
+                <a:latin typeface="Arial"/>
+              </a:defRPr>
+            </a:pPr>
+            <a:r>
+              <a:t>Khi Action không yêu cầu mã xác thực chống giả mạo, các yêu cầu POST bắt nguồn từ một website khác vẫn được máy chủ thực thi bình thường do Cookie xác thực được đính kèm tự động.</a:t>
             </a:r>
           </a:p>
         </p:txBody>
@@ -5312,8 +5289,8 @@
         </p:nvSpPr>
         <p:spPr>
           <a:xfrm>
-            <a:off x="731520" y="292608"/>
-            <a:ext cx="4389120" cy="347472"/>
+            <a:off x="731520" y="256032"/>
+            <a:ext cx="4389120" cy="329184"/>
           </a:xfrm>
           <a:prstGeom prst="roundRect">
             <a:avLst/>
@@ -5350,6 +5327,7 @@
                 <a:solidFill>
                   <a:srgbClr val="1D4ED8"/>
                 </a:solidFill>
+                <a:latin typeface="Arial"/>
               </a:defRPr>
             </a:pPr>
             <a:r>
@@ -5366,7 +5344,7 @@
         </p:nvSpPr>
         <p:spPr>
           <a:xfrm>
-            <a:off x="731520" y="658368"/>
+            <a:off x="731520" y="621792"/>
             <a:ext cx="10698480" cy="548640"/>
           </a:xfrm>
           <a:prstGeom prst="rect">
@@ -5385,10 +5363,11 @@
                 <a:solidFill>
                   <a:srgbClr val="0F172A"/>
                 </a:solidFill>
-              </a:defRPr>
-            </a:pPr>
-            <a:r>
-              <a:t>3.1. CSRF Attack: Bản Chất Kỹ Thuật &amp; Cơ Chế Giả Mạo Request</a:t>
+                <a:latin typeface="Arial"/>
+              </a:defRPr>
+            </a:pPr>
+            <a:r>
+              <a:t>3.2. CSRF Attack: Kịch Bản Khai Thác Bằng Biểu Mẫu Ẩn</a:t>
             </a:r>
           </a:p>
         </p:txBody>
@@ -5401,7 +5380,7 @@
         </p:nvSpPr>
         <p:spPr>
           <a:xfrm>
-            <a:off x="731520" y="6492240"/>
+            <a:off x="731520" y="6537960"/>
             <a:ext cx="10698480" cy="274320"/>
           </a:xfrm>
           <a:prstGeom prst="rect">
@@ -5410,7 +5389,7 @@
           <a:noFill/>
         </p:spPr>
         <p:txBody>
-          <a:bodyPr wrap="none">
+          <a:bodyPr wrap="none" lIns="0" rIns="0" tIns="0" bIns="0">
             <a:spAutoFit/>
           </a:bodyPr>
           <a:lstStyle/>
@@ -5420,6 +5399,7 @@
                 <a:solidFill>
                   <a:srgbClr val="64748B"/>
                 </a:solidFill>
+                <a:latin typeface="Arial"/>
               </a:defRPr>
             </a:pPr>
             <a:r>
@@ -5436,97 +5416,8 @@
         </p:nvSpPr>
         <p:spPr>
           <a:xfrm>
-            <a:off x="731520" y="1280160"/>
-            <a:ext cx="5166360" cy="4846320"/>
-          </a:xfrm>
-          <a:prstGeom prst="roundRect">
-            <a:avLst/>
-          </a:prstGeom>
-          <a:solidFill>
-            <a:srgbClr val="F8FAFC"/>
-          </a:solidFill>
-          <a:ln>
-            <a:solidFill>
-              <a:srgbClr val="E2E8F0"/>
-            </a:solidFill>
-          </a:ln>
-        </p:spPr>
-        <p:style>
-          <a:lnRef idx="1">
-            <a:schemeClr val="accent1"/>
-          </a:lnRef>
-          <a:fillRef idx="3">
-            <a:schemeClr val="accent1"/>
-          </a:fillRef>
-          <a:effectRef idx="2">
-            <a:schemeClr val="accent1"/>
-          </a:effectRef>
-          <a:fontRef idx="minor">
-            <a:schemeClr val="lt1"/>
-          </a:fontRef>
-        </p:style>
-        <p:txBody>
-          <a:bodyPr rtlCol="0" anchor="ctr" wrap="square"/>
-          <a:lstStyle/>
-          <a:p>
-            <a:pPr algn="ctr">
-              <a:defRPr sz="1500" b="1">
-                <a:solidFill>
-                  <a:srgbClr val="BE123C"/>
-                </a:solidFill>
-              </a:defRPr>
-            </a:pPr>
-            <a:r>
-              <a:t>Bản Chất Kỹ Thuật Của Tấn Công CSRF</a:t>
-            </a:r>
-          </a:p>
-          <a:p>
-            <a:pPr>
-              <a:spcBef>
-                <a:spcPts val="800"/>
-              </a:spcBef>
-              <a:defRPr sz="1250">
-                <a:solidFill>
-                  <a:srgbClr val="334155"/>
-                </a:solidFill>
-              </a:defRPr>
-            </a:pPr>
-            <a:r>
-              <a:t>• CSRF (A01:2021 - Broken Access Control) là kỹ thuật tấn công mượn quyền người dùng hợp lệ.</a:t>
-            </a:r>
-            <a:br/>
-            <a:r>
-              <a:t>• Điều kiện tiên quyết:</a:t>
-            </a:r>
-            <a:br/>
-            <a:r>
-              <a:t>  1. Nạn nhân có phiên đăng nhập hợp lệ tại ứng dụng mục tiêu (Cookie xác thực còn hiệu lực).</a:t>
-            </a:r>
-            <a:br/>
-            <a:r>
-              <a:t>  2. Trình duyệt tự động đính kèm Cookie xác thực theo mọi HTTP Request gửi tới tên miền của ứng dụng.</a:t>
-            </a:r>
-            <a:br/>
-            <a:r>
-              <a:t>  3. Kẻ tấn công lừa nạn nhân truy cập một trang web độc hại do kẻ tấn công kiểm soát.</a:t>
-            </a:r>
-            <a:br/>
-            <a:r>
-              <a:t>• Điểm mù kiểm soát: Máy chủ chỉ xác thực Cookie của người dùng mà không kiểm tra nguồn gốc phát sinh Request.</a:t>
-            </a:r>
-          </a:p>
-        </p:txBody>
-      </p:sp>
-      <p:sp>
-        <p:nvSpPr>
-          <p:cNvPr id="7" name="Rounded Rectangle 6"/>
-          <p:cNvSpPr/>
-          <p:nvPr/>
-        </p:nvSpPr>
-        <p:spPr>
-          <a:xfrm>
-            <a:off x="6263640" y="1280160"/>
-            <a:ext cx="5166360" cy="4846320"/>
+            <a:off x="731520" y="1234440"/>
+            <a:ext cx="10728655" cy="4937760"/>
           </a:xfrm>
           <a:prstGeom prst="roundRect">
             <a:avLst/>
@@ -5555,18 +5446,19 @@
           </a:fontRef>
         </p:style>
         <p:txBody>
-          <a:bodyPr rtlCol="0" anchor="ctr" wrap="square"/>
+          <a:bodyPr rtlCol="0" anchor="ctr"/>
           <a:lstStyle/>
           <a:p>
             <a:pPr algn="ctr">
-              <a:defRPr sz="1500" b="1">
+              <a:defRPr sz="1600" b="1">
                 <a:solidFill>
                   <a:srgbClr val="BE123C"/>
                 </a:solidFill>
-              </a:defRPr>
-            </a:pPr>
-            <a:r>
-              <a:t>Action Xử Lý Giao Dịch Thiếu Kiểm Soát</a:t>
+                <a:latin typeface="Arial"/>
+              </a:defRPr>
+            </a:pPr>
+            <a:r>
+              <a:t>Kịch Bản: Trang Web Giả Mạo Điều Khiển Yêu Cầu Chuyển Tiền</a:t>
             </a:r>
           </a:p>
           <a:p>
@@ -5574,74 +5466,71 @@
               <a:spcBef>
                 <a:spcPts val="800"/>
               </a:spcBef>
-              <a:defRPr sz="1000">
-                <a:solidFill>
-                  <a:srgbClr val="9F1239"/>
-                </a:solidFill>
-                <a:latin typeface="Courier New"/>
-              </a:defRPr>
-            </a:pPr>
-            <a:r>
-              <a:t>// ACTION NHẬN YÊU CẦU KHÔNG CÓ BẢO VỆ TOKEN:</a:t>
-            </a:r>
-            <a:br/>
-            <a:r>
-              <a:t>[HttpPost]</a:t>
-            </a:r>
-            <a:br/>
-            <a:r>
-              <a:t>public IActionResult TransferVulnerable(decimal amount)</a:t>
-            </a:r>
-            <a:br/>
-            <a:r>
-              <a:t>{</a:t>
-            </a:r>
-            <a:br/>
-            <a:r>
-              <a:t>    var victim = _context.Wallets.Find(1);</a:t>
-            </a:r>
-            <a:br/>
-            <a:r>
-              <a:t>    var hacker = _context.Wallets.Find(2);</a:t>
-            </a:r>
-            <a:br/>
-            <a:r>
-              <a:t>    </a:t>
-            </a:r>
-            <a:br/>
-            <a:r>
-              <a:t>    victim.Balance -= amount;</a:t>
-            </a:r>
-            <a:br/>
-            <a:r>
-              <a:t>    hacker.Balance += amount;</a:t>
-            </a:r>
-            <a:br/>
-            <a:r>
-              <a:t>    _context.SaveChanges();</a:t>
-            </a:r>
-            <a:br/>
-            <a:r>
-              <a:t>    return RedirectToAction("Index");</a:t>
-            </a:r>
-            <a:br/>
-            <a:r>
-              <a:t>}</a:t>
+              <a:defRPr sz="1300" b="0">
+                <a:solidFill>
+                  <a:srgbClr val="334155"/>
+                </a:solidFill>
+                <a:latin typeface="Arial"/>
+              </a:defRPr>
+            </a:pPr>
+            <a:r>
+              <a:t>1. Nạn nhân có phiên làm việc đang hoạt động trên hệ thống tư vấn trực tuyến.</a:t>
+            </a:r>
+            <a:br/>
+            <a:r>
+              <a:t>2. Nạn nhân được dẫn dụ truy cập một trang web độc hại ở một tab khác (AttackerSite.cshtml).</a:t>
+            </a:r>
+            <a:br/>
+            <a:r>
+              <a:t>3. Trang web độc hại chứa một biểu mẫu ẩn trỏ trực tiếp tới địa chỉ nhận lệnh của ứng dụng mục tiêu:</a:t>
             </a:r>
           </a:p>
           <a:p>
             <a:pPr>
               <a:spcBef>
-                <a:spcPts val="1000"/>
+                <a:spcPts val="600"/>
               </a:spcBef>
-              <a:defRPr sz="1200">
-                <a:solidFill>
-                  <a:srgbClr val="0F172A"/>
-                </a:solidFill>
-              </a:defRPr>
-            </a:pPr>
-            <a:r>
-              <a:t>Khi Action không yêu cầu mã xác thực chống giả mạo, các yêu cầu POST bắt nguồn từ một website khác vẫn được máy chủ thực thi bình thường do Cookie xác thực được đính kèm tự động.</a:t>
+              <a:defRPr sz="1100" b="1">
+                <a:solidFill>
+                  <a:srgbClr val="9F1239"/>
+                </a:solidFill>
+                <a:latin typeface="Courier New"/>
+              </a:defRPr>
+            </a:pPr>
+            <a:r>
+              <a:t>&lt;!-- BIỂU MẪU ẨN TRÊN TRANG WEB CỦA KẺ TẤN CÔNG --&gt;</a:t>
+            </a:r>
+            <a:br/>
+            <a:r>
+              <a:t>&lt;form id="exploit" action="http://localhost:5076/Csrf/TransferVulnerable" method="POST"&gt;</a:t>
+            </a:r>
+            <a:br/>
+            <a:r>
+              <a:t>    &lt;input type="hidden" name="amount" value="20000000" /&gt;</a:t>
+            </a:r>
+            <a:br/>
+            <a:r>
+              <a:t>&lt;/form&gt;</a:t>
+            </a:r>
+            <a:br/>
+            <a:r>
+              <a:t>&lt;script&gt;document.getElementById('exploit').submit();&lt;/script&gt;</a:t>
+            </a:r>
+          </a:p>
+          <a:p>
+            <a:pPr>
+              <a:spcBef>
+                <a:spcPts val="800"/>
+              </a:spcBef>
+              <a:defRPr sz="1300" b="1">
+                <a:solidFill>
+                  <a:srgbClr val="BE123C"/>
+                </a:solidFill>
+                <a:latin typeface="Arial"/>
+              </a:defRPr>
+            </a:pPr>
+            <a:r>
+              <a:t>Hậu quả thực tế: Yêu cầu giao dịch được thực hiện mà không có sự đồng thuận chủ động của người dùng, dẫn đến thay đổi số dư hoặc cấu hình tài khoản.</a:t>
             </a:r>
           </a:p>
         </p:txBody>
@@ -5715,8 +5604,8 @@
         </p:nvSpPr>
         <p:spPr>
           <a:xfrm>
-            <a:off x="731520" y="292608"/>
-            <a:ext cx="4389120" cy="347472"/>
+            <a:off x="731520" y="256032"/>
+            <a:ext cx="4389120" cy="329184"/>
           </a:xfrm>
           <a:prstGeom prst="roundRect">
             <a:avLst/>
@@ -5753,6 +5642,7 @@
                 <a:solidFill>
                   <a:srgbClr val="1D4ED8"/>
                 </a:solidFill>
+                <a:latin typeface="Arial"/>
               </a:defRPr>
             </a:pPr>
             <a:r>
@@ -5769,7 +5659,7 @@
         </p:nvSpPr>
         <p:spPr>
           <a:xfrm>
-            <a:off x="731520" y="658368"/>
+            <a:off x="731520" y="621792"/>
             <a:ext cx="10698480" cy="548640"/>
           </a:xfrm>
           <a:prstGeom prst="rect">
@@ -5788,10 +5678,11 @@
                 <a:solidFill>
                   <a:srgbClr val="0F172A"/>
                 </a:solidFill>
-              </a:defRPr>
-            </a:pPr>
-            <a:r>
-              <a:t>3.2. CSRF Attack: Kịch Bản Khai Thác Bằng Form Ẩn</a:t>
+                <a:latin typeface="Arial"/>
+              </a:defRPr>
+            </a:pPr>
+            <a:r>
+              <a:t>3.3. CSRF Attack: Minh Chứng Thực Nghiệm Trực Quan Trên Web UI</a:t>
             </a:r>
           </a:p>
         </p:txBody>
@@ -5804,7 +5695,7 @@
         </p:nvSpPr>
         <p:spPr>
           <a:xfrm>
-            <a:off x="731520" y="6492240"/>
+            <a:off x="731520" y="6537960"/>
             <a:ext cx="10698480" cy="274320"/>
           </a:xfrm>
           <a:prstGeom prst="rect">
@@ -5813,7 +5704,7 @@
           <a:noFill/>
         </p:spPr>
         <p:txBody>
-          <a:bodyPr wrap="none">
+          <a:bodyPr wrap="none" lIns="0" rIns="0" tIns="0" bIns="0">
             <a:spAutoFit/>
           </a:bodyPr>
           <a:lstStyle/>
@@ -5823,6 +5714,7 @@
                 <a:solidFill>
                   <a:srgbClr val="64748B"/>
                 </a:solidFill>
+                <a:latin typeface="Arial"/>
               </a:defRPr>
             </a:pPr>
             <a:r>
@@ -5831,126 +5723,62 @@
           </a:p>
         </p:txBody>
       </p:sp>
-      <p:sp>
-        <p:nvSpPr>
-          <p:cNvPr id="6" name="Rounded Rectangle 5"/>
-          <p:cNvSpPr/>
-          <p:nvPr/>
-        </p:nvSpPr>
-        <p:spPr>
-          <a:xfrm>
-            <a:off x="731520" y="1280160"/>
-            <a:ext cx="10728655" cy="4846320"/>
-          </a:xfrm>
-          <a:prstGeom prst="roundRect">
-            <a:avLst/>
-          </a:prstGeom>
-          <a:solidFill>
-            <a:srgbClr val="FFF1F2"/>
-          </a:solidFill>
-          <a:ln>
-            <a:solidFill>
-              <a:srgbClr val="FECDD3"/>
-            </a:solidFill>
-          </a:ln>
-        </p:spPr>
-        <p:style>
-          <a:lnRef idx="1">
-            <a:schemeClr val="accent1"/>
-          </a:lnRef>
-          <a:fillRef idx="3">
-            <a:schemeClr val="accent1"/>
-          </a:fillRef>
-          <a:effectRef idx="2">
-            <a:schemeClr val="accent1"/>
-          </a:effectRef>
-          <a:fontRef idx="minor">
-            <a:schemeClr val="lt1"/>
-          </a:fontRef>
-        </p:style>
-        <p:txBody>
-          <a:bodyPr rtlCol="0" anchor="ctr" wrap="square"/>
+      <p:pic>
+        <p:nvPicPr>
+          <p:cNvPr id="6" name="Picture 5" descr="final_csrf_proof.png"/>
+          <p:cNvPicPr>
+            <a:picLocks noChangeAspect="1"/>
+          </p:cNvPicPr>
+          <p:nvPr/>
+        </p:nvPicPr>
+        <p:blipFill>
+          <a:blip r:embed="rId2"/>
+          <a:stretch>
+            <a:fillRect/>
+          </a:stretch>
+        </p:blipFill>
+        <p:spPr>
+          <a:xfrm>
+            <a:off x="2523744" y="1234440"/>
+            <a:ext cx="7132320" cy="4585063"/>
+          </a:xfrm>
+          <a:prstGeom prst="rect">
+            <a:avLst/>
+          </a:prstGeom>
+        </p:spPr>
+      </p:pic>
+      <p:sp>
+        <p:nvSpPr>
+          <p:cNvPr id="7" name="TextBox 6"/>
+          <p:cNvSpPr txBox="1"/>
+          <p:nvPr/>
+        </p:nvSpPr>
+        <p:spPr>
+          <a:xfrm>
+            <a:off x="731520" y="6016752"/>
+            <a:ext cx="10728655" cy="365760"/>
+          </a:xfrm>
+          <a:prstGeom prst="rect">
+            <a:avLst/>
+          </a:prstGeom>
+          <a:noFill/>
+        </p:spPr>
+        <p:txBody>
+          <a:bodyPr wrap="none" tIns="0" bIns="0" lIns="0" rIns="0">
+            <a:spAutoFit/>
+          </a:bodyPr>
           <a:lstStyle/>
           <a:p>
             <a:pPr algn="ctr">
-              <a:defRPr sz="1600" b="1">
-                <a:solidFill>
-                  <a:srgbClr val="BE123C"/>
-                </a:solidFill>
-              </a:defRPr>
-            </a:pPr>
-            <a:r>
-              <a:t>Kịch Bản: Trang Web Giả Mạo Điều Khiển Yêu Cầu Chuyển Tiền</a:t>
-            </a:r>
-          </a:p>
-          <a:p>
-            <a:pPr>
-              <a:spcBef>
-                <a:spcPts val="800"/>
-              </a:spcBef>
-              <a:defRPr sz="1300">
-                <a:solidFill>
-                  <a:srgbClr val="334155"/>
-                </a:solidFill>
-              </a:defRPr>
-            </a:pPr>
-            <a:r>
-              <a:t>1. Nạn nhân có phiên làm việc đang hoạt động trên hệ thống tư vấn trực tuyến.</a:t>
-            </a:r>
-            <a:br/>
-            <a:r>
-              <a:t>2. Nạn nhân được dẫn dụ truy cập một trang web độc hại ở một tab khác (AttackerSite.cshtml).</a:t>
-            </a:r>
-            <a:br/>
-            <a:r>
-              <a:t>3. Trang web độc hại chứa một biểu mẫu ẩn trỏ trực tiếp tới địa chỉ nhận lệnh của ứng dụng mục tiêu:</a:t>
-            </a:r>
-          </a:p>
-          <a:p>
-            <a:pPr>
-              <a:spcBef>
-                <a:spcPts val="600"/>
-              </a:spcBef>
               <a:defRPr sz="1100" b="1">
                 <a:solidFill>
-                  <a:srgbClr val="9F1239"/>
-                </a:solidFill>
-                <a:latin typeface="Courier New"/>
-              </a:defRPr>
-            </a:pPr>
-            <a:r>
-              <a:t>&lt;!-- BIỂU MẪU ẨN TRÊN TRANG WEB CỦA KẺ TẤN CÔNG --&gt;</a:t>
-            </a:r>
-            <a:br/>
-            <a:r>
-              <a:t>&lt;form id="exploit" action="http://localhost:5076/Csrf/TransferVulnerable" method="POST"&gt;</a:t>
-            </a:r>
-            <a:br/>
-            <a:r>
-              <a:t>    &lt;input type="hidden" name="amount" value="20000000" /&gt;</a:t>
-            </a:r>
-            <a:br/>
-            <a:r>
-              <a:t>&lt;/form&gt;</a:t>
-            </a:r>
-            <a:br/>
-            <a:r>
-              <a:t>&lt;script&gt;document.getElementById('exploit').submit();&lt;/script&gt;</a:t>
-            </a:r>
-          </a:p>
-          <a:p>
-            <a:pPr>
-              <a:spcBef>
-                <a:spcPts val="800"/>
-              </a:spcBef>
-              <a:defRPr sz="1300" b="1">
-                <a:solidFill>
-                  <a:srgbClr val="BE123C"/>
-                </a:solidFill>
-              </a:defRPr>
-            </a:pPr>
-            <a:r>
-              <a:t>Hậu quả thực tế: Yêu cầu giao dịch được thực hiện mà không có sự đồng thuận chủ động của người dùng, dẫn đến thay đổi số dư hoặc cấu hình tài khoản.</a:t>
+                  <a:srgbClr val="047857"/>
+                </a:solidFill>
+                <a:latin typeface="Arial"/>
+              </a:defRPr>
+            </a:pPr>
+            <a:r>
+              <a:t>Minh chứng đối chứng: Bị rút 20.000.000 VNĐ qua biểu mẫu ẩn của Hacker (Trái) vs Chặn đứng yêu cầu thiếu Token (Phải)</a:t>
             </a:r>
           </a:p>
         </p:txBody>
@@ -6024,8 +5852,8 @@
         </p:nvSpPr>
         <p:spPr>
           <a:xfrm>
-            <a:off x="731520" y="292608"/>
-            <a:ext cx="4389120" cy="347472"/>
+            <a:off x="731520" y="256032"/>
+            <a:ext cx="4389120" cy="329184"/>
           </a:xfrm>
           <a:prstGeom prst="roundRect">
             <a:avLst/>
@@ -6062,6 +5890,7 @@
                 <a:solidFill>
                   <a:srgbClr val="1D4ED8"/>
                 </a:solidFill>
+                <a:latin typeface="Arial"/>
               </a:defRPr>
             </a:pPr>
             <a:r>
@@ -6078,7 +5907,7 @@
         </p:nvSpPr>
         <p:spPr>
           <a:xfrm>
-            <a:off x="731520" y="658368"/>
+            <a:off x="731520" y="621792"/>
             <a:ext cx="10698480" cy="548640"/>
           </a:xfrm>
           <a:prstGeom prst="rect">
@@ -6097,10 +5926,11 @@
                 <a:solidFill>
                   <a:srgbClr val="0F172A"/>
                 </a:solidFill>
-              </a:defRPr>
-            </a:pPr>
-            <a:r>
-              <a:t>3.3. CSRF Attack: Minh Chứng Thực Nghiệm Trực Quan Trên Web UI</a:t>
+                <a:latin typeface="Arial"/>
+              </a:defRPr>
+            </a:pPr>
+            <a:r>
+              <a:t>3.4. CSRF Attack: Minh Chứng Biến Động CSDL dbo.UserWallets</a:t>
             </a:r>
           </a:p>
         </p:txBody>
@@ -6113,7 +5943,7 @@
         </p:nvSpPr>
         <p:spPr>
           <a:xfrm>
-            <a:off x="731520" y="6492240"/>
+            <a:off x="731520" y="6537960"/>
             <a:ext cx="10698480" cy="274320"/>
           </a:xfrm>
           <a:prstGeom prst="rect">
@@ -6122,7 +5952,7 @@
           <a:noFill/>
         </p:spPr>
         <p:txBody>
-          <a:bodyPr wrap="none">
+          <a:bodyPr wrap="none" lIns="0" rIns="0" tIns="0" bIns="0">
             <a:spAutoFit/>
           </a:bodyPr>
           <a:lstStyle/>
@@ -6132,6 +5962,7 @@
                 <a:solidFill>
                   <a:srgbClr val="64748B"/>
                 </a:solidFill>
+                <a:latin typeface="Arial"/>
               </a:defRPr>
             </a:pPr>
             <a:r>
@@ -6140,50 +5971,26 @@
           </a:p>
         </p:txBody>
       </p:sp>
-      <p:pic>
-        <p:nvPicPr>
-          <p:cNvPr id="6" name="Picture 5" descr="crop_csrf_ui.png"/>
-          <p:cNvPicPr>
-            <a:picLocks noChangeAspect="1"/>
-          </p:cNvPicPr>
-          <p:nvPr/>
-        </p:nvPicPr>
-        <p:blipFill>
-          <a:blip r:embed="rId2"/>
-          <a:stretch>
-            <a:fillRect/>
-          </a:stretch>
-        </p:blipFill>
-        <p:spPr>
-          <a:xfrm>
-            <a:off x="1645920" y="1234440"/>
-            <a:ext cx="8869680" cy="4264269"/>
-          </a:xfrm>
-          <a:prstGeom prst="rect">
-            <a:avLst/>
-          </a:prstGeom>
-        </p:spPr>
-      </p:pic>
-      <p:sp>
-        <p:nvSpPr>
-          <p:cNvPr id="7" name="Rounded Rectangle 6"/>
+      <p:sp>
+        <p:nvSpPr>
+          <p:cNvPr id="6" name="Rounded Rectangle 5"/>
           <p:cNvSpPr/>
           <p:nvPr/>
         </p:nvSpPr>
         <p:spPr>
           <a:xfrm>
-            <a:off x="731520" y="5440680"/>
-            <a:ext cx="10728655" cy="914400"/>
+            <a:off x="731520" y="1234440"/>
+            <a:ext cx="5166360" cy="4937760"/>
           </a:xfrm>
           <a:prstGeom prst="roundRect">
             <a:avLst/>
           </a:prstGeom>
           <a:solidFill>
-            <a:srgbClr val="ECFDF5"/>
+            <a:srgbClr val="F8FAFC"/>
           </a:solidFill>
           <a:ln>
             <a:solidFill>
-              <a:srgbClr val="A7F3D0"/>
+              <a:srgbClr val="E2E8F0"/>
             </a:solidFill>
           </a:ln>
         </p:spPr>
@@ -6206,33 +6013,176 @@
           <a:lstStyle/>
           <a:p>
             <a:pPr algn="ctr">
-              <a:defRPr sz="1200" b="1">
-                <a:solidFill>
-                  <a:srgbClr val="047857"/>
-                </a:solidFill>
-              </a:defRPr>
-            </a:pPr>
-            <a:r>
-              <a:t>Minh chứng đối chứng phân hệ quản lý ví tiền &amp; kịch bản CSRF (/Csrf)</a:t>
+              <a:defRPr sz="1400" b="1">
+                <a:solidFill>
+                  <a:srgbClr val="1D4ED8"/>
+                </a:solidFill>
+                <a:latin typeface="Arial"/>
+              </a:defRPr>
+            </a:pPr>
+            <a:r>
+              <a:t>1. Trạng Thái CSDL Ban Đầu</a:t>
             </a:r>
           </a:p>
           <a:p>
             <a:pPr>
               <a:spcBef>
-                <a:spcPts val="200"/>
+                <a:spcPts val="600"/>
               </a:spcBef>
-              <a:defRPr sz="1100">
+              <a:defRPr sz="950" b="0">
+                <a:solidFill>
+                  <a:srgbClr val="0F172A"/>
+                </a:solidFill>
+                <a:latin typeface="Courier New"/>
+              </a:defRPr>
+            </a:pPr>
+            <a:r>
+              <a:t>SELECT Id, OwnerName, Balance FROM dbo.UserWallets;</a:t>
+            </a:r>
+            <a:br/>
+            <a:br/>
+            <a:r>
+              <a:t>Id | OwnerName                      | Balance (VND)</a:t>
+            </a:r>
+            <a:br/>
+            <a:r>
+              <a:t>---+--------------------------------+---------------</a:t>
+            </a:r>
+            <a:br/>
+            <a:r>
+              <a:t> 1 | Nạn nhân (Nguyễn Danh Học)     | 50,000,000.00</a:t>
+            </a:r>
+            <a:br/>
+            <a:r>
+              <a:t> 2 | Kẻ tấn công (Hacker BlackHat)  |          0.00</a:t>
+            </a:r>
+            <a:br/>
+            <a:r>
+              <a:t>(2 rows affected)</a:t>
+            </a:r>
+          </a:p>
+          <a:p>
+            <a:pPr>
+              <a:spcBef>
+                <a:spcPts val="800"/>
+              </a:spcBef>
+              <a:defRPr sz="1150" b="0">
                 <a:solidFill>
                   <a:srgbClr val="334155"/>
                 </a:solidFill>
-              </a:defRPr>
-            </a:pPr>
-            <a:r>
-              <a:t>• Mở Attacker Site: Biểu mẫu ẩn tự động gửi POST sang Action dính lỗi -&gt; Số dư ví bị trừ 20.000.000 VNĐ.</a:t>
-            </a:r>
-            <a:br/>
-            <a:r>
-              <a:t>• Nhánh đã phòng thủ: Biểu mẫu chính chủ được tích hợp Anti-Forgery Token -&gt; Từ chối 100% yêu cầu giả mạo từ bên ngoài.</a:t>
+                <a:latin typeface="Arial"/>
+              </a:defRPr>
+            </a:pPr>
+            <a:r>
+              <a:t>Số dư ví tài khoản nạn nhân ở trạng thái ban đầu là 50 triệu VNĐ, tài khoản đối tượng tấn công là 0 VNĐ.</a:t>
+            </a:r>
+          </a:p>
+        </p:txBody>
+      </p:sp>
+      <p:sp>
+        <p:nvSpPr>
+          <p:cNvPr id="7" name="Rounded Rectangle 6"/>
+          <p:cNvSpPr/>
+          <p:nvPr/>
+        </p:nvSpPr>
+        <p:spPr>
+          <a:xfrm>
+            <a:off x="6263640" y="1234440"/>
+            <a:ext cx="5166360" cy="4937760"/>
+          </a:xfrm>
+          <a:prstGeom prst="roundRect">
+            <a:avLst/>
+          </a:prstGeom>
+          <a:solidFill>
+            <a:srgbClr val="FFF1F2"/>
+          </a:solidFill>
+          <a:ln>
+            <a:solidFill>
+              <a:srgbClr val="FECDD3"/>
+            </a:solidFill>
+          </a:ln>
+        </p:spPr>
+        <p:style>
+          <a:lnRef idx="1">
+            <a:schemeClr val="accent1"/>
+          </a:lnRef>
+          <a:fillRef idx="3">
+            <a:schemeClr val="accent1"/>
+          </a:fillRef>
+          <a:effectRef idx="2">
+            <a:schemeClr val="accent1"/>
+          </a:effectRef>
+          <a:fontRef idx="minor">
+            <a:schemeClr val="lt1"/>
+          </a:fontRef>
+        </p:style>
+        <p:txBody>
+          <a:bodyPr rtlCol="0" anchor="ctr"/>
+          <a:lstStyle/>
+          <a:p>
+            <a:pPr algn="ctr">
+              <a:defRPr sz="1400" b="1">
+                <a:solidFill>
+                  <a:srgbClr val="BE123C"/>
+                </a:solidFill>
+                <a:latin typeface="Arial"/>
+              </a:defRPr>
+            </a:pPr>
+            <a:r>
+              <a:t>2. Trạng Thái CSDL Sau Khai Thác CSRF</a:t>
+            </a:r>
+          </a:p>
+          <a:p>
+            <a:pPr>
+              <a:spcBef>
+                <a:spcPts val="600"/>
+              </a:spcBef>
+              <a:defRPr sz="950" b="0">
+                <a:solidFill>
+                  <a:srgbClr val="9F1239"/>
+                </a:solidFill>
+                <a:latin typeface="Courier New"/>
+              </a:defRPr>
+            </a:pPr>
+            <a:r>
+              <a:t>SELECT Id, OwnerName, Balance FROM dbo.UserWallets;</a:t>
+            </a:r>
+            <a:br/>
+            <a:br/>
+            <a:r>
+              <a:t>Id | OwnerName                      | Balance (VND)</a:t>
+            </a:r>
+            <a:br/>
+            <a:r>
+              <a:t>---+--------------------------------+---------------</a:t>
+            </a:r>
+            <a:br/>
+            <a:r>
+              <a:t> 1 | Nạn nhân (Nguyễn Danh Học)     | 30,000,000.00</a:t>
+            </a:r>
+            <a:br/>
+            <a:r>
+              <a:t> 2 | Kẻ tấn công (Hacker BlackHat)  | 20,000,000.00</a:t>
+            </a:r>
+            <a:br/>
+            <a:r>
+              <a:t>(2 rows affected)</a:t>
+            </a:r>
+          </a:p>
+          <a:p>
+            <a:pPr>
+              <a:spcBef>
+                <a:spcPts val="800"/>
+              </a:spcBef>
+              <a:defRPr sz="1150" b="0">
+                <a:solidFill>
+                  <a:srgbClr val="334155"/>
+                </a:solidFill>
+                <a:latin typeface="Arial"/>
+              </a:defRPr>
+            </a:pPr>
+            <a:r>
+              <a:t>Số dư thực tế trong CSDL bị thay đổi hoàn toàn tự động khi nạn nhân truy cập liên kết độc hại, chứng minh mức độ rủi ro nghiêm trọng của giao dịch thiếu token.</a:t>
             </a:r>
           </a:p>
         </p:txBody>
@@ -6306,8 +6256,8 @@
         </p:nvSpPr>
         <p:spPr>
           <a:xfrm>
-            <a:off x="731520" y="292608"/>
-            <a:ext cx="4389120" cy="347472"/>
+            <a:off x="731520" y="256032"/>
+            <a:ext cx="4389120" cy="329184"/>
           </a:xfrm>
           <a:prstGeom prst="roundRect">
             <a:avLst/>
@@ -6344,6 +6294,7 @@
                 <a:solidFill>
                   <a:srgbClr val="1D4ED8"/>
                 </a:solidFill>
+                <a:latin typeface="Arial"/>
               </a:defRPr>
             </a:pPr>
             <a:r>
@@ -6360,7 +6311,7 @@
         </p:nvSpPr>
         <p:spPr>
           <a:xfrm>
-            <a:off x="731520" y="658368"/>
+            <a:off x="731520" y="621792"/>
             <a:ext cx="10698480" cy="548640"/>
           </a:xfrm>
           <a:prstGeom prst="rect">
@@ -6379,10 +6330,11 @@
                 <a:solidFill>
                   <a:srgbClr val="0F172A"/>
                 </a:solidFill>
-              </a:defRPr>
-            </a:pPr>
-            <a:r>
-              <a:t>3.4. CSRF Attack: Minh Chứng Biến Động CSDL dbo.UserWallets</a:t>
+                <a:latin typeface="Arial"/>
+              </a:defRPr>
+            </a:pPr>
+            <a:r>
+              <a:t>3.5. CSRF Attack: Cơ Chế Synchronizer Token &amp; Fetch API</a:t>
             </a:r>
           </a:p>
         </p:txBody>
@@ -6395,7 +6347,7 @@
         </p:nvSpPr>
         <p:spPr>
           <a:xfrm>
-            <a:off x="731520" y="6492240"/>
+            <a:off x="731520" y="6537960"/>
             <a:ext cx="10698480" cy="274320"/>
           </a:xfrm>
           <a:prstGeom prst="rect">
@@ -6404,7 +6356,7 @@
           <a:noFill/>
         </p:spPr>
         <p:txBody>
-          <a:bodyPr wrap="none">
+          <a:bodyPr wrap="none" lIns="0" rIns="0" tIns="0" bIns="0">
             <a:spAutoFit/>
           </a:bodyPr>
           <a:lstStyle/>
@@ -6414,6 +6366,7 @@
                 <a:solidFill>
                   <a:srgbClr val="64748B"/>
                 </a:solidFill>
+                <a:latin typeface="Arial"/>
               </a:defRPr>
             </a:pPr>
             <a:r>
@@ -6430,8 +6383,148 @@
         </p:nvSpPr>
         <p:spPr>
           <a:xfrm>
-            <a:off x="731520" y="1280160"/>
-            <a:ext cx="5166360" cy="4846320"/>
+            <a:off x="731520" y="1234440"/>
+            <a:ext cx="5166360" cy="4937760"/>
+          </a:xfrm>
+          <a:prstGeom prst="roundRect">
+            <a:avLst/>
+          </a:prstGeom>
+          <a:solidFill>
+            <a:srgbClr val="ECFDF5"/>
+          </a:solidFill>
+          <a:ln>
+            <a:solidFill>
+              <a:srgbClr val="A7F3D0"/>
+            </a:solidFill>
+          </a:ln>
+        </p:spPr>
+        <p:style>
+          <a:lnRef idx="1">
+            <a:schemeClr val="accent1"/>
+          </a:lnRef>
+          <a:fillRef idx="3">
+            <a:schemeClr val="accent1"/>
+          </a:fillRef>
+          <a:effectRef idx="2">
+            <a:schemeClr val="accent1"/>
+          </a:effectRef>
+          <a:fontRef idx="minor">
+            <a:schemeClr val="lt1"/>
+          </a:fontRef>
+        </p:style>
+        <p:txBody>
+          <a:bodyPr rtlCol="0" anchor="ctr"/>
+          <a:lstStyle/>
+          <a:p>
+            <a:pPr algn="ctr">
+              <a:defRPr sz="1500" b="1">
+                <a:solidFill>
+                  <a:srgbClr val="047857"/>
+                </a:solidFill>
+                <a:latin typeface="Arial"/>
+              </a:defRPr>
+            </a:pPr>
+            <a:r>
+              <a:t>Mô Hình Synchronizer Token Pattern</a:t>
+            </a:r>
+          </a:p>
+          <a:p>
+            <a:pPr>
+              <a:spcBef>
+                <a:spcPts val="800"/>
+              </a:spcBef>
+              <a:defRPr sz="950" b="0">
+                <a:solidFill>
+                  <a:srgbClr val="065F46"/>
+                </a:solidFill>
+                <a:latin typeface="Courier New"/>
+              </a:defRPr>
+            </a:pPr>
+            <a:r>
+              <a:t>// 1. TRONG RAZOR VIEW: NHÚNG TOKEN VÀO FORM</a:t>
+            </a:r>
+            <a:br/>
+            <a:r>
+              <a:t>&lt;form asp-action="TransferSecure" method="post"&gt;</a:t>
+            </a:r>
+            <a:br/>
+            <a:r>
+              <a:t>    @Html.AntiForgeryToken()</a:t>
+            </a:r>
+            <a:br/>
+            <a:r>
+              <a:t>    &lt;input type="number" name="amount" /&gt;</a:t>
+            </a:r>
+            <a:br/>
+            <a:r>
+              <a:t>    &lt;button type="submit"&gt;Chuyển tiền&lt;/button&gt;</a:t>
+            </a:r>
+            <a:br/>
+            <a:r>
+              <a:t>&lt;/form&gt;</a:t>
+            </a:r>
+            <a:br/>
+            <a:br/>
+            <a:r>
+              <a:t>// 2. TRONG CONTROLLER: BẮT BUỘC KIỂM TRA TOKEN</a:t>
+            </a:r>
+            <a:br/>
+            <a:r>
+              <a:t>[HttpPost]</a:t>
+            </a:r>
+            <a:br/>
+            <a:r>
+              <a:t>[ValidateAntiForgeryToken]</a:t>
+            </a:r>
+            <a:br/>
+            <a:r>
+              <a:t>public IActionResult TransferSecure(decimal amount)</a:t>
+            </a:r>
+            <a:br/>
+            <a:r>
+              <a:t>{</a:t>
+            </a:r>
+            <a:br/>
+            <a:r>
+              <a:t>    // Chỉ thực thi khi Token từ Form khớp với Token trong Cookie</a:t>
+            </a:r>
+            <a:br/>
+            <a:r>
+              <a:t>}</a:t>
+            </a:r>
+          </a:p>
+          <a:p>
+            <a:pPr>
+              <a:spcBef>
+                <a:spcPts val="800"/>
+              </a:spcBef>
+              <a:defRPr sz="1150" b="0">
+                <a:solidFill>
+                  <a:srgbClr val="334155"/>
+                </a:solidFill>
+                <a:latin typeface="Arial"/>
+              </a:defRPr>
+            </a:pPr>
+            <a:r>
+              <a:t>Cơ chế bảo vệ:</a:t>
+            </a:r>
+            <a:br/>
+            <a:r>
+              <a:t>Máy chủ phát hành một cặp token: một lưu trong Cookie và một nhúng vào biểu mẫu. Trang web độc hại bị chặn đọc token bởi chính sách Same-Origin Policy (SOP).</a:t>
+            </a:r>
+          </a:p>
+        </p:txBody>
+      </p:sp>
+      <p:sp>
+        <p:nvSpPr>
+          <p:cNvPr id="7" name="Rounded Rectangle 6"/>
+          <p:cNvSpPr/>
+          <p:nvPr/>
+        </p:nvSpPr>
+        <p:spPr>
+          <a:xfrm>
+            <a:off x="6263640" y="1234440"/>
+            <a:ext cx="5166360" cy="4937760"/>
           </a:xfrm>
           <a:prstGeom prst="roundRect">
             <a:avLst/>
@@ -6460,55 +6553,19 @@
           </a:fontRef>
         </p:style>
         <p:txBody>
-          <a:bodyPr rtlCol="0" anchor="ctr" wrap="square"/>
+          <a:bodyPr rtlCol="0" anchor="ctr"/>
           <a:lstStyle/>
           <a:p>
             <a:pPr algn="ctr">
-              <a:defRPr sz="1400" b="1">
+              <a:defRPr sz="1500" b="1">
                 <a:solidFill>
                   <a:srgbClr val="1D4ED8"/>
                 </a:solidFill>
-              </a:defRPr>
-            </a:pPr>
-            <a:r>
-              <a:t>1. Trạng Thái CSDL Ban Đầu</a:t>
-            </a:r>
-          </a:p>
-          <a:p>
-            <a:pPr>
-              <a:spcBef>
-                <a:spcPts val="600"/>
-              </a:spcBef>
-              <a:defRPr sz="950">
-                <a:solidFill>
-                  <a:srgbClr val="0F172A"/>
-                </a:solidFill>
-                <a:latin typeface="Courier New"/>
-              </a:defRPr>
-            </a:pPr>
-            <a:r>
-              <a:t>SELECT Id, OwnerName, Balance FROM dbo.UserWallets;</a:t>
-            </a:r>
-            <a:br/>
-            <a:br/>
-            <a:r>
-              <a:t>Id | OwnerName                      | Balance (VND)</a:t>
-            </a:r>
-            <a:br/>
-            <a:r>
-              <a:t>---+--------------------------------+---------------</a:t>
-            </a:r>
-            <a:br/>
-            <a:r>
-              <a:t> 1 | Nạn nhân (Nguyễn Danh Học)     | 50,000,000.00</a:t>
-            </a:r>
-            <a:br/>
-            <a:r>
-              <a:t> 2 | Kẻ tấn công (Hacker BlackHat)  |          0.00</a:t>
-            </a:r>
-            <a:br/>
-            <a:r>
-              <a:t>(2 rows affected)</a:t>
+                <a:latin typeface="Arial"/>
+              </a:defRPr>
+            </a:pPr>
+            <a:r>
+              <a:t>Tích Hợp Token Trong Fetch API (Slide Buổi 9)</a:t>
             </a:r>
           </a:p>
           <a:p>
@@ -6516,105 +6573,56 @@
               <a:spcBef>
                 <a:spcPts val="800"/>
               </a:spcBef>
-              <a:defRPr sz="1150">
-                <a:solidFill>
-                  <a:srgbClr val="334155"/>
-                </a:solidFill>
-              </a:defRPr>
-            </a:pPr>
-            <a:r>
-              <a:t>Số dư ví tài khoản nạn nhân ở trạng thái ban đầu là 50 triệu VNĐ, tài khoản đối tượng tấn công là 0 VNĐ.</a:t>
-            </a:r>
-          </a:p>
-        </p:txBody>
-      </p:sp>
-      <p:sp>
-        <p:nvSpPr>
-          <p:cNvPr id="7" name="Rounded Rectangle 6"/>
-          <p:cNvSpPr/>
-          <p:nvPr/>
-        </p:nvSpPr>
-        <p:spPr>
-          <a:xfrm>
-            <a:off x="6263640" y="1280160"/>
-            <a:ext cx="5166360" cy="4846320"/>
-          </a:xfrm>
-          <a:prstGeom prst="roundRect">
-            <a:avLst/>
-          </a:prstGeom>
-          <a:solidFill>
-            <a:srgbClr val="FFF1F2"/>
-          </a:solidFill>
-          <a:ln>
-            <a:solidFill>
-              <a:srgbClr val="FECDD3"/>
-            </a:solidFill>
-          </a:ln>
-        </p:spPr>
-        <p:style>
-          <a:lnRef idx="1">
-            <a:schemeClr val="accent1"/>
-          </a:lnRef>
-          <a:fillRef idx="3">
-            <a:schemeClr val="accent1"/>
-          </a:fillRef>
-          <a:effectRef idx="2">
-            <a:schemeClr val="accent1"/>
-          </a:effectRef>
-          <a:fontRef idx="minor">
-            <a:schemeClr val="lt1"/>
-          </a:fontRef>
-        </p:style>
-        <p:txBody>
-          <a:bodyPr rtlCol="0" anchor="ctr" wrap="square"/>
-          <a:lstStyle/>
-          <a:p>
-            <a:pPr algn="ctr">
-              <a:defRPr sz="1400" b="1">
-                <a:solidFill>
-                  <a:srgbClr val="BE123C"/>
-                </a:solidFill>
-              </a:defRPr>
-            </a:pPr>
-            <a:r>
-              <a:t>2. Trạng Thái CSDL Sau Khai Thác CSRF</a:t>
-            </a:r>
-          </a:p>
-          <a:p>
-            <a:pPr>
-              <a:spcBef>
-                <a:spcPts val="600"/>
-              </a:spcBef>
-              <a:defRPr sz="950">
-                <a:solidFill>
-                  <a:srgbClr val="9F1239"/>
+              <a:defRPr sz="950" b="0">
+                <a:solidFill>
+                  <a:srgbClr val="0F172A"/>
                 </a:solidFill>
                 <a:latin typeface="Courier New"/>
               </a:defRPr>
             </a:pPr>
             <a:r>
-              <a:t>SELECT Id, OwnerName, Balance FROM dbo.UserWallets;</a:t>
-            </a:r>
-            <a:br/>
-            <a:br/>
-            <a:r>
-              <a:t>Id | OwnerName                      | Balance (VND)</a:t>
-            </a:r>
-            <a:br/>
-            <a:r>
-              <a:t>---+--------------------------------+---------------</a:t>
-            </a:r>
-            <a:br/>
-            <a:r>
-              <a:t> 1 | Nạn nhân (Nguyễn Danh Học)     | 30,000,000.00</a:t>
-            </a:r>
-            <a:br/>
-            <a:r>
-              <a:t> 2 | Kẻ tấn công (Hacker BlackHat)  | 20,000,000.00</a:t>
-            </a:r>
-            <a:br/>
-            <a:r>
-              <a:t>(2 rows affected)</a:t>
+              <a:t>// TRÍCH XUẤT VÀ GỬI TOKEN QUA HTTP HEADER:</a:t>
+            </a:r>
+            <a:br/>
+            <a:r>
+              <a:t>const token = document.querySelector('input[name="__RequestVerificationToken"]').value;</a:t>
+            </a:r>
+            <a:br/>
+            <a:br/>
+            <a:r>
+              <a:t>fetch('/Csrf/TransferAjax', {</a:t>
+            </a:r>
+            <a:br/>
+            <a:r>
+              <a:t>    method: 'POST',</a:t>
+            </a:r>
+            <a:br/>
+            <a:r>
+              <a:t>    headers: {</a:t>
+            </a:r>
+            <a:br/>
+            <a:r>
+              <a:t>        'Content-Type': 'application/json',</a:t>
+            </a:r>
+            <a:br/>
+            <a:r>
+              <a:t>        'RequestVerificationToken': token // HEADER BẢO VỆ</a:t>
+            </a:r>
+            <a:br/>
+            <a:r>
+              <a:t>    },</a:t>
+            </a:r>
+            <a:br/>
+            <a:r>
+              <a:t>    body: JSON.stringify({ amount: 5000000 })</a:t>
+            </a:r>
+            <a:br/>
+            <a:r>
+              <a:t>})</a:t>
+            </a:r>
+            <a:br/>
+            <a:r>
+              <a:t>.then(response =&gt; response.json());</a:t>
             </a:r>
           </a:p>
           <a:p>
@@ -6622,14 +6630,19 @@
               <a:spcBef>
                 <a:spcPts val="800"/>
               </a:spcBef>
-              <a:defRPr sz="1150">
+              <a:defRPr sz="1150" b="0">
                 <a:solidFill>
                   <a:srgbClr val="334155"/>
                 </a:solidFill>
-              </a:defRPr>
-            </a:pPr>
-            <a:r>
-              <a:t>Số dư thực tế trong CSDL bị thay đổi hoàn toàn tự động khi nạn nhân truy cập liên kết độc hại, chứng minh mức độ rủi ro nghiêm trọng của giao dịch thiếu token.</a:t>
+                <a:latin typeface="Arial"/>
+              </a:defRPr>
+            </a:pPr>
+            <a:r>
+              <a:t>Ứng dụng trong thực tế:</a:t>
+            </a:r>
+            <a:br/>
+            <a:r>
+              <a:t>Đối với các tác vụ gọi AJAX không tải lại trang, token được đọc từ thẻ ẩn và truyền qua HTTP Header để đảm bảo vừa tiện dụng vừa an toàn.</a:t>
             </a:r>
           </a:p>
         </p:txBody>
@@ -6703,8 +6716,8 @@
         </p:nvSpPr>
         <p:spPr>
           <a:xfrm>
-            <a:off x="731520" y="292608"/>
-            <a:ext cx="4389120" cy="347472"/>
+            <a:off x="731520" y="256032"/>
+            <a:ext cx="4389120" cy="329184"/>
           </a:xfrm>
           <a:prstGeom prst="roundRect">
             <a:avLst/>
@@ -6741,10 +6754,11 @@
                 <a:solidFill>
                   <a:srgbClr val="1D4ED8"/>
                 </a:solidFill>
-              </a:defRPr>
-            </a:pPr>
-            <a:r>
-              <a:t>CHỦ ĐỀ 3 • NGUYỄN MINH CƯỜNG (23A1001D0058)</a:t>
+                <a:latin typeface="Arial"/>
+              </a:defRPr>
+            </a:pPr>
+            <a:r>
+              <a:t>OWASP TOP 10 • THỰC NGHIỆM AN TOÀN WEB</a:t>
             </a:r>
           </a:p>
         </p:txBody>
@@ -6757,7 +6771,7 @@
         </p:nvSpPr>
         <p:spPr>
           <a:xfrm>
-            <a:off x="731520" y="658368"/>
+            <a:off x="731520" y="621792"/>
             <a:ext cx="10698480" cy="548640"/>
           </a:xfrm>
           <a:prstGeom prst="rect">
@@ -6776,10 +6790,11 @@
                 <a:solidFill>
                   <a:srgbClr val="0F172A"/>
                 </a:solidFill>
-              </a:defRPr>
-            </a:pPr>
-            <a:r>
-              <a:t>3.5. CSRF Attack: Cơ Chế Phòng Thủ Bằng Anti-Forgery Token</a:t>
+                <a:latin typeface="Arial"/>
+              </a:defRPr>
+            </a:pPr>
+            <a:r>
+              <a:t>Kết Luận Báo Cáo Thực Nghiệm OWASP Top 10</a:t>
             </a:r>
           </a:p>
         </p:txBody>
@@ -6792,7 +6807,7 @@
         </p:nvSpPr>
         <p:spPr>
           <a:xfrm>
-            <a:off x="731520" y="6492240"/>
+            <a:off x="731520" y="6537960"/>
             <a:ext cx="10698480" cy="274320"/>
           </a:xfrm>
           <a:prstGeom prst="rect">
@@ -6801,7 +6816,7 @@
           <a:noFill/>
         </p:spPr>
         <p:txBody>
-          <a:bodyPr wrap="none">
+          <a:bodyPr wrap="none" lIns="0" rIns="0" tIns="0" bIns="0">
             <a:spAutoFit/>
           </a:bodyPr>
           <a:lstStyle/>
@@ -6811,6 +6826,7 @@
                 <a:solidFill>
                   <a:srgbClr val="64748B"/>
                 </a:solidFill>
+                <a:latin typeface="Arial"/>
               </a:defRPr>
             </a:pPr>
             <a:r>
@@ -6827,127 +6843,8 @@
         </p:nvSpPr>
         <p:spPr>
           <a:xfrm>
-            <a:off x="731520" y="1280160"/>
-            <a:ext cx="5166360" cy="4846320"/>
-          </a:xfrm>
-          <a:prstGeom prst="roundRect">
-            <a:avLst/>
-          </a:prstGeom>
-          <a:solidFill>
-            <a:srgbClr val="ECFDF5"/>
-          </a:solidFill>
-          <a:ln>
-            <a:solidFill>
-              <a:srgbClr val="A7F3D0"/>
-            </a:solidFill>
-          </a:ln>
-        </p:spPr>
-        <p:style>
-          <a:lnRef idx="1">
-            <a:schemeClr val="accent1"/>
-          </a:lnRef>
-          <a:fillRef idx="3">
-            <a:schemeClr val="accent1"/>
-          </a:fillRef>
-          <a:effectRef idx="2">
-            <a:schemeClr val="accent1"/>
-          </a:effectRef>
-          <a:fontRef idx="minor">
-            <a:schemeClr val="lt1"/>
-          </a:fontRef>
-        </p:style>
-        <p:txBody>
-          <a:bodyPr rtlCol="0" anchor="ctr" wrap="square"/>
-          <a:lstStyle/>
-          <a:p>
-            <a:pPr algn="ctr">
-              <a:defRPr sz="1500" b="1">
-                <a:solidFill>
-                  <a:srgbClr val="047857"/>
-                </a:solidFill>
-              </a:defRPr>
-            </a:pPr>
-            <a:r>
-              <a:t>Mô Hình Synchronizer Token Pattern</a:t>
-            </a:r>
-          </a:p>
-          <a:p>
-            <a:pPr>
-              <a:spcBef>
-                <a:spcPts val="800"/>
-              </a:spcBef>
-              <a:defRPr sz="950">
-                <a:solidFill>
-                  <a:srgbClr val="065F46"/>
-                </a:solidFill>
-                <a:latin typeface="Courier New"/>
-              </a:defRPr>
-            </a:pPr>
-            <a:r>
-              <a:t>// 1. TRONG RAZOR VIEW: NHÚNG TOKEN VÀO FORM</a:t>
-            </a:r>
-            <a:br/>
-            <a:r>
-              <a:t>&lt;form asp-action="TransferSecure" method="post"&gt;</a:t>
-            </a:r>
-            <a:br/>
-            <a:r>
-              <a:t>    @Html.AntiForgeryToken()</a:t>
-            </a:r>
-            <a:br/>
-            <a:r>
-              <a:t>    &lt;input type="number" name="amount" /&gt;</a:t>
-            </a:r>
-            <a:br/>
-            <a:r>
-              <a:t>    &lt;button type="submit"&gt;Chuyển tiền&lt;/button&gt;</a:t>
-            </a:r>
-            <a:br/>
-            <a:r>
-              <a:t>&lt;/form&gt;</a:t>
-            </a:r>
-            <a:br/>
-            <a:br/>
-            <a:r>
-              <a:t>// 2. TRONG CONTROLLER: BẮT BUỘC KIỂM TRA TOKEN</a:t>
-            </a:r>
-            <a:br/>
-            <a:r>
-              <a:t>[HttpPost]</a:t>
-            </a:r>
-            <a:br/>
-            <a:r>
-              <a:t>[ValidateAntiForgeryToken]</a:t>
-            </a:r>
-            <a:br/>
-            <a:r>
-              <a:t>public IActionResult TransferSecure(decimal amount)</a:t>
-            </a:r>
-            <a:br/>
-            <a:r>
-              <a:t>{</a:t>
-            </a:r>
-            <a:br/>
-            <a:r>
-              <a:t>    // Chỉ thực thi khi Token từ Form khớp với Token trong Cookie</a:t>
-            </a:r>
-            <a:br/>
-            <a:r>
-              <a:t>}</a:t>
-            </a:r>
-          </a:p>
-        </p:txBody>
-      </p:sp>
-      <p:sp>
-        <p:nvSpPr>
-          <p:cNvPr id="7" name="Rounded Rectangle 6"/>
-          <p:cNvSpPr/>
-          <p:nvPr/>
-        </p:nvSpPr>
-        <p:spPr>
-          <a:xfrm>
-            <a:off x="6263640" y="1280160"/>
-            <a:ext cx="5166360" cy="4846320"/>
+            <a:off x="914400" y="1371600"/>
+            <a:ext cx="10362895" cy="4572000"/>
           </a:xfrm>
           <a:prstGeom prst="roundRect">
             <a:avLst/>
@@ -6976,55 +6873,83 @@
           </a:fontRef>
         </p:style>
         <p:txBody>
-          <a:bodyPr rtlCol="0" anchor="ctr" wrap="square"/>
+          <a:bodyPr rtlCol="0" anchor="ctr"/>
           <a:lstStyle/>
           <a:p>
             <a:pPr algn="ctr">
-              <a:defRPr sz="1500" b="1">
+              <a:defRPr sz="1600" b="1">
                 <a:solidFill>
                   <a:srgbClr val="1D4ED8"/>
                 </a:solidFill>
-              </a:defRPr>
-            </a:pPr>
-            <a:r>
-              <a:t>Cơ Chế Ngăn Chặn Yêu Cầu Giả Mạo</a:t>
+                <a:latin typeface="Arial"/>
+              </a:defRPr>
+            </a:pPr>
+            <a:r>
+              <a:t>TỔNG KẾT KẾT QUẢ THỰC NGHIỆM CỦA NHÓM WNC.G01</a:t>
             </a:r>
           </a:p>
           <a:p>
             <a:pPr>
               <a:spcBef>
-                <a:spcPts val="1000"/>
+                <a:spcPts val="1400"/>
               </a:spcBef>
-              <a:defRPr sz="1200">
+              <a:defRPr sz="1300" b="0">
                 <a:solidFill>
                   <a:srgbClr val="334155"/>
                 </a:solidFill>
-              </a:defRPr>
-            </a:pPr>
-            <a:r>
-              <a:t>1. Nguyên tắc cặp Token:</a:t>
-            </a:r>
-            <a:br/>
-            <a:r>
-              <a:t>Máy chủ phát hành một cặp token: một giá trị lưu trong Cookie phiên và một giá trị nhúng vào trường ẩn của biểu mẫu.</a:t>
-            </a:r>
-            <a:br/>
-            <a:br/>
-            <a:r>
-              <a:t>2. Bảo vệ bằng Chính sách Cùng nguồn gốc (SOP):</a:t>
-            </a:r>
-            <a:br/>
-            <a:r>
-              <a:t>Website độc hại ở tên miền khác bị trình duyệt ngăn cấm truy cập dữ liệu DOM của biểu mẫu hợp lệ, do đó không thể sao chép token.</a:t>
-            </a:r>
-            <a:br/>
-            <a:br/>
-            <a:r>
-              <a:t>3. Thuộc tính SameSite cho Cookie:</a:t>
-            </a:r>
-            <a:br/>
-            <a:r>
-              <a:t>Thiết lập SameSite = Strict hoặc Lax giúp kiểm soát việc trình duyệt tự động gửi kèm cookie trong các yêu cầu cross-site.</a:t>
+                <a:latin typeface="Arial"/>
+              </a:defRPr>
+            </a:pPr>
+            <a:r>
+              <a:t>1. Nguyễn Danh Học (SQL Injection): Phân tích cơ chế tấn công bẻ gãy cú pháp CSDL ở tầng Backend và giải pháp phòng thủ triệt để bằng Parameterized Query / EF Core LINQ.</a:t>
+            </a:r>
+          </a:p>
+          <a:p>
+            <a:pPr>
+              <a:spcBef>
+                <a:spcPts val="1200"/>
+              </a:spcBef>
+              <a:defRPr sz="1300" b="0">
+                <a:solidFill>
+                  <a:srgbClr val="334155"/>
+                </a:solidFill>
+                <a:latin typeface="Arial"/>
+              </a:defRPr>
+            </a:pPr>
+            <a:r>
+              <a:t>2. Nguyễn Thanh Bình (Stored XSS): Phân tích nguy cơ đánh cắp Session Cookie qua dữ liệu lưu trữ CSDL và giải pháp tự động HTML Encoding của Razor View kết hợp cờ HttpOnly.</a:t>
+            </a:r>
+          </a:p>
+          <a:p>
+            <a:pPr>
+              <a:spcBef>
+                <a:spcPts val="1200"/>
+              </a:spcBef>
+              <a:defRPr sz="1300" b="0">
+                <a:solidFill>
+                  <a:srgbClr val="334155"/>
+                </a:solidFill>
+                <a:latin typeface="Arial"/>
+              </a:defRPr>
+            </a:pPr>
+            <a:r>
+              <a:t>3. Nguyễn Minh Cường (CSRF Attack): Phân tích kỹ thuật mượn quyền người dùng qua biểu mẫu ẩn và giải pháp phòng thủ bằng Synchronizer Token Pattern trên cả Form lẫn Fetch API.</a:t>
+            </a:r>
+          </a:p>
+          <a:p>
+            <a:pPr>
+              <a:spcBef>
+                <a:spcPts val="2400"/>
+              </a:spcBef>
+              <a:defRPr sz="1500" b="1">
+                <a:solidFill>
+                  <a:srgbClr val="BE123C"/>
+                </a:solidFill>
+                <a:latin typeface="Arial"/>
+              </a:defRPr>
+            </a:pPr>
+            <a:r>
+              <a:t>Kính chúc thầy sức khỏe và công tác tốt. Nhóm WNC.G01 xin trân trọng cảm ơn!</a:t>
             </a:r>
           </a:p>
         </p:txBody>
@@ -7098,8 +7023,8 @@
         </p:nvSpPr>
         <p:spPr>
           <a:xfrm>
-            <a:off x="731520" y="292608"/>
-            <a:ext cx="4389120" cy="347472"/>
+            <a:off x="731520" y="256032"/>
+            <a:ext cx="4389120" cy="329184"/>
           </a:xfrm>
           <a:prstGeom prst="roundRect">
             <a:avLst/>
@@ -7136,10 +7061,11 @@
                 <a:solidFill>
                   <a:srgbClr val="1D4ED8"/>
                 </a:solidFill>
-              </a:defRPr>
-            </a:pPr>
-            <a:r>
-              <a:t>OWASP TOP 10 • THỰC NGHIỆM AN TOÀN WEB</a:t>
+                <a:latin typeface="Arial"/>
+              </a:defRPr>
+            </a:pPr>
+            <a:r>
+              <a:t>CHỦ ĐỀ 1 • NGUYỄN DANH HỌC (23A1001D0158)</a:t>
             </a:r>
           </a:p>
         </p:txBody>
@@ -7152,7 +7078,7 @@
         </p:nvSpPr>
         <p:spPr>
           <a:xfrm>
-            <a:off x="731520" y="658368"/>
+            <a:off x="731520" y="621792"/>
             <a:ext cx="10698480" cy="548640"/>
           </a:xfrm>
           <a:prstGeom prst="rect">
@@ -7171,10 +7097,11 @@
                 <a:solidFill>
                   <a:srgbClr val="0F172A"/>
                 </a:solidFill>
-              </a:defRPr>
-            </a:pPr>
-            <a:r>
-              <a:t>Mục Tiêu &amp; Phương Pháp Thực Nghiệm</a:t>
+                <a:latin typeface="Arial"/>
+              </a:defRPr>
+            </a:pPr>
+            <a:r>
+              <a:t>1.1. SQL Injection: Vị Trí Trong Kiến Trúc 3 Tầng &amp; Nguyên Nhân Gốc</a:t>
             </a:r>
           </a:p>
         </p:txBody>
@@ -7187,7 +7114,7 @@
         </p:nvSpPr>
         <p:spPr>
           <a:xfrm>
-            <a:off x="731520" y="6492240"/>
+            <a:off x="731520" y="6537960"/>
             <a:ext cx="10698480" cy="274320"/>
           </a:xfrm>
           <a:prstGeom prst="rect">
@@ -7196,7 +7123,7 @@
           <a:noFill/>
         </p:spPr>
         <p:txBody>
-          <a:bodyPr wrap="none">
+          <a:bodyPr wrap="none" lIns="0" rIns="0" tIns="0" bIns="0">
             <a:spAutoFit/>
           </a:bodyPr>
           <a:lstStyle/>
@@ -7206,6 +7133,7 @@
                 <a:solidFill>
                   <a:srgbClr val="64748B"/>
                 </a:solidFill>
+                <a:latin typeface="Arial"/>
               </a:defRPr>
             </a:pPr>
             <a:r>
@@ -7222,8 +7150,8 @@
         </p:nvSpPr>
         <p:spPr>
           <a:xfrm>
-            <a:off x="731520" y="1280160"/>
-            <a:ext cx="5166360" cy="4846320"/>
+            <a:off x="731520" y="1234440"/>
+            <a:ext cx="5166360" cy="4937760"/>
           </a:xfrm>
           <a:prstGeom prst="roundRect">
             <a:avLst/>
@@ -7252,45 +7180,83 @@
           </a:fontRef>
         </p:style>
         <p:txBody>
-          <a:bodyPr rtlCol="0" anchor="ctr" wrap="square"/>
+          <a:bodyPr rtlCol="0" anchor="ctr"/>
           <a:lstStyle/>
           <a:p>
             <a:pPr algn="ctr">
-              <a:defRPr sz="1600" b="1">
+              <a:defRPr sz="1500" b="1">
                 <a:solidFill>
                   <a:srgbClr val="BE123C"/>
                 </a:solidFill>
-              </a:defRPr>
-            </a:pPr>
-            <a:r>
-              <a:t>Mục Tiêu Nghiên Cứu</a:t>
+                <a:latin typeface="Arial"/>
+              </a:defRPr>
+            </a:pPr>
+            <a:r>
+              <a:t>Vị Trí Xảy Ra Trong Kiến Trúc 3 Tầng</a:t>
             </a:r>
           </a:p>
           <a:p>
             <a:pPr>
               <a:spcBef>
-                <a:spcPts val="1000"/>
+                <a:spcPts val="600"/>
               </a:spcBef>
-              <a:defRPr sz="1250">
+              <a:defRPr sz="1250" b="1">
+                <a:solidFill>
+                  <a:srgbClr val="0F172A"/>
+                </a:solidFill>
+                <a:latin typeface="Arial"/>
+              </a:defRPr>
+            </a:pPr>
+            <a:r>
+              <a:t>• Mô hình 3 tầng: Client (Browser) ➔ Web Server (ASP.NET Core) ➔ Database Server (SQL Server 2025).</a:t>
+            </a:r>
+          </a:p>
+          <a:p>
+            <a:pPr>
+              <a:spcBef>
+                <a:spcPts val="600"/>
+              </a:spcBef>
+              <a:defRPr sz="1200" b="0">
                 <a:solidFill>
                   <a:srgbClr val="334155"/>
                 </a:solidFill>
-              </a:defRPr>
-            </a:pPr>
-            <a:r>
-              <a:t>• Bám sát yêu cầu thực tiễn: Tập trung vào thực nghiệm và phân tích mã nguồn thay vì lý thuyết thuần túy.</a:t>
-            </a:r>
-            <a:br/>
-            <a:r>
-              <a:t>• Nhận thức mức độ rủi ro: Đánh giá tác động an ninh thực tế trên ứng dụng web.</a:t>
-            </a:r>
-            <a:br/>
-            <a:r>
-              <a:t>• Phương pháp tiếp cận: Để phòng thủ hiệu quả, cần phân tích chính xác vector và kỹ thuật khai thác của kẻ tấn công.</a:t>
-            </a:r>
-            <a:br/>
-            <a:r>
-              <a:t>• Đối chứng rõ ràng: So sánh trực tiếp giữa mã nguồn dính lỗ hổng và mã nguồn đã được chuẩn hóa.</a:t>
+                <a:latin typeface="Arial"/>
+              </a:defRPr>
+            </a:pPr>
+            <a:r>
+              <a:t>• Luồng dữ liệu bình thường: Người dùng gửi dữ liệu xác thực (username/password) qua HTTP POST. Controller nhận tham số và chuyển cho SQL Server thực thi.</a:t>
+            </a:r>
+          </a:p>
+          <a:p>
+            <a:pPr>
+              <a:spcBef>
+                <a:spcPts val="600"/>
+              </a:spcBef>
+              <a:defRPr sz="1200" b="0">
+                <a:solidFill>
+                  <a:srgbClr val="334155"/>
+                </a:solidFill>
+                <a:latin typeface="Arial"/>
+              </a:defRPr>
+            </a:pPr>
+            <a:r>
+              <a:t>• Nguyên nhân gốc rễ (Root Cause): Lập trình viên sử dụng kỹ thuật ghép chuỗi trực tiếp (String Concatenation) để tạo câu lệnh SQL từ dữ liệu người dùng mà không qua cơ chế tham số hóa.</a:t>
+            </a:r>
+          </a:p>
+          <a:p>
+            <a:pPr>
+              <a:spcBef>
+                <a:spcPts val="600"/>
+              </a:spcBef>
+              <a:defRPr sz="1200" b="0">
+                <a:solidFill>
+                  <a:srgbClr val="334155"/>
+                </a:solidFill>
+                <a:latin typeface="Arial"/>
+              </a:defRPr>
+            </a:pPr>
+            <a:r>
+              <a:t>• Hậu quả phân tích cú pháp: SQL Server biên dịch chuỗi truy vấn đã bị tiêm nhiễm, coi các ký tự điều khiển của hacker là một phần cấu trúc ngữ pháp của câu lệnh.</a:t>
             </a:r>
           </a:p>
         </p:txBody>
@@ -7303,18 +7269,18 @@
         </p:nvSpPr>
         <p:spPr>
           <a:xfrm>
-            <a:off x="6263640" y="1280160"/>
-            <a:ext cx="5166360" cy="4846320"/>
+            <a:off x="6263640" y="1234440"/>
+            <a:ext cx="5166360" cy="4937760"/>
           </a:xfrm>
           <a:prstGeom prst="roundRect">
             <a:avLst/>
           </a:prstGeom>
           <a:solidFill>
-            <a:srgbClr val="EFF6FF"/>
+            <a:srgbClr val="FFF1F2"/>
           </a:solidFill>
           <a:ln>
             <a:solidFill>
-              <a:srgbClr val="BFDBFE"/>
+              <a:srgbClr val="FECDD3"/>
             </a:solidFill>
           </a:ln>
         </p:spPr>
@@ -7333,284 +7299,19 @@
           </a:fontRef>
         </p:style>
         <p:txBody>
-          <a:bodyPr rtlCol="0" anchor="ctr" wrap="square"/>
-          <a:lstStyle/>
-          <a:p>
-            <a:pPr algn="ctr">
-              <a:defRPr sz="1600" b="1">
-                <a:solidFill>
-                  <a:srgbClr val="1D4ED8"/>
-                </a:solidFill>
-              </a:defRPr>
-            </a:pPr>
-            <a:r>
-              <a:t>Môi Trường &amp; Quy Trình Thực Nghiệm</a:t>
-            </a:r>
-          </a:p>
-          <a:p>
-            <a:pPr>
-              <a:spcBef>
-                <a:spcPts val="1000"/>
-              </a:spcBef>
-              <a:defRPr sz="1250">
-                <a:solidFill>
-                  <a:srgbClr val="334155"/>
-                </a:solidFill>
-              </a:defRPr>
-            </a:pPr>
-            <a:r>
-              <a:t>• Nền tảng ứng dụng: Xây dựng ứng dụng mẫu trên ASP.NET Core MVC (.NET 10).</a:t>
-            </a:r>
-            <a:br/>
-            <a:r>
-              <a:t>• Hệ quản trị CSDL: Kết nối trực tiếp máy chủ Microsoft SQL Server 2025 Developer.</a:t>
-            </a:r>
-            <a:br/>
-            <a:r>
-              <a:t>• Thiết kế đối chứng: Chia 3 phân hệ tương tác riêng biệt cho 3 thành viên, nạp payload và theo dõi phản hồi thời gian thực.</a:t>
-            </a:r>
-            <a:br/>
-            <a:r>
-              <a:t>• Ứng dụng thực tế: Đưa các giải pháp phòng thủ vào thiết kế kiến trúc (Security View) của đề tài BTL.</a:t>
-            </a:r>
-          </a:p>
-        </p:txBody>
-      </p:sp>
-    </p:spTree>
-  </p:cSld>
-  <p:clrMapOvr>
-    <a:masterClrMapping/>
-  </p:clrMapOvr>
-</p:sld>
-</file>
-
-<file path=ppt/slides/slide20.xml><?xml version="1.0" encoding="utf-8"?>
-<p:sld xmlns:a="http://schemas.openxmlformats.org/drawingml/2006/main" xmlns:p="http://schemas.openxmlformats.org/presentationml/2006/main" xmlns:r="http://schemas.openxmlformats.org/officeDocument/2006/relationships">
-  <p:cSld>
-    <p:spTree>
-      <p:nvGrpSpPr>
-        <p:cNvPr id="1" name=""/>
-        <p:cNvGrpSpPr/>
-        <p:nvPr/>
-      </p:nvGrpSpPr>
-      <p:grpSpPr/>
-      <p:sp>
-        <p:nvSpPr>
-          <p:cNvPr id="2" name="Rectangle 1"/>
-          <p:cNvSpPr/>
-          <p:nvPr/>
-        </p:nvSpPr>
-        <p:spPr>
-          <a:xfrm>
-            <a:off x="0" y="0"/>
-            <a:ext cx="12191695" cy="73152"/>
-          </a:xfrm>
-          <a:prstGeom prst="rect">
-            <a:avLst/>
-          </a:prstGeom>
-          <a:solidFill>
-            <a:srgbClr val="1D4ED8"/>
-          </a:solidFill>
-          <a:ln>
-            <a:noFill/>
-          </a:ln>
-        </p:spPr>
-        <p:style>
-          <a:lnRef idx="1">
-            <a:schemeClr val="accent1"/>
-          </a:lnRef>
-          <a:fillRef idx="3">
-            <a:schemeClr val="accent1"/>
-          </a:fillRef>
-          <a:effectRef idx="2">
-            <a:schemeClr val="accent1"/>
-          </a:effectRef>
-          <a:fontRef idx="minor">
-            <a:schemeClr val="lt1"/>
-          </a:fontRef>
-        </p:style>
-        <p:txBody>
           <a:bodyPr rtlCol="0" anchor="ctr"/>
-          <a:lstStyle/>
-          <a:p>
-            <a:pPr algn="ctr"/>
-          </a:p>
-        </p:txBody>
-      </p:sp>
-      <p:sp>
-        <p:nvSpPr>
-          <p:cNvPr id="3" name="Rounded Rectangle 2"/>
-          <p:cNvSpPr/>
-          <p:nvPr/>
-        </p:nvSpPr>
-        <p:spPr>
-          <a:xfrm>
-            <a:off x="731520" y="292608"/>
-            <a:ext cx="4389120" cy="347472"/>
-          </a:xfrm>
-          <a:prstGeom prst="roundRect">
-            <a:avLst/>
-          </a:prstGeom>
-          <a:solidFill>
-            <a:srgbClr val="EFF6FF"/>
-          </a:solidFill>
-          <a:ln>
-            <a:solidFill>
-              <a:srgbClr val="BFDBFE"/>
-            </a:solidFill>
-          </a:ln>
-        </p:spPr>
-        <p:style>
-          <a:lnRef idx="1">
-            <a:schemeClr val="accent1"/>
-          </a:lnRef>
-          <a:fillRef idx="3">
-            <a:schemeClr val="accent1"/>
-          </a:fillRef>
-          <a:effectRef idx="2">
-            <a:schemeClr val="accent1"/>
-          </a:effectRef>
-          <a:fontRef idx="minor">
-            <a:schemeClr val="lt1"/>
-          </a:fontRef>
-        </p:style>
-        <p:txBody>
-          <a:bodyPr rtlCol="0" anchor="ctr" wrap="none"/>
-          <a:lstStyle/>
-          <a:p>
-            <a:pPr algn="ctr">
-              <a:defRPr sz="1000" b="1">
-                <a:solidFill>
-                  <a:srgbClr val="1D4ED8"/>
-                </a:solidFill>
-              </a:defRPr>
-            </a:pPr>
-            <a:r>
-              <a:t>CHỦ ĐỀ 3 • NGUYỄN MINH CƯỜNG (23A1001D0058)</a:t>
-            </a:r>
-          </a:p>
-        </p:txBody>
-      </p:sp>
-      <p:sp>
-        <p:nvSpPr>
-          <p:cNvPr id="4" name="TextBox 3"/>
-          <p:cNvSpPr txBox="1"/>
-          <p:nvPr/>
-        </p:nvSpPr>
-        <p:spPr>
-          <a:xfrm>
-            <a:off x="731520" y="658368"/>
-            <a:ext cx="10698480" cy="548640"/>
-          </a:xfrm>
-          <a:prstGeom prst="rect">
-            <a:avLst/>
-          </a:prstGeom>
-          <a:noFill/>
-        </p:spPr>
-        <p:txBody>
-          <a:bodyPr wrap="square">
-            <a:spAutoFit/>
-          </a:bodyPr>
-          <a:lstStyle/>
-          <a:p>
-            <a:pPr>
-              <a:defRPr sz="2000" b="1">
-                <a:solidFill>
-                  <a:srgbClr val="0F172A"/>
-                </a:solidFill>
-              </a:defRPr>
-            </a:pPr>
-            <a:r>
-              <a:t>3.6. CSRF Attack: Tích Hợp Token Trong AJAX &amp; Fetch API (Buổi 9)</a:t>
-            </a:r>
-          </a:p>
-        </p:txBody>
-      </p:sp>
-      <p:sp>
-        <p:nvSpPr>
-          <p:cNvPr id="5" name="TextBox 4"/>
-          <p:cNvSpPr txBox="1"/>
-          <p:nvPr/>
-        </p:nvSpPr>
-        <p:spPr>
-          <a:xfrm>
-            <a:off x="731520" y="6492240"/>
-            <a:ext cx="10698480" cy="274320"/>
-          </a:xfrm>
-          <a:prstGeom prst="rect">
-            <a:avLst/>
-          </a:prstGeom>
-          <a:noFill/>
-        </p:spPr>
-        <p:txBody>
-          <a:bodyPr wrap="none">
-            <a:spAutoFit/>
-          </a:bodyPr>
-          <a:lstStyle/>
-          <a:p>
-            <a:pPr>
-              <a:defRPr sz="950">
-                <a:solidFill>
-                  <a:srgbClr val="64748B"/>
-                </a:solidFill>
-              </a:defRPr>
-            </a:pPr>
-            <a:r>
-              <a:t>Nhóm WNC.G01 • Trường Đại học Mở Hà Nội (HOU) • Giảng viên: ThS. Lê Hữu Dũng</a:t>
-            </a:r>
-          </a:p>
-        </p:txBody>
-      </p:sp>
-      <p:sp>
-        <p:nvSpPr>
-          <p:cNvPr id="6" name="Rounded Rectangle 5"/>
-          <p:cNvSpPr/>
-          <p:nvPr/>
-        </p:nvSpPr>
-        <p:spPr>
-          <a:xfrm>
-            <a:off x="731520" y="1280160"/>
-            <a:ext cx="10728655" cy="4846320"/>
-          </a:xfrm>
-          <a:prstGeom prst="roundRect">
-            <a:avLst/>
-          </a:prstGeom>
-          <a:solidFill>
-            <a:srgbClr val="F8FAFC"/>
-          </a:solidFill>
-          <a:ln>
-            <a:solidFill>
-              <a:srgbClr val="E2E8F0"/>
-            </a:solidFill>
-          </a:ln>
-        </p:spPr>
-        <p:style>
-          <a:lnRef idx="1">
-            <a:schemeClr val="accent1"/>
-          </a:lnRef>
-          <a:fillRef idx="3">
-            <a:schemeClr val="accent1"/>
-          </a:fillRef>
-          <a:effectRef idx="2">
-            <a:schemeClr val="accent1"/>
-          </a:effectRef>
-          <a:fontRef idx="minor">
-            <a:schemeClr val="lt1"/>
-          </a:fontRef>
-        </p:style>
-        <p:txBody>
-          <a:bodyPr rtlCol="0" anchor="ctr" wrap="square"/>
           <a:lstStyle/>
           <a:p>
             <a:pPr algn="ctr">
               <a:defRPr sz="1500" b="1">
                 <a:solidFill>
-                  <a:srgbClr val="1D4ED8"/>
-                </a:solidFill>
-              </a:defRPr>
-            </a:pPr>
-            <a:r>
-              <a:t>Kỹ Thuật Đính Kèm Token Khi Sử Dụng Fetch API Không Tải Lại Trang</a:t>
+                  <a:srgbClr val="BE123C"/>
+                </a:solidFill>
+                <a:latin typeface="Arial"/>
+              </a:defRPr>
+            </a:pPr>
+            <a:r>
+              <a:t>Đoạn Mã Nguồn Gây Lỗi Cụ Thể (C# / ASP.NET Core)</a:t>
             </a:r>
           </a:p>
           <a:p>
@@ -7618,948 +7319,60 @@
               <a:spcBef>
                 <a:spcPts val="800"/>
               </a:spcBef>
-              <a:defRPr sz="1000">
-                <a:solidFill>
-                  <a:srgbClr val="0F172A"/>
+              <a:defRPr sz="1050" b="0">
+                <a:solidFill>
+                  <a:srgbClr val="9F1239"/>
                 </a:solidFill>
                 <a:latin typeface="Courier New"/>
               </a:defRPr>
             </a:pPr>
             <a:r>
-              <a:t>// TRÍCH XUẤT TOKEN TỪ DOM VÀ ĐÍNH KÈM VÀO HTTP HEADER:</a:t>
-            </a:r>
-            <a:br/>
-            <a:r>
-              <a:t>const token = document.querySelector('input[name="__RequestVerificationToken"]').value;</a:t>
-            </a:r>
-            <a:br/>
-            <a:br/>
-            <a:r>
-              <a:t>fetch('/Csrf/TransferAjax', {</a:t>
-            </a:r>
-            <a:br/>
-            <a:r>
-              <a:t>    method: 'POST',</a:t>
-            </a:r>
-            <a:br/>
-            <a:r>
-              <a:t>    headers: {</a:t>
-            </a:r>
-            <a:br/>
-            <a:r>
-              <a:t>        'Content-Type': 'application/json',</a:t>
-            </a:r>
-            <a:br/>
-            <a:r>
-              <a:t>        'RequestVerificationToken': token // TRUYỀN TOKEN QUA HEADER</a:t>
-            </a:r>
-            <a:br/>
-            <a:r>
-              <a:t>    },</a:t>
-            </a:r>
-            <a:br/>
-            <a:r>
-              <a:t>    body: JSON.stringify({ amount: 5000000 })</a:t>
-            </a:r>
-            <a:br/>
-            <a:r>
-              <a:t>})</a:t>
-            </a:r>
-            <a:br/>
-            <a:r>
-              <a:t>.then(response =&gt; response.json());</a:t>
+              <a:t>// GHÉP CHUỖI TRỰC TIẾP TRONG CONTROLLER:</a:t>
+            </a:r>
+            <a:br/>
+            <a:r>
+              <a:t>string rawSql = $"SELECT * FROM Accounts " +</a:t>
+            </a:r>
+            <a:br/>
+            <a:r>
+              <a:t>                $"WHERE Username = '{username}' " +</a:t>
+            </a:r>
+            <a:br/>
+            <a:r>
+              <a:t>                $"AND Password = '{password}'";</a:t>
+            </a:r>
+            <a:br/>
+            <a:br/>
+            <a:r>
+              <a:t>var accounts = _context.Accounts</a:t>
+            </a:r>
+            <a:br/>
+            <a:r>
+              <a:t>                       .FromSqlRaw(rawSql)</a:t>
+            </a:r>
+            <a:br/>
+            <a:r>
+              <a:t>                       .ToList();</a:t>
             </a:r>
           </a:p>
           <a:p>
             <a:pPr>
               <a:spcBef>
-                <a:spcPts val="1200"/>
+                <a:spcPts val="1400"/>
               </a:spcBef>
-              <a:defRPr sz="1250">
-                <a:solidFill>
-                  <a:srgbClr val="334155"/>
-                </a:solidFill>
-              </a:defRPr>
-            </a:pPr>
-            <a:r>
-              <a:t>Ứng dụng trong đồ án BTL:</a:t>
-            </a:r>
-            <a:br/>
-            <a:r>
-              <a:t>Đối với các tác vụ bất đồng bộ (như đặt lịch hẹn, cập nhật ca làm việc) sử dụng Fetch API, hệ thống đính kèm header RequestVerificationToken để đảm bảo an toàn giao dịch mà không làm suy giảm trải nghiệm người dùng.</a:t>
-            </a:r>
-          </a:p>
-        </p:txBody>
-      </p:sp>
-    </p:spTree>
-  </p:cSld>
-  <p:clrMapOvr>
-    <a:masterClrMapping/>
-  </p:clrMapOvr>
-</p:sld>
-</file>
-
-<file path=ppt/slides/slide21.xml><?xml version="1.0" encoding="utf-8"?>
-<p:sld xmlns:a="http://schemas.openxmlformats.org/drawingml/2006/main" xmlns:p="http://schemas.openxmlformats.org/presentationml/2006/main" xmlns:r="http://schemas.openxmlformats.org/officeDocument/2006/relationships">
-  <p:cSld>
-    <p:spTree>
-      <p:nvGrpSpPr>
-        <p:cNvPr id="1" name=""/>
-        <p:cNvGrpSpPr/>
-        <p:nvPr/>
-      </p:nvGrpSpPr>
-      <p:grpSpPr/>
-      <p:sp>
-        <p:nvSpPr>
-          <p:cNvPr id="2" name="Rectangle 1"/>
-          <p:cNvSpPr/>
-          <p:nvPr/>
-        </p:nvSpPr>
-        <p:spPr>
-          <a:xfrm>
-            <a:off x="0" y="0"/>
-            <a:ext cx="12191695" cy="73152"/>
-          </a:xfrm>
-          <a:prstGeom prst="rect">
-            <a:avLst/>
-          </a:prstGeom>
-          <a:solidFill>
-            <a:srgbClr val="1D4ED8"/>
-          </a:solidFill>
-          <a:ln>
-            <a:noFill/>
-          </a:ln>
-        </p:spPr>
-        <p:style>
-          <a:lnRef idx="1">
-            <a:schemeClr val="accent1"/>
-          </a:lnRef>
-          <a:fillRef idx="3">
-            <a:schemeClr val="accent1"/>
-          </a:fillRef>
-          <a:effectRef idx="2">
-            <a:schemeClr val="accent1"/>
-          </a:effectRef>
-          <a:fontRef idx="minor">
-            <a:schemeClr val="lt1"/>
-          </a:fontRef>
-        </p:style>
-        <p:txBody>
-          <a:bodyPr rtlCol="0" anchor="ctr"/>
-          <a:lstStyle/>
-          <a:p>
-            <a:pPr algn="ctr"/>
-          </a:p>
-        </p:txBody>
-      </p:sp>
-      <p:sp>
-        <p:nvSpPr>
-          <p:cNvPr id="3" name="Rounded Rectangle 2"/>
-          <p:cNvSpPr/>
-          <p:nvPr/>
-        </p:nvSpPr>
-        <p:spPr>
-          <a:xfrm>
-            <a:off x="731520" y="292608"/>
-            <a:ext cx="4389120" cy="347472"/>
-          </a:xfrm>
-          <a:prstGeom prst="roundRect">
-            <a:avLst/>
-          </a:prstGeom>
-          <a:solidFill>
-            <a:srgbClr val="EFF6FF"/>
-          </a:solidFill>
-          <a:ln>
-            <a:solidFill>
-              <a:srgbClr val="BFDBFE"/>
-            </a:solidFill>
-          </a:ln>
-        </p:spPr>
-        <p:style>
-          <a:lnRef idx="1">
-            <a:schemeClr val="accent1"/>
-          </a:lnRef>
-          <a:fillRef idx="3">
-            <a:schemeClr val="accent1"/>
-          </a:fillRef>
-          <a:effectRef idx="2">
-            <a:schemeClr val="accent1"/>
-          </a:effectRef>
-          <a:fontRef idx="minor">
-            <a:schemeClr val="lt1"/>
-          </a:fontRef>
-        </p:style>
-        <p:txBody>
-          <a:bodyPr rtlCol="0" anchor="ctr" wrap="none"/>
-          <a:lstStyle/>
-          <a:p>
-            <a:pPr algn="ctr">
-              <a:defRPr sz="1000" b="1">
-                <a:solidFill>
-                  <a:srgbClr val="1D4ED8"/>
-                </a:solidFill>
-              </a:defRPr>
-            </a:pPr>
-            <a:r>
-              <a:t>OWASP TOP 10 • THỰC NGHIỆM AN TOÀN WEB</a:t>
-            </a:r>
-          </a:p>
-        </p:txBody>
-      </p:sp>
-      <p:sp>
-        <p:nvSpPr>
-          <p:cNvPr id="4" name="TextBox 3"/>
-          <p:cNvSpPr txBox="1"/>
-          <p:nvPr/>
-        </p:nvSpPr>
-        <p:spPr>
-          <a:xfrm>
-            <a:off x="731520" y="658368"/>
-            <a:ext cx="10698480" cy="548640"/>
-          </a:xfrm>
-          <a:prstGeom prst="rect">
-            <a:avLst/>
-          </a:prstGeom>
-          <a:noFill/>
-        </p:spPr>
-        <p:txBody>
-          <a:bodyPr wrap="square">
-            <a:spAutoFit/>
-          </a:bodyPr>
-          <a:lstStyle/>
-          <a:p>
-            <a:pPr>
-              <a:defRPr sz="2000" b="1">
+              <a:defRPr sz="1200" b="1">
                 <a:solidFill>
                   <a:srgbClr val="0F172A"/>
                 </a:solidFill>
-              </a:defRPr>
-            </a:pPr>
-            <a:r>
-              <a:t>Tổng Kết: So Sánh Đối Chứng 3 Lỗ Hổng An Ninh Web</a:t>
-            </a:r>
-          </a:p>
-        </p:txBody>
-      </p:sp>
-      <p:sp>
-        <p:nvSpPr>
-          <p:cNvPr id="5" name="TextBox 4"/>
-          <p:cNvSpPr txBox="1"/>
-          <p:nvPr/>
-        </p:nvSpPr>
-        <p:spPr>
-          <a:xfrm>
-            <a:off x="731520" y="6492240"/>
-            <a:ext cx="10698480" cy="274320"/>
-          </a:xfrm>
-          <a:prstGeom prst="rect">
-            <a:avLst/>
-          </a:prstGeom>
-          <a:noFill/>
-        </p:spPr>
-        <p:txBody>
-          <a:bodyPr wrap="none">
-            <a:spAutoFit/>
-          </a:bodyPr>
-          <a:lstStyle/>
-          <a:p>
-            <a:pPr>
-              <a:defRPr sz="950">
-                <a:solidFill>
-                  <a:srgbClr val="64748B"/>
-                </a:solidFill>
-              </a:defRPr>
-            </a:pPr>
-            <a:r>
-              <a:t>Nhóm WNC.G01 • Trường Đại học Mở Hà Nội (HOU) • Giảng viên: ThS. Lê Hữu Dũng</a:t>
-            </a:r>
-          </a:p>
-        </p:txBody>
-      </p:sp>
-      <p:graphicFrame>
-        <p:nvGraphicFramePr>
-          <p:cNvPr id="6" name="Table 5"/>
-          <p:cNvGraphicFramePr>
-            <a:graphicFrameLocks noGrp="1"/>
-          </p:cNvGraphicFramePr>
-          <p:nvPr/>
-        </p:nvGraphicFramePr>
-        <p:xfrm>
-          <a:off x="731520" y="1371600"/>
-          <a:ext cx="10728655" cy="4754880"/>
-        </p:xfrm>
-        <a:graphic>
-          <a:graphicData uri="http://schemas.openxmlformats.org/drawingml/2006/table">
-            <a:tbl>
-              <a:tblPr firstRow="1" bandRow="1">
-                <a:tableStyleId>{5C22544A-7EE6-4342-B048-85BDC9FD1C3A}</a:tableStyleId>
-              </a:tblPr>
-              <a:tblGrid>
-                <a:gridCol w="2682163"/>
-                <a:gridCol w="2682163"/>
-                <a:gridCol w="2682163"/>
-                <a:gridCol w="2682166"/>
-              </a:tblGrid>
-              <a:tr h="1188720">
-                <a:tc>
-                  <a:txBody>
-                    <a:bodyPr/>
-                    <a:lstStyle/>
-                    <a:p>
-                      <a:pPr>
-                        <a:defRPr b="1" sz="1200">
-                          <a:solidFill>
-                            <a:srgbClr val="FFFFFF"/>
-                          </a:solidFill>
-                        </a:defRPr>
-                      </a:pPr>
-                      <a:r>
-                        <a:t>Tiêu chí phân tích</a:t>
-                      </a:r>
-                    </a:p>
-                  </a:txBody>
-                  <a:tcPr>
-                    <a:solidFill>
-                      <a:srgbClr val="1D4ED8"/>
-                    </a:solidFill>
-                  </a:tcPr>
-                </a:tc>
-                <a:tc>
-                  <a:txBody>
-                    <a:bodyPr/>
-                    <a:lstStyle/>
-                    <a:p>
-                      <a:pPr>
-                        <a:defRPr b="1" sz="1200">
-                          <a:solidFill>
-                            <a:srgbClr val="FFFFFF"/>
-                          </a:solidFill>
-                        </a:defRPr>
-                      </a:pPr>
-                      <a:r>
-                        <a:t>SQL Injection (Học)</a:t>
-                      </a:r>
-                    </a:p>
-                  </a:txBody>
-                  <a:tcPr>
-                    <a:solidFill>
-                      <a:srgbClr val="1D4ED8"/>
-                    </a:solidFill>
-                  </a:tcPr>
-                </a:tc>
-                <a:tc>
-                  <a:txBody>
-                    <a:bodyPr/>
-                    <a:lstStyle/>
-                    <a:p>
-                      <a:pPr>
-                        <a:defRPr b="1" sz="1200">
-                          <a:solidFill>
-                            <a:srgbClr val="FFFFFF"/>
-                          </a:solidFill>
-                        </a:defRPr>
-                      </a:pPr>
-                      <a:r>
-                        <a:t>Stored XSS (Bình)</a:t>
-                      </a:r>
-                    </a:p>
-                  </a:txBody>
-                  <a:tcPr>
-                    <a:solidFill>
-                      <a:srgbClr val="1D4ED8"/>
-                    </a:solidFill>
-                  </a:tcPr>
-                </a:tc>
-                <a:tc>
-                  <a:txBody>
-                    <a:bodyPr/>
-                    <a:lstStyle/>
-                    <a:p>
-                      <a:pPr>
-                        <a:defRPr b="1" sz="1200">
-                          <a:solidFill>
-                            <a:srgbClr val="FFFFFF"/>
-                          </a:solidFill>
-                        </a:defRPr>
-                      </a:pPr>
-                      <a:r>
-                        <a:t>CSRF Attack (Cường)</a:t>
-                      </a:r>
-                    </a:p>
-                  </a:txBody>
-                  <a:tcPr>
-                    <a:solidFill>
-                      <a:srgbClr val="1D4ED8"/>
-                    </a:solidFill>
-                  </a:tcPr>
-                </a:tc>
-              </a:tr>
-              <a:tr h="1188720">
-                <a:tc>
-                  <a:txBody>
-                    <a:bodyPr/>
-                    <a:lstStyle/>
-                    <a:p>
-                      <a:pPr>
-                        <a:defRPr sz="1100">
-                          <a:solidFill>
-                            <a:srgbClr val="0F172A"/>
-                          </a:solidFill>
-                        </a:defRPr>
-                      </a:pPr>
-                      <a:r>
-                        <a:t>Mục tiêu tấn công</a:t>
-                      </a:r>
-                    </a:p>
-                  </a:txBody>
-                  <a:tcPr>
-                    <a:solidFill>
-                      <a:srgbClr val="F8FAFC"/>
-                    </a:solidFill>
-                  </a:tcPr>
-                </a:tc>
-                <a:tc>
-                  <a:txBody>
-                    <a:bodyPr/>
-                    <a:lstStyle/>
-                    <a:p>
-                      <a:pPr>
-                        <a:defRPr sz="1100">
-                          <a:solidFill>
-                            <a:srgbClr val="334155"/>
-                          </a:solidFill>
-                        </a:defRPr>
-                      </a:pPr>
-                      <a:r>
-                        <a:t>Tầng Cơ sở dữ liệu (Database Engine)</a:t>
-                      </a:r>
-                    </a:p>
-                  </a:txBody>
-                  <a:tcPr>
-                    <a:solidFill>
-                      <a:srgbClr val="F8FAFC"/>
-                    </a:solidFill>
-                  </a:tcPr>
-                </a:tc>
-                <a:tc>
-                  <a:txBody>
-                    <a:bodyPr/>
-                    <a:lstStyle/>
-                    <a:p>
-                      <a:pPr>
-                        <a:defRPr sz="1100">
-                          <a:solidFill>
-                            <a:srgbClr val="334155"/>
-                          </a:solidFill>
-                        </a:defRPr>
-                      </a:pPr>
-                      <a:r>
-                        <a:t>Tầng Trình duyệt người dùng (Client DOM)</a:t>
-                      </a:r>
-                    </a:p>
-                  </a:txBody>
-                  <a:tcPr>
-                    <a:solidFill>
-                      <a:srgbClr val="F8FAFC"/>
-                    </a:solidFill>
-                  </a:tcPr>
-                </a:tc>
-                <a:tc>
-                  <a:txBody>
-                    <a:bodyPr/>
-                    <a:lstStyle/>
-                    <a:p>
-                      <a:pPr>
-                        <a:defRPr sz="1100">
-                          <a:solidFill>
-                            <a:srgbClr val="334155"/>
-                          </a:solidFill>
-                        </a:defRPr>
-                      </a:pPr>
-                      <a:r>
-                        <a:t>Quyền hạn phiên làm việc (Session/Cookie)</a:t>
-                      </a:r>
-                    </a:p>
-                  </a:txBody>
-                  <a:tcPr>
-                    <a:solidFill>
-                      <a:srgbClr val="F8FAFC"/>
-                    </a:solidFill>
-                  </a:tcPr>
-                </a:tc>
-              </a:tr>
-              <a:tr h="1188720">
-                <a:tc>
-                  <a:txBody>
-                    <a:bodyPr/>
-                    <a:lstStyle/>
-                    <a:p>
-                      <a:pPr>
-                        <a:defRPr sz="1100">
-                          <a:solidFill>
-                            <a:srgbClr val="0F172A"/>
-                          </a:solidFill>
-                        </a:defRPr>
-                      </a:pPr>
-                      <a:r>
-                        <a:t>Mức độ rủi ro</a:t>
-                      </a:r>
-                    </a:p>
-                  </a:txBody>
-                  <a:tcPr>
-                    <a:solidFill>
-                      <a:srgbClr val="FFFFFF"/>
-                    </a:solidFill>
-                  </a:tcPr>
-                </a:tc>
-                <a:tc>
-                  <a:txBody>
-                    <a:bodyPr/>
-                    <a:lstStyle/>
-                    <a:p>
-                      <a:pPr>
-                        <a:defRPr sz="1100" b="1">
-                          <a:solidFill>
-                            <a:srgbClr val="BE123C"/>
-                          </a:solidFill>
-                        </a:defRPr>
-                      </a:pPr>
-                      <a:r>
-                        <a:t>CRITICAL (9.8 / 10.0)</a:t>
-                      </a:r>
-                    </a:p>
-                  </a:txBody>
-                  <a:tcPr>
-                    <a:solidFill>
-                      <a:srgbClr val="FFFFFF"/>
-                    </a:solidFill>
-                  </a:tcPr>
-                </a:tc>
-                <a:tc>
-                  <a:txBody>
-                    <a:bodyPr/>
-                    <a:lstStyle/>
-                    <a:p>
-                      <a:pPr>
-                        <a:defRPr sz="1100">
-                          <a:solidFill>
-                            <a:srgbClr val="334155"/>
-                          </a:solidFill>
-                        </a:defRPr>
-                      </a:pPr>
-                      <a:r>
-                        <a:t>HIGH (7.5 - 8.5 / 10.0)</a:t>
-                      </a:r>
-                    </a:p>
-                  </a:txBody>
-                  <a:tcPr>
-                    <a:solidFill>
-                      <a:srgbClr val="FFFFFF"/>
-                    </a:solidFill>
-                  </a:tcPr>
-                </a:tc>
-                <a:tc>
-                  <a:txBody>
-                    <a:bodyPr/>
-                    <a:lstStyle/>
-                    <a:p>
-                      <a:pPr>
-                        <a:defRPr sz="1100">
-                          <a:solidFill>
-                            <a:srgbClr val="334155"/>
-                          </a:solidFill>
-                        </a:defRPr>
-                      </a:pPr>
-                      <a:r>
-                        <a:t>MEDIUM / HIGH (6.5 - 8.0 / 10.0)</a:t>
-                      </a:r>
-                    </a:p>
-                  </a:txBody>
-                  <a:tcPr>
-                    <a:solidFill>
-                      <a:srgbClr val="FFFFFF"/>
-                    </a:solidFill>
-                  </a:tcPr>
-                </a:tc>
-              </a:tr>
-              <a:tr h="1188720">
-                <a:tc>
-                  <a:txBody>
-                    <a:bodyPr/>
-                    <a:lstStyle/>
-                    <a:p>
-                      <a:pPr>
-                        <a:defRPr sz="1100">
-                          <a:solidFill>
-                            <a:srgbClr val="0F172A"/>
-                          </a:solidFill>
-                        </a:defRPr>
-                      </a:pPr>
-                      <a:r>
-                        <a:t>Giải pháp phòng thủ</a:t>
-                      </a:r>
-                    </a:p>
-                  </a:txBody>
-                  <a:tcPr>
-                    <a:solidFill>
-                      <a:srgbClr val="F8FAFC"/>
-                    </a:solidFill>
-                  </a:tcPr>
-                </a:tc>
-                <a:tc>
-                  <a:txBody>
-                    <a:bodyPr/>
-                    <a:lstStyle/>
-                    <a:p>
-                      <a:pPr>
-                        <a:defRPr sz="1100">
-                          <a:solidFill>
-                            <a:srgbClr val="334155"/>
-                          </a:solidFill>
-                        </a:defRPr>
-                      </a:pPr>
-                      <a:r>
-                        <a:t>Parameterized Query / EF Core LINQ</a:t>
-                      </a:r>
-                    </a:p>
-                  </a:txBody>
-                  <a:tcPr>
-                    <a:solidFill>
-                      <a:srgbClr val="F8FAFC"/>
-                    </a:solidFill>
-                  </a:tcPr>
-                </a:tc>
-                <a:tc>
-                  <a:txBody>
-                    <a:bodyPr/>
-                    <a:lstStyle/>
-                    <a:p>
-                      <a:pPr>
-                        <a:defRPr sz="1100">
-                          <a:solidFill>
-                            <a:srgbClr val="334155"/>
-                          </a:solidFill>
-                        </a:defRPr>
-                      </a:pPr>
-                      <a:r>
-                        <a:t>Razor HTML Encoding + HttpOnly Cookie</a:t>
-                      </a:r>
-                    </a:p>
-                  </a:txBody>
-                  <a:tcPr>
-                    <a:solidFill>
-                      <a:srgbClr val="F8FAFC"/>
-                    </a:solidFill>
-                  </a:tcPr>
-                </a:tc>
-                <a:tc>
-                  <a:txBody>
-                    <a:bodyPr/>
-                    <a:lstStyle/>
-                    <a:p>
-                      <a:pPr>
-                        <a:defRPr sz="1100">
-                          <a:solidFill>
-                            <a:srgbClr val="334155"/>
-                          </a:solidFill>
-                        </a:defRPr>
-                      </a:pPr>
-                      <a:r>
-                        <a:t>Anti-Forgery Token + SameSite Cookie</a:t>
-                      </a:r>
-                    </a:p>
-                  </a:txBody>
-                  <a:tcPr>
-                    <a:solidFill>
-                      <a:srgbClr val="F8FAFC"/>
-                    </a:solidFill>
-                  </a:tcPr>
-                </a:tc>
-              </a:tr>
-            </a:tbl>
-          </a:graphicData>
-        </a:graphic>
-      </p:graphicFrame>
-    </p:spTree>
-  </p:cSld>
-  <p:clrMapOvr>
-    <a:masterClrMapping/>
-  </p:clrMapOvr>
-</p:sld>
-</file>
-
-<file path=ppt/slides/slide22.xml><?xml version="1.0" encoding="utf-8"?>
-<p:sld xmlns:a="http://schemas.openxmlformats.org/drawingml/2006/main" xmlns:p="http://schemas.openxmlformats.org/presentationml/2006/main" xmlns:r="http://schemas.openxmlformats.org/officeDocument/2006/relationships">
-  <p:cSld>
-    <p:spTree>
-      <p:nvGrpSpPr>
-        <p:cNvPr id="1" name=""/>
-        <p:cNvGrpSpPr/>
-        <p:nvPr/>
-      </p:nvGrpSpPr>
-      <p:grpSpPr/>
-      <p:sp>
-        <p:nvSpPr>
-          <p:cNvPr id="2" name="Rectangle 1"/>
-          <p:cNvSpPr/>
-          <p:nvPr/>
-        </p:nvSpPr>
-        <p:spPr>
-          <a:xfrm>
-            <a:off x="0" y="0"/>
-            <a:ext cx="12191695" cy="73152"/>
-          </a:xfrm>
-          <a:prstGeom prst="rect">
-            <a:avLst/>
-          </a:prstGeom>
-          <a:solidFill>
-            <a:srgbClr val="1D4ED8"/>
-          </a:solidFill>
-          <a:ln>
-            <a:noFill/>
-          </a:ln>
-        </p:spPr>
-        <p:style>
-          <a:lnRef idx="1">
-            <a:schemeClr val="accent1"/>
-          </a:lnRef>
-          <a:fillRef idx="3">
-            <a:schemeClr val="accent1"/>
-          </a:fillRef>
-          <a:effectRef idx="2">
-            <a:schemeClr val="accent1"/>
-          </a:effectRef>
-          <a:fontRef idx="minor">
-            <a:schemeClr val="lt1"/>
-          </a:fontRef>
-        </p:style>
-        <p:txBody>
-          <a:bodyPr rtlCol="0" anchor="ctr"/>
-          <a:lstStyle/>
-          <a:p>
-            <a:pPr algn="ctr"/>
-          </a:p>
-        </p:txBody>
-      </p:sp>
-      <p:sp>
-        <p:nvSpPr>
-          <p:cNvPr id="3" name="Rounded Rectangle 2"/>
-          <p:cNvSpPr/>
-          <p:nvPr/>
-        </p:nvSpPr>
-        <p:spPr>
-          <a:xfrm>
-            <a:off x="731520" y="292608"/>
-            <a:ext cx="4389120" cy="347472"/>
-          </a:xfrm>
-          <a:prstGeom prst="roundRect">
-            <a:avLst/>
-          </a:prstGeom>
-          <a:solidFill>
-            <a:srgbClr val="EFF6FF"/>
-          </a:solidFill>
-          <a:ln>
-            <a:solidFill>
-              <a:srgbClr val="BFDBFE"/>
-            </a:solidFill>
-          </a:ln>
-        </p:spPr>
-        <p:style>
-          <a:lnRef idx="1">
-            <a:schemeClr val="accent1"/>
-          </a:lnRef>
-          <a:fillRef idx="3">
-            <a:schemeClr val="accent1"/>
-          </a:fillRef>
-          <a:effectRef idx="2">
-            <a:schemeClr val="accent1"/>
-          </a:effectRef>
-          <a:fontRef idx="minor">
-            <a:schemeClr val="lt1"/>
-          </a:fontRef>
-        </p:style>
-        <p:txBody>
-          <a:bodyPr rtlCol="0" anchor="ctr" wrap="none"/>
-          <a:lstStyle/>
-          <a:p>
-            <a:pPr algn="ctr">
-              <a:defRPr sz="1000" b="1">
-                <a:solidFill>
-                  <a:srgbClr val="1D4ED8"/>
-                </a:solidFill>
-              </a:defRPr>
-            </a:pPr>
-            <a:r>
-              <a:t>OWASP TOP 10 • THỰC NGHIỆM AN TOÀN WEB</a:t>
-            </a:r>
-          </a:p>
-        </p:txBody>
-      </p:sp>
-      <p:sp>
-        <p:nvSpPr>
-          <p:cNvPr id="4" name="TextBox 3"/>
-          <p:cNvSpPr txBox="1"/>
-          <p:nvPr/>
-        </p:nvSpPr>
-        <p:spPr>
-          <a:xfrm>
-            <a:off x="731520" y="658368"/>
-            <a:ext cx="10698480" cy="548640"/>
-          </a:xfrm>
-          <a:prstGeom prst="rect">
-            <a:avLst/>
-          </a:prstGeom>
-          <a:noFill/>
-        </p:spPr>
-        <p:txBody>
-          <a:bodyPr wrap="square">
-            <a:spAutoFit/>
-          </a:bodyPr>
-          <a:lstStyle/>
-          <a:p>
-            <a:pPr>
-              <a:defRPr sz="2000" b="1">
-                <a:solidFill>
-                  <a:srgbClr val="0F172A"/>
-                </a:solidFill>
-              </a:defRPr>
-            </a:pPr>
-            <a:r>
-              <a:t>Áp Dụng Kiến Trúc An Toàn Vào Đồ Án Website Tư Vấn Trực Tuyến</a:t>
-            </a:r>
-          </a:p>
-        </p:txBody>
-      </p:sp>
-      <p:sp>
-        <p:nvSpPr>
-          <p:cNvPr id="5" name="TextBox 4"/>
-          <p:cNvSpPr txBox="1"/>
-          <p:nvPr/>
-        </p:nvSpPr>
-        <p:spPr>
-          <a:xfrm>
-            <a:off x="731520" y="6492240"/>
-            <a:ext cx="10698480" cy="274320"/>
-          </a:xfrm>
-          <a:prstGeom prst="rect">
-            <a:avLst/>
-          </a:prstGeom>
-          <a:noFill/>
-        </p:spPr>
-        <p:txBody>
-          <a:bodyPr wrap="none">
-            <a:spAutoFit/>
-          </a:bodyPr>
-          <a:lstStyle/>
-          <a:p>
-            <a:pPr>
-              <a:defRPr sz="950">
-                <a:solidFill>
-                  <a:srgbClr val="64748B"/>
-                </a:solidFill>
-              </a:defRPr>
-            </a:pPr>
-            <a:r>
-              <a:t>Nhóm WNC.G01 • Trường Đại học Mở Hà Nội (HOU) • Giảng viên: ThS. Lê Hữu Dũng</a:t>
-            </a:r>
-          </a:p>
-        </p:txBody>
-      </p:sp>
-      <p:sp>
-        <p:nvSpPr>
-          <p:cNvPr id="6" name="Rounded Rectangle 5"/>
-          <p:cNvSpPr/>
-          <p:nvPr/>
-        </p:nvSpPr>
-        <p:spPr>
-          <a:xfrm>
-            <a:off x="731520" y="1280160"/>
-            <a:ext cx="10728655" cy="4846320"/>
-          </a:xfrm>
-          <a:prstGeom prst="roundRect">
-            <a:avLst/>
-          </a:prstGeom>
-          <a:solidFill>
-            <a:srgbClr val="F8FAFC"/>
-          </a:solidFill>
-          <a:ln>
-            <a:solidFill>
-              <a:srgbClr val="E2E8F0"/>
-            </a:solidFill>
-          </a:ln>
-        </p:spPr>
-        <p:style>
-          <a:lnRef idx="1">
-            <a:schemeClr val="accent1"/>
-          </a:lnRef>
-          <a:fillRef idx="3">
-            <a:schemeClr val="accent1"/>
-          </a:fillRef>
-          <a:effectRef idx="2">
-            <a:schemeClr val="accent1"/>
-          </a:effectRef>
-          <a:fontRef idx="minor">
-            <a:schemeClr val="lt1"/>
-          </a:fontRef>
-        </p:style>
-        <p:txBody>
-          <a:bodyPr rtlCol="0" anchor="ctr" wrap="square"/>
-          <a:lstStyle/>
-          <a:p>
-            <a:pPr algn="ctr">
-              <a:defRPr sz="1600" b="1">
-                <a:solidFill>
-                  <a:srgbClr val="1D4ED8"/>
-                </a:solidFill>
-              </a:defRPr>
-            </a:pPr>
-            <a:r>
-              <a:t>ÁP DỤNG KIẾN TRÚC BẢO MẬT ĐA TẦNG CHO BTL (WNC.G01):</a:t>
-            </a:r>
-          </a:p>
-          <a:p>
-            <a:pPr>
-              <a:spcBef>
-                <a:spcPts val="1000"/>
-              </a:spcBef>
-              <a:defRPr sz="1250">
-                <a:solidFill>
-                  <a:srgbClr val="334155"/>
-                </a:solidFill>
-              </a:defRPr>
-            </a:pPr>
-            <a:r>
-              <a:t>1. Kiến trúc Security by Design (Buổi 8): Tích hợp đồng bộ các lớp bảo vệ ngay từ giai đoạn thiết kế hệ thống, phân quyền chặt chẽ theo 3 Role (Customer, Specialist, Admin).</a:t>
-            </a:r>
-            <a:br/>
-            <a:br/>
-            <a:r>
-              <a:t>2. Tầng CSDL (Nguyễn Danh Học): Toàn bộ thao tác nghiệp vụ khai thác CSDL qua Entity Framework Core Code-First với LINQ Parameterized, loại bỏ hoàn toàn việc ghép chuỗi truy vấn.</a:t>
-            </a:r>
-            <a:br/>
-            <a:br/>
-            <a:r>
-              <a:t>3. Tầng Giao diện (Nguyễn Thanh Bình): Dữ liệu phản hồi và đánh giá chuyên gia được Razor View mã hóa tự động, Cookie thiết lập đầy đủ thuộc tính HttpOnly và Secure.</a:t>
-            </a:r>
-            <a:br/>
-            <a:br/>
-            <a:r>
-              <a:t>4. Tầng Giao dịch (Nguyễn Minh Cường): Bắt buộc kiểm tra Anti-Forgery Token cho toàn bộ các biểu mẫu POST và yêu cầu Fetch API đặt lịch hẹn, giao dịch ví.</a:t>
-            </a:r>
-          </a:p>
-          <a:p>
-            <a:pPr>
-              <a:spcBef>
-                <a:spcPts val="1800"/>
-              </a:spcBef>
-              <a:defRPr sz="1400" b="1">
-                <a:solidFill>
-                  <a:srgbClr val="BE123C"/>
-                </a:solidFill>
-              </a:defRPr>
-            </a:pPr>
-            <a:r>
-              <a:t>Kính chúc thầy sức khỏe. Nhóm WNC.G01 xin trân trọng cảm ơn!</a:t>
+                <a:latin typeface="Arial"/>
+              </a:defRPr>
+            </a:pPr>
+            <a:r>
+              <a:t>Điểm mù kỹ thuật:</a:t>
+            </a:r>
+            <a:br/>
+            <a:r>
+              <a:t>Lập trình viên giả định đầu vào '{username}' luôn là văn bản thông thường. Khi kẻ tấn công chèn ký tự nháy đơn ('), ranh giới giữa Dữ liệu (Data) và Cú pháp lệnh (Code) bị xóa nhòa hoàn toàn.</a:t>
             </a:r>
           </a:p>
         </p:txBody>
@@ -8633,8 +7446,8 @@
         </p:nvSpPr>
         <p:spPr>
           <a:xfrm>
-            <a:off x="731520" y="292608"/>
-            <a:ext cx="4389120" cy="347472"/>
+            <a:off x="731520" y="256032"/>
+            <a:ext cx="4389120" cy="329184"/>
           </a:xfrm>
           <a:prstGeom prst="roundRect">
             <a:avLst/>
@@ -8671,6 +7484,7 @@
                 <a:solidFill>
                   <a:srgbClr val="1D4ED8"/>
                 </a:solidFill>
+                <a:latin typeface="Arial"/>
               </a:defRPr>
             </a:pPr>
             <a:r>
@@ -8687,7 +7501,7 @@
         </p:nvSpPr>
         <p:spPr>
           <a:xfrm>
-            <a:off x="731520" y="658368"/>
+            <a:off x="731520" y="621792"/>
             <a:ext cx="10698480" cy="548640"/>
           </a:xfrm>
           <a:prstGeom prst="rect">
@@ -8706,10 +7520,11 @@
                 <a:solidFill>
                   <a:srgbClr val="0F172A"/>
                 </a:solidFill>
-              </a:defRPr>
-            </a:pPr>
-            <a:r>
-              <a:t>1.1. SQL Injection: Bản Chất Kỹ Thuật &amp; Lỗi Ghép Chuỗi</a:t>
+                <a:latin typeface="Arial"/>
+              </a:defRPr>
+            </a:pPr>
+            <a:r>
+              <a:t>1.2. SQL Injection: Phân Loại Kỹ Thuật OWASP &amp; Đánh Giá Rủi Ro</a:t>
             </a:r>
           </a:p>
         </p:txBody>
@@ -8722,7 +7537,7 @@
         </p:nvSpPr>
         <p:spPr>
           <a:xfrm>
-            <a:off x="731520" y="6492240"/>
+            <a:off x="731520" y="6537960"/>
             <a:ext cx="10698480" cy="274320"/>
           </a:xfrm>
           <a:prstGeom prst="rect">
@@ -8731,7 +7546,7 @@
           <a:noFill/>
         </p:spPr>
         <p:txBody>
-          <a:bodyPr wrap="none">
+          <a:bodyPr wrap="none" lIns="0" rIns="0" tIns="0" bIns="0">
             <a:spAutoFit/>
           </a:bodyPr>
           <a:lstStyle/>
@@ -8741,6 +7556,7 @@
                 <a:solidFill>
                   <a:srgbClr val="64748B"/>
                 </a:solidFill>
+                <a:latin typeface="Arial"/>
               </a:defRPr>
             </a:pPr>
             <a:r>
@@ -8757,89 +7573,8 @@
         </p:nvSpPr>
         <p:spPr>
           <a:xfrm>
-            <a:off x="731520" y="1280160"/>
-            <a:ext cx="5166360" cy="4846320"/>
-          </a:xfrm>
-          <a:prstGeom prst="roundRect">
-            <a:avLst/>
-          </a:prstGeom>
-          <a:solidFill>
-            <a:srgbClr val="F8FAFC"/>
-          </a:solidFill>
-          <a:ln>
-            <a:solidFill>
-              <a:srgbClr val="E2E8F0"/>
-            </a:solidFill>
-          </a:ln>
-        </p:spPr>
-        <p:style>
-          <a:lnRef idx="1">
-            <a:schemeClr val="accent1"/>
-          </a:lnRef>
-          <a:fillRef idx="3">
-            <a:schemeClr val="accent1"/>
-          </a:fillRef>
-          <a:effectRef idx="2">
-            <a:schemeClr val="accent1"/>
-          </a:effectRef>
-          <a:fontRef idx="minor">
-            <a:schemeClr val="lt1"/>
-          </a:fontRef>
-        </p:style>
-        <p:txBody>
-          <a:bodyPr rtlCol="0" anchor="ctr" wrap="square"/>
-          <a:lstStyle/>
-          <a:p>
-            <a:pPr algn="ctr">
-              <a:defRPr sz="1500" b="1">
-                <a:solidFill>
-                  <a:srgbClr val="BE123C"/>
-                </a:solidFill>
-              </a:defRPr>
-            </a:pPr>
-            <a:r>
-              <a:t>Nguyên Nhân Kỹ Thuật Cốt Lõi</a:t>
-            </a:r>
-          </a:p>
-          <a:p>
-            <a:pPr>
-              <a:spcBef>
-                <a:spcPts val="800"/>
-              </a:spcBef>
-              <a:defRPr sz="1250">
-                <a:solidFill>
-                  <a:srgbClr val="334155"/>
-                </a:solidFill>
-              </a:defRPr>
-            </a:pPr>
-            <a:r>
-              <a:t>• Thiếu sự phân tách giữa Dữ liệu (Data) và Cú pháp lệnh (Code).</a:t>
-            </a:r>
-            <a:br/>
-            <a:r>
-              <a:t>• Ghép chuỗi đầu vào trực tiếp (String Concatenation / Interpolation) vào truy vấn SQL.</a:t>
-            </a:r>
-            <a:br/>
-            <a:r>
-              <a:t>• Trình thông dịch CSDL không thể phân định ranh giới giữa dữ liệu người dùng và cấu trúc truy vấn của hệ thống.</a:t>
-            </a:r>
-            <a:br/>
-            <a:r>
-              <a:t>• Ký tự điều khiển (', --, ;) làm thay đổi luồng thực thi của câu lệnh trên máy chủ SQL Server.</a:t>
-            </a:r>
-          </a:p>
-        </p:txBody>
-      </p:sp>
-      <p:sp>
-        <p:nvSpPr>
-          <p:cNvPr id="7" name="Rounded Rectangle 6"/>
-          <p:cNvSpPr/>
-          <p:nvPr/>
-        </p:nvSpPr>
-        <p:spPr>
-          <a:xfrm>
-            <a:off x="6263640" y="1280160"/>
-            <a:ext cx="5166360" cy="4846320"/>
+            <a:off x="731520" y="1234440"/>
+            <a:ext cx="3328416" cy="4937760"/>
           </a:xfrm>
           <a:prstGeom prst="roundRect">
             <a:avLst/>
@@ -8868,74 +7603,213 @@
           </a:fontRef>
         </p:style>
         <p:txBody>
-          <a:bodyPr rtlCol="0" anchor="ctr" wrap="square"/>
+          <a:bodyPr rtlCol="0" anchor="ctr"/>
           <a:lstStyle/>
           <a:p>
             <a:pPr algn="ctr">
-              <a:defRPr sz="1500" b="1">
+              <a:defRPr sz="1400" b="1">
                 <a:solidFill>
                   <a:srgbClr val="BE123C"/>
                 </a:solidFill>
-              </a:defRPr>
-            </a:pPr>
-            <a:r>
-              <a:t>Minh Họa Đoạn Mã Nguồn Gây Lỗi</a:t>
+                <a:latin typeface="Arial"/>
+              </a:defRPr>
+            </a:pPr>
+            <a:r>
+              <a:t>VƯỢT QUA XÁC THỰC</a:t>
+            </a:r>
+            <a:br/>
+            <a:r>
+              <a:t>(Authentication Bypass)</a:t>
             </a:r>
           </a:p>
           <a:p>
             <a:pPr>
               <a:spcBef>
-                <a:spcPts val="800"/>
+                <a:spcPts val="1000"/>
               </a:spcBef>
-              <a:defRPr sz="1100">
-                <a:solidFill>
-                  <a:srgbClr val="9F1239"/>
-                </a:solidFill>
-                <a:latin typeface="Courier New"/>
-              </a:defRPr>
-            </a:pPr>
-            <a:r>
-              <a:t>// Nối chuỗi trực tiếp từ tham số người dùng:</a:t>
-            </a:r>
-            <a:br/>
-            <a:r>
-              <a:t>string rawSql = $"SELECT * FROM Accounts " +</a:t>
-            </a:r>
-            <a:br/>
-            <a:r>
-              <a:t>                $"WHERE Username = '{username}' " +</a:t>
-            </a:r>
-            <a:br/>
-            <a:r>
-              <a:t>                $"AND Password = '{password}'";</a:t>
-            </a:r>
-            <a:br/>
-            <a:br/>
-            <a:r>
-              <a:t>var accounts = _context.Accounts</a:t>
-            </a:r>
-            <a:br/>
-            <a:r>
-              <a:t>                       .FromSqlRaw(rawSql)</a:t>
-            </a:r>
-            <a:br/>
-            <a:r>
-              <a:t>                       .ToList();</a:t>
+              <a:defRPr sz="1200" b="0">
+                <a:solidFill>
+                  <a:srgbClr val="334155"/>
+                </a:solidFill>
+                <a:latin typeface="Arial"/>
+              </a:defRPr>
+            </a:pPr>
+            <a:r>
+              <a:t>• Cơ chế: Thay đổi cấu trúc logic của mệnh đề WHERE thành luôn đúng (TRUE).</a:t>
+            </a:r>
+            <a:br/>
+            <a:r>
+              <a:t>• Kẻ tấn công đăng nhập thẳng vào tài khoản Quản trị viên (Admin) mà không cần cung cấp mật khẩu.</a:t>
+            </a:r>
+            <a:br/>
+            <a:r>
+              <a:t>• Chiếm đoạt phiên làm việc hợp lệ và thay đổi quyền hạn người dùng trên hệ thống.</a:t>
+            </a:r>
+          </a:p>
+        </p:txBody>
+      </p:sp>
+      <p:sp>
+        <p:nvSpPr>
+          <p:cNvPr id="7" name="Rounded Rectangle 6"/>
+          <p:cNvSpPr/>
+          <p:nvPr/>
+        </p:nvSpPr>
+        <p:spPr>
+          <a:xfrm>
+            <a:off x="4416552" y="1234440"/>
+            <a:ext cx="3328416" cy="4937760"/>
+          </a:xfrm>
+          <a:prstGeom prst="roundRect">
+            <a:avLst/>
+          </a:prstGeom>
+          <a:solidFill>
+            <a:srgbClr val="FFFBEB"/>
+          </a:solidFill>
+          <a:ln>
+            <a:solidFill>
+              <a:srgbClr val="FEF08A"/>
+            </a:solidFill>
+          </a:ln>
+        </p:spPr>
+        <p:style>
+          <a:lnRef idx="1">
+            <a:schemeClr val="accent1"/>
+          </a:lnRef>
+          <a:fillRef idx="3">
+            <a:schemeClr val="accent1"/>
+          </a:fillRef>
+          <a:effectRef idx="2">
+            <a:schemeClr val="accent1"/>
+          </a:effectRef>
+          <a:fontRef idx="minor">
+            <a:schemeClr val="lt1"/>
+          </a:fontRef>
+        </p:style>
+        <p:txBody>
+          <a:bodyPr rtlCol="0" anchor="ctr"/>
+          <a:lstStyle/>
+          <a:p>
+            <a:pPr algn="ctr">
+              <a:defRPr sz="1400" b="1">
+                <a:solidFill>
+                  <a:srgbClr val="B45309"/>
+                </a:solidFill>
+                <a:latin typeface="Arial"/>
+              </a:defRPr>
+            </a:pPr>
+            <a:r>
+              <a:t>TRÍCH XUẤT CƠ SỞ DỮ LIỆU</a:t>
+            </a:r>
+            <a:br/>
+            <a:r>
+              <a:t>(Data Exfiltration)</a:t>
             </a:r>
           </a:p>
           <a:p>
             <a:pPr>
               <a:spcBef>
-                <a:spcPts val="1400"/>
+                <a:spcPts val="1000"/>
               </a:spcBef>
-              <a:defRPr sz="1200">
-                <a:solidFill>
-                  <a:srgbClr val="0F172A"/>
-                </a:solidFill>
-              </a:defRPr>
-            </a:pPr>
-            <a:r>
-              <a:t>Lỗ hổng phát sinh khi lập trình viên giả định đầu vào luôn là văn bản chuẩn. Ký tự nháy đơn (') sẽ đóng sớm chuỗi giá trị và chuyển phần còn lại thành cấu trúc điều khiển.</a:t>
+              <a:defRPr sz="1200" b="0">
+                <a:solidFill>
+                  <a:srgbClr val="334155"/>
+                </a:solidFill>
+                <a:latin typeface="Arial"/>
+              </a:defRPr>
+            </a:pPr>
+            <a:r>
+              <a:t>• Kỹ thuật Union-Based: Ghép nối bảng dữ liệu nhạy cảm vào kết quả truy vấn thông thường.</a:t>
+            </a:r>
+            <a:br/>
+            <a:r>
+              <a:t>• Kỹ thuật Error-Based / Blind: Suy luận dữ liệu qua thông báo lỗi hoặc độ trễ thời gian (Time Delay).</a:t>
+            </a:r>
+            <a:br/>
+            <a:r>
+              <a:t>• Làm rò rỉ toàn bộ hồ sơ khách hàng, mật khẩu và dữ liệu tài chính.</a:t>
+            </a:r>
+          </a:p>
+        </p:txBody>
+      </p:sp>
+      <p:sp>
+        <p:nvSpPr>
+          <p:cNvPr id="8" name="Rounded Rectangle 7"/>
+          <p:cNvSpPr/>
+          <p:nvPr/>
+        </p:nvSpPr>
+        <p:spPr>
+          <a:xfrm>
+            <a:off x="8101584" y="1234440"/>
+            <a:ext cx="3328416" cy="4937760"/>
+          </a:xfrm>
+          <a:prstGeom prst="roundRect">
+            <a:avLst/>
+          </a:prstGeom>
+          <a:solidFill>
+            <a:srgbClr val="EFF6FF"/>
+          </a:solidFill>
+          <a:ln>
+            <a:solidFill>
+              <a:srgbClr val="BFDBFE"/>
+            </a:solidFill>
+          </a:ln>
+        </p:spPr>
+        <p:style>
+          <a:lnRef idx="1">
+            <a:schemeClr val="accent1"/>
+          </a:lnRef>
+          <a:fillRef idx="3">
+            <a:schemeClr val="accent1"/>
+          </a:fillRef>
+          <a:effectRef idx="2">
+            <a:schemeClr val="accent1"/>
+          </a:effectRef>
+          <a:fontRef idx="minor">
+            <a:schemeClr val="lt1"/>
+          </a:fontRef>
+        </p:style>
+        <p:txBody>
+          <a:bodyPr rtlCol="0" anchor="ctr"/>
+          <a:lstStyle/>
+          <a:p>
+            <a:pPr algn="ctr">
+              <a:defRPr sz="1400" b="1">
+                <a:solidFill>
+                  <a:srgbClr val="1D4ED8"/>
+                </a:solidFill>
+                <a:latin typeface="Arial"/>
+              </a:defRPr>
+            </a:pPr>
+            <a:r>
+              <a:t>PHÁ HỦY / THỰC THI LỆNH</a:t>
+            </a:r>
+            <a:br/>
+            <a:r>
+              <a:t>(System Takeover)</a:t>
+            </a:r>
+          </a:p>
+          <a:p>
+            <a:pPr>
+              <a:spcBef>
+                <a:spcPts val="1000"/>
+              </a:spcBef>
+              <a:defRPr sz="1200" b="0">
+                <a:solidFill>
+                  <a:srgbClr val="334155"/>
+                </a:solidFill>
+                <a:latin typeface="Arial"/>
+              </a:defRPr>
+            </a:pPr>
+            <a:r>
+              <a:t>• Can thiệp DDL: Thực thi câu lệnh DROP TABLE, TRUNCATE làm sập dịch vụ.</a:t>
+            </a:r>
+            <a:br/>
+            <a:r>
+              <a:t>• Can thiệp DML: Thay đổi số dư ví, cấp đặc quyền trái phép.</a:t>
+            </a:r>
+            <a:br/>
+            <a:r>
+              <a:t>• Thực thi lệnh hệ điều hành: Kích hoạt thủ tục xp_cmdshell trên máy chủ SQL Server nếu cấu hình thiếu an toàn.</a:t>
             </a:r>
           </a:p>
         </p:txBody>
@@ -9009,8 +7883,8 @@
         </p:nvSpPr>
         <p:spPr>
           <a:xfrm>
-            <a:off x="731520" y="292608"/>
-            <a:ext cx="4389120" cy="347472"/>
+            <a:off x="731520" y="256032"/>
+            <a:ext cx="4389120" cy="329184"/>
           </a:xfrm>
           <a:prstGeom prst="roundRect">
             <a:avLst/>
@@ -9047,6 +7921,7 @@
                 <a:solidFill>
                   <a:srgbClr val="1D4ED8"/>
                 </a:solidFill>
+                <a:latin typeface="Arial"/>
               </a:defRPr>
             </a:pPr>
             <a:r>
@@ -9063,7 +7938,7 @@
         </p:nvSpPr>
         <p:spPr>
           <a:xfrm>
-            <a:off x="731520" y="658368"/>
+            <a:off x="731520" y="621792"/>
             <a:ext cx="10698480" cy="548640"/>
           </a:xfrm>
           <a:prstGeom prst="rect">
@@ -9082,10 +7957,11 @@
                 <a:solidFill>
                   <a:srgbClr val="0F172A"/>
                 </a:solidFill>
-              </a:defRPr>
-            </a:pPr>
-            <a:r>
-              <a:t>1.2. SQL Injection: Đánh Giá Tác Động An Ninh (CVSS 9.8)</a:t>
+                <a:latin typeface="Arial"/>
+              </a:defRPr>
+            </a:pPr>
+            <a:r>
+              <a:t>1.3. SQL Injection: Phân Tích Cấu Trúc Khai Thác Của Payload</a:t>
             </a:r>
           </a:p>
         </p:txBody>
@@ -9098,7 +7974,7 @@
         </p:nvSpPr>
         <p:spPr>
           <a:xfrm>
-            <a:off x="731520" y="6492240"/>
+            <a:off x="731520" y="6537960"/>
             <a:ext cx="10698480" cy="274320"/>
           </a:xfrm>
           <a:prstGeom prst="rect">
@@ -9107,7 +7983,7 @@
           <a:noFill/>
         </p:spPr>
         <p:txBody>
-          <a:bodyPr wrap="none">
+          <a:bodyPr wrap="none" lIns="0" rIns="0" tIns="0" bIns="0">
             <a:spAutoFit/>
           </a:bodyPr>
           <a:lstStyle/>
@@ -9117,6 +7993,7 @@
                 <a:solidFill>
                   <a:srgbClr val="64748B"/>
                 </a:solidFill>
+                <a:latin typeface="Arial"/>
               </a:defRPr>
             </a:pPr>
             <a:r>
@@ -9133,18 +8010,18 @@
         </p:nvSpPr>
         <p:spPr>
           <a:xfrm>
-            <a:off x="731520" y="1280160"/>
-            <a:ext cx="3328416" cy="4846320"/>
+            <a:off x="731520" y="1234440"/>
+            <a:ext cx="10728655" cy="4937760"/>
           </a:xfrm>
           <a:prstGeom prst="roundRect">
             <a:avLst/>
           </a:prstGeom>
           <a:solidFill>
-            <a:srgbClr val="FFF1F2"/>
+            <a:srgbClr val="F8FAFC"/>
           </a:solidFill>
           <a:ln>
             <a:solidFill>
-              <a:srgbClr val="FECDD3"/>
+              <a:srgbClr val="E2E8F0"/>
             </a:solidFill>
           </a:ln>
         </p:spPr>
@@ -9163,22 +8040,43 @@
           </a:fontRef>
         </p:style>
         <p:txBody>
-          <a:bodyPr rtlCol="0" anchor="ctr" wrap="square"/>
+          <a:bodyPr rtlCol="0" anchor="ctr"/>
           <a:lstStyle/>
           <a:p>
             <a:pPr algn="ctr">
-              <a:defRPr sz="1400" b="1">
+              <a:defRPr sz="1500" b="1">
                 <a:solidFill>
                   <a:srgbClr val="BE123C"/>
                 </a:solidFill>
-              </a:defRPr>
-            </a:pPr>
-            <a:r>
-              <a:t>VƯỢT QUA XÁC THỰC</a:t>
-            </a:r>
-            <a:br/>
-            <a:r>
-              <a:t>(Authentication Bypass)</a:t>
+                <a:latin typeface="Arial"/>
+              </a:defRPr>
+            </a:pPr>
+            <a:r>
+              <a:t>Kịch Bản: Bypass Đăng Nhập Với Chuỗi Khai Thác ' OR '1'='1' --</a:t>
+            </a:r>
+          </a:p>
+          <a:p>
+            <a:pPr>
+              <a:spcBef>
+                <a:spcPts val="600"/>
+              </a:spcBef>
+              <a:defRPr sz="1200" b="1">
+                <a:solidFill>
+                  <a:srgbClr val="1D4ED8"/>
+                </a:solidFill>
+                <a:latin typeface="Courier New"/>
+              </a:defRPr>
+            </a:pPr>
+            <a:r>
+              <a:t>Giá trị Username đưa vào: ' OR '1'='1' --  | Mật khẩu: (tùy ý hoặc để trống)</a:t>
+            </a:r>
+            <a:br/>
+            <a:r>
+              <a:t>Truy vấn được máy chủ SQL Server phân tích &amp; thông dịch:</a:t>
+            </a:r>
+            <a:br/>
+            <a:r>
+              <a:t>SELECT * FROM Accounts WHERE Username = '' OR '1'='1' --' AND Password = 'xyz'</a:t>
             </a:r>
           </a:p>
           <a:p>
@@ -9186,80 +8084,27 @@
               <a:spcBef>
                 <a:spcPts val="1000"/>
               </a:spcBef>
-              <a:defRPr sz="1200">
+              <a:defRPr sz="1250" b="0">
                 <a:solidFill>
                   <a:srgbClr val="334155"/>
                 </a:solidFill>
-              </a:defRPr>
-            </a:pPr>
-            <a:r>
-              <a:t>• Không cần thông tin xác thực hợp lệ.</a:t>
-            </a:r>
-            <a:br/>
-            <a:r>
-              <a:t>• Bỏ qua bước kiểm tra mật khẩu để đăng nhập tài khoản quản trị.</a:t>
-            </a:r>
-            <a:br/>
-            <a:r>
-              <a:t>• Chiếm đoạt phiên làm việc và thay đổi quyền hạn người dùng trên hệ thống.</a:t>
-            </a:r>
-          </a:p>
-        </p:txBody>
-      </p:sp>
-      <p:sp>
-        <p:nvSpPr>
-          <p:cNvPr id="7" name="Rounded Rectangle 6"/>
-          <p:cNvSpPr/>
-          <p:nvPr/>
-        </p:nvSpPr>
-        <p:spPr>
-          <a:xfrm>
-            <a:off x="4416552" y="1280160"/>
-            <a:ext cx="3328416" cy="4846320"/>
-          </a:xfrm>
-          <a:prstGeom prst="roundRect">
-            <a:avLst/>
-          </a:prstGeom>
-          <a:solidFill>
-            <a:srgbClr val="FFFBEB"/>
-          </a:solidFill>
-          <a:ln>
-            <a:solidFill>
-              <a:srgbClr val="FEF08A"/>
-            </a:solidFill>
-          </a:ln>
-        </p:spPr>
-        <p:style>
-          <a:lnRef idx="1">
-            <a:schemeClr val="accent1"/>
-          </a:lnRef>
-          <a:fillRef idx="3">
-            <a:schemeClr val="accent1"/>
-          </a:fillRef>
-          <a:effectRef idx="2">
-            <a:schemeClr val="accent1"/>
-          </a:effectRef>
-          <a:fontRef idx="minor">
-            <a:schemeClr val="lt1"/>
-          </a:fontRef>
-        </p:style>
-        <p:txBody>
-          <a:bodyPr rtlCol="0" anchor="ctr" wrap="square"/>
-          <a:lstStyle/>
-          <a:p>
-            <a:pPr algn="ctr">
-              <a:defRPr sz="1400" b="1">
-                <a:solidFill>
-                  <a:srgbClr val="B45309"/>
-                </a:solidFill>
-              </a:defRPr>
-            </a:pPr>
-            <a:r>
-              <a:t>TRÍCH XUẤT CƠ SỞ DỮ LIỆU</a:t>
-            </a:r>
-            <a:br/>
-            <a:r>
-              <a:t>(Data Exfiltration)</a:t>
+                <a:latin typeface="Arial"/>
+              </a:defRPr>
+            </a:pPr>
+            <a:r>
+              <a:t>Giải Phẫu 3 Thành Phần Khai Thác Cốt Lõi:</a:t>
+            </a:r>
+            <a:br/>
+            <a:r>
+              <a:t>1. Dấu nháy đơn (') : Đóng sớm chuỗi ký tự của trường Username, chuyển ngữ cảnh về cú pháp lệnh SQL.</a:t>
+            </a:r>
+            <a:br/>
+            <a:r>
+              <a:t>2. Mệnh đề OR '1'='1' : Biểu thức logic chân lý (luôn TRUE với mọi bản ghi trong bảng Accounts, khiến toàn bộ điều kiện lọc bị vô hiệu).</a:t>
+            </a:r>
+            <a:br/>
+            <a:r>
+              <a:t>3. Ký tự chú thích (--) : Báo cho máy chủ SQL bỏ qua toàn bộ phần kiểm tra mật khẩu phía sau (AND Password = '...').</a:t>
             </a:r>
           </a:p>
           <a:p>
@@ -9267,103 +8112,23 @@
               <a:spcBef>
                 <a:spcPts val="1000"/>
               </a:spcBef>
-              <a:defRPr sz="1200">
-                <a:solidFill>
-                  <a:srgbClr val="334155"/>
-                </a:solidFill>
-              </a:defRPr>
-            </a:pPr>
-            <a:r>
-              <a:t>• Trích xuất thông tin người dùng, hồ sơ chuyên gia và số dư ví điện tử.</a:t>
-            </a:r>
-            <a:br/>
-            <a:r>
-              <a:t>• Làm lộ mật khẩu và các thông tin cá nhân lưu trong bảng CSDL.</a:t>
-            </a:r>
-            <a:br/>
-            <a:r>
-              <a:t>• Vi phạm quy định về bảo mật dữ liệu người dùng.</a:t>
-            </a:r>
-          </a:p>
-        </p:txBody>
-      </p:sp>
-      <p:sp>
-        <p:nvSpPr>
-          <p:cNvPr id="8" name="Rounded Rectangle 7"/>
-          <p:cNvSpPr/>
-          <p:nvPr/>
-        </p:nvSpPr>
-        <p:spPr>
-          <a:xfrm>
-            <a:off x="8101584" y="1280160"/>
-            <a:ext cx="3328416" cy="4846320"/>
-          </a:xfrm>
-          <a:prstGeom prst="roundRect">
-            <a:avLst/>
-          </a:prstGeom>
-          <a:solidFill>
-            <a:srgbClr val="EFF6FF"/>
-          </a:solidFill>
-          <a:ln>
-            <a:solidFill>
-              <a:srgbClr val="BFDBFE"/>
-            </a:solidFill>
-          </a:ln>
-        </p:spPr>
-        <p:style>
-          <a:lnRef idx="1">
-            <a:schemeClr val="accent1"/>
-          </a:lnRef>
-          <a:fillRef idx="3">
-            <a:schemeClr val="accent1"/>
-          </a:fillRef>
-          <a:effectRef idx="2">
-            <a:schemeClr val="accent1"/>
-          </a:effectRef>
-          <a:fontRef idx="minor">
-            <a:schemeClr val="lt1"/>
-          </a:fontRef>
-        </p:style>
-        <p:txBody>
-          <a:bodyPr rtlCol="0" anchor="ctr" wrap="square"/>
-          <a:lstStyle/>
-          <a:p>
-            <a:pPr algn="ctr">
-              <a:defRPr sz="1400" b="1">
-                <a:solidFill>
-                  <a:srgbClr val="1D4ED8"/>
-                </a:solidFill>
-              </a:defRPr>
-            </a:pPr>
-            <a:r>
-              <a:t>THAY ĐỔI / PHÁ HỦY DỮ LIỆU</a:t>
-            </a:r>
-            <a:br/>
-            <a:r>
-              <a:t>(Data Manipulation)</a:t>
-            </a:r>
-          </a:p>
-          <a:p>
-            <a:pPr>
-              <a:spcBef>
-                <a:spcPts val="1000"/>
-              </a:spcBef>
-              <a:defRPr sz="1200">
-                <a:solidFill>
-                  <a:srgbClr val="334155"/>
-                </a:solidFill>
-              </a:defRPr>
-            </a:pPr>
-            <a:r>
-              <a:t>• Can thiệp, sửa đổi số dư tài khoản trái phép.</a:t>
-            </a:r>
-            <a:br/>
-            <a:r>
-              <a:t>• Thực thi các câu lệnh DDL nguy hiểm như DROP TABLE hoặc TRUNCATE.</a:t>
-            </a:r>
-            <a:br/>
-            <a:r>
-              <a:t>• Nguy cơ thực thi lệnh hệ điều hành nếu máy chủ CSDL cấp quyền quá mức.</a:t>
+              <a:defRPr sz="1250" b="1">
+                <a:solidFill>
+                  <a:srgbClr val="B45309"/>
+                </a:solidFill>
+                <a:latin typeface="Arial"/>
+              </a:defRPr>
+            </a:pPr>
+            <a:r>
+              <a:t>Mở Rộng Kỹ Thuật Union-Based:</a:t>
+            </a:r>
+            <a:br/>
+            <a:r>
+              <a:t>Payload: ' UNION SELECT Id, Username, Password, SecretNote FROM Accounts --</a:t>
+            </a:r>
+            <a:br/>
+            <a:r>
+              <a:t>Cho phép kẻ tấn công trích xuất danh sách tài khoản quản trị và bí mật hệ thống trên các màn hình tra cứu thông thường.</a:t>
             </a:r>
           </a:p>
         </p:txBody>
@@ -9437,8 +8202,8 @@
         </p:nvSpPr>
         <p:spPr>
           <a:xfrm>
-            <a:off x="731520" y="292608"/>
-            <a:ext cx="4389120" cy="347472"/>
+            <a:off x="731520" y="256032"/>
+            <a:ext cx="4389120" cy="329184"/>
           </a:xfrm>
           <a:prstGeom prst="roundRect">
             <a:avLst/>
@@ -9475,6 +8240,7 @@
                 <a:solidFill>
                   <a:srgbClr val="1D4ED8"/>
                 </a:solidFill>
+                <a:latin typeface="Arial"/>
               </a:defRPr>
             </a:pPr>
             <a:r>
@@ -9491,7 +8257,7 @@
         </p:nvSpPr>
         <p:spPr>
           <a:xfrm>
-            <a:off x="731520" y="658368"/>
+            <a:off x="731520" y="621792"/>
             <a:ext cx="10698480" cy="548640"/>
           </a:xfrm>
           <a:prstGeom prst="rect">
@@ -9510,10 +8276,11 @@
                 <a:solidFill>
                   <a:srgbClr val="0F172A"/>
                 </a:solidFill>
-              </a:defRPr>
-            </a:pPr>
-            <a:r>
-              <a:t>1.3. SQL Injection: Phân Tích Cấu Trúc Khai Thác</a:t>
+                <a:latin typeface="Arial"/>
+              </a:defRPr>
+            </a:pPr>
+            <a:r>
+              <a:t>1.4. SQL Injection: Minh Chứng Thực Nghiệm Trực Quan Trên Web UI</a:t>
             </a:r>
           </a:p>
         </p:txBody>
@@ -9526,7 +8293,7 @@
         </p:nvSpPr>
         <p:spPr>
           <a:xfrm>
-            <a:off x="731520" y="6492240"/>
+            <a:off x="731520" y="6537960"/>
             <a:ext cx="10698480" cy="274320"/>
           </a:xfrm>
           <a:prstGeom prst="rect">
@@ -9535,7 +8302,7 @@
           <a:noFill/>
         </p:spPr>
         <p:txBody>
-          <a:bodyPr wrap="none">
+          <a:bodyPr wrap="none" lIns="0" rIns="0" tIns="0" bIns="0">
             <a:spAutoFit/>
           </a:bodyPr>
           <a:lstStyle/>
@@ -9545,6 +8312,7 @@
                 <a:solidFill>
                   <a:srgbClr val="64748B"/>
                 </a:solidFill>
+                <a:latin typeface="Arial"/>
               </a:defRPr>
             </a:pPr>
             <a:r>
@@ -9553,130 +8321,62 @@
           </a:p>
         </p:txBody>
       </p:sp>
-      <p:sp>
-        <p:nvSpPr>
-          <p:cNvPr id="6" name="Rounded Rectangle 5"/>
-          <p:cNvSpPr/>
-          <p:nvPr/>
-        </p:nvSpPr>
-        <p:spPr>
-          <a:xfrm>
-            <a:off x="731520" y="1280160"/>
-            <a:ext cx="10728655" cy="4846320"/>
-          </a:xfrm>
-          <a:prstGeom prst="roundRect">
-            <a:avLst/>
-          </a:prstGeom>
-          <a:solidFill>
-            <a:srgbClr val="F8FAFC"/>
-          </a:solidFill>
-          <a:ln>
-            <a:solidFill>
-              <a:srgbClr val="E2E8F0"/>
-            </a:solidFill>
-          </a:ln>
-        </p:spPr>
-        <p:style>
-          <a:lnRef idx="1">
-            <a:schemeClr val="accent1"/>
-          </a:lnRef>
-          <a:fillRef idx="3">
-            <a:schemeClr val="accent1"/>
-          </a:fillRef>
-          <a:effectRef idx="2">
-            <a:schemeClr val="accent1"/>
-          </a:effectRef>
-          <a:fontRef idx="minor">
-            <a:schemeClr val="lt1"/>
-          </a:fontRef>
-        </p:style>
-        <p:txBody>
-          <a:bodyPr rtlCol="0" anchor="ctr" wrap="square"/>
+      <p:pic>
+        <p:nvPicPr>
+          <p:cNvPr id="6" name="Picture 5" descr="final_sqli_proof.png"/>
+          <p:cNvPicPr>
+            <a:picLocks noChangeAspect="1"/>
+          </p:cNvPicPr>
+          <p:nvPr/>
+        </p:nvPicPr>
+        <p:blipFill>
+          <a:blip r:embed="rId2"/>
+          <a:stretch>
+            <a:fillRect/>
+          </a:stretch>
+        </p:blipFill>
+        <p:spPr>
+          <a:xfrm>
+            <a:off x="2066543" y="1234440"/>
+            <a:ext cx="8046720" cy="4754880"/>
+          </a:xfrm>
+          <a:prstGeom prst="rect">
+            <a:avLst/>
+          </a:prstGeom>
+        </p:spPr>
+      </p:pic>
+      <p:sp>
+        <p:nvSpPr>
+          <p:cNvPr id="7" name="TextBox 6"/>
+          <p:cNvSpPr txBox="1"/>
+          <p:nvPr/>
+        </p:nvSpPr>
+        <p:spPr>
+          <a:xfrm>
+            <a:off x="731520" y="6053328"/>
+            <a:ext cx="10728655" cy="365760"/>
+          </a:xfrm>
+          <a:prstGeom prst="rect">
+            <a:avLst/>
+          </a:prstGeom>
+          <a:noFill/>
+        </p:spPr>
+        <p:txBody>
+          <a:bodyPr wrap="none" tIns="0" bIns="0" lIns="0" rIns="0">
+            <a:spAutoFit/>
+          </a:bodyPr>
           <a:lstStyle/>
           <a:p>
             <a:pPr algn="ctr">
-              <a:defRPr sz="1500" b="1">
-                <a:solidFill>
-                  <a:srgbClr val="BE123C"/>
-                </a:solidFill>
-              </a:defRPr>
-            </a:pPr>
-            <a:r>
-              <a:t>Kịch Bản: Khai Thác Vượt Qua Xác Thực Đăng Nhập</a:t>
-            </a:r>
-          </a:p>
-          <a:p>
-            <a:pPr>
-              <a:spcBef>
-                <a:spcPts val="600"/>
-              </a:spcBef>
-              <a:defRPr sz="1200" b="1">
+              <a:defRPr sz="1100" b="1">
                 <a:solidFill>
                   <a:srgbClr val="1D4ED8"/>
                 </a:solidFill>
-                <a:latin typeface="Courier New"/>
-              </a:defRPr>
-            </a:pPr>
-            <a:r>
-              <a:t>Giá trị Username đưa vào: ' OR '1'='1' --  | Mật khẩu: (tùy ý hoặc để trống)</a:t>
-            </a:r>
-            <a:br/>
-            <a:r>
-              <a:t>Truy vấn được máy chủ SQL Server phân tích &amp; thông dịch:</a:t>
-            </a:r>
-            <a:br/>
-            <a:r>
-              <a:t>SELECT * FROM Accounts WHERE Username = '' OR '1'='1' --' AND Password = 'xyz'</a:t>
-            </a:r>
-          </a:p>
-          <a:p>
-            <a:pPr>
-              <a:spcBef>
-                <a:spcPts val="1000"/>
-              </a:spcBef>
-              <a:defRPr sz="1250">
-                <a:solidFill>
-                  <a:srgbClr val="334155"/>
-                </a:solidFill>
-              </a:defRPr>
-            </a:pPr>
-            <a:r>
-              <a:t>Phân Tích Thành Phần Chuỗi Khai Thác:</a:t>
-            </a:r>
-            <a:br/>
-            <a:r>
-              <a:t>1. Dấu nháy đơn (') : Đóng sớm chuỗi ký tự của trường Username, chuyển ngữ cảnh về cú pháp SQL.</a:t>
-            </a:r>
-            <a:br/>
-            <a:r>
-              <a:t>2. Mệnh đề OR '1'='1' : Biểu thức logic chân lý (luôn TRUE với mọi bản ghi trong bảng Accounts).</a:t>
-            </a:r>
-            <a:br/>
-            <a:r>
-              <a:t>3. Ký tự chú thích (--) : Vô hiệu hóa mệnh đề kiểm tra mật khẩu phía sau (AND Password = '...').</a:t>
-            </a:r>
-          </a:p>
-          <a:p>
-            <a:pPr>
-              <a:spcBef>
-                <a:spcPts val="1000"/>
-              </a:spcBef>
-              <a:defRPr sz="1250" b="1">
-                <a:solidFill>
-                  <a:srgbClr val="B45309"/>
-                </a:solidFill>
-              </a:defRPr>
-            </a:pPr>
-            <a:r>
-              <a:t>Mở Rộng Kỹ Thuật Union-Based:</a:t>
-            </a:r>
-            <a:br/>
-            <a:r>
-              <a:t>Payload: ' UNION SELECT Id, Username, Password, SecretNote FROM Accounts --</a:t>
-            </a:r>
-            <a:br/>
-            <a:r>
-              <a:t>Cho phép ghép nối kết quả từ bảng dữ liệu nhạy cảm vào màn hình tra cứu thông thường.</a:t>
+                <a:latin typeface="Arial"/>
+              </a:defRPr>
+            </a:pPr>
+            <a:r>
+              <a:t>Minh chứng đối chứng: Trích xuất 4 tài khoản CSDL khi inject ' OR '1'='1' -- (Trái) vs Chặn đứng an toàn với EF Core (Phải)</a:t>
             </a:r>
           </a:p>
         </p:txBody>
@@ -9750,8 +8450,8 @@
         </p:nvSpPr>
         <p:spPr>
           <a:xfrm>
-            <a:off x="731520" y="292608"/>
-            <a:ext cx="4389120" cy="347472"/>
+            <a:off x="731520" y="256032"/>
+            <a:ext cx="4389120" cy="329184"/>
           </a:xfrm>
           <a:prstGeom prst="roundRect">
             <a:avLst/>
@@ -9788,6 +8488,7 @@
                 <a:solidFill>
                   <a:srgbClr val="1D4ED8"/>
                 </a:solidFill>
+                <a:latin typeface="Arial"/>
               </a:defRPr>
             </a:pPr>
             <a:r>
@@ -9804,7 +8505,7 @@
         </p:nvSpPr>
         <p:spPr>
           <a:xfrm>
-            <a:off x="731520" y="658368"/>
+            <a:off x="731520" y="621792"/>
             <a:ext cx="10698480" cy="548640"/>
           </a:xfrm>
           <a:prstGeom prst="rect">
@@ -9823,10 +8524,11 @@
                 <a:solidFill>
                   <a:srgbClr val="0F172A"/>
                 </a:solidFill>
-              </a:defRPr>
-            </a:pPr>
-            <a:r>
-              <a:t>1.4. SQL Injection: Minh Chứng Thực Nghiệm Trực Quan Trên Web UI</a:t>
+                <a:latin typeface="Arial"/>
+              </a:defRPr>
+            </a:pPr>
+            <a:r>
+              <a:t>1.5. SQL Injection: Minh Chứng Tầng API (cURL) &amp; SQL Server 2025</a:t>
             </a:r>
           </a:p>
         </p:txBody>
@@ -9839,7 +8541,7 @@
         </p:nvSpPr>
         <p:spPr>
           <a:xfrm>
-            <a:off x="731520" y="6492240"/>
+            <a:off x="731520" y="6537960"/>
             <a:ext cx="10698480" cy="274320"/>
           </a:xfrm>
           <a:prstGeom prst="rect">
@@ -9848,7 +8550,7 @@
           <a:noFill/>
         </p:spPr>
         <p:txBody>
-          <a:bodyPr wrap="none">
+          <a:bodyPr wrap="none" lIns="0" rIns="0" tIns="0" bIns="0">
             <a:spAutoFit/>
           </a:bodyPr>
           <a:lstStyle/>
@@ -9858,6 +8560,7 @@
                 <a:solidFill>
                   <a:srgbClr val="64748B"/>
                 </a:solidFill>
+                <a:latin typeface="Arial"/>
               </a:defRPr>
             </a:pPr>
             <a:r>
@@ -9866,50 +8569,26 @@
           </a:p>
         </p:txBody>
       </p:sp>
-      <p:pic>
-        <p:nvPicPr>
-          <p:cNvPr id="6" name="Picture 5" descr="only_cards.png"/>
-          <p:cNvPicPr>
-            <a:picLocks noChangeAspect="1"/>
-          </p:cNvPicPr>
-          <p:nvPr/>
-        </p:nvPicPr>
-        <p:blipFill>
-          <a:blip r:embed="rId2"/>
-          <a:stretch>
-            <a:fillRect/>
-          </a:stretch>
-        </p:blipFill>
-        <p:spPr>
-          <a:xfrm>
-            <a:off x="1645920" y="1234440"/>
-            <a:ext cx="8869680" cy="4739035"/>
-          </a:xfrm>
-          <a:prstGeom prst="rect">
-            <a:avLst/>
-          </a:prstGeom>
-        </p:spPr>
-      </p:pic>
-      <p:sp>
-        <p:nvSpPr>
-          <p:cNvPr id="7" name="Rounded Rectangle 6"/>
+      <p:sp>
+        <p:nvSpPr>
+          <p:cNvPr id="6" name="Rounded Rectangle 5"/>
           <p:cNvSpPr/>
           <p:nvPr/>
         </p:nvSpPr>
         <p:spPr>
           <a:xfrm>
-            <a:off x="731520" y="5532120"/>
-            <a:ext cx="10728655" cy="822960"/>
+            <a:off x="731520" y="1234440"/>
+            <a:ext cx="5166360" cy="4297680"/>
           </a:xfrm>
           <a:prstGeom prst="roundRect">
             <a:avLst/>
           </a:prstGeom>
           <a:solidFill>
-            <a:srgbClr val="EFF6FF"/>
+            <a:srgbClr val="F8FAFC"/>
           </a:solidFill>
           <a:ln>
             <a:solidFill>
-              <a:srgbClr val="BFDBFE"/>
+              <a:srgbClr val="E2E8F0"/>
             </a:solidFill>
           </a:ln>
         </p:spPr>
@@ -9932,33 +8611,267 @@
           <a:lstStyle/>
           <a:p>
             <a:pPr algn="ctr">
-              <a:defRPr sz="1200" b="1">
+              <a:defRPr sz="1400" b="1">
                 <a:solidFill>
                   <a:srgbClr val="1D4ED8"/>
                 </a:solidFill>
-              </a:defRPr>
-            </a:pPr>
-            <a:r>
-              <a:t>Minh chứng đối chứng trực tiếp trên ứng dụng (http://localhost:5076/SqlInjection)</a:t>
+                <a:latin typeface="Arial"/>
+              </a:defRPr>
+            </a:pPr>
+            <a:r>
+              <a:t>Minh Chứng Tầng API / Dòng Lệnh (cURL)</a:t>
             </a:r>
           </a:p>
           <a:p>
             <a:pPr>
               <a:spcBef>
-                <a:spcPts val="200"/>
+                <a:spcPts val="600"/>
               </a:spcBef>
-              <a:defRPr sz="1100">
+              <a:defRPr sz="1000" b="0">
+                <a:solidFill>
+                  <a:srgbClr val="0F172A"/>
+                </a:solidFill>
+                <a:latin typeface="Courier New"/>
+              </a:defRPr>
+            </a:pPr>
+            <a:r>
+              <a:t>$ curl -X POST http://localhost:5076/SqlInjection/LoginVulnerable \</a:t>
+            </a:r>
+            <a:br/>
+            <a:r>
+              <a:t>       -F "username=' OR '1'='1' --" -F "password=any"</a:t>
+            </a:r>
+            <a:br/>
+            <a:br/>
+            <a:r>
+              <a:t>Phản hồi JSON từ Server:</a:t>
+            </a:r>
+            <a:br/>
+            <a:r>
+              <a:t>{</a:t>
+            </a:r>
+            <a:br/>
+            <a:r>
+              <a:t>  "success": true,</a:t>
+            </a:r>
+            <a:br/>
+            <a:r>
+              <a:t>  "isExploited": true,</a:t>
+            </a:r>
+            <a:br/>
+            <a:r>
+              <a:t>  "count": 4,</a:t>
+            </a:r>
+            <a:br/>
+            <a:r>
+              <a:t>  "accounts": [ ... danh sách tài khoản trích xuất ... ]</a:t>
+            </a:r>
+            <a:br/>
+            <a:r>
+              <a:t>}</a:t>
+            </a:r>
+          </a:p>
+          <a:p>
+            <a:pPr>
+              <a:spcBef>
+                <a:spcPts val="800"/>
+              </a:spcBef>
+              <a:defRPr sz="1150" b="0">
                 <a:solidFill>
                   <a:srgbClr val="334155"/>
                 </a:solidFill>
-              </a:defRPr>
-            </a:pPr>
-            <a:r>
-              <a:t>• Nhánh dính lỗi (Trái): Chuỗi ' OR '1'='1' -- cho phép đăng nhập thành công và trích xuất danh sách tài khoản.</a:t>
-            </a:r>
-            <a:br/>
-            <a:r>
-              <a:t>• Nhánh phòng thủ (Phải): Ứng dụng xử lý an toàn qua EF Core LINQ, từ chối truy cập và bảo vệ dữ liệu.</a:t>
+                <a:latin typeface="Arial"/>
+              </a:defRPr>
+            </a:pPr>
+            <a:r>
+              <a:t>Xác nhận lỗi xuất phát từ tầng xử lý C# Backend, kẻ tấn công có thể khai thác qua API mà không cần tương tác qua giao diện web.</a:t>
+            </a:r>
+          </a:p>
+        </p:txBody>
+      </p:sp>
+      <p:sp>
+        <p:nvSpPr>
+          <p:cNvPr id="7" name="Rounded Rectangle 6"/>
+          <p:cNvSpPr/>
+          <p:nvPr/>
+        </p:nvSpPr>
+        <p:spPr>
+          <a:xfrm>
+            <a:off x="6263640" y="1234440"/>
+            <a:ext cx="5166360" cy="4297680"/>
+          </a:xfrm>
+          <a:prstGeom prst="roundRect">
+            <a:avLst/>
+          </a:prstGeom>
+          <a:solidFill>
+            <a:srgbClr val="F8FAFC"/>
+          </a:solidFill>
+          <a:ln>
+            <a:solidFill>
+              <a:srgbClr val="E2E8F0"/>
+            </a:solidFill>
+          </a:ln>
+        </p:spPr>
+        <p:style>
+          <a:lnRef idx="1">
+            <a:schemeClr val="accent1"/>
+          </a:lnRef>
+          <a:fillRef idx="3">
+            <a:schemeClr val="accent1"/>
+          </a:fillRef>
+          <a:effectRef idx="2">
+            <a:schemeClr val="accent1"/>
+          </a:effectRef>
+          <a:fontRef idx="minor">
+            <a:schemeClr val="lt1"/>
+          </a:fontRef>
+        </p:style>
+        <p:txBody>
+          <a:bodyPr rtlCol="0" anchor="ctr"/>
+          <a:lstStyle/>
+          <a:p>
+            <a:pPr algn="ctr">
+              <a:defRPr sz="1400" b="1">
+                <a:solidFill>
+                  <a:srgbClr val="047857"/>
+                </a:solidFill>
+                <a:latin typeface="Arial"/>
+              </a:defRPr>
+            </a:pPr>
+            <a:r>
+              <a:t>Minh Chứng Tầng CSDL (SQL Server 2025)</a:t>
+            </a:r>
+          </a:p>
+          <a:p>
+            <a:pPr>
+              <a:spcBef>
+                <a:spcPts val="600"/>
+              </a:spcBef>
+              <a:defRPr sz="1000" b="0">
+                <a:solidFill>
+                  <a:srgbClr val="0F172A"/>
+                </a:solidFill>
+                <a:latin typeface="Courier New"/>
+              </a:defRPr>
+            </a:pPr>
+            <a:r>
+              <a:t>-- Database: OwaspDemoDB | Bảng: dbo.Accounts</a:t>
+            </a:r>
+            <a:br/>
+            <a:r>
+              <a:t>-- 1. Truy vấn dính lỗi:</a:t>
+            </a:r>
+            <a:br/>
+            <a:r>
+              <a:t>SELECT * FROM Accounts WHERE Username='' OR '1'='1' --'</a:t>
+            </a:r>
+            <a:br/>
+            <a:r>
+              <a:t>&gt;&gt; Kết quả: 4 rows returned (Bypass thành công)</a:t>
+            </a:r>
+            <a:br/>
+            <a:br/>
+            <a:r>
+              <a:t>-- 2. Truy vấn tham số hóa:</a:t>
+            </a:r>
+            <a:br/>
+            <a:r>
+              <a:t>EXEC sp_executesql N'SELECT * FROM Accounts WHERE...',</a:t>
+            </a:r>
+            <a:br/>
+            <a:r>
+              <a:t>     N'@p0 nvarchar(50)', @p0 = N''' OR ''1''=''1'' --'</a:t>
+            </a:r>
+            <a:br/>
+            <a:r>
+              <a:t>&gt;&gt; Kết quả: 0 rows returned (An toàn)</a:t>
+            </a:r>
+          </a:p>
+          <a:p>
+            <a:pPr>
+              <a:spcBef>
+                <a:spcPts val="800"/>
+              </a:spcBef>
+              <a:defRPr sz="1150" b="0">
+                <a:solidFill>
+                  <a:srgbClr val="334155"/>
+                </a:solidFill>
+                <a:latin typeface="Arial"/>
+              </a:defRPr>
+            </a:pPr>
+            <a:r>
+              <a:t>Đối chiếu trực tiếp trên máy chủ CSDL chứng minh cơ chế phân tách rạch ròi giữa cú pháp lệnh và tham số giá trị.</a:t>
+            </a:r>
+          </a:p>
+        </p:txBody>
+      </p:sp>
+      <p:sp>
+        <p:nvSpPr>
+          <p:cNvPr id="8" name="Rounded Rectangle 7"/>
+          <p:cNvSpPr/>
+          <p:nvPr/>
+        </p:nvSpPr>
+        <p:spPr>
+          <a:xfrm>
+            <a:off x="731520" y="5623560"/>
+            <a:ext cx="10728655" cy="777240"/>
+          </a:xfrm>
+          <a:prstGeom prst="roundRect">
+            <a:avLst/>
+          </a:prstGeom>
+          <a:solidFill>
+            <a:srgbClr val="ECFDF5"/>
+          </a:solidFill>
+          <a:ln>
+            <a:solidFill>
+              <a:srgbClr val="A7F3D0"/>
+            </a:solidFill>
+          </a:ln>
+        </p:spPr>
+        <p:style>
+          <a:lnRef idx="1">
+            <a:schemeClr val="accent1"/>
+          </a:lnRef>
+          <a:fillRef idx="3">
+            <a:schemeClr val="accent1"/>
+          </a:fillRef>
+          <a:effectRef idx="2">
+            <a:schemeClr val="accent1"/>
+          </a:effectRef>
+          <a:fontRef idx="minor">
+            <a:schemeClr val="lt1"/>
+          </a:fontRef>
+        </p:style>
+        <p:txBody>
+          <a:bodyPr rtlCol="0" anchor="ctr" tIns="73152"/>
+          <a:lstStyle/>
+          <a:p>
+            <a:pPr algn="ctr">
+              <a:defRPr sz="1100" b="1">
+                <a:solidFill>
+                  <a:srgbClr val="047857"/>
+                </a:solidFill>
+                <a:latin typeface="Arial"/>
+              </a:defRPr>
+            </a:pPr>
+            <a:r>
+              <a:t>Thao tác trên công cụ: VS Code MSSQL Extension &amp; File verify_sql_server.sql</a:t>
+            </a:r>
+          </a:p>
+          <a:p>
+            <a:pPr>
+              <a:spcBef>
+                <a:spcPts val="100"/>
+              </a:spcBef>
+              <a:defRPr sz="1050" b="0">
+                <a:solidFill>
+                  <a:srgbClr val="334155"/>
+                </a:solidFill>
+                <a:latin typeface="Arial"/>
+              </a:defRPr>
+            </a:pPr>
+            <a:r>
+              <a:t>Dữ liệu được truy vấn và kiểm thử trực tiếp trên máy chủ CSDL SQL Server 2025 (Database: OwaspDemoDB).</a:t>
             </a:r>
           </a:p>
         </p:txBody>
@@ -10032,8 +8945,8 @@
         </p:nvSpPr>
         <p:spPr>
           <a:xfrm>
-            <a:off x="731520" y="292608"/>
-            <a:ext cx="4389120" cy="347472"/>
+            <a:off x="731520" y="256032"/>
+            <a:ext cx="4389120" cy="329184"/>
           </a:xfrm>
           <a:prstGeom prst="roundRect">
             <a:avLst/>
@@ -10070,6 +8983,7 @@
                 <a:solidFill>
                   <a:srgbClr val="1D4ED8"/>
                 </a:solidFill>
+                <a:latin typeface="Arial"/>
               </a:defRPr>
             </a:pPr>
             <a:r>
@@ -10086,7 +9000,7 @@
         </p:nvSpPr>
         <p:spPr>
           <a:xfrm>
-            <a:off x="731520" y="658368"/>
+            <a:off x="731520" y="621792"/>
             <a:ext cx="10698480" cy="548640"/>
           </a:xfrm>
           <a:prstGeom prst="rect">
@@ -10105,10 +9019,11 @@
                 <a:solidFill>
                   <a:srgbClr val="0F172A"/>
                 </a:solidFill>
-              </a:defRPr>
-            </a:pPr>
-            <a:r>
-              <a:t>1.5. SQL Injection: Minh Chứng Tầng API (cURL) &amp; SQL Server 2025</a:t>
+                <a:latin typeface="Arial"/>
+              </a:defRPr>
+            </a:pPr>
+            <a:r>
+              <a:t>1.6. SQL Injection: Giải Pháp Phòng Thủ Chuẩn Hóa</a:t>
             </a:r>
           </a:p>
         </p:txBody>
@@ -10121,7 +9036,7 @@
         </p:nvSpPr>
         <p:spPr>
           <a:xfrm>
-            <a:off x="731520" y="6492240"/>
+            <a:off x="731520" y="6537960"/>
             <a:ext cx="10698480" cy="274320"/>
           </a:xfrm>
           <a:prstGeom prst="rect">
@@ -10130,7 +9045,7 @@
           <a:noFill/>
         </p:spPr>
         <p:txBody>
-          <a:bodyPr wrap="none">
+          <a:bodyPr wrap="none" lIns="0" rIns="0" tIns="0" bIns="0">
             <a:spAutoFit/>
           </a:bodyPr>
           <a:lstStyle/>
@@ -10140,6 +9055,7 @@
                 <a:solidFill>
                   <a:srgbClr val="64748B"/>
                 </a:solidFill>
+                <a:latin typeface="Arial"/>
               </a:defRPr>
             </a:pPr>
             <a:r>
@@ -10156,8 +9072,128 @@
         </p:nvSpPr>
         <p:spPr>
           <a:xfrm>
-            <a:off x="731520" y="1280160"/>
-            <a:ext cx="5166360" cy="3840480"/>
+            <a:off x="731520" y="1234440"/>
+            <a:ext cx="5166360" cy="4937760"/>
+          </a:xfrm>
+          <a:prstGeom prst="roundRect">
+            <a:avLst/>
+          </a:prstGeom>
+          <a:solidFill>
+            <a:srgbClr val="ECFDF5"/>
+          </a:solidFill>
+          <a:ln>
+            <a:solidFill>
+              <a:srgbClr val="A7F3D0"/>
+            </a:solidFill>
+          </a:ln>
+        </p:spPr>
+        <p:style>
+          <a:lnRef idx="1">
+            <a:schemeClr val="accent1"/>
+          </a:lnRef>
+          <a:fillRef idx="3">
+            <a:schemeClr val="accent1"/>
+          </a:fillRef>
+          <a:effectRef idx="2">
+            <a:schemeClr val="accent1"/>
+          </a:effectRef>
+          <a:fontRef idx="minor">
+            <a:schemeClr val="lt1"/>
+          </a:fontRef>
+        </p:style>
+        <p:txBody>
+          <a:bodyPr rtlCol="0" anchor="ctr"/>
+          <a:lstStyle/>
+          <a:p>
+            <a:pPr algn="ctr">
+              <a:defRPr sz="1500" b="1">
+                <a:solidFill>
+                  <a:srgbClr val="047857"/>
+                </a:solidFill>
+                <a:latin typeface="Arial"/>
+              </a:defRPr>
+            </a:pPr>
+            <a:r>
+              <a:t>Kỹ Thuật Parameterized Query Với EF Core</a:t>
+            </a:r>
+          </a:p>
+          <a:p>
+            <a:pPr>
+              <a:spcBef>
+                <a:spcPts val="800"/>
+              </a:spcBef>
+              <a:defRPr sz="1000" b="0">
+                <a:solidFill>
+                  <a:srgbClr val="065F46"/>
+                </a:solidFill>
+                <a:latin typeface="Courier New"/>
+              </a:defRPr>
+            </a:pPr>
+            <a:r>
+              <a:t>// SỬ DỤNG LINQ PARAMETERIZED (KHUYÊN DÙNG):</a:t>
+            </a:r>
+            <a:br/>
+            <a:r>
+              <a:t>var account = _context.Accounts</a:t>
+            </a:r>
+            <a:br/>
+            <a:r>
+              <a:t>    .FirstOrDefault(a =&gt; a.Username == user </a:t>
+            </a:r>
+            <a:br/>
+            <a:r>
+              <a:t>                      &amp;&amp; a.Password == pass);</a:t>
+            </a:r>
+            <a:br/>
+            <a:br/>
+            <a:r>
+              <a:t>// TRUY VẤN THUẦN QUA FROMSQLINTERPOLATED:</a:t>
+            </a:r>
+            <a:br/>
+            <a:r>
+              <a:t>var account = _context.Accounts</a:t>
+            </a:r>
+            <a:br/>
+            <a:r>
+              <a:t>    .FromSqlInterpolated($"SELECT * FROM Accounts WHERE Username={user} AND Password={pass}")</a:t>
+            </a:r>
+            <a:br/>
+            <a:r>
+              <a:t>    .FirstOrDefault();</a:t>
+            </a:r>
+          </a:p>
+          <a:p>
+            <a:pPr>
+              <a:spcBef>
+                <a:spcPts val="1000"/>
+              </a:spcBef>
+              <a:defRPr sz="1200" b="0">
+                <a:solidFill>
+                  <a:srgbClr val="334155"/>
+                </a:solidFill>
+                <a:latin typeface="Arial"/>
+              </a:defRPr>
+            </a:pPr>
+            <a:r>
+              <a:t>Cơ chế bảo vệ:</a:t>
+            </a:r>
+            <a:br/>
+            <a:r>
+              <a:t>SQL Server biên dịch kế hoạch thực thi (Execution Plan) trước khi nhận tham số. Đầu vào của người dùng được gán vào biến @p0 như một chuỗi văn bản (literal), vô hiệu hóa hoàn toàn khả năng chèn lệnh.</a:t>
+            </a:r>
+          </a:p>
+        </p:txBody>
+      </p:sp>
+      <p:sp>
+        <p:nvSpPr>
+          <p:cNvPr id="7" name="Rounded Rectangle 6"/>
+          <p:cNvSpPr/>
+          <p:nvPr/>
+        </p:nvSpPr>
+        <p:spPr>
+          <a:xfrm>
+            <a:off x="6263640" y="1234440"/>
+            <a:ext cx="5166360" cy="4937760"/>
           </a:xfrm>
           <a:prstGeom prst="roundRect">
             <a:avLst/>
@@ -10186,67 +9222,19 @@
           </a:fontRef>
         </p:style>
         <p:txBody>
-          <a:bodyPr rtlCol="0" anchor="ctr" wrap="square"/>
+          <a:bodyPr rtlCol="0" anchor="ctr"/>
           <a:lstStyle/>
           <a:p>
             <a:pPr algn="ctr">
-              <a:defRPr sz="1400" b="1">
+              <a:defRPr sz="1500" b="1">
                 <a:solidFill>
                   <a:srgbClr val="1D4ED8"/>
                 </a:solidFill>
-              </a:defRPr>
-            </a:pPr>
-            <a:r>
-              <a:t>Minh Chứng Tầng API / Dòng Lệnh (cURL)</a:t>
-            </a:r>
-          </a:p>
-          <a:p>
-            <a:pPr>
-              <a:spcBef>
-                <a:spcPts val="600"/>
-              </a:spcBef>
-              <a:defRPr sz="1000">
-                <a:solidFill>
-                  <a:srgbClr val="0F172A"/>
-                </a:solidFill>
-                <a:latin typeface="Courier New"/>
-              </a:defRPr>
-            </a:pPr>
-            <a:r>
-              <a:t>$ curl -X POST http://localhost:5076/SqlInjection/LoginVulnerable \</a:t>
-            </a:r>
-            <a:br/>
-            <a:r>
-              <a:t>       -F "username=' OR '1'='1' --" -F "password=any"</a:t>
-            </a:r>
-            <a:br/>
-            <a:br/>
-            <a:r>
-              <a:t>Phản hồi JSON từ Server:</a:t>
-            </a:r>
-            <a:br/>
-            <a:r>
-              <a:t>{</a:t>
-            </a:r>
-            <a:br/>
-            <a:r>
-              <a:t>  "success": true,</a:t>
-            </a:r>
-            <a:br/>
-            <a:r>
-              <a:t>  "isExploited": true,</a:t>
-            </a:r>
-            <a:br/>
-            <a:r>
-              <a:t>  "count": 4,</a:t>
-            </a:r>
-            <a:br/>
-            <a:r>
-              <a:t>  "accounts": [ ... danh sách tài khoản trích xuất ... ]</a:t>
-            </a:r>
-            <a:br/>
-            <a:r>
-              <a:t>}</a:t>
+                <a:latin typeface="Arial"/>
+              </a:defRPr>
+            </a:pPr>
+            <a:r>
+              <a:t>Bộ Quy Tắc Phòng Thủ Toàn Diện (Defense-in-Depth)</a:t>
             </a:r>
           </a:p>
           <a:p>
@@ -10254,197 +9242,46 @@
               <a:spcBef>
                 <a:spcPts val="800"/>
               </a:spcBef>
-              <a:defRPr sz="1150">
+              <a:defRPr sz="1200" b="0">
                 <a:solidFill>
                   <a:srgbClr val="334155"/>
                 </a:solidFill>
-              </a:defRPr>
-            </a:pPr>
-            <a:r>
-              <a:t>Xác nhận lỗi xuất phát từ tầng xử lý C# Backend, kẻ tấn công có thể khai thác qua API mà không cần tương tác qua giao diện web.</a:t>
-            </a:r>
-          </a:p>
-        </p:txBody>
-      </p:sp>
-      <p:sp>
-        <p:nvSpPr>
-          <p:cNvPr id="7" name="Rounded Rectangle 6"/>
-          <p:cNvSpPr/>
-          <p:nvPr/>
-        </p:nvSpPr>
-        <p:spPr>
-          <a:xfrm>
-            <a:off x="6263640" y="1280160"/>
-            <a:ext cx="5166360" cy="3840480"/>
-          </a:xfrm>
-          <a:prstGeom prst="roundRect">
-            <a:avLst/>
-          </a:prstGeom>
-          <a:solidFill>
-            <a:srgbClr val="F8FAFC"/>
-          </a:solidFill>
-          <a:ln>
-            <a:solidFill>
-              <a:srgbClr val="E2E8F0"/>
-            </a:solidFill>
-          </a:ln>
-        </p:spPr>
-        <p:style>
-          <a:lnRef idx="1">
-            <a:schemeClr val="accent1"/>
-          </a:lnRef>
-          <a:fillRef idx="3">
-            <a:schemeClr val="accent1"/>
-          </a:fillRef>
-          <a:effectRef idx="2">
-            <a:schemeClr val="accent1"/>
-          </a:effectRef>
-          <a:fontRef idx="minor">
-            <a:schemeClr val="lt1"/>
-          </a:fontRef>
-        </p:style>
-        <p:txBody>
-          <a:bodyPr rtlCol="0" anchor="ctr" wrap="square"/>
-          <a:lstStyle/>
-          <a:p>
-            <a:pPr algn="ctr">
-              <a:defRPr sz="1400" b="1">
-                <a:solidFill>
-                  <a:srgbClr val="047857"/>
-                </a:solidFill>
-              </a:defRPr>
-            </a:pPr>
-            <a:r>
-              <a:t>Minh Chứng Tầng CSDL (SQL Server 2025)</a:t>
-            </a:r>
-          </a:p>
-          <a:p>
-            <a:pPr>
-              <a:spcBef>
-                <a:spcPts val="600"/>
-              </a:spcBef>
-              <a:defRPr sz="1000">
-                <a:solidFill>
-                  <a:srgbClr val="0F172A"/>
-                </a:solidFill>
-                <a:latin typeface="Courier New"/>
-              </a:defRPr>
-            </a:pPr>
-            <a:r>
-              <a:t>-- Database: OwaspDemoDB | Bảng: dbo.Accounts</a:t>
-            </a:r>
-            <a:br/>
-            <a:r>
-              <a:t>-- 1. Truy vấn dính lỗi:</a:t>
-            </a:r>
-            <a:br/>
-            <a:r>
-              <a:t>SELECT * FROM Accounts WHERE Username='' OR '1'='1' --'</a:t>
-            </a:r>
-            <a:br/>
-            <a:r>
-              <a:t>&gt;&gt; Kết quả: 4 rows returned (Bypass thành công)</a:t>
-            </a:r>
-            <a:br/>
-            <a:br/>
-            <a:r>
-              <a:t>-- 2. Truy vấn tham số hóa:</a:t>
-            </a:r>
-            <a:br/>
-            <a:r>
-              <a:t>EXEC sp_executesql N'SELECT * FROM Accounts WHERE...',</a:t>
-            </a:r>
-            <a:br/>
-            <a:r>
-              <a:t>     N'@p0 nvarchar(50)', @p0 = N''' OR ''1''=''1'' --'</a:t>
-            </a:r>
-            <a:br/>
-            <a:r>
-              <a:t>&gt;&gt; Kết quả: 0 rows returned (An toàn)</a:t>
-            </a:r>
-          </a:p>
-          <a:p>
-            <a:pPr>
-              <a:spcBef>
-                <a:spcPts val="800"/>
-              </a:spcBef>
-              <a:defRPr sz="1150">
-                <a:solidFill>
-                  <a:srgbClr val="334155"/>
-                </a:solidFill>
-              </a:defRPr>
-            </a:pPr>
-            <a:r>
-              <a:t>Đối chiếu trực tiếp trên máy chủ CSDL chứng minh cơ chế phân tách rạch ròi giữa cú pháp lệnh và tham số giá trị.</a:t>
-            </a:r>
-          </a:p>
-        </p:txBody>
-      </p:sp>
-      <p:sp>
-        <p:nvSpPr>
-          <p:cNvPr id="8" name="Rounded Rectangle 7"/>
-          <p:cNvSpPr/>
-          <p:nvPr/>
-        </p:nvSpPr>
-        <p:spPr>
-          <a:xfrm>
-            <a:off x="731520" y="5303520"/>
-            <a:ext cx="10728655" cy="868680"/>
-          </a:xfrm>
-          <a:prstGeom prst="roundRect">
-            <a:avLst/>
-          </a:prstGeom>
-          <a:solidFill>
-            <a:srgbClr val="ECFDF5"/>
-          </a:solidFill>
-          <a:ln>
-            <a:solidFill>
-              <a:srgbClr val="A7F3D0"/>
-            </a:solidFill>
-          </a:ln>
-        </p:spPr>
-        <p:style>
-          <a:lnRef idx="1">
-            <a:schemeClr val="accent1"/>
-          </a:lnRef>
-          <a:fillRef idx="3">
-            <a:schemeClr val="accent1"/>
-          </a:fillRef>
-          <a:effectRef idx="2">
-            <a:schemeClr val="accent1"/>
-          </a:effectRef>
-          <a:fontRef idx="minor">
-            <a:schemeClr val="lt1"/>
-          </a:fontRef>
-        </p:style>
-        <p:txBody>
-          <a:bodyPr rtlCol="0" anchor="ctr"/>
-          <a:lstStyle/>
-          <a:p>
-            <a:pPr algn="ctr">
-              <a:defRPr sz="1200" b="1">
-                <a:solidFill>
-                  <a:srgbClr val="047857"/>
-                </a:solidFill>
-              </a:defRPr>
-            </a:pPr>
-            <a:r>
-              <a:t>Thao tác trên công cụ: VS Code MSSQL Extension &amp; File verify_sql_server.sql</a:t>
-            </a:r>
-          </a:p>
-          <a:p>
-            <a:pPr>
-              <a:spcBef>
-                <a:spcPts val="200"/>
-              </a:spcBef>
-              <a:defRPr sz="1100">
-                <a:solidFill>
-                  <a:srgbClr val="334155"/>
-                </a:solidFill>
-              </a:defRPr>
-            </a:pPr>
-            <a:r>
-              <a:t>Dữ liệu được truy vấn và kiểm thử trực tiếp trên máy chủ CSDL SQL Server 2025 (Database: OwaspDemoDB).</a:t>
+                <a:latin typeface="Arial"/>
+              </a:defRPr>
+            </a:pPr>
+            <a:r>
+              <a:t>1. Tham số hóa truy vấn:</a:t>
+            </a:r>
+            <a:br/>
+            <a:r>
+              <a:t>Tuyệt đối không ghép chuỗi SQL thủ công trong mã nguồn.</a:t>
+            </a:r>
+            <a:br/>
+            <a:br/>
+            <a:r>
+              <a:t>2. Đặc quyền tối thiểu (Least Privilege):</a:t>
+            </a:r>
+            <a:br/>
+            <a:r>
+              <a:t>Tài khoản kết nối CSDL chỉ cấp các quyền SELECT, INSERT, UPDATE cần thiết; không dùng tài khoản 'sa' hay quyền DDL trong môi trường chạy ứng dụng.</a:t>
+            </a:r>
+            <a:br/>
+            <a:br/>
+            <a:r>
+              <a:t>3. Kiểm tra dữ liệu đầu vào (Input Validation):</a:t>
+            </a:r>
+            <a:br/>
+            <a:r>
+              <a:t>Sử dụng Data Annotations để giới hạn định dạng và độ dài dữ liệu.</a:t>
+            </a:r>
+            <a:br/>
+            <a:br/>
+            <a:r>
+              <a:t>4. Băm mật khẩu (Password Hashing):</a:t>
+            </a:r>
+            <a:br/>
+            <a:r>
+              <a:t>Sử dụng ASP.NET Core Identity (PBKDF2) để bảo vệ thông tin ngay cả khi CSDL bị lộ.</a:t>
             </a:r>
           </a:p>
         </p:txBody>
@@ -10518,8 +9355,8 @@
         </p:nvSpPr>
         <p:spPr>
           <a:xfrm>
-            <a:off x="731520" y="292608"/>
-            <a:ext cx="4389120" cy="347472"/>
+            <a:off x="731520" y="256032"/>
+            <a:ext cx="4389120" cy="329184"/>
           </a:xfrm>
           <a:prstGeom prst="roundRect">
             <a:avLst/>
@@ -10556,10 +9393,11 @@
                 <a:solidFill>
                   <a:srgbClr val="1D4ED8"/>
                 </a:solidFill>
-              </a:defRPr>
-            </a:pPr>
-            <a:r>
-              <a:t>CHỦ ĐỀ 1 • NGUYỄN DANH HỌC (23A1001D0158)</a:t>
+                <a:latin typeface="Arial"/>
+              </a:defRPr>
+            </a:pPr>
+            <a:r>
+              <a:t>CHỦ ĐỀ 2 • NGUYỄN THANH BÌNH (23A1001D0041)</a:t>
             </a:r>
           </a:p>
         </p:txBody>
@@ -10572,7 +9410,7 @@
         </p:nvSpPr>
         <p:spPr>
           <a:xfrm>
-            <a:off x="731520" y="658368"/>
+            <a:off x="731520" y="621792"/>
             <a:ext cx="10698480" cy="548640"/>
           </a:xfrm>
           <a:prstGeom prst="rect">
@@ -10591,10 +9429,11 @@
                 <a:solidFill>
                   <a:srgbClr val="0F172A"/>
                 </a:solidFill>
-              </a:defRPr>
-            </a:pPr>
-            <a:r>
-              <a:t>1.6. SQL Injection: Giải Pháp Phòng Thủ Chuẩn Hóa</a:t>
+                <a:latin typeface="Arial"/>
+              </a:defRPr>
+            </a:pPr>
+            <a:r>
+              <a:t>2.1. Stored XSS: Bản Chất Kỹ Thuật &amp; Phân Loại Trong Web</a:t>
             </a:r>
           </a:p>
         </p:txBody>
@@ -10607,7 +9446,7 @@
         </p:nvSpPr>
         <p:spPr>
           <a:xfrm>
-            <a:off x="731520" y="6492240"/>
+            <a:off x="731520" y="6537960"/>
             <a:ext cx="10698480" cy="274320"/>
           </a:xfrm>
           <a:prstGeom prst="rect">
@@ -10616,7 +9455,7 @@
           <a:noFill/>
         </p:spPr>
         <p:txBody>
-          <a:bodyPr wrap="none">
+          <a:bodyPr wrap="none" lIns="0" rIns="0" tIns="0" bIns="0">
             <a:spAutoFit/>
           </a:bodyPr>
           <a:lstStyle/>
@@ -10626,6 +9465,7 @@
                 <a:solidFill>
                   <a:srgbClr val="64748B"/>
                 </a:solidFill>
+                <a:latin typeface="Arial"/>
               </a:defRPr>
             </a:pPr>
             <a:r>
@@ -10642,126 +9482,8 @@
         </p:nvSpPr>
         <p:spPr>
           <a:xfrm>
-            <a:off x="731520" y="1280160"/>
-            <a:ext cx="5166360" cy="4846320"/>
-          </a:xfrm>
-          <a:prstGeom prst="roundRect">
-            <a:avLst/>
-          </a:prstGeom>
-          <a:solidFill>
-            <a:srgbClr val="ECFDF5"/>
-          </a:solidFill>
-          <a:ln>
-            <a:solidFill>
-              <a:srgbClr val="A7F3D0"/>
-            </a:solidFill>
-          </a:ln>
-        </p:spPr>
-        <p:style>
-          <a:lnRef idx="1">
-            <a:schemeClr val="accent1"/>
-          </a:lnRef>
-          <a:fillRef idx="3">
-            <a:schemeClr val="accent1"/>
-          </a:fillRef>
-          <a:effectRef idx="2">
-            <a:schemeClr val="accent1"/>
-          </a:effectRef>
-          <a:fontRef idx="minor">
-            <a:schemeClr val="lt1"/>
-          </a:fontRef>
-        </p:style>
-        <p:txBody>
-          <a:bodyPr rtlCol="0" anchor="ctr" wrap="square"/>
-          <a:lstStyle/>
-          <a:p>
-            <a:pPr algn="ctr">
-              <a:defRPr sz="1500" b="1">
-                <a:solidFill>
-                  <a:srgbClr val="047857"/>
-                </a:solidFill>
-              </a:defRPr>
-            </a:pPr>
-            <a:r>
-              <a:t>Kỹ Thuật Parameterized Query Với EF Core</a:t>
-            </a:r>
-          </a:p>
-          <a:p>
-            <a:pPr>
-              <a:spcBef>
-                <a:spcPts val="800"/>
-              </a:spcBef>
-              <a:defRPr sz="1000">
-                <a:solidFill>
-                  <a:srgbClr val="065F46"/>
-                </a:solidFill>
-                <a:latin typeface="Courier New"/>
-              </a:defRPr>
-            </a:pPr>
-            <a:r>
-              <a:t>// SỬ DỤNG LINQ PARAMETERIZED (KHUYÊN DÙNG):</a:t>
-            </a:r>
-            <a:br/>
-            <a:r>
-              <a:t>var account = _context.Accounts</a:t>
-            </a:r>
-            <a:br/>
-            <a:r>
-              <a:t>    .FirstOrDefault(a =&gt; a.Username == user </a:t>
-            </a:r>
-            <a:br/>
-            <a:r>
-              <a:t>                      &amp;&amp; a.Password == pass);</a:t>
-            </a:r>
-            <a:br/>
-            <a:br/>
-            <a:r>
-              <a:t>// TRUY VẤN THUẦN QUA FROMSQLINTERPOLATED:</a:t>
-            </a:r>
-            <a:br/>
-            <a:r>
-              <a:t>var account = _context.Accounts</a:t>
-            </a:r>
-            <a:br/>
-            <a:r>
-              <a:t>    .FromSqlInterpolated($"SELECT * FROM Accounts WHERE Username={user} AND Password={pass}")</a:t>
-            </a:r>
-            <a:br/>
-            <a:r>
-              <a:t>    .FirstOrDefault();</a:t>
-            </a:r>
-          </a:p>
-          <a:p>
-            <a:pPr>
-              <a:spcBef>
-                <a:spcPts val="1000"/>
-              </a:spcBef>
-              <a:defRPr sz="1200">
-                <a:solidFill>
-                  <a:srgbClr val="334155"/>
-                </a:solidFill>
-              </a:defRPr>
-            </a:pPr>
-            <a:r>
-              <a:t>Cơ chế bảo vệ:</a:t>
-            </a:r>
-            <a:br/>
-            <a:r>
-              <a:t>SQL Server biên dịch kế hoạch thực thi (Execution Plan) trước khi nhận tham số. Đầu vào của người dùng được gán vào biến @p0 như một chuỗi văn bản (literal), vô hiệu hóa hoàn toàn khả năng chèn lệnh.</a:t>
-            </a:r>
-          </a:p>
-        </p:txBody>
-      </p:sp>
-      <p:sp>
-        <p:nvSpPr>
-          <p:cNvPr id="7" name="Rounded Rectangle 6"/>
-          <p:cNvSpPr/>
-          <p:nvPr/>
-        </p:nvSpPr>
-        <p:spPr>
-          <a:xfrm>
-            <a:off x="6263640" y="1280160"/>
-            <a:ext cx="5166360" cy="4846320"/>
+            <a:off x="731520" y="1234440"/>
+            <a:ext cx="5166360" cy="4937760"/>
           </a:xfrm>
           <a:prstGeom prst="roundRect">
             <a:avLst/>
@@ -10790,64 +9512,211 @@
           </a:fontRef>
         </p:style>
         <p:txBody>
-          <a:bodyPr rtlCol="0" anchor="ctr" wrap="square"/>
+          <a:bodyPr rtlCol="0" anchor="ctr"/>
           <a:lstStyle/>
           <a:p>
             <a:pPr algn="ctr">
               <a:defRPr sz="1500" b="1">
                 <a:solidFill>
-                  <a:srgbClr val="1D4ED8"/>
-                </a:solidFill>
-              </a:defRPr>
-            </a:pPr>
-            <a:r>
-              <a:t>Bộ Quy Tắc Phòng Thủ Toàn Diện (Defense-in-Depth)</a:t>
+                  <a:srgbClr val="BE123C"/>
+                </a:solidFill>
+                <a:latin typeface="Arial"/>
+              </a:defRPr>
+            </a:pPr>
+            <a:r>
+              <a:t>Phân Biệt 3 Loại Cross-Site Scripting (XSS)</a:t>
             </a:r>
           </a:p>
           <a:p>
             <a:pPr>
               <a:spcBef>
-                <a:spcPts val="800"/>
+                <a:spcPts val="600"/>
               </a:spcBef>
-              <a:defRPr sz="1200">
+              <a:defRPr sz="1200" b="0">
                 <a:solidFill>
                   <a:srgbClr val="334155"/>
                 </a:solidFill>
-              </a:defRPr>
-            </a:pPr>
-            <a:r>
-              <a:t>1. Tham số hóa truy vấn:</a:t>
-            </a:r>
-            <a:br/>
-            <a:r>
-              <a:t>Tuyệt đối không ghép chuỗi SQL thủ công trong mã nguồn.</a:t>
-            </a:r>
-            <a:br/>
-            <a:br/>
-            <a:r>
-              <a:t>2. Đặc quyền tối thiểu (Least Privilege):</a:t>
-            </a:r>
-            <a:br/>
-            <a:r>
-              <a:t>Tài khoản kết nối CSDL chỉ cấp các quyền SELECT, INSERT, UPDATE cần thiết; không dùng tài khoản 'sa' hay quyền DDL trong môi trường chạy ứng dụng.</a:t>
-            </a:r>
-            <a:br/>
-            <a:br/>
-            <a:r>
-              <a:t>3. Kiểm tra dữ liệu đầu vào (Input Validation):</a:t>
-            </a:r>
-            <a:br/>
-            <a:r>
-              <a:t>Sử dụng Data Annotations để giới hạn định dạng và độ dài dữ liệu.</a:t>
-            </a:r>
-            <a:br/>
-            <a:br/>
-            <a:r>
-              <a:t>4. Băm mật khẩu (Password Hashing):</a:t>
-            </a:r>
-            <a:br/>
-            <a:r>
-              <a:t>Sử dụng ASP.NET Core Identity (PBKDF2) để bảo vệ thông tin ngay cả khi CSDL bị lộ.</a:t>
+                <a:latin typeface="Arial"/>
+              </a:defRPr>
+            </a:pPr>
+            <a:r>
+              <a:t>• 1. Reflected XSS (Phản xạ): Mã độc nằm trong URL (query string), kích hoạt khi nạn nhân click vào liên kết độc hại.</a:t>
+            </a:r>
+          </a:p>
+          <a:p>
+            <a:pPr>
+              <a:spcBef>
+                <a:spcPts val="600"/>
+              </a:spcBef>
+              <a:defRPr sz="1200" b="0">
+                <a:solidFill>
+                  <a:srgbClr val="334155"/>
+                </a:solidFill>
+                <a:latin typeface="Arial"/>
+              </a:defRPr>
+            </a:pPr>
+            <a:r>
+              <a:t>• 2. DOM-based XSS: Lỗ hổng nằm hoàn toàn ở mã kịch bản phía Client (JavaScript đọc và ghi trực tiếp vào DOM mà không qua máy chủ).</a:t>
+            </a:r>
+          </a:p>
+          <a:p>
+            <a:pPr>
+              <a:spcBef>
+                <a:spcPts val="600"/>
+              </a:spcBef>
+              <a:defRPr sz="1200" b="1">
+                <a:solidFill>
+                  <a:srgbClr val="BE123C"/>
+                </a:solidFill>
+                <a:latin typeface="Arial"/>
+              </a:defRPr>
+            </a:pPr>
+            <a:r>
+              <a:t>• 3. Stored XSS (Lưu trữ - Nghiêm trọng nhất): Mã độc được lưu trữ vĩnh viễn trên máy chủ CSDL. Mọi người dùng truy cập trang web đều bị tấn công tự động mà không cần bấm liên kết lạ.</a:t>
+            </a:r>
+          </a:p>
+          <a:p>
+            <a:pPr>
+              <a:spcBef>
+                <a:spcPts val="600"/>
+              </a:spcBef>
+              <a:defRPr sz="1200" b="0">
+                <a:solidFill>
+                  <a:srgbClr val="334155"/>
+                </a:solidFill>
+                <a:latin typeface="Arial"/>
+              </a:defRPr>
+            </a:pPr>
+            <a:r>
+              <a:t>• Vị trí luồng dữ liệu: Client (Inject) ➔ Web Server (Lưu) ➔ Database (Lưu trữ) ➔ Web Server (Đọc) ➔ Nạn nhân khác (Trình duyệt thực thi).</a:t>
+            </a:r>
+          </a:p>
+        </p:txBody>
+      </p:sp>
+      <p:sp>
+        <p:nvSpPr>
+          <p:cNvPr id="7" name="Rounded Rectangle 6"/>
+          <p:cNvSpPr/>
+          <p:nvPr/>
+        </p:nvSpPr>
+        <p:spPr>
+          <a:xfrm>
+            <a:off x="6263640" y="1234440"/>
+            <a:ext cx="5166360" cy="4937760"/>
+          </a:xfrm>
+          <a:prstGeom prst="roundRect">
+            <a:avLst/>
+          </a:prstGeom>
+          <a:solidFill>
+            <a:srgbClr val="FFF1F2"/>
+          </a:solidFill>
+          <a:ln>
+            <a:solidFill>
+              <a:srgbClr val="FECDD3"/>
+            </a:solidFill>
+          </a:ln>
+        </p:spPr>
+        <p:style>
+          <a:lnRef idx="1">
+            <a:schemeClr val="accent1"/>
+          </a:lnRef>
+          <a:fillRef idx="3">
+            <a:schemeClr val="accent1"/>
+          </a:fillRef>
+          <a:effectRef idx="2">
+            <a:schemeClr val="accent1"/>
+          </a:effectRef>
+          <a:fontRef idx="minor">
+            <a:schemeClr val="lt1"/>
+          </a:fontRef>
+        </p:style>
+        <p:txBody>
+          <a:bodyPr rtlCol="0" anchor="ctr"/>
+          <a:lstStyle/>
+          <a:p>
+            <a:pPr algn="ctr">
+              <a:defRPr sz="1500" b="1">
+                <a:solidFill>
+                  <a:srgbClr val="BE123C"/>
+                </a:solidFill>
+                <a:latin typeface="Arial"/>
+              </a:defRPr>
+            </a:pPr>
+            <a:r>
+              <a:t>Ngữ Cảnh Thực Tế &amp; Lạm Dụng @@Html.Raw</a:t>
+            </a:r>
+          </a:p>
+          <a:p>
+            <a:pPr>
+              <a:spcBef>
+                <a:spcPts val="600"/>
+              </a:spcBef>
+              <a:defRPr sz="1000" b="0">
+                <a:solidFill>
+                  <a:srgbClr val="9F1239"/>
+                </a:solidFill>
+                <a:latin typeface="Courier New"/>
+              </a:defRPr>
+            </a:pPr>
+            <a:r>
+              <a:t>// CONTROLLER LƯU NGUYÊN VĂN NỘI DUNG VÀO CSDL:</a:t>
+            </a:r>
+            <a:br/>
+            <a:r>
+              <a:t>var comment = new Comment {</a:t>
+            </a:r>
+            <a:br/>
+            <a:r>
+              <a:t>    Author = author,</a:t>
+            </a:r>
+            <a:br/>
+            <a:r>
+              <a:t>    Content = content // Chứa mã &lt;script&gt; độc hại</a:t>
+            </a:r>
+            <a:br/>
+            <a:r>
+              <a:t>};</a:t>
+            </a:r>
+            <a:br/>
+            <a:r>
+              <a:t>_context.Comments.Add(comment);</a:t>
+            </a:r>
+            <a:br/>
+            <a:br/>
+            <a:r>
+              <a:t>// RAZOR VIEW LẠM DỤNG HTML.RAW ĐỂ HIỂN THỊ:</a:t>
+            </a:r>
+            <a:br/>
+            <a:r>
+              <a:t>&lt;div class="comment-body"&gt;</a:t>
+            </a:r>
+            <a:br/>
+            <a:r>
+              <a:t>    @Html.Raw(comment.Content)</a:t>
+            </a:r>
+            <a:br/>
+            <a:r>
+              <a:t>&lt;/div&gt;</a:t>
+            </a:r>
+          </a:p>
+          <a:p>
+            <a:pPr>
+              <a:spcBef>
+                <a:spcPts val="1000"/>
+              </a:spcBef>
+              <a:defRPr sz="1200" b="1">
+                <a:solidFill>
+                  <a:srgbClr val="0F172A"/>
+                </a:solidFill>
+                <a:latin typeface="Arial"/>
+              </a:defRPr>
+            </a:pPr>
+            <a:r>
+              <a:t>Nguyên nhân phát sinh:</a:t>
+            </a:r>
+            <a:br/>
+            <a:r>
+              <a:t>Lập trình viên muốn hỗ trợ định dạng chữ in đậm, xuống dòng cho bài đánh giá nên dùng @Html.Raw(), vô tình cho phép trình duyệt của người dùng thực thi các thẻ HTML/JavaScript nguy hiểm.</a:t>
             </a:r>
           </a:p>
         </p:txBody>
@@ -10921,8 +9790,8 @@
         </p:nvSpPr>
         <p:spPr>
           <a:xfrm>
-            <a:off x="731520" y="292608"/>
-            <a:ext cx="4389120" cy="347472"/>
+            <a:off x="731520" y="256032"/>
+            <a:ext cx="4389120" cy="329184"/>
           </a:xfrm>
           <a:prstGeom prst="roundRect">
             <a:avLst/>
@@ -10959,6 +9828,7 @@
                 <a:solidFill>
                   <a:srgbClr val="1D4ED8"/>
                 </a:solidFill>
+                <a:latin typeface="Arial"/>
               </a:defRPr>
             </a:pPr>
             <a:r>
@@ -10975,7 +9845,7 @@
         </p:nvSpPr>
         <p:spPr>
           <a:xfrm>
-            <a:off x="731520" y="658368"/>
+            <a:off x="731520" y="621792"/>
             <a:ext cx="10698480" cy="548640"/>
           </a:xfrm>
           <a:prstGeom prst="rect">
@@ -10994,10 +9864,11 @@
                 <a:solidFill>
                   <a:srgbClr val="0F172A"/>
                 </a:solidFill>
-              </a:defRPr>
-            </a:pPr>
-            <a:r>
-              <a:t>2.1. Stored XSS: Bản Chất Kỹ Thuật &amp; Ngữ Cảnh Ứng Dụng</a:t>
+                <a:latin typeface="Arial"/>
+              </a:defRPr>
+            </a:pPr>
+            <a:r>
+              <a:t>2.2. Stored XSS: Đánh Giá Rủi Ro &amp; Cơ Chế Chiếm Đoạt Phiên</a:t>
             </a:r>
           </a:p>
         </p:txBody>
@@ -11010,7 +9881,7 @@
         </p:nvSpPr>
         <p:spPr>
           <a:xfrm>
-            <a:off x="731520" y="6492240"/>
+            <a:off x="731520" y="6537960"/>
             <a:ext cx="10698480" cy="274320"/>
           </a:xfrm>
           <a:prstGeom prst="rect">
@@ -11019,7 +9890,7 @@
           <a:noFill/>
         </p:spPr>
         <p:txBody>
-          <a:bodyPr wrap="none">
+          <a:bodyPr wrap="none" lIns="0" rIns="0" tIns="0" bIns="0">
             <a:spAutoFit/>
           </a:bodyPr>
           <a:lstStyle/>
@@ -11029,6 +9900,7 @@
                 <a:solidFill>
                   <a:srgbClr val="64748B"/>
                 </a:solidFill>
+                <a:latin typeface="Arial"/>
               </a:defRPr>
             </a:pPr>
             <a:r>
@@ -11045,85 +9917,8 @@
         </p:nvSpPr>
         <p:spPr>
           <a:xfrm>
-            <a:off x="731520" y="1280160"/>
-            <a:ext cx="5166360" cy="4846320"/>
-          </a:xfrm>
-          <a:prstGeom prst="roundRect">
-            <a:avLst/>
-          </a:prstGeom>
-          <a:solidFill>
-            <a:srgbClr val="F8FAFC"/>
-          </a:solidFill>
-          <a:ln>
-            <a:solidFill>
-              <a:srgbClr val="E2E8F0"/>
-            </a:solidFill>
-          </a:ln>
-        </p:spPr>
-        <p:style>
-          <a:lnRef idx="1">
-            <a:schemeClr val="accent1"/>
-          </a:lnRef>
-          <a:fillRef idx="3">
-            <a:schemeClr val="accent1"/>
-          </a:fillRef>
-          <a:effectRef idx="2">
-            <a:schemeClr val="accent1"/>
-          </a:effectRef>
-          <a:fontRef idx="minor">
-            <a:schemeClr val="lt1"/>
-          </a:fontRef>
-        </p:style>
-        <p:txBody>
-          <a:bodyPr rtlCol="0" anchor="ctr" wrap="square"/>
-          <a:lstStyle/>
-          <a:p>
-            <a:pPr algn="ctr">
-              <a:defRPr sz="1500" b="1">
-                <a:solidFill>
-                  <a:srgbClr val="BE123C"/>
-                </a:solidFill>
-              </a:defRPr>
-            </a:pPr>
-            <a:r>
-              <a:t>Ngữ Cảnh Nghiệp Vụ Trong Hệ Thống</a:t>
-            </a:r>
-          </a:p>
-          <a:p>
-            <a:pPr>
-              <a:spcBef>
-                <a:spcPts val="800"/>
-              </a:spcBef>
-              <a:defRPr sz="1250">
-                <a:solidFill>
-                  <a:srgbClr val="334155"/>
-                </a:solidFill>
-              </a:defRPr>
-            </a:pPr>
-            <a:r>
-              <a:t>• Hệ thống cho phép người dùng đăng tải nhận xét, đánh giá chất lượng buổi tư vấn.</a:t>
-            </a:r>
-            <a:br/>
-            <a:r>
-              <a:t>• Bản chất Stored XSS (Persistent XSS): Mã kịch bản (JavaScript) độc hại được gửi lên và lưu trữ trực tiếp trong CSDL (bảng dbo.Comments).</a:t>
-            </a:r>
-            <a:br/>
-            <a:r>
-              <a:t>• Đặc điểm phát tán: Khi người dùng khác truy cập trang web, mã kịch bản lưu trong CSDL được tải về và thực thi tự động trên trình duyệt của nạn nhân mà không cần tương tác thêm.</a:t>
-            </a:r>
-          </a:p>
-        </p:txBody>
-      </p:sp>
-      <p:sp>
-        <p:nvSpPr>
-          <p:cNvPr id="7" name="Rounded Rectangle 6"/>
-          <p:cNvSpPr/>
-          <p:nvPr/>
-        </p:nvSpPr>
-        <p:spPr>
-          <a:xfrm>
-            <a:off x="6263640" y="1280160"/>
-            <a:ext cx="5166360" cy="4846320"/>
+            <a:off x="731520" y="1234440"/>
+            <a:ext cx="3328416" cy="4937760"/>
           </a:xfrm>
           <a:prstGeom prst="roundRect">
             <a:avLst/>
@@ -11152,86 +9947,213 @@
           </a:fontRef>
         </p:style>
         <p:txBody>
-          <a:bodyPr rtlCol="0" anchor="ctr" wrap="square"/>
+          <a:bodyPr rtlCol="0" anchor="ctr"/>
           <a:lstStyle/>
           <a:p>
             <a:pPr algn="ctr">
-              <a:defRPr sz="1500" b="1">
+              <a:defRPr sz="1400" b="1">
                 <a:solidFill>
                   <a:srgbClr val="BE123C"/>
                 </a:solidFill>
-              </a:defRPr>
-            </a:pPr>
-            <a:r>
-              <a:t>Mã Nguồn Minh Họa Lỗi &amp; Sự Lạm Dụng @@Html.Raw</a:t>
+                <a:latin typeface="Arial"/>
+              </a:defRPr>
+            </a:pPr>
+            <a:r>
+              <a:t>ĐÁNH CẮP COOKIE &amp; PHIÊN</a:t>
+            </a:r>
+            <a:br/>
+            <a:r>
+              <a:t>(Session Hijacking)</a:t>
             </a:r>
           </a:p>
           <a:p>
             <a:pPr>
               <a:spcBef>
-                <a:spcPts val="800"/>
+                <a:spcPts val="1000"/>
               </a:spcBef>
-              <a:defRPr sz="1050">
-                <a:solidFill>
-                  <a:srgbClr val="9F1239"/>
-                </a:solidFill>
-                <a:latin typeface="Courier New"/>
-              </a:defRPr>
-            </a:pPr>
-            <a:r>
-              <a:t>// 1. CONTROLLER LƯU TRỰC TIẾP KHÔNG QUA XỬ LÝ:</a:t>
-            </a:r>
-            <a:br/>
-            <a:r>
-              <a:t>var comment = new Comment {</a:t>
-            </a:r>
-            <a:br/>
-            <a:r>
-              <a:t>    Author = author,</a:t>
-            </a:r>
-            <a:br/>
-            <a:r>
-              <a:t>    Content = content // Chứa mã &lt;script&gt; độc hại</a:t>
-            </a:r>
-            <a:br/>
-            <a:r>
-              <a:t>};</a:t>
-            </a:r>
-            <a:br/>
-            <a:r>
-              <a:t>_context.Comments.Add(comment);</a:t>
-            </a:r>
-            <a:br/>
-            <a:br/>
-            <a:r>
-              <a:t>// 2. RAZOR VIEW HIỂN THỊ DỮ LIỆU THÔ:</a:t>
-            </a:r>
-            <a:br/>
-            <a:r>
-              <a:t>&lt;div class="comment-body"&gt;</a:t>
-            </a:r>
-            <a:br/>
-            <a:r>
-              <a:t>    @Html.Raw(comment.Content)</a:t>
-            </a:r>
-            <a:br/>
-            <a:r>
-              <a:t>&lt;/div&gt;</a:t>
+              <a:defRPr sz="1200" b="0">
+                <a:solidFill>
+                  <a:srgbClr val="334155"/>
+                </a:solidFill>
+                <a:latin typeface="Arial"/>
+              </a:defRPr>
+            </a:pPr>
+            <a:r>
+              <a:t>• Đoạn script đọc thuộc tính document.cookie để trích xuất token phiên làm việc.</a:t>
+            </a:r>
+            <a:br/>
+            <a:r>
+              <a:t>• Dữ liệu xác thực được gửi ngầm về máy chủ điều khiển của kẻ tấn công.</a:t>
+            </a:r>
+            <a:br/>
+            <a:r>
+              <a:t>• Kẻ tấn công sử dụng token để mạo danh người dùng hợp lệ.</a:t>
+            </a:r>
+          </a:p>
+        </p:txBody>
+      </p:sp>
+      <p:sp>
+        <p:nvSpPr>
+          <p:cNvPr id="7" name="Rounded Rectangle 6"/>
+          <p:cNvSpPr/>
+          <p:nvPr/>
+        </p:nvSpPr>
+        <p:spPr>
+          <a:xfrm>
+            <a:off x="4416552" y="1234440"/>
+            <a:ext cx="3328416" cy="4937760"/>
+          </a:xfrm>
+          <a:prstGeom prst="roundRect">
+            <a:avLst/>
+          </a:prstGeom>
+          <a:solidFill>
+            <a:srgbClr val="FFFBEB"/>
+          </a:solidFill>
+          <a:ln>
+            <a:solidFill>
+              <a:srgbClr val="FEF08A"/>
+            </a:solidFill>
+          </a:ln>
+        </p:spPr>
+        <p:style>
+          <a:lnRef idx="1">
+            <a:schemeClr val="accent1"/>
+          </a:lnRef>
+          <a:fillRef idx="3">
+            <a:schemeClr val="accent1"/>
+          </a:fillRef>
+          <a:effectRef idx="2">
+            <a:schemeClr val="accent1"/>
+          </a:effectRef>
+          <a:fontRef idx="minor">
+            <a:schemeClr val="lt1"/>
+          </a:fontRef>
+        </p:style>
+        <p:txBody>
+          <a:bodyPr rtlCol="0" anchor="ctr"/>
+          <a:lstStyle/>
+          <a:p>
+            <a:pPr algn="ctr">
+              <a:defRPr sz="1400" b="1">
+                <a:solidFill>
+                  <a:srgbClr val="B45309"/>
+                </a:solidFill>
+                <a:latin typeface="Arial"/>
+              </a:defRPr>
+            </a:pPr>
+            <a:r>
+              <a:t>THAY ĐỔI CẤU TRÚC DOM</a:t>
+            </a:r>
+            <a:br/>
+            <a:r>
+              <a:t>(DOM Manipulation / Phishing)</a:t>
             </a:r>
           </a:p>
           <a:p>
             <a:pPr>
               <a:spcBef>
-                <a:spcPts val="1200"/>
+                <a:spcPts val="1000"/>
               </a:spcBef>
-              <a:defRPr sz="1200">
-                <a:solidFill>
-                  <a:srgbClr val="0F172A"/>
-                </a:solidFill>
-              </a:defRPr>
-            </a:pPr>
-            <a:r>
-              <a:t>Việc sử dụng @Html.Raw() nhằm mục đích hiển thị định dạng văn bản vô tình làm vô hiệu hóa cơ chế phòng vệ mã hóa HTML tự động của Razor View.</a:t>
+              <a:defRPr sz="1200" b="0">
+                <a:solidFill>
+                  <a:srgbClr val="334155"/>
+                </a:solidFill>
+                <a:latin typeface="Arial"/>
+              </a:defRPr>
+            </a:pPr>
+            <a:r>
+              <a:t>• Thay đổi cấu trúc giao diện trang web, chèn các form đăng nhập giả mạo.</a:t>
+            </a:r>
+            <a:br/>
+            <a:r>
+              <a:t>• Lừa người dùng nhập thông tin nhạy cảm trên giao diện đã bị sửa đổi.</a:t>
+            </a:r>
+            <a:br/>
+            <a:r>
+              <a:t>• Tự động điều hướng người dùng sang các liên kết độc hại.</a:t>
+            </a:r>
+          </a:p>
+        </p:txBody>
+      </p:sp>
+      <p:sp>
+        <p:nvSpPr>
+          <p:cNvPr id="8" name="Rounded Rectangle 7"/>
+          <p:cNvSpPr/>
+          <p:nvPr/>
+        </p:nvSpPr>
+        <p:spPr>
+          <a:xfrm>
+            <a:off x="8101584" y="1234440"/>
+            <a:ext cx="3328416" cy="4937760"/>
+          </a:xfrm>
+          <a:prstGeom prst="roundRect">
+            <a:avLst/>
+          </a:prstGeom>
+          <a:solidFill>
+            <a:srgbClr val="EFF6FF"/>
+          </a:solidFill>
+          <a:ln>
+            <a:solidFill>
+              <a:srgbClr val="BFDBFE"/>
+            </a:solidFill>
+          </a:ln>
+        </p:spPr>
+        <p:style>
+          <a:lnRef idx="1">
+            <a:schemeClr val="accent1"/>
+          </a:lnRef>
+          <a:fillRef idx="3">
+            <a:schemeClr val="accent1"/>
+          </a:fillRef>
+          <a:effectRef idx="2">
+            <a:schemeClr val="accent1"/>
+          </a:effectRef>
+          <a:fontRef idx="minor">
+            <a:schemeClr val="lt1"/>
+          </a:fontRef>
+        </p:style>
+        <p:txBody>
+          <a:bodyPr rtlCol="0" anchor="ctr"/>
+          <a:lstStyle/>
+          <a:p>
+            <a:pPr algn="ctr">
+              <a:defRPr sz="1400" b="1">
+                <a:solidFill>
+                  <a:srgbClr val="1D4ED8"/>
+                </a:solidFill>
+                <a:latin typeface="Arial"/>
+              </a:defRPr>
+            </a:pPr>
+            <a:r>
+              <a:t>THỰC THI THAO TÁC TRÁI PHÉP</a:t>
+            </a:r>
+            <a:br/>
+            <a:r>
+              <a:t>(Client-Side Exploitation)</a:t>
+            </a:r>
+          </a:p>
+          <a:p>
+            <a:pPr>
+              <a:spcBef>
+                <a:spcPts val="1000"/>
+              </a:spcBef>
+              <a:defRPr sz="1200" b="0">
+                <a:solidFill>
+                  <a:srgbClr val="334155"/>
+                </a:solidFill>
+                <a:latin typeface="Arial"/>
+              </a:defRPr>
+            </a:pPr>
+            <a:r>
+              <a:t>• Ghi nhận thao tác bàn phím (Keylogging) khi người dùng nhập liệu.</a:t>
+            </a:r>
+            <a:br/>
+            <a:r>
+              <a:t>• Tự động thực hiện các hành động gửi tin nhắn hoặc đánh giá mạo danh người dùng.</a:t>
+            </a:r>
+            <a:br/>
+            <a:r>
+              <a:t>• Tận dụng quyền truy cập trình duyệt để mở rộng phạm vi tấn công.</a:t>
             </a:r>
           </a:p>
         </p:txBody>

--- a/Slide_OWASP_Top3_Nhom_WNC_G01.pptx
+++ b/Slide_OWASP_Top3_Nhom_WNC_G01.pptx
@@ -3975,7 +3975,7 @@
               </a:defRPr>
             </a:pPr>
             <a:r>
-              <a:t>2.4. Stored XSS: Minh Chứng Thực Nghiệm Trực Quan Trên Web UI</a:t>
+              <a:t>2.4. Stored XSS: Minh Chứng Kiểm Thử Qua Chrome DevTools (Application &amp; Console)</a:t>
             </a:r>
           </a:p>
         </p:txBody>
@@ -4018,7 +4018,7 @@
       </p:sp>
       <p:pic>
         <p:nvPicPr>
-          <p:cNvPr id="6" name="Picture 5" descr="final_xss_proof.png"/>
+          <p:cNvPr id="6" name="Picture 5" descr="02_xss_devtools_proof.png"/>
           <p:cNvPicPr>
             <a:picLocks noChangeAspect="1"/>
           </p:cNvPicPr>
@@ -4032,8 +4032,8 @@
         </p:blipFill>
         <p:spPr>
           <a:xfrm>
-            <a:off x="2615184" y="1234440"/>
-            <a:ext cx="6949440" cy="4584700"/>
+            <a:off x="1883664" y="1234440"/>
+            <a:ext cx="8412480" cy="4732020"/>
           </a:xfrm>
           <a:prstGeom prst="rect">
             <a:avLst/>
@@ -4071,7 +4071,7 @@
               </a:defRPr>
             </a:pPr>
             <a:r>
-              <a:t>Minh chứng đối chứng: Đoạn script độc hại lưu trữ trong CSDL (Trái) vs Cơ chế tự động mã hóa HTML của Razor View (Phải)</a:t>
+              <a:t>Minh chứng đối chứng: Soi Cookie lưu trữ (HttpOnly = false) &amp; Lệnh JavaScript document.cookie đọc trộm Session Token (Trái) vs Cơ chế tự động mã hóa HTML của Razor View (Phải)</a:t>
             </a:r>
           </a:p>
         </p:txBody>
@@ -5682,7 +5682,7 @@
               </a:defRPr>
             </a:pPr>
             <a:r>
-              <a:t>3.3. CSRF Attack: Minh Chứng Thực Nghiệm Trực Quan Trên Web UI</a:t>
+              <a:t>3.3. CSRF Attack: Minh Chứng Kiểm Thử Qua Chrome DevTools (Request Headers)</a:t>
             </a:r>
           </a:p>
         </p:txBody>
@@ -5725,7 +5725,7 @@
       </p:sp>
       <p:pic>
         <p:nvPicPr>
-          <p:cNvPr id="6" name="Picture 5" descr="final_csrf_proof.png"/>
+          <p:cNvPr id="6" name="Picture 5" descr="03_csrf_devtools_proof.png"/>
           <p:cNvPicPr>
             <a:picLocks noChangeAspect="1"/>
           </p:cNvPicPr>
@@ -5739,8 +5739,8 @@
         </p:blipFill>
         <p:spPr>
           <a:xfrm>
-            <a:off x="2523744" y="1234440"/>
-            <a:ext cx="7132320" cy="4585063"/>
+            <a:off x="1883664" y="1234440"/>
+            <a:ext cx="8412480" cy="4732020"/>
           </a:xfrm>
           <a:prstGeom prst="rect">
             <a:avLst/>
@@ -5778,7 +5778,7 @@
               </a:defRPr>
             </a:pPr>
             <a:r>
-              <a:t>Minh chứng đối chứng: Bị rút 20.000.000 VNĐ qua biểu mẫu ẩn của Hacker (Trái) vs Chặn đứng yêu cầu thiếu Token (Phải)</a:t>
+              <a:t>Minh chứng đối chứng: Soi gói tin HTTP POST gửi ngầm từ Attacker Site: Đính kèm Cookie tự động nhưng thiếu Anti-Forgery Token của Hacker (Trái) vs Chặn đứng yêu cầu thiếu Token (Phải)</a:t>
             </a:r>
           </a:p>
         </p:txBody>
@@ -8280,7 +8280,7 @@
               </a:defRPr>
             </a:pPr>
             <a:r>
-              <a:t>1.4. SQL Injection: Minh Chứng Thực Nghiệm Trực Quan Trên Web UI</a:t>
+              <a:t>1.4. SQL Injection: Minh Chứng Kiểm Thử Qua Chrome DevTools (Network)</a:t>
             </a:r>
           </a:p>
         </p:txBody>
@@ -8323,7 +8323,7 @@
       </p:sp>
       <p:pic>
         <p:nvPicPr>
-          <p:cNvPr id="6" name="Picture 5" descr="final_sqli_proof.png"/>
+          <p:cNvPr id="6" name="Picture 5" descr="01_sqli_devtools_proof.png"/>
           <p:cNvPicPr>
             <a:picLocks noChangeAspect="1"/>
           </p:cNvPicPr>
@@ -8337,8 +8337,8 @@
         </p:blipFill>
         <p:spPr>
           <a:xfrm>
-            <a:off x="2066543" y="1234440"/>
-            <a:ext cx="8046720" cy="4754880"/>
+            <a:off x="1883664" y="1234440"/>
+            <a:ext cx="8412480" cy="4732020"/>
           </a:xfrm>
           <a:prstGeom prst="rect">
             <a:avLst/>
@@ -8362,7 +8362,7 @@
           <a:noFill/>
         </p:spPr>
         <p:txBody>
-          <a:bodyPr wrap="none" tIns="0" bIns="0" lIns="0" rIns="0">
+          <a:bodyPr wrap="none">
             <a:spAutoFit/>
           </a:bodyPr>
           <a:lstStyle/>
@@ -8376,7 +8376,7 @@
               </a:defRPr>
             </a:pPr>
             <a:r>
-              <a:t>Minh chứng đối chứng: Trích xuất 4 tài khoản CSDL khi inject ' OR '1'='1' -- (Trái) vs Chặn đứng an toàn với EF Core (Phải)</a:t>
+              <a:t>Minh chứng đối chứng: Kiểm tra gói tin mạng (Network Fetch/XHR): Payload gửi lên và JSON trích xuất CSDL ' OR '1'='1' -- (Trái) vs Chặn đứng an toàn với EF Core (Phải)</a:t>
             </a:r>
           </a:p>
         </p:txBody>

--- a/Slide_OWASP_Top3_Nhom_WNC_G01.pptx
+++ b/Slide_OWASP_Top3_Nhom_WNC_G01.pptx
@@ -24,6 +24,7 @@
     <p:sldId id="272" r:id="rId23"/>
     <p:sldId id="273" r:id="rId24"/>
     <p:sldId id="274" r:id="rId25"/>
+    <p:sldId id="275" r:id="rId26"/>
   </p:sldIdLst>
   <p:sldSz cx="12191695" cy="6858000" type="screen4x3"/>
   <p:notesSz cx="6858000" cy="9144000"/>
@@ -3583,7 +3584,7 @@
         <p:spPr>
           <a:xfrm>
             <a:off x="731520" y="256032"/>
-            <a:ext cx="4389120" cy="329184"/>
+            <a:ext cx="4572000" cy="329184"/>
           </a:xfrm>
           <a:prstGeom prst="roundRect">
             <a:avLst/>
@@ -3660,7 +3661,7 @@
               </a:defRPr>
             </a:pPr>
             <a:r>
-              <a:t>2.3. Stored XSS: Phân Tích Các Kỹ Thuật Tiêm Payload</a:t>
+              <a:t>2.3. Stored XSS: Minh Chứng Thực Nghiệm Trực Quan Trên Web UI</a:t>
             </a:r>
           </a:p>
         </p:txBody>
@@ -3674,7 +3675,7 @@
         <p:spPr>
           <a:xfrm>
             <a:off x="731520" y="6537960"/>
-            <a:ext cx="10698480" cy="274320"/>
+            <a:ext cx="10698480" cy="256032"/>
           </a:xfrm>
           <a:prstGeom prst="rect">
             <a:avLst/>
@@ -3701,49 +3702,54 @@
           </a:p>
         </p:txBody>
       </p:sp>
-      <p:sp>
-        <p:nvSpPr>
-          <p:cNvPr id="6" name="Rounded Rectangle 5"/>
-          <p:cNvSpPr/>
-          <p:nvPr/>
-        </p:nvSpPr>
-        <p:spPr>
-          <a:xfrm>
-            <a:off x="731520" y="1234440"/>
-            <a:ext cx="10728655" cy="4937760"/>
-          </a:xfrm>
-          <a:prstGeom prst="roundRect">
-            <a:avLst/>
-          </a:prstGeom>
-          <a:solidFill>
-            <a:srgbClr val="F8FAFC"/>
-          </a:solidFill>
-          <a:ln>
-            <a:solidFill>
-              <a:srgbClr val="E2E8F0"/>
-            </a:solidFill>
-          </a:ln>
-        </p:spPr>
-        <p:style>
-          <a:lnRef idx="1">
-            <a:schemeClr val="accent1"/>
-          </a:lnRef>
-          <a:fillRef idx="3">
-            <a:schemeClr val="accent1"/>
-          </a:fillRef>
-          <a:effectRef idx="2">
-            <a:schemeClr val="accent1"/>
-          </a:effectRef>
-          <a:fontRef idx="minor">
-            <a:schemeClr val="lt1"/>
-          </a:fontRef>
-        </p:style>
-        <p:txBody>
-          <a:bodyPr rtlCol="0" anchor="ctr"/>
+      <p:pic>
+        <p:nvPicPr>
+          <p:cNvPr id="6" name="Picture 5" descr="final_xss_proof.png"/>
+          <p:cNvPicPr>
+            <a:picLocks noChangeAspect="1"/>
+          </p:cNvPicPr>
+          <p:nvPr/>
+        </p:nvPicPr>
+        <p:blipFill>
+          <a:blip r:embed="rId2"/>
+          <a:stretch>
+            <a:fillRect/>
+          </a:stretch>
+        </p:blipFill>
+        <p:spPr>
+          <a:xfrm>
+            <a:off x="2615184" y="1234440"/>
+            <a:ext cx="6949440" cy="4584700"/>
+          </a:xfrm>
+          <a:prstGeom prst="rect">
+            <a:avLst/>
+          </a:prstGeom>
+        </p:spPr>
+      </p:pic>
+      <p:sp>
+        <p:nvSpPr>
+          <p:cNvPr id="7" name="TextBox 6"/>
+          <p:cNvSpPr txBox="1"/>
+          <p:nvPr/>
+        </p:nvSpPr>
+        <p:spPr>
+          <a:xfrm>
+            <a:off x="731520" y="6016752"/>
+            <a:ext cx="10728655" cy="365760"/>
+          </a:xfrm>
+          <a:prstGeom prst="rect">
+            <a:avLst/>
+          </a:prstGeom>
+          <a:noFill/>
+        </p:spPr>
+        <p:txBody>
+          <a:bodyPr wrap="none">
+            <a:spAutoFit/>
+          </a:bodyPr>
           <a:lstStyle/>
           <a:p>
             <a:pPr algn="ctr">
-              <a:defRPr sz="1500" b="1">
+              <a:defRPr sz="1100" b="1">
                 <a:solidFill>
                   <a:srgbClr val="BE123C"/>
                 </a:solidFill>
@@ -3751,79 +3757,7 @@
               </a:defRPr>
             </a:pPr>
             <a:r>
-              <a:t>3 Biến Thể Payload XSS Thực Nghiệm Trong Hệ Thống</a:t>
-            </a:r>
-          </a:p>
-          <a:p>
-            <a:pPr>
-              <a:spcBef>
-                <a:spcPts val="800"/>
-              </a:spcBef>
-              <a:defRPr sz="1250" b="0">
-                <a:solidFill>
-                  <a:srgbClr val="334155"/>
-                </a:solidFill>
-                <a:latin typeface="Arial"/>
-              </a:defRPr>
-            </a:pPr>
-            <a:r>
-              <a:t>1. Payload 1 (Thẻ Script Cơ Bản):</a:t>
-            </a:r>
-            <a:br/>
-            <a:r>
-              <a:t>   &lt;script&gt;alert('Session Cookie: ' + document.cookie);&lt;/script&gt;</a:t>
-            </a:r>
-            <a:br/>
-            <a:r>
-              <a:t>   Cơ chế: Trình duyệt phân tích cú pháp HTML, nhận diện khối mã và thực thi câu lệnh JavaScript.</a:t>
-            </a:r>
-          </a:p>
-          <a:p>
-            <a:pPr>
-              <a:spcBef>
-                <a:spcPts val="800"/>
-              </a:spcBef>
-              <a:defRPr sz="1250" b="0">
-                <a:solidFill>
-                  <a:srgbClr val="334155"/>
-                </a:solidFill>
-                <a:latin typeface="Arial"/>
-              </a:defRPr>
-            </a:pPr>
-            <a:r>
-              <a:t>2. Payload 2 (Vượt Qua Bộ Lọc Bằng Trình Xử Lý Sự Kiện HTML):</a:t>
-            </a:r>
-            <a:br/>
-            <a:r>
-              <a:t>   &lt;img src=x onerror=alert('XSS triggered via image onerror')&gt;</a:t>
-            </a:r>
-            <a:br/>
-            <a:r>
-              <a:t>   Cơ chế: Khi ứng dụng chỉ lọc từ khóa '&lt;script&gt;', kẻ tấn công sử dụng thuộc tính 'onerror' của thẻ hình ảnh khi đường dẫn ảnh không tồn tại để kích hoạt JavaScript.</a:t>
-            </a:r>
-          </a:p>
-          <a:p>
-            <a:pPr>
-              <a:spcBef>
-                <a:spcPts val="800"/>
-              </a:spcBef>
-              <a:defRPr sz="1250" b="0">
-                <a:solidFill>
-                  <a:srgbClr val="334155"/>
-                </a:solidFill>
-                <a:latin typeface="Arial"/>
-              </a:defRPr>
-            </a:pPr>
-            <a:r>
-              <a:t>3. Payload 3 (Thay Đổi Toàn Bộ Cấu Trúc Trang Web):</a:t>
-            </a:r>
-            <a:br/>
-            <a:r>
-              <a:t>   &lt;script&gt;document.body.innerHTML='&lt;h2 style=color:red;text-align:center&gt;Trang Web Đã Bị Thay Đổi&lt;/h2&gt;';&lt;/script&gt;</a:t>
-            </a:r>
-            <a:br/>
-            <a:r>
-              <a:t>   Cơ chế: Can thiệp trực tiếp vào thuộc tính body.innerHTML để thay đổi toàn bộ nội dung hiển thị của website.</a:t>
+              <a:t>Minh chứng đối chứng chức năng Đánh giá: Nhánh dính lỗi kích hoạt popup Alert (Trái) vs Nhánh an toàn mã hóa HTML (Phải)</a:t>
             </a:r>
           </a:p>
         </p:txBody>
@@ -3898,7 +3832,7 @@
         <p:spPr>
           <a:xfrm>
             <a:off x="731520" y="256032"/>
-            <a:ext cx="4389120" cy="329184"/>
+            <a:ext cx="4572000" cy="329184"/>
           </a:xfrm>
           <a:prstGeom prst="roundRect">
             <a:avLst/>
@@ -3989,7 +3923,7 @@
         <p:spPr>
           <a:xfrm>
             <a:off x="731520" y="6537960"/>
-            <a:ext cx="10698480" cy="274320"/>
+            <a:ext cx="10698480" cy="256032"/>
           </a:xfrm>
           <a:prstGeom prst="rect">
             <a:avLst/>
@@ -4048,7 +3982,7 @@
         </p:nvSpPr>
         <p:spPr>
           <a:xfrm>
-            <a:off x="731520" y="6016752"/>
+            <a:off x="731520" y="6053328"/>
             <a:ext cx="10728655" cy="365760"/>
           </a:xfrm>
           <a:prstGeom prst="rect">
@@ -4057,7 +3991,7 @@
           <a:noFill/>
         </p:spPr>
         <p:txBody>
-          <a:bodyPr wrap="none" tIns="0" bIns="0" lIns="0" rIns="0">
+          <a:bodyPr wrap="none">
             <a:spAutoFit/>
           </a:bodyPr>
           <a:lstStyle/>
@@ -4071,7 +4005,7 @@
               </a:defRPr>
             </a:pPr>
             <a:r>
-              <a:t>Minh chứng đối chứng: Soi Cookie lưu trữ (HttpOnly = false) &amp; Lệnh JavaScript document.cookie đọc trộm Session Token (Trái) vs Cơ chế tự động mã hóa HTML của Razor View (Phải)</a:t>
+              <a:t>Soi Cookie lưu trữ (HttpOnly = false) &amp; Cửa sổ Console: Lệnh JavaScript document.cookie đọc trộm toàn bộ AuthSessionToken</a:t>
             </a:r>
           </a:p>
         </p:txBody>
@@ -4146,7 +4080,7 @@
         <p:spPr>
           <a:xfrm>
             <a:off x="731520" y="256032"/>
-            <a:ext cx="4389120" cy="329184"/>
+            <a:ext cx="4572000" cy="329184"/>
           </a:xfrm>
           <a:prstGeom prst="roundRect">
             <a:avLst/>
@@ -4223,7 +4157,7 @@
               </a:defRPr>
             </a:pPr>
             <a:r>
-              <a:t>2.5. Stored XSS: Minh Chứng Dữ Liệu CSDL &amp; Bảo Vệ Cookie</a:t>
+              <a:t>2.5. Stored XSS: Minh Chứng Dữ Liệu CSDL dbo.Comments &amp; Cờ Bảo Vệ</a:t>
             </a:r>
           </a:p>
         </p:txBody>
@@ -4237,7 +4171,7 @@
         <p:spPr>
           <a:xfrm>
             <a:off x="731520" y="6537960"/>
-            <a:ext cx="10698480" cy="274320"/>
+            <a:ext cx="10698480" cy="256032"/>
           </a:xfrm>
           <a:prstGeom prst="rect">
             <a:avLst/>
@@ -4557,7 +4491,7 @@
         <p:spPr>
           <a:xfrm>
             <a:off x="731520" y="256032"/>
-            <a:ext cx="4389120" cy="329184"/>
+            <a:ext cx="4572000" cy="329184"/>
           </a:xfrm>
           <a:prstGeom prst="roundRect">
             <a:avLst/>
@@ -4648,7 +4582,7 @@
         <p:spPr>
           <a:xfrm>
             <a:off x="731520" y="6537960"/>
-            <a:ext cx="10698480" cy="274320"/>
+            <a:ext cx="10698480" cy="256032"/>
           </a:xfrm>
           <a:prstGeom prst="rect">
             <a:avLst/>
@@ -4880,7 +4814,7 @@
         <p:spPr>
           <a:xfrm>
             <a:off x="731520" y="256032"/>
-            <a:ext cx="4389120" cy="329184"/>
+            <a:ext cx="4572000" cy="329184"/>
           </a:xfrm>
           <a:prstGeom prst="roundRect">
             <a:avLst/>
@@ -4971,7 +4905,7 @@
         <p:spPr>
           <a:xfrm>
             <a:off x="731520" y="6537960"/>
-            <a:ext cx="10698480" cy="274320"/>
+            <a:ext cx="10698480" cy="256032"/>
           </a:xfrm>
           <a:prstGeom prst="rect">
             <a:avLst/>
@@ -5290,7 +5224,7 @@
         <p:spPr>
           <a:xfrm>
             <a:off x="731520" y="256032"/>
-            <a:ext cx="4389120" cy="329184"/>
+            <a:ext cx="4572000" cy="329184"/>
           </a:xfrm>
           <a:prstGeom prst="roundRect">
             <a:avLst/>
@@ -5381,7 +5315,7 @@
         <p:spPr>
           <a:xfrm>
             <a:off x="731520" y="6537960"/>
-            <a:ext cx="10698480" cy="274320"/>
+            <a:ext cx="10698480" cy="256032"/>
           </a:xfrm>
           <a:prstGeom prst="rect">
             <a:avLst/>
@@ -5605,7 +5539,7 @@
         <p:spPr>
           <a:xfrm>
             <a:off x="731520" y="256032"/>
-            <a:ext cx="4389120" cy="329184"/>
+            <a:ext cx="4572000" cy="329184"/>
           </a:xfrm>
           <a:prstGeom prst="roundRect">
             <a:avLst/>
@@ -5682,7 +5616,7 @@
               </a:defRPr>
             </a:pPr>
             <a:r>
-              <a:t>3.3. CSRF Attack: Minh Chứng Kiểm Thử Qua Chrome DevTools (Request Headers)</a:t>
+              <a:t>3.3. CSRF Attack: Minh Chứng Thực Nghiệm Trực Quan Trên Web UI</a:t>
             </a:r>
           </a:p>
         </p:txBody>
@@ -5696,7 +5630,7 @@
         <p:spPr>
           <a:xfrm>
             <a:off x="731520" y="6537960"/>
-            <a:ext cx="10698480" cy="274320"/>
+            <a:ext cx="10698480" cy="256032"/>
           </a:xfrm>
           <a:prstGeom prst="rect">
             <a:avLst/>
@@ -5725,7 +5659,7 @@
       </p:sp>
       <p:pic>
         <p:nvPicPr>
-          <p:cNvPr id="6" name="Picture 5" descr="03_csrf_devtools_proof.png"/>
+          <p:cNvPr id="6" name="Picture 5" descr="final_csrf_proof.png"/>
           <p:cNvPicPr>
             <a:picLocks noChangeAspect="1"/>
           </p:cNvPicPr>
@@ -5739,8 +5673,8 @@
         </p:blipFill>
         <p:spPr>
           <a:xfrm>
-            <a:off x="1883664" y="1234440"/>
-            <a:ext cx="8412480" cy="4732020"/>
+            <a:off x="2523744" y="1234440"/>
+            <a:ext cx="7132320" cy="4585063"/>
           </a:xfrm>
           <a:prstGeom prst="rect">
             <a:avLst/>
@@ -5764,7 +5698,7 @@
           <a:noFill/>
         </p:spPr>
         <p:txBody>
-          <a:bodyPr wrap="none" tIns="0" bIns="0" lIns="0" rIns="0">
+          <a:bodyPr wrap="none">
             <a:spAutoFit/>
           </a:bodyPr>
           <a:lstStyle/>
@@ -5778,7 +5712,7 @@
               </a:defRPr>
             </a:pPr>
             <a:r>
-              <a:t>Minh chứng đối chứng: Soi gói tin HTTP POST gửi ngầm từ Attacker Site: Đính kèm Cookie tự động nhưng thiếu Anti-Forgery Token của Hacker (Trái) vs Chặn đứng yêu cầu thiếu Token (Phải)</a:t>
+              <a:t>Minh chứng đối chứng ví tiền: Bị trừ 20.000.000 VNĐ qua biểu mẫu ẩn của Hacker (Trái) vs Chặn đứng yêu cầu thiếu Token (Phải)</a:t>
             </a:r>
           </a:p>
         </p:txBody>
@@ -5853,7 +5787,7 @@
         <p:spPr>
           <a:xfrm>
             <a:off x="731520" y="256032"/>
-            <a:ext cx="4389120" cy="329184"/>
+            <a:ext cx="4572000" cy="329184"/>
           </a:xfrm>
           <a:prstGeom prst="roundRect">
             <a:avLst/>
@@ -5930,7 +5864,7 @@
               </a:defRPr>
             </a:pPr>
             <a:r>
-              <a:t>3.4. CSRF Attack: Minh Chứng Biến Động CSDL dbo.UserWallets</a:t>
+              <a:t>3.4. CSRF Attack: Minh Chứng Kiểm Thử Qua Chrome DevTools (Request Headers)</a:t>
             </a:r>
           </a:p>
         </p:txBody>
@@ -5944,7 +5878,7 @@
         <p:spPr>
           <a:xfrm>
             <a:off x="731520" y="6537960"/>
-            <a:ext cx="10698480" cy="274320"/>
+            <a:ext cx="10698480" cy="256032"/>
           </a:xfrm>
           <a:prstGeom prst="rect">
             <a:avLst/>
@@ -5971,218 +5905,62 @@
           </a:p>
         </p:txBody>
       </p:sp>
-      <p:sp>
-        <p:nvSpPr>
-          <p:cNvPr id="6" name="Rounded Rectangle 5"/>
-          <p:cNvSpPr/>
-          <p:nvPr/>
-        </p:nvSpPr>
-        <p:spPr>
-          <a:xfrm>
-            <a:off x="731520" y="1234440"/>
-            <a:ext cx="5166360" cy="4937760"/>
-          </a:xfrm>
-          <a:prstGeom prst="roundRect">
-            <a:avLst/>
-          </a:prstGeom>
-          <a:solidFill>
-            <a:srgbClr val="F8FAFC"/>
-          </a:solidFill>
-          <a:ln>
-            <a:solidFill>
-              <a:srgbClr val="E2E8F0"/>
-            </a:solidFill>
-          </a:ln>
-        </p:spPr>
-        <p:style>
-          <a:lnRef idx="1">
-            <a:schemeClr val="accent1"/>
-          </a:lnRef>
-          <a:fillRef idx="3">
-            <a:schemeClr val="accent1"/>
-          </a:fillRef>
-          <a:effectRef idx="2">
-            <a:schemeClr val="accent1"/>
-          </a:effectRef>
-          <a:fontRef idx="minor">
-            <a:schemeClr val="lt1"/>
-          </a:fontRef>
-        </p:style>
-        <p:txBody>
-          <a:bodyPr rtlCol="0" anchor="ctr"/>
+      <p:pic>
+        <p:nvPicPr>
+          <p:cNvPr id="6" name="Picture 5" descr="03_csrf_devtools_proof.png"/>
+          <p:cNvPicPr>
+            <a:picLocks noChangeAspect="1"/>
+          </p:cNvPicPr>
+          <p:nvPr/>
+        </p:nvPicPr>
+        <p:blipFill>
+          <a:blip r:embed="rId2"/>
+          <a:stretch>
+            <a:fillRect/>
+          </a:stretch>
+        </p:blipFill>
+        <p:spPr>
+          <a:xfrm>
+            <a:off x="1883664" y="1234440"/>
+            <a:ext cx="8412480" cy="4732020"/>
+          </a:xfrm>
+          <a:prstGeom prst="rect">
+            <a:avLst/>
+          </a:prstGeom>
+        </p:spPr>
+      </p:pic>
+      <p:sp>
+        <p:nvSpPr>
+          <p:cNvPr id="7" name="TextBox 6"/>
+          <p:cNvSpPr txBox="1"/>
+          <p:nvPr/>
+        </p:nvSpPr>
+        <p:spPr>
+          <a:xfrm>
+            <a:off x="731520" y="6053328"/>
+            <a:ext cx="10728655" cy="365760"/>
+          </a:xfrm>
+          <a:prstGeom prst="rect">
+            <a:avLst/>
+          </a:prstGeom>
+          <a:noFill/>
+        </p:spPr>
+        <p:txBody>
+          <a:bodyPr wrap="none">
+            <a:spAutoFit/>
+          </a:bodyPr>
           <a:lstStyle/>
           <a:p>
             <a:pPr algn="ctr">
-              <a:defRPr sz="1400" b="1">
-                <a:solidFill>
-                  <a:srgbClr val="1D4ED8"/>
-                </a:solidFill>
-                <a:latin typeface="Arial"/>
-              </a:defRPr>
-            </a:pPr>
-            <a:r>
-              <a:t>1. Trạng Thái CSDL Ban Đầu</a:t>
-            </a:r>
-          </a:p>
-          <a:p>
-            <a:pPr>
-              <a:spcBef>
-                <a:spcPts val="600"/>
-              </a:spcBef>
-              <a:defRPr sz="950" b="0">
-                <a:solidFill>
-                  <a:srgbClr val="0F172A"/>
-                </a:solidFill>
-                <a:latin typeface="Courier New"/>
-              </a:defRPr>
-            </a:pPr>
-            <a:r>
-              <a:t>SELECT Id, OwnerName, Balance FROM dbo.UserWallets;</a:t>
-            </a:r>
-            <a:br/>
-            <a:br/>
-            <a:r>
-              <a:t>Id | OwnerName                      | Balance (VND)</a:t>
-            </a:r>
-            <a:br/>
-            <a:r>
-              <a:t>---+--------------------------------+---------------</a:t>
-            </a:r>
-            <a:br/>
-            <a:r>
-              <a:t> 1 | Nạn nhân (Nguyễn Danh Học)     | 50,000,000.00</a:t>
-            </a:r>
-            <a:br/>
-            <a:r>
-              <a:t> 2 | Kẻ tấn công (Hacker BlackHat)  |          0.00</a:t>
-            </a:r>
-            <a:br/>
-            <a:r>
-              <a:t>(2 rows affected)</a:t>
-            </a:r>
-          </a:p>
-          <a:p>
-            <a:pPr>
-              <a:spcBef>
-                <a:spcPts val="800"/>
-              </a:spcBef>
-              <a:defRPr sz="1150" b="0">
-                <a:solidFill>
-                  <a:srgbClr val="334155"/>
-                </a:solidFill>
-                <a:latin typeface="Arial"/>
-              </a:defRPr>
-            </a:pPr>
-            <a:r>
-              <a:t>Số dư ví tài khoản nạn nhân ở trạng thái ban đầu là 50 triệu VNĐ, tài khoản đối tượng tấn công là 0 VNĐ.</a:t>
-            </a:r>
-          </a:p>
-        </p:txBody>
-      </p:sp>
-      <p:sp>
-        <p:nvSpPr>
-          <p:cNvPr id="7" name="Rounded Rectangle 6"/>
-          <p:cNvSpPr/>
-          <p:nvPr/>
-        </p:nvSpPr>
-        <p:spPr>
-          <a:xfrm>
-            <a:off x="6263640" y="1234440"/>
-            <a:ext cx="5166360" cy="4937760"/>
-          </a:xfrm>
-          <a:prstGeom prst="roundRect">
-            <a:avLst/>
-          </a:prstGeom>
-          <a:solidFill>
-            <a:srgbClr val="FFF1F2"/>
-          </a:solidFill>
-          <a:ln>
-            <a:solidFill>
-              <a:srgbClr val="FECDD3"/>
-            </a:solidFill>
-          </a:ln>
-        </p:spPr>
-        <p:style>
-          <a:lnRef idx="1">
-            <a:schemeClr val="accent1"/>
-          </a:lnRef>
-          <a:fillRef idx="3">
-            <a:schemeClr val="accent1"/>
-          </a:fillRef>
-          <a:effectRef idx="2">
-            <a:schemeClr val="accent1"/>
-          </a:effectRef>
-          <a:fontRef idx="minor">
-            <a:schemeClr val="lt1"/>
-          </a:fontRef>
-        </p:style>
-        <p:txBody>
-          <a:bodyPr rtlCol="0" anchor="ctr"/>
-          <a:lstStyle/>
-          <a:p>
-            <a:pPr algn="ctr">
-              <a:defRPr sz="1400" b="1">
-                <a:solidFill>
-                  <a:srgbClr val="BE123C"/>
-                </a:solidFill>
-                <a:latin typeface="Arial"/>
-              </a:defRPr>
-            </a:pPr>
-            <a:r>
-              <a:t>2. Trạng Thái CSDL Sau Khai Thác CSRF</a:t>
-            </a:r>
-          </a:p>
-          <a:p>
-            <a:pPr>
-              <a:spcBef>
-                <a:spcPts val="600"/>
-              </a:spcBef>
-              <a:defRPr sz="950" b="0">
-                <a:solidFill>
-                  <a:srgbClr val="9F1239"/>
-                </a:solidFill>
-                <a:latin typeface="Courier New"/>
-              </a:defRPr>
-            </a:pPr>
-            <a:r>
-              <a:t>SELECT Id, OwnerName, Balance FROM dbo.UserWallets;</a:t>
-            </a:r>
-            <a:br/>
-            <a:br/>
-            <a:r>
-              <a:t>Id | OwnerName                      | Balance (VND)</a:t>
-            </a:r>
-            <a:br/>
-            <a:r>
-              <a:t>---+--------------------------------+---------------</a:t>
-            </a:r>
-            <a:br/>
-            <a:r>
-              <a:t> 1 | Nạn nhân (Nguyễn Danh Học)     | 30,000,000.00</a:t>
-            </a:r>
-            <a:br/>
-            <a:r>
-              <a:t> 2 | Kẻ tấn công (Hacker BlackHat)  | 20,000,000.00</a:t>
-            </a:r>
-            <a:br/>
-            <a:r>
-              <a:t>(2 rows affected)</a:t>
-            </a:r>
-          </a:p>
-          <a:p>
-            <a:pPr>
-              <a:spcBef>
-                <a:spcPts val="800"/>
-              </a:spcBef>
-              <a:defRPr sz="1150" b="0">
-                <a:solidFill>
-                  <a:srgbClr val="334155"/>
-                </a:solidFill>
-                <a:latin typeface="Arial"/>
-              </a:defRPr>
-            </a:pPr>
-            <a:r>
-              <a:t>Số dư thực tế trong CSDL bị thay đổi hoàn toàn tự động khi nạn nhân truy cập liên kết độc hại, chứng minh mức độ rủi ro nghiêm trọng của giao dịch thiếu token.</a:t>
+              <a:defRPr sz="1100" b="1">
+                <a:solidFill>
+                  <a:srgbClr val="047857"/>
+                </a:solidFill>
+                <a:latin typeface="Arial"/>
+              </a:defRPr>
+            </a:pPr>
+            <a:r>
+              <a:t>Soi gói tin HTTP POST gửi ngầm từ Attacker Site: Đính kèm Cookie tự động nhưng thiếu hoàn toàn Anti-Forgery Token</a:t>
             </a:r>
           </a:p>
         </p:txBody>
@@ -6257,7 +6035,7 @@
         <p:spPr>
           <a:xfrm>
             <a:off x="731520" y="256032"/>
-            <a:ext cx="4389120" cy="329184"/>
+            <a:ext cx="4572000" cy="329184"/>
           </a:xfrm>
           <a:prstGeom prst="roundRect">
             <a:avLst/>
@@ -6334,7 +6112,7 @@
               </a:defRPr>
             </a:pPr>
             <a:r>
-              <a:t>3.5. CSRF Attack: Cơ Chế Synchronizer Token &amp; Fetch API</a:t>
+              <a:t>3.5. CSRF Attack: Minh Chứng Biến Động CSDL dbo.UserWallets</a:t>
             </a:r>
           </a:p>
         </p:txBody>
@@ -6348,7 +6126,7 @@
         <p:spPr>
           <a:xfrm>
             <a:off x="731520" y="6537960"/>
-            <a:ext cx="10698480" cy="274320"/>
+            <a:ext cx="10698480" cy="256032"/>
           </a:xfrm>
           <a:prstGeom prst="rect">
             <a:avLst/>
@@ -6384,146 +6162,6 @@
         <p:spPr>
           <a:xfrm>
             <a:off x="731520" y="1234440"/>
-            <a:ext cx="5166360" cy="4937760"/>
-          </a:xfrm>
-          <a:prstGeom prst="roundRect">
-            <a:avLst/>
-          </a:prstGeom>
-          <a:solidFill>
-            <a:srgbClr val="ECFDF5"/>
-          </a:solidFill>
-          <a:ln>
-            <a:solidFill>
-              <a:srgbClr val="A7F3D0"/>
-            </a:solidFill>
-          </a:ln>
-        </p:spPr>
-        <p:style>
-          <a:lnRef idx="1">
-            <a:schemeClr val="accent1"/>
-          </a:lnRef>
-          <a:fillRef idx="3">
-            <a:schemeClr val="accent1"/>
-          </a:fillRef>
-          <a:effectRef idx="2">
-            <a:schemeClr val="accent1"/>
-          </a:effectRef>
-          <a:fontRef idx="minor">
-            <a:schemeClr val="lt1"/>
-          </a:fontRef>
-        </p:style>
-        <p:txBody>
-          <a:bodyPr rtlCol="0" anchor="ctr"/>
-          <a:lstStyle/>
-          <a:p>
-            <a:pPr algn="ctr">
-              <a:defRPr sz="1500" b="1">
-                <a:solidFill>
-                  <a:srgbClr val="047857"/>
-                </a:solidFill>
-                <a:latin typeface="Arial"/>
-              </a:defRPr>
-            </a:pPr>
-            <a:r>
-              <a:t>Mô Hình Synchronizer Token Pattern</a:t>
-            </a:r>
-          </a:p>
-          <a:p>
-            <a:pPr>
-              <a:spcBef>
-                <a:spcPts val="800"/>
-              </a:spcBef>
-              <a:defRPr sz="950" b="0">
-                <a:solidFill>
-                  <a:srgbClr val="065F46"/>
-                </a:solidFill>
-                <a:latin typeface="Courier New"/>
-              </a:defRPr>
-            </a:pPr>
-            <a:r>
-              <a:t>// 1. TRONG RAZOR VIEW: NHÚNG TOKEN VÀO FORM</a:t>
-            </a:r>
-            <a:br/>
-            <a:r>
-              <a:t>&lt;form asp-action="TransferSecure" method="post"&gt;</a:t>
-            </a:r>
-            <a:br/>
-            <a:r>
-              <a:t>    @Html.AntiForgeryToken()</a:t>
-            </a:r>
-            <a:br/>
-            <a:r>
-              <a:t>    &lt;input type="number" name="amount" /&gt;</a:t>
-            </a:r>
-            <a:br/>
-            <a:r>
-              <a:t>    &lt;button type="submit"&gt;Chuyển tiền&lt;/button&gt;</a:t>
-            </a:r>
-            <a:br/>
-            <a:r>
-              <a:t>&lt;/form&gt;</a:t>
-            </a:r>
-            <a:br/>
-            <a:br/>
-            <a:r>
-              <a:t>// 2. TRONG CONTROLLER: BẮT BUỘC KIỂM TRA TOKEN</a:t>
-            </a:r>
-            <a:br/>
-            <a:r>
-              <a:t>[HttpPost]</a:t>
-            </a:r>
-            <a:br/>
-            <a:r>
-              <a:t>[ValidateAntiForgeryToken]</a:t>
-            </a:r>
-            <a:br/>
-            <a:r>
-              <a:t>public IActionResult TransferSecure(decimal amount)</a:t>
-            </a:r>
-            <a:br/>
-            <a:r>
-              <a:t>{</a:t>
-            </a:r>
-            <a:br/>
-            <a:r>
-              <a:t>    // Chỉ thực thi khi Token từ Form khớp với Token trong Cookie</a:t>
-            </a:r>
-            <a:br/>
-            <a:r>
-              <a:t>}</a:t>
-            </a:r>
-          </a:p>
-          <a:p>
-            <a:pPr>
-              <a:spcBef>
-                <a:spcPts val="800"/>
-              </a:spcBef>
-              <a:defRPr sz="1150" b="0">
-                <a:solidFill>
-                  <a:srgbClr val="334155"/>
-                </a:solidFill>
-                <a:latin typeface="Arial"/>
-              </a:defRPr>
-            </a:pPr>
-            <a:r>
-              <a:t>Cơ chế bảo vệ:</a:t>
-            </a:r>
-            <a:br/>
-            <a:r>
-              <a:t>Máy chủ phát hành một cặp token: một lưu trong Cookie và một nhúng vào biểu mẫu. Trang web độc hại bị chặn đọc token bởi chính sách Same-Origin Policy (SOP).</a:t>
-            </a:r>
-          </a:p>
-        </p:txBody>
-      </p:sp>
-      <p:sp>
-        <p:nvSpPr>
-          <p:cNvPr id="7" name="Rounded Rectangle 6"/>
-          <p:cNvSpPr/>
-          <p:nvPr/>
-        </p:nvSpPr>
-        <p:spPr>
-          <a:xfrm>
-            <a:off x="6263640" y="1234440"/>
             <a:ext cx="5166360" cy="4937760"/>
           </a:xfrm>
           <a:prstGeom prst="roundRect">
@@ -6557,7 +6195,7 @@
           <a:lstStyle/>
           <a:p>
             <a:pPr algn="ctr">
-              <a:defRPr sz="1500" b="1">
+              <a:defRPr sz="1400" b="1">
                 <a:solidFill>
                   <a:srgbClr val="1D4ED8"/>
                 </a:solidFill>
@@ -6565,13 +6203,13 @@
               </a:defRPr>
             </a:pPr>
             <a:r>
-              <a:t>Tích Hợp Token Trong Fetch API (Slide Buổi 9)</a:t>
+              <a:t>1. Trạng Thái CSDL Ban Đầu</a:t>
             </a:r>
           </a:p>
           <a:p>
             <a:pPr>
               <a:spcBef>
-                <a:spcPts val="800"/>
+                <a:spcPts val="600"/>
               </a:spcBef>
               <a:defRPr sz="950" b="0">
                 <a:solidFill>
@@ -6581,48 +6219,28 @@
               </a:defRPr>
             </a:pPr>
             <a:r>
-              <a:t>// TRÍCH XUẤT VÀ GỬI TOKEN QUA HTTP HEADER:</a:t>
-            </a:r>
-            <a:br/>
-            <a:r>
-              <a:t>const token = document.querySelector('input[name="__RequestVerificationToken"]').value;</a:t>
-            </a:r>
-            <a:br/>
-            <a:br/>
-            <a:r>
-              <a:t>fetch('/Csrf/TransferAjax', {</a:t>
-            </a:r>
-            <a:br/>
-            <a:r>
-              <a:t>    method: 'POST',</a:t>
-            </a:r>
-            <a:br/>
-            <a:r>
-              <a:t>    headers: {</a:t>
-            </a:r>
-            <a:br/>
-            <a:r>
-              <a:t>        'Content-Type': 'application/json',</a:t>
-            </a:r>
-            <a:br/>
-            <a:r>
-              <a:t>        'RequestVerificationToken': token // HEADER BẢO VỆ</a:t>
-            </a:r>
-            <a:br/>
-            <a:r>
-              <a:t>    },</a:t>
-            </a:r>
-            <a:br/>
-            <a:r>
-              <a:t>    body: JSON.stringify({ amount: 5000000 })</a:t>
-            </a:r>
-            <a:br/>
-            <a:r>
-              <a:t>})</a:t>
-            </a:r>
-            <a:br/>
-            <a:r>
-              <a:t>.then(response =&gt; response.json());</a:t>
+              <a:t>SELECT Id, OwnerName, Balance FROM dbo.UserWallets;</a:t>
+            </a:r>
+            <a:br/>
+            <a:br/>
+            <a:r>
+              <a:t>Id | OwnerName                      | Balance (VND)</a:t>
+            </a:r>
+            <a:br/>
+            <a:r>
+              <a:t>---+--------------------------------+---------------</a:t>
+            </a:r>
+            <a:br/>
+            <a:r>
+              <a:t> 1 | Nạn nhân (Nguyễn Danh Học)     | 50,000,000.00</a:t>
+            </a:r>
+            <a:br/>
+            <a:r>
+              <a:t> 2 | Kẻ tấn công (Hacker BlackHat)  |          0.00</a:t>
+            </a:r>
+            <a:br/>
+            <a:r>
+              <a:t>(2 rows affected)</a:t>
             </a:r>
           </a:p>
           <a:p>
@@ -6638,11 +6256,115 @@
               </a:defRPr>
             </a:pPr>
             <a:r>
-              <a:t>Ứng dụng trong thực tế:</a:t>
-            </a:r>
-            <a:br/>
-            <a:r>
-              <a:t>Đối với các tác vụ gọi AJAX không tải lại trang, token được đọc từ thẻ ẩn và truyền qua HTTP Header để đảm bảo vừa tiện dụng vừa an toàn.</a:t>
+              <a:t>Số dư ví tài khoản nạn nhân ở trạng thái ban đầu là 50 triệu VNĐ, tài khoản đối tượng tấn công là 0 VNĐ.</a:t>
+            </a:r>
+          </a:p>
+        </p:txBody>
+      </p:sp>
+      <p:sp>
+        <p:nvSpPr>
+          <p:cNvPr id="7" name="Rounded Rectangle 6"/>
+          <p:cNvSpPr/>
+          <p:nvPr/>
+        </p:nvSpPr>
+        <p:spPr>
+          <a:xfrm>
+            <a:off x="6263640" y="1234440"/>
+            <a:ext cx="5166360" cy="4937760"/>
+          </a:xfrm>
+          <a:prstGeom prst="roundRect">
+            <a:avLst/>
+          </a:prstGeom>
+          <a:solidFill>
+            <a:srgbClr val="FFF1F2"/>
+          </a:solidFill>
+          <a:ln>
+            <a:solidFill>
+              <a:srgbClr val="FECDD3"/>
+            </a:solidFill>
+          </a:ln>
+        </p:spPr>
+        <p:style>
+          <a:lnRef idx="1">
+            <a:schemeClr val="accent1"/>
+          </a:lnRef>
+          <a:fillRef idx="3">
+            <a:schemeClr val="accent1"/>
+          </a:fillRef>
+          <a:effectRef idx="2">
+            <a:schemeClr val="accent1"/>
+          </a:effectRef>
+          <a:fontRef idx="minor">
+            <a:schemeClr val="lt1"/>
+          </a:fontRef>
+        </p:style>
+        <p:txBody>
+          <a:bodyPr rtlCol="0" anchor="ctr"/>
+          <a:lstStyle/>
+          <a:p>
+            <a:pPr algn="ctr">
+              <a:defRPr sz="1400" b="1">
+                <a:solidFill>
+                  <a:srgbClr val="BE123C"/>
+                </a:solidFill>
+                <a:latin typeface="Arial"/>
+              </a:defRPr>
+            </a:pPr>
+            <a:r>
+              <a:t>2. Trạng Thái CSDL Sau Khai Thác CSRF</a:t>
+            </a:r>
+          </a:p>
+          <a:p>
+            <a:pPr>
+              <a:spcBef>
+                <a:spcPts val="600"/>
+              </a:spcBef>
+              <a:defRPr sz="950" b="0">
+                <a:solidFill>
+                  <a:srgbClr val="9F1239"/>
+                </a:solidFill>
+                <a:latin typeface="Courier New"/>
+              </a:defRPr>
+            </a:pPr>
+            <a:r>
+              <a:t>SELECT Id, OwnerName, Balance FROM dbo.UserWallets;</a:t>
+            </a:r>
+            <a:br/>
+            <a:br/>
+            <a:r>
+              <a:t>Id | OwnerName                      | Balance (VND)</a:t>
+            </a:r>
+            <a:br/>
+            <a:r>
+              <a:t>---+--------------------------------+---------------</a:t>
+            </a:r>
+            <a:br/>
+            <a:r>
+              <a:t> 1 | Nạn nhân (Nguyễn Danh Học)     | 30,000,000.00</a:t>
+            </a:r>
+            <a:br/>
+            <a:r>
+              <a:t> 2 | Kẻ tấn công (Hacker BlackHat)  | 20,000,000.00</a:t>
+            </a:r>
+            <a:br/>
+            <a:r>
+              <a:t>(2 rows affected)</a:t>
+            </a:r>
+          </a:p>
+          <a:p>
+            <a:pPr>
+              <a:spcBef>
+                <a:spcPts val="800"/>
+              </a:spcBef>
+              <a:defRPr sz="1150" b="0">
+                <a:solidFill>
+                  <a:srgbClr val="334155"/>
+                </a:solidFill>
+                <a:latin typeface="Arial"/>
+              </a:defRPr>
+            </a:pPr>
+            <a:r>
+              <a:t>Số dư thực tế trong CSDL bị thay đổi hoàn toàn tự động khi nạn nhân truy cập liên kết độc hại, chứng minh mức độ rủi ro nghiêm trọng của giao dịch thiếu token.</a:t>
             </a:r>
           </a:p>
         </p:txBody>
@@ -6717,7 +6439,7 @@
         <p:spPr>
           <a:xfrm>
             <a:off x="731520" y="256032"/>
-            <a:ext cx="4389120" cy="329184"/>
+            <a:ext cx="4572000" cy="329184"/>
           </a:xfrm>
           <a:prstGeom prst="roundRect">
             <a:avLst/>
@@ -6758,7 +6480,7 @@
               </a:defRPr>
             </a:pPr>
             <a:r>
-              <a:t>OWASP TOP 10 • THỰC NGHIỆM AN TOÀN WEB</a:t>
+              <a:t>CHỦ ĐỀ 3 • NGUYỄN MINH CƯỜNG (23A1001D0058)</a:t>
             </a:r>
           </a:p>
         </p:txBody>
@@ -6794,7 +6516,7 @@
               </a:defRPr>
             </a:pPr>
             <a:r>
-              <a:t>Kết Luận Báo Cáo Thực Nghiệm OWASP Top 10</a:t>
+              <a:t>3.6. CSRF Attack: Cơ Chế Synchronizer Token &amp; Fetch API</a:t>
             </a:r>
           </a:p>
         </p:txBody>
@@ -6808,7 +6530,7 @@
         <p:spPr>
           <a:xfrm>
             <a:off x="731520" y="6537960"/>
-            <a:ext cx="10698480" cy="274320"/>
+            <a:ext cx="10698480" cy="256032"/>
           </a:xfrm>
           <a:prstGeom prst="rect">
             <a:avLst/>
@@ -6843,8 +6565,148 @@
         </p:nvSpPr>
         <p:spPr>
           <a:xfrm>
-            <a:off x="914400" y="1371600"/>
-            <a:ext cx="10362895" cy="4572000"/>
+            <a:off x="731520" y="1234440"/>
+            <a:ext cx="5166360" cy="4937760"/>
+          </a:xfrm>
+          <a:prstGeom prst="roundRect">
+            <a:avLst/>
+          </a:prstGeom>
+          <a:solidFill>
+            <a:srgbClr val="ECFDF5"/>
+          </a:solidFill>
+          <a:ln>
+            <a:solidFill>
+              <a:srgbClr val="A7F3D0"/>
+            </a:solidFill>
+          </a:ln>
+        </p:spPr>
+        <p:style>
+          <a:lnRef idx="1">
+            <a:schemeClr val="accent1"/>
+          </a:lnRef>
+          <a:fillRef idx="3">
+            <a:schemeClr val="accent1"/>
+          </a:fillRef>
+          <a:effectRef idx="2">
+            <a:schemeClr val="accent1"/>
+          </a:effectRef>
+          <a:fontRef idx="minor">
+            <a:schemeClr val="lt1"/>
+          </a:fontRef>
+        </p:style>
+        <p:txBody>
+          <a:bodyPr rtlCol="0" anchor="ctr"/>
+          <a:lstStyle/>
+          <a:p>
+            <a:pPr algn="ctr">
+              <a:defRPr sz="1500" b="1">
+                <a:solidFill>
+                  <a:srgbClr val="047857"/>
+                </a:solidFill>
+                <a:latin typeface="Arial"/>
+              </a:defRPr>
+            </a:pPr>
+            <a:r>
+              <a:t>Mô Hình Synchronizer Token Pattern</a:t>
+            </a:r>
+          </a:p>
+          <a:p>
+            <a:pPr>
+              <a:spcBef>
+                <a:spcPts val="800"/>
+              </a:spcBef>
+              <a:defRPr sz="950" b="0">
+                <a:solidFill>
+                  <a:srgbClr val="065F46"/>
+                </a:solidFill>
+                <a:latin typeface="Courier New"/>
+              </a:defRPr>
+            </a:pPr>
+            <a:r>
+              <a:t>// 1. TRONG RAZOR VIEW: NHÚNG TOKEN VÀO FORM</a:t>
+            </a:r>
+            <a:br/>
+            <a:r>
+              <a:t>&lt;form asp-action="TransferSecure" method="post"&gt;</a:t>
+            </a:r>
+            <a:br/>
+            <a:r>
+              <a:t>    @Html.AntiForgeryToken()</a:t>
+            </a:r>
+            <a:br/>
+            <a:r>
+              <a:t>    &lt;input type="number" name="amount" /&gt;</a:t>
+            </a:r>
+            <a:br/>
+            <a:r>
+              <a:t>    &lt;button type="submit"&gt;Chuyển tiền&lt;/button&gt;</a:t>
+            </a:r>
+            <a:br/>
+            <a:r>
+              <a:t>&lt;/form&gt;</a:t>
+            </a:r>
+            <a:br/>
+            <a:br/>
+            <a:r>
+              <a:t>// 2. TRONG CONTROLLER: BẮT BUỘC KIỂM TRA TOKEN</a:t>
+            </a:r>
+            <a:br/>
+            <a:r>
+              <a:t>[HttpPost]</a:t>
+            </a:r>
+            <a:br/>
+            <a:r>
+              <a:t>[ValidateAntiForgeryToken]</a:t>
+            </a:r>
+            <a:br/>
+            <a:r>
+              <a:t>public IActionResult TransferSecure(decimal amount)</a:t>
+            </a:r>
+            <a:br/>
+            <a:r>
+              <a:t>{</a:t>
+            </a:r>
+            <a:br/>
+            <a:r>
+              <a:t>    // Chỉ thực thi khi Token từ Form khớp với Token trong Cookie</a:t>
+            </a:r>
+            <a:br/>
+            <a:r>
+              <a:t>}</a:t>
+            </a:r>
+          </a:p>
+          <a:p>
+            <a:pPr>
+              <a:spcBef>
+                <a:spcPts val="800"/>
+              </a:spcBef>
+              <a:defRPr sz="1150" b="0">
+                <a:solidFill>
+                  <a:srgbClr val="334155"/>
+                </a:solidFill>
+                <a:latin typeface="Arial"/>
+              </a:defRPr>
+            </a:pPr>
+            <a:r>
+              <a:t>Cơ chế bảo vệ:</a:t>
+            </a:r>
+            <a:br/>
+            <a:r>
+              <a:t>Máy chủ phát hành một cặp token: một lưu trong Cookie và một nhúng vào biểu mẫu. Trang web độc hại bị chặn đọc token bởi chính sách Same-Origin Policy (SOP).</a:t>
+            </a:r>
+          </a:p>
+        </p:txBody>
+      </p:sp>
+      <p:sp>
+        <p:nvSpPr>
+          <p:cNvPr id="7" name="Rounded Rectangle 6"/>
+          <p:cNvSpPr/>
+          <p:nvPr/>
+        </p:nvSpPr>
+        <p:spPr>
+          <a:xfrm>
+            <a:off x="6263640" y="1234440"/>
+            <a:ext cx="5166360" cy="4937760"/>
           </a:xfrm>
           <a:prstGeom prst="roundRect">
             <a:avLst/>
@@ -6877,7 +6739,7 @@
           <a:lstStyle/>
           <a:p>
             <a:pPr algn="ctr">
-              <a:defRPr sz="1600" b="1">
+              <a:defRPr sz="1500" b="1">
                 <a:solidFill>
                   <a:srgbClr val="1D4ED8"/>
                 </a:solidFill>
@@ -6885,31 +6747,72 @@
               </a:defRPr>
             </a:pPr>
             <a:r>
-              <a:t>TỔNG KẾT KẾT QUẢ THỰC NGHIỆM CỦA NHÓM WNC.G01</a:t>
+              <a:t>Tích Hợp Token Trong Fetch API (Slide Buổi 9)</a:t>
             </a:r>
           </a:p>
           <a:p>
             <a:pPr>
               <a:spcBef>
-                <a:spcPts val="1400"/>
+                <a:spcPts val="800"/>
               </a:spcBef>
-              <a:defRPr sz="1300" b="0">
-                <a:solidFill>
-                  <a:srgbClr val="334155"/>
-                </a:solidFill>
-                <a:latin typeface="Arial"/>
-              </a:defRPr>
-            </a:pPr>
-            <a:r>
-              <a:t>1. Nguyễn Danh Học (SQL Injection): Phân tích cơ chế tấn công bẻ gãy cú pháp CSDL ở tầng Backend và giải pháp phòng thủ triệt để bằng Parameterized Query / EF Core LINQ.</a:t>
+              <a:defRPr sz="950" b="0">
+                <a:solidFill>
+                  <a:srgbClr val="0F172A"/>
+                </a:solidFill>
+                <a:latin typeface="Courier New"/>
+              </a:defRPr>
+            </a:pPr>
+            <a:r>
+              <a:t>// TRÍCH XUẤT VÀ GỬI TOKEN QUA HTTP HEADER:</a:t>
+            </a:r>
+            <a:br/>
+            <a:r>
+              <a:t>const token = document.querySelector('input[name="__RequestVerificationToken"]').value;</a:t>
+            </a:r>
+            <a:br/>
+            <a:br/>
+            <a:r>
+              <a:t>fetch('/Csrf/TransferAjax', {</a:t>
+            </a:r>
+            <a:br/>
+            <a:r>
+              <a:t>    method: 'POST',</a:t>
+            </a:r>
+            <a:br/>
+            <a:r>
+              <a:t>    headers: {</a:t>
+            </a:r>
+            <a:br/>
+            <a:r>
+              <a:t>        'Content-Type': 'application/json',</a:t>
+            </a:r>
+            <a:br/>
+            <a:r>
+              <a:t>        'RequestVerificationToken': token // HEADER BẢO VỆ</a:t>
+            </a:r>
+            <a:br/>
+            <a:r>
+              <a:t>    },</a:t>
+            </a:r>
+            <a:br/>
+            <a:r>
+              <a:t>    body: JSON.stringify({ amount: 5000000 })</a:t>
+            </a:r>
+            <a:br/>
+            <a:r>
+              <a:t>})</a:t>
+            </a:r>
+            <a:br/>
+            <a:r>
+              <a:t>.then(response =&gt; response.json());</a:t>
             </a:r>
           </a:p>
           <a:p>
             <a:pPr>
               <a:spcBef>
-                <a:spcPts val="1200"/>
+                <a:spcPts val="800"/>
               </a:spcBef>
-              <a:defRPr sz="1300" b="0">
+              <a:defRPr sz="1150" b="0">
                 <a:solidFill>
                   <a:srgbClr val="334155"/>
                 </a:solidFill>
@@ -6917,39 +6820,11 @@
               </a:defRPr>
             </a:pPr>
             <a:r>
-              <a:t>2. Nguyễn Thanh Bình (Stored XSS): Phân tích nguy cơ đánh cắp Session Cookie qua dữ liệu lưu trữ CSDL và giải pháp tự động HTML Encoding của Razor View kết hợp cờ HttpOnly.</a:t>
-            </a:r>
-          </a:p>
-          <a:p>
-            <a:pPr>
-              <a:spcBef>
-                <a:spcPts val="1200"/>
-              </a:spcBef>
-              <a:defRPr sz="1300" b="0">
-                <a:solidFill>
-                  <a:srgbClr val="334155"/>
-                </a:solidFill>
-                <a:latin typeface="Arial"/>
-              </a:defRPr>
-            </a:pPr>
-            <a:r>
-              <a:t>3. Nguyễn Minh Cường (CSRF Attack): Phân tích kỹ thuật mượn quyền người dùng qua biểu mẫu ẩn và giải pháp phòng thủ bằng Synchronizer Token Pattern trên cả Form lẫn Fetch API.</a:t>
-            </a:r>
-          </a:p>
-          <a:p>
-            <a:pPr>
-              <a:spcBef>
-                <a:spcPts val="2400"/>
-              </a:spcBef>
-              <a:defRPr sz="1500" b="1">
-                <a:solidFill>
-                  <a:srgbClr val="BE123C"/>
-                </a:solidFill>
-                <a:latin typeface="Arial"/>
-              </a:defRPr>
-            </a:pPr>
-            <a:r>
-              <a:t>Kính chúc thầy sức khỏe và công tác tốt. Nhóm WNC.G01 xin trân trọng cảm ơn!</a:t>
+              <a:t>Ứng dụng trong thực tế:</a:t>
+            </a:r>
+            <a:br/>
+            <a:r>
+              <a:t>Đối với các tác vụ gọi AJAX không tải lại trang, token được đọc từ thẻ ẩn và truyền qua HTTP Header để đảm bảo vừa tiện dụng vừa an toàn.</a:t>
             </a:r>
           </a:p>
         </p:txBody>
@@ -7024,7 +6899,7 @@
         <p:spPr>
           <a:xfrm>
             <a:off x="731520" y="256032"/>
-            <a:ext cx="4389120" cy="329184"/>
+            <a:ext cx="4572000" cy="329184"/>
           </a:xfrm>
           <a:prstGeom prst="roundRect">
             <a:avLst/>
@@ -7115,7 +6990,7 @@
         <p:spPr>
           <a:xfrm>
             <a:off x="731520" y="6537960"/>
-            <a:ext cx="10698480" cy="274320"/>
+            <a:ext cx="10698480" cy="256032"/>
           </a:xfrm>
           <a:prstGeom prst="rect">
             <a:avLst/>
@@ -7373,6 +7248,313 @@
             <a:br/>
             <a:r>
               <a:t>Lập trình viên giả định đầu vào '{username}' luôn là văn bản thông thường. Khi kẻ tấn công chèn ký tự nháy đơn ('), ranh giới giữa Dữ liệu (Data) và Cú pháp lệnh (Code) bị xóa nhòa hoàn toàn.</a:t>
+            </a:r>
+          </a:p>
+        </p:txBody>
+      </p:sp>
+    </p:spTree>
+  </p:cSld>
+  <p:clrMapOvr>
+    <a:masterClrMapping/>
+  </p:clrMapOvr>
+</p:sld>
+</file>
+
+<file path=ppt/slides/slide20.xml><?xml version="1.0" encoding="utf-8"?>
+<p:sld xmlns:a="http://schemas.openxmlformats.org/drawingml/2006/main" xmlns:p="http://schemas.openxmlformats.org/presentationml/2006/main" xmlns:r="http://schemas.openxmlformats.org/officeDocument/2006/relationships">
+  <p:cSld>
+    <p:spTree>
+      <p:nvGrpSpPr>
+        <p:cNvPr id="1" name=""/>
+        <p:cNvGrpSpPr/>
+        <p:nvPr/>
+      </p:nvGrpSpPr>
+      <p:grpSpPr/>
+      <p:sp>
+        <p:nvSpPr>
+          <p:cNvPr id="2" name="Rectangle 1"/>
+          <p:cNvSpPr/>
+          <p:nvPr/>
+        </p:nvSpPr>
+        <p:spPr>
+          <a:xfrm>
+            <a:off x="0" y="0"/>
+            <a:ext cx="12191695" cy="73152"/>
+          </a:xfrm>
+          <a:prstGeom prst="rect">
+            <a:avLst/>
+          </a:prstGeom>
+          <a:solidFill>
+            <a:srgbClr val="1D4ED8"/>
+          </a:solidFill>
+          <a:ln>
+            <a:noFill/>
+          </a:ln>
+        </p:spPr>
+        <p:style>
+          <a:lnRef idx="1">
+            <a:schemeClr val="accent1"/>
+          </a:lnRef>
+          <a:fillRef idx="3">
+            <a:schemeClr val="accent1"/>
+          </a:fillRef>
+          <a:effectRef idx="2">
+            <a:schemeClr val="accent1"/>
+          </a:effectRef>
+          <a:fontRef idx="minor">
+            <a:schemeClr val="lt1"/>
+          </a:fontRef>
+        </p:style>
+        <p:txBody>
+          <a:bodyPr rtlCol="0" anchor="ctr"/>
+          <a:lstStyle/>
+          <a:p>
+            <a:pPr algn="ctr"/>
+          </a:p>
+        </p:txBody>
+      </p:sp>
+      <p:sp>
+        <p:nvSpPr>
+          <p:cNvPr id="3" name="Rounded Rectangle 2"/>
+          <p:cNvSpPr/>
+          <p:nvPr/>
+        </p:nvSpPr>
+        <p:spPr>
+          <a:xfrm>
+            <a:off x="731520" y="256032"/>
+            <a:ext cx="4572000" cy="329184"/>
+          </a:xfrm>
+          <a:prstGeom prst="roundRect">
+            <a:avLst/>
+          </a:prstGeom>
+          <a:solidFill>
+            <a:srgbClr val="EFF6FF"/>
+          </a:solidFill>
+          <a:ln>
+            <a:solidFill>
+              <a:srgbClr val="BFDBFE"/>
+            </a:solidFill>
+          </a:ln>
+        </p:spPr>
+        <p:style>
+          <a:lnRef idx="1">
+            <a:schemeClr val="accent1"/>
+          </a:lnRef>
+          <a:fillRef idx="3">
+            <a:schemeClr val="accent1"/>
+          </a:fillRef>
+          <a:effectRef idx="2">
+            <a:schemeClr val="accent1"/>
+          </a:effectRef>
+          <a:fontRef idx="minor">
+            <a:schemeClr val="lt1"/>
+          </a:fontRef>
+        </p:style>
+        <p:txBody>
+          <a:bodyPr rtlCol="0" anchor="ctr" wrap="none"/>
+          <a:lstStyle/>
+          <a:p>
+            <a:pPr algn="ctr">
+              <a:defRPr sz="1000" b="1">
+                <a:solidFill>
+                  <a:srgbClr val="1D4ED8"/>
+                </a:solidFill>
+                <a:latin typeface="Arial"/>
+              </a:defRPr>
+            </a:pPr>
+            <a:r>
+              <a:t>OWASP TOP 10 • THỰC NGHIỆM AN TOÀN WEB</a:t>
+            </a:r>
+          </a:p>
+        </p:txBody>
+      </p:sp>
+      <p:sp>
+        <p:nvSpPr>
+          <p:cNvPr id="4" name="TextBox 3"/>
+          <p:cNvSpPr txBox="1"/>
+          <p:nvPr/>
+        </p:nvSpPr>
+        <p:spPr>
+          <a:xfrm>
+            <a:off x="731520" y="621792"/>
+            <a:ext cx="10698480" cy="548640"/>
+          </a:xfrm>
+          <a:prstGeom prst="rect">
+            <a:avLst/>
+          </a:prstGeom>
+          <a:noFill/>
+        </p:spPr>
+        <p:txBody>
+          <a:bodyPr wrap="square">
+            <a:spAutoFit/>
+          </a:bodyPr>
+          <a:lstStyle/>
+          <a:p>
+            <a:pPr>
+              <a:defRPr sz="2000" b="1">
+                <a:solidFill>
+                  <a:srgbClr val="0F172A"/>
+                </a:solidFill>
+                <a:latin typeface="Arial"/>
+              </a:defRPr>
+            </a:pPr>
+            <a:r>
+              <a:t>Kết Luận Báo Cáo Thực Nghiệm OWASP Top 10</a:t>
+            </a:r>
+          </a:p>
+        </p:txBody>
+      </p:sp>
+      <p:sp>
+        <p:nvSpPr>
+          <p:cNvPr id="5" name="TextBox 4"/>
+          <p:cNvSpPr txBox="1"/>
+          <p:nvPr/>
+        </p:nvSpPr>
+        <p:spPr>
+          <a:xfrm>
+            <a:off x="731520" y="6537960"/>
+            <a:ext cx="10698480" cy="256032"/>
+          </a:xfrm>
+          <a:prstGeom prst="rect">
+            <a:avLst/>
+          </a:prstGeom>
+          <a:noFill/>
+        </p:spPr>
+        <p:txBody>
+          <a:bodyPr wrap="none" lIns="0" rIns="0" tIns="0" bIns="0">
+            <a:spAutoFit/>
+          </a:bodyPr>
+          <a:lstStyle/>
+          <a:p>
+            <a:pPr>
+              <a:defRPr sz="950">
+                <a:solidFill>
+                  <a:srgbClr val="64748B"/>
+                </a:solidFill>
+                <a:latin typeface="Arial"/>
+              </a:defRPr>
+            </a:pPr>
+            <a:r>
+              <a:t>Nhóm WNC.G01 • Trường Đại học Mở Hà Nội (HOU) • Giảng viên: ThS. Lê Hữu Dũng</a:t>
+            </a:r>
+          </a:p>
+        </p:txBody>
+      </p:sp>
+      <p:sp>
+        <p:nvSpPr>
+          <p:cNvPr id="6" name="Rounded Rectangle 5"/>
+          <p:cNvSpPr/>
+          <p:nvPr/>
+        </p:nvSpPr>
+        <p:spPr>
+          <a:xfrm>
+            <a:off x="914400" y="1371600"/>
+            <a:ext cx="10362895" cy="4572000"/>
+          </a:xfrm>
+          <a:prstGeom prst="roundRect">
+            <a:avLst/>
+          </a:prstGeom>
+          <a:solidFill>
+            <a:srgbClr val="F8FAFC"/>
+          </a:solidFill>
+          <a:ln>
+            <a:solidFill>
+              <a:srgbClr val="E2E8F0"/>
+            </a:solidFill>
+          </a:ln>
+        </p:spPr>
+        <p:style>
+          <a:lnRef idx="1">
+            <a:schemeClr val="accent1"/>
+          </a:lnRef>
+          <a:fillRef idx="3">
+            <a:schemeClr val="accent1"/>
+          </a:fillRef>
+          <a:effectRef idx="2">
+            <a:schemeClr val="accent1"/>
+          </a:effectRef>
+          <a:fontRef idx="minor">
+            <a:schemeClr val="lt1"/>
+          </a:fontRef>
+        </p:style>
+        <p:txBody>
+          <a:bodyPr rtlCol="0" anchor="ctr"/>
+          <a:lstStyle/>
+          <a:p>
+            <a:pPr algn="ctr">
+              <a:defRPr sz="1600" b="1">
+                <a:solidFill>
+                  <a:srgbClr val="1D4ED8"/>
+                </a:solidFill>
+                <a:latin typeface="Arial"/>
+              </a:defRPr>
+            </a:pPr>
+            <a:r>
+              <a:t>TỔNG KẾT KẾT QUẢ THỰC NGHIỆM CỦA NHÓM WNC.G01</a:t>
+            </a:r>
+          </a:p>
+          <a:p>
+            <a:pPr>
+              <a:spcBef>
+                <a:spcPts val="1400"/>
+              </a:spcBef>
+              <a:defRPr sz="1300" b="0">
+                <a:solidFill>
+                  <a:srgbClr val="334155"/>
+                </a:solidFill>
+                <a:latin typeface="Arial"/>
+              </a:defRPr>
+            </a:pPr>
+            <a:r>
+              <a:t>1. Nguyễn Danh Học (SQL Injection): Phân tích cơ chế tấn công bẻ gãy cú pháp CSDL ở tầng Backend và giải pháp phòng thủ triệt để bằng Parameterized Query / EF Core LINQ.</a:t>
+            </a:r>
+          </a:p>
+          <a:p>
+            <a:pPr>
+              <a:spcBef>
+                <a:spcPts val="1200"/>
+              </a:spcBef>
+              <a:defRPr sz="1300" b="0">
+                <a:solidFill>
+                  <a:srgbClr val="334155"/>
+                </a:solidFill>
+                <a:latin typeface="Arial"/>
+              </a:defRPr>
+            </a:pPr>
+            <a:r>
+              <a:t>2. Nguyễn Thanh Bình (Stored XSS): Phân tích nguy cơ đánh cắp Session Cookie qua dữ liệu lưu trữ CSDL và giải pháp tự động HTML Encoding của Razor View kết hợp cờ HttpOnly.</a:t>
+            </a:r>
+          </a:p>
+          <a:p>
+            <a:pPr>
+              <a:spcBef>
+                <a:spcPts val="1200"/>
+              </a:spcBef>
+              <a:defRPr sz="1300" b="0">
+                <a:solidFill>
+                  <a:srgbClr val="334155"/>
+                </a:solidFill>
+                <a:latin typeface="Arial"/>
+              </a:defRPr>
+            </a:pPr>
+            <a:r>
+              <a:t>3. Nguyễn Minh Cường (CSRF Attack): Phân tích kỹ thuật mượn quyền người dùng qua biểu mẫu ẩn và giải pháp phòng thủ bằng Synchronizer Token Pattern trên cả Form lẫn Fetch API.</a:t>
+            </a:r>
+          </a:p>
+          <a:p>
+            <a:pPr>
+              <a:spcBef>
+                <a:spcPts val="2400"/>
+              </a:spcBef>
+              <a:defRPr sz="1500" b="1">
+                <a:solidFill>
+                  <a:srgbClr val="BE123C"/>
+                </a:solidFill>
+                <a:latin typeface="Arial"/>
+              </a:defRPr>
+            </a:pPr>
+            <a:r>
+              <a:t>Kính chúc thầy sức khỏe và công tác tốt. Nhóm WNC.G01 xin trân trọng cảm ơn!</a:t>
             </a:r>
           </a:p>
         </p:txBody>
@@ -7447,7 +7629,7 @@
         <p:spPr>
           <a:xfrm>
             <a:off x="731520" y="256032"/>
-            <a:ext cx="4389120" cy="329184"/>
+            <a:ext cx="4572000" cy="329184"/>
           </a:xfrm>
           <a:prstGeom prst="roundRect">
             <a:avLst/>
@@ -7524,7 +7706,7 @@
               </a:defRPr>
             </a:pPr>
             <a:r>
-              <a:t>1.2. SQL Injection: Phân Loại Kỹ Thuật OWASP &amp; Đánh Giá Rủi Ro</a:t>
+              <a:t>1.2. SQL Injection: 4 Kịch Bản Thực Nghiệm Trên Ứng Dụng</a:t>
             </a:r>
           </a:p>
         </p:txBody>
@@ -7538,7 +7720,7 @@
         <p:spPr>
           <a:xfrm>
             <a:off x="731520" y="6537960"/>
-            <a:ext cx="10698480" cy="274320"/>
+            <a:ext cx="10698480" cy="256032"/>
           </a:xfrm>
           <a:prstGeom prst="rect">
             <a:avLst/>
@@ -7565,255 +7747,524 @@
           </a:p>
         </p:txBody>
       </p:sp>
-      <p:sp>
-        <p:nvSpPr>
-          <p:cNvPr id="6" name="Rounded Rectangle 5"/>
-          <p:cNvSpPr/>
-          <p:nvPr/>
-        </p:nvSpPr>
-        <p:spPr>
-          <a:xfrm>
-            <a:off x="731520" y="1234440"/>
-            <a:ext cx="3328416" cy="4937760"/>
-          </a:xfrm>
-          <a:prstGeom prst="roundRect">
-            <a:avLst/>
-          </a:prstGeom>
-          <a:solidFill>
-            <a:srgbClr val="FFF1F2"/>
-          </a:solidFill>
-          <a:ln>
-            <a:solidFill>
-              <a:srgbClr val="FECDD3"/>
-            </a:solidFill>
-          </a:ln>
-        </p:spPr>
-        <p:style>
-          <a:lnRef idx="1">
-            <a:schemeClr val="accent1"/>
-          </a:lnRef>
-          <a:fillRef idx="3">
-            <a:schemeClr val="accent1"/>
-          </a:fillRef>
-          <a:effectRef idx="2">
-            <a:schemeClr val="accent1"/>
-          </a:effectRef>
-          <a:fontRef idx="minor">
-            <a:schemeClr val="lt1"/>
-          </a:fontRef>
-        </p:style>
-        <p:txBody>
-          <a:bodyPr rtlCol="0" anchor="ctr"/>
-          <a:lstStyle/>
-          <a:p>
-            <a:pPr algn="ctr">
-              <a:defRPr sz="1400" b="1">
-                <a:solidFill>
-                  <a:srgbClr val="BE123C"/>
-                </a:solidFill>
-                <a:latin typeface="Arial"/>
-              </a:defRPr>
-            </a:pPr>
-            <a:r>
-              <a:t>VƯỢT QUA XÁC THỰC</a:t>
-            </a:r>
-            <a:br/>
-            <a:r>
-              <a:t>(Authentication Bypass)</a:t>
-            </a:r>
-          </a:p>
-          <a:p>
-            <a:pPr>
-              <a:spcBef>
-                <a:spcPts val="1000"/>
-              </a:spcBef>
-              <a:defRPr sz="1200" b="0">
-                <a:solidFill>
-                  <a:srgbClr val="334155"/>
-                </a:solidFill>
-                <a:latin typeface="Arial"/>
-              </a:defRPr>
-            </a:pPr>
-            <a:r>
-              <a:t>• Cơ chế: Thay đổi cấu trúc logic của mệnh đề WHERE thành luôn đúng (TRUE).</a:t>
-            </a:r>
-            <a:br/>
-            <a:r>
-              <a:t>• Kẻ tấn công đăng nhập thẳng vào tài khoản Quản trị viên (Admin) mà không cần cung cấp mật khẩu.</a:t>
-            </a:r>
-            <a:br/>
-            <a:r>
-              <a:t>• Chiếm đoạt phiên làm việc hợp lệ và thay đổi quyền hạn người dùng trên hệ thống.</a:t>
-            </a:r>
-          </a:p>
-        </p:txBody>
-      </p:sp>
-      <p:sp>
-        <p:nvSpPr>
-          <p:cNvPr id="7" name="Rounded Rectangle 6"/>
-          <p:cNvSpPr/>
-          <p:nvPr/>
-        </p:nvSpPr>
-        <p:spPr>
-          <a:xfrm>
-            <a:off x="4416552" y="1234440"/>
-            <a:ext cx="3328416" cy="4937760"/>
-          </a:xfrm>
-          <a:prstGeom prst="roundRect">
-            <a:avLst/>
-          </a:prstGeom>
-          <a:solidFill>
-            <a:srgbClr val="FFFBEB"/>
-          </a:solidFill>
-          <a:ln>
-            <a:solidFill>
-              <a:srgbClr val="FEF08A"/>
-            </a:solidFill>
-          </a:ln>
-        </p:spPr>
-        <p:style>
-          <a:lnRef idx="1">
-            <a:schemeClr val="accent1"/>
-          </a:lnRef>
-          <a:fillRef idx="3">
-            <a:schemeClr val="accent1"/>
-          </a:fillRef>
-          <a:effectRef idx="2">
-            <a:schemeClr val="accent1"/>
-          </a:effectRef>
-          <a:fontRef idx="minor">
-            <a:schemeClr val="lt1"/>
-          </a:fontRef>
-        </p:style>
-        <p:txBody>
-          <a:bodyPr rtlCol="0" anchor="ctr"/>
-          <a:lstStyle/>
-          <a:p>
-            <a:pPr algn="ctr">
-              <a:defRPr sz="1400" b="1">
-                <a:solidFill>
-                  <a:srgbClr val="B45309"/>
-                </a:solidFill>
-                <a:latin typeface="Arial"/>
-              </a:defRPr>
-            </a:pPr>
-            <a:r>
-              <a:t>TRÍCH XUẤT CƠ SỞ DỮ LIỆU</a:t>
-            </a:r>
-            <a:br/>
-            <a:r>
-              <a:t>(Data Exfiltration)</a:t>
-            </a:r>
-          </a:p>
-          <a:p>
-            <a:pPr>
-              <a:spcBef>
-                <a:spcPts val="1000"/>
-              </a:spcBef>
-              <a:defRPr sz="1200" b="0">
-                <a:solidFill>
-                  <a:srgbClr val="334155"/>
-                </a:solidFill>
-                <a:latin typeface="Arial"/>
-              </a:defRPr>
-            </a:pPr>
-            <a:r>
-              <a:t>• Kỹ thuật Union-Based: Ghép nối bảng dữ liệu nhạy cảm vào kết quả truy vấn thông thường.</a:t>
-            </a:r>
-            <a:br/>
-            <a:r>
-              <a:t>• Kỹ thuật Error-Based / Blind: Suy luận dữ liệu qua thông báo lỗi hoặc độ trễ thời gian (Time Delay).</a:t>
-            </a:r>
-            <a:br/>
-            <a:r>
-              <a:t>• Làm rò rỉ toàn bộ hồ sơ khách hàng, mật khẩu và dữ liệu tài chính.</a:t>
-            </a:r>
-          </a:p>
-        </p:txBody>
-      </p:sp>
-      <p:sp>
-        <p:nvSpPr>
-          <p:cNvPr id="8" name="Rounded Rectangle 7"/>
-          <p:cNvSpPr/>
-          <p:nvPr/>
-        </p:nvSpPr>
-        <p:spPr>
-          <a:xfrm>
-            <a:off x="8101584" y="1234440"/>
-            <a:ext cx="3328416" cy="4937760"/>
-          </a:xfrm>
-          <a:prstGeom prst="roundRect">
-            <a:avLst/>
-          </a:prstGeom>
-          <a:solidFill>
-            <a:srgbClr val="EFF6FF"/>
-          </a:solidFill>
-          <a:ln>
-            <a:solidFill>
-              <a:srgbClr val="BFDBFE"/>
-            </a:solidFill>
-          </a:ln>
-        </p:spPr>
-        <p:style>
-          <a:lnRef idx="1">
-            <a:schemeClr val="accent1"/>
-          </a:lnRef>
-          <a:fillRef idx="3">
-            <a:schemeClr val="accent1"/>
-          </a:fillRef>
-          <a:effectRef idx="2">
-            <a:schemeClr val="accent1"/>
-          </a:effectRef>
-          <a:fontRef idx="minor">
-            <a:schemeClr val="lt1"/>
-          </a:fontRef>
-        </p:style>
-        <p:txBody>
-          <a:bodyPr rtlCol="0" anchor="ctr"/>
-          <a:lstStyle/>
-          <a:p>
-            <a:pPr algn="ctr">
-              <a:defRPr sz="1400" b="1">
-                <a:solidFill>
-                  <a:srgbClr val="1D4ED8"/>
-                </a:solidFill>
-                <a:latin typeface="Arial"/>
-              </a:defRPr>
-            </a:pPr>
-            <a:r>
-              <a:t>PHÁ HỦY / THỰC THI LỆNH</a:t>
-            </a:r>
-            <a:br/>
-            <a:r>
-              <a:t>(System Takeover)</a:t>
-            </a:r>
-          </a:p>
-          <a:p>
-            <a:pPr>
-              <a:spcBef>
-                <a:spcPts val="1000"/>
-              </a:spcBef>
-              <a:defRPr sz="1200" b="0">
-                <a:solidFill>
-                  <a:srgbClr val="334155"/>
-                </a:solidFill>
-                <a:latin typeface="Arial"/>
-              </a:defRPr>
-            </a:pPr>
-            <a:r>
-              <a:t>• Can thiệp DDL: Thực thi câu lệnh DROP TABLE, TRUNCATE làm sập dịch vụ.</a:t>
-            </a:r>
-            <a:br/>
-            <a:r>
-              <a:t>• Can thiệp DML: Thay đổi số dư ví, cấp đặc quyền trái phép.</a:t>
-            </a:r>
-            <a:br/>
-            <a:r>
-              <a:t>• Thực thi lệnh hệ điều hành: Kích hoạt thủ tục xp_cmdshell trên máy chủ SQL Server nếu cấu hình thiếu an toàn.</a:t>
-            </a:r>
-          </a:p>
-        </p:txBody>
-      </p:sp>
+      <p:graphicFrame>
+        <p:nvGraphicFramePr>
+          <p:cNvPr id="6" name="Table 5"/>
+          <p:cNvGraphicFramePr>
+            <a:graphicFrameLocks noGrp="1"/>
+          </p:cNvGraphicFramePr>
+          <p:nvPr/>
+        </p:nvGraphicFramePr>
+        <p:xfrm>
+          <a:off x="731520" y="1280160"/>
+          <a:ext cx="10728655" cy="4846320"/>
+        </p:xfrm>
+        <a:graphic>
+          <a:graphicData uri="http://schemas.openxmlformats.org/drawingml/2006/table">
+            <a:tbl>
+              <a:tblPr firstRow="1" bandRow="1">
+                <a:tableStyleId>{5C22544A-7EE6-4342-B048-85BDC9FD1C3A}</a:tableStyleId>
+              </a:tblPr>
+              <a:tblGrid>
+                <a:gridCol w="2682163"/>
+                <a:gridCol w="2682163"/>
+                <a:gridCol w="2682163"/>
+                <a:gridCol w="2682166"/>
+              </a:tblGrid>
+              <a:tr h="969264">
+                <a:tc>
+                  <a:txBody>
+                    <a:bodyPr/>
+                    <a:lstStyle/>
+                    <a:p>
+                      <a:pPr>
+                        <a:defRPr b="1" sz="1100">
+                          <a:solidFill>
+                            <a:srgbClr val="FFFFFF"/>
+                          </a:solidFill>
+                          <a:latin typeface="Arial"/>
+                        </a:defRPr>
+                      </a:pPr>
+                      <a:r>
+                        <a:t>Kịch bản kiểm thử</a:t>
+                      </a:r>
+                    </a:p>
+                  </a:txBody>
+                  <a:tcPr>
+                    <a:solidFill>
+                      <a:srgbClr val="1D4ED8"/>
+                    </a:solidFill>
+                  </a:tcPr>
+                </a:tc>
+                <a:tc>
+                  <a:txBody>
+                    <a:bodyPr/>
+                    <a:lstStyle/>
+                    <a:p>
+                      <a:pPr>
+                        <a:defRPr b="1" sz="1100">
+                          <a:solidFill>
+                            <a:srgbClr val="FFFFFF"/>
+                          </a:solidFill>
+                          <a:latin typeface="Arial"/>
+                        </a:defRPr>
+                      </a:pPr>
+                      <a:r>
+                        <a:t>Payload đưa vào ô Username</a:t>
+                      </a:r>
+                    </a:p>
+                  </a:txBody>
+                  <a:tcPr>
+                    <a:solidFill>
+                      <a:srgbClr val="1D4ED8"/>
+                    </a:solidFill>
+                  </a:tcPr>
+                </a:tc>
+                <a:tc>
+                  <a:txBody>
+                    <a:bodyPr/>
+                    <a:lstStyle/>
+                    <a:p>
+                      <a:pPr>
+                        <a:defRPr b="1" sz="1100">
+                          <a:solidFill>
+                            <a:srgbClr val="FFFFFF"/>
+                          </a:solidFill>
+                          <a:latin typeface="Arial"/>
+                        </a:defRPr>
+                      </a:pPr>
+                      <a:r>
+                        <a:t>Cơ chế bẻ gãy cú pháp</a:t>
+                      </a:r>
+                    </a:p>
+                  </a:txBody>
+                  <a:tcPr>
+                    <a:solidFill>
+                      <a:srgbClr val="1D4ED8"/>
+                    </a:solidFill>
+                  </a:tcPr>
+                </a:tc>
+                <a:tc>
+                  <a:txBody>
+                    <a:bodyPr/>
+                    <a:lstStyle/>
+                    <a:p>
+                      <a:pPr>
+                        <a:defRPr b="1" sz="1100">
+                          <a:solidFill>
+                            <a:srgbClr val="FFFFFF"/>
+                          </a:solidFill>
+                          <a:latin typeface="Arial"/>
+                        </a:defRPr>
+                      </a:pPr>
+                      <a:r>
+                        <a:t>Kết quả thực tế</a:t>
+                      </a:r>
+                    </a:p>
+                  </a:txBody>
+                  <a:tcPr>
+                    <a:solidFill>
+                      <a:srgbClr val="1D4ED8"/>
+                    </a:solidFill>
+                  </a:tcPr>
+                </a:tc>
+              </a:tr>
+              <a:tr h="969264">
+                <a:tc>
+                  <a:txBody>
+                    <a:bodyPr/>
+                    <a:lstStyle/>
+                    <a:p>
+                      <a:pPr>
+                        <a:defRPr sz="1050">
+                          <a:solidFill>
+                            <a:srgbClr val="0F172A"/>
+                          </a:solidFill>
+                          <a:latin typeface="Arial"/>
+                        </a:defRPr>
+                      </a:pPr>
+                      <a:r>
+                        <a:t>Payload 1: Bypass tổng quát</a:t>
+                      </a:r>
+                    </a:p>
+                  </a:txBody>
+                  <a:tcPr>
+                    <a:solidFill>
+                      <a:srgbClr val="F8FAFC"/>
+                    </a:solidFill>
+                  </a:tcPr>
+                </a:tc>
+                <a:tc>
+                  <a:txBody>
+                    <a:bodyPr/>
+                    <a:lstStyle/>
+                    <a:p>
+                      <a:pPr>
+                        <a:defRPr sz="1050" b="1">
+                          <a:solidFill>
+                            <a:srgbClr val="BE123C"/>
+                          </a:solidFill>
+                          <a:latin typeface="Courier New"/>
+                        </a:defRPr>
+                      </a:pPr>
+                      <a:r>
+                        <a:t>' OR '1'='1' --</a:t>
+                      </a:r>
+                    </a:p>
+                  </a:txBody>
+                  <a:tcPr>
+                    <a:solidFill>
+                      <a:srgbClr val="F8FAFC"/>
+                    </a:solidFill>
+                  </a:tcPr>
+                </a:tc>
+                <a:tc>
+                  <a:txBody>
+                    <a:bodyPr/>
+                    <a:lstStyle/>
+                    <a:p>
+                      <a:pPr>
+                        <a:defRPr sz="1050">
+                          <a:solidFill>
+                            <a:srgbClr val="334155"/>
+                          </a:solidFill>
+                          <a:latin typeface="Arial"/>
+                        </a:defRPr>
+                      </a:pPr>
+                      <a:r>
+                        <a:t>Nháy đơn (') đóng chuỗi; OR '1'='1' luôn đúng; '--' hủy vế kiểm tra pass.</a:t>
+                      </a:r>
+                    </a:p>
+                  </a:txBody>
+                  <a:tcPr>
+                    <a:solidFill>
+                      <a:srgbClr val="F8FAFC"/>
+                    </a:solidFill>
+                  </a:tcPr>
+                </a:tc>
+                <a:tc>
+                  <a:txBody>
+                    <a:bodyPr/>
+                    <a:lstStyle/>
+                    <a:p>
+                      <a:pPr>
+                        <a:defRPr sz="1050">
+                          <a:solidFill>
+                            <a:srgbClr val="334155"/>
+                          </a:solidFill>
+                          <a:latin typeface="Arial"/>
+                        </a:defRPr>
+                      </a:pPr>
+                      <a:r>
+                        <a:t>Bypass thành công, lấy tài khoản đầu tiên trong bảng (Admin).</a:t>
+                      </a:r>
+                    </a:p>
+                  </a:txBody>
+                  <a:tcPr>
+                    <a:solidFill>
+                      <a:srgbClr val="F8FAFC"/>
+                    </a:solidFill>
+                  </a:tcPr>
+                </a:tc>
+              </a:tr>
+              <a:tr h="969264">
+                <a:tc>
+                  <a:txBody>
+                    <a:bodyPr/>
+                    <a:lstStyle/>
+                    <a:p>
+                      <a:pPr>
+                        <a:defRPr sz="1050">
+                          <a:solidFill>
+                            <a:srgbClr val="0F172A"/>
+                          </a:solidFill>
+                          <a:latin typeface="Arial"/>
+                        </a:defRPr>
+                      </a:pPr>
+                      <a:r>
+                        <a:t>Payload 2: Nhắm đích danh Admin</a:t>
+                      </a:r>
+                    </a:p>
+                  </a:txBody>
+                  <a:tcPr>
+                    <a:solidFill>
+                      <a:srgbClr val="FFFFFF"/>
+                    </a:solidFill>
+                  </a:tcPr>
+                </a:tc>
+                <a:tc>
+                  <a:txBody>
+                    <a:bodyPr/>
+                    <a:lstStyle/>
+                    <a:p>
+                      <a:pPr>
+                        <a:defRPr sz="1050" b="1">
+                          <a:solidFill>
+                            <a:srgbClr val="BE123C"/>
+                          </a:solidFill>
+                          <a:latin typeface="Courier New"/>
+                        </a:defRPr>
+                      </a:pPr>
+                      <a:r>
+                        <a:t>admin' --</a:t>
+                      </a:r>
+                    </a:p>
+                  </a:txBody>
+                  <a:tcPr>
+                    <a:solidFill>
+                      <a:srgbClr val="FFFFFF"/>
+                    </a:solidFill>
+                  </a:tcPr>
+                </a:tc>
+                <a:tc>
+                  <a:txBody>
+                    <a:bodyPr/>
+                    <a:lstStyle/>
+                    <a:p>
+                      <a:pPr>
+                        <a:defRPr sz="1050">
+                          <a:solidFill>
+                            <a:srgbClr val="334155"/>
+                          </a:solidFill>
+                          <a:latin typeface="Arial"/>
+                        </a:defRPr>
+                      </a:pPr>
+                      <a:r>
+                        <a:t>Cố định Username = 'admin'; '--' vô hiệu hóa toàn bộ vế AND Password = ...</a:t>
+                      </a:r>
+                    </a:p>
+                  </a:txBody>
+                  <a:tcPr>
+                    <a:solidFill>
+                      <a:srgbClr val="FFFFFF"/>
+                    </a:solidFill>
+                  </a:tcPr>
+                </a:tc>
+                <a:tc>
+                  <a:txBody>
+                    <a:bodyPr/>
+                    <a:lstStyle/>
+                    <a:p>
+                      <a:pPr>
+                        <a:defRPr sz="1050">
+                          <a:solidFill>
+                            <a:srgbClr val="334155"/>
+                          </a:solidFill>
+                          <a:latin typeface="Arial"/>
+                        </a:defRPr>
+                      </a:pPr>
+                      <a:r>
+                        <a:t>Chiếm đoạt chính xác quyền Admin mà không cần dò mật khẩu.</a:t>
+                      </a:r>
+                    </a:p>
+                  </a:txBody>
+                  <a:tcPr>
+                    <a:solidFill>
+                      <a:srgbClr val="FFFFFF"/>
+                    </a:solidFill>
+                  </a:tcPr>
+                </a:tc>
+              </a:tr>
+              <a:tr h="969264">
+                <a:tc>
+                  <a:txBody>
+                    <a:bodyPr/>
+                    <a:lstStyle/>
+                    <a:p>
+                      <a:pPr>
+                        <a:defRPr sz="1050">
+                          <a:solidFill>
+                            <a:srgbClr val="0F172A"/>
+                          </a:solidFill>
+                          <a:latin typeface="Arial"/>
+                        </a:defRPr>
+                      </a:pPr>
+                      <a:r>
+                        <a:t>Payload 3: Logic số học</a:t>
+                      </a:r>
+                    </a:p>
+                  </a:txBody>
+                  <a:tcPr>
+                    <a:solidFill>
+                      <a:srgbClr val="F8FAFC"/>
+                    </a:solidFill>
+                  </a:tcPr>
+                </a:tc>
+                <a:tc>
+                  <a:txBody>
+                    <a:bodyPr/>
+                    <a:lstStyle/>
+                    <a:p>
+                      <a:pPr>
+                        <a:defRPr sz="1050" b="1">
+                          <a:solidFill>
+                            <a:srgbClr val="BE123C"/>
+                          </a:solidFill>
+                          <a:latin typeface="Courier New"/>
+                        </a:defRPr>
+                      </a:pPr>
+                      <a:r>
+                        <a:t>' OR 1=1 --</a:t>
+                      </a:r>
+                    </a:p>
+                  </a:txBody>
+                  <a:tcPr>
+                    <a:solidFill>
+                      <a:srgbClr val="F8FAFC"/>
+                    </a:solidFill>
+                  </a:tcPr>
+                </a:tc>
+                <a:tc>
+                  <a:txBody>
+                    <a:bodyPr/>
+                    <a:lstStyle/>
+                    <a:p>
+                      <a:pPr>
+                        <a:defRPr sz="1050">
+                          <a:solidFill>
+                            <a:srgbClr val="334155"/>
+                          </a:solidFill>
+                          <a:latin typeface="Arial"/>
+                        </a:defRPr>
+                      </a:pPr>
+                      <a:r>
+                        <a:t>Biểu thức số 1=1 luôn đúng, không phụ thuộc định dạng dấu nháy của CSDL.</a:t>
+                      </a:r>
+                    </a:p>
+                  </a:txBody>
+                  <a:tcPr>
+                    <a:solidFill>
+                      <a:srgbClr val="F8FAFC"/>
+                    </a:solidFill>
+                  </a:tcPr>
+                </a:tc>
+                <a:tc>
+                  <a:txBody>
+                    <a:bodyPr/>
+                    <a:lstStyle/>
+                    <a:p>
+                      <a:pPr>
+                        <a:defRPr sz="1050">
+                          <a:solidFill>
+                            <a:srgbClr val="334155"/>
+                          </a:solidFill>
+                          <a:latin typeface="Arial"/>
+                        </a:defRPr>
+                      </a:pPr>
+                      <a:r>
+                        <a:t>Trích xuất toàn bộ 4 tài khoản CSDL ra màn hình.</a:t>
+                      </a:r>
+                    </a:p>
+                  </a:txBody>
+                  <a:tcPr>
+                    <a:solidFill>
+                      <a:srgbClr val="F8FAFC"/>
+                    </a:solidFill>
+                  </a:tcPr>
+                </a:tc>
+              </a:tr>
+              <a:tr h="969264">
+                <a:tc>
+                  <a:txBody>
+                    <a:bodyPr/>
+                    <a:lstStyle/>
+                    <a:p>
+                      <a:pPr>
+                        <a:defRPr sz="1050">
+                          <a:solidFill>
+                            <a:srgbClr val="0F172A"/>
+                          </a:solidFill>
+                          <a:latin typeface="Arial"/>
+                        </a:defRPr>
+                      </a:pPr>
+                      <a:r>
+                        <a:t>Kịch bản chuẩn: Đăng nhập đúng</a:t>
+                      </a:r>
+                    </a:p>
+                  </a:txBody>
+                  <a:tcPr>
+                    <a:solidFill>
+                      <a:srgbClr val="FFFFFF"/>
+                    </a:solidFill>
+                  </a:tcPr>
+                </a:tc>
+                <a:tc>
+                  <a:txBody>
+                    <a:bodyPr/>
+                    <a:lstStyle/>
+                    <a:p>
+                      <a:pPr>
+                        <a:defRPr sz="1050" b="1">
+                          <a:solidFill>
+                            <a:srgbClr val="047857"/>
+                          </a:solidFill>
+                          <a:latin typeface="Courier New"/>
+                        </a:defRPr>
+                      </a:pPr>
+                      <a:r>
+                        <a:t>admin / AdminPassword@2026</a:t>
+                      </a:r>
+                    </a:p>
+                  </a:txBody>
+                  <a:tcPr>
+                    <a:solidFill>
+                      <a:srgbClr val="FFFFFF"/>
+                    </a:solidFill>
+                  </a:tcPr>
+                </a:tc>
+                <a:tc>
+                  <a:txBody>
+                    <a:bodyPr/>
+                    <a:lstStyle/>
+                    <a:p>
+                      <a:pPr>
+                        <a:defRPr sz="1050">
+                          <a:solidFill>
+                            <a:srgbClr val="334155"/>
+                          </a:solidFill>
+                          <a:latin typeface="Arial"/>
+                        </a:defRPr>
+                      </a:pPr>
+                      <a:r>
+                        <a:t>Dữ liệu hợp lệ, không chứa ký tự điều khiển hay can thiệp cú pháp.</a:t>
+                      </a:r>
+                    </a:p>
+                  </a:txBody>
+                  <a:tcPr>
+                    <a:solidFill>
+                      <a:srgbClr val="FFFFFF"/>
+                    </a:solidFill>
+                  </a:tcPr>
+                </a:tc>
+                <a:tc>
+                  <a:txBody>
+                    <a:bodyPr/>
+                    <a:lstStyle/>
+                    <a:p>
+                      <a:pPr>
+                        <a:defRPr sz="1050">
+                          <a:solidFill>
+                            <a:srgbClr val="334155"/>
+                          </a:solidFill>
+                          <a:latin typeface="Arial"/>
+                        </a:defRPr>
+                      </a:pPr>
+                      <a:r>
+                        <a:t>Đăng nhập thành công trên cả 2 nhánh (Lỗi &amp; Đã vá).</a:t>
+                      </a:r>
+                    </a:p>
+                  </a:txBody>
+                  <a:tcPr>
+                    <a:solidFill>
+                      <a:srgbClr val="FFFFFF"/>
+                    </a:solidFill>
+                  </a:tcPr>
+                </a:tc>
+              </a:tr>
+            </a:tbl>
+          </a:graphicData>
+        </a:graphic>
+      </p:graphicFrame>
     </p:spTree>
   </p:cSld>
   <p:clrMapOvr>
@@ -7884,7 +8335,7 @@
         <p:spPr>
           <a:xfrm>
             <a:off x="731520" y="256032"/>
-            <a:ext cx="4389120" cy="329184"/>
+            <a:ext cx="4572000" cy="329184"/>
           </a:xfrm>
           <a:prstGeom prst="roundRect">
             <a:avLst/>
@@ -7961,7 +8412,7 @@
               </a:defRPr>
             </a:pPr>
             <a:r>
-              <a:t>1.3. SQL Injection: Phân Tích Cấu Trúc Khai Thác Của Payload</a:t>
+              <a:t>1.3. SQL Injection: Minh Chứng Thực Nghiệm Trực Quan Trên Web UI</a:t>
             </a:r>
           </a:p>
         </p:txBody>
@@ -7975,7 +8426,7 @@
         <p:spPr>
           <a:xfrm>
             <a:off x="731520" y="6537960"/>
-            <a:ext cx="10698480" cy="274320"/>
+            <a:ext cx="10698480" cy="256032"/>
           </a:xfrm>
           <a:prstGeom prst="rect">
             <a:avLst/>
@@ -8002,133 +8453,62 @@
           </a:p>
         </p:txBody>
       </p:sp>
-      <p:sp>
-        <p:nvSpPr>
-          <p:cNvPr id="6" name="Rounded Rectangle 5"/>
-          <p:cNvSpPr/>
-          <p:nvPr/>
-        </p:nvSpPr>
-        <p:spPr>
-          <a:xfrm>
-            <a:off x="731520" y="1234440"/>
-            <a:ext cx="10728655" cy="4937760"/>
-          </a:xfrm>
-          <a:prstGeom prst="roundRect">
-            <a:avLst/>
-          </a:prstGeom>
-          <a:solidFill>
-            <a:srgbClr val="F8FAFC"/>
-          </a:solidFill>
-          <a:ln>
-            <a:solidFill>
-              <a:srgbClr val="E2E8F0"/>
-            </a:solidFill>
-          </a:ln>
-        </p:spPr>
-        <p:style>
-          <a:lnRef idx="1">
-            <a:schemeClr val="accent1"/>
-          </a:lnRef>
-          <a:fillRef idx="3">
-            <a:schemeClr val="accent1"/>
-          </a:fillRef>
-          <a:effectRef idx="2">
-            <a:schemeClr val="accent1"/>
-          </a:effectRef>
-          <a:fontRef idx="minor">
-            <a:schemeClr val="lt1"/>
-          </a:fontRef>
-        </p:style>
-        <p:txBody>
-          <a:bodyPr rtlCol="0" anchor="ctr"/>
+      <p:pic>
+        <p:nvPicPr>
+          <p:cNvPr id="6" name="Picture 5" descr="final_sqli_proof.png"/>
+          <p:cNvPicPr>
+            <a:picLocks noChangeAspect="1"/>
+          </p:cNvPicPr>
+          <p:nvPr/>
+        </p:nvPicPr>
+        <p:blipFill>
+          <a:blip r:embed="rId2"/>
+          <a:stretch>
+            <a:fillRect/>
+          </a:stretch>
+        </p:blipFill>
+        <p:spPr>
+          <a:xfrm>
+            <a:off x="2066543" y="1234440"/>
+            <a:ext cx="8046720" cy="4754880"/>
+          </a:xfrm>
+          <a:prstGeom prst="rect">
+            <a:avLst/>
+          </a:prstGeom>
+        </p:spPr>
+      </p:pic>
+      <p:sp>
+        <p:nvSpPr>
+          <p:cNvPr id="7" name="TextBox 6"/>
+          <p:cNvSpPr txBox="1"/>
+          <p:nvPr/>
+        </p:nvSpPr>
+        <p:spPr>
+          <a:xfrm>
+            <a:off x="731520" y="6053328"/>
+            <a:ext cx="10728655" cy="365760"/>
+          </a:xfrm>
+          <a:prstGeom prst="rect">
+            <a:avLst/>
+          </a:prstGeom>
+          <a:noFill/>
+        </p:spPr>
+        <p:txBody>
+          <a:bodyPr wrap="none" tIns="0" bIns="0" lIns="0" rIns="0">
+            <a:spAutoFit/>
+          </a:bodyPr>
           <a:lstStyle/>
           <a:p>
             <a:pPr algn="ctr">
-              <a:defRPr sz="1500" b="1">
-                <a:solidFill>
-                  <a:srgbClr val="BE123C"/>
-                </a:solidFill>
-                <a:latin typeface="Arial"/>
-              </a:defRPr>
-            </a:pPr>
-            <a:r>
-              <a:t>Kịch Bản: Bypass Đăng Nhập Với Chuỗi Khai Thác ' OR '1'='1' --</a:t>
-            </a:r>
-          </a:p>
-          <a:p>
-            <a:pPr>
-              <a:spcBef>
-                <a:spcPts val="600"/>
-              </a:spcBef>
-              <a:defRPr sz="1200" b="1">
+              <a:defRPr sz="1100" b="1">
                 <a:solidFill>
                   <a:srgbClr val="1D4ED8"/>
                 </a:solidFill>
-                <a:latin typeface="Courier New"/>
-              </a:defRPr>
-            </a:pPr>
-            <a:r>
-              <a:t>Giá trị Username đưa vào: ' OR '1'='1' --  | Mật khẩu: (tùy ý hoặc để trống)</a:t>
-            </a:r>
-            <a:br/>
-            <a:r>
-              <a:t>Truy vấn được máy chủ SQL Server phân tích &amp; thông dịch:</a:t>
-            </a:r>
-            <a:br/>
-            <a:r>
-              <a:t>SELECT * FROM Accounts WHERE Username = '' OR '1'='1' --' AND Password = 'xyz'</a:t>
-            </a:r>
-          </a:p>
-          <a:p>
-            <a:pPr>
-              <a:spcBef>
-                <a:spcPts val="1000"/>
-              </a:spcBef>
-              <a:defRPr sz="1250" b="0">
-                <a:solidFill>
-                  <a:srgbClr val="334155"/>
-                </a:solidFill>
-                <a:latin typeface="Arial"/>
-              </a:defRPr>
-            </a:pPr>
-            <a:r>
-              <a:t>Giải Phẫu 3 Thành Phần Khai Thác Cốt Lõi:</a:t>
-            </a:r>
-            <a:br/>
-            <a:r>
-              <a:t>1. Dấu nháy đơn (') : Đóng sớm chuỗi ký tự của trường Username, chuyển ngữ cảnh về cú pháp lệnh SQL.</a:t>
-            </a:r>
-            <a:br/>
-            <a:r>
-              <a:t>2. Mệnh đề OR '1'='1' : Biểu thức logic chân lý (luôn TRUE với mọi bản ghi trong bảng Accounts, khiến toàn bộ điều kiện lọc bị vô hiệu).</a:t>
-            </a:r>
-            <a:br/>
-            <a:r>
-              <a:t>3. Ký tự chú thích (--) : Báo cho máy chủ SQL bỏ qua toàn bộ phần kiểm tra mật khẩu phía sau (AND Password = '...').</a:t>
-            </a:r>
-          </a:p>
-          <a:p>
-            <a:pPr>
-              <a:spcBef>
-                <a:spcPts val="1000"/>
-              </a:spcBef>
-              <a:defRPr sz="1250" b="1">
-                <a:solidFill>
-                  <a:srgbClr val="B45309"/>
-                </a:solidFill>
-                <a:latin typeface="Arial"/>
-              </a:defRPr>
-            </a:pPr>
-            <a:r>
-              <a:t>Mở Rộng Kỹ Thuật Union-Based:</a:t>
-            </a:r>
-            <a:br/>
-            <a:r>
-              <a:t>Payload: ' UNION SELECT Id, Username, Password, SecretNote FROM Accounts --</a:t>
-            </a:r>
-            <a:br/>
-            <a:r>
-              <a:t>Cho phép kẻ tấn công trích xuất danh sách tài khoản quản trị và bí mật hệ thống trên các màn hình tra cứu thông thường.</a:t>
+                <a:latin typeface="Arial"/>
+              </a:defRPr>
+            </a:pPr>
+            <a:r>
+              <a:t>Minh chứng đối chứng: Trích xuất 4 tài khoản CSDL khi inject ' OR '1'='1' -- (Trái) vs Chặn đứng an toàn với EF Core (Phải)</a:t>
             </a:r>
           </a:p>
         </p:txBody>
@@ -8203,7 +8583,7 @@
         <p:spPr>
           <a:xfrm>
             <a:off x="731520" y="256032"/>
-            <a:ext cx="4389120" cy="329184"/>
+            <a:ext cx="4572000" cy="329184"/>
           </a:xfrm>
           <a:prstGeom prst="roundRect">
             <a:avLst/>
@@ -8294,7 +8674,7 @@
         <p:spPr>
           <a:xfrm>
             <a:off x="731520" y="6537960"/>
-            <a:ext cx="10698480" cy="274320"/>
+            <a:ext cx="10698480" cy="256032"/>
           </a:xfrm>
           <a:prstGeom prst="rect">
             <a:avLst/>
@@ -8376,7 +8756,7 @@
               </a:defRPr>
             </a:pPr>
             <a:r>
-              <a:t>Minh chứng đối chứng: Kiểm tra gói tin mạng (Network Fetch/XHR): Payload gửi lên và JSON trích xuất CSDL ' OR '1'='1' -- (Trái) vs Chặn đứng an toàn với EF Core (Phải)</a:t>
+              <a:t>Soi gói tin mạng (Network Fetch/XHR): Payload gửi lên mang chuỗi ' OR '1'='1' -- và JSON trích xuất 4 tài khoản rò rỉ</a:t>
             </a:r>
           </a:p>
         </p:txBody>
@@ -8451,7 +8831,7 @@
         <p:spPr>
           <a:xfrm>
             <a:off x="731520" y="256032"/>
-            <a:ext cx="4389120" cy="329184"/>
+            <a:ext cx="4572000" cy="329184"/>
           </a:xfrm>
           <a:prstGeom prst="roundRect">
             <a:avLst/>
@@ -8542,7 +8922,7 @@
         <p:spPr>
           <a:xfrm>
             <a:off x="731520" y="6537960"/>
-            <a:ext cx="10698480" cy="274320"/>
+            <a:ext cx="10698480" cy="256032"/>
           </a:xfrm>
           <a:prstGeom prst="rect">
             <a:avLst/>
@@ -8664,7 +9044,7 @@
             </a:r>
             <a:br/>
             <a:r>
-              <a:t>  "accounts": [ ... danh sách tài khoản trích xuất ... ]</a:t>
+              <a:t>  "accounts": [ ... 4 tài khoản trích xuất ... ]</a:t>
             </a:r>
             <a:br/>
             <a:r>
@@ -8946,7 +9326,7 @@
         <p:spPr>
           <a:xfrm>
             <a:off x="731520" y="256032"/>
-            <a:ext cx="4389120" cy="329184"/>
+            <a:ext cx="4572000" cy="329184"/>
           </a:xfrm>
           <a:prstGeom prst="roundRect">
             <a:avLst/>
@@ -9037,7 +9417,7 @@
         <p:spPr>
           <a:xfrm>
             <a:off x="731520" y="6537960"/>
-            <a:ext cx="10698480" cy="274320"/>
+            <a:ext cx="10698480" cy="256032"/>
           </a:xfrm>
           <a:prstGeom prst="rect">
             <a:avLst/>
@@ -9356,7 +9736,7 @@
         <p:spPr>
           <a:xfrm>
             <a:off x="731520" y="256032"/>
-            <a:ext cx="4389120" cy="329184"/>
+            <a:ext cx="4572000" cy="329184"/>
           </a:xfrm>
           <a:prstGeom prst="roundRect">
             <a:avLst/>
@@ -9447,7 +9827,7 @@
         <p:spPr>
           <a:xfrm>
             <a:off x="731520" y="6537960"/>
-            <a:ext cx="10698480" cy="274320"/>
+            <a:ext cx="10698480" cy="256032"/>
           </a:xfrm>
           <a:prstGeom prst="rect">
             <a:avLst/>
@@ -9791,7 +10171,7 @@
         <p:spPr>
           <a:xfrm>
             <a:off x="731520" y="256032"/>
-            <a:ext cx="4389120" cy="329184"/>
+            <a:ext cx="4572000" cy="329184"/>
           </a:xfrm>
           <a:prstGeom prst="roundRect">
             <a:avLst/>
@@ -9868,7 +10248,7 @@
               </a:defRPr>
             </a:pPr>
             <a:r>
-              <a:t>2.2. Stored XSS: Đánh Giá Rủi Ro &amp; Cơ Chế Chiếm Đoạt Phiên</a:t>
+              <a:t>2.2. Stored XSS: 4 Kịch Bản Thực Nghiệm Trên Ứng Dụng</a:t>
             </a:r>
           </a:p>
         </p:txBody>
@@ -9882,7 +10262,7 @@
         <p:spPr>
           <a:xfrm>
             <a:off x="731520" y="6537960"/>
-            <a:ext cx="10698480" cy="274320"/>
+            <a:ext cx="10698480" cy="256032"/>
           </a:xfrm>
           <a:prstGeom prst="rect">
             <a:avLst/>
@@ -9909,255 +10289,524 @@
           </a:p>
         </p:txBody>
       </p:sp>
-      <p:sp>
-        <p:nvSpPr>
-          <p:cNvPr id="6" name="Rounded Rectangle 5"/>
-          <p:cNvSpPr/>
-          <p:nvPr/>
-        </p:nvSpPr>
-        <p:spPr>
-          <a:xfrm>
-            <a:off x="731520" y="1234440"/>
-            <a:ext cx="3328416" cy="4937760"/>
-          </a:xfrm>
-          <a:prstGeom prst="roundRect">
-            <a:avLst/>
-          </a:prstGeom>
-          <a:solidFill>
-            <a:srgbClr val="FFF1F2"/>
-          </a:solidFill>
-          <a:ln>
-            <a:solidFill>
-              <a:srgbClr val="FECDD3"/>
-            </a:solidFill>
-          </a:ln>
-        </p:spPr>
-        <p:style>
-          <a:lnRef idx="1">
-            <a:schemeClr val="accent1"/>
-          </a:lnRef>
-          <a:fillRef idx="3">
-            <a:schemeClr val="accent1"/>
-          </a:fillRef>
-          <a:effectRef idx="2">
-            <a:schemeClr val="accent1"/>
-          </a:effectRef>
-          <a:fontRef idx="minor">
-            <a:schemeClr val="lt1"/>
-          </a:fontRef>
-        </p:style>
-        <p:txBody>
-          <a:bodyPr rtlCol="0" anchor="ctr"/>
-          <a:lstStyle/>
-          <a:p>
-            <a:pPr algn="ctr">
-              <a:defRPr sz="1400" b="1">
-                <a:solidFill>
-                  <a:srgbClr val="BE123C"/>
-                </a:solidFill>
-                <a:latin typeface="Arial"/>
-              </a:defRPr>
-            </a:pPr>
-            <a:r>
-              <a:t>ĐÁNH CẮP COOKIE &amp; PHIÊN</a:t>
-            </a:r>
-            <a:br/>
-            <a:r>
-              <a:t>(Session Hijacking)</a:t>
-            </a:r>
-          </a:p>
-          <a:p>
-            <a:pPr>
-              <a:spcBef>
-                <a:spcPts val="1000"/>
-              </a:spcBef>
-              <a:defRPr sz="1200" b="0">
-                <a:solidFill>
-                  <a:srgbClr val="334155"/>
-                </a:solidFill>
-                <a:latin typeface="Arial"/>
-              </a:defRPr>
-            </a:pPr>
-            <a:r>
-              <a:t>• Đoạn script đọc thuộc tính document.cookie để trích xuất token phiên làm việc.</a:t>
-            </a:r>
-            <a:br/>
-            <a:r>
-              <a:t>• Dữ liệu xác thực được gửi ngầm về máy chủ điều khiển của kẻ tấn công.</a:t>
-            </a:r>
-            <a:br/>
-            <a:r>
-              <a:t>• Kẻ tấn công sử dụng token để mạo danh người dùng hợp lệ.</a:t>
-            </a:r>
-          </a:p>
-        </p:txBody>
-      </p:sp>
-      <p:sp>
-        <p:nvSpPr>
-          <p:cNvPr id="7" name="Rounded Rectangle 6"/>
-          <p:cNvSpPr/>
-          <p:nvPr/>
-        </p:nvSpPr>
-        <p:spPr>
-          <a:xfrm>
-            <a:off x="4416552" y="1234440"/>
-            <a:ext cx="3328416" cy="4937760"/>
-          </a:xfrm>
-          <a:prstGeom prst="roundRect">
-            <a:avLst/>
-          </a:prstGeom>
-          <a:solidFill>
-            <a:srgbClr val="FFFBEB"/>
-          </a:solidFill>
-          <a:ln>
-            <a:solidFill>
-              <a:srgbClr val="FEF08A"/>
-            </a:solidFill>
-          </a:ln>
-        </p:spPr>
-        <p:style>
-          <a:lnRef idx="1">
-            <a:schemeClr val="accent1"/>
-          </a:lnRef>
-          <a:fillRef idx="3">
-            <a:schemeClr val="accent1"/>
-          </a:fillRef>
-          <a:effectRef idx="2">
-            <a:schemeClr val="accent1"/>
-          </a:effectRef>
-          <a:fontRef idx="minor">
-            <a:schemeClr val="lt1"/>
-          </a:fontRef>
-        </p:style>
-        <p:txBody>
-          <a:bodyPr rtlCol="0" anchor="ctr"/>
-          <a:lstStyle/>
-          <a:p>
-            <a:pPr algn="ctr">
-              <a:defRPr sz="1400" b="1">
-                <a:solidFill>
-                  <a:srgbClr val="B45309"/>
-                </a:solidFill>
-                <a:latin typeface="Arial"/>
-              </a:defRPr>
-            </a:pPr>
-            <a:r>
-              <a:t>THAY ĐỔI CẤU TRÚC DOM</a:t>
-            </a:r>
-            <a:br/>
-            <a:r>
-              <a:t>(DOM Manipulation / Phishing)</a:t>
-            </a:r>
-          </a:p>
-          <a:p>
-            <a:pPr>
-              <a:spcBef>
-                <a:spcPts val="1000"/>
-              </a:spcBef>
-              <a:defRPr sz="1200" b="0">
-                <a:solidFill>
-                  <a:srgbClr val="334155"/>
-                </a:solidFill>
-                <a:latin typeface="Arial"/>
-              </a:defRPr>
-            </a:pPr>
-            <a:r>
-              <a:t>• Thay đổi cấu trúc giao diện trang web, chèn các form đăng nhập giả mạo.</a:t>
-            </a:r>
-            <a:br/>
-            <a:r>
-              <a:t>• Lừa người dùng nhập thông tin nhạy cảm trên giao diện đã bị sửa đổi.</a:t>
-            </a:r>
-            <a:br/>
-            <a:r>
-              <a:t>• Tự động điều hướng người dùng sang các liên kết độc hại.</a:t>
-            </a:r>
-          </a:p>
-        </p:txBody>
-      </p:sp>
-      <p:sp>
-        <p:nvSpPr>
-          <p:cNvPr id="8" name="Rounded Rectangle 7"/>
-          <p:cNvSpPr/>
-          <p:nvPr/>
-        </p:nvSpPr>
-        <p:spPr>
-          <a:xfrm>
-            <a:off x="8101584" y="1234440"/>
-            <a:ext cx="3328416" cy="4937760"/>
-          </a:xfrm>
-          <a:prstGeom prst="roundRect">
-            <a:avLst/>
-          </a:prstGeom>
-          <a:solidFill>
-            <a:srgbClr val="EFF6FF"/>
-          </a:solidFill>
-          <a:ln>
-            <a:solidFill>
-              <a:srgbClr val="BFDBFE"/>
-            </a:solidFill>
-          </a:ln>
-        </p:spPr>
-        <p:style>
-          <a:lnRef idx="1">
-            <a:schemeClr val="accent1"/>
-          </a:lnRef>
-          <a:fillRef idx="3">
-            <a:schemeClr val="accent1"/>
-          </a:fillRef>
-          <a:effectRef idx="2">
-            <a:schemeClr val="accent1"/>
-          </a:effectRef>
-          <a:fontRef idx="minor">
-            <a:schemeClr val="lt1"/>
-          </a:fontRef>
-        </p:style>
-        <p:txBody>
-          <a:bodyPr rtlCol="0" anchor="ctr"/>
-          <a:lstStyle/>
-          <a:p>
-            <a:pPr algn="ctr">
-              <a:defRPr sz="1400" b="1">
-                <a:solidFill>
-                  <a:srgbClr val="1D4ED8"/>
-                </a:solidFill>
-                <a:latin typeface="Arial"/>
-              </a:defRPr>
-            </a:pPr>
-            <a:r>
-              <a:t>THỰC THI THAO TÁC TRÁI PHÉP</a:t>
-            </a:r>
-            <a:br/>
-            <a:r>
-              <a:t>(Client-Side Exploitation)</a:t>
-            </a:r>
-          </a:p>
-          <a:p>
-            <a:pPr>
-              <a:spcBef>
-                <a:spcPts val="1000"/>
-              </a:spcBef>
-              <a:defRPr sz="1200" b="0">
-                <a:solidFill>
-                  <a:srgbClr val="334155"/>
-                </a:solidFill>
-                <a:latin typeface="Arial"/>
-              </a:defRPr>
-            </a:pPr>
-            <a:r>
-              <a:t>• Ghi nhận thao tác bàn phím (Keylogging) khi người dùng nhập liệu.</a:t>
-            </a:r>
-            <a:br/>
-            <a:r>
-              <a:t>• Tự động thực hiện các hành động gửi tin nhắn hoặc đánh giá mạo danh người dùng.</a:t>
-            </a:r>
-            <a:br/>
-            <a:r>
-              <a:t>• Tận dụng quyền truy cập trình duyệt để mở rộng phạm vi tấn công.</a:t>
-            </a:r>
-          </a:p>
-        </p:txBody>
-      </p:sp>
+      <p:graphicFrame>
+        <p:nvGraphicFramePr>
+          <p:cNvPr id="6" name="Table 5"/>
+          <p:cNvGraphicFramePr>
+            <a:graphicFrameLocks noGrp="1"/>
+          </p:cNvGraphicFramePr>
+          <p:nvPr/>
+        </p:nvGraphicFramePr>
+        <p:xfrm>
+          <a:off x="731520" y="1280160"/>
+          <a:ext cx="10728655" cy="4846320"/>
+        </p:xfrm>
+        <a:graphic>
+          <a:graphicData uri="http://schemas.openxmlformats.org/drawingml/2006/table">
+            <a:tbl>
+              <a:tblPr firstRow="1" bandRow="1">
+                <a:tableStyleId>{5C22544A-7EE6-4342-B048-85BDC9FD1C3A}</a:tableStyleId>
+              </a:tblPr>
+              <a:tblGrid>
+                <a:gridCol w="2682163"/>
+                <a:gridCol w="2682163"/>
+                <a:gridCol w="2682163"/>
+                <a:gridCol w="2682166"/>
+              </a:tblGrid>
+              <a:tr h="969264">
+                <a:tc>
+                  <a:txBody>
+                    <a:bodyPr/>
+                    <a:lstStyle/>
+                    <a:p>
+                      <a:pPr>
+                        <a:defRPr b="1" sz="1100">
+                          <a:solidFill>
+                            <a:srgbClr val="FFFFFF"/>
+                          </a:solidFill>
+                          <a:latin typeface="Arial"/>
+                        </a:defRPr>
+                      </a:pPr>
+                      <a:r>
+                        <a:t>Kịch bản kiểm thử</a:t>
+                      </a:r>
+                    </a:p>
+                  </a:txBody>
+                  <a:tcPr>
+                    <a:solidFill>
+                      <a:srgbClr val="BE123C"/>
+                    </a:solidFill>
+                  </a:tcPr>
+                </a:tc>
+                <a:tc>
+                  <a:txBody>
+                    <a:bodyPr/>
+                    <a:lstStyle/>
+                    <a:p>
+                      <a:pPr>
+                        <a:defRPr b="1" sz="1100">
+                          <a:solidFill>
+                            <a:srgbClr val="FFFFFF"/>
+                          </a:solidFill>
+                          <a:latin typeface="Arial"/>
+                        </a:defRPr>
+                      </a:pPr>
+                      <a:r>
+                        <a:t>Mã độc Payload đưa vào</a:t>
+                      </a:r>
+                    </a:p>
+                  </a:txBody>
+                  <a:tcPr>
+                    <a:solidFill>
+                      <a:srgbClr val="BE123C"/>
+                    </a:solidFill>
+                  </a:tcPr>
+                </a:tc>
+                <a:tc>
+                  <a:txBody>
+                    <a:bodyPr/>
+                    <a:lstStyle/>
+                    <a:p>
+                      <a:pPr>
+                        <a:defRPr b="1" sz="1100">
+                          <a:solidFill>
+                            <a:srgbClr val="FFFFFF"/>
+                          </a:solidFill>
+                          <a:latin typeface="Arial"/>
+                        </a:defRPr>
+                      </a:pPr>
+                      <a:r>
+                        <a:t>Cơ chế kích hoạt trên Trình duyệt</a:t>
+                      </a:r>
+                    </a:p>
+                  </a:txBody>
+                  <a:tcPr>
+                    <a:solidFill>
+                      <a:srgbClr val="BE123C"/>
+                    </a:solidFill>
+                  </a:tcPr>
+                </a:tc>
+                <a:tc>
+                  <a:txBody>
+                    <a:bodyPr/>
+                    <a:lstStyle/>
+                    <a:p>
+                      <a:pPr>
+                        <a:defRPr b="1" sz="1100">
+                          <a:solidFill>
+                            <a:srgbClr val="FFFFFF"/>
+                          </a:solidFill>
+                          <a:latin typeface="Arial"/>
+                        </a:defRPr>
+                      </a:pPr>
+                      <a:r>
+                        <a:t>Mục tiêu khai thác</a:t>
+                      </a:r>
+                    </a:p>
+                  </a:txBody>
+                  <a:tcPr>
+                    <a:solidFill>
+                      <a:srgbClr val="BE123C"/>
+                    </a:solidFill>
+                  </a:tcPr>
+                </a:tc>
+              </a:tr>
+              <a:tr h="969264">
+                <a:tc>
+                  <a:txBody>
+                    <a:bodyPr/>
+                    <a:lstStyle/>
+                    <a:p>
+                      <a:pPr>
+                        <a:defRPr sz="1050">
+                          <a:solidFill>
+                            <a:srgbClr val="0F172A"/>
+                          </a:solidFill>
+                          <a:latin typeface="Arial"/>
+                        </a:defRPr>
+                      </a:pPr>
+                      <a:r>
+                        <a:t>Payload 1: Đánh cắp Cookie</a:t>
+                      </a:r>
+                    </a:p>
+                  </a:txBody>
+                  <a:tcPr>
+                    <a:solidFill>
+                      <a:srgbClr val="F8FAFC"/>
+                    </a:solidFill>
+                  </a:tcPr>
+                </a:tc>
+                <a:tc>
+                  <a:txBody>
+                    <a:bodyPr/>
+                    <a:lstStyle/>
+                    <a:p>
+                      <a:pPr>
+                        <a:defRPr sz="1050" b="1">
+                          <a:solidFill>
+                            <a:srgbClr val="BE123C"/>
+                          </a:solidFill>
+                          <a:latin typeface="Courier New"/>
+                        </a:defRPr>
+                      </a:pPr>
+                      <a:r>
+                        <a:t>&lt;script&gt;alert(document.cookie);&lt;/script&gt;</a:t>
+                      </a:r>
+                    </a:p>
+                  </a:txBody>
+                  <a:tcPr>
+                    <a:solidFill>
+                      <a:srgbClr val="F8FAFC"/>
+                    </a:solidFill>
+                  </a:tcPr>
+                </a:tc>
+                <a:tc>
+                  <a:txBody>
+                    <a:bodyPr/>
+                    <a:lstStyle/>
+                    <a:p>
+                      <a:pPr>
+                        <a:defRPr sz="1050">
+                          <a:solidFill>
+                            <a:srgbClr val="334155"/>
+                          </a:solidFill>
+                          <a:latin typeface="Arial"/>
+                        </a:defRPr>
+                      </a:pPr>
+                      <a:r>
+                        <a:t>Trình duyệt thực thi thẻ &lt;script&gt; và đọc toàn bộ giá trị lưu trong document.cookie.</a:t>
+                      </a:r>
+                    </a:p>
+                  </a:txBody>
+                  <a:tcPr>
+                    <a:solidFill>
+                      <a:srgbClr val="F8FAFC"/>
+                    </a:solidFill>
+                  </a:tcPr>
+                </a:tc>
+                <a:tc>
+                  <a:txBody>
+                    <a:bodyPr/>
+                    <a:lstStyle/>
+                    <a:p>
+                      <a:pPr>
+                        <a:defRPr sz="1050">
+                          <a:solidFill>
+                            <a:srgbClr val="334155"/>
+                          </a:solidFill>
+                          <a:latin typeface="Arial"/>
+                        </a:defRPr>
+                      </a:pPr>
+                      <a:r>
+                        <a:t>Chiếm đoạt Session Token (Cookie Stealing) để mạo danh người dùng.</a:t>
+                      </a:r>
+                    </a:p>
+                  </a:txBody>
+                  <a:tcPr>
+                    <a:solidFill>
+                      <a:srgbClr val="F8FAFC"/>
+                    </a:solidFill>
+                  </a:tcPr>
+                </a:tc>
+              </a:tr>
+              <a:tr h="969264">
+                <a:tc>
+                  <a:txBody>
+                    <a:bodyPr/>
+                    <a:lstStyle/>
+                    <a:p>
+                      <a:pPr>
+                        <a:defRPr sz="1050">
+                          <a:solidFill>
+                            <a:srgbClr val="0F172A"/>
+                          </a:solidFill>
+                          <a:latin typeface="Arial"/>
+                        </a:defRPr>
+                      </a:pPr>
+                      <a:r>
+                        <a:t>Payload 2: Bypass qua thẻ &lt;img&gt;</a:t>
+                      </a:r>
+                    </a:p>
+                  </a:txBody>
+                  <a:tcPr>
+                    <a:solidFill>
+                      <a:srgbClr val="FFFFFF"/>
+                    </a:solidFill>
+                  </a:tcPr>
+                </a:tc>
+                <a:tc>
+                  <a:txBody>
+                    <a:bodyPr/>
+                    <a:lstStyle/>
+                    <a:p>
+                      <a:pPr>
+                        <a:defRPr sz="1050" b="1">
+                          <a:solidFill>
+                            <a:srgbClr val="BE123C"/>
+                          </a:solidFill>
+                          <a:latin typeface="Courier New"/>
+                        </a:defRPr>
+                      </a:pPr>
+                      <a:r>
+                        <a:t>&lt;img src=x onerror=alert('XSS!')&gt;</a:t>
+                      </a:r>
+                    </a:p>
+                  </a:txBody>
+                  <a:tcPr>
+                    <a:solidFill>
+                      <a:srgbClr val="FFFFFF"/>
+                    </a:solidFill>
+                  </a:tcPr>
+                </a:tc>
+                <a:tc>
+                  <a:txBody>
+                    <a:bodyPr/>
+                    <a:lstStyle/>
+                    <a:p>
+                      <a:pPr>
+                        <a:defRPr sz="1050">
+                          <a:solidFill>
+                            <a:srgbClr val="334155"/>
+                          </a:solidFill>
+                          <a:latin typeface="Arial"/>
+                        </a:defRPr>
+                      </a:pPr>
+                      <a:r>
+                        <a:t>Khi đường dẫn ảnh bị lỗi (src=x), trình duyệt lập tức kích hoạt sự kiện onerror.</a:t>
+                      </a:r>
+                    </a:p>
+                  </a:txBody>
+                  <a:tcPr>
+                    <a:solidFill>
+                      <a:srgbClr val="FFFFFF"/>
+                    </a:solidFill>
+                  </a:tcPr>
+                </a:tc>
+                <a:tc>
+                  <a:txBody>
+                    <a:bodyPr/>
+                    <a:lstStyle/>
+                    <a:p>
+                      <a:pPr>
+                        <a:defRPr sz="1050">
+                          <a:solidFill>
+                            <a:srgbClr val="334155"/>
+                          </a:solidFill>
+                          <a:latin typeface="Arial"/>
+                        </a:defRPr>
+                      </a:pPr>
+                      <a:r>
+                        <a:t>Vượt qua các bộ lọc từ khóa đơn giản chỉ chặn chuỗi '&lt;script&gt;'.</a:t>
+                      </a:r>
+                    </a:p>
+                  </a:txBody>
+                  <a:tcPr>
+                    <a:solidFill>
+                      <a:srgbClr val="FFFFFF"/>
+                    </a:solidFill>
+                  </a:tcPr>
+                </a:tc>
+              </a:tr>
+              <a:tr h="969264">
+                <a:tc>
+                  <a:txBody>
+                    <a:bodyPr/>
+                    <a:lstStyle/>
+                    <a:p>
+                      <a:pPr>
+                        <a:defRPr sz="1050">
+                          <a:solidFill>
+                            <a:srgbClr val="0F172A"/>
+                          </a:solidFill>
+                          <a:latin typeface="Arial"/>
+                        </a:defRPr>
+                      </a:pPr>
+                      <a:r>
+                        <a:t>Payload 3: Thay đổi giao diện DOM</a:t>
+                      </a:r>
+                    </a:p>
+                  </a:txBody>
+                  <a:tcPr>
+                    <a:solidFill>
+                      <a:srgbClr val="F8FAFC"/>
+                    </a:solidFill>
+                  </a:tcPr>
+                </a:tc>
+                <a:tc>
+                  <a:txBody>
+                    <a:bodyPr/>
+                    <a:lstStyle/>
+                    <a:p>
+                      <a:pPr>
+                        <a:defRPr sz="1050" b="1">
+                          <a:solidFill>
+                            <a:srgbClr val="BE123C"/>
+                          </a:solidFill>
+                          <a:latin typeface="Courier New"/>
+                        </a:defRPr>
+                      </a:pPr>
+                      <a:r>
+                        <a:t>&lt;script&gt;document.body.innerHTML='...';&lt;/script&gt;</a:t>
+                      </a:r>
+                    </a:p>
+                  </a:txBody>
+                  <a:tcPr>
+                    <a:solidFill>
+                      <a:srgbClr val="F8FAFC"/>
+                    </a:solidFill>
+                  </a:tcPr>
+                </a:tc>
+                <a:tc>
+                  <a:txBody>
+                    <a:bodyPr/>
+                    <a:lstStyle/>
+                    <a:p>
+                      <a:pPr>
+                        <a:defRPr sz="1050">
+                          <a:solidFill>
+                            <a:srgbClr val="334155"/>
+                          </a:solidFill>
+                          <a:latin typeface="Arial"/>
+                        </a:defRPr>
+                      </a:pPr>
+                      <a:r>
+                        <a:t>Ghi đè thuộc tính innerHTML của thẻ body, xóa sạch nội dung gốc của trang.</a:t>
+                      </a:r>
+                    </a:p>
+                  </a:txBody>
+                  <a:tcPr>
+                    <a:solidFill>
+                      <a:srgbClr val="F8FAFC"/>
+                    </a:solidFill>
+                  </a:tcPr>
+                </a:tc>
+                <a:tc>
+                  <a:txBody>
+                    <a:bodyPr/>
+                    <a:lstStyle/>
+                    <a:p>
+                      <a:pPr>
+                        <a:defRPr sz="1050">
+                          <a:solidFill>
+                            <a:srgbClr val="334155"/>
+                          </a:solidFill>
+                          <a:latin typeface="Arial"/>
+                        </a:defRPr>
+                      </a:pPr>
+                      <a:r>
+                        <a:t>Web Defacement: Chèn form đăng nhập giả mạo lừa người dùng (Phishing).</a:t>
+                      </a:r>
+                    </a:p>
+                  </a:txBody>
+                  <a:tcPr>
+                    <a:solidFill>
+                      <a:srgbClr val="F8FAFC"/>
+                    </a:solidFill>
+                  </a:tcPr>
+                </a:tc>
+              </a:tr>
+              <a:tr h="969264">
+                <a:tc>
+                  <a:txBody>
+                    <a:bodyPr/>
+                    <a:lstStyle/>
+                    <a:p>
+                      <a:pPr>
+                        <a:defRPr sz="1050">
+                          <a:solidFill>
+                            <a:srgbClr val="0F172A"/>
+                          </a:solidFill>
+                          <a:latin typeface="Arial"/>
+                        </a:defRPr>
+                      </a:pPr>
+                      <a:r>
+                        <a:t>Bình luận hợp lệ chuẩn</a:t>
+                      </a:r>
+                    </a:p>
+                  </a:txBody>
+                  <a:tcPr>
+                    <a:solidFill>
+                      <a:srgbClr val="FFFFFF"/>
+                    </a:solidFill>
+                  </a:tcPr>
+                </a:tc>
+                <a:tc>
+                  <a:txBody>
+                    <a:bodyPr/>
+                    <a:lstStyle/>
+                    <a:p>
+                      <a:pPr>
+                        <a:defRPr sz="1050" b="1">
+                          <a:solidFill>
+                            <a:srgbClr val="047857"/>
+                          </a:solidFill>
+                          <a:latin typeface="Courier New"/>
+                        </a:defRPr>
+                      </a:pPr>
+                      <a:r>
+                        <a:t>Dịch vụ tư vấn rất chuyên nghiệp, 5 sao!</a:t>
+                      </a:r>
+                    </a:p>
+                  </a:txBody>
+                  <a:tcPr>
+                    <a:solidFill>
+                      <a:srgbClr val="FFFFFF"/>
+                    </a:solidFill>
+                  </a:tcPr>
+                </a:tc>
+                <a:tc>
+                  <a:txBody>
+                    <a:bodyPr/>
+                    <a:lstStyle/>
+                    <a:p>
+                      <a:pPr>
+                        <a:defRPr sz="1050">
+                          <a:solidFill>
+                            <a:srgbClr val="334155"/>
+                          </a:solidFill>
+                          <a:latin typeface="Arial"/>
+                        </a:defRPr>
+                      </a:pPr>
+                      <a:r>
+                        <a:t>Văn bản thuần túy không chứa thẻ HTML đặc biệt.</a:t>
+                      </a:r>
+                    </a:p>
+                  </a:txBody>
+                  <a:tcPr>
+                    <a:solidFill>
+                      <a:srgbClr val="FFFFFF"/>
+                    </a:solidFill>
+                  </a:tcPr>
+                </a:tc>
+                <a:tc>
+                  <a:txBody>
+                    <a:bodyPr/>
+                    <a:lstStyle/>
+                    <a:p>
+                      <a:pPr>
+                        <a:defRPr sz="1050">
+                          <a:solidFill>
+                            <a:srgbClr val="334155"/>
+                          </a:solidFill>
+                          <a:latin typeface="Arial"/>
+                        </a:defRPr>
+                      </a:pPr>
+                      <a:r>
+                        <a:t>Hiển thị bình thường trên cả 2 nhánh (Lỗi &amp; Đã phòng thủ).</a:t>
+                      </a:r>
+                    </a:p>
+                  </a:txBody>
+                  <a:tcPr>
+                    <a:solidFill>
+                      <a:srgbClr val="FFFFFF"/>
+                    </a:solidFill>
+                  </a:tcPr>
+                </a:tc>
+              </a:tr>
+            </a:tbl>
+          </a:graphicData>
+        </a:graphic>
+      </p:graphicFrame>
     </p:spTree>
   </p:cSld>
   <p:clrMapOvr>

--- a/Slide_OWASP_Top3_Nhom_WNC_G01.pptx
+++ b/Slide_OWASP_Top3_Nhom_WNC_G01.pptx
@@ -24,7 +24,6 @@
     <p:sldId id="272" r:id="rId23"/>
     <p:sldId id="273" r:id="rId24"/>
     <p:sldId id="274" r:id="rId25"/>
-    <p:sldId id="275" r:id="rId26"/>
   </p:sldIdLst>
   <p:sldSz cx="12191695" cy="6858000" type="screen4x3"/>
   <p:notesSz cx="6858000" cy="9144000"/>
@@ -3244,7 +3243,7 @@
               <a:spcBef>
                 <a:spcPts val="800"/>
               </a:spcBef>
-              <a:defRPr sz="2800" b="1">
+              <a:defRPr sz="2700" b="1">
                 <a:solidFill>
                   <a:srgbClr val="0F172A"/>
                 </a:solidFill>
@@ -3252,11 +3251,11 @@
               </a:defRPr>
             </a:pPr>
             <a:r>
-              <a:t>Nghiên Cứu Thực Nghiệm Lỗ Hổng Web &amp; Cơ Chế Phòng Thủ</a:t>
+              <a:t>SQL Injection • Stored XSS • CSRF Attack</a:t>
             </a:r>
             <a:br/>
             <a:r>
-              <a:t>(SQL Injection • Stored XSS • CSRF Attack)</a:t>
+              <a:t>Nghiên Cứu Lỗ Hổng — Thực Nghiệm — Cơ Chế Phòng Thủ</a:t>
             </a:r>
           </a:p>
           <a:p>
@@ -3584,7 +3583,7 @@
         <p:spPr>
           <a:xfrm>
             <a:off x="731520" y="256032"/>
-            <a:ext cx="4572000" cy="329184"/>
+            <a:ext cx="4754880" cy="329184"/>
           </a:xfrm>
           <a:prstGeom prst="roundRect">
             <a:avLst/>
@@ -3734,7 +3733,7 @@
         </p:nvSpPr>
         <p:spPr>
           <a:xfrm>
-            <a:off x="731520" y="6016752"/>
+            <a:off x="731520" y="5989320"/>
             <a:ext cx="10728655" cy="365760"/>
           </a:xfrm>
           <a:prstGeom prst="rect">
@@ -3832,7 +3831,7 @@
         <p:spPr>
           <a:xfrm>
             <a:off x="731520" y="256032"/>
-            <a:ext cx="4572000" cy="329184"/>
+            <a:ext cx="4754880" cy="329184"/>
           </a:xfrm>
           <a:prstGeom prst="roundRect">
             <a:avLst/>
@@ -3909,7 +3908,7 @@
               </a:defRPr>
             </a:pPr>
             <a:r>
-              <a:t>2.4. Stored XSS: Minh Chứng Kiểm Thử Qua Chrome DevTools (Application &amp; Console)</a:t>
+              <a:t>2.4. Stored XSS: Minh Chứng Kiểm Thử Qua Chrome DevTools (Cookie &amp; Console)</a:t>
             </a:r>
           </a:p>
         </p:txBody>
@@ -3982,7 +3981,7 @@
         </p:nvSpPr>
         <p:spPr>
           <a:xfrm>
-            <a:off x="731520" y="6053328"/>
+            <a:off x="731520" y="5989320"/>
             <a:ext cx="10728655" cy="365760"/>
           </a:xfrm>
           <a:prstGeom prst="rect">
@@ -4005,7 +4004,7 @@
               </a:defRPr>
             </a:pPr>
             <a:r>
-              <a:t>Soi Cookie lưu trữ (HttpOnly = false) &amp; Cửa sổ Console: Lệnh JavaScript document.cookie đọc trộm toàn bộ AuthSessionToken</a:t>
+              <a:t>Mô phỏng Lab: Nhánh vulnerable cấu hình HttpOnly = false để chứng minh JavaScript đọc trộm được Session Cookie</a:t>
             </a:r>
           </a:p>
         </p:txBody>
@@ -4080,7 +4079,7 @@
         <p:spPr>
           <a:xfrm>
             <a:off x="731520" y="256032"/>
-            <a:ext cx="4572000" cy="329184"/>
+            <a:ext cx="4754880" cy="329184"/>
           </a:xfrm>
           <a:prstGeom prst="roundRect">
             <a:avLst/>
@@ -4157,7 +4156,7 @@
               </a:defRPr>
             </a:pPr>
             <a:r>
-              <a:t>2.5. Stored XSS: Minh Chứng Dữ Liệu CSDL dbo.Comments &amp; Cờ Bảo Vệ</a:t>
+              <a:t>2.5. Stored XSS: Cơ Chế Phòng Thủ Chuẩn Trong ASP.NET Core</a:t>
             </a:r>
           </a:p>
         </p:txBody>
@@ -4206,7 +4205,123 @@
         </p:nvSpPr>
         <p:spPr>
           <a:xfrm>
-            <a:off x="731520" y="1234440"/>
+            <a:off x="731520" y="1280160"/>
+            <a:ext cx="5166360" cy="4937760"/>
+          </a:xfrm>
+          <a:prstGeom prst="roundRect">
+            <a:avLst/>
+          </a:prstGeom>
+          <a:solidFill>
+            <a:srgbClr val="ECFDF5"/>
+          </a:solidFill>
+          <a:ln>
+            <a:solidFill>
+              <a:srgbClr val="A7F3D0"/>
+            </a:solidFill>
+          </a:ln>
+        </p:spPr>
+        <p:style>
+          <a:lnRef idx="1">
+            <a:schemeClr val="accent1"/>
+          </a:lnRef>
+          <a:fillRef idx="3">
+            <a:schemeClr val="accent1"/>
+          </a:fillRef>
+          <a:effectRef idx="2">
+            <a:schemeClr val="accent1"/>
+          </a:effectRef>
+          <a:fontRef idx="minor">
+            <a:schemeClr val="lt1"/>
+          </a:fontRef>
+        </p:style>
+        <p:txBody>
+          <a:bodyPr rtlCol="0" anchor="ctr"/>
+          <a:lstStyle/>
+          <a:p>
+            <a:pPr algn="ctr">
+              <a:defRPr sz="1500" b="1">
+                <a:solidFill>
+                  <a:srgbClr val="047857"/>
+                </a:solidFill>
+                <a:latin typeface="Arial"/>
+              </a:defRPr>
+            </a:pPr>
+            <a:r>
+              <a:t>Phòng Thủ Tầng View: Context-Aware Encoding</a:t>
+            </a:r>
+          </a:p>
+          <a:p>
+            <a:pPr>
+              <a:spcBef>
+                <a:spcPts val="800"/>
+              </a:spcBef>
+              <a:defRPr sz="1050" b="0">
+                <a:solidFill>
+                  <a:srgbClr val="065F46"/>
+                </a:solidFill>
+                <a:latin typeface="Courier New"/>
+              </a:defRPr>
+            </a:pPr>
+            <a:r>
+              <a:t>// CÚ PHÁP RAZOR VIEW MẶC ĐỊNH (KHÔNG DÙNG HTML.RAW):</a:t>
+            </a:r>
+            <a:br/>
+            <a:r>
+              <a:t>&lt;p&gt;@comment.Content&lt;/p&gt;</a:t>
+            </a:r>
+            <a:br/>
+            <a:br/>
+            <a:r>
+              <a:t>// HOẶC MÃ HÓA TẠI CONTROLLER VỚI HTMLENCODER:</a:t>
+            </a:r>
+            <a:br/>
+            <a:r>
+              <a:t>string encoded = HtmlEncoder.Default.Encode(content);</a:t>
+            </a:r>
+            <a:br/>
+            <a:r>
+              <a:t>comment.Content = encoded;</a:t>
+            </a:r>
+          </a:p>
+          <a:p>
+            <a:pPr>
+              <a:spcBef>
+                <a:spcPts val="1200"/>
+              </a:spcBef>
+              <a:defRPr sz="1200" b="0">
+                <a:solidFill>
+                  <a:srgbClr val="334155"/>
+                </a:solidFill>
+                <a:latin typeface="Arial"/>
+              </a:defRPr>
+            </a:pPr>
+            <a:r>
+              <a:t>Cơ chế chuyển đổi thực thể HTML:</a:t>
+            </a:r>
+            <a:br/>
+            <a:r>
+              <a:t>• Ký tự '&lt;' biến đổi thành &amp;lt;</a:t>
+            </a:r>
+            <a:br/>
+            <a:r>
+              <a:t>• Ký tự '&gt;' biến đổi thành &amp;gt;</a:t>
+            </a:r>
+            <a:br/>
+            <a:r>
+              <a:t>Trình duyệt hiển thị dưới dạng văn bản thuần túy, loại bỏ hoàn toàn khả năng thực thi mã kịch bản.</a:t>
+            </a:r>
+          </a:p>
+        </p:txBody>
+      </p:sp>
+      <p:sp>
+        <p:nvSpPr>
+          <p:cNvPr id="7" name="Rounded Rectangle 6"/>
+          <p:cNvSpPr/>
+          <p:nvPr/>
+        </p:nvSpPr>
+        <p:spPr>
+          <a:xfrm>
+            <a:off x="6263640" y="1280160"/>
             <a:ext cx="5166360" cy="4937760"/>
           </a:xfrm>
           <a:prstGeom prst="roundRect">
@@ -4240,7 +4355,7 @@
           <a:lstStyle/>
           <a:p>
             <a:pPr algn="ctr">
-              <a:defRPr sz="1400" b="1">
+              <a:defRPr sz="1500" b="1">
                 <a:solidFill>
                   <a:srgbClr val="1D4ED8"/>
                 </a:solidFill>
@@ -4248,7 +4363,7 @@
               </a:defRPr>
             </a:pPr>
             <a:r>
-              <a:t>Dữ Liệu Lưu Trong Bảng dbo.Comments</a:t>
+              <a:t>Phòng Thủ Tầng Cookie &amp; Header (Khuyến Nghị)</a:t>
             </a:r>
           </a:p>
           <a:p>
@@ -4256,7 +4371,7 @@
               <a:spcBef>
                 <a:spcPts val="600"/>
               </a:spcBef>
-              <a:defRPr sz="950" b="0">
+              <a:defRPr sz="1000" b="0">
                 <a:solidFill>
                   <a:srgbClr val="0F172A"/>
                 </a:solidFill>
@@ -4264,32 +4379,39 @@
               </a:defRPr>
             </a:pPr>
             <a:r>
-              <a:t>SELECT Id, Author, Content, IsSecureStored FROM dbo.Comments;</a:t>
+              <a:t>// CẤU HÌNH COOKIE AN TOÀN TRONG SẢN PHẨM THẬT:</a:t>
             </a:r>
             <a:br/>
+            <a:r>
+              <a:t>Response.Cookies.Append("AuthSessionToken", token, new CookieOptions</a:t>
+            </a:r>
             <a:br/>
             <a:r>
-              <a:t>Id | Author        | Content                           | IsSecure</a:t>
+              <a:t>{</a:t>
             </a:r>
             <a:br/>
             <a:r>
-              <a:t>---+---------------+-----------------------------------+---------</a:t>
+              <a:t>    HttpOnly = true, // CẤM JAVASCRIPT ĐỌC TRỘM</a:t>
             </a:r>
             <a:br/>
             <a:r>
-              <a:t> 1 | Le Thanh Binh | Dich vu tu van rat chuyen nghiep! | 1</a:t>
+              <a:t>    Secure = true,   // BẮT BUỘC TRUYỀN QUA HTTPS</a:t>
             </a:r>
             <a:br/>
             <a:r>
-              <a:t> 2 | Hacker_XSS    | &lt;script&gt;alert(document.cookie);.. | 0</a:t>
+              <a:t>    SameSite = SameSiteMode.Strict</a:t>
+            </a:r>
+            <a:br/>
+            <a:r>
+              <a:t>});</a:t>
             </a:r>
           </a:p>
           <a:p>
             <a:pPr>
               <a:spcBef>
-                <a:spcPts val="800"/>
+                <a:spcPts val="1000"/>
               </a:spcBef>
-              <a:defRPr sz="1150" b="0">
+              <a:defRPr sz="1200" b="0">
                 <a:solidFill>
                   <a:srgbClr val="334155"/>
                 </a:solidFill>
@@ -4297,126 +4419,11 @@
               </a:defRPr>
             </a:pPr>
             <a:r>
-              <a:t>Phân tích đặc tính lưu trữ:</a:t>
+              <a:t>Chính sách Content Security Policy (CSP Header):</a:t>
             </a:r>
             <a:br/>
             <a:r>
-              <a:t>Mã kịch bản độc hại được lưu trữ trực tiếp trong CSDL. Do đó, lỗ hổng Stored XSS có tính chất nguy hại kéo dài và phát tán tới mọi người dùng xem nội dung đó.</a:t>
-            </a:r>
-          </a:p>
-        </p:txBody>
-      </p:sp>
-      <p:sp>
-        <p:nvSpPr>
-          <p:cNvPr id="7" name="Rounded Rectangle 6"/>
-          <p:cNvSpPr/>
-          <p:nvPr/>
-        </p:nvSpPr>
-        <p:spPr>
-          <a:xfrm>
-            <a:off x="6263640" y="1234440"/>
-            <a:ext cx="5166360" cy="4937760"/>
-          </a:xfrm>
-          <a:prstGeom prst="roundRect">
-            <a:avLst/>
-          </a:prstGeom>
-          <a:solidFill>
-            <a:srgbClr val="F8FAFC"/>
-          </a:solidFill>
-          <a:ln>
-            <a:solidFill>
-              <a:srgbClr val="E2E8F0"/>
-            </a:solidFill>
-          </a:ln>
-        </p:spPr>
-        <p:style>
-          <a:lnRef idx="1">
-            <a:schemeClr val="accent1"/>
-          </a:lnRef>
-          <a:fillRef idx="3">
-            <a:schemeClr val="accent1"/>
-          </a:fillRef>
-          <a:effectRef idx="2">
-            <a:schemeClr val="accent1"/>
-          </a:effectRef>
-          <a:fontRef idx="minor">
-            <a:schemeClr val="lt1"/>
-          </a:fontRef>
-        </p:style>
-        <p:txBody>
-          <a:bodyPr rtlCol="0" anchor="ctr"/>
-          <a:lstStyle/>
-          <a:p>
-            <a:pPr algn="ctr">
-              <a:defRPr sz="1400" b="1">
-                <a:solidFill>
-                  <a:srgbClr val="047857"/>
-                </a:solidFill>
-                <a:latin typeface="Arial"/>
-              </a:defRPr>
-            </a:pPr>
-            <a:r>
-              <a:t>Cơ Chế Bảo Vệ Với Cờ HttpOnly Cookie</a:t>
-            </a:r>
-          </a:p>
-          <a:p>
-            <a:pPr>
-              <a:spcBef>
-                <a:spcPts val="600"/>
-              </a:spcBef>
-              <a:defRPr sz="950" b="0">
-                <a:solidFill>
-                  <a:srgbClr val="065F46"/>
-                </a:solidFill>
-                <a:latin typeface="Courier New"/>
-              </a:defRPr>
-            </a:pPr>
-            <a:r>
-              <a:t>// CẤU HÌNH COOKIE AN TOÀN TRONG ASP.NET CORE:</a:t>
-            </a:r>
-            <a:br/>
-            <a:r>
-              <a:t>Response.Cookies.Append("AuthSessionToken", token, new CookieOptions</a:t>
-            </a:r>
-            <a:br/>
-            <a:r>
-              <a:t>{</a:t>
-            </a:r>
-            <a:br/>
-            <a:r>
-              <a:t>    HttpOnly = true, // CẤM JAVASCRIPT ĐỌC TRỘM</a:t>
-            </a:r>
-            <a:br/>
-            <a:r>
-              <a:t>    Secure = true,   // BẮT BUỘC TRUYỀN QUA HTTPS</a:t>
-            </a:r>
-            <a:br/>
-            <a:r>
-              <a:t>    SameSite = SameSiteMode.Strict</a:t>
-            </a:r>
-            <a:br/>
-            <a:r>
-              <a:t>});</a:t>
-            </a:r>
-          </a:p>
-          <a:p>
-            <a:pPr>
-              <a:spcBef>
-                <a:spcPts val="800"/>
-              </a:spcBef>
-              <a:defRPr sz="1150" b="0">
-                <a:solidFill>
-                  <a:srgbClr val="334155"/>
-                </a:solidFill>
-                <a:latin typeface="Arial"/>
-              </a:defRPr>
-            </a:pPr>
-            <a:r>
-              <a:t>Vai trò của cờ HttpOnly:</a:t>
-            </a:r>
-            <a:br/>
-            <a:r>
-              <a:t>Ngăn chặn mã JavaScript đọc thuộc tính document.cookie. Kể cả khi trang web xuất hiện lỗi XSS, kẻ tấn công cũng không thể trích xuất token phiên làm việc.</a:t>
+              <a:t>Thiết lập HTTP Header 'script-src self' ngăn cấm trình duyệt thực thi inline script, tạo thêm lớp bảo vệ vững chắc ngay cả khi có sơ hở ở tầng View.</a:t>
             </a:r>
           </a:p>
         </p:txBody>
@@ -4491,7 +4498,7 @@
         <p:spPr>
           <a:xfrm>
             <a:off x="731520" y="256032"/>
-            <a:ext cx="4572000" cy="329184"/>
+            <a:ext cx="4754880" cy="329184"/>
           </a:xfrm>
           <a:prstGeom prst="roundRect">
             <a:avLst/>
@@ -4532,7 +4539,7 @@
               </a:defRPr>
             </a:pPr>
             <a:r>
-              <a:t>CHỦ ĐỀ 2 • NGUYỄN THANH BÌNH (23A1001D0041)</a:t>
+              <a:t>CHỦ ĐỀ 3 • NGUYỄN MINH CƯỜNG (23A1001D0058)</a:t>
             </a:r>
           </a:p>
         </p:txBody>
@@ -4568,7 +4575,7 @@
               </a:defRPr>
             </a:pPr>
             <a:r>
-              <a:t>2.6. Stored XSS: Bộ Giải Pháp Phòng Thủ Chuẩn Trong ASP.NET Core</a:t>
+              <a:t>3.1. CSRF Attack: Bản Chất Kỹ Thuật &amp; Phân Loại OWASP</a:t>
             </a:r>
           </a:p>
         </p:txBody>
@@ -4617,18 +4624,18 @@
         </p:nvSpPr>
         <p:spPr>
           <a:xfrm>
-            <a:off x="731520" y="1234440"/>
-            <a:ext cx="10728655" cy="4937760"/>
+            <a:off x="731520" y="1280160"/>
+            <a:ext cx="5166360" cy="4937760"/>
           </a:xfrm>
           <a:prstGeom prst="roundRect">
             <a:avLst/>
           </a:prstGeom>
           <a:solidFill>
-            <a:srgbClr val="ECFDF5"/>
+            <a:srgbClr val="F8FAFC"/>
           </a:solidFill>
           <a:ln>
             <a:solidFill>
-              <a:srgbClr val="A7F3D0"/>
+              <a:srgbClr val="E2E8F0"/>
             </a:solidFill>
           </a:ln>
         </p:spPr>
@@ -4653,13 +4660,13 @@
             <a:pPr algn="ctr">
               <a:defRPr sz="1500" b="1">
                 <a:solidFill>
-                  <a:srgbClr val="047857"/>
-                </a:solidFill>
-                <a:latin typeface="Arial"/>
-              </a:defRPr>
-            </a:pPr>
-            <a:r>
-              <a:t>CÁC NGUYÊN TẮC PHÒNG THỦ XSS THEO KHUYẾN NGHỊ OWASP:</a:t>
+                  <a:srgbClr val="BE123C"/>
+                </a:solidFill>
+                <a:latin typeface="Arial"/>
+              </a:defRPr>
+            </a:pPr>
+            <a:r>
+              <a:t>Bản Chất Kỹ Thuật Của Tấn Công CSRF</a:t>
             </a:r>
           </a:p>
           <a:p>
@@ -4667,19 +4674,15 @@
               <a:spcBef>
                 <a:spcPts val="800"/>
               </a:spcBef>
-              <a:defRPr sz="1300" b="0">
-                <a:solidFill>
-                  <a:srgbClr val="334155"/>
-                </a:solidFill>
-                <a:latin typeface="Arial"/>
-              </a:defRPr>
-            </a:pPr>
-            <a:r>
-              <a:t>1. Tận dụng cơ chế mã hóa tự động của Razor View:</a:t>
-            </a:r>
-            <a:br/>
-            <a:r>
-              <a:t>   Sử dụng cú pháp mặc định @model.Property thay vì @Html.Raw() đối với mọi dữ liệu bắt nguồn từ người dùng. Các ký tự nhạy cảm (&lt;, &gt;, ", ') tự động được chuyển đổi sang thực thể HTML an toàn.</a:t>
+              <a:defRPr sz="1250" b="1">
+                <a:solidFill>
+                  <a:srgbClr val="BE123C"/>
+                </a:solidFill>
+                <a:latin typeface="Arial"/>
+              </a:defRPr>
+            </a:pPr>
+            <a:r>
+              <a:t>• Phân loại chuẩn OWASP: CSRF không phải một mục riêng lẻ trong OWASP Top 10 2021; nó liên quan trực tiếp đến A01:2021 – Broken Access Control và cơ chế xác thực phiên.</a:t>
             </a:r>
           </a:p>
           <a:p>
@@ -4687,7 +4690,7 @@
               <a:spcBef>
                 <a:spcPts val="800"/>
               </a:spcBef>
-              <a:defRPr sz="1300" b="0">
+              <a:defRPr sz="1200" b="0">
                 <a:solidFill>
                   <a:srgbClr val="334155"/>
                 </a:solidFill>
@@ -4695,11 +4698,78 @@
               </a:defRPr>
             </a:pPr>
             <a:r>
-              <a:t>2. Mã hóa dữ liệu với System.Text.Encodings.Web:</a:t>
+              <a:t>• Cơ chế mượn quyền:</a:t>
             </a:r>
             <a:br/>
             <a:r>
-              <a:t>   Sử dụng HtmlEncoder.Default.Encode() để xử lý dữ liệu trước khi lưu trữ hoặc phản hồi.</a:t>
+              <a:t>  1. Nạn nhân có phiên làm việc hợp lệ (Cookie xác thực còn hiệu lực trên trình duyệt).</a:t>
+            </a:r>
+            <a:br/>
+            <a:r>
+              <a:t>  2. Trình duyệt tự động đính kèm Cookie xác thực theo mọi HTTP Request gửi tới ứng dụng mục tiêu.</a:t>
+            </a:r>
+            <a:br/>
+            <a:r>
+              <a:t>  3. Kẻ tấn công lừa nạn nhân truy cập một trang web nguồn gốc chéo (Cross-Origin Attacker Site).</a:t>
+            </a:r>
+            <a:br/>
+            <a:r>
+              <a:t>• Điểm mù: Máy chủ chỉ xác thực Cookie mà không kiểm tra nguồn gốc phát sinh Request.</a:t>
+            </a:r>
+          </a:p>
+        </p:txBody>
+      </p:sp>
+      <p:sp>
+        <p:nvSpPr>
+          <p:cNvPr id="7" name="Rounded Rectangle 6"/>
+          <p:cNvSpPr/>
+          <p:nvPr/>
+        </p:nvSpPr>
+        <p:spPr>
+          <a:xfrm>
+            <a:off x="6263640" y="1280160"/>
+            <a:ext cx="5166360" cy="4937760"/>
+          </a:xfrm>
+          <a:prstGeom prst="roundRect">
+            <a:avLst/>
+          </a:prstGeom>
+          <a:solidFill>
+            <a:srgbClr val="FFF1F2"/>
+          </a:solidFill>
+          <a:ln>
+            <a:solidFill>
+              <a:srgbClr val="FECDD3"/>
+            </a:solidFill>
+          </a:ln>
+        </p:spPr>
+        <p:style>
+          <a:lnRef idx="1">
+            <a:schemeClr val="accent1"/>
+          </a:lnRef>
+          <a:fillRef idx="3">
+            <a:schemeClr val="accent1"/>
+          </a:fillRef>
+          <a:effectRef idx="2">
+            <a:schemeClr val="accent1"/>
+          </a:effectRef>
+          <a:fontRef idx="minor">
+            <a:schemeClr val="lt1"/>
+          </a:fontRef>
+        </p:style>
+        <p:txBody>
+          <a:bodyPr rtlCol="0" anchor="ctr"/>
+          <a:lstStyle/>
+          <a:p>
+            <a:pPr algn="ctr">
+              <a:defRPr sz="1500" b="1">
+                <a:solidFill>
+                  <a:srgbClr val="BE123C"/>
+                </a:solidFill>
+                <a:latin typeface="Arial"/>
+              </a:defRPr>
+            </a:pPr>
+            <a:r>
+              <a:t>Action Xử Lý Giao Dịch Thiếu Kiểm Soát</a:t>
             </a:r>
           </a:p>
           <a:p>
@@ -4707,39 +4777,75 @@
               <a:spcBef>
                 <a:spcPts val="800"/>
               </a:spcBef>
-              <a:defRPr sz="1300" b="0">
-                <a:solidFill>
-                  <a:srgbClr val="334155"/>
-                </a:solidFill>
-                <a:latin typeface="Arial"/>
-              </a:defRPr>
-            </a:pPr>
-            <a:r>
-              <a:t>3. Thiết lập thuộc tính an toàn cho Cookie:</a:t>
+              <a:defRPr sz="1000" b="0">
+                <a:solidFill>
+                  <a:srgbClr val="9F1239"/>
+                </a:solidFill>
+                <a:latin typeface="Courier New"/>
+              </a:defRPr>
+            </a:pPr>
+            <a:r>
+              <a:t>// ACTION NHẬN YÊU CẦU KHÔNG CÓ BẢO VỆ TOKEN:</a:t>
             </a:r>
             <a:br/>
             <a:r>
-              <a:t>   Kích hoạt HttpOnly = true và Secure = true để bảo vệ token phiên làm việc khỏi sự can thiệp của mã kịch bản phía client.</a:t>
+              <a:t>[HttpPost]</a:t>
+            </a:r>
+            <a:br/>
+            <a:r>
+              <a:t>public IActionResult TransferVulnerable(decimal amount)</a:t>
+            </a:r>
+            <a:br/>
+            <a:r>
+              <a:t>{</a:t>
+            </a:r>
+            <a:br/>
+            <a:r>
+              <a:t>    var victim = _context.Wallets.Find(1);</a:t>
+            </a:r>
+            <a:br/>
+            <a:r>
+              <a:t>    var hacker = _context.Wallets.Find(2);</a:t>
+            </a:r>
+            <a:br/>
+            <a:r>
+              <a:t>    </a:t>
+            </a:r>
+            <a:br/>
+            <a:r>
+              <a:t>    victim.Balance -= amount;</a:t>
+            </a:r>
+            <a:br/>
+            <a:r>
+              <a:t>    hacker.Balance += amount;</a:t>
+            </a:r>
+            <a:br/>
+            <a:r>
+              <a:t>    _context.SaveChanges();</a:t>
+            </a:r>
+            <a:br/>
+            <a:r>
+              <a:t>    return RedirectToAction("Index");</a:t>
+            </a:r>
+            <a:br/>
+            <a:r>
+              <a:t>}</a:t>
             </a:r>
           </a:p>
           <a:p>
             <a:pPr>
               <a:spcBef>
-                <a:spcPts val="800"/>
+                <a:spcPts val="1000"/>
               </a:spcBef>
-              <a:defRPr sz="1300" b="0">
-                <a:solidFill>
-                  <a:srgbClr val="334155"/>
-                </a:solidFill>
-                <a:latin typeface="Arial"/>
-              </a:defRPr>
-            </a:pPr>
-            <a:r>
-              <a:t>4. Triển khai Content Security Policy (CSP Header):</a:t>
-            </a:r>
-            <a:br/>
-            <a:r>
-              <a:t>   Cấu hình chính sách bảo mật nội dung để hạn chế phạm vi thực thi kịch bản và chặn các nguồn tài nguyên không tin cậy.</a:t>
+              <a:defRPr sz="1200" b="1">
+                <a:solidFill>
+                  <a:srgbClr val="0F172A"/>
+                </a:solidFill>
+                <a:latin typeface="Arial"/>
+              </a:defRPr>
+            </a:pPr>
+            <a:r>
+              <a:t>Khi Action thiếu thuộc tính [ValidateAntiForgeryToken], yêu cầu POST bắt nguồn từ một website khác vẫn được thực thi do trình duyệt tự động kẹp theo Cookie của nạn nhân.</a:t>
             </a:r>
           </a:p>
         </p:txBody>
@@ -4814,7 +4920,7 @@
         <p:spPr>
           <a:xfrm>
             <a:off x="731520" y="256032"/>
-            <a:ext cx="4572000" cy="329184"/>
+            <a:ext cx="4754880" cy="329184"/>
           </a:xfrm>
           <a:prstGeom prst="roundRect">
             <a:avLst/>
@@ -4891,7 +4997,7 @@
               </a:defRPr>
             </a:pPr>
             <a:r>
-              <a:t>3.1. CSRF Attack: Bản Chất Kỹ Thuật &amp; Điều Kiện Tấn Công</a:t>
+              <a:t>3.2. CSRF Attack: Kịch Bản Khai Thác Qua Biểu Mẫu Ẩn</a:t>
             </a:r>
           </a:p>
         </p:txBody>
@@ -4940,99 +5046,8 @@
         </p:nvSpPr>
         <p:spPr>
           <a:xfrm>
-            <a:off x="731520" y="1234440"/>
-            <a:ext cx="5166360" cy="4937760"/>
-          </a:xfrm>
-          <a:prstGeom prst="roundRect">
-            <a:avLst/>
-          </a:prstGeom>
-          <a:solidFill>
-            <a:srgbClr val="F8FAFC"/>
-          </a:solidFill>
-          <a:ln>
-            <a:solidFill>
-              <a:srgbClr val="E2E8F0"/>
-            </a:solidFill>
-          </a:ln>
-        </p:spPr>
-        <p:style>
-          <a:lnRef idx="1">
-            <a:schemeClr val="accent1"/>
-          </a:lnRef>
-          <a:fillRef idx="3">
-            <a:schemeClr val="accent1"/>
-          </a:fillRef>
-          <a:effectRef idx="2">
-            <a:schemeClr val="accent1"/>
-          </a:effectRef>
-          <a:fontRef idx="minor">
-            <a:schemeClr val="lt1"/>
-          </a:fontRef>
-        </p:style>
-        <p:txBody>
-          <a:bodyPr rtlCol="0" anchor="ctr"/>
-          <a:lstStyle/>
-          <a:p>
-            <a:pPr algn="ctr">
-              <a:defRPr sz="1500" b="1">
-                <a:solidFill>
-                  <a:srgbClr val="BE123C"/>
-                </a:solidFill>
-                <a:latin typeface="Arial"/>
-              </a:defRPr>
-            </a:pPr>
-            <a:r>
-              <a:t>Bản Chất Kỹ Thuật Của Tấn Công CSRF</a:t>
-            </a:r>
-          </a:p>
-          <a:p>
-            <a:pPr>
-              <a:spcBef>
-                <a:spcPts val="800"/>
-              </a:spcBef>
-              <a:defRPr sz="1250" b="0">
-                <a:solidFill>
-                  <a:srgbClr val="334155"/>
-                </a:solidFill>
-                <a:latin typeface="Arial"/>
-              </a:defRPr>
-            </a:pPr>
-            <a:r>
-              <a:t>• CSRF (A01:2021 - Broken Access Control) là kỹ thuật tấn công mượn quyền người dùng hợp lệ.</a:t>
-            </a:r>
-            <a:br/>
-            <a:r>
-              <a:t>• Điều kiện tiên quyết:</a:t>
-            </a:r>
-            <a:br/>
-            <a:r>
-              <a:t>  1. Nạn nhân có phiên đăng nhập hợp lệ tại ứng dụng mục tiêu (Cookie xác thực còn hiệu lực).</a:t>
-            </a:r>
-            <a:br/>
-            <a:r>
-              <a:t>  2. Trình duyệt tự động đính kèm Cookie xác thực theo mọi HTTP Request gửi tới tên miền của ứng dụng.</a:t>
-            </a:r>
-            <a:br/>
-            <a:r>
-              <a:t>  3. Kẻ tấn công lừa nạn nhân truy cập một trang web độc hại do kẻ tấn công kiểm soát.</a:t>
-            </a:r>
-            <a:br/>
-            <a:r>
-              <a:t>• Điểm mù kiểm soát: Máy chủ chỉ xác thực Cookie của người dùng mà không kiểm tra nguồn gốc phát sinh Request.</a:t>
-            </a:r>
-          </a:p>
-        </p:txBody>
-      </p:sp>
-      <p:sp>
-        <p:nvSpPr>
-          <p:cNvPr id="7" name="Rounded Rectangle 6"/>
-          <p:cNvSpPr/>
-          <p:nvPr/>
-        </p:nvSpPr>
-        <p:spPr>
-          <a:xfrm>
-            <a:off x="6263640" y="1234440"/>
-            <a:ext cx="5166360" cy="4937760"/>
+            <a:off x="731520" y="1280160"/>
+            <a:ext cx="10728655" cy="4846320"/>
           </a:xfrm>
           <a:prstGeom prst="roundRect">
             <a:avLst/>
@@ -5065,7 +5080,7 @@
           <a:lstStyle/>
           <a:p>
             <a:pPr algn="ctr">
-              <a:defRPr sz="1500" b="1">
+              <a:defRPr sz="1600" b="1">
                 <a:solidFill>
                   <a:srgbClr val="BE123C"/>
                 </a:solidFill>
@@ -5073,7 +5088,7 @@
               </a:defRPr>
             </a:pPr>
             <a:r>
-              <a:t>Action Xử Lý Giao Dịch Thiếu Kiểm Soát</a:t>
+              <a:t>Kịch Bản: Trang Web Giả Mạo Điều Khiển Yêu Cầu Chuyển Tiền</a:t>
             </a:r>
           </a:p>
           <a:p>
@@ -5081,75 +5096,71 @@
               <a:spcBef>
                 <a:spcPts val="800"/>
               </a:spcBef>
-              <a:defRPr sz="1000" b="0">
-                <a:solidFill>
-                  <a:srgbClr val="9F1239"/>
-                </a:solidFill>
-                <a:latin typeface="Courier New"/>
-              </a:defRPr>
-            </a:pPr>
-            <a:r>
-              <a:t>// ACTION NHẬN YÊU CẦU KHÔNG CÓ BẢO VỆ TOKEN:</a:t>
+              <a:defRPr sz="1300" b="0">
+                <a:solidFill>
+                  <a:srgbClr val="334155"/>
+                </a:solidFill>
+                <a:latin typeface="Arial"/>
+              </a:defRPr>
+            </a:pPr>
+            <a:r>
+              <a:t>1. Nạn nhân có phiên làm việc đang hoạt động trên hệ thống tư vấn trực tuyến.</a:t>
             </a:r>
             <a:br/>
             <a:r>
-              <a:t>[HttpPost]</a:t>
+              <a:t>2. Nạn nhân được dẫn dụ truy cập một trang web độc hại ở một tab khác (AttackerSite.cshtml).</a:t>
             </a:r>
             <a:br/>
             <a:r>
-              <a:t>public IActionResult TransferVulnerable(decimal amount)</a:t>
-            </a:r>
-            <a:br/>
-            <a:r>
-              <a:t>{</a:t>
-            </a:r>
-            <a:br/>
-            <a:r>
-              <a:t>    var victim = _context.Wallets.Find(1);</a:t>
-            </a:r>
-            <a:br/>
-            <a:r>
-              <a:t>    var hacker = _context.Wallets.Find(2);</a:t>
-            </a:r>
-            <a:br/>
-            <a:r>
-              <a:t>    </a:t>
-            </a:r>
-            <a:br/>
-            <a:r>
-              <a:t>    victim.Balance -= amount;</a:t>
-            </a:r>
-            <a:br/>
-            <a:r>
-              <a:t>    hacker.Balance += amount;</a:t>
-            </a:r>
-            <a:br/>
-            <a:r>
-              <a:t>    _context.SaveChanges();</a:t>
-            </a:r>
-            <a:br/>
-            <a:r>
-              <a:t>    return RedirectToAction("Index");</a:t>
-            </a:r>
-            <a:br/>
-            <a:r>
-              <a:t>}</a:t>
+              <a:t>3. Trang web độc hại chứa một biểu mẫu ẩn trỏ trực tiếp tới địa chỉ nhận lệnh của ứng dụng mục tiêu:</a:t>
             </a:r>
           </a:p>
           <a:p>
             <a:pPr>
               <a:spcBef>
-                <a:spcPts val="1000"/>
+                <a:spcPts val="600"/>
               </a:spcBef>
-              <a:defRPr sz="1200" b="1">
-                <a:solidFill>
-                  <a:srgbClr val="0F172A"/>
-                </a:solidFill>
-                <a:latin typeface="Arial"/>
-              </a:defRPr>
-            </a:pPr>
-            <a:r>
-              <a:t>Khi Action không yêu cầu mã xác thực chống giả mạo, các yêu cầu POST bắt nguồn từ một website khác vẫn được máy chủ thực thi bình thường do Cookie xác thực được đính kèm tự động.</a:t>
+              <a:defRPr sz="1100" b="1">
+                <a:solidFill>
+                  <a:srgbClr val="9F1239"/>
+                </a:solidFill>
+                <a:latin typeface="Courier New"/>
+              </a:defRPr>
+            </a:pPr>
+            <a:r>
+              <a:t>&lt;!-- BIỂU MẪU ẨN TRÊN TRANG WEB CỦA KẺ TẤN CÔNG --&gt;</a:t>
+            </a:r>
+            <a:br/>
+            <a:r>
+              <a:t>&lt;form id="exploit" action="http://localhost:5076/Csrf/TransferVulnerable" method="POST"&gt;</a:t>
+            </a:r>
+            <a:br/>
+            <a:r>
+              <a:t>    &lt;input type="hidden" name="amount" value="20000000" /&gt;</a:t>
+            </a:r>
+            <a:br/>
+            <a:r>
+              <a:t>&lt;/form&gt;</a:t>
+            </a:r>
+            <a:br/>
+            <a:r>
+              <a:t>&lt;script&gt;document.getElementById('exploit').submit();&lt;/script&gt;</a:t>
+            </a:r>
+          </a:p>
+          <a:p>
+            <a:pPr>
+              <a:spcBef>
+                <a:spcPts val="800"/>
+              </a:spcBef>
+              <a:defRPr sz="1300" b="1">
+                <a:solidFill>
+                  <a:srgbClr val="BE123C"/>
+                </a:solidFill>
+                <a:latin typeface="Arial"/>
+              </a:defRPr>
+            </a:pPr>
+            <a:r>
+              <a:t>Hậu quả thực tế: Giao dịch chuyển tiền được thực thi hoàn toàn tự động mà không có sự đồng thuận chủ động của người dùng, làm thay đổi số dư ví tài khoản.</a:t>
             </a:r>
           </a:p>
         </p:txBody>
@@ -5224,7 +5235,7 @@
         <p:spPr>
           <a:xfrm>
             <a:off x="731520" y="256032"/>
-            <a:ext cx="4572000" cy="329184"/>
+            <a:ext cx="4754880" cy="329184"/>
           </a:xfrm>
           <a:prstGeom prst="roundRect">
             <a:avLst/>
@@ -5301,7 +5312,7 @@
               </a:defRPr>
             </a:pPr>
             <a:r>
-              <a:t>3.2. CSRF Attack: Kịch Bản Khai Thác Bằng Biểu Mẫu Ẩn</a:t>
+              <a:t>3.3. CSRF Attack: Minh Chứng Thực Nghiệm Trực Quan Trên Web UI</a:t>
             </a:r>
           </a:p>
         </p:txBody>
@@ -5342,129 +5353,62 @@
           </a:p>
         </p:txBody>
       </p:sp>
-      <p:sp>
-        <p:nvSpPr>
-          <p:cNvPr id="6" name="Rounded Rectangle 5"/>
-          <p:cNvSpPr/>
+      <p:pic>
+        <p:nvPicPr>
+          <p:cNvPr id="6" name="Picture 5" descr="final_csrf_proof.png"/>
+          <p:cNvPicPr>
+            <a:picLocks noChangeAspect="1"/>
+          </p:cNvPicPr>
           <p:nvPr/>
-        </p:nvSpPr>
-        <p:spPr>
-          <a:xfrm>
-            <a:off x="731520" y="1234440"/>
-            <a:ext cx="10728655" cy="4937760"/>
-          </a:xfrm>
-          <a:prstGeom prst="roundRect">
-            <a:avLst/>
-          </a:prstGeom>
-          <a:solidFill>
-            <a:srgbClr val="FFF1F2"/>
-          </a:solidFill>
-          <a:ln>
-            <a:solidFill>
-              <a:srgbClr val="FECDD3"/>
-            </a:solidFill>
-          </a:ln>
-        </p:spPr>
-        <p:style>
-          <a:lnRef idx="1">
-            <a:schemeClr val="accent1"/>
-          </a:lnRef>
-          <a:fillRef idx="3">
-            <a:schemeClr val="accent1"/>
-          </a:fillRef>
-          <a:effectRef idx="2">
-            <a:schemeClr val="accent1"/>
-          </a:effectRef>
-          <a:fontRef idx="minor">
-            <a:schemeClr val="lt1"/>
-          </a:fontRef>
-        </p:style>
-        <p:txBody>
-          <a:bodyPr rtlCol="0" anchor="ctr"/>
+        </p:nvPicPr>
+        <p:blipFill>
+          <a:blip r:embed="rId2"/>
+          <a:stretch>
+            <a:fillRect/>
+          </a:stretch>
+        </p:blipFill>
+        <p:spPr>
+          <a:xfrm>
+            <a:off x="2523744" y="1234440"/>
+            <a:ext cx="7132320" cy="4585063"/>
+          </a:xfrm>
+          <a:prstGeom prst="rect">
+            <a:avLst/>
+          </a:prstGeom>
+        </p:spPr>
+      </p:pic>
+      <p:sp>
+        <p:nvSpPr>
+          <p:cNvPr id="7" name="TextBox 6"/>
+          <p:cNvSpPr txBox="1"/>
+          <p:nvPr/>
+        </p:nvSpPr>
+        <p:spPr>
+          <a:xfrm>
+            <a:off x="731520" y="5989320"/>
+            <a:ext cx="10728655" cy="365760"/>
+          </a:xfrm>
+          <a:prstGeom prst="rect">
+            <a:avLst/>
+          </a:prstGeom>
+          <a:noFill/>
+        </p:spPr>
+        <p:txBody>
+          <a:bodyPr wrap="none">
+            <a:spAutoFit/>
+          </a:bodyPr>
           <a:lstStyle/>
           <a:p>
             <a:pPr algn="ctr">
-              <a:defRPr sz="1600" b="1">
-                <a:solidFill>
-                  <a:srgbClr val="BE123C"/>
-                </a:solidFill>
-                <a:latin typeface="Arial"/>
-              </a:defRPr>
-            </a:pPr>
-            <a:r>
-              <a:t>Kịch Bản: Trang Web Giả Mạo Điều Khiển Yêu Cầu Chuyển Tiền</a:t>
-            </a:r>
-          </a:p>
-          <a:p>
-            <a:pPr>
-              <a:spcBef>
-                <a:spcPts val="800"/>
-              </a:spcBef>
-              <a:defRPr sz="1300" b="0">
-                <a:solidFill>
-                  <a:srgbClr val="334155"/>
-                </a:solidFill>
-                <a:latin typeface="Arial"/>
-              </a:defRPr>
-            </a:pPr>
-            <a:r>
-              <a:t>1. Nạn nhân có phiên làm việc đang hoạt động trên hệ thống tư vấn trực tuyến.</a:t>
-            </a:r>
-            <a:br/>
-            <a:r>
-              <a:t>2. Nạn nhân được dẫn dụ truy cập một trang web độc hại ở một tab khác (AttackerSite.cshtml).</a:t>
-            </a:r>
-            <a:br/>
-            <a:r>
-              <a:t>3. Trang web độc hại chứa một biểu mẫu ẩn trỏ trực tiếp tới địa chỉ nhận lệnh của ứng dụng mục tiêu:</a:t>
-            </a:r>
-          </a:p>
-          <a:p>
-            <a:pPr>
-              <a:spcBef>
-                <a:spcPts val="600"/>
-              </a:spcBef>
               <a:defRPr sz="1100" b="1">
                 <a:solidFill>
-                  <a:srgbClr val="9F1239"/>
-                </a:solidFill>
-                <a:latin typeface="Courier New"/>
-              </a:defRPr>
-            </a:pPr>
-            <a:r>
-              <a:t>&lt;!-- BIỂU MẪU ẨN TRÊN TRANG WEB CỦA KẺ TẤN CÔNG --&gt;</a:t>
-            </a:r>
-            <a:br/>
-            <a:r>
-              <a:t>&lt;form id="exploit" action="http://localhost:5076/Csrf/TransferVulnerable" method="POST"&gt;</a:t>
-            </a:r>
-            <a:br/>
-            <a:r>
-              <a:t>    &lt;input type="hidden" name="amount" value="20000000" /&gt;</a:t>
-            </a:r>
-            <a:br/>
-            <a:r>
-              <a:t>&lt;/form&gt;</a:t>
-            </a:r>
-            <a:br/>
-            <a:r>
-              <a:t>&lt;script&gt;document.getElementById('exploit').submit();&lt;/script&gt;</a:t>
-            </a:r>
-          </a:p>
-          <a:p>
-            <a:pPr>
-              <a:spcBef>
-                <a:spcPts val="800"/>
-              </a:spcBef>
-              <a:defRPr sz="1300" b="1">
-                <a:solidFill>
-                  <a:srgbClr val="BE123C"/>
-                </a:solidFill>
-                <a:latin typeface="Arial"/>
-              </a:defRPr>
-            </a:pPr>
-            <a:r>
-              <a:t>Hậu quả thực tế: Yêu cầu giao dịch được thực hiện mà không có sự đồng thuận chủ động của người dùng, dẫn đến thay đổi số dư hoặc cấu hình tài khoản.</a:t>
+                  <a:srgbClr val="047857"/>
+                </a:solidFill>
+                <a:latin typeface="Arial"/>
+              </a:defRPr>
+            </a:pPr>
+            <a:r>
+              <a:t>Minh chứng đối chứng: Mô phỏng giao dịch trái phép 20.000.000 VNĐ trong lab (Trái) vs Chặn đứng yêu cầu thiếu Token (Phải)</a:t>
             </a:r>
           </a:p>
         </p:txBody>
@@ -5539,7 +5483,7 @@
         <p:spPr>
           <a:xfrm>
             <a:off x="731520" y="256032"/>
-            <a:ext cx="4572000" cy="329184"/>
+            <a:ext cx="4754880" cy="329184"/>
           </a:xfrm>
           <a:prstGeom prst="roundRect">
             <a:avLst/>
@@ -5616,7 +5560,7 @@
               </a:defRPr>
             </a:pPr>
             <a:r>
-              <a:t>3.3. CSRF Attack: Minh Chứng Thực Nghiệm Trực Quan Trên Web UI</a:t>
+              <a:t>3.4. CSRF Attack: Minh Chứng Gói Tin Mạng (Chrome DevTools Headers)</a:t>
             </a:r>
           </a:p>
         </p:txBody>
@@ -5659,7 +5603,7 @@
       </p:sp>
       <p:pic>
         <p:nvPicPr>
-          <p:cNvPr id="6" name="Picture 5" descr="final_csrf_proof.png"/>
+          <p:cNvPr id="6" name="Picture 5" descr="03_csrf_devtools_proof.png"/>
           <p:cNvPicPr>
             <a:picLocks noChangeAspect="1"/>
           </p:cNvPicPr>
@@ -5673,8 +5617,8 @@
         </p:blipFill>
         <p:spPr>
           <a:xfrm>
-            <a:off x="2523744" y="1234440"/>
-            <a:ext cx="7132320" cy="4585063"/>
+            <a:off x="1883664" y="1234440"/>
+            <a:ext cx="8412480" cy="4732020"/>
           </a:xfrm>
           <a:prstGeom prst="rect">
             <a:avLst/>
@@ -5689,7 +5633,7 @@
         </p:nvSpPr>
         <p:spPr>
           <a:xfrm>
-            <a:off x="731520" y="6016752"/>
+            <a:off x="731520" y="5989320"/>
             <a:ext cx="10728655" cy="365760"/>
           </a:xfrm>
           <a:prstGeom prst="rect">
@@ -5712,7 +5656,7 @@
               </a:defRPr>
             </a:pPr>
             <a:r>
-              <a:t>Minh chứng đối chứng ví tiền: Bị trừ 20.000.000 VNĐ qua biểu mẫu ẩn của Hacker (Trái) vs Chặn đứng yêu cầu thiếu Token (Phải)</a:t>
+              <a:t>Soi gói tin HTTP POST gửi ngầm từ Attacker Site: Đính kèm Cookie tự động nhưng thiếu hoàn toàn Anti-Forgery Token</a:t>
             </a:r>
           </a:p>
         </p:txBody>
@@ -5787,7 +5731,7 @@
         <p:spPr>
           <a:xfrm>
             <a:off x="731520" y="256032"/>
-            <a:ext cx="4572000" cy="329184"/>
+            <a:ext cx="4754880" cy="329184"/>
           </a:xfrm>
           <a:prstGeom prst="roundRect">
             <a:avLst/>
@@ -5864,7 +5808,7 @@
               </a:defRPr>
             </a:pPr>
             <a:r>
-              <a:t>3.4. CSRF Attack: Minh Chứng Kiểm Thử Qua Chrome DevTools (Request Headers)</a:t>
+              <a:t>3.5. CSRF Attack: Cơ Chế Phòng Thủ Bằng Anti-Forgery Token</a:t>
             </a:r>
           </a:p>
         </p:txBody>
@@ -5905,62 +5849,274 @@
           </a:p>
         </p:txBody>
       </p:sp>
-      <p:pic>
-        <p:nvPicPr>
-          <p:cNvPr id="6" name="Picture 5" descr="03_csrf_devtools_proof.png"/>
-          <p:cNvPicPr>
-            <a:picLocks noChangeAspect="1"/>
-          </p:cNvPicPr>
+      <p:sp>
+        <p:nvSpPr>
+          <p:cNvPr id="6" name="Rounded Rectangle 5"/>
+          <p:cNvSpPr/>
           <p:nvPr/>
-        </p:nvPicPr>
-        <p:blipFill>
-          <a:blip r:embed="rId2"/>
-          <a:stretch>
-            <a:fillRect/>
-          </a:stretch>
-        </p:blipFill>
-        <p:spPr>
-          <a:xfrm>
-            <a:off x="1883664" y="1234440"/>
-            <a:ext cx="8412480" cy="4732020"/>
-          </a:xfrm>
-          <a:prstGeom prst="rect">
-            <a:avLst/>
-          </a:prstGeom>
-        </p:spPr>
-      </p:pic>
-      <p:sp>
-        <p:nvSpPr>
-          <p:cNvPr id="7" name="TextBox 6"/>
-          <p:cNvSpPr txBox="1"/>
+        </p:nvSpPr>
+        <p:spPr>
+          <a:xfrm>
+            <a:off x="731520" y="1280160"/>
+            <a:ext cx="5166360" cy="4937760"/>
+          </a:xfrm>
+          <a:prstGeom prst="roundRect">
+            <a:avLst/>
+          </a:prstGeom>
+          <a:solidFill>
+            <a:srgbClr val="ECFDF5"/>
+          </a:solidFill>
+          <a:ln>
+            <a:solidFill>
+              <a:srgbClr val="A7F3D0"/>
+            </a:solidFill>
+          </a:ln>
+        </p:spPr>
+        <p:style>
+          <a:lnRef idx="1">
+            <a:schemeClr val="accent1"/>
+          </a:lnRef>
+          <a:fillRef idx="3">
+            <a:schemeClr val="accent1"/>
+          </a:fillRef>
+          <a:effectRef idx="2">
+            <a:schemeClr val="accent1"/>
+          </a:effectRef>
+          <a:fontRef idx="minor">
+            <a:schemeClr val="lt1"/>
+          </a:fontRef>
+        </p:style>
+        <p:txBody>
+          <a:bodyPr rtlCol="0" anchor="ctr"/>
+          <a:lstStyle/>
+          <a:p>
+            <a:pPr algn="ctr">
+              <a:defRPr sz="1500" b="1">
+                <a:solidFill>
+                  <a:srgbClr val="047857"/>
+                </a:solidFill>
+                <a:latin typeface="Arial"/>
+              </a:defRPr>
+            </a:pPr>
+            <a:r>
+              <a:t>Mô Hình Synchronizer Token Pattern</a:t>
+            </a:r>
+          </a:p>
+          <a:p>
+            <a:pPr>
+              <a:spcBef>
+                <a:spcPts val="800"/>
+              </a:spcBef>
+              <a:defRPr sz="950" b="0">
+                <a:solidFill>
+                  <a:srgbClr val="065F46"/>
+                </a:solidFill>
+                <a:latin typeface="Courier New"/>
+              </a:defRPr>
+            </a:pPr>
+            <a:r>
+              <a:t>// 1. TRONG RAZOR VIEW: NHÚNG TOKEN VÀO FORM</a:t>
+            </a:r>
+            <a:br/>
+            <a:r>
+              <a:t>&lt;form asp-action="TransferSecure" method="post"&gt;</a:t>
+            </a:r>
+            <a:br/>
+            <a:r>
+              <a:t>    @Html.AntiForgeryToken()</a:t>
+            </a:r>
+            <a:br/>
+            <a:r>
+              <a:t>    &lt;input type="number" name="amount" /&gt;</a:t>
+            </a:r>
+            <a:br/>
+            <a:r>
+              <a:t>    &lt;button type="submit"&gt;Chuyển tiền&lt;/button&gt;</a:t>
+            </a:r>
+            <a:br/>
+            <a:r>
+              <a:t>&lt;/form&gt;</a:t>
+            </a:r>
+            <a:br/>
+            <a:br/>
+            <a:r>
+              <a:t>// 2. TRONG CONTROLLER: BẮT BUỘC KIỂM TRA TOKEN</a:t>
+            </a:r>
+            <a:br/>
+            <a:r>
+              <a:t>[HttpPost]</a:t>
+            </a:r>
+            <a:br/>
+            <a:r>
+              <a:t>[ValidateAntiForgeryToken]</a:t>
+            </a:r>
+            <a:br/>
+            <a:r>
+              <a:t>public IActionResult TransferSecure(decimal amount)</a:t>
+            </a:r>
+            <a:br/>
+            <a:r>
+              <a:t>{</a:t>
+            </a:r>
+            <a:br/>
+            <a:r>
+              <a:t>    // Chỉ thực thi khi Token từ Form khớp với Token trong Cookie</a:t>
+            </a:r>
+            <a:br/>
+            <a:r>
+              <a:t>}</a:t>
+            </a:r>
+          </a:p>
+          <a:p>
+            <a:pPr>
+              <a:spcBef>
+                <a:spcPts val="800"/>
+              </a:spcBef>
+              <a:defRPr sz="1150" b="0">
+                <a:solidFill>
+                  <a:srgbClr val="334155"/>
+                </a:solidFill>
+                <a:latin typeface="Arial"/>
+              </a:defRPr>
+            </a:pPr>
+            <a:r>
+              <a:t>Cơ chế bảo vệ:</a:t>
+            </a:r>
+            <a:br/>
+            <a:r>
+              <a:t>Máy chủ phát hành một cặp token: một lưu trong Cookie và một nhúng vào biểu mẫu. Trang web độc hại bị chặn đọc token bởi chính sách Same-Origin Policy (SOP).</a:t>
+            </a:r>
+          </a:p>
+        </p:txBody>
+      </p:sp>
+      <p:sp>
+        <p:nvSpPr>
+          <p:cNvPr id="7" name="Rounded Rectangle 6"/>
+          <p:cNvSpPr/>
           <p:nvPr/>
         </p:nvSpPr>
         <p:spPr>
           <a:xfrm>
-            <a:off x="731520" y="6053328"/>
-            <a:ext cx="10728655" cy="365760"/>
-          </a:xfrm>
-          <a:prstGeom prst="rect">
-            <a:avLst/>
-          </a:prstGeom>
-          <a:noFill/>
-        </p:spPr>
-        <p:txBody>
-          <a:bodyPr wrap="none">
-            <a:spAutoFit/>
-          </a:bodyPr>
+            <a:off x="6263640" y="1280160"/>
+            <a:ext cx="5166360" cy="4937760"/>
+          </a:xfrm>
+          <a:prstGeom prst="roundRect">
+            <a:avLst/>
+          </a:prstGeom>
+          <a:solidFill>
+            <a:srgbClr val="F8FAFC"/>
+          </a:solidFill>
+          <a:ln>
+            <a:solidFill>
+              <a:srgbClr val="E2E8F0"/>
+            </a:solidFill>
+          </a:ln>
+        </p:spPr>
+        <p:style>
+          <a:lnRef idx="1">
+            <a:schemeClr val="accent1"/>
+          </a:lnRef>
+          <a:fillRef idx="3">
+            <a:schemeClr val="accent1"/>
+          </a:fillRef>
+          <a:effectRef idx="2">
+            <a:schemeClr val="accent1"/>
+          </a:effectRef>
+          <a:fontRef idx="minor">
+            <a:schemeClr val="lt1"/>
+          </a:fontRef>
+        </p:style>
+        <p:txBody>
+          <a:bodyPr rtlCol="0" anchor="ctr"/>
           <a:lstStyle/>
           <a:p>
             <a:pPr algn="ctr">
-              <a:defRPr sz="1100" b="1">
-                <a:solidFill>
-                  <a:srgbClr val="047857"/>
-                </a:solidFill>
-                <a:latin typeface="Arial"/>
-              </a:defRPr>
-            </a:pPr>
-            <a:r>
-              <a:t>Soi gói tin HTTP POST gửi ngầm từ Attacker Site: Đính kèm Cookie tự động nhưng thiếu hoàn toàn Anti-Forgery Token</a:t>
+              <a:defRPr sz="1500" b="1">
+                <a:solidFill>
+                  <a:srgbClr val="1D4ED8"/>
+                </a:solidFill>
+                <a:latin typeface="Arial"/>
+              </a:defRPr>
+            </a:pPr>
+            <a:r>
+              <a:t>Tích Hợp Token Trong Fetch API (Slide Buổi 9)</a:t>
+            </a:r>
+          </a:p>
+          <a:p>
+            <a:pPr>
+              <a:spcBef>
+                <a:spcPts val="800"/>
+              </a:spcBef>
+              <a:defRPr sz="950" b="0">
+                <a:solidFill>
+                  <a:srgbClr val="0F172A"/>
+                </a:solidFill>
+                <a:latin typeface="Courier New"/>
+              </a:defRPr>
+            </a:pPr>
+            <a:r>
+              <a:t>// TRÍCH XUẤT VÀ GỬI TOKEN QUA HTTP HEADER:</a:t>
+            </a:r>
+            <a:br/>
+            <a:r>
+              <a:t>const token = document.querySelector('input[name="__RequestVerificationToken"]').value;</a:t>
+            </a:r>
+            <a:br/>
+            <a:br/>
+            <a:r>
+              <a:t>fetch('/Csrf/TransferAjax', {</a:t>
+            </a:r>
+            <a:br/>
+            <a:r>
+              <a:t>    method: 'POST',</a:t>
+            </a:r>
+            <a:br/>
+            <a:r>
+              <a:t>    headers: {</a:t>
+            </a:r>
+            <a:br/>
+            <a:r>
+              <a:t>        'Content-Type': 'application/json',</a:t>
+            </a:r>
+            <a:br/>
+            <a:r>
+              <a:t>        'RequestVerificationToken': token // HEADER BẢO VỆ</a:t>
+            </a:r>
+            <a:br/>
+            <a:r>
+              <a:t>    },</a:t>
+            </a:r>
+            <a:br/>
+            <a:r>
+              <a:t>    body: JSON.stringify({ amount: 5000000 })</a:t>
+            </a:r>
+            <a:br/>
+            <a:r>
+              <a:t>})</a:t>
+            </a:r>
+            <a:br/>
+            <a:r>
+              <a:t>.then(response =&gt; response.json());</a:t>
+            </a:r>
+          </a:p>
+          <a:p>
+            <a:pPr>
+              <a:spcBef>
+                <a:spcPts val="800"/>
+              </a:spcBef>
+              <a:defRPr sz="1150" b="0">
+                <a:solidFill>
+                  <a:srgbClr val="334155"/>
+                </a:solidFill>
+                <a:latin typeface="Arial"/>
+              </a:defRPr>
+            </a:pPr>
+            <a:r>
+              <a:t>Ứng dụng trong thực tế:</a:t>
+            </a:r>
+            <a:br/>
+            <a:r>
+              <a:t>Đối với các tác vụ gọi AJAX không tải lại trang, token được đọc từ thẻ ẩn và truyền qua HTTP Header để đảm bảo vừa tiện dụng vừa an toàn.</a:t>
             </a:r>
           </a:p>
         </p:txBody>
@@ -6035,7 +6191,7 @@
         <p:spPr>
           <a:xfrm>
             <a:off x="731520" y="256032"/>
-            <a:ext cx="4572000" cy="329184"/>
+            <a:ext cx="4754880" cy="329184"/>
           </a:xfrm>
           <a:prstGeom prst="roundRect">
             <a:avLst/>
@@ -6076,7 +6232,7 @@
               </a:defRPr>
             </a:pPr>
             <a:r>
-              <a:t>CHỦ ĐỀ 3 • NGUYỄN MINH CƯỜNG (23A1001D0058)</a:t>
+              <a:t>OWASP TOP 10 • THỰC NGHIỆM AN TOÀN WEB</a:t>
             </a:r>
           </a:p>
         </p:txBody>
@@ -6112,7 +6268,7 @@
               </a:defRPr>
             </a:pPr>
             <a:r>
-              <a:t>3.5. CSRF Attack: Minh Chứng Biến Động CSDL dbo.UserWallets</a:t>
+              <a:t>Tổng Kết: Bài Học Kỹ Thuật &amp; Bảng Đối Chiếu Phòng Thủ</a:t>
             </a:r>
           </a:p>
         </p:txBody>
@@ -6153,222 +6309,450 @@
           </a:p>
         </p:txBody>
       </p:sp>
-      <p:sp>
-        <p:nvSpPr>
-          <p:cNvPr id="6" name="Rounded Rectangle 5"/>
-          <p:cNvSpPr/>
+      <p:graphicFrame>
+        <p:nvGraphicFramePr>
+          <p:cNvPr id="6" name="Table 5"/>
+          <p:cNvGraphicFramePr>
+            <a:graphicFrameLocks noGrp="1"/>
+          </p:cNvGraphicFramePr>
           <p:nvPr/>
-        </p:nvSpPr>
-        <p:spPr>
-          <a:xfrm>
-            <a:off x="731520" y="1234440"/>
-            <a:ext cx="5166360" cy="4937760"/>
-          </a:xfrm>
-          <a:prstGeom prst="roundRect">
-            <a:avLst/>
-          </a:prstGeom>
-          <a:solidFill>
-            <a:srgbClr val="F8FAFC"/>
-          </a:solidFill>
-          <a:ln>
-            <a:solidFill>
-              <a:srgbClr val="E2E8F0"/>
-            </a:solidFill>
-          </a:ln>
-        </p:spPr>
-        <p:style>
-          <a:lnRef idx="1">
-            <a:schemeClr val="accent1"/>
-          </a:lnRef>
-          <a:fillRef idx="3">
-            <a:schemeClr val="accent1"/>
-          </a:fillRef>
-          <a:effectRef idx="2">
-            <a:schemeClr val="accent1"/>
-          </a:effectRef>
-          <a:fontRef idx="minor">
-            <a:schemeClr val="lt1"/>
-          </a:fontRef>
-        </p:style>
-        <p:txBody>
-          <a:bodyPr rtlCol="0" anchor="ctr"/>
-          <a:lstStyle/>
-          <a:p>
-            <a:pPr algn="ctr">
-              <a:defRPr sz="1400" b="1">
-                <a:solidFill>
-                  <a:srgbClr val="1D4ED8"/>
-                </a:solidFill>
-                <a:latin typeface="Arial"/>
-              </a:defRPr>
-            </a:pPr>
-            <a:r>
-              <a:t>1. Trạng Thái CSDL Ban Đầu</a:t>
-            </a:r>
-          </a:p>
-          <a:p>
-            <a:pPr>
-              <a:spcBef>
-                <a:spcPts val="600"/>
-              </a:spcBef>
-              <a:defRPr sz="950" b="0">
-                <a:solidFill>
-                  <a:srgbClr val="0F172A"/>
-                </a:solidFill>
-                <a:latin typeface="Courier New"/>
-              </a:defRPr>
-            </a:pPr>
-            <a:r>
-              <a:t>SELECT Id, OwnerName, Balance FROM dbo.UserWallets;</a:t>
-            </a:r>
-            <a:br/>
-            <a:br/>
-            <a:r>
-              <a:t>Id | OwnerName                      | Balance (VND)</a:t>
-            </a:r>
-            <a:br/>
-            <a:r>
-              <a:t>---+--------------------------------+---------------</a:t>
-            </a:r>
-            <a:br/>
-            <a:r>
-              <a:t> 1 | Nạn nhân (Nguyễn Danh Học)     | 50,000,000.00</a:t>
-            </a:r>
-            <a:br/>
-            <a:r>
-              <a:t> 2 | Kẻ tấn công (Hacker BlackHat)  |          0.00</a:t>
-            </a:r>
-            <a:br/>
-            <a:r>
-              <a:t>(2 rows affected)</a:t>
-            </a:r>
-          </a:p>
-          <a:p>
-            <a:pPr>
-              <a:spcBef>
-                <a:spcPts val="800"/>
-              </a:spcBef>
-              <a:defRPr sz="1150" b="0">
-                <a:solidFill>
-                  <a:srgbClr val="334155"/>
-                </a:solidFill>
-                <a:latin typeface="Arial"/>
-              </a:defRPr>
-            </a:pPr>
-            <a:r>
-              <a:t>Số dư ví tài khoản nạn nhân ở trạng thái ban đầu là 50 triệu VNĐ, tài khoản đối tượng tấn công là 0 VNĐ.</a:t>
-            </a:r>
-          </a:p>
-        </p:txBody>
-      </p:sp>
-      <p:sp>
-        <p:nvSpPr>
-          <p:cNvPr id="7" name="Rounded Rectangle 6"/>
-          <p:cNvSpPr/>
-          <p:nvPr/>
-        </p:nvSpPr>
-        <p:spPr>
-          <a:xfrm>
-            <a:off x="6263640" y="1234440"/>
-            <a:ext cx="5166360" cy="4937760"/>
-          </a:xfrm>
-          <a:prstGeom prst="roundRect">
-            <a:avLst/>
-          </a:prstGeom>
-          <a:solidFill>
-            <a:srgbClr val="FFF1F2"/>
-          </a:solidFill>
-          <a:ln>
-            <a:solidFill>
-              <a:srgbClr val="FECDD3"/>
-            </a:solidFill>
-          </a:ln>
-        </p:spPr>
-        <p:style>
-          <a:lnRef idx="1">
-            <a:schemeClr val="accent1"/>
-          </a:lnRef>
-          <a:fillRef idx="3">
-            <a:schemeClr val="accent1"/>
-          </a:fillRef>
-          <a:effectRef idx="2">
-            <a:schemeClr val="accent1"/>
-          </a:effectRef>
-          <a:fontRef idx="minor">
-            <a:schemeClr val="lt1"/>
-          </a:fontRef>
-        </p:style>
-        <p:txBody>
-          <a:bodyPr rtlCol="0" anchor="ctr"/>
-          <a:lstStyle/>
-          <a:p>
-            <a:pPr algn="ctr">
-              <a:defRPr sz="1400" b="1">
-                <a:solidFill>
-                  <a:srgbClr val="BE123C"/>
-                </a:solidFill>
-                <a:latin typeface="Arial"/>
-              </a:defRPr>
-            </a:pPr>
-            <a:r>
-              <a:t>2. Trạng Thái CSDL Sau Khai Thác CSRF</a:t>
-            </a:r>
-          </a:p>
-          <a:p>
-            <a:pPr>
-              <a:spcBef>
-                <a:spcPts val="600"/>
-              </a:spcBef>
-              <a:defRPr sz="950" b="0">
-                <a:solidFill>
-                  <a:srgbClr val="9F1239"/>
-                </a:solidFill>
-                <a:latin typeface="Courier New"/>
-              </a:defRPr>
-            </a:pPr>
-            <a:r>
-              <a:t>SELECT Id, OwnerName, Balance FROM dbo.UserWallets;</a:t>
-            </a:r>
-            <a:br/>
-            <a:br/>
-            <a:r>
-              <a:t>Id | OwnerName                      | Balance (VND)</a:t>
-            </a:r>
-            <a:br/>
-            <a:r>
-              <a:t>---+--------------------------------+---------------</a:t>
-            </a:r>
-            <a:br/>
-            <a:r>
-              <a:t> 1 | Nạn nhân (Nguyễn Danh Học)     | 30,000,000.00</a:t>
-            </a:r>
-            <a:br/>
-            <a:r>
-              <a:t> 2 | Kẻ tấn công (Hacker BlackHat)  | 20,000,000.00</a:t>
-            </a:r>
-            <a:br/>
-            <a:r>
-              <a:t>(2 rows affected)</a:t>
-            </a:r>
-          </a:p>
-          <a:p>
-            <a:pPr>
-              <a:spcBef>
-                <a:spcPts val="800"/>
-              </a:spcBef>
-              <a:defRPr sz="1150" b="0">
-                <a:solidFill>
-                  <a:srgbClr val="334155"/>
-                </a:solidFill>
-                <a:latin typeface="Arial"/>
-              </a:defRPr>
-            </a:pPr>
-            <a:r>
-              <a:t>Số dư thực tế trong CSDL bị thay đổi hoàn toàn tự động khi nạn nhân truy cập liên kết độc hại, chứng minh mức độ rủi ro nghiêm trọng của giao dịch thiếu token.</a:t>
-            </a:r>
-          </a:p>
-        </p:txBody>
-      </p:sp>
+        </p:nvGraphicFramePr>
+        <p:xfrm>
+          <a:off x="731520" y="1371600"/>
+          <a:ext cx="10728655" cy="4754880"/>
+        </p:xfrm>
+        <a:graphic>
+          <a:graphicData uri="http://schemas.openxmlformats.org/drawingml/2006/table">
+            <a:tbl>
+              <a:tblPr firstRow="1" bandRow="1">
+                <a:tableStyleId>{5C22544A-7EE6-4342-B048-85BDC9FD1C3A}</a:tableStyleId>
+              </a:tblPr>
+              <a:tblGrid>
+                <a:gridCol w="2682163"/>
+                <a:gridCol w="2682163"/>
+                <a:gridCol w="2682163"/>
+                <a:gridCol w="2682166"/>
+              </a:tblGrid>
+              <a:tr h="1188720">
+                <a:tc>
+                  <a:txBody>
+                    <a:bodyPr/>
+                    <a:lstStyle/>
+                    <a:p>
+                      <a:pPr>
+                        <a:defRPr b="1" sz="1200">
+                          <a:solidFill>
+                            <a:srgbClr val="FFFFFF"/>
+                          </a:solidFill>
+                          <a:latin typeface="Arial"/>
+                        </a:defRPr>
+                      </a:pPr>
+                      <a:r>
+                        <a:t>Lỗ hổng an ninh</a:t>
+                      </a:r>
+                    </a:p>
+                  </a:txBody>
+                  <a:tcPr>
+                    <a:solidFill>
+                      <a:srgbClr val="1D4ED8"/>
+                    </a:solidFill>
+                  </a:tcPr>
+                </a:tc>
+                <a:tc>
+                  <a:txBody>
+                    <a:bodyPr/>
+                    <a:lstStyle/>
+                    <a:p>
+                      <a:pPr>
+                        <a:defRPr b="1" sz="1200">
+                          <a:solidFill>
+                            <a:srgbClr val="FFFFFF"/>
+                          </a:solidFill>
+                          <a:latin typeface="Arial"/>
+                        </a:defRPr>
+                      </a:pPr>
+                      <a:r>
+                        <a:t>Nguyên nhân cốt lõi</a:t>
+                      </a:r>
+                    </a:p>
+                  </a:txBody>
+                  <a:tcPr>
+                    <a:solidFill>
+                      <a:srgbClr val="1D4ED8"/>
+                    </a:solidFill>
+                  </a:tcPr>
+                </a:tc>
+                <a:tc>
+                  <a:txBody>
+                    <a:bodyPr/>
+                    <a:lstStyle/>
+                    <a:p>
+                      <a:pPr>
+                        <a:defRPr b="1" sz="1200">
+                          <a:solidFill>
+                            <a:srgbClr val="FFFFFF"/>
+                          </a:solidFill>
+                          <a:latin typeface="Arial"/>
+                        </a:defRPr>
+                      </a:pPr>
+                      <a:r>
+                        <a:t>Cơ chế phòng thủ chuẩn</a:t>
+                      </a:r>
+                    </a:p>
+                  </a:txBody>
+                  <a:tcPr>
+                    <a:solidFill>
+                      <a:srgbClr val="1D4ED8"/>
+                    </a:solidFill>
+                  </a:tcPr>
+                </a:tc>
+                <a:tc>
+                  <a:txBody>
+                    <a:bodyPr/>
+                    <a:lstStyle/>
+                    <a:p>
+                      <a:pPr>
+                        <a:defRPr b="1" sz="1200">
+                          <a:solidFill>
+                            <a:srgbClr val="FFFFFF"/>
+                          </a:solidFill>
+                          <a:latin typeface="Arial"/>
+                        </a:defRPr>
+                      </a:pPr>
+                      <a:r>
+                        <a:t>Thành viên phụ trách</a:t>
+                      </a:r>
+                    </a:p>
+                  </a:txBody>
+                  <a:tcPr>
+                    <a:solidFill>
+                      <a:srgbClr val="1D4ED8"/>
+                    </a:solidFill>
+                  </a:tcPr>
+                </a:tc>
+              </a:tr>
+              <a:tr h="1188720">
+                <a:tc>
+                  <a:txBody>
+                    <a:bodyPr/>
+                    <a:lstStyle/>
+                    <a:p>
+                      <a:pPr>
+                        <a:defRPr sz="1100" b="1">
+                          <a:solidFill>
+                            <a:srgbClr val="0F172A"/>
+                          </a:solidFill>
+                          <a:latin typeface="Arial"/>
+                        </a:defRPr>
+                      </a:pPr>
+                      <a:r>
+                        <a:t>SQL Injection</a:t>
+                      </a:r>
+                      <a:br/>
+                      <a:r>
+                        <a:t>(A03:2021)</a:t>
+                      </a:r>
+                    </a:p>
+                  </a:txBody>
+                  <a:tcPr>
+                    <a:solidFill>
+                      <a:srgbClr val="F8FAFC"/>
+                    </a:solidFill>
+                  </a:tcPr>
+                </a:tc>
+                <a:tc>
+                  <a:txBody>
+                    <a:bodyPr/>
+                    <a:lstStyle/>
+                    <a:p>
+                      <a:pPr>
+                        <a:defRPr sz="1100">
+                          <a:solidFill>
+                            <a:srgbClr val="334155"/>
+                          </a:solidFill>
+                          <a:latin typeface="Arial"/>
+                        </a:defRPr>
+                      </a:pPr>
+                      <a:r>
+                        <a:t>Ghép chuỗi đầu vào trực tiếp vào câu lệnh SQL.</a:t>
+                      </a:r>
+                    </a:p>
+                  </a:txBody>
+                  <a:tcPr>
+                    <a:solidFill>
+                      <a:srgbClr val="F8FAFC"/>
+                    </a:solidFill>
+                  </a:tcPr>
+                </a:tc>
+                <a:tc>
+                  <a:txBody>
+                    <a:bodyPr/>
+                    <a:lstStyle/>
+                    <a:p>
+                      <a:pPr>
+                        <a:defRPr sz="1100" b="1">
+                          <a:solidFill>
+                            <a:srgbClr val="047857"/>
+                          </a:solidFill>
+                          <a:latin typeface="Arial"/>
+                        </a:defRPr>
+                      </a:pPr>
+                      <a:r>
+                        <a:t>Parameterized Query (EF Core LINQ) + Nguyên tắc đặc quyền tối thiểu.</a:t>
+                      </a:r>
+                    </a:p>
+                  </a:txBody>
+                  <a:tcPr>
+                    <a:solidFill>
+                      <a:srgbClr val="F8FAFC"/>
+                    </a:solidFill>
+                  </a:tcPr>
+                </a:tc>
+                <a:tc>
+                  <a:txBody>
+                    <a:bodyPr/>
+                    <a:lstStyle/>
+                    <a:p>
+                      <a:pPr>
+                        <a:defRPr sz="1100">
+                          <a:solidFill>
+                            <a:srgbClr val="0F172A"/>
+                          </a:solidFill>
+                          <a:latin typeface="Arial"/>
+                        </a:defRPr>
+                      </a:pPr>
+                      <a:r>
+                        <a:t>Nguyễn Danh Học</a:t>
+                      </a:r>
+                      <a:br/>
+                      <a:r>
+                        <a:t>(23A1001D0158)</a:t>
+                      </a:r>
+                    </a:p>
+                  </a:txBody>
+                  <a:tcPr>
+                    <a:solidFill>
+                      <a:srgbClr val="F8FAFC"/>
+                    </a:solidFill>
+                  </a:tcPr>
+                </a:tc>
+              </a:tr>
+              <a:tr h="1188720">
+                <a:tc>
+                  <a:txBody>
+                    <a:bodyPr/>
+                    <a:lstStyle/>
+                    <a:p>
+                      <a:pPr>
+                        <a:defRPr sz="1100" b="1">
+                          <a:solidFill>
+                            <a:srgbClr val="0F172A"/>
+                          </a:solidFill>
+                          <a:latin typeface="Arial"/>
+                        </a:defRPr>
+                      </a:pPr>
+                      <a:r>
+                        <a:t>Stored XSS</a:t>
+                      </a:r>
+                      <a:br/>
+                      <a:r>
+                        <a:t>(A03:2021)</a:t>
+                      </a:r>
+                    </a:p>
+                  </a:txBody>
+                  <a:tcPr>
+                    <a:solidFill>
+                      <a:srgbClr val="FFFFFF"/>
+                    </a:solidFill>
+                  </a:tcPr>
+                </a:tc>
+                <a:tc>
+                  <a:txBody>
+                    <a:bodyPr/>
+                    <a:lstStyle/>
+                    <a:p>
+                      <a:pPr>
+                        <a:defRPr sz="1100">
+                          <a:solidFill>
+                            <a:srgbClr val="334155"/>
+                          </a:solidFill>
+                          <a:latin typeface="Arial"/>
+                        </a:defRPr>
+                      </a:pPr>
+                      <a:r>
+                        <a:t>Lưu trữ script độc hại vào CSDL &amp; render thô bằng @Html.Raw().</a:t>
+                      </a:r>
+                    </a:p>
+                  </a:txBody>
+                  <a:tcPr>
+                    <a:solidFill>
+                      <a:srgbClr val="FFFFFF"/>
+                    </a:solidFill>
+                  </a:tcPr>
+                </a:tc>
+                <a:tc>
+                  <a:txBody>
+                    <a:bodyPr/>
+                    <a:lstStyle/>
+                    <a:p>
+                      <a:pPr>
+                        <a:defRPr sz="1100" b="1">
+                          <a:solidFill>
+                            <a:srgbClr val="047857"/>
+                          </a:solidFill>
+                          <a:latin typeface="Arial"/>
+                        </a:defRPr>
+                      </a:pPr>
+                      <a:r>
+                        <a:t>Context-Aware HTML Encoding (@model.Property) + HttpOnly Cookie.</a:t>
+                      </a:r>
+                    </a:p>
+                  </a:txBody>
+                  <a:tcPr>
+                    <a:solidFill>
+                      <a:srgbClr val="FFFFFF"/>
+                    </a:solidFill>
+                  </a:tcPr>
+                </a:tc>
+                <a:tc>
+                  <a:txBody>
+                    <a:bodyPr/>
+                    <a:lstStyle/>
+                    <a:p>
+                      <a:pPr>
+                        <a:defRPr sz="1100">
+                          <a:solidFill>
+                            <a:srgbClr val="0F172A"/>
+                          </a:solidFill>
+                          <a:latin typeface="Arial"/>
+                        </a:defRPr>
+                      </a:pPr>
+                      <a:r>
+                        <a:t>Nguyễn Thanh Bình</a:t>
+                      </a:r>
+                      <a:br/>
+                      <a:r>
+                        <a:t>(23A1001D0041)</a:t>
+                      </a:r>
+                    </a:p>
+                  </a:txBody>
+                  <a:tcPr>
+                    <a:solidFill>
+                      <a:srgbClr val="FFFFFF"/>
+                    </a:solidFill>
+                  </a:tcPr>
+                </a:tc>
+              </a:tr>
+              <a:tr h="1188720">
+                <a:tc>
+                  <a:txBody>
+                    <a:bodyPr/>
+                    <a:lstStyle/>
+                    <a:p>
+                      <a:pPr>
+                        <a:defRPr sz="1100" b="1">
+                          <a:solidFill>
+                            <a:srgbClr val="0F172A"/>
+                          </a:solidFill>
+                          <a:latin typeface="Arial"/>
+                        </a:defRPr>
+                      </a:pPr>
+                      <a:r>
+                        <a:t>CSRF Attack</a:t>
+                      </a:r>
+                      <a:br/>
+                      <a:r>
+                        <a:t>(A01:2021 / Session)</a:t>
+                      </a:r>
+                    </a:p>
+                  </a:txBody>
+                  <a:tcPr>
+                    <a:solidFill>
+                      <a:srgbClr val="F8FAFC"/>
+                    </a:solidFill>
+                  </a:tcPr>
+                </a:tc>
+                <a:tc>
+                  <a:txBody>
+                    <a:bodyPr/>
+                    <a:lstStyle/>
+                    <a:p>
+                      <a:pPr>
+                        <a:defRPr sz="1100">
+                          <a:solidFill>
+                            <a:srgbClr val="334155"/>
+                          </a:solidFill>
+                          <a:latin typeface="Arial"/>
+                        </a:defRPr>
+                      </a:pPr>
+                      <a:r>
+                        <a:t>Máy chủ chỉ kiểm tra Cookie mà không xác thực nguồn gốc Request.</a:t>
+                      </a:r>
+                    </a:p>
+                  </a:txBody>
+                  <a:tcPr>
+                    <a:solidFill>
+                      <a:srgbClr val="F8FAFC"/>
+                    </a:solidFill>
+                  </a:tcPr>
+                </a:tc>
+                <a:tc>
+                  <a:txBody>
+                    <a:bodyPr/>
+                    <a:lstStyle/>
+                    <a:p>
+                      <a:pPr>
+                        <a:defRPr sz="1100" b="1">
+                          <a:solidFill>
+                            <a:srgbClr val="047857"/>
+                          </a:solidFill>
+                          <a:latin typeface="Arial"/>
+                        </a:defRPr>
+                      </a:pPr>
+                      <a:r>
+                        <a:t>Synchronizer Token Pattern (@Html.AntiForgeryToken() / Header).</a:t>
+                      </a:r>
+                    </a:p>
+                  </a:txBody>
+                  <a:tcPr>
+                    <a:solidFill>
+                      <a:srgbClr val="F8FAFC"/>
+                    </a:solidFill>
+                  </a:tcPr>
+                </a:tc>
+                <a:tc>
+                  <a:txBody>
+                    <a:bodyPr/>
+                    <a:lstStyle/>
+                    <a:p>
+                      <a:pPr>
+                        <a:defRPr sz="1100">
+                          <a:solidFill>
+                            <a:srgbClr val="0F172A"/>
+                          </a:solidFill>
+                          <a:latin typeface="Arial"/>
+                        </a:defRPr>
+                      </a:pPr>
+                      <a:r>
+                        <a:t>Nguyễn Minh Cường</a:t>
+                      </a:r>
+                      <a:br/>
+                      <a:r>
+                        <a:t>(23A1001D0058)</a:t>
+                      </a:r>
+                    </a:p>
+                  </a:txBody>
+                  <a:tcPr>
+                    <a:solidFill>
+                      <a:srgbClr val="F8FAFC"/>
+                    </a:solidFill>
+                  </a:tcPr>
+                </a:tc>
+              </a:tr>
+            </a:tbl>
+          </a:graphicData>
+        </a:graphic>
+      </p:graphicFrame>
     </p:spTree>
   </p:cSld>
   <p:clrMapOvr>
@@ -6439,7 +6823,7 @@
         <p:spPr>
           <a:xfrm>
             <a:off x="731520" y="256032"/>
-            <a:ext cx="4572000" cy="329184"/>
+            <a:ext cx="4754880" cy="329184"/>
           </a:xfrm>
           <a:prstGeom prst="roundRect">
             <a:avLst/>
@@ -6480,7 +6864,7 @@
               </a:defRPr>
             </a:pPr>
             <a:r>
-              <a:t>CHỦ ĐỀ 3 • NGUYỄN MINH CƯỜNG (23A1001D0058)</a:t>
+              <a:t>OWASP TOP 10 • THỰC NGHIỆM AN TOÀN WEB</a:t>
             </a:r>
           </a:p>
         </p:txBody>
@@ -6516,7 +6900,7 @@
               </a:defRPr>
             </a:pPr>
             <a:r>
-              <a:t>3.6. CSRF Attack: Cơ Chế Synchronizer Token &amp; Fetch API</a:t>
+              <a:t>Kết Luận Báo Cáo Thực Nghiệm OWASP Top 10</a:t>
             </a:r>
           </a:p>
         </p:txBody>
@@ -6565,148 +6949,8 @@
         </p:nvSpPr>
         <p:spPr>
           <a:xfrm>
-            <a:off x="731520" y="1234440"/>
-            <a:ext cx="5166360" cy="4937760"/>
-          </a:xfrm>
-          <a:prstGeom prst="roundRect">
-            <a:avLst/>
-          </a:prstGeom>
-          <a:solidFill>
-            <a:srgbClr val="ECFDF5"/>
-          </a:solidFill>
-          <a:ln>
-            <a:solidFill>
-              <a:srgbClr val="A7F3D0"/>
-            </a:solidFill>
-          </a:ln>
-        </p:spPr>
-        <p:style>
-          <a:lnRef idx="1">
-            <a:schemeClr val="accent1"/>
-          </a:lnRef>
-          <a:fillRef idx="3">
-            <a:schemeClr val="accent1"/>
-          </a:fillRef>
-          <a:effectRef idx="2">
-            <a:schemeClr val="accent1"/>
-          </a:effectRef>
-          <a:fontRef idx="minor">
-            <a:schemeClr val="lt1"/>
-          </a:fontRef>
-        </p:style>
-        <p:txBody>
-          <a:bodyPr rtlCol="0" anchor="ctr"/>
-          <a:lstStyle/>
-          <a:p>
-            <a:pPr algn="ctr">
-              <a:defRPr sz="1500" b="1">
-                <a:solidFill>
-                  <a:srgbClr val="047857"/>
-                </a:solidFill>
-                <a:latin typeface="Arial"/>
-              </a:defRPr>
-            </a:pPr>
-            <a:r>
-              <a:t>Mô Hình Synchronizer Token Pattern</a:t>
-            </a:r>
-          </a:p>
-          <a:p>
-            <a:pPr>
-              <a:spcBef>
-                <a:spcPts val="800"/>
-              </a:spcBef>
-              <a:defRPr sz="950" b="0">
-                <a:solidFill>
-                  <a:srgbClr val="065F46"/>
-                </a:solidFill>
-                <a:latin typeface="Courier New"/>
-              </a:defRPr>
-            </a:pPr>
-            <a:r>
-              <a:t>// 1. TRONG RAZOR VIEW: NHÚNG TOKEN VÀO FORM</a:t>
-            </a:r>
-            <a:br/>
-            <a:r>
-              <a:t>&lt;form asp-action="TransferSecure" method="post"&gt;</a:t>
-            </a:r>
-            <a:br/>
-            <a:r>
-              <a:t>    @Html.AntiForgeryToken()</a:t>
-            </a:r>
-            <a:br/>
-            <a:r>
-              <a:t>    &lt;input type="number" name="amount" /&gt;</a:t>
-            </a:r>
-            <a:br/>
-            <a:r>
-              <a:t>    &lt;button type="submit"&gt;Chuyển tiền&lt;/button&gt;</a:t>
-            </a:r>
-            <a:br/>
-            <a:r>
-              <a:t>&lt;/form&gt;</a:t>
-            </a:r>
-            <a:br/>
-            <a:br/>
-            <a:r>
-              <a:t>// 2. TRONG CONTROLLER: BẮT BUỘC KIỂM TRA TOKEN</a:t>
-            </a:r>
-            <a:br/>
-            <a:r>
-              <a:t>[HttpPost]</a:t>
-            </a:r>
-            <a:br/>
-            <a:r>
-              <a:t>[ValidateAntiForgeryToken]</a:t>
-            </a:r>
-            <a:br/>
-            <a:r>
-              <a:t>public IActionResult TransferSecure(decimal amount)</a:t>
-            </a:r>
-            <a:br/>
-            <a:r>
-              <a:t>{</a:t>
-            </a:r>
-            <a:br/>
-            <a:r>
-              <a:t>    // Chỉ thực thi khi Token từ Form khớp với Token trong Cookie</a:t>
-            </a:r>
-            <a:br/>
-            <a:r>
-              <a:t>}</a:t>
-            </a:r>
-          </a:p>
-          <a:p>
-            <a:pPr>
-              <a:spcBef>
-                <a:spcPts val="800"/>
-              </a:spcBef>
-              <a:defRPr sz="1150" b="0">
-                <a:solidFill>
-                  <a:srgbClr val="334155"/>
-                </a:solidFill>
-                <a:latin typeface="Arial"/>
-              </a:defRPr>
-            </a:pPr>
-            <a:r>
-              <a:t>Cơ chế bảo vệ:</a:t>
-            </a:r>
-            <a:br/>
-            <a:r>
-              <a:t>Máy chủ phát hành một cặp token: một lưu trong Cookie và một nhúng vào biểu mẫu. Trang web độc hại bị chặn đọc token bởi chính sách Same-Origin Policy (SOP).</a:t>
-            </a:r>
-          </a:p>
-        </p:txBody>
-      </p:sp>
-      <p:sp>
-        <p:nvSpPr>
-          <p:cNvPr id="7" name="Rounded Rectangle 6"/>
-          <p:cNvSpPr/>
-          <p:nvPr/>
-        </p:nvSpPr>
-        <p:spPr>
-          <a:xfrm>
-            <a:off x="6263640" y="1234440"/>
-            <a:ext cx="5166360" cy="4937760"/>
+            <a:off x="914400" y="1371600"/>
+            <a:ext cx="10362895" cy="4572000"/>
           </a:xfrm>
           <a:prstGeom prst="roundRect">
             <a:avLst/>
@@ -6739,7 +6983,7 @@
           <a:lstStyle/>
           <a:p>
             <a:pPr algn="ctr">
-              <a:defRPr sz="1500" b="1">
+              <a:defRPr sz="1600" b="1">
                 <a:solidFill>
                   <a:srgbClr val="1D4ED8"/>
                 </a:solidFill>
@@ -6747,72 +6991,31 @@
               </a:defRPr>
             </a:pPr>
             <a:r>
-              <a:t>Tích Hợp Token Trong Fetch API (Slide Buổi 9)</a:t>
+              <a:t>KẾT LUẬN &amp; CAM KẾT CHUẨN BẢO MẬT (NHÓM WNC.G01)</a:t>
             </a:r>
           </a:p>
           <a:p>
             <a:pPr>
               <a:spcBef>
-                <a:spcPts val="800"/>
+                <a:spcPts val="1400"/>
               </a:spcBef>
-              <a:defRPr sz="950" b="0">
-                <a:solidFill>
-                  <a:srgbClr val="0F172A"/>
-                </a:solidFill>
-                <a:latin typeface="Courier New"/>
-              </a:defRPr>
-            </a:pPr>
-            <a:r>
-              <a:t>// TRÍCH XUẤT VÀ GỬI TOKEN QUA HTTP HEADER:</a:t>
-            </a:r>
-            <a:br/>
-            <a:r>
-              <a:t>const token = document.querySelector('input[name="__RequestVerificationToken"]').value;</a:t>
-            </a:r>
-            <a:br/>
-            <a:br/>
-            <a:r>
-              <a:t>fetch('/Csrf/TransferAjax', {</a:t>
-            </a:r>
-            <a:br/>
-            <a:r>
-              <a:t>    method: 'POST',</a:t>
-            </a:r>
-            <a:br/>
-            <a:r>
-              <a:t>    headers: {</a:t>
-            </a:r>
-            <a:br/>
-            <a:r>
-              <a:t>        'Content-Type': 'application/json',</a:t>
-            </a:r>
-            <a:br/>
-            <a:r>
-              <a:t>        'RequestVerificationToken': token // HEADER BẢO VỆ</a:t>
-            </a:r>
-            <a:br/>
-            <a:r>
-              <a:t>    },</a:t>
-            </a:r>
-            <a:br/>
-            <a:r>
-              <a:t>    body: JSON.stringify({ amount: 5000000 })</a:t>
-            </a:r>
-            <a:br/>
-            <a:r>
-              <a:t>})</a:t>
-            </a:r>
-            <a:br/>
-            <a:r>
-              <a:t>.then(response =&gt; response.json());</a:t>
+              <a:defRPr sz="1300" b="0">
+                <a:solidFill>
+                  <a:srgbClr val="334155"/>
+                </a:solidFill>
+                <a:latin typeface="Arial"/>
+              </a:defRPr>
+            </a:pPr>
+            <a:r>
+              <a:t>1. Thực nghiệm trực quan: Nhóm đã chứng minh rõ cơ chế khai thác và mức độ rủi ro của từng lỗ hổng trên cả 3 tầng: Giao diện Web, Gói tin mạng (Chrome DevTools) và Cơ sở dữ liệu (SQL Server 2025).</a:t>
             </a:r>
           </a:p>
           <a:p>
             <a:pPr>
               <a:spcBef>
-                <a:spcPts val="800"/>
+                <a:spcPts val="1200"/>
               </a:spcBef>
-              <a:defRPr sz="1150" b="0">
+              <a:defRPr sz="1300" b="0">
                 <a:solidFill>
                   <a:srgbClr val="334155"/>
                 </a:solidFill>
@@ -6820,11 +7023,40 @@
               </a:defRPr>
             </a:pPr>
             <a:r>
-              <a:t>Ứng dụng trong thực tế:</a:t>
-            </a:r>
+              <a:t>2. Phòng thủ đa tầng (Security View): Các cơ chế phòng thủ (EF Core Parameterized, Razor HTML Encoding, Anti-Forgery Token) được tích hợp trực tiếp vào kiến trúc nền tảng của Đồ án BTL Website Tư Vấn Trực Tuyến.</a:t>
+            </a:r>
+          </a:p>
+          <a:p>
+            <a:pPr>
+              <a:spcBef>
+                <a:spcPts val="1200"/>
+              </a:spcBef>
+              <a:defRPr sz="1300" b="0">
+                <a:solidFill>
+                  <a:srgbClr val="334155"/>
+                </a:solidFill>
+                <a:latin typeface="Arial"/>
+              </a:defRPr>
+            </a:pPr>
+            <a:r>
+              <a:t>3. Đóng góp đồng đều: Cả 3 thành viên đều trực tiếp xây dựng mã nguồn, kiểm thử đối chứng và phân tích chuyên môn độc lập.</a:t>
+            </a:r>
+          </a:p>
+          <a:p>
             <a:br/>
-            <a:r>
-              <a:t>Đối với các tác vụ gọi AJAX không tải lại trang, token được đọc từ thẻ ẩn và truyền qua HTTP Header để đảm bảo vừa tiện dụng vừa an toàn.</a:t>
+            <a:pPr>
+              <a:spcBef>
+                <a:spcPts val="2400"/>
+              </a:spcBef>
+              <a:defRPr sz="1500" b="1">
+                <a:solidFill>
+                  <a:srgbClr val="BE123C"/>
+                </a:solidFill>
+                <a:latin typeface="Arial"/>
+              </a:defRPr>
+            </a:pPr>
+            <a:r>
+              <a:t>Kính chúc thầy sức khỏe và công tác tốt. Nhóm WNC.G01 xin trân trọng cảm ơn!</a:t>
             </a:r>
           </a:p>
         </p:txBody>
@@ -6899,7 +7131,7 @@
         <p:spPr>
           <a:xfrm>
             <a:off x="731520" y="256032"/>
-            <a:ext cx="4572000" cy="329184"/>
+            <a:ext cx="4754880" cy="329184"/>
           </a:xfrm>
           <a:prstGeom prst="roundRect">
             <a:avLst/>
@@ -6940,7 +7172,7 @@
               </a:defRPr>
             </a:pPr>
             <a:r>
-              <a:t>CHỦ ĐỀ 1 • NGUYỄN DANH HỌC (23A1001D0158)</a:t>
+              <a:t>OWASP TOP 10 • THỰC NGHIỆM AN TOÀN WEB</a:t>
             </a:r>
           </a:p>
         </p:txBody>
@@ -6976,7 +7208,7 @@
               </a:defRPr>
             </a:pPr>
             <a:r>
-              <a:t>1.1. SQL Injection: Vị Trí Trong Kiến Trúc 3 Tầng &amp; Nguyên Nhân Gốc</a:t>
+              <a:t>Môi Trường Công Nghệ &amp; Phạm Vi Thực Nghiệm</a:t>
             </a:r>
           </a:p>
         </p:txBody>
@@ -7025,7 +7257,7 @@
         </p:nvSpPr>
         <p:spPr>
           <a:xfrm>
-            <a:off x="731520" y="1234440"/>
+            <a:off x="731520" y="1280160"/>
             <a:ext cx="5166360" cy="4937760"/>
           </a:xfrm>
           <a:prstGeom prst="roundRect">
@@ -7061,29 +7293,29 @@
             <a:pPr algn="ctr">
               <a:defRPr sz="1500" b="1">
                 <a:solidFill>
-                  <a:srgbClr val="BE123C"/>
-                </a:solidFill>
-                <a:latin typeface="Arial"/>
-              </a:defRPr>
-            </a:pPr>
-            <a:r>
-              <a:t>Vị Trí Xảy Ra Trong Kiến Trúc 3 Tầng</a:t>
+                  <a:srgbClr val="1D4ED8"/>
+                </a:solidFill>
+                <a:latin typeface="Arial"/>
+              </a:defRPr>
+            </a:pPr>
+            <a:r>
+              <a:t>Thông Số Cấu Hình Hệ Thống Thực Nghiệm</a:t>
             </a:r>
           </a:p>
           <a:p>
             <a:pPr>
               <a:spcBef>
-                <a:spcPts val="600"/>
+                <a:spcPts val="800"/>
               </a:spcBef>
-              <a:defRPr sz="1250" b="1">
-                <a:solidFill>
-                  <a:srgbClr val="0F172A"/>
-                </a:solidFill>
-                <a:latin typeface="Arial"/>
-              </a:defRPr>
-            </a:pPr>
-            <a:r>
-              <a:t>• Mô hình 3 tầng: Client (Browser) ➔ Web Server (ASP.NET Core) ➔ Database Server (SQL Server 2025).</a:t>
+              <a:defRPr sz="1200" b="0">
+                <a:solidFill>
+                  <a:srgbClr val="334155"/>
+                </a:solidFill>
+                <a:latin typeface="Arial"/>
+              </a:defRPr>
+            </a:pPr>
+            <a:r>
+              <a:t>• Hệ điều hành: Linux (Ubuntu 24.04 LTS / Zorin OS)</a:t>
             </a:r>
           </a:p>
           <a:p>
@@ -7099,7 +7331,7 @@
               </a:defRPr>
             </a:pPr>
             <a:r>
-              <a:t>• Luồng dữ liệu bình thường: Người dùng gửi dữ liệu xác thực (username/password) qua HTTP POST. Controller nhận tham số và chuyển cho SQL Server thực thi.</a:t>
+              <a:t>• Nền tảng Backend: ASP.NET Core MVC (.NET 10.0)</a:t>
             </a:r>
           </a:p>
           <a:p>
@@ -7115,7 +7347,7 @@
               </a:defRPr>
             </a:pPr>
             <a:r>
-              <a:t>• Nguyên nhân gốc rễ (Root Cause): Lập trình viên sử dụng kỹ thuật ghép chuỗi trực tiếp (String Concatenation) để tạo câu lệnh SQL từ dữ liệu người dùng mà không qua cơ chế tham số hóa.</a:t>
+              <a:t>• Cơ sở dữ liệu: Microsoft SQL Server 2025 Developer (Port 1433)</a:t>
             </a:r>
           </a:p>
           <a:p>
@@ -7131,7 +7363,39 @@
               </a:defRPr>
             </a:pPr>
             <a:r>
-              <a:t>• Hậu quả phân tích cú pháp: SQL Server biên dịch chuỗi truy vấn đã bị tiêm nhiễm, coi các ký tự điều khiển của hacker là một phần cấu trúc ngữ pháp của câu lệnh.</a:t>
+              <a:t>• Tầng giao diện: Razor View Engine, HTML5, CSS3, JavaScript</a:t>
+            </a:r>
+          </a:p>
+          <a:p>
+            <a:pPr>
+              <a:spcBef>
+                <a:spcPts val="600"/>
+              </a:spcBef>
+              <a:defRPr sz="1200" b="0">
+                <a:solidFill>
+                  <a:srgbClr val="334155"/>
+                </a:solidFill>
+                <a:latin typeface="Arial"/>
+              </a:defRPr>
+            </a:pPr>
+            <a:r>
+              <a:t>• Môi trường phát triển: Visual Studio Code, C# DevKit</a:t>
+            </a:r>
+          </a:p>
+          <a:p>
+            <a:pPr>
+              <a:spcBef>
+                <a:spcPts val="600"/>
+              </a:spcBef>
+              <a:defRPr sz="1200" b="0">
+                <a:solidFill>
+                  <a:srgbClr val="334155"/>
+                </a:solidFill>
+                <a:latin typeface="Arial"/>
+              </a:defRPr>
+            </a:pPr>
+            <a:r>
+              <a:t>• Công cụ kiểm thử: Chrome DevTools, cURL CLI, MSSQL Extension</a:t>
             </a:r>
           </a:p>
         </p:txBody>
@@ -7144,18 +7408,18 @@
         </p:nvSpPr>
         <p:spPr>
           <a:xfrm>
-            <a:off x="6263640" y="1234440"/>
+            <a:off x="6263640" y="1280160"/>
             <a:ext cx="5166360" cy="4937760"/>
           </a:xfrm>
           <a:prstGeom prst="roundRect">
             <a:avLst/>
           </a:prstGeom>
           <a:solidFill>
-            <a:srgbClr val="FFF1F2"/>
+            <a:srgbClr val="ECFDF5"/>
           </a:solidFill>
           <a:ln>
             <a:solidFill>
-              <a:srgbClr val="FECDD3"/>
+              <a:srgbClr val="A7F3D0"/>
             </a:solidFill>
           </a:ln>
         </p:spPr>
@@ -7180,13 +7444,13 @@
             <a:pPr algn="ctr">
               <a:defRPr sz="1500" b="1">
                 <a:solidFill>
-                  <a:srgbClr val="BE123C"/>
-                </a:solidFill>
-                <a:latin typeface="Arial"/>
-              </a:defRPr>
-            </a:pPr>
-            <a:r>
-              <a:t>Đoạn Mã Nguồn Gây Lỗi Cụ Thể (C# / ASP.NET Core)</a:t>
+                  <a:srgbClr val="047857"/>
+                </a:solidFill>
+                <a:latin typeface="Arial"/>
+              </a:defRPr>
+            </a:pPr>
+            <a:r>
+              <a:t>Phạm Vi &amp; Nguyên Tắc Đạo Đức An Ninh</a:t>
             </a:r>
           </a:p>
           <a:p>
@@ -7194,311 +7458,23 @@
               <a:spcBef>
                 <a:spcPts val="800"/>
               </a:spcBef>
-              <a:defRPr sz="1050" b="0">
-                <a:solidFill>
-                  <a:srgbClr val="9F1239"/>
-                </a:solidFill>
-                <a:latin typeface="Courier New"/>
-              </a:defRPr>
-            </a:pPr>
-            <a:r>
-              <a:t>// GHÉP CHUỖI TRỰC TIẾP TRONG CONTROLLER:</a:t>
-            </a:r>
-            <a:br/>
-            <a:r>
-              <a:t>string rawSql = $"SELECT * FROM Accounts " +</a:t>
-            </a:r>
-            <a:br/>
-            <a:r>
-              <a:t>                $"WHERE Username = '{username}' " +</a:t>
-            </a:r>
-            <a:br/>
-            <a:r>
-              <a:t>                $"AND Password = '{password}'";</a:t>
-            </a:r>
-            <a:br/>
-            <a:br/>
-            <a:r>
-              <a:t>var accounts = _context.Accounts</a:t>
-            </a:r>
-            <a:br/>
-            <a:r>
-              <a:t>                       .FromSqlRaw(rawSql)</a:t>
-            </a:r>
-            <a:br/>
-            <a:r>
-              <a:t>                       .ToList();</a:t>
+              <a:defRPr sz="1250" b="1">
+                <a:solidFill>
+                  <a:srgbClr val="0F172A"/>
+                </a:solidFill>
+                <a:latin typeface="Arial"/>
+              </a:defRPr>
+            </a:pPr>
+            <a:r>
+              <a:t>✓ Môi trường cô lập (Localhost):</a:t>
             </a:r>
           </a:p>
           <a:p>
             <a:pPr>
               <a:spcBef>
-                <a:spcPts val="1400"/>
+                <a:spcPts val="400"/>
               </a:spcBef>
-              <a:defRPr sz="1200" b="1">
-                <a:solidFill>
-                  <a:srgbClr val="0F172A"/>
-                </a:solidFill>
-                <a:latin typeface="Arial"/>
-              </a:defRPr>
-            </a:pPr>
-            <a:r>
-              <a:t>Điểm mù kỹ thuật:</a:t>
-            </a:r>
-            <a:br/>
-            <a:r>
-              <a:t>Lập trình viên giả định đầu vào '{username}' luôn là văn bản thông thường. Khi kẻ tấn công chèn ký tự nháy đơn ('), ranh giới giữa Dữ liệu (Data) và Cú pháp lệnh (Code) bị xóa nhòa hoàn toàn.</a:t>
-            </a:r>
-          </a:p>
-        </p:txBody>
-      </p:sp>
-    </p:spTree>
-  </p:cSld>
-  <p:clrMapOvr>
-    <a:masterClrMapping/>
-  </p:clrMapOvr>
-</p:sld>
-</file>
-
-<file path=ppt/slides/slide20.xml><?xml version="1.0" encoding="utf-8"?>
-<p:sld xmlns:a="http://schemas.openxmlformats.org/drawingml/2006/main" xmlns:p="http://schemas.openxmlformats.org/presentationml/2006/main" xmlns:r="http://schemas.openxmlformats.org/officeDocument/2006/relationships">
-  <p:cSld>
-    <p:spTree>
-      <p:nvGrpSpPr>
-        <p:cNvPr id="1" name=""/>
-        <p:cNvGrpSpPr/>
-        <p:nvPr/>
-      </p:nvGrpSpPr>
-      <p:grpSpPr/>
-      <p:sp>
-        <p:nvSpPr>
-          <p:cNvPr id="2" name="Rectangle 1"/>
-          <p:cNvSpPr/>
-          <p:nvPr/>
-        </p:nvSpPr>
-        <p:spPr>
-          <a:xfrm>
-            <a:off x="0" y="0"/>
-            <a:ext cx="12191695" cy="73152"/>
-          </a:xfrm>
-          <a:prstGeom prst="rect">
-            <a:avLst/>
-          </a:prstGeom>
-          <a:solidFill>
-            <a:srgbClr val="1D4ED8"/>
-          </a:solidFill>
-          <a:ln>
-            <a:noFill/>
-          </a:ln>
-        </p:spPr>
-        <p:style>
-          <a:lnRef idx="1">
-            <a:schemeClr val="accent1"/>
-          </a:lnRef>
-          <a:fillRef idx="3">
-            <a:schemeClr val="accent1"/>
-          </a:fillRef>
-          <a:effectRef idx="2">
-            <a:schemeClr val="accent1"/>
-          </a:effectRef>
-          <a:fontRef idx="minor">
-            <a:schemeClr val="lt1"/>
-          </a:fontRef>
-        </p:style>
-        <p:txBody>
-          <a:bodyPr rtlCol="0" anchor="ctr"/>
-          <a:lstStyle/>
-          <a:p>
-            <a:pPr algn="ctr"/>
-          </a:p>
-        </p:txBody>
-      </p:sp>
-      <p:sp>
-        <p:nvSpPr>
-          <p:cNvPr id="3" name="Rounded Rectangle 2"/>
-          <p:cNvSpPr/>
-          <p:nvPr/>
-        </p:nvSpPr>
-        <p:spPr>
-          <a:xfrm>
-            <a:off x="731520" y="256032"/>
-            <a:ext cx="4572000" cy="329184"/>
-          </a:xfrm>
-          <a:prstGeom prst="roundRect">
-            <a:avLst/>
-          </a:prstGeom>
-          <a:solidFill>
-            <a:srgbClr val="EFF6FF"/>
-          </a:solidFill>
-          <a:ln>
-            <a:solidFill>
-              <a:srgbClr val="BFDBFE"/>
-            </a:solidFill>
-          </a:ln>
-        </p:spPr>
-        <p:style>
-          <a:lnRef idx="1">
-            <a:schemeClr val="accent1"/>
-          </a:lnRef>
-          <a:fillRef idx="3">
-            <a:schemeClr val="accent1"/>
-          </a:fillRef>
-          <a:effectRef idx="2">
-            <a:schemeClr val="accent1"/>
-          </a:effectRef>
-          <a:fontRef idx="minor">
-            <a:schemeClr val="lt1"/>
-          </a:fontRef>
-        </p:style>
-        <p:txBody>
-          <a:bodyPr rtlCol="0" anchor="ctr" wrap="none"/>
-          <a:lstStyle/>
-          <a:p>
-            <a:pPr algn="ctr">
-              <a:defRPr sz="1000" b="1">
-                <a:solidFill>
-                  <a:srgbClr val="1D4ED8"/>
-                </a:solidFill>
-                <a:latin typeface="Arial"/>
-              </a:defRPr>
-            </a:pPr>
-            <a:r>
-              <a:t>OWASP TOP 10 • THỰC NGHIỆM AN TOÀN WEB</a:t>
-            </a:r>
-          </a:p>
-        </p:txBody>
-      </p:sp>
-      <p:sp>
-        <p:nvSpPr>
-          <p:cNvPr id="4" name="TextBox 3"/>
-          <p:cNvSpPr txBox="1"/>
-          <p:nvPr/>
-        </p:nvSpPr>
-        <p:spPr>
-          <a:xfrm>
-            <a:off x="731520" y="621792"/>
-            <a:ext cx="10698480" cy="548640"/>
-          </a:xfrm>
-          <a:prstGeom prst="rect">
-            <a:avLst/>
-          </a:prstGeom>
-          <a:noFill/>
-        </p:spPr>
-        <p:txBody>
-          <a:bodyPr wrap="square">
-            <a:spAutoFit/>
-          </a:bodyPr>
-          <a:lstStyle/>
-          <a:p>
-            <a:pPr>
-              <a:defRPr sz="2000" b="1">
-                <a:solidFill>
-                  <a:srgbClr val="0F172A"/>
-                </a:solidFill>
-                <a:latin typeface="Arial"/>
-              </a:defRPr>
-            </a:pPr>
-            <a:r>
-              <a:t>Kết Luận Báo Cáo Thực Nghiệm OWASP Top 10</a:t>
-            </a:r>
-          </a:p>
-        </p:txBody>
-      </p:sp>
-      <p:sp>
-        <p:nvSpPr>
-          <p:cNvPr id="5" name="TextBox 4"/>
-          <p:cNvSpPr txBox="1"/>
-          <p:nvPr/>
-        </p:nvSpPr>
-        <p:spPr>
-          <a:xfrm>
-            <a:off x="731520" y="6537960"/>
-            <a:ext cx="10698480" cy="256032"/>
-          </a:xfrm>
-          <a:prstGeom prst="rect">
-            <a:avLst/>
-          </a:prstGeom>
-          <a:noFill/>
-        </p:spPr>
-        <p:txBody>
-          <a:bodyPr wrap="none" lIns="0" rIns="0" tIns="0" bIns="0">
-            <a:spAutoFit/>
-          </a:bodyPr>
-          <a:lstStyle/>
-          <a:p>
-            <a:pPr>
-              <a:defRPr sz="950">
-                <a:solidFill>
-                  <a:srgbClr val="64748B"/>
-                </a:solidFill>
-                <a:latin typeface="Arial"/>
-              </a:defRPr>
-            </a:pPr>
-            <a:r>
-              <a:t>Nhóm WNC.G01 • Trường Đại học Mở Hà Nội (HOU) • Giảng viên: ThS. Lê Hữu Dũng</a:t>
-            </a:r>
-          </a:p>
-        </p:txBody>
-      </p:sp>
-      <p:sp>
-        <p:nvSpPr>
-          <p:cNvPr id="6" name="Rounded Rectangle 5"/>
-          <p:cNvSpPr/>
-          <p:nvPr/>
-        </p:nvSpPr>
-        <p:spPr>
-          <a:xfrm>
-            <a:off x="914400" y="1371600"/>
-            <a:ext cx="10362895" cy="4572000"/>
-          </a:xfrm>
-          <a:prstGeom prst="roundRect">
-            <a:avLst/>
-          </a:prstGeom>
-          <a:solidFill>
-            <a:srgbClr val="F8FAFC"/>
-          </a:solidFill>
-          <a:ln>
-            <a:solidFill>
-              <a:srgbClr val="E2E8F0"/>
-            </a:solidFill>
-          </a:ln>
-        </p:spPr>
-        <p:style>
-          <a:lnRef idx="1">
-            <a:schemeClr val="accent1"/>
-          </a:lnRef>
-          <a:fillRef idx="3">
-            <a:schemeClr val="accent1"/>
-          </a:fillRef>
-          <a:effectRef idx="2">
-            <a:schemeClr val="accent1"/>
-          </a:effectRef>
-          <a:fontRef idx="minor">
-            <a:schemeClr val="lt1"/>
-          </a:fontRef>
-        </p:style>
-        <p:txBody>
-          <a:bodyPr rtlCol="0" anchor="ctr"/>
-          <a:lstStyle/>
-          <a:p>
-            <a:pPr algn="ctr">
-              <a:defRPr sz="1600" b="1">
-                <a:solidFill>
-                  <a:srgbClr val="1D4ED8"/>
-                </a:solidFill>
-                <a:latin typeface="Arial"/>
-              </a:defRPr>
-            </a:pPr>
-            <a:r>
-              <a:t>TỔNG KẾT KẾT QUẢ THỰC NGHIỆM CỦA NHÓM WNC.G01</a:t>
-            </a:r>
-          </a:p>
-          <a:p>
-            <a:pPr>
-              <a:spcBef>
-                <a:spcPts val="1400"/>
-              </a:spcBef>
-              <a:defRPr sz="1300" b="0">
+              <a:defRPr sz="1200" b="0">
                 <a:solidFill>
                   <a:srgbClr val="334155"/>
                 </a:solidFill>
@@ -7506,7 +7482,7 @@
               </a:defRPr>
             </a:pPr>
             <a:r>
-              <a:t>1. Nguyễn Danh Học (SQL Injection): Phân tích cơ chế tấn công bẻ gãy cú pháp CSDL ở tầng Backend và giải pháp phòng thủ triệt để bằng Parameterized Query / EF Core LINQ.</a:t>
+              <a:t>Toàn bộ thực nghiệm được tiến hành trên ứng dụng mẫu do nhóm tự xây dựng (chạy trên localhost:5076), tuyệt đối không thực hiện trên các hệ thống bên ngoài.</a:t>
             </a:r>
           </a:p>
           <a:p>
@@ -7514,7 +7490,23 @@
               <a:spcBef>
                 <a:spcPts val="1200"/>
               </a:spcBef>
-              <a:defRPr sz="1300" b="0">
+              <a:defRPr sz="1250" b="1">
+                <a:solidFill>
+                  <a:srgbClr val="0F172A"/>
+                </a:solidFill>
+                <a:latin typeface="Arial"/>
+              </a:defRPr>
+            </a:pPr>
+            <a:r>
+              <a:t>✓ Thiết kế đối chứng song song (Vulnerable vs Secure):</a:t>
+            </a:r>
+          </a:p>
+          <a:p>
+            <a:pPr>
+              <a:spcBef>
+                <a:spcPts val="400"/>
+              </a:spcBef>
+              <a:defRPr sz="1200" b="0">
                 <a:solidFill>
                   <a:srgbClr val="334155"/>
                 </a:solidFill>
@@ -7522,7 +7514,7 @@
               </a:defRPr>
             </a:pPr>
             <a:r>
-              <a:t>2. Nguyễn Thanh Bình (Stored XSS): Phân tích nguy cơ đánh cắp Session Cookie qua dữ liệu lưu trữ CSDL và giải pháp tự động HTML Encoding của Razor View kết hợp cờ HttpOnly.</a:t>
+              <a:t>Mỗi lỗ hổng đều xây dựng 2 nhánh xử lý: Nhánh dính lỗi (để chứng minh sự nguy hiểm) và Nhánh an toàn (để kiểm chứng hiệu quả phòng thủ).</a:t>
             </a:r>
           </a:p>
           <a:p>
@@ -7530,31 +7522,31 @@
               <a:spcBef>
                 <a:spcPts val="1200"/>
               </a:spcBef>
-              <a:defRPr sz="1300" b="0">
-                <a:solidFill>
-                  <a:srgbClr val="334155"/>
-                </a:solidFill>
-                <a:latin typeface="Arial"/>
-              </a:defRPr>
-            </a:pPr>
-            <a:r>
-              <a:t>3. Nguyễn Minh Cường (CSRF Attack): Phân tích kỹ thuật mượn quyền người dùng qua biểu mẫu ẩn và giải pháp phòng thủ bằng Synchronizer Token Pattern trên cả Form lẫn Fetch API.</a:t>
+              <a:defRPr sz="1250" b="1">
+                <a:solidFill>
+                  <a:srgbClr val="0F172A"/>
+                </a:solidFill>
+                <a:latin typeface="Arial"/>
+              </a:defRPr>
+            </a:pPr>
+            <a:r>
+              <a:t>✓ Dữ liệu mô phỏng an toàn:</a:t>
             </a:r>
           </a:p>
           <a:p>
             <a:pPr>
               <a:spcBef>
-                <a:spcPts val="2400"/>
+                <a:spcPts val="400"/>
               </a:spcBef>
-              <a:defRPr sz="1500" b="1">
-                <a:solidFill>
-                  <a:srgbClr val="BE123C"/>
-                </a:solidFill>
-                <a:latin typeface="Arial"/>
-              </a:defRPr>
-            </a:pPr>
-            <a:r>
-              <a:t>Kính chúc thầy sức khỏe và công tác tốt. Nhóm WNC.G01 xin trân trọng cảm ơn!</a:t>
+              <a:defRPr sz="1200" b="0">
+                <a:solidFill>
+                  <a:srgbClr val="334155"/>
+                </a:solidFill>
+                <a:latin typeface="Arial"/>
+              </a:defRPr>
+            </a:pPr>
+            <a:r>
+              <a:t>Toàn bộ tài khoản, mật khẩu và số dư ví trong CSDL là dữ liệu mẫu giả định phục vụ mục đích học tập và nghiên cứu.</a:t>
             </a:r>
           </a:p>
         </p:txBody>
@@ -7629,7 +7621,7 @@
         <p:spPr>
           <a:xfrm>
             <a:off x="731520" y="256032"/>
-            <a:ext cx="4572000" cy="329184"/>
+            <a:ext cx="4754880" cy="329184"/>
           </a:xfrm>
           <a:prstGeom prst="roundRect">
             <a:avLst/>
@@ -7706,7 +7698,475 @@
               </a:defRPr>
             </a:pPr>
             <a:r>
-              <a:t>1.2. SQL Injection: 4 Kịch Bản Thực Nghiệm Trên Ứng Dụng</a:t>
+              <a:t>1.1. SQL Injection: Sơ Đồ Luồng &amp; Nguyên Nhân Cốt Lõi</a:t>
+            </a:r>
+          </a:p>
+        </p:txBody>
+      </p:sp>
+      <p:sp>
+        <p:nvSpPr>
+          <p:cNvPr id="5" name="TextBox 4"/>
+          <p:cNvSpPr txBox="1"/>
+          <p:nvPr/>
+        </p:nvSpPr>
+        <p:spPr>
+          <a:xfrm>
+            <a:off x="731520" y="6537960"/>
+            <a:ext cx="10698480" cy="256032"/>
+          </a:xfrm>
+          <a:prstGeom prst="rect">
+            <a:avLst/>
+          </a:prstGeom>
+          <a:noFill/>
+        </p:spPr>
+        <p:txBody>
+          <a:bodyPr wrap="none" lIns="0" rIns="0" tIns="0" bIns="0">
+            <a:spAutoFit/>
+          </a:bodyPr>
+          <a:lstStyle/>
+          <a:p>
+            <a:pPr>
+              <a:defRPr sz="950">
+                <a:solidFill>
+                  <a:srgbClr val="64748B"/>
+                </a:solidFill>
+                <a:latin typeface="Arial"/>
+              </a:defRPr>
+            </a:pPr>
+            <a:r>
+              <a:t>Nhóm WNC.G01 • Trường Đại học Mở Hà Nội (HOU) • Giảng viên: ThS. Lê Hữu Dũng</a:t>
+            </a:r>
+          </a:p>
+        </p:txBody>
+      </p:sp>
+      <p:sp>
+        <p:nvSpPr>
+          <p:cNvPr id="6" name="Rounded Rectangle 5"/>
+          <p:cNvSpPr/>
+          <p:nvPr/>
+        </p:nvSpPr>
+        <p:spPr>
+          <a:xfrm>
+            <a:off x="731520" y="1280160"/>
+            <a:ext cx="5166360" cy="4937760"/>
+          </a:xfrm>
+          <a:prstGeom prst="roundRect">
+            <a:avLst/>
+          </a:prstGeom>
+          <a:solidFill>
+            <a:srgbClr val="F8FAFC"/>
+          </a:solidFill>
+          <a:ln>
+            <a:solidFill>
+              <a:srgbClr val="E2E8F0"/>
+            </a:solidFill>
+          </a:ln>
+        </p:spPr>
+        <p:style>
+          <a:lnRef idx="1">
+            <a:schemeClr val="accent1"/>
+          </a:lnRef>
+          <a:fillRef idx="3">
+            <a:schemeClr val="accent1"/>
+          </a:fillRef>
+          <a:effectRef idx="2">
+            <a:schemeClr val="accent1"/>
+          </a:effectRef>
+          <a:fontRef idx="minor">
+            <a:schemeClr val="lt1"/>
+          </a:fontRef>
+        </p:style>
+        <p:txBody>
+          <a:bodyPr rtlCol="0" anchor="ctr"/>
+          <a:lstStyle/>
+          <a:p>
+            <a:pPr algn="ctr">
+              <a:defRPr sz="1500" b="1">
+                <a:solidFill>
+                  <a:srgbClr val="BE123C"/>
+                </a:solidFill>
+                <a:latin typeface="Arial"/>
+              </a:defRPr>
+            </a:pPr>
+            <a:r>
+              <a:t>Sơ Đồ Luồng Xử Lý Dữ Liệu</a:t>
+            </a:r>
+          </a:p>
+          <a:p>
+            <a:pPr>
+              <a:spcBef>
+                <a:spcPts val="800"/>
+              </a:spcBef>
+              <a:defRPr sz="1200" b="1">
+                <a:solidFill>
+                  <a:srgbClr val="1D4ED8"/>
+                </a:solidFill>
+                <a:latin typeface="Arial"/>
+              </a:defRPr>
+            </a:pPr>
+            <a:r>
+              <a:t>Browser (Client) ➔ Gửi Input (' OR '1'='1' --)</a:t>
+            </a:r>
+          </a:p>
+          <a:p>
+            <a:pPr>
+              <a:spcBef>
+                <a:spcPts val="200"/>
+              </a:spcBef>
+              <a:defRPr sz="1200" b="1">
+                <a:solidFill>
+                  <a:srgbClr val="64748B"/>
+                </a:solidFill>
+                <a:latin typeface="Arial"/>
+              </a:defRPr>
+            </a:pPr>
+            <a:r>
+              <a:t>            │</a:t>
+            </a:r>
+            <a:br/>
+            <a:r>
+              <a:t>            ▼</a:t>
+            </a:r>
+          </a:p>
+          <a:p>
+            <a:pPr>
+              <a:spcBef>
+                <a:spcPts val="200"/>
+              </a:spcBef>
+              <a:defRPr sz="1200" b="1">
+                <a:solidFill>
+                  <a:srgbClr val="BE123C"/>
+                </a:solidFill>
+                <a:latin typeface="Arial"/>
+              </a:defRPr>
+            </a:pPr>
+            <a:r>
+              <a:t>ASP.NET Core Controller ➔ Ghép chuỗi SQL trực tiếp</a:t>
+            </a:r>
+          </a:p>
+          <a:p>
+            <a:pPr>
+              <a:spcBef>
+                <a:spcPts val="200"/>
+              </a:spcBef>
+              <a:defRPr sz="1200" b="1">
+                <a:solidFill>
+                  <a:srgbClr val="64748B"/>
+                </a:solidFill>
+                <a:latin typeface="Arial"/>
+              </a:defRPr>
+            </a:pPr>
+            <a:r>
+              <a:t>            │</a:t>
+            </a:r>
+            <a:br/>
+            <a:r>
+              <a:t>            ▼</a:t>
+            </a:r>
+          </a:p>
+          <a:p>
+            <a:pPr>
+              <a:spcBef>
+                <a:spcPts val="200"/>
+              </a:spcBef>
+              <a:defRPr sz="1200" b="1">
+                <a:solidFill>
+                  <a:srgbClr val="BE123C"/>
+                </a:solidFill>
+                <a:latin typeface="Arial"/>
+              </a:defRPr>
+            </a:pPr>
+            <a:r>
+              <a:t>SQL Server 2025 ➔ Thông dịch cấu trúc lệnh bị tiêm nhiễm</a:t>
+            </a:r>
+          </a:p>
+          <a:p>
+            <a:br/>
+            <a:pPr>
+              <a:spcBef>
+                <a:spcPts val="800"/>
+              </a:spcBef>
+              <a:defRPr sz="1200" b="0">
+                <a:solidFill>
+                  <a:srgbClr val="334155"/>
+                </a:solidFill>
+                <a:latin typeface="Arial"/>
+              </a:defRPr>
+            </a:pPr>
+            <a:r>
+              <a:t>Root Cause (Nguyên nhân cốt lõi):</a:t>
+            </a:r>
+            <a:br/>
+            <a:r>
+              <a:t>Dữ liệu người dùng được ghép trực tiếp vào câu truy vấn. Hệ CSDL không phân định được đâu là Dữ liệu (Data) và đâu là Cú pháp lệnh (Code).</a:t>
+            </a:r>
+          </a:p>
+        </p:txBody>
+      </p:sp>
+      <p:sp>
+        <p:nvSpPr>
+          <p:cNvPr id="7" name="Rounded Rectangle 6"/>
+          <p:cNvSpPr/>
+          <p:nvPr/>
+        </p:nvSpPr>
+        <p:spPr>
+          <a:xfrm>
+            <a:off x="6263640" y="1280160"/>
+            <a:ext cx="5166360" cy="4937760"/>
+          </a:xfrm>
+          <a:prstGeom prst="roundRect">
+            <a:avLst/>
+          </a:prstGeom>
+          <a:solidFill>
+            <a:srgbClr val="FFF1F2"/>
+          </a:solidFill>
+          <a:ln>
+            <a:solidFill>
+              <a:srgbClr val="FECDD3"/>
+            </a:solidFill>
+          </a:ln>
+        </p:spPr>
+        <p:style>
+          <a:lnRef idx="1">
+            <a:schemeClr val="accent1"/>
+          </a:lnRef>
+          <a:fillRef idx="3">
+            <a:schemeClr val="accent1"/>
+          </a:fillRef>
+          <a:effectRef idx="2">
+            <a:schemeClr val="accent1"/>
+          </a:effectRef>
+          <a:fontRef idx="minor">
+            <a:schemeClr val="lt1"/>
+          </a:fontRef>
+        </p:style>
+        <p:txBody>
+          <a:bodyPr rtlCol="0" anchor="ctr"/>
+          <a:lstStyle/>
+          <a:p>
+            <a:pPr algn="ctr">
+              <a:defRPr sz="1500" b="1">
+                <a:solidFill>
+                  <a:srgbClr val="BE123C"/>
+                </a:solidFill>
+                <a:latin typeface="Arial"/>
+              </a:defRPr>
+            </a:pPr>
+            <a:r>
+              <a:t>Đoạn Mã Gây Lỗi (C# Controller)</a:t>
+            </a:r>
+          </a:p>
+          <a:p>
+            <a:pPr>
+              <a:spcBef>
+                <a:spcPts val="800"/>
+              </a:spcBef>
+              <a:defRPr sz="1050" b="0">
+                <a:solidFill>
+                  <a:srgbClr val="9F1239"/>
+                </a:solidFill>
+                <a:latin typeface="Courier New"/>
+              </a:defRPr>
+            </a:pPr>
+            <a:r>
+              <a:t>// NỐI CHUỖI TRỰC TIẾP TỪ THAM SỐ:</a:t>
+            </a:r>
+            <a:br/>
+            <a:r>
+              <a:t>string rawSql = $"SELECT * FROM Accounts " +</a:t>
+            </a:r>
+            <a:br/>
+            <a:r>
+              <a:t>                $"WHERE Username = '{username}' " +</a:t>
+            </a:r>
+            <a:br/>
+            <a:r>
+              <a:t>                $"AND Password = '{password}'";</a:t>
+            </a:r>
+            <a:br/>
+            <a:br/>
+            <a:r>
+              <a:t>var accounts = _context.Accounts</a:t>
+            </a:r>
+            <a:br/>
+            <a:r>
+              <a:t>                       .FromSqlRaw(rawSql)</a:t>
+            </a:r>
+            <a:br/>
+            <a:r>
+              <a:t>                       .ToList();</a:t>
+            </a:r>
+          </a:p>
+          <a:p>
+            <a:pPr>
+              <a:spcBef>
+                <a:spcPts val="1400"/>
+              </a:spcBef>
+              <a:defRPr sz="1200" b="1">
+                <a:solidFill>
+                  <a:srgbClr val="0F172A"/>
+                </a:solidFill>
+                <a:latin typeface="Arial"/>
+              </a:defRPr>
+            </a:pPr>
+            <a:r>
+              <a:t>Cơ chế phá vỡ cú pháp:</a:t>
+            </a:r>
+            <a:br/>
+            <a:r>
+              <a:t>Dấu nháy đơn (') của kẻ tấn công đóng sớm chuỗi giá trị Username. Phần còn lại được máy chủ thông dịch thành lệnh điều khiển thay vì dữ liệu.</a:t>
+            </a:r>
+          </a:p>
+        </p:txBody>
+      </p:sp>
+    </p:spTree>
+  </p:cSld>
+  <p:clrMapOvr>
+    <a:masterClrMapping/>
+  </p:clrMapOvr>
+</p:sld>
+</file>
+
+<file path=ppt/slides/slide4.xml><?xml version="1.0" encoding="utf-8"?>
+<p:sld xmlns:a="http://schemas.openxmlformats.org/drawingml/2006/main" xmlns:p="http://schemas.openxmlformats.org/presentationml/2006/main" xmlns:r="http://schemas.openxmlformats.org/officeDocument/2006/relationships">
+  <p:cSld>
+    <p:spTree>
+      <p:nvGrpSpPr>
+        <p:cNvPr id="1" name=""/>
+        <p:cNvGrpSpPr/>
+        <p:nvPr/>
+      </p:nvGrpSpPr>
+      <p:grpSpPr/>
+      <p:sp>
+        <p:nvSpPr>
+          <p:cNvPr id="2" name="Rectangle 1"/>
+          <p:cNvSpPr/>
+          <p:nvPr/>
+        </p:nvSpPr>
+        <p:spPr>
+          <a:xfrm>
+            <a:off x="0" y="0"/>
+            <a:ext cx="12191695" cy="73152"/>
+          </a:xfrm>
+          <a:prstGeom prst="rect">
+            <a:avLst/>
+          </a:prstGeom>
+          <a:solidFill>
+            <a:srgbClr val="1D4ED8"/>
+          </a:solidFill>
+          <a:ln>
+            <a:noFill/>
+          </a:ln>
+        </p:spPr>
+        <p:style>
+          <a:lnRef idx="1">
+            <a:schemeClr val="accent1"/>
+          </a:lnRef>
+          <a:fillRef idx="3">
+            <a:schemeClr val="accent1"/>
+          </a:fillRef>
+          <a:effectRef idx="2">
+            <a:schemeClr val="accent1"/>
+          </a:effectRef>
+          <a:fontRef idx="minor">
+            <a:schemeClr val="lt1"/>
+          </a:fontRef>
+        </p:style>
+        <p:txBody>
+          <a:bodyPr rtlCol="0" anchor="ctr"/>
+          <a:lstStyle/>
+          <a:p>
+            <a:pPr algn="ctr"/>
+          </a:p>
+        </p:txBody>
+      </p:sp>
+      <p:sp>
+        <p:nvSpPr>
+          <p:cNvPr id="3" name="Rounded Rectangle 2"/>
+          <p:cNvSpPr/>
+          <p:nvPr/>
+        </p:nvSpPr>
+        <p:spPr>
+          <a:xfrm>
+            <a:off x="731520" y="256032"/>
+            <a:ext cx="4754880" cy="329184"/>
+          </a:xfrm>
+          <a:prstGeom prst="roundRect">
+            <a:avLst/>
+          </a:prstGeom>
+          <a:solidFill>
+            <a:srgbClr val="EFF6FF"/>
+          </a:solidFill>
+          <a:ln>
+            <a:solidFill>
+              <a:srgbClr val="BFDBFE"/>
+            </a:solidFill>
+          </a:ln>
+        </p:spPr>
+        <p:style>
+          <a:lnRef idx="1">
+            <a:schemeClr val="accent1"/>
+          </a:lnRef>
+          <a:fillRef idx="3">
+            <a:schemeClr val="accent1"/>
+          </a:fillRef>
+          <a:effectRef idx="2">
+            <a:schemeClr val="accent1"/>
+          </a:effectRef>
+          <a:fontRef idx="minor">
+            <a:schemeClr val="lt1"/>
+          </a:fontRef>
+        </p:style>
+        <p:txBody>
+          <a:bodyPr rtlCol="0" anchor="ctr" wrap="none"/>
+          <a:lstStyle/>
+          <a:p>
+            <a:pPr algn="ctr">
+              <a:defRPr sz="1000" b="1">
+                <a:solidFill>
+                  <a:srgbClr val="1D4ED8"/>
+                </a:solidFill>
+                <a:latin typeface="Arial"/>
+              </a:defRPr>
+            </a:pPr>
+            <a:r>
+              <a:t>CHỦ ĐỀ 1 • NGUYỄN DANH HỌC (23A1001D0158)</a:t>
+            </a:r>
+          </a:p>
+        </p:txBody>
+      </p:sp>
+      <p:sp>
+        <p:nvSpPr>
+          <p:cNvPr id="4" name="TextBox 3"/>
+          <p:cNvSpPr txBox="1"/>
+          <p:nvPr/>
+        </p:nvSpPr>
+        <p:spPr>
+          <a:xfrm>
+            <a:off x="731520" y="621792"/>
+            <a:ext cx="10698480" cy="548640"/>
+          </a:xfrm>
+          <a:prstGeom prst="rect">
+            <a:avLst/>
+          </a:prstGeom>
+          <a:noFill/>
+        </p:spPr>
+        <p:txBody>
+          <a:bodyPr wrap="square">
+            <a:spAutoFit/>
+          </a:bodyPr>
+          <a:lstStyle/>
+          <a:p>
+            <a:pPr>
+              <a:defRPr sz="2000" b="1">
+                <a:solidFill>
+                  <a:srgbClr val="0F172A"/>
+                </a:solidFill>
+                <a:latin typeface="Arial"/>
+              </a:defRPr>
+            </a:pPr>
+            <a:r>
+              <a:t>1.2. SQL Injection: 3 Kịch Bản Khai Thác Thực Nghiệm</a:t>
             </a:r>
           </a:p>
         </p:txBody>
@@ -7771,7 +8231,7 @@
                 <a:gridCol w="2682163"/>
                 <a:gridCol w="2682166"/>
               </a:tblGrid>
-              <a:tr h="969264">
+              <a:tr h="1211580">
                 <a:tc>
                   <a:txBody>
                     <a:bodyPr/>
@@ -7869,14 +8329,14 @@
                   </a:tcPr>
                 </a:tc>
               </a:tr>
-              <a:tr h="969264">
+              <a:tr h="1211580">
                 <a:tc>
                   <a:txBody>
                     <a:bodyPr/>
                     <a:lstStyle/>
                     <a:p>
                       <a:pPr>
-                        <a:defRPr sz="1050">
+                        <a:defRPr sz="1100">
                           <a:solidFill>
                             <a:srgbClr val="0F172A"/>
                           </a:solidFill>
@@ -7884,7 +8344,7 @@
                         </a:defRPr>
                       </a:pPr>
                       <a:r>
-                        <a:t>Payload 1: Bypass tổng quát</a:t>
+                        <a:t>Kịch bản 1: Bypass tổng quát</a:t>
                       </a:r>
                     </a:p>
                   </a:txBody>
@@ -7900,7 +8360,7 @@
                     <a:lstStyle/>
                     <a:p>
                       <a:pPr>
-                        <a:defRPr sz="1050" b="1">
+                        <a:defRPr sz="1100" b="1">
                           <a:solidFill>
                             <a:srgbClr val="BE123C"/>
                           </a:solidFill>
@@ -7924,7 +8384,7 @@
                     <a:lstStyle/>
                     <a:p>
                       <a:pPr>
-                        <a:defRPr sz="1050">
+                        <a:defRPr sz="1100">
                           <a:solidFill>
                             <a:srgbClr val="334155"/>
                           </a:solidFill>
@@ -7932,7 +8392,7 @@
                         </a:defRPr>
                       </a:pPr>
                       <a:r>
-                        <a:t>Nháy đơn (') đóng chuỗi; OR '1'='1' luôn đúng; '--' hủy vế kiểm tra pass.</a:t>
+                        <a:t>Nháy đơn (') đóng chuỗi; OR '1'='1' luôn đúng; '--' hủy vế kiểm tra mật khẩu.</a:t>
                       </a:r>
                     </a:p>
                   </a:txBody>
@@ -7948,7 +8408,7 @@
                     <a:lstStyle/>
                     <a:p>
                       <a:pPr>
-                        <a:defRPr sz="1050">
+                        <a:defRPr sz="1100">
                           <a:solidFill>
                             <a:srgbClr val="334155"/>
                           </a:solidFill>
@@ -7967,14 +8427,14 @@
                   </a:tcPr>
                 </a:tc>
               </a:tr>
-              <a:tr h="969264">
+              <a:tr h="1211580">
                 <a:tc>
                   <a:txBody>
                     <a:bodyPr/>
                     <a:lstStyle/>
                     <a:p>
                       <a:pPr>
-                        <a:defRPr sz="1050">
+                        <a:defRPr sz="1100">
                           <a:solidFill>
                             <a:srgbClr val="0F172A"/>
                           </a:solidFill>
@@ -7982,7 +8442,7 @@
                         </a:defRPr>
                       </a:pPr>
                       <a:r>
-                        <a:t>Payload 2: Nhắm đích danh Admin</a:t>
+                        <a:t>Kịch bản 2: Nhắm đích danh Admin</a:t>
                       </a:r>
                     </a:p>
                   </a:txBody>
@@ -7998,7 +8458,7 @@
                     <a:lstStyle/>
                     <a:p>
                       <a:pPr>
-                        <a:defRPr sz="1050" b="1">
+                        <a:defRPr sz="1100" b="1">
                           <a:solidFill>
                             <a:srgbClr val="BE123C"/>
                           </a:solidFill>
@@ -8022,7 +8482,7 @@
                     <a:lstStyle/>
                     <a:p>
                       <a:pPr>
-                        <a:defRPr sz="1050">
+                        <a:defRPr sz="1100">
                           <a:solidFill>
                             <a:srgbClr val="334155"/>
                           </a:solidFill>
@@ -8030,7 +8490,7 @@
                         </a:defRPr>
                       </a:pPr>
                       <a:r>
-                        <a:t>Cố định Username = 'admin'; '--' vô hiệu hóa toàn bộ vế AND Password = ...</a:t>
+                        <a:t>Cố định Username = 'admin'; '--' hủy toàn bộ vế AND Password = ...</a:t>
                       </a:r>
                     </a:p>
                   </a:txBody>
@@ -8046,7 +8506,7 @@
                     <a:lstStyle/>
                     <a:p>
                       <a:pPr>
-                        <a:defRPr sz="1050">
+                        <a:defRPr sz="1100">
                           <a:solidFill>
                             <a:srgbClr val="334155"/>
                           </a:solidFill>
@@ -8054,7 +8514,7 @@
                         </a:defRPr>
                       </a:pPr>
                       <a:r>
-                        <a:t>Chiếm đoạt chính xác quyền Admin mà không cần dò mật khẩu.</a:t>
+                        <a:t>Chiếm đoạt chính xác quyền Admin mà không cần biết mật khẩu.</a:t>
                       </a:r>
                     </a:p>
                   </a:txBody>
@@ -8065,14 +8525,14 @@
                   </a:tcPr>
                 </a:tc>
               </a:tr>
-              <a:tr h="969264">
+              <a:tr h="1211580">
                 <a:tc>
                   <a:txBody>
                     <a:bodyPr/>
                     <a:lstStyle/>
                     <a:p>
                       <a:pPr>
-                        <a:defRPr sz="1050">
+                        <a:defRPr sz="1100">
                           <a:solidFill>
                             <a:srgbClr val="0F172A"/>
                           </a:solidFill>
@@ -8080,7 +8540,7 @@
                         </a:defRPr>
                       </a:pPr>
                       <a:r>
-                        <a:t>Payload 3: Logic số học</a:t>
+                        <a:t>Kịch bản chuẩn: Đăng nhập đúng</a:t>
                       </a:r>
                     </a:p>
                   </a:txBody>
@@ -8096,15 +8556,15 @@
                     <a:lstStyle/>
                     <a:p>
                       <a:pPr>
-                        <a:defRPr sz="1050" b="1">
+                        <a:defRPr sz="1100" b="1">
                           <a:solidFill>
-                            <a:srgbClr val="BE123C"/>
+                            <a:srgbClr val="047857"/>
                           </a:solidFill>
                           <a:latin typeface="Courier New"/>
                         </a:defRPr>
                       </a:pPr>
                       <a:r>
-                        <a:t>' OR 1=1 --</a:t>
+                        <a:t>admin / AdminPassword@2026</a:t>
                       </a:r>
                     </a:p>
                   </a:txBody>
@@ -8120,7 +8580,7 @@
                     <a:lstStyle/>
                     <a:p>
                       <a:pPr>
-                        <a:defRPr sz="1050">
+                        <a:defRPr sz="1100">
                           <a:solidFill>
                             <a:srgbClr val="334155"/>
                           </a:solidFill>
@@ -8128,7 +8588,7 @@
                         </a:defRPr>
                       </a:pPr>
                       <a:r>
-                        <a:t>Biểu thức số 1=1 luôn đúng, không phụ thuộc định dạng dấu nháy của CSDL.</a:t>
+                        <a:t>Dữ liệu hợp lệ, không chứa ký tự điều khiển hay can thiệp cú pháp.</a:t>
                       </a:r>
                     </a:p>
                   </a:txBody>
@@ -8144,7 +8604,7 @@
                     <a:lstStyle/>
                     <a:p>
                       <a:pPr>
-                        <a:defRPr sz="1050">
+                        <a:defRPr sz="1100">
                           <a:solidFill>
                             <a:srgbClr val="334155"/>
                           </a:solidFill>
@@ -8152,7 +8612,7 @@
                         </a:defRPr>
                       </a:pPr>
                       <a:r>
-                        <a:t>Trích xuất toàn bộ 4 tài khoản CSDL ra màn hình.</a:t>
+                        <a:t>Đăng nhập thành công trên cả 2 nhánh (Lỗi &amp; Đã phòng thủ).</a:t>
                       </a:r>
                     </a:p>
                   </a:txBody>
@@ -8163,356 +8623,10 @@
                   </a:tcPr>
                 </a:tc>
               </a:tr>
-              <a:tr h="969264">
-                <a:tc>
-                  <a:txBody>
-                    <a:bodyPr/>
-                    <a:lstStyle/>
-                    <a:p>
-                      <a:pPr>
-                        <a:defRPr sz="1050">
-                          <a:solidFill>
-                            <a:srgbClr val="0F172A"/>
-                          </a:solidFill>
-                          <a:latin typeface="Arial"/>
-                        </a:defRPr>
-                      </a:pPr>
-                      <a:r>
-                        <a:t>Kịch bản chuẩn: Đăng nhập đúng</a:t>
-                      </a:r>
-                    </a:p>
-                  </a:txBody>
-                  <a:tcPr>
-                    <a:solidFill>
-                      <a:srgbClr val="FFFFFF"/>
-                    </a:solidFill>
-                  </a:tcPr>
-                </a:tc>
-                <a:tc>
-                  <a:txBody>
-                    <a:bodyPr/>
-                    <a:lstStyle/>
-                    <a:p>
-                      <a:pPr>
-                        <a:defRPr sz="1050" b="1">
-                          <a:solidFill>
-                            <a:srgbClr val="047857"/>
-                          </a:solidFill>
-                          <a:latin typeface="Courier New"/>
-                        </a:defRPr>
-                      </a:pPr>
-                      <a:r>
-                        <a:t>admin / AdminPassword@2026</a:t>
-                      </a:r>
-                    </a:p>
-                  </a:txBody>
-                  <a:tcPr>
-                    <a:solidFill>
-                      <a:srgbClr val="FFFFFF"/>
-                    </a:solidFill>
-                  </a:tcPr>
-                </a:tc>
-                <a:tc>
-                  <a:txBody>
-                    <a:bodyPr/>
-                    <a:lstStyle/>
-                    <a:p>
-                      <a:pPr>
-                        <a:defRPr sz="1050">
-                          <a:solidFill>
-                            <a:srgbClr val="334155"/>
-                          </a:solidFill>
-                          <a:latin typeface="Arial"/>
-                        </a:defRPr>
-                      </a:pPr>
-                      <a:r>
-                        <a:t>Dữ liệu hợp lệ, không chứa ký tự điều khiển hay can thiệp cú pháp.</a:t>
-                      </a:r>
-                    </a:p>
-                  </a:txBody>
-                  <a:tcPr>
-                    <a:solidFill>
-                      <a:srgbClr val="FFFFFF"/>
-                    </a:solidFill>
-                  </a:tcPr>
-                </a:tc>
-                <a:tc>
-                  <a:txBody>
-                    <a:bodyPr/>
-                    <a:lstStyle/>
-                    <a:p>
-                      <a:pPr>
-                        <a:defRPr sz="1050">
-                          <a:solidFill>
-                            <a:srgbClr val="334155"/>
-                          </a:solidFill>
-                          <a:latin typeface="Arial"/>
-                        </a:defRPr>
-                      </a:pPr>
-                      <a:r>
-                        <a:t>Đăng nhập thành công trên cả 2 nhánh (Lỗi &amp; Đã vá).</a:t>
-                      </a:r>
-                    </a:p>
-                  </a:txBody>
-                  <a:tcPr>
-                    <a:solidFill>
-                      <a:srgbClr val="FFFFFF"/>
-                    </a:solidFill>
-                  </a:tcPr>
-                </a:tc>
-              </a:tr>
             </a:tbl>
           </a:graphicData>
         </a:graphic>
       </p:graphicFrame>
-    </p:spTree>
-  </p:cSld>
-  <p:clrMapOvr>
-    <a:masterClrMapping/>
-  </p:clrMapOvr>
-</p:sld>
-</file>
-
-<file path=ppt/slides/slide4.xml><?xml version="1.0" encoding="utf-8"?>
-<p:sld xmlns:a="http://schemas.openxmlformats.org/drawingml/2006/main" xmlns:p="http://schemas.openxmlformats.org/presentationml/2006/main" xmlns:r="http://schemas.openxmlformats.org/officeDocument/2006/relationships">
-  <p:cSld>
-    <p:spTree>
-      <p:nvGrpSpPr>
-        <p:cNvPr id="1" name=""/>
-        <p:cNvGrpSpPr/>
-        <p:nvPr/>
-      </p:nvGrpSpPr>
-      <p:grpSpPr/>
-      <p:sp>
-        <p:nvSpPr>
-          <p:cNvPr id="2" name="Rectangle 1"/>
-          <p:cNvSpPr/>
-          <p:nvPr/>
-        </p:nvSpPr>
-        <p:spPr>
-          <a:xfrm>
-            <a:off x="0" y="0"/>
-            <a:ext cx="12191695" cy="73152"/>
-          </a:xfrm>
-          <a:prstGeom prst="rect">
-            <a:avLst/>
-          </a:prstGeom>
-          <a:solidFill>
-            <a:srgbClr val="1D4ED8"/>
-          </a:solidFill>
-          <a:ln>
-            <a:noFill/>
-          </a:ln>
-        </p:spPr>
-        <p:style>
-          <a:lnRef idx="1">
-            <a:schemeClr val="accent1"/>
-          </a:lnRef>
-          <a:fillRef idx="3">
-            <a:schemeClr val="accent1"/>
-          </a:fillRef>
-          <a:effectRef idx="2">
-            <a:schemeClr val="accent1"/>
-          </a:effectRef>
-          <a:fontRef idx="minor">
-            <a:schemeClr val="lt1"/>
-          </a:fontRef>
-        </p:style>
-        <p:txBody>
-          <a:bodyPr rtlCol="0" anchor="ctr"/>
-          <a:lstStyle/>
-          <a:p>
-            <a:pPr algn="ctr"/>
-          </a:p>
-        </p:txBody>
-      </p:sp>
-      <p:sp>
-        <p:nvSpPr>
-          <p:cNvPr id="3" name="Rounded Rectangle 2"/>
-          <p:cNvSpPr/>
-          <p:nvPr/>
-        </p:nvSpPr>
-        <p:spPr>
-          <a:xfrm>
-            <a:off x="731520" y="256032"/>
-            <a:ext cx="4572000" cy="329184"/>
-          </a:xfrm>
-          <a:prstGeom prst="roundRect">
-            <a:avLst/>
-          </a:prstGeom>
-          <a:solidFill>
-            <a:srgbClr val="EFF6FF"/>
-          </a:solidFill>
-          <a:ln>
-            <a:solidFill>
-              <a:srgbClr val="BFDBFE"/>
-            </a:solidFill>
-          </a:ln>
-        </p:spPr>
-        <p:style>
-          <a:lnRef idx="1">
-            <a:schemeClr val="accent1"/>
-          </a:lnRef>
-          <a:fillRef idx="3">
-            <a:schemeClr val="accent1"/>
-          </a:fillRef>
-          <a:effectRef idx="2">
-            <a:schemeClr val="accent1"/>
-          </a:effectRef>
-          <a:fontRef idx="minor">
-            <a:schemeClr val="lt1"/>
-          </a:fontRef>
-        </p:style>
-        <p:txBody>
-          <a:bodyPr rtlCol="0" anchor="ctr" wrap="none"/>
-          <a:lstStyle/>
-          <a:p>
-            <a:pPr algn="ctr">
-              <a:defRPr sz="1000" b="1">
-                <a:solidFill>
-                  <a:srgbClr val="1D4ED8"/>
-                </a:solidFill>
-                <a:latin typeface="Arial"/>
-              </a:defRPr>
-            </a:pPr>
-            <a:r>
-              <a:t>CHỦ ĐỀ 1 • NGUYỄN DANH HỌC (23A1001D0158)</a:t>
-            </a:r>
-          </a:p>
-        </p:txBody>
-      </p:sp>
-      <p:sp>
-        <p:nvSpPr>
-          <p:cNvPr id="4" name="TextBox 3"/>
-          <p:cNvSpPr txBox="1"/>
-          <p:nvPr/>
-        </p:nvSpPr>
-        <p:spPr>
-          <a:xfrm>
-            <a:off x="731520" y="621792"/>
-            <a:ext cx="10698480" cy="548640"/>
-          </a:xfrm>
-          <a:prstGeom prst="rect">
-            <a:avLst/>
-          </a:prstGeom>
-          <a:noFill/>
-        </p:spPr>
-        <p:txBody>
-          <a:bodyPr wrap="square">
-            <a:spAutoFit/>
-          </a:bodyPr>
-          <a:lstStyle/>
-          <a:p>
-            <a:pPr>
-              <a:defRPr sz="2000" b="1">
-                <a:solidFill>
-                  <a:srgbClr val="0F172A"/>
-                </a:solidFill>
-                <a:latin typeface="Arial"/>
-              </a:defRPr>
-            </a:pPr>
-            <a:r>
-              <a:t>1.3. SQL Injection: Minh Chứng Thực Nghiệm Trực Quan Trên Web UI</a:t>
-            </a:r>
-          </a:p>
-        </p:txBody>
-      </p:sp>
-      <p:sp>
-        <p:nvSpPr>
-          <p:cNvPr id="5" name="TextBox 4"/>
-          <p:cNvSpPr txBox="1"/>
-          <p:nvPr/>
-        </p:nvSpPr>
-        <p:spPr>
-          <a:xfrm>
-            <a:off x="731520" y="6537960"/>
-            <a:ext cx="10698480" cy="256032"/>
-          </a:xfrm>
-          <a:prstGeom prst="rect">
-            <a:avLst/>
-          </a:prstGeom>
-          <a:noFill/>
-        </p:spPr>
-        <p:txBody>
-          <a:bodyPr wrap="none" lIns="0" rIns="0" tIns="0" bIns="0">
-            <a:spAutoFit/>
-          </a:bodyPr>
-          <a:lstStyle/>
-          <a:p>
-            <a:pPr>
-              <a:defRPr sz="950">
-                <a:solidFill>
-                  <a:srgbClr val="64748B"/>
-                </a:solidFill>
-                <a:latin typeface="Arial"/>
-              </a:defRPr>
-            </a:pPr>
-            <a:r>
-              <a:t>Nhóm WNC.G01 • Trường Đại học Mở Hà Nội (HOU) • Giảng viên: ThS. Lê Hữu Dũng</a:t>
-            </a:r>
-          </a:p>
-        </p:txBody>
-      </p:sp>
-      <p:pic>
-        <p:nvPicPr>
-          <p:cNvPr id="6" name="Picture 5" descr="final_sqli_proof.png"/>
-          <p:cNvPicPr>
-            <a:picLocks noChangeAspect="1"/>
-          </p:cNvPicPr>
-          <p:nvPr/>
-        </p:nvPicPr>
-        <p:blipFill>
-          <a:blip r:embed="rId2"/>
-          <a:stretch>
-            <a:fillRect/>
-          </a:stretch>
-        </p:blipFill>
-        <p:spPr>
-          <a:xfrm>
-            <a:off x="2066543" y="1234440"/>
-            <a:ext cx="8046720" cy="4754880"/>
-          </a:xfrm>
-          <a:prstGeom prst="rect">
-            <a:avLst/>
-          </a:prstGeom>
-        </p:spPr>
-      </p:pic>
-      <p:sp>
-        <p:nvSpPr>
-          <p:cNvPr id="7" name="TextBox 6"/>
-          <p:cNvSpPr txBox="1"/>
-          <p:nvPr/>
-        </p:nvSpPr>
-        <p:spPr>
-          <a:xfrm>
-            <a:off x="731520" y="6053328"/>
-            <a:ext cx="10728655" cy="365760"/>
-          </a:xfrm>
-          <a:prstGeom prst="rect">
-            <a:avLst/>
-          </a:prstGeom>
-          <a:noFill/>
-        </p:spPr>
-        <p:txBody>
-          <a:bodyPr wrap="none" tIns="0" bIns="0" lIns="0" rIns="0">
-            <a:spAutoFit/>
-          </a:bodyPr>
-          <a:lstStyle/>
-          <a:p>
-            <a:pPr algn="ctr">
-              <a:defRPr sz="1100" b="1">
-                <a:solidFill>
-                  <a:srgbClr val="1D4ED8"/>
-                </a:solidFill>
-                <a:latin typeface="Arial"/>
-              </a:defRPr>
-            </a:pPr>
-            <a:r>
-              <a:t>Minh chứng đối chứng: Trích xuất 4 tài khoản CSDL khi inject ' OR '1'='1' -- (Trái) vs Chặn đứng an toàn với EF Core (Phải)</a:t>
-            </a:r>
-          </a:p>
-        </p:txBody>
-      </p:sp>
     </p:spTree>
   </p:cSld>
   <p:clrMapOvr>
@@ -8583,7 +8697,7 @@
         <p:spPr>
           <a:xfrm>
             <a:off x="731520" y="256032"/>
-            <a:ext cx="4572000" cy="329184"/>
+            <a:ext cx="4754880" cy="329184"/>
           </a:xfrm>
           <a:prstGeom prst="roundRect">
             <a:avLst/>
@@ -8660,7 +8774,7 @@
               </a:defRPr>
             </a:pPr>
             <a:r>
-              <a:t>1.4. SQL Injection: Minh Chứng Kiểm Thử Qua Chrome DevTools (Network)</a:t>
+              <a:t>1.3. SQL Injection: Minh Chứng Thực Nghiệm Trực Quan Trên Web UI</a:t>
             </a:r>
           </a:p>
         </p:txBody>
@@ -8703,7 +8817,7 @@
       </p:sp>
       <p:pic>
         <p:nvPicPr>
-          <p:cNvPr id="6" name="Picture 5" descr="01_sqli_devtools_proof.png"/>
+          <p:cNvPr id="6" name="Picture 5" descr="final_sqli_proof.png"/>
           <p:cNvPicPr>
             <a:picLocks noChangeAspect="1"/>
           </p:cNvPicPr>
@@ -8717,8 +8831,8 @@
         </p:blipFill>
         <p:spPr>
           <a:xfrm>
-            <a:off x="1883664" y="1234440"/>
-            <a:ext cx="8412480" cy="4732020"/>
+            <a:off x="2066543" y="1234440"/>
+            <a:ext cx="8046720" cy="4754880"/>
           </a:xfrm>
           <a:prstGeom prst="rect">
             <a:avLst/>
@@ -8733,7 +8847,7 @@
         </p:nvSpPr>
         <p:spPr>
           <a:xfrm>
-            <a:off x="731520" y="6053328"/>
+            <a:off x="731520" y="5989320"/>
             <a:ext cx="10728655" cy="365760"/>
           </a:xfrm>
           <a:prstGeom prst="rect">
@@ -8756,7 +8870,7 @@
               </a:defRPr>
             </a:pPr>
             <a:r>
-              <a:t>Soi gói tin mạng (Network Fetch/XHR): Payload gửi lên mang chuỗi ' OR '1'='1' -- và JSON trích xuất 4 tài khoản rò rỉ</a:t>
+              <a:t>Minh chứng đối chứng: Trích xuất 4 tài khoản CSDL khi inject ' OR '1'='1' -- (Trái) vs Chặn đứng an toàn với EF Core (Phải)</a:t>
             </a:r>
           </a:p>
         </p:txBody>
@@ -8831,7 +8945,7 @@
         <p:spPr>
           <a:xfrm>
             <a:off x="731520" y="256032"/>
-            <a:ext cx="4572000" cy="329184"/>
+            <a:ext cx="4754880" cy="329184"/>
           </a:xfrm>
           <a:prstGeom prst="roundRect">
             <a:avLst/>
@@ -8908,7 +9022,7 @@
               </a:defRPr>
             </a:pPr>
             <a:r>
-              <a:t>1.5. SQL Injection: Minh Chứng Tầng API (cURL) &amp; SQL Server 2025</a:t>
+              <a:t>1.4. SQL Injection: Minh Chứng Gói Tin Mạng (Chrome DevTools Network)</a:t>
             </a:r>
           </a:p>
         </p:txBody>
@@ -8949,309 +9063,62 @@
           </a:p>
         </p:txBody>
       </p:sp>
-      <p:sp>
-        <p:nvSpPr>
-          <p:cNvPr id="6" name="Rounded Rectangle 5"/>
-          <p:cNvSpPr/>
+      <p:pic>
+        <p:nvPicPr>
+          <p:cNvPr id="6" name="Picture 5" descr="01_sqli_devtools_proof.png"/>
+          <p:cNvPicPr>
+            <a:picLocks noChangeAspect="1"/>
+          </p:cNvPicPr>
           <p:nvPr/>
-        </p:nvSpPr>
-        <p:spPr>
-          <a:xfrm>
-            <a:off x="731520" y="1234440"/>
-            <a:ext cx="5166360" cy="4297680"/>
-          </a:xfrm>
-          <a:prstGeom prst="roundRect">
-            <a:avLst/>
-          </a:prstGeom>
-          <a:solidFill>
-            <a:srgbClr val="F8FAFC"/>
-          </a:solidFill>
-          <a:ln>
-            <a:solidFill>
-              <a:srgbClr val="E2E8F0"/>
-            </a:solidFill>
-          </a:ln>
-        </p:spPr>
-        <p:style>
-          <a:lnRef idx="1">
-            <a:schemeClr val="accent1"/>
-          </a:lnRef>
-          <a:fillRef idx="3">
-            <a:schemeClr val="accent1"/>
-          </a:fillRef>
-          <a:effectRef idx="2">
-            <a:schemeClr val="accent1"/>
-          </a:effectRef>
-          <a:fontRef idx="minor">
-            <a:schemeClr val="lt1"/>
-          </a:fontRef>
-        </p:style>
-        <p:txBody>
-          <a:bodyPr rtlCol="0" anchor="ctr"/>
-          <a:lstStyle/>
-          <a:p>
-            <a:pPr algn="ctr">
-              <a:defRPr sz="1400" b="1">
-                <a:solidFill>
-                  <a:srgbClr val="1D4ED8"/>
-                </a:solidFill>
-                <a:latin typeface="Arial"/>
-              </a:defRPr>
-            </a:pPr>
-            <a:r>
-              <a:t>Minh Chứng Tầng API / Dòng Lệnh (cURL)</a:t>
-            </a:r>
-          </a:p>
-          <a:p>
-            <a:pPr>
-              <a:spcBef>
-                <a:spcPts val="600"/>
-              </a:spcBef>
-              <a:defRPr sz="1000" b="0">
-                <a:solidFill>
-                  <a:srgbClr val="0F172A"/>
-                </a:solidFill>
-                <a:latin typeface="Courier New"/>
-              </a:defRPr>
-            </a:pPr>
-            <a:r>
-              <a:t>$ curl -X POST http://localhost:5076/SqlInjection/LoginVulnerable \</a:t>
-            </a:r>
-            <a:br/>
-            <a:r>
-              <a:t>       -F "username=' OR '1'='1' --" -F "password=any"</a:t>
-            </a:r>
-            <a:br/>
-            <a:br/>
-            <a:r>
-              <a:t>Phản hồi JSON từ Server:</a:t>
-            </a:r>
-            <a:br/>
-            <a:r>
-              <a:t>{</a:t>
-            </a:r>
-            <a:br/>
-            <a:r>
-              <a:t>  "success": true,</a:t>
-            </a:r>
-            <a:br/>
-            <a:r>
-              <a:t>  "isExploited": true,</a:t>
-            </a:r>
-            <a:br/>
-            <a:r>
-              <a:t>  "count": 4,</a:t>
-            </a:r>
-            <a:br/>
-            <a:r>
-              <a:t>  "accounts": [ ... 4 tài khoản trích xuất ... ]</a:t>
-            </a:r>
-            <a:br/>
-            <a:r>
-              <a:t>}</a:t>
-            </a:r>
-          </a:p>
-          <a:p>
-            <a:pPr>
-              <a:spcBef>
-                <a:spcPts val="800"/>
-              </a:spcBef>
-              <a:defRPr sz="1150" b="0">
-                <a:solidFill>
-                  <a:srgbClr val="334155"/>
-                </a:solidFill>
-                <a:latin typeface="Arial"/>
-              </a:defRPr>
-            </a:pPr>
-            <a:r>
-              <a:t>Xác nhận lỗi xuất phát từ tầng xử lý C# Backend, kẻ tấn công có thể khai thác qua API mà không cần tương tác qua giao diện web.</a:t>
-            </a:r>
-          </a:p>
-        </p:txBody>
-      </p:sp>
-      <p:sp>
-        <p:nvSpPr>
-          <p:cNvPr id="7" name="Rounded Rectangle 6"/>
-          <p:cNvSpPr/>
+        </p:nvPicPr>
+        <p:blipFill>
+          <a:blip r:embed="rId2"/>
+          <a:stretch>
+            <a:fillRect/>
+          </a:stretch>
+        </p:blipFill>
+        <p:spPr>
+          <a:xfrm>
+            <a:off x="1883664" y="1234440"/>
+            <a:ext cx="8412480" cy="4732020"/>
+          </a:xfrm>
+          <a:prstGeom prst="rect">
+            <a:avLst/>
+          </a:prstGeom>
+        </p:spPr>
+      </p:pic>
+      <p:sp>
+        <p:nvSpPr>
+          <p:cNvPr id="7" name="TextBox 6"/>
+          <p:cNvSpPr txBox="1"/>
           <p:nvPr/>
         </p:nvSpPr>
         <p:spPr>
           <a:xfrm>
-            <a:off x="6263640" y="1234440"/>
-            <a:ext cx="5166360" cy="4297680"/>
-          </a:xfrm>
-          <a:prstGeom prst="roundRect">
-            <a:avLst/>
-          </a:prstGeom>
-          <a:solidFill>
-            <a:srgbClr val="F8FAFC"/>
-          </a:solidFill>
-          <a:ln>
-            <a:solidFill>
-              <a:srgbClr val="E2E8F0"/>
-            </a:solidFill>
-          </a:ln>
-        </p:spPr>
-        <p:style>
-          <a:lnRef idx="1">
-            <a:schemeClr val="accent1"/>
-          </a:lnRef>
-          <a:fillRef idx="3">
-            <a:schemeClr val="accent1"/>
-          </a:fillRef>
-          <a:effectRef idx="2">
-            <a:schemeClr val="accent1"/>
-          </a:effectRef>
-          <a:fontRef idx="minor">
-            <a:schemeClr val="lt1"/>
-          </a:fontRef>
-        </p:style>
-        <p:txBody>
-          <a:bodyPr rtlCol="0" anchor="ctr"/>
-          <a:lstStyle/>
-          <a:p>
-            <a:pPr algn="ctr">
-              <a:defRPr sz="1400" b="1">
-                <a:solidFill>
-                  <a:srgbClr val="047857"/>
-                </a:solidFill>
-                <a:latin typeface="Arial"/>
-              </a:defRPr>
-            </a:pPr>
-            <a:r>
-              <a:t>Minh Chứng Tầng CSDL (SQL Server 2025)</a:t>
-            </a:r>
-          </a:p>
-          <a:p>
-            <a:pPr>
-              <a:spcBef>
-                <a:spcPts val="600"/>
-              </a:spcBef>
-              <a:defRPr sz="1000" b="0">
-                <a:solidFill>
-                  <a:srgbClr val="0F172A"/>
-                </a:solidFill>
-                <a:latin typeface="Courier New"/>
-              </a:defRPr>
-            </a:pPr>
-            <a:r>
-              <a:t>-- Database: OwaspDemoDB | Bảng: dbo.Accounts</a:t>
-            </a:r>
-            <a:br/>
-            <a:r>
-              <a:t>-- 1. Truy vấn dính lỗi:</a:t>
-            </a:r>
-            <a:br/>
-            <a:r>
-              <a:t>SELECT * FROM Accounts WHERE Username='' OR '1'='1' --'</a:t>
-            </a:r>
-            <a:br/>
-            <a:r>
-              <a:t>&gt;&gt; Kết quả: 4 rows returned (Bypass thành công)</a:t>
-            </a:r>
-            <a:br/>
-            <a:br/>
-            <a:r>
-              <a:t>-- 2. Truy vấn tham số hóa:</a:t>
-            </a:r>
-            <a:br/>
-            <a:r>
-              <a:t>EXEC sp_executesql N'SELECT * FROM Accounts WHERE...',</a:t>
-            </a:r>
-            <a:br/>
-            <a:r>
-              <a:t>     N'@p0 nvarchar(50)', @p0 = N''' OR ''1''=''1'' --'</a:t>
-            </a:r>
-            <a:br/>
-            <a:r>
-              <a:t>&gt;&gt; Kết quả: 0 rows returned (An toàn)</a:t>
-            </a:r>
-          </a:p>
-          <a:p>
-            <a:pPr>
-              <a:spcBef>
-                <a:spcPts val="800"/>
-              </a:spcBef>
-              <a:defRPr sz="1150" b="0">
-                <a:solidFill>
-                  <a:srgbClr val="334155"/>
-                </a:solidFill>
-                <a:latin typeface="Arial"/>
-              </a:defRPr>
-            </a:pPr>
-            <a:r>
-              <a:t>Đối chiếu trực tiếp trên máy chủ CSDL chứng minh cơ chế phân tách rạch ròi giữa cú pháp lệnh và tham số giá trị.</a:t>
-            </a:r>
-          </a:p>
-        </p:txBody>
-      </p:sp>
-      <p:sp>
-        <p:nvSpPr>
-          <p:cNvPr id="8" name="Rounded Rectangle 7"/>
-          <p:cNvSpPr/>
-          <p:nvPr/>
-        </p:nvSpPr>
-        <p:spPr>
-          <a:xfrm>
-            <a:off x="731520" y="5623560"/>
-            <a:ext cx="10728655" cy="777240"/>
-          </a:xfrm>
-          <a:prstGeom prst="roundRect">
-            <a:avLst/>
-          </a:prstGeom>
-          <a:solidFill>
-            <a:srgbClr val="ECFDF5"/>
-          </a:solidFill>
-          <a:ln>
-            <a:solidFill>
-              <a:srgbClr val="A7F3D0"/>
-            </a:solidFill>
-          </a:ln>
-        </p:spPr>
-        <p:style>
-          <a:lnRef idx="1">
-            <a:schemeClr val="accent1"/>
-          </a:lnRef>
-          <a:fillRef idx="3">
-            <a:schemeClr val="accent1"/>
-          </a:fillRef>
-          <a:effectRef idx="2">
-            <a:schemeClr val="accent1"/>
-          </a:effectRef>
-          <a:fontRef idx="minor">
-            <a:schemeClr val="lt1"/>
-          </a:fontRef>
-        </p:style>
-        <p:txBody>
-          <a:bodyPr rtlCol="0" anchor="ctr" tIns="73152"/>
+            <a:off x="731520" y="5989320"/>
+            <a:ext cx="10728655" cy="365760"/>
+          </a:xfrm>
+          <a:prstGeom prst="rect">
+            <a:avLst/>
+          </a:prstGeom>
+          <a:noFill/>
+        </p:spPr>
+        <p:txBody>
+          <a:bodyPr wrap="none">
+            <a:spAutoFit/>
+          </a:bodyPr>
           <a:lstStyle/>
           <a:p>
             <a:pPr algn="ctr">
               <a:defRPr sz="1100" b="1">
                 <a:solidFill>
-                  <a:srgbClr val="047857"/>
-                </a:solidFill>
-                <a:latin typeface="Arial"/>
-              </a:defRPr>
-            </a:pPr>
-            <a:r>
-              <a:t>Thao tác trên công cụ: VS Code MSSQL Extension &amp; File verify_sql_server.sql</a:t>
-            </a:r>
-          </a:p>
-          <a:p>
-            <a:pPr>
-              <a:spcBef>
-                <a:spcPts val="100"/>
-              </a:spcBef>
-              <a:defRPr sz="1050" b="0">
-                <a:solidFill>
-                  <a:srgbClr val="334155"/>
-                </a:solidFill>
-                <a:latin typeface="Arial"/>
-              </a:defRPr>
-            </a:pPr>
-            <a:r>
-              <a:t>Dữ liệu được truy vấn và kiểm thử trực tiếp trên máy chủ CSDL SQL Server 2025 (Database: OwaspDemoDB).</a:t>
+                  <a:srgbClr val="1D4ED8"/>
+                </a:solidFill>
+                <a:latin typeface="Arial"/>
+              </a:defRPr>
+            </a:pPr>
+            <a:r>
+              <a:t>Soi gói tin mạng (Network Fetch/XHR): Payload gửi lên mang chuỗi ' OR '1'='1' -- và JSON trích xuất 4 tài khoản rò rỉ</a:t>
             </a:r>
           </a:p>
         </p:txBody>
@@ -9326,7 +9193,7 @@
         <p:spPr>
           <a:xfrm>
             <a:off x="731520" y="256032"/>
-            <a:ext cx="4572000" cy="329184"/>
+            <a:ext cx="4754880" cy="329184"/>
           </a:xfrm>
           <a:prstGeom prst="roundRect">
             <a:avLst/>
@@ -9403,7 +9270,7 @@
               </a:defRPr>
             </a:pPr>
             <a:r>
-              <a:t>1.6. SQL Injection: Giải Pháp Phòng Thủ Chuẩn Hóa</a:t>
+              <a:t>1.5. SQL Injection: Cơ Chế Phòng Thủ Chuẩn Hóa</a:t>
             </a:r>
           </a:p>
         </p:txBody>
@@ -9452,7 +9319,7 @@
         </p:nvSpPr>
         <p:spPr>
           <a:xfrm>
-            <a:off x="731520" y="1234440"/>
+            <a:off x="731520" y="1280160"/>
             <a:ext cx="5166360" cy="4937760"/>
           </a:xfrm>
           <a:prstGeom prst="roundRect">
@@ -9494,7 +9361,7 @@
               </a:defRPr>
             </a:pPr>
             <a:r>
-              <a:t>Kỹ Thuật Parameterized Query Với EF Core</a:t>
+              <a:t>Phòng Thủ SQL Injection: Parameterized Query</a:t>
             </a:r>
           </a:p>
           <a:p>
@@ -9502,7 +9369,7 @@
               <a:spcBef>
                 <a:spcPts val="800"/>
               </a:spcBef>
-              <a:defRPr sz="1000" b="0">
+              <a:defRPr sz="1100" b="0">
                 <a:solidFill>
                   <a:srgbClr val="065F46"/>
                 </a:solidFill>
@@ -9510,7 +9377,7 @@
               </a:defRPr>
             </a:pPr>
             <a:r>
-              <a:t>// SỬ DỤNG LINQ PARAMETERIZED (KHUYÊN DÙNG):</a:t>
+              <a:t>// DÙNG LINQ PARAMETERIZED TRONG EF CORE:</a:t>
             </a:r>
             <a:br/>
             <a:r>
@@ -9523,29 +9390,12 @@
             <a:br/>
             <a:r>
               <a:t>                      &amp;&amp; a.Password == pass);</a:t>
-            </a:r>
-            <a:br/>
-            <a:br/>
-            <a:r>
-              <a:t>// TRUY VẤN THUẦN QUA FROMSQLINTERPOLATED:</a:t>
-            </a:r>
-            <a:br/>
-            <a:r>
-              <a:t>var account = _context.Accounts</a:t>
-            </a:r>
-            <a:br/>
-            <a:r>
-              <a:t>    .FromSqlInterpolated($"SELECT * FROM Accounts WHERE Username={user} AND Password={pass}")</a:t>
-            </a:r>
-            <a:br/>
-            <a:r>
-              <a:t>    .FirstOrDefault();</a:t>
             </a:r>
           </a:p>
           <a:p>
             <a:pPr>
               <a:spcBef>
-                <a:spcPts val="1000"/>
+                <a:spcPts val="1200"/>
               </a:spcBef>
               <a:defRPr sz="1200" b="0">
                 <a:solidFill>
@@ -9555,11 +9405,19 @@
               </a:defRPr>
             </a:pPr>
             <a:r>
-              <a:t>Cơ chế bảo vệ:</a:t>
+              <a:t>Nguyên lý kỹ thuật:</a:t>
             </a:r>
             <a:br/>
             <a:r>
-              <a:t>SQL Server biên dịch kế hoạch thực thi (Execution Plan) trước khi nhận tham số. Đầu vào của người dùng được gán vào biến @p0 như một chuỗi văn bản (literal), vô hiệu hóa hoàn toàn khả năng chèn lệnh.</a:t>
+              <a:t>• Data ≠ SQL Syntax: Đầu vào người dùng được truyền qua tham số riêng biệt (@p0, @p1).</a:t>
+            </a:r>
+            <a:br/>
+            <a:r>
+              <a:t>• Máy chủ SQL Server biên dịch cấu trúc cây truy vấn (Execution Plan) TRƯỚC khi gán dữ liệu.</a:t>
+            </a:r>
+            <a:br/>
+            <a:r>
+              <a:t>• Toàn bộ chuỗi payload bị cô lập thành giá trị văn bản (literal), không thể can thiệp vào logic thực thi.</a:t>
             </a:r>
           </a:p>
         </p:txBody>
@@ -9572,7 +9430,7 @@
         </p:nvSpPr>
         <p:spPr>
           <a:xfrm>
-            <a:off x="6263640" y="1234440"/>
+            <a:off x="6263640" y="1280160"/>
             <a:ext cx="5166360" cy="4937760"/>
           </a:xfrm>
           <a:prstGeom prst="roundRect">
@@ -9614,7 +9472,7 @@
               </a:defRPr>
             </a:pPr>
             <a:r>
-              <a:t>Bộ Quy Tắc Phòng Thủ Toàn Diện (Defense-in-Depth)</a:t>
+              <a:t>Bảo Vệ Mật Khẩu: Tách Biệt Với SQL Injection</a:t>
             </a:r>
           </a:p>
           <a:p>
@@ -9630,38 +9488,44 @@
               </a:defRPr>
             </a:pPr>
             <a:r>
-              <a:t>1. Tham số hóa truy vấn:</a:t>
+              <a:t>Lưu ý logic bảo mật quan trọng:</a:t>
             </a:r>
             <a:br/>
             <a:r>
-              <a:t>Tuyệt đối không ghép chuỗi SQL thủ công trong mã nguồn.</a:t>
+              <a:t>• Parameterized Query giải quyết triệt để lỗi SQL Injection.</a:t>
+            </a:r>
+            <a:br/>
+            <a:r>
+              <a:t>• Tuy nhiên, để bảo vệ mật khẩu người dùng phòng trường hợp CSDL bị rò rỉ, cần lớp phòng thủ bổ sung (Defense-in-Depth):</a:t>
+            </a:r>
+          </a:p>
+          <a:p>
+            <a:pPr>
+              <a:spcBef>
+                <a:spcPts val="800"/>
+              </a:spcBef>
+              <a:defRPr sz="1200" b="0">
+                <a:solidFill>
+                  <a:srgbClr val="334155"/>
+                </a:solidFill>
+                <a:latin typeface="Arial"/>
+              </a:defRPr>
+            </a:pPr>
+            <a:r>
+              <a:t>1. Password Hashing (ASP.NET Core Identity):</a:t>
+            </a:r>
+            <a:br/>
+            <a:r>
+              <a:t>   Băm mật khẩu 1 chiều bằng thuật toán an toàn (PBKDF2/BCrypt) kèm Salt, tuyệt đối không lưu mật khẩu dạng plain-text.</a:t>
             </a:r>
             <a:br/>
             <a:br/>
             <a:r>
-              <a:t>2. Đặc quyền tối thiểu (Least Privilege):</a:t>
+              <a:t>2. Phân quyền tối thiểu (Least Privilege):</a:t>
             </a:r>
             <a:br/>
             <a:r>
-              <a:t>Tài khoản kết nối CSDL chỉ cấp các quyền SELECT, INSERT, UPDATE cần thiết; không dùng tài khoản 'sa' hay quyền DDL trong môi trường chạy ứng dụng.</a:t>
-            </a:r>
-            <a:br/>
-            <a:br/>
-            <a:r>
-              <a:t>3. Kiểm tra dữ liệu đầu vào (Input Validation):</a:t>
-            </a:r>
-            <a:br/>
-            <a:r>
-              <a:t>Sử dụng Data Annotations để giới hạn định dạng và độ dài dữ liệu.</a:t>
-            </a:r>
-            <a:br/>
-            <a:br/>
-            <a:r>
-              <a:t>4. Băm mật khẩu (Password Hashing):</a:t>
-            </a:r>
-            <a:br/>
-            <a:r>
-              <a:t>Sử dụng ASP.NET Core Identity (PBKDF2) để bảo vệ thông tin ngay cả khi CSDL bị lộ.</a:t>
+              <a:t>   Tài khoản kết nối CSDL của ứng dụng chỉ có quyền SELECT/INSERT/UPDATE trên các bảng nghiệp vụ, không dùng quyền sa/DDL.</a:t>
             </a:r>
           </a:p>
         </p:txBody>
@@ -9736,7 +9600,7 @@
         <p:spPr>
           <a:xfrm>
             <a:off x="731520" y="256032"/>
-            <a:ext cx="4572000" cy="329184"/>
+            <a:ext cx="4754880" cy="329184"/>
           </a:xfrm>
           <a:prstGeom prst="roundRect">
             <a:avLst/>
@@ -9813,7 +9677,7 @@
               </a:defRPr>
             </a:pPr>
             <a:r>
-              <a:t>2.1. Stored XSS: Bản Chất Kỹ Thuật &amp; Phân Loại Trong Web</a:t>
+              <a:t>2.1. Stored XSS: Bản Chất Kỹ Thuật &amp; Sơ Đồ Luồng</a:t>
             </a:r>
           </a:p>
         </p:txBody>
@@ -9862,7 +9726,7 @@
         </p:nvSpPr>
         <p:spPr>
           <a:xfrm>
-            <a:off x="731520" y="1234440"/>
+            <a:off x="731520" y="1280160"/>
             <a:ext cx="5166360" cy="4937760"/>
           </a:xfrm>
           <a:prstGeom prst="roundRect">
@@ -9904,13 +9768,102 @@
               </a:defRPr>
             </a:pPr>
             <a:r>
-              <a:t>Phân Biệt 3 Loại Cross-Site Scripting (XSS)</a:t>
+              <a:t>Sơ Đồ Luồng Phát Tán Của Stored XSS</a:t>
             </a:r>
           </a:p>
           <a:p>
             <a:pPr>
               <a:spcBef>
-                <a:spcPts val="600"/>
+                <a:spcPts val="800"/>
+              </a:spcBef>
+              <a:defRPr sz="1200" b="1">
+                <a:solidFill>
+                  <a:srgbClr val="BE123C"/>
+                </a:solidFill>
+                <a:latin typeface="Arial"/>
+              </a:defRPr>
+            </a:pPr>
+            <a:r>
+              <a:t>Kẻ tấn công ➔ Nhập mã độc JavaScript vào form đánh giá</a:t>
+            </a:r>
+          </a:p>
+          <a:p>
+            <a:pPr>
+              <a:spcBef>
+                <a:spcPts val="200"/>
+              </a:spcBef>
+              <a:defRPr sz="1200" b="1">
+                <a:solidFill>
+                  <a:srgbClr val="64748B"/>
+                </a:solidFill>
+                <a:latin typeface="Arial"/>
+              </a:defRPr>
+            </a:pPr>
+            <a:r>
+              <a:t>            │</a:t>
+            </a:r>
+            <a:br/>
+            <a:r>
+              <a:t>            ▼</a:t>
+            </a:r>
+          </a:p>
+          <a:p>
+            <a:pPr>
+              <a:spcBef>
+                <a:spcPts val="200"/>
+              </a:spcBef>
+              <a:defRPr sz="1200" b="1">
+                <a:solidFill>
+                  <a:srgbClr val="0F172A"/>
+                </a:solidFill>
+                <a:latin typeface="Arial"/>
+              </a:defRPr>
+            </a:pPr>
+            <a:r>
+              <a:t>Web Server ➔ Lưu nguyên văn mã độc vào Database (dbo.Comments)</a:t>
+            </a:r>
+          </a:p>
+          <a:p>
+            <a:pPr>
+              <a:spcBef>
+                <a:spcPts val="200"/>
+              </a:spcBef>
+              <a:defRPr sz="1200" b="1">
+                <a:solidFill>
+                  <a:srgbClr val="64748B"/>
+                </a:solidFill>
+                <a:latin typeface="Arial"/>
+              </a:defRPr>
+            </a:pPr>
+            <a:r>
+              <a:t>            │</a:t>
+            </a:r>
+            <a:br/>
+            <a:r>
+              <a:t>            ▼</a:t>
+            </a:r>
+          </a:p>
+          <a:p>
+            <a:pPr>
+              <a:spcBef>
+                <a:spcPts val="200"/>
+              </a:spcBef>
+              <a:defRPr sz="1200" b="1">
+                <a:solidFill>
+                  <a:srgbClr val="BE123C"/>
+                </a:solidFill>
+                <a:latin typeface="Arial"/>
+              </a:defRPr>
+            </a:pPr>
+            <a:r>
+              <a:t>Nạn nhân truy cập trang ➔ Trình duyệt tự động thực thi script độc hại</a:t>
+            </a:r>
+          </a:p>
+          <a:p>
+            <a:br/>
+            <a:pPr>
+              <a:spcBef>
+                <a:spcPts val="800"/>
               </a:spcBef>
               <a:defRPr sz="1200" b="0">
                 <a:solidFill>
@@ -9920,55 +9873,11 @@
               </a:defRPr>
             </a:pPr>
             <a:r>
-              <a:t>• 1. Reflected XSS (Phản xạ): Mã độc nằm trong URL (query string), kích hoạt khi nạn nhân click vào liên kết độc hại.</a:t>
-            </a:r>
-          </a:p>
-          <a:p>
-            <a:pPr>
-              <a:spcBef>
-                <a:spcPts val="600"/>
-              </a:spcBef>
-              <a:defRPr sz="1200" b="0">
-                <a:solidFill>
-                  <a:srgbClr val="334155"/>
-                </a:solidFill>
-                <a:latin typeface="Arial"/>
-              </a:defRPr>
-            </a:pPr>
-            <a:r>
-              <a:t>• 2. DOM-based XSS: Lỗ hổng nằm hoàn toàn ở mã kịch bản phía Client (JavaScript đọc và ghi trực tiếp vào DOM mà không qua máy chủ).</a:t>
-            </a:r>
-          </a:p>
-          <a:p>
-            <a:pPr>
-              <a:spcBef>
-                <a:spcPts val="600"/>
-              </a:spcBef>
-              <a:defRPr sz="1200" b="1">
-                <a:solidFill>
-                  <a:srgbClr val="BE123C"/>
-                </a:solidFill>
-                <a:latin typeface="Arial"/>
-              </a:defRPr>
-            </a:pPr>
-            <a:r>
-              <a:t>• 3. Stored XSS (Lưu trữ - Nghiêm trọng nhất): Mã độc được lưu trữ vĩnh viễn trên máy chủ CSDL. Mọi người dùng truy cập trang web đều bị tấn công tự động mà không cần bấm liên kết lạ.</a:t>
-            </a:r>
-          </a:p>
-          <a:p>
-            <a:pPr>
-              <a:spcBef>
-                <a:spcPts val="600"/>
-              </a:spcBef>
-              <a:defRPr sz="1200" b="0">
-                <a:solidFill>
-                  <a:srgbClr val="334155"/>
-                </a:solidFill>
-                <a:latin typeface="Arial"/>
-              </a:defRPr>
-            </a:pPr>
-            <a:r>
-              <a:t>• Vị trí luồng dữ liệu: Client (Inject) ➔ Web Server (Lưu) ➔ Database (Lưu trữ) ➔ Web Server (Đọc) ➔ Nạn nhân khác (Trình duyệt thực thi).</a:t>
+              <a:t>Đặc điểm kỹ thuật:</a:t>
+            </a:r>
+            <a:br/>
+            <a:r>
+              <a:t>Stored XSS là dạng XSS lưu trữ: mã độc được lưu trên máy chủ CSDL và có thể được kích hoạt tự động mỗi khi người dùng khác truy cập trang nội dung bị nhiễm.</a:t>
             </a:r>
           </a:p>
         </p:txBody>
@@ -9981,7 +9890,7 @@
         </p:nvSpPr>
         <p:spPr>
           <a:xfrm>
-            <a:off x="6263640" y="1234440"/>
+            <a:off x="6263640" y="1280160"/>
             <a:ext cx="5166360" cy="4937760"/>
           </a:xfrm>
           <a:prstGeom prst="roundRect">
@@ -10023,7 +9932,7 @@
               </a:defRPr>
             </a:pPr>
             <a:r>
-              <a:t>Ngữ Cảnh Thực Tế &amp; Lạm Dụng @@Html.Raw</a:t>
+              <a:t>Nguyên Nhân: Sự Lạm Dụng @@Html.Raw()</a:t>
             </a:r>
           </a:p>
           <a:p>
@@ -10039,7 +9948,7 @@
               </a:defRPr>
             </a:pPr>
             <a:r>
-              <a:t>// CONTROLLER LƯU NGUYÊN VĂN NỘI DUNG VÀO CSDL:</a:t>
+              <a:t>// 1. CONTROLLER LƯU NGUYÊN VĂN NỘI DUNG VÀO CSDL:</a:t>
             </a:r>
             <a:br/>
             <a:r>
@@ -10051,7 +9960,7 @@
             </a:r>
             <a:br/>
             <a:r>
-              <a:t>    Content = content // Chứa mã &lt;script&gt; độc hại</a:t>
+              <a:t>    Content = content // Chứa thẻ &lt;script&gt; độc hại</a:t>
             </a:r>
             <a:br/>
             <a:r>
@@ -10064,7 +9973,7 @@
             <a:br/>
             <a:br/>
             <a:r>
-              <a:t>// RAZOR VIEW LẠM DỤNG HTML.RAW ĐỂ HIỂN THỊ:</a:t>
+              <a:t>// 2. RAZOR VIEW HIỂN THỊ DỮ LIỆU THÔ BẰNG HTML.RAW:</a:t>
             </a:r>
             <a:br/>
             <a:r>
@@ -10092,11 +10001,11 @@
               </a:defRPr>
             </a:pPr>
             <a:r>
-              <a:t>Nguyên nhân phát sinh:</a:t>
+              <a:t>Điểm mù kỹ thuật:</a:t>
             </a:r>
             <a:br/>
             <a:r>
-              <a:t>Lập trình viên muốn hỗ trợ định dạng chữ in đậm, xuống dòng cho bài đánh giá nên dùng @Html.Raw(), vô tình cho phép trình duyệt của người dùng thực thi các thẻ HTML/JavaScript nguy hiểm.</a:t>
+              <a:t>@Html.Raw() vô hiệu hóa hoàn toàn cơ chế mã hóa HTML tự động của Razor Engine, ép trình duyệt phải biên dịch và thực thi chuỗi dữ liệu như mã lệnh.</a:t>
             </a:r>
           </a:p>
         </p:txBody>
@@ -10171,7 +10080,7 @@
         <p:spPr>
           <a:xfrm>
             <a:off x="731520" y="256032"/>
-            <a:ext cx="4572000" cy="329184"/>
+            <a:ext cx="4754880" cy="329184"/>
           </a:xfrm>
           <a:prstGeom prst="roundRect">
             <a:avLst/>
@@ -10248,7 +10157,7 @@
               </a:defRPr>
             </a:pPr>
             <a:r>
-              <a:t>2.2. Stored XSS: 4 Kịch Bản Thực Nghiệm Trên Ứng Dụng</a:t>
+              <a:t>2.2. Stored XSS: 3 Kịch Bản Tiêm Mã Độc Thực Nghiệm</a:t>
             </a:r>
           </a:p>
         </p:txBody>
@@ -10313,7 +10222,7 @@
                 <a:gridCol w="2682163"/>
                 <a:gridCol w="2682166"/>
               </a:tblGrid>
-              <a:tr h="969264">
+              <a:tr h="1211580">
                 <a:tc>
                   <a:txBody>
                     <a:bodyPr/>
@@ -10411,14 +10320,14 @@
                   </a:tcPr>
                 </a:tc>
               </a:tr>
-              <a:tr h="969264">
+              <a:tr h="1211580">
                 <a:tc>
                   <a:txBody>
                     <a:bodyPr/>
                     <a:lstStyle/>
                     <a:p>
                       <a:pPr>
-                        <a:defRPr sz="1050">
+                        <a:defRPr sz="1100">
                           <a:solidFill>
                             <a:srgbClr val="0F172A"/>
                           </a:solidFill>
@@ -10426,7 +10335,7 @@
                         </a:defRPr>
                       </a:pPr>
                       <a:r>
-                        <a:t>Payload 1: Đánh cắp Cookie</a:t>
+                        <a:t>Kịch bản 1: Đánh cắp Cookie</a:t>
                       </a:r>
                     </a:p>
                   </a:txBody>
@@ -10442,7 +10351,7 @@
                     <a:lstStyle/>
                     <a:p>
                       <a:pPr>
-                        <a:defRPr sz="1050" b="1">
+                        <a:defRPr sz="1100" b="1">
                           <a:solidFill>
                             <a:srgbClr val="BE123C"/>
                           </a:solidFill>
@@ -10466,7 +10375,7 @@
                     <a:lstStyle/>
                     <a:p>
                       <a:pPr>
-                        <a:defRPr sz="1050">
+                        <a:defRPr sz="1100">
                           <a:solidFill>
                             <a:srgbClr val="334155"/>
                           </a:solidFill>
@@ -10490,7 +10399,7 @@
                     <a:lstStyle/>
                     <a:p>
                       <a:pPr>
-                        <a:defRPr sz="1050">
+                        <a:defRPr sz="1100">
                           <a:solidFill>
                             <a:srgbClr val="334155"/>
                           </a:solidFill>
@@ -10498,7 +10407,7 @@
                         </a:defRPr>
                       </a:pPr>
                       <a:r>
-                        <a:t>Chiếm đoạt Session Token (Cookie Stealing) để mạo danh người dùng.</a:t>
+                        <a:t>Chiếm đoạt Session Token (Cookie Stealing) để mạo danh phiên làm việc.</a:t>
                       </a:r>
                     </a:p>
                   </a:txBody>
@@ -10509,14 +10418,14 @@
                   </a:tcPr>
                 </a:tc>
               </a:tr>
-              <a:tr h="969264">
+              <a:tr h="1211580">
                 <a:tc>
                   <a:txBody>
                     <a:bodyPr/>
                     <a:lstStyle/>
                     <a:p>
                       <a:pPr>
-                        <a:defRPr sz="1050">
+                        <a:defRPr sz="1100">
                           <a:solidFill>
                             <a:srgbClr val="0F172A"/>
                           </a:solidFill>
@@ -10524,7 +10433,7 @@
                         </a:defRPr>
                       </a:pPr>
                       <a:r>
-                        <a:t>Payload 2: Bypass qua thẻ &lt;img&gt;</a:t>
+                        <a:t>Kịch bản 2: Bypass qua thẻ &lt;img&gt;</a:t>
                       </a:r>
                     </a:p>
                   </a:txBody>
@@ -10540,7 +10449,7 @@
                     <a:lstStyle/>
                     <a:p>
                       <a:pPr>
-                        <a:defRPr sz="1050" b="1">
+                        <a:defRPr sz="1100" b="1">
                           <a:solidFill>
                             <a:srgbClr val="BE123C"/>
                           </a:solidFill>
@@ -10564,7 +10473,7 @@
                     <a:lstStyle/>
                     <a:p>
                       <a:pPr>
-                        <a:defRPr sz="1050">
+                        <a:defRPr sz="1100">
                           <a:solidFill>
                             <a:srgbClr val="334155"/>
                           </a:solidFill>
@@ -10588,7 +10497,7 @@
                     <a:lstStyle/>
                     <a:p>
                       <a:pPr>
-                        <a:defRPr sz="1050">
+                        <a:defRPr sz="1100">
                           <a:solidFill>
                             <a:srgbClr val="334155"/>
                           </a:solidFill>
@@ -10607,14 +10516,14 @@
                   </a:tcPr>
                 </a:tc>
               </a:tr>
-              <a:tr h="969264">
+              <a:tr h="1211580">
                 <a:tc>
                   <a:txBody>
                     <a:bodyPr/>
                     <a:lstStyle/>
                     <a:p>
                       <a:pPr>
-                        <a:defRPr sz="1050">
+                        <a:defRPr sz="1100">
                           <a:solidFill>
                             <a:srgbClr val="0F172A"/>
                           </a:solidFill>
@@ -10622,7 +10531,7 @@
                         </a:defRPr>
                       </a:pPr>
                       <a:r>
-                        <a:t>Payload 3: Thay đổi giao diện DOM</a:t>
+                        <a:t>Kịch bản chuẩn: Đánh giá hợp lệ</a:t>
                       </a:r>
                     </a:p>
                   </a:txBody>
@@ -10638,15 +10547,15 @@
                     <a:lstStyle/>
                     <a:p>
                       <a:pPr>
-                        <a:defRPr sz="1050" b="1">
+                        <a:defRPr sz="1100" b="1">
                           <a:solidFill>
-                            <a:srgbClr val="BE123C"/>
+                            <a:srgbClr val="047857"/>
                           </a:solidFill>
                           <a:latin typeface="Courier New"/>
                         </a:defRPr>
                       </a:pPr>
                       <a:r>
-                        <a:t>&lt;script&gt;document.body.innerHTML='...';&lt;/script&gt;</a:t>
+                        <a:t>Dịch vụ tư vấn rất chuyên nghiệp, 5 sao!</a:t>
                       </a:r>
                     </a:p>
                   </a:txBody>
@@ -10662,7 +10571,7 @@
                     <a:lstStyle/>
                     <a:p>
                       <a:pPr>
-                        <a:defRPr sz="1050">
+                        <a:defRPr sz="1100">
                           <a:solidFill>
                             <a:srgbClr val="334155"/>
                           </a:solidFill>
@@ -10670,7 +10579,7 @@
                         </a:defRPr>
                       </a:pPr>
                       <a:r>
-                        <a:t>Ghi đè thuộc tính innerHTML của thẻ body, xóa sạch nội dung gốc của trang.</a:t>
+                        <a:t>Văn bản thuần túy không chứa thẻ HTML hay kịch bản đặc biệt.</a:t>
                       </a:r>
                     </a:p>
                   </a:txBody>
@@ -10686,105 +10595,7 @@
                     <a:lstStyle/>
                     <a:p>
                       <a:pPr>
-                        <a:defRPr sz="1050">
-                          <a:solidFill>
-                            <a:srgbClr val="334155"/>
-                          </a:solidFill>
-                          <a:latin typeface="Arial"/>
-                        </a:defRPr>
-                      </a:pPr>
-                      <a:r>
-                        <a:t>Web Defacement: Chèn form đăng nhập giả mạo lừa người dùng (Phishing).</a:t>
-                      </a:r>
-                    </a:p>
-                  </a:txBody>
-                  <a:tcPr>
-                    <a:solidFill>
-                      <a:srgbClr val="F8FAFC"/>
-                    </a:solidFill>
-                  </a:tcPr>
-                </a:tc>
-              </a:tr>
-              <a:tr h="969264">
-                <a:tc>
-                  <a:txBody>
-                    <a:bodyPr/>
-                    <a:lstStyle/>
-                    <a:p>
-                      <a:pPr>
-                        <a:defRPr sz="1050">
-                          <a:solidFill>
-                            <a:srgbClr val="0F172A"/>
-                          </a:solidFill>
-                          <a:latin typeface="Arial"/>
-                        </a:defRPr>
-                      </a:pPr>
-                      <a:r>
-                        <a:t>Bình luận hợp lệ chuẩn</a:t>
-                      </a:r>
-                    </a:p>
-                  </a:txBody>
-                  <a:tcPr>
-                    <a:solidFill>
-                      <a:srgbClr val="FFFFFF"/>
-                    </a:solidFill>
-                  </a:tcPr>
-                </a:tc>
-                <a:tc>
-                  <a:txBody>
-                    <a:bodyPr/>
-                    <a:lstStyle/>
-                    <a:p>
-                      <a:pPr>
-                        <a:defRPr sz="1050" b="1">
-                          <a:solidFill>
-                            <a:srgbClr val="047857"/>
-                          </a:solidFill>
-                          <a:latin typeface="Courier New"/>
-                        </a:defRPr>
-                      </a:pPr>
-                      <a:r>
-                        <a:t>Dịch vụ tư vấn rất chuyên nghiệp, 5 sao!</a:t>
-                      </a:r>
-                    </a:p>
-                  </a:txBody>
-                  <a:tcPr>
-                    <a:solidFill>
-                      <a:srgbClr val="FFFFFF"/>
-                    </a:solidFill>
-                  </a:tcPr>
-                </a:tc>
-                <a:tc>
-                  <a:txBody>
-                    <a:bodyPr/>
-                    <a:lstStyle/>
-                    <a:p>
-                      <a:pPr>
-                        <a:defRPr sz="1050">
-                          <a:solidFill>
-                            <a:srgbClr val="334155"/>
-                          </a:solidFill>
-                          <a:latin typeface="Arial"/>
-                        </a:defRPr>
-                      </a:pPr>
-                      <a:r>
-                        <a:t>Văn bản thuần túy không chứa thẻ HTML đặc biệt.</a:t>
-                      </a:r>
-                    </a:p>
-                  </a:txBody>
-                  <a:tcPr>
-                    <a:solidFill>
-                      <a:srgbClr val="FFFFFF"/>
-                    </a:solidFill>
-                  </a:tcPr>
-                </a:tc>
-                <a:tc>
-                  <a:txBody>
-                    <a:bodyPr/>
-                    <a:lstStyle/>
-                    <a:p>
-                      <a:pPr>
-                        <a:defRPr sz="1050">
+                        <a:defRPr sz="1100">
                           <a:solidFill>
                             <a:srgbClr val="334155"/>
                           </a:solidFill>
@@ -10798,7 +10609,7 @@
                   </a:txBody>
                   <a:tcPr>
                     <a:solidFill>
-                      <a:srgbClr val="FFFFFF"/>
+                      <a:srgbClr val="F8FAFC"/>
                     </a:solidFill>
                   </a:tcPr>
                 </a:tc>

--- a/Slide_OWASP_Top3_Nhom_WNC_G01.pptx
+++ b/Slide_OWASP_Top3_Nhom_WNC_G01.pptx
@@ -3151,24 +3151,112 @@
       </p:sp>
       <p:sp>
         <p:nvSpPr>
-          <p:cNvPr id="3" name="Rounded Rectangle 2"/>
+          <p:cNvPr id="3" name="TextBox 2"/>
+          <p:cNvSpPr txBox="1"/>
+          <p:nvPr/>
+        </p:nvSpPr>
+        <p:spPr>
+          <a:xfrm>
+            <a:off x="914400" y="731520"/>
+            <a:ext cx="6217920" cy="3291840"/>
+          </a:xfrm>
+          <a:prstGeom prst="rect">
+            <a:avLst/>
+          </a:prstGeom>
+          <a:noFill/>
+        </p:spPr>
+        <p:txBody>
+          <a:bodyPr wrap="square">
+            <a:spAutoFit/>
+          </a:bodyPr>
+          <a:lstStyle/>
+          <a:p>
+            <a:pPr>
+              <a:defRPr sz="1300" b="1">
+                <a:solidFill>
+                  <a:srgbClr val="1D4ED8"/>
+                </a:solidFill>
+                <a:latin typeface="Arial"/>
+              </a:defRPr>
+            </a:pPr>
+            <a:r>
+              <a:t>OWASP TOP 10 • THỰC NGHIỆM AN TOÀN WEB</a:t>
+            </a:r>
+          </a:p>
+          <a:p>
+            <a:pPr>
+              <a:spcBef>
+                <a:spcPts val="800"/>
+              </a:spcBef>
+              <a:defRPr sz="2600" b="1">
+                <a:solidFill>
+                  <a:srgbClr val="0F172A"/>
+                </a:solidFill>
+                <a:latin typeface="Arial"/>
+              </a:defRPr>
+            </a:pPr>
+            <a:r>
+              <a:t>Nghiên Cứu Lỗ Hổng Web &amp; Cơ Chế Phòng Thủ Đa Tầng</a:t>
+            </a:r>
+          </a:p>
+          <a:p>
+            <a:pPr>
+              <a:spcBef>
+                <a:spcPts val="600"/>
+              </a:spcBef>
+              <a:defRPr sz="1600" b="1">
+                <a:solidFill>
+                  <a:srgbClr val="BE123C"/>
+                </a:solidFill>
+                <a:latin typeface="Arial"/>
+              </a:defRPr>
+            </a:pPr>
+            <a:r>
+              <a:t>SQL Injection • Stored XSS • CSRF Attack</a:t>
+            </a:r>
+          </a:p>
+          <a:p>
+            <a:pPr>
+              <a:spcBef>
+                <a:spcPts val="1000"/>
+              </a:spcBef>
+              <a:defRPr sz="1200" b="0">
+                <a:solidFill>
+                  <a:srgbClr val="334155"/>
+                </a:solidFill>
+                <a:latin typeface="Arial"/>
+              </a:defRPr>
+            </a:pPr>
+            <a:r>
+              <a:t>Học phần: Lập trình Web nâng cao  •  GVHD: ThS. Lê Hữu Dũng</a:t>
+            </a:r>
+            <a:br/>
+            <a:r>
+              <a:t>Khoa Công nghệ Thông tin — Trường Đại học Mở Hà Nội (HOU)</a:t>
+            </a:r>
+          </a:p>
+        </p:txBody>
+      </p:sp>
+      <p:sp>
+        <p:nvSpPr>
+          <p:cNvPr id="4" name="Rounded Rectangle 3"/>
           <p:cNvSpPr/>
           <p:nvPr/>
         </p:nvSpPr>
         <p:spPr>
           <a:xfrm>
-            <a:off x="914400" y="640080"/>
-            <a:ext cx="5303520" cy="384048"/>
+            <a:off x="7406640" y="731520"/>
+            <a:ext cx="3840480" cy="3291840"/>
           </a:xfrm>
           <a:prstGeom prst="roundRect">
             <a:avLst/>
           </a:prstGeom>
           <a:solidFill>
-            <a:srgbClr val="EFF6FF"/>
+            <a:srgbClr val="F8FAFC"/>
           </a:solidFill>
           <a:ln>
             <a:solidFill>
-              <a:srgbClr val="BFDBFE"/>
+              <a:srgbClr val="E2E8F0"/>
             </a:solidFill>
           </a:ln>
         </p:spPr>
@@ -3187,11 +3275,11 @@
           </a:fontRef>
         </p:style>
         <p:txBody>
-          <a:bodyPr rtlCol="0" anchor="ctr"/>
+          <a:bodyPr rtlCol="0" anchor="ctr" wrap="square"/>
           <a:lstStyle/>
           <a:p>
             <a:pPr algn="ctr">
-              <a:defRPr sz="1050" b="1">
+              <a:defRPr sz="1200" b="1">
                 <a:solidFill>
                   <a:srgbClr val="1D4ED8"/>
                 </a:solidFill>
@@ -3199,43 +3287,7 @@
               </a:defRPr>
             </a:pPr>
             <a:r>
-              <a:t>TRƯỜNG ĐẠI HỌC MỞ HÀ NỘI — KHOA CÔNG NGHỆ THÔNG TIN</a:t>
-            </a:r>
-          </a:p>
-        </p:txBody>
-      </p:sp>
-      <p:sp>
-        <p:nvSpPr>
-          <p:cNvPr id="4" name="TextBox 3"/>
-          <p:cNvSpPr txBox="1"/>
-          <p:nvPr/>
-        </p:nvSpPr>
-        <p:spPr>
-          <a:xfrm>
-            <a:off x="914400" y="1143000"/>
-            <a:ext cx="10362895" cy="2926080"/>
-          </a:xfrm>
-          <a:prstGeom prst="rect">
-            <a:avLst/>
-          </a:prstGeom>
-          <a:noFill/>
-        </p:spPr>
-        <p:txBody>
-          <a:bodyPr wrap="square">
-            <a:spAutoFit/>
-          </a:bodyPr>
-          <a:lstStyle/>
-          <a:p>
-            <a:pPr>
-              <a:defRPr sz="1500" b="1">
-                <a:solidFill>
-                  <a:srgbClr val="BE123C"/>
-                </a:solidFill>
-                <a:latin typeface="Arial"/>
-              </a:defRPr>
-            </a:pPr>
-            <a:r>
-              <a:t>BÁO CÁO THỰC NGHIỆM AN TOÀN WEB (OWASP TOP 10)</a:t>
+              <a:t>MÔ HÌNH 3 TẦNG &amp; 3 ĐIỂM NGUY CƠ</a:t>
             </a:r>
           </a:p>
           <a:p>
@@ -3243,7 +3295,7 @@
               <a:spcBef>
                 <a:spcPts val="800"/>
               </a:spcBef>
-              <a:defRPr sz="2700" b="1">
+              <a:defRPr sz="1100" b="1">
                 <a:solidFill>
                   <a:srgbClr val="0F172A"/>
                 </a:solidFill>
@@ -3251,11 +3303,23 @@
               </a:defRPr>
             </a:pPr>
             <a:r>
-              <a:t>SQL Injection • Stored XSS • CSRF Attack</a:t>
-            </a:r>
-            <a:br/>
-            <a:r>
-              <a:t>Nghiên Cứu Lỗ Hổng — Thực Nghiệm — Cơ Chế Phòng Thủ</a:t>
+              <a:t>1. Browser / Client DOM</a:t>
+            </a:r>
+          </a:p>
+          <a:p>
+            <a:pPr>
+              <a:spcBef>
+                <a:spcPts val="200"/>
+              </a:spcBef>
+              <a:defRPr sz="1050" b="0">
+                <a:solidFill>
+                  <a:srgbClr val="BE123C"/>
+                </a:solidFill>
+                <a:latin typeface="Arial"/>
+              </a:defRPr>
+            </a:pPr>
+            <a:r>
+              <a:t>   ➔ ⚠️ Nguy cơ: Stored XSS (Đánh cắp Cookie)</a:t>
             </a:r>
           </a:p>
           <a:p>
@@ -3263,15 +3327,63 @@
               <a:spcBef>
                 <a:spcPts val="800"/>
               </a:spcBef>
-              <a:defRPr sz="1350" b="0">
-                <a:solidFill>
-                  <a:srgbClr val="334155"/>
-                </a:solidFill>
-                <a:latin typeface="Arial"/>
-              </a:defRPr>
-            </a:pPr>
-            <a:r>
-              <a:t>Học phần: Lập trình Web nâng cao  •  Giảng viên hướng dẫn: ThS. Lê Hữu Dũng</a:t>
+              <a:defRPr sz="1100" b="1">
+                <a:solidFill>
+                  <a:srgbClr val="0F172A"/>
+                </a:solidFill>
+                <a:latin typeface="Arial"/>
+              </a:defRPr>
+            </a:pPr>
+            <a:r>
+              <a:t>2. Web Server (ASP.NET Core)</a:t>
+            </a:r>
+          </a:p>
+          <a:p>
+            <a:pPr>
+              <a:spcBef>
+                <a:spcPts val="200"/>
+              </a:spcBef>
+              <a:defRPr sz="1050" b="0">
+                <a:solidFill>
+                  <a:srgbClr val="BE123C"/>
+                </a:solidFill>
+                <a:latin typeface="Arial"/>
+              </a:defRPr>
+            </a:pPr>
+            <a:r>
+              <a:t>   ➔ ⚠️ Nguy cơ: CSRF (Mượn quyền giao dịch)</a:t>
+            </a:r>
+          </a:p>
+          <a:p>
+            <a:pPr>
+              <a:spcBef>
+                <a:spcPts val="800"/>
+              </a:spcBef>
+              <a:defRPr sz="1100" b="1">
+                <a:solidFill>
+                  <a:srgbClr val="0F172A"/>
+                </a:solidFill>
+                <a:latin typeface="Arial"/>
+              </a:defRPr>
+            </a:pPr>
+            <a:r>
+              <a:t>3. Database Server (SQL Server 2025)</a:t>
+            </a:r>
+          </a:p>
+          <a:p>
+            <a:pPr>
+              <a:spcBef>
+                <a:spcPts val="200"/>
+              </a:spcBef>
+              <a:defRPr sz="1050" b="0">
+                <a:solidFill>
+                  <a:srgbClr val="BE123C"/>
+                </a:solidFill>
+                <a:latin typeface="Arial"/>
+              </a:defRPr>
+            </a:pPr>
+            <a:r>
+              <a:t>   ➔ ⚠️ Nguy cơ: SQL Injection (Bẻ gãy cú pháp)</a:t>
             </a:r>
           </a:p>
         </p:txBody>
@@ -3660,7 +3772,7 @@
               </a:defRPr>
             </a:pPr>
             <a:r>
-              <a:t>2.3. Stored XSS: Minh Chứng Thực Nghiệm Trực Quan Trên Web UI</a:t>
+              <a:t>2.3. Stored XSS — Minh Chứng Thực Nghiệm Trực Quan Trên Web UI</a:t>
             </a:r>
           </a:p>
         </p:txBody>
@@ -3756,7 +3868,7 @@
               </a:defRPr>
             </a:pPr>
             <a:r>
-              <a:t>Minh chứng đối chứng chức năng Đánh giá: Nhánh dính lỗi kích hoạt popup Alert (Trái) vs Nhánh an toàn mã hóa HTML (Phải)</a:t>
+              <a:t>🔴 Vulnerable: Script lưu CSDL tự động bật popup Alert  vs  🟢 Secure: Razor tự động mã hóa HTML thành chữ an toàn</a:t>
             </a:r>
           </a:p>
         </p:txBody>
@@ -3908,7 +4020,7 @@
               </a:defRPr>
             </a:pPr>
             <a:r>
-              <a:t>2.4. Stored XSS: Minh Chứng Kiểm Thử Qua Chrome DevTools (Cookie &amp; Console)</a:t>
+              <a:t>2.4. Stored XSS — Minh Chứng Kiểm Thử Qua Chrome DevTools (Cookie &amp; Console)</a:t>
             </a:r>
           </a:p>
         </p:txBody>
@@ -4004,7 +4116,7 @@
               </a:defRPr>
             </a:pPr>
             <a:r>
-              <a:t>Mô phỏng Lab: Nhánh vulnerable cấu hình HttpOnly = false để chứng minh JavaScript đọc trộm được Session Cookie</a:t>
+              <a:t>Mô phỏng Lab: Nhánh vulnerable cấu hình HttpOnly = false để minh họa JavaScript đọc trộm Session Cookie</a:t>
             </a:r>
           </a:p>
         </p:txBody>
@@ -4156,7 +4268,7 @@
               </a:defRPr>
             </a:pPr>
             <a:r>
-              <a:t>2.5. Stored XSS: Cơ Chế Phòng Thủ Chuẩn Trong ASP.NET Core</a:t>
+              <a:t>2.5. Stored XSS — Cơ Chế Phòng Thủ Chuẩn Trong ASP.NET Core</a:t>
             </a:r>
           </a:p>
         </p:txBody>
@@ -4239,7 +4351,7 @@
           <a:lstStyle/>
           <a:p>
             <a:pPr algn="ctr">
-              <a:defRPr sz="1500" b="1">
+              <a:defRPr sz="1400" b="1">
                 <a:solidFill>
                   <a:srgbClr val="047857"/>
                 </a:solidFill>
@@ -4247,7 +4359,7 @@
               </a:defRPr>
             </a:pPr>
             <a:r>
-              <a:t>Phòng Thủ Tầng View: Context-Aware Encoding</a:t>
+              <a:t>🟢 SECURE: TỰ ĐỘNG HTML ENCODING</a:t>
             </a:r>
           </a:p>
           <a:p>
@@ -4296,19 +4408,19 @@
               </a:defRPr>
             </a:pPr>
             <a:r>
-              <a:t>Cơ chế chuyển đổi thực thể HTML:</a:t>
-            </a:r>
-            <a:br/>
-            <a:r>
-              <a:t>• Ký tự '&lt;' biến đổi thành &amp;lt;</a:t>
-            </a:r>
-            <a:br/>
-            <a:r>
-              <a:t>• Ký tự '&gt;' biến đổi thành &amp;gt;</a:t>
-            </a:r>
-            <a:br/>
-            <a:r>
-              <a:t>Trình duyệt hiển thị dưới dạng văn bản thuần túy, loại bỏ hoàn toàn khả năng thực thi mã kịch bản.</a:t>
+              <a:t>Cơ chế biến đổi ký tự nhạy cảm:</a:t>
+            </a:r>
+            <a:br/>
+            <a:r>
+              <a:t>• '&lt;' biến đổi thành &amp;lt;</a:t>
+            </a:r>
+            <a:br/>
+            <a:r>
+              <a:t>• '&gt;' biến đổi thành &amp;gt;</a:t>
+            </a:r>
+            <a:br/>
+            <a:r>
+              <a:t>Trình duyệt chỉ hiển thị dưới dạng văn bản thuần, không thực thi script.</a:t>
             </a:r>
           </a:p>
         </p:txBody>
@@ -4355,7 +4467,7 @@
           <a:lstStyle/>
           <a:p>
             <a:pPr algn="ctr">
-              <a:defRPr sz="1500" b="1">
+              <a:defRPr sz="1400" b="1">
                 <a:solidFill>
                   <a:srgbClr val="1D4ED8"/>
                 </a:solidFill>
@@ -4363,13 +4475,13 @@
               </a:defRPr>
             </a:pPr>
             <a:r>
-              <a:t>Phòng Thủ Tầng Cookie &amp; Header (Khuyến Nghị)</a:t>
+              <a:t>CẤU HÌNH COOKIE AN TOÀN (PRODUCTION)</a:t>
             </a:r>
           </a:p>
           <a:p>
             <a:pPr>
               <a:spcBef>
-                <a:spcPts val="600"/>
+                <a:spcPts val="800"/>
               </a:spcBef>
               <a:defRPr sz="1000" b="0">
                 <a:solidFill>
@@ -4379,7 +4491,7 @@
               </a:defRPr>
             </a:pPr>
             <a:r>
-              <a:t>// CẤU HÌNH COOKIE AN TOÀN TRONG SẢN PHẨM THẬT:</a:t>
+              <a:t>// BẢO VỆ COOKIE PHIÊN TRONG SẢN PHẨM THỰC TẾ:</a:t>
             </a:r>
             <a:br/>
             <a:r>
@@ -4409,7 +4521,7 @@
           <a:p>
             <a:pPr>
               <a:spcBef>
-                <a:spcPts val="1000"/>
+                <a:spcPts val="1200"/>
               </a:spcBef>
               <a:defRPr sz="1200" b="0">
                 <a:solidFill>
@@ -4419,11 +4531,11 @@
               </a:defRPr>
             </a:pPr>
             <a:r>
-              <a:t>Chính sách Content Security Policy (CSP Header):</a:t>
-            </a:r>
-            <a:br/>
-            <a:r>
-              <a:t>Thiết lập HTTP Header 'script-src self' ngăn cấm trình duyệt thực thi inline script, tạo thêm lớp bảo vệ vững chắc ngay cả khi có sơ hở ở tầng View.</a:t>
+              <a:t>Chính sách CSP (Content Security Policy):</a:t>
+            </a:r>
+            <a:br/>
+            <a:r>
+              <a:t>Cấu hình HTTP Header 'script-src self' ngăn chặn trình duyệt chạy inline script lạ, tạo thêm lớp bảo vệ kiên cố.</a:t>
             </a:r>
           </a:p>
         </p:txBody>
@@ -4575,7 +4687,7 @@
               </a:defRPr>
             </a:pPr>
             <a:r>
-              <a:t>3.1. CSRF Attack: Bản Chất Kỹ Thuật &amp; Phân Loại OWASP</a:t>
+              <a:t>3.1. CSRF Attack — Cơ Chế Mượn Quyền &amp; Phân Loại Chuẩn OWASP</a:t>
             </a:r>
           </a:p>
         </p:txBody>
@@ -4666,7 +4778,7 @@
               </a:defRPr>
             </a:pPr>
             <a:r>
-              <a:t>Bản Chất Kỹ Thuật Của Tấn Công CSRF</a:t>
+              <a:t>Sơ Đồ Luồng Tấn Công Mượn Quyền (CSRF)</a:t>
             </a:r>
           </a:p>
           <a:p>
@@ -4674,7 +4786,43 @@
               <a:spcBef>
                 <a:spcPts val="800"/>
               </a:spcBef>
-              <a:defRPr sz="1250" b="1">
+              <a:defRPr sz="1200" b="1">
+                <a:solidFill>
+                  <a:srgbClr val="0F172A"/>
+                </a:solidFill>
+                <a:latin typeface="Arial"/>
+              </a:defRPr>
+            </a:pPr>
+            <a:r>
+              <a:t>Victim logged in ➔ Đang có Cookie phiên làm việc hợp lệ</a:t>
+            </a:r>
+          </a:p>
+          <a:p>
+            <a:pPr>
+              <a:spcBef>
+                <a:spcPts val="200"/>
+              </a:spcBef>
+              <a:defRPr sz="1200" b="1">
+                <a:solidFill>
+                  <a:srgbClr val="64748B"/>
+                </a:solidFill>
+                <a:latin typeface="Arial"/>
+              </a:defRPr>
+            </a:pPr>
+            <a:r>
+              <a:t>            │</a:t>
+            </a:r>
+            <a:br/>
+            <a:r>
+              <a:t>            ▼</a:t>
+            </a:r>
+          </a:p>
+          <a:p>
+            <a:pPr>
+              <a:spcBef>
+                <a:spcPts val="200"/>
+              </a:spcBef>
+              <a:defRPr sz="1200" b="1">
                 <a:solidFill>
                   <a:srgbClr val="BE123C"/>
                 </a:solidFill>
@@ -4682,10 +4830,47 @@
               </a:defRPr>
             </a:pPr>
             <a:r>
-              <a:t>• Phân loại chuẩn OWASP: CSRF không phải một mục riêng lẻ trong OWASP Top 10 2021; nó liên quan trực tiếp đến A01:2021 – Broken Access Control và cơ chế xác thực phiên.</a:t>
-            </a:r>
-          </a:p>
-          <a:p>
+              <a:t>Mở Attacker Site ➔ Trang web độc hại kích hoạt POST ngầm</a:t>
+            </a:r>
+          </a:p>
+          <a:p>
+            <a:pPr>
+              <a:spcBef>
+                <a:spcPts val="200"/>
+              </a:spcBef>
+              <a:defRPr sz="1200" b="1">
+                <a:solidFill>
+                  <a:srgbClr val="64748B"/>
+                </a:solidFill>
+                <a:latin typeface="Arial"/>
+              </a:defRPr>
+            </a:pPr>
+            <a:r>
+              <a:t>            │</a:t>
+            </a:r>
+            <a:br/>
+            <a:r>
+              <a:t>            ▼</a:t>
+            </a:r>
+          </a:p>
+          <a:p>
+            <a:pPr>
+              <a:spcBef>
+                <a:spcPts val="200"/>
+              </a:spcBef>
+              <a:defRPr sz="1200" b="1">
+                <a:solidFill>
+                  <a:srgbClr val="BE123C"/>
+                </a:solidFill>
+                <a:latin typeface="Arial"/>
+              </a:defRPr>
+            </a:pPr>
+            <a:r>
+              <a:t>Target Server ➔ Tự động nhận Cookie, thực hiện trừ 20 triệu</a:t>
+            </a:r>
+          </a:p>
+          <a:p>
+            <a:br/>
             <a:pPr>
               <a:spcBef>
                 <a:spcPts val="800"/>
@@ -4698,23 +4883,11 @@
               </a:defRPr>
             </a:pPr>
             <a:r>
-              <a:t>• Cơ chế mượn quyền:</a:t>
-            </a:r>
-            <a:br/>
-            <a:r>
-              <a:t>  1. Nạn nhân có phiên làm việc hợp lệ (Cookie xác thực còn hiệu lực trên trình duyệt).</a:t>
-            </a:r>
-            <a:br/>
-            <a:r>
-              <a:t>  2. Trình duyệt tự động đính kèm Cookie xác thực theo mọi HTTP Request gửi tới ứng dụng mục tiêu.</a:t>
-            </a:r>
-            <a:br/>
-            <a:r>
-              <a:t>  3. Kẻ tấn công lừa nạn nhân truy cập một trang web nguồn gốc chéo (Cross-Origin Attacker Site).</a:t>
-            </a:r>
-            <a:br/>
-            <a:r>
-              <a:t>• Điểm mù: Máy chủ chỉ xác thực Cookie mà không kiểm tra nguồn gốc phát sinh Request.</a:t>
+              <a:t>📌 PHÂN LOẠI CHUẨN OWASP:</a:t>
+            </a:r>
+            <a:br/>
+            <a:r>
+              <a:t>CSRF không phải mục độc lập trong OWASP Top 10 2021; nó liên quan trực tiếp đến A01:2021 – Broken Access Control và cơ chế bảo toàn yêu cầu phiên.</a:t>
             </a:r>
           </a:p>
         </p:txBody>
@@ -4761,7 +4934,7 @@
           <a:lstStyle/>
           <a:p>
             <a:pPr algn="ctr">
-              <a:defRPr sz="1500" b="1">
+              <a:defRPr sz="1400" b="1">
                 <a:solidFill>
                   <a:srgbClr val="BE123C"/>
                 </a:solidFill>
@@ -4769,7 +4942,7 @@
               </a:defRPr>
             </a:pPr>
             <a:r>
-              <a:t>Action Xử Lý Giao Dịch Thiếu Kiểm Soát</a:t>
+              <a:t>🔴 VULNERABLE: ACTION THIẾU TOKEN</a:t>
             </a:r>
           </a:p>
           <a:p>
@@ -4845,7 +5018,11 @@
               </a:defRPr>
             </a:pPr>
             <a:r>
-              <a:t>Khi Action thiếu thuộc tính [ValidateAntiForgeryToken], yêu cầu POST bắt nguồn từ một website khác vẫn được thực thi do trình duyệt tự động kẹp theo Cookie của nạn nhân.</a:t>
+              <a:t>Điểm mù kiểm soát:</a:t>
+            </a:r>
+            <a:br/>
+            <a:r>
+              <a:t>Action thiếu [ValidateAntiForgeryToken], máy chủ chỉ kiểm tra Cookie hợp lệ rồi trừ tiền ngay mà không xác minh yêu cầu xuất phát từ đâu!</a:t>
             </a:r>
           </a:p>
         </p:txBody>
@@ -4997,7 +5174,7 @@
               </a:defRPr>
             </a:pPr>
             <a:r>
-              <a:t>3.2. CSRF Attack: Kịch Bản Khai Thác Qua Biểu Mẫu Ẩn</a:t>
+              <a:t>3.2. CSRF Attack — Kịch Bản Khai Thác Qua Biểu Mẫu Ẩn</a:t>
             </a:r>
           </a:p>
         </p:txBody>
@@ -5160,7 +5337,7 @@
               </a:defRPr>
             </a:pPr>
             <a:r>
-              <a:t>Hậu quả thực tế: Giao dịch chuyển tiền được thực thi hoàn toàn tự động mà không có sự đồng thuận chủ động của người dùng, làm thay đổi số dư ví tài khoản.</a:t>
+              <a:t>Hậu quả thực tế: Giao dịch chuyển tiền được thực thi hoàn toàn tự động mà không có sự đồng thuận chủ động của người dùng, dẫn đến thay đổi số dư ví tài khoản.</a:t>
             </a:r>
           </a:p>
         </p:txBody>
@@ -5312,7 +5489,7 @@
               </a:defRPr>
             </a:pPr>
             <a:r>
-              <a:t>3.3. CSRF Attack: Minh Chứng Thực Nghiệm Trực Quan Trên Web UI</a:t>
+              <a:t>3.3. CSRF Attack — Minh Chứng Thực Nghiệm Trực Quan Trên Web UI</a:t>
             </a:r>
           </a:p>
         </p:txBody>
@@ -5560,7 +5737,7 @@
               </a:defRPr>
             </a:pPr>
             <a:r>
-              <a:t>3.4. CSRF Attack: Minh Chứng Gói Tin Mạng (Chrome DevTools Headers)</a:t>
+              <a:t>3.4. CSRF Attack — Minh Chứng Gói Tin Mạng (Chrome DevTools Headers)</a:t>
             </a:r>
           </a:p>
         </p:txBody>
@@ -5808,7 +5985,7 @@
               </a:defRPr>
             </a:pPr>
             <a:r>
-              <a:t>3.5. CSRF Attack: Cơ Chế Phòng Thủ Bằng Anti-Forgery Token</a:t>
+              <a:t>3.5. CSRF Attack — Cơ Chế Phòng Thủ Bằng Anti-Forgery Token</a:t>
             </a:r>
           </a:p>
         </p:txBody>
@@ -5891,7 +6068,7 @@
           <a:lstStyle/>
           <a:p>
             <a:pPr algn="ctr">
-              <a:defRPr sz="1500" b="1">
+              <a:defRPr sz="1400" b="1">
                 <a:solidFill>
                   <a:srgbClr val="047857"/>
                 </a:solidFill>
@@ -5899,13 +6076,13 @@
               </a:defRPr>
             </a:pPr>
             <a:r>
-              <a:t>Mô Hình Synchronizer Token Pattern</a:t>
+              <a:t>🟢 SECURE: SYNCHRONIZER TOKEN PATTERN</a:t>
             </a:r>
           </a:p>
           <a:p>
             <a:pPr>
               <a:spcBef>
-                <a:spcPts val="800"/>
+                <a:spcPts val="600"/>
               </a:spcBef>
               <a:defRPr sz="950" b="0">
                 <a:solidFill>
@@ -5970,7 +6147,7 @@
           <a:p>
             <a:pPr>
               <a:spcBef>
-                <a:spcPts val="800"/>
+                <a:spcPts val="600"/>
               </a:spcBef>
               <a:defRPr sz="1150" b="0">
                 <a:solidFill>
@@ -5984,7 +6161,7 @@
             </a:r>
             <a:br/>
             <a:r>
-              <a:t>Máy chủ phát hành một cặp token: một lưu trong Cookie và một nhúng vào biểu mẫu. Trang web độc hại bị chặn đọc token bởi chính sách Same-Origin Policy (SOP).</a:t>
+              <a:t>Trang web của hacker ở tên miền khác bị chặn đọc token bí mật bởi chính sách Same-Origin Policy (SOP). Mọi request thiếu token đều bị chặn đứng.</a:t>
             </a:r>
           </a:p>
         </p:txBody>
@@ -6031,7 +6208,7 @@
           <a:lstStyle/>
           <a:p>
             <a:pPr algn="ctr">
-              <a:defRPr sz="1500" b="1">
+              <a:defRPr sz="1400" b="1">
                 <a:solidFill>
                   <a:srgbClr val="1D4ED8"/>
                 </a:solidFill>
@@ -6039,13 +6216,13 @@
               </a:defRPr>
             </a:pPr>
             <a:r>
-              <a:t>Tích Hợp Token Trong Fetch API (Slide Buổi 9)</a:t>
+              <a:t>TÍCH HỢP TOKEN TRONG AJAX FETCH API</a:t>
             </a:r>
           </a:p>
           <a:p>
             <a:pPr>
               <a:spcBef>
-                <a:spcPts val="800"/>
+                <a:spcPts val="600"/>
               </a:spcBef>
               <a:defRPr sz="950" b="0">
                 <a:solidFill>
@@ -6102,7 +6279,7 @@
           <a:p>
             <a:pPr>
               <a:spcBef>
-                <a:spcPts val="800"/>
+                <a:spcPts val="600"/>
               </a:spcBef>
               <a:defRPr sz="1150" b="0">
                 <a:solidFill>
@@ -6268,7 +6445,7 @@
               </a:defRPr>
             </a:pPr>
             <a:r>
-              <a:t>Tổng Kết: Bài Học Kỹ Thuật &amp; Bảng Đối Chiếu Phòng Thủ</a:t>
+              <a:t>Bài Học Rút Ra: Bảng Đối Chiếu 3 Lỗ Hổng &amp; Cơ Chế Phòng Thủ</a:t>
             </a:r>
           </a:p>
         </p:txBody>
@@ -6309,450 +6486,498 @@
           </a:p>
         </p:txBody>
       </p:sp>
-      <p:graphicFrame>
-        <p:nvGraphicFramePr>
-          <p:cNvPr id="6" name="Table 5"/>
-          <p:cNvGraphicFramePr>
-            <a:graphicFrameLocks noGrp="1"/>
-          </p:cNvGraphicFramePr>
-          <p:nvPr/>
-        </p:nvGraphicFramePr>
-        <p:xfrm>
-          <a:off x="731520" y="1371600"/>
-          <a:ext cx="10728655" cy="4754880"/>
-        </p:xfrm>
-        <a:graphic>
-          <a:graphicData uri="http://schemas.openxmlformats.org/drawingml/2006/table">
-            <a:tbl>
-              <a:tblPr firstRow="1" bandRow="1">
-                <a:tableStyleId>{5C22544A-7EE6-4342-B048-85BDC9FD1C3A}</a:tableStyleId>
-              </a:tblPr>
-              <a:tblGrid>
-                <a:gridCol w="2682163"/>
-                <a:gridCol w="2682163"/>
-                <a:gridCol w="2682163"/>
-                <a:gridCol w="2682166"/>
-              </a:tblGrid>
-              <a:tr h="1188720">
-                <a:tc>
-                  <a:txBody>
-                    <a:bodyPr/>
-                    <a:lstStyle/>
-                    <a:p>
-                      <a:pPr>
-                        <a:defRPr b="1" sz="1200">
-                          <a:solidFill>
-                            <a:srgbClr val="FFFFFF"/>
-                          </a:solidFill>
-                          <a:latin typeface="Arial"/>
-                        </a:defRPr>
-                      </a:pPr>
-                      <a:r>
-                        <a:t>Lỗ hổng an ninh</a:t>
-                      </a:r>
-                    </a:p>
-                  </a:txBody>
-                  <a:tcPr>
-                    <a:solidFill>
-                      <a:srgbClr val="1D4ED8"/>
-                    </a:solidFill>
-                  </a:tcPr>
-                </a:tc>
-                <a:tc>
-                  <a:txBody>
-                    <a:bodyPr/>
-                    <a:lstStyle/>
-                    <a:p>
-                      <a:pPr>
-                        <a:defRPr b="1" sz="1200">
-                          <a:solidFill>
-                            <a:srgbClr val="FFFFFF"/>
-                          </a:solidFill>
-                          <a:latin typeface="Arial"/>
-                        </a:defRPr>
-                      </a:pPr>
-                      <a:r>
-                        <a:t>Nguyên nhân cốt lõi</a:t>
-                      </a:r>
-                    </a:p>
-                  </a:txBody>
-                  <a:tcPr>
-                    <a:solidFill>
-                      <a:srgbClr val="1D4ED8"/>
-                    </a:solidFill>
-                  </a:tcPr>
-                </a:tc>
-                <a:tc>
-                  <a:txBody>
-                    <a:bodyPr/>
-                    <a:lstStyle/>
-                    <a:p>
-                      <a:pPr>
-                        <a:defRPr b="1" sz="1200">
-                          <a:solidFill>
-                            <a:srgbClr val="FFFFFF"/>
-                          </a:solidFill>
-                          <a:latin typeface="Arial"/>
-                        </a:defRPr>
-                      </a:pPr>
-                      <a:r>
-                        <a:t>Cơ chế phòng thủ chuẩn</a:t>
-                      </a:r>
-                    </a:p>
-                  </a:txBody>
-                  <a:tcPr>
-                    <a:solidFill>
-                      <a:srgbClr val="1D4ED8"/>
-                    </a:solidFill>
-                  </a:tcPr>
-                </a:tc>
-                <a:tc>
-                  <a:txBody>
-                    <a:bodyPr/>
-                    <a:lstStyle/>
-                    <a:p>
-                      <a:pPr>
-                        <a:defRPr b="1" sz="1200">
-                          <a:solidFill>
-                            <a:srgbClr val="FFFFFF"/>
-                          </a:solidFill>
-                          <a:latin typeface="Arial"/>
-                        </a:defRPr>
-                      </a:pPr>
-                      <a:r>
-                        <a:t>Thành viên phụ trách</a:t>
-                      </a:r>
-                    </a:p>
-                  </a:txBody>
-                  <a:tcPr>
-                    <a:solidFill>
-                      <a:srgbClr val="1D4ED8"/>
-                    </a:solidFill>
-                  </a:tcPr>
-                </a:tc>
-              </a:tr>
-              <a:tr h="1188720">
-                <a:tc>
-                  <a:txBody>
-                    <a:bodyPr/>
-                    <a:lstStyle/>
-                    <a:p>
-                      <a:pPr>
-                        <a:defRPr sz="1100" b="1">
-                          <a:solidFill>
-                            <a:srgbClr val="0F172A"/>
-                          </a:solidFill>
-                          <a:latin typeface="Arial"/>
-                        </a:defRPr>
-                      </a:pPr>
-                      <a:r>
-                        <a:t>SQL Injection</a:t>
-                      </a:r>
-                      <a:br/>
-                      <a:r>
-                        <a:t>(A03:2021)</a:t>
-                      </a:r>
-                    </a:p>
-                  </a:txBody>
-                  <a:tcPr>
-                    <a:solidFill>
-                      <a:srgbClr val="F8FAFC"/>
-                    </a:solidFill>
-                  </a:tcPr>
-                </a:tc>
-                <a:tc>
-                  <a:txBody>
-                    <a:bodyPr/>
-                    <a:lstStyle/>
-                    <a:p>
-                      <a:pPr>
-                        <a:defRPr sz="1100">
-                          <a:solidFill>
-                            <a:srgbClr val="334155"/>
-                          </a:solidFill>
-                          <a:latin typeface="Arial"/>
-                        </a:defRPr>
-                      </a:pPr>
-                      <a:r>
-                        <a:t>Ghép chuỗi đầu vào trực tiếp vào câu lệnh SQL.</a:t>
-                      </a:r>
-                    </a:p>
-                  </a:txBody>
-                  <a:tcPr>
-                    <a:solidFill>
-                      <a:srgbClr val="F8FAFC"/>
-                    </a:solidFill>
-                  </a:tcPr>
-                </a:tc>
-                <a:tc>
-                  <a:txBody>
-                    <a:bodyPr/>
-                    <a:lstStyle/>
-                    <a:p>
-                      <a:pPr>
-                        <a:defRPr sz="1100" b="1">
-                          <a:solidFill>
-                            <a:srgbClr val="047857"/>
-                          </a:solidFill>
-                          <a:latin typeface="Arial"/>
-                        </a:defRPr>
-                      </a:pPr>
-                      <a:r>
-                        <a:t>Parameterized Query (EF Core LINQ) + Nguyên tắc đặc quyền tối thiểu.</a:t>
-                      </a:r>
-                    </a:p>
-                  </a:txBody>
-                  <a:tcPr>
-                    <a:solidFill>
-                      <a:srgbClr val="F8FAFC"/>
-                    </a:solidFill>
-                  </a:tcPr>
-                </a:tc>
-                <a:tc>
-                  <a:txBody>
-                    <a:bodyPr/>
-                    <a:lstStyle/>
-                    <a:p>
-                      <a:pPr>
-                        <a:defRPr sz="1100">
-                          <a:solidFill>
-                            <a:srgbClr val="0F172A"/>
-                          </a:solidFill>
-                          <a:latin typeface="Arial"/>
-                        </a:defRPr>
-                      </a:pPr>
-                      <a:r>
-                        <a:t>Nguyễn Danh Học</a:t>
-                      </a:r>
-                      <a:br/>
-                      <a:r>
-                        <a:t>(23A1001D0158)</a:t>
-                      </a:r>
-                    </a:p>
-                  </a:txBody>
-                  <a:tcPr>
-                    <a:solidFill>
-                      <a:srgbClr val="F8FAFC"/>
-                    </a:solidFill>
-                  </a:tcPr>
-                </a:tc>
-              </a:tr>
-              <a:tr h="1188720">
-                <a:tc>
-                  <a:txBody>
-                    <a:bodyPr/>
-                    <a:lstStyle/>
-                    <a:p>
-                      <a:pPr>
-                        <a:defRPr sz="1100" b="1">
-                          <a:solidFill>
-                            <a:srgbClr val="0F172A"/>
-                          </a:solidFill>
-                          <a:latin typeface="Arial"/>
-                        </a:defRPr>
-                      </a:pPr>
-                      <a:r>
-                        <a:t>Stored XSS</a:t>
-                      </a:r>
-                      <a:br/>
-                      <a:r>
-                        <a:t>(A03:2021)</a:t>
-                      </a:r>
-                    </a:p>
-                  </a:txBody>
-                  <a:tcPr>
-                    <a:solidFill>
-                      <a:srgbClr val="FFFFFF"/>
-                    </a:solidFill>
-                  </a:tcPr>
-                </a:tc>
-                <a:tc>
-                  <a:txBody>
-                    <a:bodyPr/>
-                    <a:lstStyle/>
-                    <a:p>
-                      <a:pPr>
-                        <a:defRPr sz="1100">
-                          <a:solidFill>
-                            <a:srgbClr val="334155"/>
-                          </a:solidFill>
-                          <a:latin typeface="Arial"/>
-                        </a:defRPr>
-                      </a:pPr>
-                      <a:r>
-                        <a:t>Lưu trữ script độc hại vào CSDL &amp; render thô bằng @Html.Raw().</a:t>
-                      </a:r>
-                    </a:p>
-                  </a:txBody>
-                  <a:tcPr>
-                    <a:solidFill>
-                      <a:srgbClr val="FFFFFF"/>
-                    </a:solidFill>
-                  </a:tcPr>
-                </a:tc>
-                <a:tc>
-                  <a:txBody>
-                    <a:bodyPr/>
-                    <a:lstStyle/>
-                    <a:p>
-                      <a:pPr>
-                        <a:defRPr sz="1100" b="1">
-                          <a:solidFill>
-                            <a:srgbClr val="047857"/>
-                          </a:solidFill>
-                          <a:latin typeface="Arial"/>
-                        </a:defRPr>
-                      </a:pPr>
-                      <a:r>
-                        <a:t>Context-Aware HTML Encoding (@model.Property) + HttpOnly Cookie.</a:t>
-                      </a:r>
-                    </a:p>
-                  </a:txBody>
-                  <a:tcPr>
-                    <a:solidFill>
-                      <a:srgbClr val="FFFFFF"/>
-                    </a:solidFill>
-                  </a:tcPr>
-                </a:tc>
-                <a:tc>
-                  <a:txBody>
-                    <a:bodyPr/>
-                    <a:lstStyle/>
-                    <a:p>
-                      <a:pPr>
-                        <a:defRPr sz="1100">
-                          <a:solidFill>
-                            <a:srgbClr val="0F172A"/>
-                          </a:solidFill>
-                          <a:latin typeface="Arial"/>
-                        </a:defRPr>
-                      </a:pPr>
-                      <a:r>
-                        <a:t>Nguyễn Thanh Bình</a:t>
-                      </a:r>
-                      <a:br/>
-                      <a:r>
-                        <a:t>(23A1001D0041)</a:t>
-                      </a:r>
-                    </a:p>
-                  </a:txBody>
-                  <a:tcPr>
-                    <a:solidFill>
-                      <a:srgbClr val="FFFFFF"/>
-                    </a:solidFill>
-                  </a:tcPr>
-                </a:tc>
-              </a:tr>
-              <a:tr h="1188720">
-                <a:tc>
-                  <a:txBody>
-                    <a:bodyPr/>
-                    <a:lstStyle/>
-                    <a:p>
-                      <a:pPr>
-                        <a:defRPr sz="1100" b="1">
-                          <a:solidFill>
-                            <a:srgbClr val="0F172A"/>
-                          </a:solidFill>
-                          <a:latin typeface="Arial"/>
-                        </a:defRPr>
-                      </a:pPr>
-                      <a:r>
-                        <a:t>CSRF Attack</a:t>
-                      </a:r>
-                      <a:br/>
-                      <a:r>
-                        <a:t>(A01:2021 / Session)</a:t>
-                      </a:r>
-                    </a:p>
-                  </a:txBody>
-                  <a:tcPr>
-                    <a:solidFill>
-                      <a:srgbClr val="F8FAFC"/>
-                    </a:solidFill>
-                  </a:tcPr>
-                </a:tc>
-                <a:tc>
-                  <a:txBody>
-                    <a:bodyPr/>
-                    <a:lstStyle/>
-                    <a:p>
-                      <a:pPr>
-                        <a:defRPr sz="1100">
-                          <a:solidFill>
-                            <a:srgbClr val="334155"/>
-                          </a:solidFill>
-                          <a:latin typeface="Arial"/>
-                        </a:defRPr>
-                      </a:pPr>
-                      <a:r>
-                        <a:t>Máy chủ chỉ kiểm tra Cookie mà không xác thực nguồn gốc Request.</a:t>
-                      </a:r>
-                    </a:p>
-                  </a:txBody>
-                  <a:tcPr>
-                    <a:solidFill>
-                      <a:srgbClr val="F8FAFC"/>
-                    </a:solidFill>
-                  </a:tcPr>
-                </a:tc>
-                <a:tc>
-                  <a:txBody>
-                    <a:bodyPr/>
-                    <a:lstStyle/>
-                    <a:p>
-                      <a:pPr>
-                        <a:defRPr sz="1100" b="1">
-                          <a:solidFill>
-                            <a:srgbClr val="047857"/>
-                          </a:solidFill>
-                          <a:latin typeface="Arial"/>
-                        </a:defRPr>
-                      </a:pPr>
-                      <a:r>
-                        <a:t>Synchronizer Token Pattern (@Html.AntiForgeryToken() / Header).</a:t>
-                      </a:r>
-                    </a:p>
-                  </a:txBody>
-                  <a:tcPr>
-                    <a:solidFill>
-                      <a:srgbClr val="F8FAFC"/>
-                    </a:solidFill>
-                  </a:tcPr>
-                </a:tc>
-                <a:tc>
-                  <a:txBody>
-                    <a:bodyPr/>
-                    <a:lstStyle/>
-                    <a:p>
-                      <a:pPr>
-                        <a:defRPr sz="1100">
-                          <a:solidFill>
-                            <a:srgbClr val="0F172A"/>
-                          </a:solidFill>
-                          <a:latin typeface="Arial"/>
-                        </a:defRPr>
-                      </a:pPr>
-                      <a:r>
-                        <a:t>Nguyễn Minh Cường</a:t>
-                      </a:r>
-                      <a:br/>
-                      <a:r>
-                        <a:t>(23A1001D0058)</a:t>
-                      </a:r>
-                    </a:p>
-                  </a:txBody>
-                  <a:tcPr>
-                    <a:solidFill>
-                      <a:srgbClr val="F8FAFC"/>
-                    </a:solidFill>
-                  </a:tcPr>
-                </a:tc>
-              </a:tr>
-            </a:tbl>
-          </a:graphicData>
-        </a:graphic>
-      </p:graphicFrame>
+      <p:sp>
+        <p:nvSpPr>
+          <p:cNvPr id="6" name="Rounded Rectangle 5"/>
+          <p:cNvSpPr/>
+          <p:nvPr/>
+        </p:nvSpPr>
+        <p:spPr>
+          <a:xfrm>
+            <a:off x="731520" y="1280160"/>
+            <a:ext cx="3328416" cy="4846320"/>
+          </a:xfrm>
+          <a:prstGeom prst="roundRect">
+            <a:avLst/>
+          </a:prstGeom>
+          <a:solidFill>
+            <a:srgbClr val="EFF6FF"/>
+          </a:solidFill>
+          <a:ln>
+            <a:solidFill>
+              <a:srgbClr val="BFDBFE"/>
+            </a:solidFill>
+          </a:ln>
+        </p:spPr>
+        <p:style>
+          <a:lnRef idx="1">
+            <a:schemeClr val="accent1"/>
+          </a:lnRef>
+          <a:fillRef idx="3">
+            <a:schemeClr val="accent1"/>
+          </a:fillRef>
+          <a:effectRef idx="2">
+            <a:schemeClr val="accent1"/>
+          </a:effectRef>
+          <a:fontRef idx="minor">
+            <a:schemeClr val="lt1"/>
+          </a:fontRef>
+        </p:style>
+        <p:txBody>
+          <a:bodyPr rtlCol="0" anchor="ctr"/>
+          <a:lstStyle/>
+          <a:p>
+            <a:pPr algn="ctr">
+              <a:defRPr sz="1500" b="1">
+                <a:solidFill>
+                  <a:srgbClr val="1D4ED8"/>
+                </a:solidFill>
+                <a:latin typeface="Arial"/>
+              </a:defRPr>
+            </a:pPr>
+            <a:r>
+              <a:t>SQL INJECTION</a:t>
+            </a:r>
+          </a:p>
+          <a:p>
+            <a:pPr>
+              <a:spcBef>
+                <a:spcPts val="1000"/>
+              </a:spcBef>
+              <a:defRPr sz="1200" b="1">
+                <a:solidFill>
+                  <a:srgbClr val="0F172A"/>
+                </a:solidFill>
+                <a:latin typeface="Arial"/>
+              </a:defRPr>
+            </a:pPr>
+            <a:r>
+              <a:t>Nguyên nhân cốt lõi:</a:t>
+            </a:r>
+          </a:p>
+          <a:p>
+            <a:pPr>
+              <a:spcBef>
+                <a:spcPts val="200"/>
+              </a:spcBef>
+              <a:defRPr sz="1200" b="0">
+                <a:solidFill>
+                  <a:srgbClr val="BE123C"/>
+                </a:solidFill>
+                <a:latin typeface="Arial"/>
+              </a:defRPr>
+            </a:pPr>
+            <a:r>
+              <a:t>Ghép chuỗi SQL trực tiếp từ tham số người dùng.</a:t>
+            </a:r>
+          </a:p>
+          <a:p>
+            <a:pPr>
+              <a:spcBef>
+                <a:spcPts val="600"/>
+              </a:spcBef>
+              <a:defRPr sz="1400" b="1">
+                <a:solidFill>
+                  <a:srgbClr val="64748B"/>
+                </a:solidFill>
+                <a:latin typeface="Arial"/>
+              </a:defRPr>
+            </a:pPr>
+            <a:r>
+              <a:t>      │</a:t>
+            </a:r>
+            <a:br/>
+            <a:r>
+              <a:t>      ▼</a:t>
+            </a:r>
+          </a:p>
+          <a:p>
+            <a:pPr>
+              <a:spcBef>
+                <a:spcPts val="600"/>
+              </a:spcBef>
+              <a:defRPr sz="1200" b="1">
+                <a:solidFill>
+                  <a:srgbClr val="0F172A"/>
+                </a:solidFill>
+                <a:latin typeface="Arial"/>
+              </a:defRPr>
+            </a:pPr>
+            <a:r>
+              <a:t>Cơ chế phòng thủ:</a:t>
+            </a:r>
+          </a:p>
+          <a:p>
+            <a:pPr>
+              <a:spcBef>
+                <a:spcPts val="200"/>
+              </a:spcBef>
+              <a:defRPr sz="1200" b="1">
+                <a:solidFill>
+                  <a:srgbClr val="047857"/>
+                </a:solidFill>
+                <a:latin typeface="Arial"/>
+              </a:defRPr>
+            </a:pPr>
+            <a:r>
+              <a:t>Parameterized Query</a:t>
+            </a:r>
+            <a:br/>
+            <a:r>
+              <a:t>(Entity Framework Core LINQ)</a:t>
+            </a:r>
+          </a:p>
+          <a:p>
+            <a:br/>
+            <a:pPr>
+              <a:spcBef>
+                <a:spcPts val="1400"/>
+              </a:spcBef>
+              <a:defRPr sz="1100" b="0">
+                <a:solidFill>
+                  <a:srgbClr val="64748B"/>
+                </a:solidFill>
+                <a:latin typeface="Arial"/>
+              </a:defRPr>
+            </a:pPr>
+            <a:r>
+              <a:t>Phụ trách: Nguyễn Danh Học</a:t>
+            </a:r>
+            <a:br/>
+            <a:r>
+              <a:t>MSV: 23A1001D0158</a:t>
+            </a:r>
+          </a:p>
+        </p:txBody>
+      </p:sp>
+      <p:sp>
+        <p:nvSpPr>
+          <p:cNvPr id="7" name="Rounded Rectangle 6"/>
+          <p:cNvSpPr/>
+          <p:nvPr/>
+        </p:nvSpPr>
+        <p:spPr>
+          <a:xfrm>
+            <a:off x="4416552" y="1280160"/>
+            <a:ext cx="3328416" cy="4846320"/>
+          </a:xfrm>
+          <a:prstGeom prst="roundRect">
+            <a:avLst/>
+          </a:prstGeom>
+          <a:solidFill>
+            <a:srgbClr val="FFF1F2"/>
+          </a:solidFill>
+          <a:ln>
+            <a:solidFill>
+              <a:srgbClr val="FECDD3"/>
+            </a:solidFill>
+          </a:ln>
+        </p:spPr>
+        <p:style>
+          <a:lnRef idx="1">
+            <a:schemeClr val="accent1"/>
+          </a:lnRef>
+          <a:fillRef idx="3">
+            <a:schemeClr val="accent1"/>
+          </a:fillRef>
+          <a:effectRef idx="2">
+            <a:schemeClr val="accent1"/>
+          </a:effectRef>
+          <a:fontRef idx="minor">
+            <a:schemeClr val="lt1"/>
+          </a:fontRef>
+        </p:style>
+        <p:txBody>
+          <a:bodyPr rtlCol="0" anchor="ctr"/>
+          <a:lstStyle/>
+          <a:p>
+            <a:pPr algn="ctr">
+              <a:defRPr sz="1500" b="1">
+                <a:solidFill>
+                  <a:srgbClr val="BE123C"/>
+                </a:solidFill>
+                <a:latin typeface="Arial"/>
+              </a:defRPr>
+            </a:pPr>
+            <a:r>
+              <a:t>STORED XSS</a:t>
+            </a:r>
+          </a:p>
+          <a:p>
+            <a:pPr>
+              <a:spcBef>
+                <a:spcPts val="1000"/>
+              </a:spcBef>
+              <a:defRPr sz="1200" b="1">
+                <a:solidFill>
+                  <a:srgbClr val="0F172A"/>
+                </a:solidFill>
+                <a:latin typeface="Arial"/>
+              </a:defRPr>
+            </a:pPr>
+            <a:r>
+              <a:t>Nguyên nhân cốt lõi:</a:t>
+            </a:r>
+          </a:p>
+          <a:p>
+            <a:pPr>
+              <a:spcBef>
+                <a:spcPts val="200"/>
+              </a:spcBef>
+              <a:defRPr sz="1200" b="0">
+                <a:solidFill>
+                  <a:srgbClr val="BE123C"/>
+                </a:solidFill>
+                <a:latin typeface="Arial"/>
+              </a:defRPr>
+            </a:pPr>
+            <a:r>
+              <a:t>Lưu script thô vào CSDL &amp; render bằng @Html.Raw().</a:t>
+            </a:r>
+          </a:p>
+          <a:p>
+            <a:pPr>
+              <a:spcBef>
+                <a:spcPts val="600"/>
+              </a:spcBef>
+              <a:defRPr sz="1400" b="1">
+                <a:solidFill>
+                  <a:srgbClr val="64748B"/>
+                </a:solidFill>
+                <a:latin typeface="Arial"/>
+              </a:defRPr>
+            </a:pPr>
+            <a:r>
+              <a:t>      │</a:t>
+            </a:r>
+            <a:br/>
+            <a:r>
+              <a:t>      ▼</a:t>
+            </a:r>
+          </a:p>
+          <a:p>
+            <a:pPr>
+              <a:spcBef>
+                <a:spcPts val="600"/>
+              </a:spcBef>
+              <a:defRPr sz="1200" b="1">
+                <a:solidFill>
+                  <a:srgbClr val="0F172A"/>
+                </a:solidFill>
+                <a:latin typeface="Arial"/>
+              </a:defRPr>
+            </a:pPr>
+            <a:r>
+              <a:t>Cơ chế phòng thủ:</a:t>
+            </a:r>
+          </a:p>
+          <a:p>
+            <a:pPr>
+              <a:spcBef>
+                <a:spcPts val="200"/>
+              </a:spcBef>
+              <a:defRPr sz="1200" b="1">
+                <a:solidFill>
+                  <a:srgbClr val="047857"/>
+                </a:solidFill>
+                <a:latin typeface="Arial"/>
+              </a:defRPr>
+            </a:pPr>
+            <a:r>
+              <a:t>Context-Aware HTML Encoding</a:t>
+            </a:r>
+            <a:br/>
+            <a:r>
+              <a:t>(@comment.Content + HttpOnly)</a:t>
+            </a:r>
+          </a:p>
+          <a:p>
+            <a:br/>
+            <a:pPr>
+              <a:spcBef>
+                <a:spcPts val="1400"/>
+              </a:spcBef>
+              <a:defRPr sz="1100" b="0">
+                <a:solidFill>
+                  <a:srgbClr val="64748B"/>
+                </a:solidFill>
+                <a:latin typeface="Arial"/>
+              </a:defRPr>
+            </a:pPr>
+            <a:r>
+              <a:t>Phụ trách: Nguyễn Thanh Bình</a:t>
+            </a:r>
+            <a:br/>
+            <a:r>
+              <a:t>MSV: 23A1001D0041</a:t>
+            </a:r>
+          </a:p>
+        </p:txBody>
+      </p:sp>
+      <p:sp>
+        <p:nvSpPr>
+          <p:cNvPr id="8" name="Rounded Rectangle 7"/>
+          <p:cNvSpPr/>
+          <p:nvPr/>
+        </p:nvSpPr>
+        <p:spPr>
+          <a:xfrm>
+            <a:off x="8101584" y="1280160"/>
+            <a:ext cx="3328416" cy="4846320"/>
+          </a:xfrm>
+          <a:prstGeom prst="roundRect">
+            <a:avLst/>
+          </a:prstGeom>
+          <a:solidFill>
+            <a:srgbClr val="ECFDF5"/>
+          </a:solidFill>
+          <a:ln>
+            <a:solidFill>
+              <a:srgbClr val="A7F3D0"/>
+            </a:solidFill>
+          </a:ln>
+        </p:spPr>
+        <p:style>
+          <a:lnRef idx="1">
+            <a:schemeClr val="accent1"/>
+          </a:lnRef>
+          <a:fillRef idx="3">
+            <a:schemeClr val="accent1"/>
+          </a:fillRef>
+          <a:effectRef idx="2">
+            <a:schemeClr val="accent1"/>
+          </a:effectRef>
+          <a:fontRef idx="minor">
+            <a:schemeClr val="lt1"/>
+          </a:fontRef>
+        </p:style>
+        <p:txBody>
+          <a:bodyPr rtlCol="0" anchor="ctr"/>
+          <a:lstStyle/>
+          <a:p>
+            <a:pPr algn="ctr">
+              <a:defRPr sz="1500" b="1">
+                <a:solidFill>
+                  <a:srgbClr val="047857"/>
+                </a:solidFill>
+                <a:latin typeface="Arial"/>
+              </a:defRPr>
+            </a:pPr>
+            <a:r>
+              <a:t>CSRF ATTACK</a:t>
+            </a:r>
+          </a:p>
+          <a:p>
+            <a:pPr>
+              <a:spcBef>
+                <a:spcPts val="1000"/>
+              </a:spcBef>
+              <a:defRPr sz="1200" b="1">
+                <a:solidFill>
+                  <a:srgbClr val="0F172A"/>
+                </a:solidFill>
+                <a:latin typeface="Arial"/>
+              </a:defRPr>
+            </a:pPr>
+            <a:r>
+              <a:t>Nguyên nhân cốt lõi:</a:t>
+            </a:r>
+          </a:p>
+          <a:p>
+            <a:pPr>
+              <a:spcBef>
+                <a:spcPts val="200"/>
+              </a:spcBef>
+              <a:defRPr sz="1200" b="0">
+                <a:solidFill>
+                  <a:srgbClr val="BE123C"/>
+                </a:solidFill>
+                <a:latin typeface="Arial"/>
+              </a:defRPr>
+            </a:pPr>
+            <a:r>
+              <a:t>Chỉ kiểm tra Cookie mà thiếu xác thực nguồn gốc Request.</a:t>
+            </a:r>
+          </a:p>
+          <a:p>
+            <a:pPr>
+              <a:spcBef>
+                <a:spcPts val="600"/>
+              </a:spcBef>
+              <a:defRPr sz="1400" b="1">
+                <a:solidFill>
+                  <a:srgbClr val="64748B"/>
+                </a:solidFill>
+                <a:latin typeface="Arial"/>
+              </a:defRPr>
+            </a:pPr>
+            <a:r>
+              <a:t>      │</a:t>
+            </a:r>
+            <a:br/>
+            <a:r>
+              <a:t>      ▼</a:t>
+            </a:r>
+          </a:p>
+          <a:p>
+            <a:pPr>
+              <a:spcBef>
+                <a:spcPts val="600"/>
+              </a:spcBef>
+              <a:defRPr sz="1200" b="1">
+                <a:solidFill>
+                  <a:srgbClr val="0F172A"/>
+                </a:solidFill>
+                <a:latin typeface="Arial"/>
+              </a:defRPr>
+            </a:pPr>
+            <a:r>
+              <a:t>Cơ chế phòng thủ:</a:t>
+            </a:r>
+          </a:p>
+          <a:p>
+            <a:pPr>
+              <a:spcBef>
+                <a:spcPts val="200"/>
+              </a:spcBef>
+              <a:defRPr sz="1200" b="1">
+                <a:solidFill>
+                  <a:srgbClr val="047857"/>
+                </a:solidFill>
+                <a:latin typeface="Arial"/>
+              </a:defRPr>
+            </a:pPr>
+            <a:r>
+              <a:t>Synchronizer Token Pattern</a:t>
+            </a:r>
+            <a:br/>
+            <a:r>
+              <a:t>(@Html.AntiForgeryToken)</a:t>
+            </a:r>
+          </a:p>
+          <a:p>
+            <a:br/>
+            <a:pPr>
+              <a:spcBef>
+                <a:spcPts val="1400"/>
+              </a:spcBef>
+              <a:defRPr sz="1100" b="0">
+                <a:solidFill>
+                  <a:srgbClr val="64748B"/>
+                </a:solidFill>
+                <a:latin typeface="Arial"/>
+              </a:defRPr>
+            </a:pPr>
+            <a:r>
+              <a:t>Phụ trách: Nguyễn Minh Cường</a:t>
+            </a:r>
+            <a:br/>
+            <a:r>
+              <a:t>MSV: 23A1001D0058</a:t>
+            </a:r>
+          </a:p>
+        </p:txBody>
+      </p:sp>
     </p:spTree>
   </p:cSld>
   <p:clrMapOvr>
@@ -6900,7 +7125,7 @@
               </a:defRPr>
             </a:pPr>
             <a:r>
-              <a:t>Kết Luận Báo Cáo Thực Nghiệm OWASP Top 10</a:t>
+              <a:t>Kết Luận Thực Nghiệm &amp; Q&amp;A</a:t>
             </a:r>
           </a:p>
         </p:txBody>
@@ -6991,7 +7216,7 @@
               </a:defRPr>
             </a:pPr>
             <a:r>
-              <a:t>KẾT LUẬN &amp; CAM KẾT CHUẨN BẢO MẬT (NHÓM WNC.G01)</a:t>
+              <a:t>TỔNG KẾT: TỪ KHAI THÁC THỰC NGHIỆM ĐẾN PHÒNG THỦ ĐA TẦNG</a:t>
             </a:r>
           </a:p>
           <a:p>
@@ -6999,7 +7224,23 @@
               <a:spcBef>
                 <a:spcPts val="1400"/>
               </a:spcBef>
-              <a:defRPr sz="1300" b="0">
+              <a:defRPr sz="1300" b="1">
+                <a:solidFill>
+                  <a:srgbClr val="BE123C"/>
+                </a:solidFill>
+                <a:latin typeface="Arial"/>
+              </a:defRPr>
+            </a:pPr>
+            <a:r>
+              <a:t>01 — Tái lập thành công lỗ hổng:</a:t>
+            </a:r>
+          </a:p>
+          <a:p>
+            <a:pPr>
+              <a:spcBef>
+                <a:spcPts val="200"/>
+              </a:spcBef>
+              <a:defRPr sz="1250" b="0">
                 <a:solidFill>
                   <a:srgbClr val="334155"/>
                 </a:solidFill>
@@ -7007,7 +7248,7 @@
               </a:defRPr>
             </a:pPr>
             <a:r>
-              <a:t>1. Thực nghiệm trực quan: Nhóm đã chứng minh rõ cơ chế khai thác và mức độ rủi ro của từng lỗ hổng trên cả 3 tầng: Giao diện Web, Gói tin mạng (Chrome DevTools) và Cơ sở dữ liệu (SQL Server 2025).</a:t>
+              <a:t>Nhóm đã biểu diễn thành công kịch bản tấn công trên 3 bề mặt: Giao diện Web, Gói tin mạng (Chrome DevTools) và CSDL SQL Server 2025.</a:t>
             </a:r>
           </a:p>
           <a:p>
@@ -7015,7 +7256,23 @@
               <a:spcBef>
                 <a:spcPts val="1200"/>
               </a:spcBef>
-              <a:defRPr sz="1300" b="0">
+              <a:defRPr sz="1300" b="1">
+                <a:solidFill>
+                  <a:srgbClr val="047857"/>
+                </a:solidFill>
+                <a:latin typeface="Arial"/>
+              </a:defRPr>
+            </a:pPr>
+            <a:r>
+              <a:t>02 — Kiểm chứng giải pháp phòng thủ triệt để:</a:t>
+            </a:r>
+          </a:p>
+          <a:p>
+            <a:pPr>
+              <a:spcBef>
+                <a:spcPts val="200"/>
+              </a:spcBef>
+              <a:defRPr sz="1250" b="0">
                 <a:solidFill>
                   <a:srgbClr val="334155"/>
                 </a:solidFill>
@@ -7023,7 +7280,7 @@
               </a:defRPr>
             </a:pPr>
             <a:r>
-              <a:t>2. Phòng thủ đa tầng (Security View): Các cơ chế phòng thủ (EF Core Parameterized, Razor HTML Encoding, Anti-Forgery Token) được tích hợp trực tiếp vào kiến trúc nền tảng của Đồ án BTL Website Tư Vấn Trực Tuyến.</a:t>
+              <a:t>Áp dụng Parameterized Query, HTML Encoding và Anti-Forgery Token chặn đứng 100% các vector tấn công.</a:t>
             </a:r>
           </a:p>
           <a:p>
@@ -7031,24 +7288,44 @@
               <a:spcBef>
                 <a:spcPts val="1200"/>
               </a:spcBef>
-              <a:defRPr sz="1300" b="0">
-                <a:solidFill>
-                  <a:srgbClr val="334155"/>
-                </a:solidFill>
-                <a:latin typeface="Arial"/>
-              </a:defRPr>
-            </a:pPr>
-            <a:r>
-              <a:t>3. Đóng góp đồng đều: Cả 3 thành viên đều trực tiếp xây dựng mã nguồn, kiểm thử đối chứng và phân tích chuyên môn độc lập.</a:t>
-            </a:r>
-          </a:p>
-          <a:p>
-            <a:br/>
+              <a:defRPr sz="1300" b="1">
+                <a:solidFill>
+                  <a:srgbClr val="1D4ED8"/>
+                </a:solidFill>
+                <a:latin typeface="Arial"/>
+              </a:defRPr>
+            </a:pPr>
+            <a:r>
+              <a:t>03 — Triết lý an ninh cốt lõi (Security Principle):</a:t>
+            </a:r>
+          </a:p>
+          <a:p>
             <a:pPr>
               <a:spcBef>
-                <a:spcPts val="2400"/>
+                <a:spcPts val="400"/>
               </a:spcBef>
-              <a:defRPr sz="1500" b="1">
+              <a:defRPr sz="1250" b="1">
+                <a:solidFill>
+                  <a:srgbClr val="0F172A"/>
+                </a:solidFill>
+                <a:latin typeface="Arial"/>
+              </a:defRPr>
+            </a:pPr>
+            <a:r>
+              <a:t>• Never trust user-controlled input (Không bao giờ tin tưởng dữ liệu đầu vào).</a:t>
+            </a:r>
+            <a:br/>
+            <a:r>
+              <a:t>• Separate data from executable instructions (Luôn phân tách dữ liệu khỏi cú pháp lệnh).</a:t>
+            </a:r>
+          </a:p>
+          <a:p>
+            <a:br/>
+            <a:pPr>
+              <a:spcBef>
+                <a:spcPts val="2000"/>
+              </a:spcBef>
+              <a:defRPr sz="1600" b="1">
                 <a:solidFill>
                   <a:srgbClr val="BE123C"/>
                 </a:solidFill>
@@ -7056,7 +7333,7 @@
               </a:defRPr>
             </a:pPr>
             <a:r>
-              <a:t>Kính chúc thầy sức khỏe và công tác tốt. Nhóm WNC.G01 xin trân trọng cảm ơn!</a:t>
+              <a:t>XIN TRÂN TRỌNG CẢM ƠN THẦY VÀ CÁC BẠN! — Q&amp;A</a:t>
             </a:r>
           </a:p>
         </p:txBody>
@@ -7291,7 +7568,7 @@
           <a:lstStyle/>
           <a:p>
             <a:pPr algn="ctr">
-              <a:defRPr sz="1500" b="1">
+              <a:defRPr sz="1400" b="1">
                 <a:solidFill>
                   <a:srgbClr val="1D4ED8"/>
                 </a:solidFill>
@@ -7299,7 +7576,7 @@
               </a:defRPr>
             </a:pPr>
             <a:r>
-              <a:t>Thông Số Cấu Hình Hệ Thống Thực Nghiệm</a:t>
+              <a:t>TECH STACK (MÔI TRƯỜNG KỸ THUẬT)</a:t>
             </a:r>
           </a:p>
           <a:p>
@@ -7315,7 +7592,11 @@
               </a:defRPr>
             </a:pPr>
             <a:r>
-              <a:t>• Hệ điều hành: Linux (Ubuntu 24.04 LTS / Zorin OS)</a:t>
+              <a:t>• Operating System:</a:t>
+            </a:r>
+            <a:br/>
+            <a:r>
+              <a:t>  Ubuntu 24.04 LTS / Linux Kernel 6.8</a:t>
             </a:r>
           </a:p>
           <a:p>
@@ -7331,7 +7612,11 @@
               </a:defRPr>
             </a:pPr>
             <a:r>
-              <a:t>• Nền tảng Backend: ASP.NET Core MVC (.NET 10.0)</a:t>
+              <a:t>• Backend Platform:</a:t>
+            </a:r>
+            <a:br/>
+            <a:r>
+              <a:t>  ASP.NET Core MVC / .NET 10.0</a:t>
             </a:r>
           </a:p>
           <a:p>
@@ -7347,7 +7632,11 @@
               </a:defRPr>
             </a:pPr>
             <a:r>
-              <a:t>• Cơ sở dữ liệu: Microsoft SQL Server 2025 Developer (Port 1433)</a:t>
+              <a:t>• Database Engine:</a:t>
+            </a:r>
+            <a:br/>
+            <a:r>
+              <a:t>  Microsoft SQL Server 2025 Developer (Port 1433)</a:t>
             </a:r>
           </a:p>
           <a:p>
@@ -7363,7 +7652,11 @@
               </a:defRPr>
             </a:pPr>
             <a:r>
-              <a:t>• Tầng giao diện: Razor View Engine, HTML5, CSS3, JavaScript</a:t>
+              <a:t>• Frontend Engine:</a:t>
+            </a:r>
+            <a:br/>
+            <a:r>
+              <a:t>  Razor View, HTML5, CSS3, JavaScript</a:t>
             </a:r>
           </a:p>
           <a:p>
@@ -7379,23 +7672,11 @@
               </a:defRPr>
             </a:pPr>
             <a:r>
-              <a:t>• Môi trường phát triển: Visual Studio Code, C# DevKit</a:t>
-            </a:r>
-          </a:p>
-          <a:p>
-            <a:pPr>
-              <a:spcBef>
-                <a:spcPts val="600"/>
-              </a:spcBef>
-              <a:defRPr sz="1200" b="0">
-                <a:solidFill>
-                  <a:srgbClr val="334155"/>
-                </a:solidFill>
-                <a:latin typeface="Arial"/>
-              </a:defRPr>
-            </a:pPr>
-            <a:r>
-              <a:t>• Công cụ kiểm thử: Chrome DevTools, cURL CLI, MSSQL Extension</a:t>
+              <a:t>• Development &amp; Testing Tools:</a:t>
+            </a:r>
+            <a:br/>
+            <a:r>
+              <a:t>  VS Code, Chrome DevTools, cURL CLI, MSSQL Extension</a:t>
             </a:r>
           </a:p>
         </p:txBody>
@@ -7442,7 +7723,7 @@
           <a:lstStyle/>
           <a:p>
             <a:pPr algn="ctr">
-              <a:defRPr sz="1500" b="1">
+              <a:defRPr sz="1400" b="1">
                 <a:solidFill>
                   <a:srgbClr val="047857"/>
                 </a:solidFill>
@@ -7450,7 +7731,7 @@
               </a:defRPr>
             </a:pPr>
             <a:r>
-              <a:t>Phạm Vi &amp; Nguyên Tắc Đạo Đức An Ninh</a:t>
+              <a:t>LAB SCOPE (PHẠM VI &amp; NGUYÊN TẮC ĐẠO ĐỨC)</a:t>
             </a:r>
           </a:p>
           <a:p>
@@ -7458,9 +7739,9 @@
               <a:spcBef>
                 <a:spcPts val="800"/>
               </a:spcBef>
-              <a:defRPr sz="1250" b="1">
-                <a:solidFill>
-                  <a:srgbClr val="0F172A"/>
+              <a:defRPr sz="1200" b="0">
+                <a:solidFill>
+                  <a:srgbClr val="334155"/>
                 </a:solidFill>
                 <a:latin typeface="Arial"/>
               </a:defRPr>
@@ -7468,11 +7749,15 @@
             <a:r>
               <a:t>✓ Môi trường cô lập (Localhost):</a:t>
             </a:r>
+            <a:br/>
+            <a:r>
+              <a:t>Thực nghiệm hoàn toàn trên ứng dụng do nhóm tự xây dựng (http://localhost:5076), tuyệt đối không quét hay tấn công hệ thống bên ngoài.</a:t>
+            </a:r>
           </a:p>
           <a:p>
             <a:pPr>
               <a:spcBef>
-                <a:spcPts val="400"/>
+                <a:spcPts val="1000"/>
               </a:spcBef>
               <a:defRPr sz="1200" b="0">
                 <a:solidFill>
@@ -7482,29 +7767,17 @@
               </a:defRPr>
             </a:pPr>
             <a:r>
-              <a:t>Toàn bộ thực nghiệm được tiến hành trên ứng dụng mẫu do nhóm tự xây dựng (chạy trên localhost:5076), tuyệt đối không thực hiện trên các hệ thống bên ngoài.</a:t>
+              <a:t>✓ Thiết kế đối chứng song song:</a:t>
+            </a:r>
+            <a:br/>
+            <a:r>
+              <a:t>Mỗi lỗ hổng đều xây dựng 2 nhánh: Vulnerable (minh họa lỗi) vs Secure (chứng minh phòng thủ).</a:t>
             </a:r>
           </a:p>
           <a:p>
             <a:pPr>
               <a:spcBef>
-                <a:spcPts val="1200"/>
-              </a:spcBef>
-              <a:defRPr sz="1250" b="1">
-                <a:solidFill>
-                  <a:srgbClr val="0F172A"/>
-                </a:solidFill>
-                <a:latin typeface="Arial"/>
-              </a:defRPr>
-            </a:pPr>
-            <a:r>
-              <a:t>✓ Thiết kế đối chứng song song (Vulnerable vs Secure):</a:t>
-            </a:r>
-          </a:p>
-          <a:p>
-            <a:pPr>
-              <a:spcBef>
-                <a:spcPts val="400"/>
+                <a:spcPts val="1000"/>
               </a:spcBef>
               <a:defRPr sz="1200" b="0">
                 <a:solidFill>
@@ -7514,39 +7787,11 @@
               </a:defRPr>
             </a:pPr>
             <a:r>
-              <a:t>Mỗi lỗ hổng đều xây dựng 2 nhánh xử lý: Nhánh dính lỗi (để chứng minh sự nguy hiểm) và Nhánh an toàn (để kiểm chứng hiệu quả phòng thủ).</a:t>
-            </a:r>
-          </a:p>
-          <a:p>
-            <a:pPr>
-              <a:spcBef>
-                <a:spcPts val="1200"/>
-              </a:spcBef>
-              <a:defRPr sz="1250" b="1">
-                <a:solidFill>
-                  <a:srgbClr val="0F172A"/>
-                </a:solidFill>
-                <a:latin typeface="Arial"/>
-              </a:defRPr>
-            </a:pPr>
-            <a:r>
               <a:t>✓ Dữ liệu mô phỏng an toàn:</a:t>
             </a:r>
-          </a:p>
-          <a:p>
-            <a:pPr>
-              <a:spcBef>
-                <a:spcPts val="400"/>
-              </a:spcBef>
-              <a:defRPr sz="1200" b="0">
-                <a:solidFill>
-                  <a:srgbClr val="334155"/>
-                </a:solidFill>
-                <a:latin typeface="Arial"/>
-              </a:defRPr>
-            </a:pPr>
-            <a:r>
-              <a:t>Toàn bộ tài khoản, mật khẩu và số dư ví trong CSDL là dữ liệu mẫu giả định phục vụ mục đích học tập và nghiên cứu.</a:t>
+            <a:br/>
+            <a:r>
+              <a:t>Toàn bộ tài khoản, số dư và mật khẩu là dữ liệu giả định phục vụ học tập.</a:t>
             </a:r>
           </a:p>
         </p:txBody>
@@ -7698,7 +7943,7 @@
               </a:defRPr>
             </a:pPr>
             <a:r>
-              <a:t>1.1. SQL Injection: Sơ Đồ Luồng &amp; Nguyên Nhân Cốt Lõi</a:t>
+              <a:t>1.1. SQL Injection — Lỗi Xảy Ra Ở Đâu &amp; Nguyên Nhân Cốt Lõi</a:t>
             </a:r>
           </a:p>
         </p:txBody>
@@ -7789,13 +8034,13 @@
               </a:defRPr>
             </a:pPr>
             <a:r>
-              <a:t>Sơ Đồ Luồng Xử Lý Dữ Liệu</a:t>
+              <a:t>Sơ Đồ Luồng Xử Lý &amp; Root Cause</a:t>
             </a:r>
           </a:p>
           <a:p>
             <a:pPr>
               <a:spcBef>
-                <a:spcPts val="800"/>
+                <a:spcPts val="1000"/>
               </a:spcBef>
               <a:defRPr sz="1200" b="1">
                 <a:solidFill>
@@ -7877,14 +8122,14 @@
               </a:defRPr>
             </a:pPr>
             <a:r>
-              <a:t>SQL Server 2025 ➔ Thông dịch cấu trúc lệnh bị tiêm nhiễm</a:t>
+              <a:t>SQL Server 2025 ➔ Thực thi câu lệnh bị bẻ gãy cú pháp</a:t>
             </a:r>
           </a:p>
           <a:p>
             <a:br/>
             <a:pPr>
               <a:spcBef>
-                <a:spcPts val="800"/>
+                <a:spcPts val="1000"/>
               </a:spcBef>
               <a:defRPr sz="1200" b="0">
                 <a:solidFill>
@@ -7894,11 +8139,11 @@
               </a:defRPr>
             </a:pPr>
             <a:r>
-              <a:t>Root Cause (Nguyên nhân cốt lõi):</a:t>
-            </a:r>
-            <a:br/>
-            <a:r>
-              <a:t>Dữ liệu người dùng được ghép trực tiếp vào câu truy vấn. Hệ CSDL không phân định được đâu là Dữ liệu (Data) và đâu là Cú pháp lệnh (Code).</a:t>
+              <a:t>📌 ROOT CAUSE (Nguyên nhân cốt lõi):</a:t>
+            </a:r>
+            <a:br/>
+            <a:r>
+              <a:t>Dữ liệu người dùng được ghép trực tiếp vào câu lệnh SQL. Hệ CSDL không phân định được ranh giới giữa Dữ liệu (Data) và Lệnh thực thi (Code).</a:t>
             </a:r>
           </a:p>
         </p:txBody>
@@ -7945,7 +8190,7 @@
           <a:lstStyle/>
           <a:p>
             <a:pPr algn="ctr">
-              <a:defRPr sz="1500" b="1">
+              <a:defRPr sz="1400" b="1">
                 <a:solidFill>
                   <a:srgbClr val="BE123C"/>
                 </a:solidFill>
@@ -7953,15 +8198,15 @@
               </a:defRPr>
             </a:pPr>
             <a:r>
-              <a:t>Đoạn Mã Gây Lỗi (C# Controller)</a:t>
+              <a:t>🔴 VULNERABLE CODE (Ghép Chuỗi SQL)</a:t>
             </a:r>
           </a:p>
           <a:p>
             <a:pPr>
               <a:spcBef>
-                <a:spcPts val="800"/>
+                <a:spcPts val="1000"/>
               </a:spcBef>
-              <a:defRPr sz="1050" b="0">
+              <a:defRPr sz="1100" b="0">
                 <a:solidFill>
                   <a:srgbClr val="9F1239"/>
                 </a:solidFill>
@@ -7969,7 +8214,7 @@
               </a:defRPr>
             </a:pPr>
             <a:r>
-              <a:t>// NỐI CHUỖI TRỰC TIẾP TỪ THAM SỐ:</a:t>
+              <a:t>// Nối chuỗi trực tiếp từ tham số đầu vào:</a:t>
             </a:r>
             <a:br/>
             <a:r>
@@ -8010,11 +8255,11 @@
               </a:defRPr>
             </a:pPr>
             <a:r>
-              <a:t>Cơ chế phá vỡ cú pháp:</a:t>
-            </a:r>
-            <a:br/>
-            <a:r>
-              <a:t>Dấu nháy đơn (') của kẻ tấn công đóng sớm chuỗi giá trị Username. Phần còn lại được máy chủ thông dịch thành lệnh điều khiển thay vì dữ liệu.</a:t>
+              <a:t>Cơ chế phá vỡ:</a:t>
+            </a:r>
+            <a:br/>
+            <a:r>
+              <a:t>Dấu nháy đơn (') đóng chuỗi sớm, biến mệnh đề kiểm tra mật khẩu thành chú thích (--), mở toang quyền truy cập CSDL.</a:t>
             </a:r>
           </a:p>
         </p:txBody>
@@ -8166,7 +8411,7 @@
               </a:defRPr>
             </a:pPr>
             <a:r>
-              <a:t>1.2. SQL Injection: 3 Kịch Bản Khai Thác Thực Nghiệm</a:t>
+              <a:t>1.2. SQL Injection — 3 Kịch Bản Khai Thác Thực Nghiệm</a:t>
             </a:r>
           </a:p>
         </p:txBody>
@@ -8207,426 +8452,231 @@
           </a:p>
         </p:txBody>
       </p:sp>
-      <p:graphicFrame>
-        <p:nvGraphicFramePr>
-          <p:cNvPr id="6" name="Table 5"/>
-          <p:cNvGraphicFramePr>
-            <a:graphicFrameLocks noGrp="1"/>
-          </p:cNvGraphicFramePr>
-          <p:nvPr/>
-        </p:nvGraphicFramePr>
-        <p:xfrm>
-          <a:off x="731520" y="1280160"/>
-          <a:ext cx="10728655" cy="4846320"/>
-        </p:xfrm>
-        <a:graphic>
-          <a:graphicData uri="http://schemas.openxmlformats.org/drawingml/2006/table">
-            <a:tbl>
-              <a:tblPr firstRow="1" bandRow="1">
-                <a:tableStyleId>{5C22544A-7EE6-4342-B048-85BDC9FD1C3A}</a:tableStyleId>
-              </a:tblPr>
-              <a:tblGrid>
-                <a:gridCol w="2682163"/>
-                <a:gridCol w="2682163"/>
-                <a:gridCol w="2682163"/>
-                <a:gridCol w="2682166"/>
-              </a:tblGrid>
-              <a:tr h="1211580">
-                <a:tc>
-                  <a:txBody>
-                    <a:bodyPr/>
-                    <a:lstStyle/>
-                    <a:p>
-                      <a:pPr>
-                        <a:defRPr b="1" sz="1100">
-                          <a:solidFill>
-                            <a:srgbClr val="FFFFFF"/>
-                          </a:solidFill>
-                          <a:latin typeface="Arial"/>
-                        </a:defRPr>
-                      </a:pPr>
-                      <a:r>
-                        <a:t>Kịch bản kiểm thử</a:t>
-                      </a:r>
-                    </a:p>
-                  </a:txBody>
-                  <a:tcPr>
-                    <a:solidFill>
-                      <a:srgbClr val="1D4ED8"/>
-                    </a:solidFill>
-                  </a:tcPr>
-                </a:tc>
-                <a:tc>
-                  <a:txBody>
-                    <a:bodyPr/>
-                    <a:lstStyle/>
-                    <a:p>
-                      <a:pPr>
-                        <a:defRPr b="1" sz="1100">
-                          <a:solidFill>
-                            <a:srgbClr val="FFFFFF"/>
-                          </a:solidFill>
-                          <a:latin typeface="Arial"/>
-                        </a:defRPr>
-                      </a:pPr>
-                      <a:r>
-                        <a:t>Payload đưa vào ô Username</a:t>
-                      </a:r>
-                    </a:p>
-                  </a:txBody>
-                  <a:tcPr>
-                    <a:solidFill>
-                      <a:srgbClr val="1D4ED8"/>
-                    </a:solidFill>
-                  </a:tcPr>
-                </a:tc>
-                <a:tc>
-                  <a:txBody>
-                    <a:bodyPr/>
-                    <a:lstStyle/>
-                    <a:p>
-                      <a:pPr>
-                        <a:defRPr b="1" sz="1100">
-                          <a:solidFill>
-                            <a:srgbClr val="FFFFFF"/>
-                          </a:solidFill>
-                          <a:latin typeface="Arial"/>
-                        </a:defRPr>
-                      </a:pPr>
-                      <a:r>
-                        <a:t>Cơ chế bẻ gãy cú pháp</a:t>
-                      </a:r>
-                    </a:p>
-                  </a:txBody>
-                  <a:tcPr>
-                    <a:solidFill>
-                      <a:srgbClr val="1D4ED8"/>
-                    </a:solidFill>
-                  </a:tcPr>
-                </a:tc>
-                <a:tc>
-                  <a:txBody>
-                    <a:bodyPr/>
-                    <a:lstStyle/>
-                    <a:p>
-                      <a:pPr>
-                        <a:defRPr b="1" sz="1100">
-                          <a:solidFill>
-                            <a:srgbClr val="FFFFFF"/>
-                          </a:solidFill>
-                          <a:latin typeface="Arial"/>
-                        </a:defRPr>
-                      </a:pPr>
-                      <a:r>
-                        <a:t>Kết quả thực tế</a:t>
-                      </a:r>
-                    </a:p>
-                  </a:txBody>
-                  <a:tcPr>
-                    <a:solidFill>
-                      <a:srgbClr val="1D4ED8"/>
-                    </a:solidFill>
-                  </a:tcPr>
-                </a:tc>
-              </a:tr>
-              <a:tr h="1211580">
-                <a:tc>
-                  <a:txBody>
-                    <a:bodyPr/>
-                    <a:lstStyle/>
-                    <a:p>
-                      <a:pPr>
-                        <a:defRPr sz="1100">
-                          <a:solidFill>
-                            <a:srgbClr val="0F172A"/>
-                          </a:solidFill>
-                          <a:latin typeface="Arial"/>
-                        </a:defRPr>
-                      </a:pPr>
-                      <a:r>
-                        <a:t>Kịch bản 1: Bypass tổng quát</a:t>
-                      </a:r>
-                    </a:p>
-                  </a:txBody>
-                  <a:tcPr>
-                    <a:solidFill>
-                      <a:srgbClr val="F8FAFC"/>
-                    </a:solidFill>
-                  </a:tcPr>
-                </a:tc>
-                <a:tc>
-                  <a:txBody>
-                    <a:bodyPr/>
-                    <a:lstStyle/>
-                    <a:p>
-                      <a:pPr>
-                        <a:defRPr sz="1100" b="1">
-                          <a:solidFill>
-                            <a:srgbClr val="BE123C"/>
-                          </a:solidFill>
-                          <a:latin typeface="Courier New"/>
-                        </a:defRPr>
-                      </a:pPr>
-                      <a:r>
-                        <a:t>' OR '1'='1' --</a:t>
-                      </a:r>
-                    </a:p>
-                  </a:txBody>
-                  <a:tcPr>
-                    <a:solidFill>
-                      <a:srgbClr val="F8FAFC"/>
-                    </a:solidFill>
-                  </a:tcPr>
-                </a:tc>
-                <a:tc>
-                  <a:txBody>
-                    <a:bodyPr/>
-                    <a:lstStyle/>
-                    <a:p>
-                      <a:pPr>
-                        <a:defRPr sz="1100">
-                          <a:solidFill>
-                            <a:srgbClr val="334155"/>
-                          </a:solidFill>
-                          <a:latin typeface="Arial"/>
-                        </a:defRPr>
-                      </a:pPr>
-                      <a:r>
-                        <a:t>Nháy đơn (') đóng chuỗi; OR '1'='1' luôn đúng; '--' hủy vế kiểm tra mật khẩu.</a:t>
-                      </a:r>
-                    </a:p>
-                  </a:txBody>
-                  <a:tcPr>
-                    <a:solidFill>
-                      <a:srgbClr val="F8FAFC"/>
-                    </a:solidFill>
-                  </a:tcPr>
-                </a:tc>
-                <a:tc>
-                  <a:txBody>
-                    <a:bodyPr/>
-                    <a:lstStyle/>
-                    <a:p>
-                      <a:pPr>
-                        <a:defRPr sz="1100">
-                          <a:solidFill>
-                            <a:srgbClr val="334155"/>
-                          </a:solidFill>
-                          <a:latin typeface="Arial"/>
-                        </a:defRPr>
-                      </a:pPr>
-                      <a:r>
-                        <a:t>Bypass thành công, lấy tài khoản đầu tiên trong bảng (Admin).</a:t>
-                      </a:r>
-                    </a:p>
-                  </a:txBody>
-                  <a:tcPr>
-                    <a:solidFill>
-                      <a:srgbClr val="F8FAFC"/>
-                    </a:solidFill>
-                  </a:tcPr>
-                </a:tc>
-              </a:tr>
-              <a:tr h="1211580">
-                <a:tc>
-                  <a:txBody>
-                    <a:bodyPr/>
-                    <a:lstStyle/>
-                    <a:p>
-                      <a:pPr>
-                        <a:defRPr sz="1100">
-                          <a:solidFill>
-                            <a:srgbClr val="0F172A"/>
-                          </a:solidFill>
-                          <a:latin typeface="Arial"/>
-                        </a:defRPr>
-                      </a:pPr>
-                      <a:r>
-                        <a:t>Kịch bản 2: Nhắm đích danh Admin</a:t>
-                      </a:r>
-                    </a:p>
-                  </a:txBody>
-                  <a:tcPr>
-                    <a:solidFill>
-                      <a:srgbClr val="FFFFFF"/>
-                    </a:solidFill>
-                  </a:tcPr>
-                </a:tc>
-                <a:tc>
-                  <a:txBody>
-                    <a:bodyPr/>
-                    <a:lstStyle/>
-                    <a:p>
-                      <a:pPr>
-                        <a:defRPr sz="1100" b="1">
-                          <a:solidFill>
-                            <a:srgbClr val="BE123C"/>
-                          </a:solidFill>
-                          <a:latin typeface="Courier New"/>
-                        </a:defRPr>
-                      </a:pPr>
-                      <a:r>
-                        <a:t>admin' --</a:t>
-                      </a:r>
-                    </a:p>
-                  </a:txBody>
-                  <a:tcPr>
-                    <a:solidFill>
-                      <a:srgbClr val="FFFFFF"/>
-                    </a:solidFill>
-                  </a:tcPr>
-                </a:tc>
-                <a:tc>
-                  <a:txBody>
-                    <a:bodyPr/>
-                    <a:lstStyle/>
-                    <a:p>
-                      <a:pPr>
-                        <a:defRPr sz="1100">
-                          <a:solidFill>
-                            <a:srgbClr val="334155"/>
-                          </a:solidFill>
-                          <a:latin typeface="Arial"/>
-                        </a:defRPr>
-                      </a:pPr>
-                      <a:r>
-                        <a:t>Cố định Username = 'admin'; '--' hủy toàn bộ vế AND Password = ...</a:t>
-                      </a:r>
-                    </a:p>
-                  </a:txBody>
-                  <a:tcPr>
-                    <a:solidFill>
-                      <a:srgbClr val="FFFFFF"/>
-                    </a:solidFill>
-                  </a:tcPr>
-                </a:tc>
-                <a:tc>
-                  <a:txBody>
-                    <a:bodyPr/>
-                    <a:lstStyle/>
-                    <a:p>
-                      <a:pPr>
-                        <a:defRPr sz="1100">
-                          <a:solidFill>
-                            <a:srgbClr val="334155"/>
-                          </a:solidFill>
-                          <a:latin typeface="Arial"/>
-                        </a:defRPr>
-                      </a:pPr>
-                      <a:r>
-                        <a:t>Chiếm đoạt chính xác quyền Admin mà không cần biết mật khẩu.</a:t>
-                      </a:r>
-                    </a:p>
-                  </a:txBody>
-                  <a:tcPr>
-                    <a:solidFill>
-                      <a:srgbClr val="FFFFFF"/>
-                    </a:solidFill>
-                  </a:tcPr>
-                </a:tc>
-              </a:tr>
-              <a:tr h="1211580">
-                <a:tc>
-                  <a:txBody>
-                    <a:bodyPr/>
-                    <a:lstStyle/>
-                    <a:p>
-                      <a:pPr>
-                        <a:defRPr sz="1100">
-                          <a:solidFill>
-                            <a:srgbClr val="0F172A"/>
-                          </a:solidFill>
-                          <a:latin typeface="Arial"/>
-                        </a:defRPr>
-                      </a:pPr>
-                      <a:r>
-                        <a:t>Kịch bản chuẩn: Đăng nhập đúng</a:t>
-                      </a:r>
-                    </a:p>
-                  </a:txBody>
-                  <a:tcPr>
-                    <a:solidFill>
-                      <a:srgbClr val="F8FAFC"/>
-                    </a:solidFill>
-                  </a:tcPr>
-                </a:tc>
-                <a:tc>
-                  <a:txBody>
-                    <a:bodyPr/>
-                    <a:lstStyle/>
-                    <a:p>
-                      <a:pPr>
-                        <a:defRPr sz="1100" b="1">
-                          <a:solidFill>
-                            <a:srgbClr val="047857"/>
-                          </a:solidFill>
-                          <a:latin typeface="Courier New"/>
-                        </a:defRPr>
-                      </a:pPr>
-                      <a:r>
-                        <a:t>admin / AdminPassword@2026</a:t>
-                      </a:r>
-                    </a:p>
-                  </a:txBody>
-                  <a:tcPr>
-                    <a:solidFill>
-                      <a:srgbClr val="F8FAFC"/>
-                    </a:solidFill>
-                  </a:tcPr>
-                </a:tc>
-                <a:tc>
-                  <a:txBody>
-                    <a:bodyPr/>
-                    <a:lstStyle/>
-                    <a:p>
-                      <a:pPr>
-                        <a:defRPr sz="1100">
-                          <a:solidFill>
-                            <a:srgbClr val="334155"/>
-                          </a:solidFill>
-                          <a:latin typeface="Arial"/>
-                        </a:defRPr>
-                      </a:pPr>
-                      <a:r>
-                        <a:t>Dữ liệu hợp lệ, không chứa ký tự điều khiển hay can thiệp cú pháp.</a:t>
-                      </a:r>
-                    </a:p>
-                  </a:txBody>
-                  <a:tcPr>
-                    <a:solidFill>
-                      <a:srgbClr val="F8FAFC"/>
-                    </a:solidFill>
-                  </a:tcPr>
-                </a:tc>
-                <a:tc>
-                  <a:txBody>
-                    <a:bodyPr/>
-                    <a:lstStyle/>
-                    <a:p>
-                      <a:pPr>
-                        <a:defRPr sz="1100">
-                          <a:solidFill>
-                            <a:srgbClr val="334155"/>
-                          </a:solidFill>
-                          <a:latin typeface="Arial"/>
-                        </a:defRPr>
-                      </a:pPr>
-                      <a:r>
-                        <a:t>Đăng nhập thành công trên cả 2 nhánh (Lỗi &amp; Đã phòng thủ).</a:t>
-                      </a:r>
-                    </a:p>
-                  </a:txBody>
-                  <a:tcPr>
-                    <a:solidFill>
-                      <a:srgbClr val="F8FAFC"/>
-                    </a:solidFill>
-                  </a:tcPr>
-                </a:tc>
-              </a:tr>
-            </a:tbl>
-          </a:graphicData>
-        </a:graphic>
-      </p:graphicFrame>
+      <p:sp>
+        <p:nvSpPr>
+          <p:cNvPr id="6" name="Rounded Rectangle 5"/>
+          <p:cNvSpPr/>
+          <p:nvPr/>
+        </p:nvSpPr>
+        <p:spPr>
+          <a:xfrm>
+            <a:off x="731520" y="1280160"/>
+            <a:ext cx="10728655" cy="1463040"/>
+          </a:xfrm>
+          <a:prstGeom prst="roundRect">
+            <a:avLst/>
+          </a:prstGeom>
+          <a:solidFill>
+            <a:srgbClr val="FFF1F2"/>
+          </a:solidFill>
+          <a:ln>
+            <a:solidFill>
+              <a:srgbClr val="FECDD3"/>
+            </a:solidFill>
+          </a:ln>
+        </p:spPr>
+        <p:style>
+          <a:lnRef idx="1">
+            <a:schemeClr val="accent1"/>
+          </a:lnRef>
+          <a:fillRef idx="3">
+            <a:schemeClr val="accent1"/>
+          </a:fillRef>
+          <a:effectRef idx="2">
+            <a:schemeClr val="accent1"/>
+          </a:effectRef>
+          <a:fontRef idx="minor">
+            <a:schemeClr val="lt1"/>
+          </a:fontRef>
+        </p:style>
+        <p:txBody>
+          <a:bodyPr rtlCol="0" anchor="ctr"/>
+          <a:lstStyle/>
+          <a:p>
+            <a:pPr algn="ctr">
+              <a:defRPr sz="1300" b="1">
+                <a:solidFill>
+                  <a:srgbClr val="BE123C"/>
+                </a:solidFill>
+                <a:latin typeface="Arial"/>
+              </a:defRPr>
+            </a:pPr>
+            <a:r>
+              <a:t>01 — BYPASS ĐĂNG NHẬP TỔNG QUÁT: ' OR '1'='1' --</a:t>
+            </a:r>
+          </a:p>
+          <a:p>
+            <a:pPr>
+              <a:spcBef>
+                <a:spcPts val="400"/>
+              </a:spcBef>
+              <a:defRPr sz="1150" b="0">
+                <a:solidFill>
+                  <a:srgbClr val="334155"/>
+                </a:solidFill>
+                <a:latin typeface="Arial"/>
+              </a:defRPr>
+            </a:pPr>
+            <a:r>
+              <a:t>• Cơ chế: Dấu nháy đơn (') đóng chuỗi; mệnh đề OR '1'='1' luôn đúng cho mọi dòng; ký tự '--' vô hiệu hóa bước kiểm tra mật khẩu.</a:t>
+            </a:r>
+            <a:br/>
+            <a:r>
+              <a:t>• Kết quả thực tế: Vượt qua xác thực thành công, đăng nhập ngay vào tài khoản đầu tiên trong bảng (Admin).</a:t>
+            </a:r>
+          </a:p>
+        </p:txBody>
+      </p:sp>
+      <p:sp>
+        <p:nvSpPr>
+          <p:cNvPr id="7" name="Rounded Rectangle 6"/>
+          <p:cNvSpPr/>
+          <p:nvPr/>
+        </p:nvSpPr>
+        <p:spPr>
+          <a:xfrm>
+            <a:off x="731520" y="2926080"/>
+            <a:ext cx="10728655" cy="1463040"/>
+          </a:xfrm>
+          <a:prstGeom prst="roundRect">
+            <a:avLst/>
+          </a:prstGeom>
+          <a:solidFill>
+            <a:srgbClr val="FFFBEB"/>
+          </a:solidFill>
+          <a:ln>
+            <a:solidFill>
+              <a:srgbClr val="FEF08A"/>
+            </a:solidFill>
+          </a:ln>
+        </p:spPr>
+        <p:style>
+          <a:lnRef idx="1">
+            <a:schemeClr val="accent1"/>
+          </a:lnRef>
+          <a:fillRef idx="3">
+            <a:schemeClr val="accent1"/>
+          </a:fillRef>
+          <a:effectRef idx="2">
+            <a:schemeClr val="accent1"/>
+          </a:effectRef>
+          <a:fontRef idx="minor">
+            <a:schemeClr val="lt1"/>
+          </a:fontRef>
+        </p:style>
+        <p:txBody>
+          <a:bodyPr rtlCol="0" anchor="ctr"/>
+          <a:lstStyle/>
+          <a:p>
+            <a:pPr algn="ctr">
+              <a:defRPr sz="1300" b="1">
+                <a:solidFill>
+                  <a:srgbClr val="B45309"/>
+                </a:solidFill>
+                <a:latin typeface="Arial"/>
+              </a:defRPr>
+            </a:pPr>
+            <a:r>
+              <a:t>02 — TẤN CÔNG ĐÍCH DANH QUẢN TRỊ VIÊN: admin' --</a:t>
+            </a:r>
+          </a:p>
+          <a:p>
+            <a:pPr>
+              <a:spcBef>
+                <a:spcPts val="400"/>
+              </a:spcBef>
+              <a:defRPr sz="1150" b="0">
+                <a:solidFill>
+                  <a:srgbClr val="334155"/>
+                </a:solidFill>
+                <a:latin typeface="Arial"/>
+              </a:defRPr>
+            </a:pPr>
+            <a:r>
+              <a:t>• Cơ chế: Cố định Username = 'admin'; ký tự '--' cắt bỏ hoàn toàn mệnh đề 'AND Password = ...' phía sau.</a:t>
+            </a:r>
+            <a:br/>
+            <a:r>
+              <a:t>• Kết quả thực tế: Chiếm đoạt chính xác tài khoản Admin cấp cao nhất mà không cần nhập mật khẩu.</a:t>
+            </a:r>
+          </a:p>
+        </p:txBody>
+      </p:sp>
+      <p:sp>
+        <p:nvSpPr>
+          <p:cNvPr id="8" name="Rounded Rectangle 7"/>
+          <p:cNvSpPr/>
+          <p:nvPr/>
+        </p:nvSpPr>
+        <p:spPr>
+          <a:xfrm>
+            <a:off x="731520" y="4572000"/>
+            <a:ext cx="10728655" cy="1463040"/>
+          </a:xfrm>
+          <a:prstGeom prst="roundRect">
+            <a:avLst/>
+          </a:prstGeom>
+          <a:solidFill>
+            <a:srgbClr val="F8FAFC"/>
+          </a:solidFill>
+          <a:ln>
+            <a:solidFill>
+              <a:srgbClr val="E2E8F0"/>
+            </a:solidFill>
+          </a:ln>
+        </p:spPr>
+        <p:style>
+          <a:lnRef idx="1">
+            <a:schemeClr val="accent1"/>
+          </a:lnRef>
+          <a:fillRef idx="3">
+            <a:schemeClr val="accent1"/>
+          </a:fillRef>
+          <a:effectRef idx="2">
+            <a:schemeClr val="accent1"/>
+          </a:effectRef>
+          <a:fontRef idx="minor">
+            <a:schemeClr val="lt1"/>
+          </a:fontRef>
+        </p:style>
+        <p:txBody>
+          <a:bodyPr rtlCol="0" anchor="ctr"/>
+          <a:lstStyle/>
+          <a:p>
+            <a:pPr algn="ctr">
+              <a:defRPr sz="1300" b="1">
+                <a:solidFill>
+                  <a:srgbClr val="1D4ED8"/>
+                </a:solidFill>
+                <a:latin typeface="Arial"/>
+              </a:defRPr>
+            </a:pPr>
+            <a:r>
+              <a:t>03 — ĐĂNG NHẬP CHUẨN HỢP LỆ: admin / AdminPassword@2026</a:t>
+            </a:r>
+          </a:p>
+          <a:p>
+            <a:pPr>
+              <a:spcBef>
+                <a:spcPts val="400"/>
+              </a:spcBef>
+              <a:defRPr sz="1150" b="0">
+                <a:solidFill>
+                  <a:srgbClr val="334155"/>
+                </a:solidFill>
+                <a:latin typeface="Arial"/>
+              </a:defRPr>
+            </a:pPr>
+            <a:r>
+              <a:t>• Cơ chế: Dữ liệu người dùng bình thường, không chứa ký tự điều khiển hay can thiệp cú pháp.</a:t>
+            </a:r>
+            <a:br/>
+            <a:r>
+              <a:t>• Kết quả đối chứng: Đăng nhập thành công trên cả 2 nhánh (Lỗi &amp; An toàn), chứng minh hệ thống hoạt động đúng nghiệp vụ.</a:t>
+            </a:r>
+          </a:p>
+        </p:txBody>
+      </p:sp>
     </p:spTree>
   </p:cSld>
   <p:clrMapOvr>
@@ -8774,7 +8824,7 @@
               </a:defRPr>
             </a:pPr>
             <a:r>
-              <a:t>1.3. SQL Injection: Minh Chứng Thực Nghiệm Trực Quan Trên Web UI</a:t>
+              <a:t>1.3. SQL Injection — Minh Chứng Thực Nghiệm Trực Quan Trên Web UI</a:t>
             </a:r>
           </a:p>
         </p:txBody>
@@ -8870,7 +8920,7 @@
               </a:defRPr>
             </a:pPr>
             <a:r>
-              <a:t>Minh chứng đối chứng: Trích xuất 4 tài khoản CSDL khi inject ' OR '1'='1' -- (Trái) vs Chặn đứng an toàn với EF Core (Phải)</a:t>
+              <a:t>🔴 Vulnerable: Trích xuất 4 tài khoản CSDL khi inject ' OR '1'='1' --  vs  🟢 Secure: Chặn đứng an toàn với EF Core (0 kết quả)</a:t>
             </a:r>
           </a:p>
         </p:txBody>
@@ -9022,7 +9072,7 @@
               </a:defRPr>
             </a:pPr>
             <a:r>
-              <a:t>1.4. SQL Injection: Minh Chứng Gói Tin Mạng (Chrome DevTools Network)</a:t>
+              <a:t>1.4. SQL Injection — Minh Chứng Gói Tin Mạng (Chrome DevTools Network)</a:t>
             </a:r>
           </a:p>
         </p:txBody>
@@ -9270,7 +9320,7 @@
               </a:defRPr>
             </a:pPr>
             <a:r>
-              <a:t>1.5. SQL Injection: Cơ Chế Phòng Thủ Chuẩn Hóa</a:t>
+              <a:t>1.5. SQL Injection — Cơ Chế Phòng Thủ Chuẩn Hóa</a:t>
             </a:r>
           </a:p>
         </p:txBody>
@@ -9353,7 +9403,7 @@
           <a:lstStyle/>
           <a:p>
             <a:pPr algn="ctr">
-              <a:defRPr sz="1500" b="1">
+              <a:defRPr sz="1400" b="1">
                 <a:solidFill>
                   <a:srgbClr val="047857"/>
                 </a:solidFill>
@@ -9361,7 +9411,7 @@
               </a:defRPr>
             </a:pPr>
             <a:r>
-              <a:t>Phòng Thủ SQL Injection: Parameterized Query</a:t>
+              <a:t>🟢 SECURE CODE: PARAMETERIZED QUERY</a:t>
             </a:r>
           </a:p>
           <a:p>
@@ -9395,7 +9445,23 @@
           <a:p>
             <a:pPr>
               <a:spcBef>
-                <a:spcPts val="1200"/>
+                <a:spcPts val="1400"/>
+              </a:spcBef>
+              <a:defRPr sz="1250" b="1">
+                <a:solidFill>
+                  <a:srgbClr val="0F172A"/>
+                </a:solidFill>
+                <a:latin typeface="Arial"/>
+              </a:defRPr>
+            </a:pPr>
+            <a:r>
+              <a:t>Nguyên tắc cốt lõi: Data ≠ SQL Syntax</a:t>
+            </a:r>
+          </a:p>
+          <a:p>
+            <a:pPr>
+              <a:spcBef>
+                <a:spcPts val="600"/>
               </a:spcBef>
               <a:defRPr sz="1200" b="0">
                 <a:solidFill>
@@ -9405,19 +9471,11 @@
               </a:defRPr>
             </a:pPr>
             <a:r>
-              <a:t>Nguyên lý kỹ thuật:</a:t>
-            </a:r>
-            <a:br/>
-            <a:r>
-              <a:t>• Data ≠ SQL Syntax: Đầu vào người dùng được truyền qua tham số riêng biệt (@p0, @p1).</a:t>
-            </a:r>
-            <a:br/>
-            <a:r>
-              <a:t>• Máy chủ SQL Server biên dịch cấu trúc cây truy vấn (Execution Plan) TRƯỚC khi gán dữ liệu.</a:t>
-            </a:r>
-            <a:br/>
-            <a:r>
-              <a:t>• Toàn bộ chuỗi payload bị cô lập thành giá trị văn bản (literal), không thể can thiệp vào logic thực thi.</a:t>
+              <a:t>• Máy chủ SQL Server biên dịch cấu trúc cây truy vấn (Execution Plan) TRƯỚC khi nhận tham số.</a:t>
+            </a:r>
+            <a:br/>
+            <a:r>
+              <a:t>• Biến @p0, @p1 nhận toàn bộ payload như một giá trị văn bản (literal), vô hiệu hóa hoàn toàn ý đồ chèn lệnh.</a:t>
             </a:r>
           </a:p>
         </p:txBody>
@@ -9464,7 +9522,7 @@
           <a:lstStyle/>
           <a:p>
             <a:pPr algn="ctr">
-              <a:defRPr sz="1500" b="1">
+              <a:defRPr sz="1400" b="1">
                 <a:solidFill>
                   <a:srgbClr val="1D4ED8"/>
                 </a:solidFill>
@@ -9472,7 +9530,55 @@
               </a:defRPr>
             </a:pPr>
             <a:r>
-              <a:t>Bảo Vệ Mật Khẩu: Tách Biệt Với SQL Injection</a:t>
+              <a:t>BẢO VỆ MẬT KHẨU (TÁCH BIỆT LOGIC)</a:t>
+            </a:r>
+          </a:p>
+          <a:p>
+            <a:pPr>
+              <a:spcBef>
+                <a:spcPts val="800"/>
+              </a:spcBef>
+              <a:defRPr sz="1200" b="1">
+                <a:solidFill>
+                  <a:srgbClr val="0F172A"/>
+                </a:solidFill>
+                <a:latin typeface="Arial"/>
+              </a:defRPr>
+            </a:pPr>
+            <a:r>
+              <a:t>Phân định rõ ràng trong báo cáo bảo mật:</a:t>
+            </a:r>
+          </a:p>
+          <a:p>
+            <a:pPr>
+              <a:spcBef>
+                <a:spcPts val="600"/>
+              </a:spcBef>
+              <a:defRPr sz="1200" b="1">
+                <a:solidFill>
+                  <a:srgbClr val="047857"/>
+                </a:solidFill>
+                <a:latin typeface="Arial"/>
+              </a:defRPr>
+            </a:pPr>
+            <a:r>
+              <a:t>1. Phòng thủ SQL Injection: Dùng Parameterized Query / EF Core LINQ.</a:t>
+            </a:r>
+          </a:p>
+          <a:p>
+            <a:pPr>
+              <a:spcBef>
+                <a:spcPts val="800"/>
+              </a:spcBef>
+              <a:defRPr sz="1200" b="1">
+                <a:solidFill>
+                  <a:srgbClr val="1D4ED8"/>
+                </a:solidFill>
+                <a:latin typeface="Arial"/>
+              </a:defRPr>
+            </a:pPr>
+            <a:r>
+              <a:t>2. Bảo vệ mật khẩu (Defense-in-Depth): Dùng Password Hashing (ASP.NET Core Identity PBKDF2) kèm Salt ngẫu nhiên.</a:t>
             </a:r>
           </a:p>
           <a:p>
@@ -9488,44 +9594,7 @@
               </a:defRPr>
             </a:pPr>
             <a:r>
-              <a:t>Lưu ý logic bảo mật quan trọng:</a:t>
-            </a:r>
-            <a:br/>
-            <a:r>
-              <a:t>• Parameterized Query giải quyết triệt để lỗi SQL Injection.</a:t>
-            </a:r>
-            <a:br/>
-            <a:r>
-              <a:t>• Tuy nhiên, để bảo vệ mật khẩu người dùng phòng trường hợp CSDL bị rò rỉ, cần lớp phòng thủ bổ sung (Defense-in-Depth):</a:t>
-            </a:r>
-          </a:p>
-          <a:p>
-            <a:pPr>
-              <a:spcBef>
-                <a:spcPts val="800"/>
-              </a:spcBef>
-              <a:defRPr sz="1200" b="0">
-                <a:solidFill>
-                  <a:srgbClr val="334155"/>
-                </a:solidFill>
-                <a:latin typeface="Arial"/>
-              </a:defRPr>
-            </a:pPr>
-            <a:r>
-              <a:t>1. Password Hashing (ASP.NET Core Identity):</a:t>
-            </a:r>
-            <a:br/>
-            <a:r>
-              <a:t>   Băm mật khẩu 1 chiều bằng thuật toán an toàn (PBKDF2/BCrypt) kèm Salt, tuyệt đối không lưu mật khẩu dạng plain-text.</a:t>
-            </a:r>
-            <a:br/>
-            <a:br/>
-            <a:r>
-              <a:t>2. Phân quyền tối thiểu (Least Privilege):</a:t>
-            </a:r>
-            <a:br/>
-            <a:r>
-              <a:t>   Tài khoản kết nối CSDL của ứng dụng chỉ có quyền SELECT/INSERT/UPDATE trên các bảng nghiệp vụ, không dùng quyền sa/DDL.</a:t>
+              <a:t>3. Đặc quyền tối thiểu (Least Privilege): Ứng dụng chỉ được cấp quyền SELECT/INSERT/UPDATE trên bảng cần thiết, cấm quyền sa/DDL.</a:t>
             </a:r>
           </a:p>
         </p:txBody>
@@ -9677,7 +9746,7 @@
               </a:defRPr>
             </a:pPr>
             <a:r>
-              <a:t>2.1. Stored XSS: Bản Chất Kỹ Thuật &amp; Sơ Đồ Luồng</a:t>
+              <a:t>2.1. Stored XSS — Lỗi Phát Tán Như Thế Nào &amp; Nguyên Nhân Gốc</a:t>
             </a:r>
           </a:p>
         </p:txBody>
@@ -9784,7 +9853,7 @@
               </a:defRPr>
             </a:pPr>
             <a:r>
-              <a:t>Kẻ tấn công ➔ Nhập mã độc JavaScript vào form đánh giá</a:t>
+              <a:t>Attacker ➔ Nhập mã JavaScript vào Form đánh giá</a:t>
             </a:r>
           </a:p>
           <a:p>
@@ -9820,7 +9889,7 @@
               </a:defRPr>
             </a:pPr>
             <a:r>
-              <a:t>Web Server ➔ Lưu nguyên văn mã độc vào Database (dbo.Comments)</a:t>
+              <a:t>Web Server ➔ Lưu nguyên văn mã độc vào CSDL (dbo.Comments)</a:t>
             </a:r>
           </a:p>
           <a:p>
@@ -9856,7 +9925,7 @@
               </a:defRPr>
             </a:pPr>
             <a:r>
-              <a:t>Nạn nhân truy cập trang ➔ Trình duyệt tự động thực thi script độc hại</a:t>
+              <a:t>Victim Browser ➔ Tải trang, tự động biên dịch &amp; thực thi script</a:t>
             </a:r>
           </a:p>
           <a:p>
@@ -9873,11 +9942,11 @@
               </a:defRPr>
             </a:pPr>
             <a:r>
-              <a:t>Đặc điểm kỹ thuật:</a:t>
-            </a:r>
-            <a:br/>
-            <a:r>
-              <a:t>Stored XSS là dạng XSS lưu trữ: mã độc được lưu trên máy chủ CSDL và có thể được kích hoạt tự động mỗi khi người dùng khác truy cập trang nội dung bị nhiễm.</a:t>
+              <a:t>📌 ROOT CAUSE (Nguyên nhân cốt lõi):</a:t>
+            </a:r>
+            <a:br/>
+            <a:r>
+              <a:t>Dữ liệu người dùng không tin cậy được render trực tiếp ra trình duyệt mà không qua cơ chế mã hóa đầu ra (Output Encoding).</a:t>
             </a:r>
           </a:p>
         </p:txBody>
@@ -9924,7 +9993,7 @@
           <a:lstStyle/>
           <a:p>
             <a:pPr algn="ctr">
-              <a:defRPr sz="1500" b="1">
+              <a:defRPr sz="1400" b="1">
                 <a:solidFill>
                   <a:srgbClr val="BE123C"/>
                 </a:solidFill>
@@ -9932,7 +10001,7 @@
               </a:defRPr>
             </a:pPr>
             <a:r>
-              <a:t>Nguyên Nhân: Sự Lạm Dụng @@Html.Raw()</a:t>
+              <a:t>🔴 VULNERABLE: SỰ LẠM DỤNG @Html.Raw()</a:t>
             </a:r>
           </a:p>
           <a:p>
@@ -9948,7 +10017,7 @@
               </a:defRPr>
             </a:pPr>
             <a:r>
-              <a:t>// 1. CONTROLLER LƯU NGUYÊN VĂN NỘI DUNG VÀO CSDL:</a:t>
+              <a:t>// CONTROLLER LƯU NGUYÊN VĂN NỘI DUNG VÀO CSDL:</a:t>
             </a:r>
             <a:br/>
             <a:r>
@@ -9973,7 +10042,7 @@
             <a:br/>
             <a:br/>
             <a:r>
-              <a:t>// 2. RAZOR VIEW HIỂN THỊ DỮ LIỆU THÔ BẰNG HTML.RAW:</a:t>
+              <a:t>// RAZOR VIEW HIỂN THỊ DỮ LIỆU THÔ BẰNG HTML.RAW:</a:t>
             </a:r>
             <a:br/>
             <a:r>
@@ -10005,7 +10074,7 @@
             </a:r>
             <a:br/>
             <a:r>
-              <a:t>@Html.Raw() vô hiệu hóa hoàn toàn cơ chế mã hóa HTML tự động của Razor Engine, ép trình duyệt phải biên dịch và thực thi chuỗi dữ liệu như mã lệnh.</a:t>
+              <a:t>@Html.Raw() vô hiệu hóa tính năng tự động mã hóa HTML của Razor View, mở toang cửa cho script độc hại chạy trên máy người dùng.</a:t>
             </a:r>
           </a:p>
         </p:txBody>
@@ -10157,7 +10226,7 @@
               </a:defRPr>
             </a:pPr>
             <a:r>
-              <a:t>2.2. Stored XSS: 3 Kịch Bản Tiêm Mã Độc Thực Nghiệm</a:t>
+              <a:t>2.2. Stored XSS — 3 Kịch Bản Tiêm Mã Độc Thực Nghiệm</a:t>
             </a:r>
           </a:p>
         </p:txBody>
@@ -10198,426 +10267,231 @@
           </a:p>
         </p:txBody>
       </p:sp>
-      <p:graphicFrame>
-        <p:nvGraphicFramePr>
-          <p:cNvPr id="6" name="Table 5"/>
-          <p:cNvGraphicFramePr>
-            <a:graphicFrameLocks noGrp="1"/>
-          </p:cNvGraphicFramePr>
-          <p:nvPr/>
-        </p:nvGraphicFramePr>
-        <p:xfrm>
-          <a:off x="731520" y="1280160"/>
-          <a:ext cx="10728655" cy="4846320"/>
-        </p:xfrm>
-        <a:graphic>
-          <a:graphicData uri="http://schemas.openxmlformats.org/drawingml/2006/table">
-            <a:tbl>
-              <a:tblPr firstRow="1" bandRow="1">
-                <a:tableStyleId>{5C22544A-7EE6-4342-B048-85BDC9FD1C3A}</a:tableStyleId>
-              </a:tblPr>
-              <a:tblGrid>
-                <a:gridCol w="2682163"/>
-                <a:gridCol w="2682163"/>
-                <a:gridCol w="2682163"/>
-                <a:gridCol w="2682166"/>
-              </a:tblGrid>
-              <a:tr h="1211580">
-                <a:tc>
-                  <a:txBody>
-                    <a:bodyPr/>
-                    <a:lstStyle/>
-                    <a:p>
-                      <a:pPr>
-                        <a:defRPr b="1" sz="1100">
-                          <a:solidFill>
-                            <a:srgbClr val="FFFFFF"/>
-                          </a:solidFill>
-                          <a:latin typeface="Arial"/>
-                        </a:defRPr>
-                      </a:pPr>
-                      <a:r>
-                        <a:t>Kịch bản kiểm thử</a:t>
-                      </a:r>
-                    </a:p>
-                  </a:txBody>
-                  <a:tcPr>
-                    <a:solidFill>
-                      <a:srgbClr val="BE123C"/>
-                    </a:solidFill>
-                  </a:tcPr>
-                </a:tc>
-                <a:tc>
-                  <a:txBody>
-                    <a:bodyPr/>
-                    <a:lstStyle/>
-                    <a:p>
-                      <a:pPr>
-                        <a:defRPr b="1" sz="1100">
-                          <a:solidFill>
-                            <a:srgbClr val="FFFFFF"/>
-                          </a:solidFill>
-                          <a:latin typeface="Arial"/>
-                        </a:defRPr>
-                      </a:pPr>
-                      <a:r>
-                        <a:t>Mã độc Payload đưa vào</a:t>
-                      </a:r>
-                    </a:p>
-                  </a:txBody>
-                  <a:tcPr>
-                    <a:solidFill>
-                      <a:srgbClr val="BE123C"/>
-                    </a:solidFill>
-                  </a:tcPr>
-                </a:tc>
-                <a:tc>
-                  <a:txBody>
-                    <a:bodyPr/>
-                    <a:lstStyle/>
-                    <a:p>
-                      <a:pPr>
-                        <a:defRPr b="1" sz="1100">
-                          <a:solidFill>
-                            <a:srgbClr val="FFFFFF"/>
-                          </a:solidFill>
-                          <a:latin typeface="Arial"/>
-                        </a:defRPr>
-                      </a:pPr>
-                      <a:r>
-                        <a:t>Cơ chế kích hoạt trên Trình duyệt</a:t>
-                      </a:r>
-                    </a:p>
-                  </a:txBody>
-                  <a:tcPr>
-                    <a:solidFill>
-                      <a:srgbClr val="BE123C"/>
-                    </a:solidFill>
-                  </a:tcPr>
-                </a:tc>
-                <a:tc>
-                  <a:txBody>
-                    <a:bodyPr/>
-                    <a:lstStyle/>
-                    <a:p>
-                      <a:pPr>
-                        <a:defRPr b="1" sz="1100">
-                          <a:solidFill>
-                            <a:srgbClr val="FFFFFF"/>
-                          </a:solidFill>
-                          <a:latin typeface="Arial"/>
-                        </a:defRPr>
-                      </a:pPr>
-                      <a:r>
-                        <a:t>Mục tiêu khai thác</a:t>
-                      </a:r>
-                    </a:p>
-                  </a:txBody>
-                  <a:tcPr>
-                    <a:solidFill>
-                      <a:srgbClr val="BE123C"/>
-                    </a:solidFill>
-                  </a:tcPr>
-                </a:tc>
-              </a:tr>
-              <a:tr h="1211580">
-                <a:tc>
-                  <a:txBody>
-                    <a:bodyPr/>
-                    <a:lstStyle/>
-                    <a:p>
-                      <a:pPr>
-                        <a:defRPr sz="1100">
-                          <a:solidFill>
-                            <a:srgbClr val="0F172A"/>
-                          </a:solidFill>
-                          <a:latin typeface="Arial"/>
-                        </a:defRPr>
-                      </a:pPr>
-                      <a:r>
-                        <a:t>Kịch bản 1: Đánh cắp Cookie</a:t>
-                      </a:r>
-                    </a:p>
-                  </a:txBody>
-                  <a:tcPr>
-                    <a:solidFill>
-                      <a:srgbClr val="F8FAFC"/>
-                    </a:solidFill>
-                  </a:tcPr>
-                </a:tc>
-                <a:tc>
-                  <a:txBody>
-                    <a:bodyPr/>
-                    <a:lstStyle/>
-                    <a:p>
-                      <a:pPr>
-                        <a:defRPr sz="1100" b="1">
-                          <a:solidFill>
-                            <a:srgbClr val="BE123C"/>
-                          </a:solidFill>
-                          <a:latin typeface="Courier New"/>
-                        </a:defRPr>
-                      </a:pPr>
-                      <a:r>
-                        <a:t>&lt;script&gt;alert(document.cookie);&lt;/script&gt;</a:t>
-                      </a:r>
-                    </a:p>
-                  </a:txBody>
-                  <a:tcPr>
-                    <a:solidFill>
-                      <a:srgbClr val="F8FAFC"/>
-                    </a:solidFill>
-                  </a:tcPr>
-                </a:tc>
-                <a:tc>
-                  <a:txBody>
-                    <a:bodyPr/>
-                    <a:lstStyle/>
-                    <a:p>
-                      <a:pPr>
-                        <a:defRPr sz="1100">
-                          <a:solidFill>
-                            <a:srgbClr val="334155"/>
-                          </a:solidFill>
-                          <a:latin typeface="Arial"/>
-                        </a:defRPr>
-                      </a:pPr>
-                      <a:r>
-                        <a:t>Trình duyệt thực thi thẻ &lt;script&gt; và đọc toàn bộ giá trị lưu trong document.cookie.</a:t>
-                      </a:r>
-                    </a:p>
-                  </a:txBody>
-                  <a:tcPr>
-                    <a:solidFill>
-                      <a:srgbClr val="F8FAFC"/>
-                    </a:solidFill>
-                  </a:tcPr>
-                </a:tc>
-                <a:tc>
-                  <a:txBody>
-                    <a:bodyPr/>
-                    <a:lstStyle/>
-                    <a:p>
-                      <a:pPr>
-                        <a:defRPr sz="1100">
-                          <a:solidFill>
-                            <a:srgbClr val="334155"/>
-                          </a:solidFill>
-                          <a:latin typeface="Arial"/>
-                        </a:defRPr>
-                      </a:pPr>
-                      <a:r>
-                        <a:t>Chiếm đoạt Session Token (Cookie Stealing) để mạo danh phiên làm việc.</a:t>
-                      </a:r>
-                    </a:p>
-                  </a:txBody>
-                  <a:tcPr>
-                    <a:solidFill>
-                      <a:srgbClr val="F8FAFC"/>
-                    </a:solidFill>
-                  </a:tcPr>
-                </a:tc>
-              </a:tr>
-              <a:tr h="1211580">
-                <a:tc>
-                  <a:txBody>
-                    <a:bodyPr/>
-                    <a:lstStyle/>
-                    <a:p>
-                      <a:pPr>
-                        <a:defRPr sz="1100">
-                          <a:solidFill>
-                            <a:srgbClr val="0F172A"/>
-                          </a:solidFill>
-                          <a:latin typeface="Arial"/>
-                        </a:defRPr>
-                      </a:pPr>
-                      <a:r>
-                        <a:t>Kịch bản 2: Bypass qua thẻ &lt;img&gt;</a:t>
-                      </a:r>
-                    </a:p>
-                  </a:txBody>
-                  <a:tcPr>
-                    <a:solidFill>
-                      <a:srgbClr val="FFFFFF"/>
-                    </a:solidFill>
-                  </a:tcPr>
-                </a:tc>
-                <a:tc>
-                  <a:txBody>
-                    <a:bodyPr/>
-                    <a:lstStyle/>
-                    <a:p>
-                      <a:pPr>
-                        <a:defRPr sz="1100" b="1">
-                          <a:solidFill>
-                            <a:srgbClr val="BE123C"/>
-                          </a:solidFill>
-                          <a:latin typeface="Courier New"/>
-                        </a:defRPr>
-                      </a:pPr>
-                      <a:r>
-                        <a:t>&lt;img src=x onerror=alert('XSS!')&gt;</a:t>
-                      </a:r>
-                    </a:p>
-                  </a:txBody>
-                  <a:tcPr>
-                    <a:solidFill>
-                      <a:srgbClr val="FFFFFF"/>
-                    </a:solidFill>
-                  </a:tcPr>
-                </a:tc>
-                <a:tc>
-                  <a:txBody>
-                    <a:bodyPr/>
-                    <a:lstStyle/>
-                    <a:p>
-                      <a:pPr>
-                        <a:defRPr sz="1100">
-                          <a:solidFill>
-                            <a:srgbClr val="334155"/>
-                          </a:solidFill>
-                          <a:latin typeface="Arial"/>
-                        </a:defRPr>
-                      </a:pPr>
-                      <a:r>
-                        <a:t>Khi đường dẫn ảnh bị lỗi (src=x), trình duyệt lập tức kích hoạt sự kiện onerror.</a:t>
-                      </a:r>
-                    </a:p>
-                  </a:txBody>
-                  <a:tcPr>
-                    <a:solidFill>
-                      <a:srgbClr val="FFFFFF"/>
-                    </a:solidFill>
-                  </a:tcPr>
-                </a:tc>
-                <a:tc>
-                  <a:txBody>
-                    <a:bodyPr/>
-                    <a:lstStyle/>
-                    <a:p>
-                      <a:pPr>
-                        <a:defRPr sz="1100">
-                          <a:solidFill>
-                            <a:srgbClr val="334155"/>
-                          </a:solidFill>
-                          <a:latin typeface="Arial"/>
-                        </a:defRPr>
-                      </a:pPr>
-                      <a:r>
-                        <a:t>Vượt qua các bộ lọc từ khóa đơn giản chỉ chặn chuỗi '&lt;script&gt;'.</a:t>
-                      </a:r>
-                    </a:p>
-                  </a:txBody>
-                  <a:tcPr>
-                    <a:solidFill>
-                      <a:srgbClr val="FFFFFF"/>
-                    </a:solidFill>
-                  </a:tcPr>
-                </a:tc>
-              </a:tr>
-              <a:tr h="1211580">
-                <a:tc>
-                  <a:txBody>
-                    <a:bodyPr/>
-                    <a:lstStyle/>
-                    <a:p>
-                      <a:pPr>
-                        <a:defRPr sz="1100">
-                          <a:solidFill>
-                            <a:srgbClr val="0F172A"/>
-                          </a:solidFill>
-                          <a:latin typeface="Arial"/>
-                        </a:defRPr>
-                      </a:pPr>
-                      <a:r>
-                        <a:t>Kịch bản chuẩn: Đánh giá hợp lệ</a:t>
-                      </a:r>
-                    </a:p>
-                  </a:txBody>
-                  <a:tcPr>
-                    <a:solidFill>
-                      <a:srgbClr val="F8FAFC"/>
-                    </a:solidFill>
-                  </a:tcPr>
-                </a:tc>
-                <a:tc>
-                  <a:txBody>
-                    <a:bodyPr/>
-                    <a:lstStyle/>
-                    <a:p>
-                      <a:pPr>
-                        <a:defRPr sz="1100" b="1">
-                          <a:solidFill>
-                            <a:srgbClr val="047857"/>
-                          </a:solidFill>
-                          <a:latin typeface="Courier New"/>
-                        </a:defRPr>
-                      </a:pPr>
-                      <a:r>
-                        <a:t>Dịch vụ tư vấn rất chuyên nghiệp, 5 sao!</a:t>
-                      </a:r>
-                    </a:p>
-                  </a:txBody>
-                  <a:tcPr>
-                    <a:solidFill>
-                      <a:srgbClr val="F8FAFC"/>
-                    </a:solidFill>
-                  </a:tcPr>
-                </a:tc>
-                <a:tc>
-                  <a:txBody>
-                    <a:bodyPr/>
-                    <a:lstStyle/>
-                    <a:p>
-                      <a:pPr>
-                        <a:defRPr sz="1100">
-                          <a:solidFill>
-                            <a:srgbClr val="334155"/>
-                          </a:solidFill>
-                          <a:latin typeface="Arial"/>
-                        </a:defRPr>
-                      </a:pPr>
-                      <a:r>
-                        <a:t>Văn bản thuần túy không chứa thẻ HTML hay kịch bản đặc biệt.</a:t>
-                      </a:r>
-                    </a:p>
-                  </a:txBody>
-                  <a:tcPr>
-                    <a:solidFill>
-                      <a:srgbClr val="F8FAFC"/>
-                    </a:solidFill>
-                  </a:tcPr>
-                </a:tc>
-                <a:tc>
-                  <a:txBody>
-                    <a:bodyPr/>
-                    <a:lstStyle/>
-                    <a:p>
-                      <a:pPr>
-                        <a:defRPr sz="1100">
-                          <a:solidFill>
-                            <a:srgbClr val="334155"/>
-                          </a:solidFill>
-                          <a:latin typeface="Arial"/>
-                        </a:defRPr>
-                      </a:pPr>
-                      <a:r>
-                        <a:t>Hiển thị bình thường trên cả 2 nhánh (Lỗi &amp; Đã phòng thủ).</a:t>
-                      </a:r>
-                    </a:p>
-                  </a:txBody>
-                  <a:tcPr>
-                    <a:solidFill>
-                      <a:srgbClr val="F8FAFC"/>
-                    </a:solidFill>
-                  </a:tcPr>
-                </a:tc>
-              </a:tr>
-            </a:tbl>
-          </a:graphicData>
-        </a:graphic>
-      </p:graphicFrame>
+      <p:sp>
+        <p:nvSpPr>
+          <p:cNvPr id="6" name="Rounded Rectangle 5"/>
+          <p:cNvSpPr/>
+          <p:nvPr/>
+        </p:nvSpPr>
+        <p:spPr>
+          <a:xfrm>
+            <a:off x="731520" y="1280160"/>
+            <a:ext cx="10728655" cy="1463040"/>
+          </a:xfrm>
+          <a:prstGeom prst="roundRect">
+            <a:avLst/>
+          </a:prstGeom>
+          <a:solidFill>
+            <a:srgbClr val="FFF1F2"/>
+          </a:solidFill>
+          <a:ln>
+            <a:solidFill>
+              <a:srgbClr val="FECDD3"/>
+            </a:solidFill>
+          </a:ln>
+        </p:spPr>
+        <p:style>
+          <a:lnRef idx="1">
+            <a:schemeClr val="accent1"/>
+          </a:lnRef>
+          <a:fillRef idx="3">
+            <a:schemeClr val="accent1"/>
+          </a:fillRef>
+          <a:effectRef idx="2">
+            <a:schemeClr val="accent1"/>
+          </a:effectRef>
+          <a:fontRef idx="minor">
+            <a:schemeClr val="lt1"/>
+          </a:fontRef>
+        </p:style>
+        <p:txBody>
+          <a:bodyPr rtlCol="0" anchor="ctr"/>
+          <a:lstStyle/>
+          <a:p>
+            <a:pPr algn="ctr">
+              <a:defRPr sz="1300" b="1">
+                <a:solidFill>
+                  <a:srgbClr val="BE123C"/>
+                </a:solidFill>
+                <a:latin typeface="Arial"/>
+              </a:defRPr>
+            </a:pPr>
+            <a:r>
+              <a:t>01 — ĐÁNH CẮP COOKIE / SESSION: &lt;script&gt;alert(document.cookie);&lt;/script&gt;</a:t>
+            </a:r>
+          </a:p>
+          <a:p>
+            <a:pPr>
+              <a:spcBef>
+                <a:spcPts val="400"/>
+              </a:spcBef>
+              <a:defRPr sz="1150" b="0">
+                <a:solidFill>
+                  <a:srgbClr val="334155"/>
+                </a:solidFill>
+                <a:latin typeface="Arial"/>
+              </a:defRPr>
+            </a:pPr>
+            <a:r>
+              <a:t>• Cơ chế: Trình duyệt thực thi thẻ &lt;script&gt; và đọc toàn bộ giá trị lưu trong thuộc tính document.cookie.</a:t>
+            </a:r>
+            <a:br/>
+            <a:r>
+              <a:t>• Hậu quả: Hacker chiếm đoạt Session Token (Cookie Stealing) để đăng nhập mạo danh người dùng hợp lệ.</a:t>
+            </a:r>
+          </a:p>
+        </p:txBody>
+      </p:sp>
+      <p:sp>
+        <p:nvSpPr>
+          <p:cNvPr id="7" name="Rounded Rectangle 6"/>
+          <p:cNvSpPr/>
+          <p:nvPr/>
+        </p:nvSpPr>
+        <p:spPr>
+          <a:xfrm>
+            <a:off x="731520" y="2926080"/>
+            <a:ext cx="10728655" cy="1463040"/>
+          </a:xfrm>
+          <a:prstGeom prst="roundRect">
+            <a:avLst/>
+          </a:prstGeom>
+          <a:solidFill>
+            <a:srgbClr val="FFFBEB"/>
+          </a:solidFill>
+          <a:ln>
+            <a:solidFill>
+              <a:srgbClr val="FEF08A"/>
+            </a:solidFill>
+          </a:ln>
+        </p:spPr>
+        <p:style>
+          <a:lnRef idx="1">
+            <a:schemeClr val="accent1"/>
+          </a:lnRef>
+          <a:fillRef idx="3">
+            <a:schemeClr val="accent1"/>
+          </a:fillRef>
+          <a:effectRef idx="2">
+            <a:schemeClr val="accent1"/>
+          </a:effectRef>
+          <a:fontRef idx="minor">
+            <a:schemeClr val="lt1"/>
+          </a:fontRef>
+        </p:style>
+        <p:txBody>
+          <a:bodyPr rtlCol="0" anchor="ctr"/>
+          <a:lstStyle/>
+          <a:p>
+            <a:pPr algn="ctr">
+              <a:defRPr sz="1300" b="1">
+                <a:solidFill>
+                  <a:srgbClr val="B45309"/>
+                </a:solidFill>
+                <a:latin typeface="Arial"/>
+              </a:defRPr>
+            </a:pPr>
+            <a:r>
+              <a:t>02 — BYPASS BỘ LỌC QUA EVENT HANDLER: &lt;img src=x onerror=alert('XSS!')&gt;</a:t>
+            </a:r>
+          </a:p>
+          <a:p>
+            <a:pPr>
+              <a:spcBef>
+                <a:spcPts val="400"/>
+              </a:spcBef>
+              <a:defRPr sz="1150" b="0">
+                <a:solidFill>
+                  <a:srgbClr val="334155"/>
+                </a:solidFill>
+                <a:latin typeface="Arial"/>
+              </a:defRPr>
+            </a:pPr>
+            <a:r>
+              <a:t>• Cơ chế: Khi đường dẫn ảnh bị lỗi (src=x), trình duyệt lập tức kích hoạt sự kiện onerror để chạy mã JavaScript.</a:t>
+            </a:r>
+            <a:br/>
+            <a:r>
+              <a:t>• Mục tiêu: Vượt qua các bộ lọc từ khóa đơn giản chỉ chặn chuỗi '&lt;script&gt;'.</a:t>
+            </a:r>
+          </a:p>
+        </p:txBody>
+      </p:sp>
+      <p:sp>
+        <p:nvSpPr>
+          <p:cNvPr id="8" name="Rounded Rectangle 7"/>
+          <p:cNvSpPr/>
+          <p:nvPr/>
+        </p:nvSpPr>
+        <p:spPr>
+          <a:xfrm>
+            <a:off x="731520" y="4572000"/>
+            <a:ext cx="10728655" cy="1463040"/>
+          </a:xfrm>
+          <a:prstGeom prst="roundRect">
+            <a:avLst/>
+          </a:prstGeom>
+          <a:solidFill>
+            <a:srgbClr val="F8FAFC"/>
+          </a:solidFill>
+          <a:ln>
+            <a:solidFill>
+              <a:srgbClr val="E2E8F0"/>
+            </a:solidFill>
+          </a:ln>
+        </p:spPr>
+        <p:style>
+          <a:lnRef idx="1">
+            <a:schemeClr val="accent1"/>
+          </a:lnRef>
+          <a:fillRef idx="3">
+            <a:schemeClr val="accent1"/>
+          </a:fillRef>
+          <a:effectRef idx="2">
+            <a:schemeClr val="accent1"/>
+          </a:effectRef>
+          <a:fontRef idx="minor">
+            <a:schemeClr val="lt1"/>
+          </a:fontRef>
+        </p:style>
+        <p:txBody>
+          <a:bodyPr rtlCol="0" anchor="ctr"/>
+          <a:lstStyle/>
+          <a:p>
+            <a:pPr algn="ctr">
+              <a:defRPr sz="1300" b="1">
+                <a:solidFill>
+                  <a:srgbClr val="1D4ED8"/>
+                </a:solidFill>
+                <a:latin typeface="Arial"/>
+              </a:defRPr>
+            </a:pPr>
+            <a:r>
+              <a:t>03 — ĐÁNH GIÁ CHUẨN HỢP LỆ: Dịch vụ tư vấn rất chuyên nghiệp, 5 sao!</a:t>
+            </a:r>
+          </a:p>
+          <a:p>
+            <a:pPr>
+              <a:spcBef>
+                <a:spcPts val="400"/>
+              </a:spcBef>
+              <a:defRPr sz="1150" b="0">
+                <a:solidFill>
+                  <a:srgbClr val="334155"/>
+                </a:solidFill>
+                <a:latin typeface="Arial"/>
+              </a:defRPr>
+            </a:pPr>
+            <a:r>
+              <a:t>• Cơ chế: Văn bản thuần túy không chứa thẻ HTML hay kịch bản đặc biệt.</a:t>
+            </a:r>
+            <a:br/>
+            <a:r>
+              <a:t>• Kết quả đối chứng: Hiển thị an toàn trên cả 2 nhánh (Lỗi &amp; Đã phòng thủ).</a:t>
+            </a:r>
+          </a:p>
+        </p:txBody>
+      </p:sp>
     </p:spTree>
   </p:cSld>
   <p:clrMapOvr>
